--- a/outputs/12_中期路演.pptx
+++ b/outputs/12_中期路演.pptx
@@ -4541,7 +4541,7 @@
               <a:defRPr sz="1500"/>
             </a:pPr>
             <a:r>
-              <a:t>固定止盈+9%：无偏回测 -2.75%，最大回撤 -16.93%。</a:t>
+              <a:t>固定止盈+9%：无偏回测 15.45%，最大回撤 -10.71%。</a:t>
             </a:r>
           </a:p>
           <a:p>
@@ -4549,7 +4549,7 @@
               <a:defRPr sz="1500"/>
             </a:pPr>
             <a:r>
-              <a:t>移动止损（回撤12%）：无偏回测 20.76%，最大回撤 -12.54%。</a:t>
+              <a:t>移动止损（回撤12%）：无偏回测 33.40%，最大回撤 -11.58%。</a:t>
             </a:r>
           </a:p>
           <a:p>
@@ -4557,7 +4557,7 @@
               <a:defRPr sz="1500"/>
             </a:pPr>
             <a:r>
-              <a:t>交易笔数由 110 笔降到 64 笔——换手越低、费用损耗越小。</a:t>
+              <a:t>交易笔数由 106 笔降到 61 笔——换手越低、费用损耗越小。</a:t>
             </a:r>
           </a:p>
           <a:p>
@@ -4565,7 +4565,7 @@
               <a:defRPr sz="1500"/>
             </a:pPr>
             <a:r>
-              <a:t>前视偏差检验：打乱基本面分数后收益由 +52.8% 降至 +3.5%，因此只信无偏对照。</a:t>
+              <a:t>前视偏差检验：用“今天的财务数据”回测过去会产生前视偏差：打乱基本面分数后收益从 51.92% 掉到 8.69%，而基本面统一为中性60分的口径为 9.88%，因此正式结论以中性口径的无偏对照为准。</a:t>
             </a:r>
           </a:p>
         </p:txBody>

--- a/outputs/12_中期路演.pptx
+++ b/outputs/12_中期路演.pptx
@@ -3167,7 +3167,7 @@
               <a:defRPr sz="1500"/>
             </a:pPr>
             <a:r>
-              <a:t>数据截止：2026-09-11</a:t>
+              <a:t>数据截止：2026-09-14</a:t>
             </a:r>
           </a:p>
         </p:txBody>
@@ -3255,7 +3255,7 @@
               <a:defRPr sz="1500"/>
             </a:pPr>
             <a:r>
-              <a:t>当前总资产：490.39万元</a:t>
+              <a:t>当前总资产：488.77万元</a:t>
             </a:r>
           </a:p>
           <a:p>
@@ -3263,7 +3263,7 @@
               <a:defRPr sz="1500"/>
             </a:pPr>
             <a:r>
-              <a:t>累计收益率：-1.92%</a:t>
+              <a:t>累计收益率：-2.25%</a:t>
             </a:r>
           </a:p>
           <a:p>
@@ -3271,7 +3271,7 @@
               <a:defRPr sz="1500"/>
             </a:pPr>
             <a:r>
-              <a:t>同期沪深300：-0.83%</a:t>
+              <a:t>同期沪深300：-1.49%</a:t>
             </a:r>
           </a:p>
           <a:p>
@@ -3279,7 +3279,7 @@
               <a:defRPr sz="1500"/>
             </a:pPr>
             <a:r>
-              <a:t>现金：106.83万元（21.8%）</a:t>
+              <a:t>现金：106.83万元（21.9%）</a:t>
             </a:r>
           </a:p>
           <a:p>
@@ -3821,7 +3821,7 @@
                         <a:defRPr sz="1100"/>
                       </a:pPr>
                       <a:r>
-                        <a:t>4.579</a:t>
+                        <a:t>4.552</a:t>
                       </a:r>
                     </a:p>
                   </a:txBody>
@@ -3836,7 +3836,7 @@
                         <a:defRPr sz="1100"/>
                       </a:pPr>
                       <a:r>
-                        <a:t>118.55</a:t>
+                        <a:t>117.85</a:t>
                       </a:r>
                     </a:p>
                   </a:txBody>
@@ -3851,7 +3851,7 @@
                         <a:defRPr sz="1100"/>
                       </a:pPr>
                       <a:r>
-                        <a:t>-1.61</a:t>
+                        <a:t>-2.3</a:t>
                       </a:r>
                     </a:p>
                   </a:txBody>
@@ -3913,7 +3913,7 @@
                         <a:defRPr sz="1100"/>
                       </a:pPr>
                       <a:r>
-                        <a:t>54.83</a:t>
+                        <a:t>54.73</a:t>
                       </a:r>
                     </a:p>
                   </a:txBody>
@@ -3928,7 +3928,7 @@
                         <a:defRPr sz="1100"/>
                       </a:pPr>
                       <a:r>
-                        <a:t>116.24</a:t>
+                        <a:t>116.03</a:t>
                       </a:r>
                     </a:p>
                   </a:txBody>
@@ -3943,7 +3943,7 @@
                         <a:defRPr sz="1100"/>
                       </a:pPr>
                       <a:r>
-                        <a:t>-2.73</a:t>
+                        <a:t>-2.95</a:t>
                       </a:r>
                     </a:p>
                   </a:txBody>
@@ -4005,7 +4005,7 @@
                         <a:defRPr sz="1100"/>
                       </a:pPr>
                       <a:r>
-                        <a:t>32.26</a:t>
+                        <a:t>32.25</a:t>
                       </a:r>
                     </a:p>
                   </a:txBody>
@@ -4020,7 +4020,7 @@
                         <a:defRPr sz="1100"/>
                       </a:pPr>
                       <a:r>
-                        <a:t>84.84</a:t>
+                        <a:t>84.82</a:t>
                       </a:r>
                     </a:p>
                   </a:txBody>
@@ -4035,7 +4035,7 @@
                         <a:defRPr sz="1100"/>
                       </a:pPr>
                       <a:r>
-                        <a:t>-4.38</a:t>
+                        <a:t>-4.41</a:t>
                       </a:r>
                     </a:p>
                   </a:txBody>
@@ -4097,7 +4097,7 @@
                         <a:defRPr sz="1100"/>
                       </a:pPr>
                       <a:r>
-                        <a:t>28.45</a:t>
+                        <a:t>28.63</a:t>
                       </a:r>
                     </a:p>
                   </a:txBody>
@@ -4112,7 +4112,7 @@
                         <a:defRPr sz="1100"/>
                       </a:pPr>
                       <a:r>
-                        <a:t>26.46</a:t>
+                        <a:t>26.63</a:t>
                       </a:r>
                     </a:p>
                   </a:txBody>
@@ -4127,7 +4127,7 @@
                         <a:defRPr sz="1100"/>
                       </a:pPr>
                       <a:r>
-                        <a:t>0.53</a:t>
+                        <a:t>0.69</a:t>
                       </a:r>
                     </a:p>
                   </a:txBody>
@@ -4189,7 +4189,7 @@
                         <a:defRPr sz="1100"/>
                       </a:pPr>
                       <a:r>
-                        <a:t>10.4</a:t>
+                        <a:t>10.32</a:t>
                       </a:r>
                     </a:p>
                   </a:txBody>
@@ -4204,7 +4204,7 @@
                         <a:defRPr sz="1100"/>
                       </a:pPr>
                       <a:r>
-                        <a:t>19.76</a:t>
+                        <a:t>19.61</a:t>
                       </a:r>
                     </a:p>
                   </a:txBody>
@@ -4219,7 +4219,7 @@
                         <a:defRPr sz="1100"/>
                       </a:pPr>
                       <a:r>
-                        <a:t>-0.14</a:t>
+                        <a:t>-0.29</a:t>
                       </a:r>
                     </a:p>
                   </a:txBody>
@@ -4281,7 +4281,7 @@
                         <a:defRPr sz="1100"/>
                       </a:pPr>
                       <a:r>
-                        <a:t>17.71</a:t>
+                        <a:t>17.01</a:t>
                       </a:r>
                     </a:p>
                   </a:txBody>
@@ -4296,7 +4296,7 @@
                         <a:defRPr sz="1100"/>
                       </a:pPr>
                       <a:r>
-                        <a:t>17.71</a:t>
+                        <a:t>17.01</a:t>
                       </a:r>
                     </a:p>
                   </a:txBody>
@@ -4311,7 +4311,7 @@
                         <a:defRPr sz="1100"/>
                       </a:pPr>
                       <a:r>
-                        <a:t>0.19</a:t>
+                        <a:t>-0.51</a:t>
                       </a:r>
                     </a:p>
                   </a:txBody>
@@ -4405,7 +4405,7 @@
               <a:defRPr sz="1500"/>
             </a:pPr>
             <a:r>
-              <a:t>宁德时代（300750，新能源电池）：综合70.5分；基本面优秀，具备中长期配置价值；趋势中性，观望。</a:t>
+              <a:t>长江电力（600900，电力）：综合74.0分；基本面优秀，具备中长期配置价值；中期趋势向上，可关注/持有。</a:t>
             </a:r>
           </a:p>
           <a:p>
@@ -4413,7 +4413,7 @@
               <a:defRPr sz="1500"/>
             </a:pPr>
             <a:r>
-              <a:t>长江电力（600900，电力）：综合69.0分；基本面优秀，具备中长期配置价值；中期趋势向上，可关注/持有。</a:t>
+              <a:t>宁德时代（300750，新能源电池）：综合70.5分；基本面优秀，具备中长期配置价值；趋势中性，观望。</a:t>
             </a:r>
           </a:p>
           <a:p>
@@ -4421,7 +4421,7 @@
               <a:defRPr sz="1500"/>
             </a:pPr>
             <a:r>
-              <a:t>美的集团（000333，家电）：综合67.5分；基本面优秀，具备中长期配置价值；中期趋势向上，可关注/持有。</a:t>
+              <a:t>招商银行（600036，银行）：综合69.0分；基本面优秀，具备中长期配置价值；中期趋势向上，可关注/持有。</a:t>
             </a:r>
           </a:p>
           <a:p>
@@ -4429,7 +4429,7 @@
               <a:defRPr sz="1500"/>
             </a:pPr>
             <a:r>
-              <a:t>招商银行（600036，银行）：综合67.0分；基本面优秀，具备中长期配置价值；中期趋势向上，可关注/持有。</a:t>
+              <a:t>中国平安（601318，保险）：综合69.0分；基本面优秀，具备中长期配置价值；趋势中性，观望。</a:t>
             </a:r>
           </a:p>
         </p:txBody>

--- a/outputs/12_中期路演.pptx
+++ b/outputs/12_中期路演.pptx
@@ -3255,7 +3255,7 @@
               <a:defRPr sz="1500"/>
             </a:pPr>
             <a:r>
-              <a:t>当前总资产：488.77万元</a:t>
+              <a:t>当前总资产：487.54万元</a:t>
             </a:r>
           </a:p>
           <a:p>
@@ -3263,7 +3263,7 @@
               <a:defRPr sz="1500"/>
             </a:pPr>
             <a:r>
-              <a:t>累计收益率：-2.25%</a:t>
+              <a:t>累计收益率：-2.49%</a:t>
             </a:r>
           </a:p>
           <a:p>
@@ -3279,7 +3279,7 @@
               <a:defRPr sz="1500"/>
             </a:pPr>
             <a:r>
-              <a:t>现金：106.83万元（21.9%）</a:t>
+              <a:t>现金：96.09万元（19.7%）</a:t>
             </a:r>
           </a:p>
           <a:p>
@@ -3287,7 +3287,7 @@
               <a:defRPr sz="1500"/>
             </a:pPr>
             <a:r>
-              <a:t>持仓：6只，累计交易15笔</a:t>
+              <a:t>持仓：11只，累计交易25笔</a:t>
             </a:r>
           </a:p>
         </p:txBody>
@@ -3582,7 +3582,7 @@
                 <a:gridCol w="1849069"/>
                 <a:gridCol w="1849070"/>
               </a:tblGrid>
-              <a:tr h="480060">
+              <a:tr h="295421">
                 <a:tc>
                   <a:txBody>
                     <a:bodyPr/>
@@ -3674,7 +3674,7 @@
                   <a:tcPr/>
                 </a:tc>
               </a:tr>
-              <a:tr h="480060">
+              <a:tr h="295421">
                 <a:tc>
                   <a:txBody>
                     <a:bodyPr/>
@@ -3766,7 +3766,7 @@
                   <a:tcPr/>
                 </a:tc>
               </a:tr>
-              <a:tr h="480060">
+              <a:tr h="295421">
                 <a:tc>
                   <a:txBody>
                     <a:bodyPr/>
@@ -3858,7 +3858,7 @@
                   <a:tcPr/>
                 </a:tc>
               </a:tr>
-              <a:tr h="480060">
+              <a:tr h="295421">
                 <a:tc>
                   <a:txBody>
                     <a:bodyPr/>
@@ -3950,7 +3950,7 @@
                   <a:tcPr/>
                 </a:tc>
               </a:tr>
-              <a:tr h="480060">
+              <a:tr h="295421">
                 <a:tc>
                   <a:txBody>
                     <a:bodyPr/>
@@ -3975,7 +3975,7 @@
                         <a:defRPr sz="1100"/>
                       </a:pPr>
                       <a:r>
-                        <a:t>26300</a:t>
+                        <a:t>19300</a:t>
                       </a:r>
                     </a:p>
                   </a:txBody>
@@ -4020,29 +4020,29 @@
                         <a:defRPr sz="1100"/>
                       </a:pPr>
                       <a:r>
-                        <a:t>84.82</a:t>
-                      </a:r>
-                    </a:p>
-                  </a:txBody>
-                  <a:tcPr/>
-                </a:tc>
-                <a:tc>
-                  <a:txBody>
-                    <a:bodyPr/>
-                    <a:lstStyle/>
-                    <a:p>
-                      <a:pPr>
-                        <a:defRPr sz="1100"/>
-                      </a:pPr>
-                      <a:r>
-                        <a:t>-4.41</a:t>
+                        <a:t>62.24</a:t>
+                      </a:r>
+                    </a:p>
+                  </a:txBody>
+                  <a:tcPr/>
+                </a:tc>
+                <a:tc>
+                  <a:txBody>
+                    <a:bodyPr/>
+                    <a:lstStyle/>
+                    <a:p>
+                      <a:pPr>
+                        <a:defRPr sz="1100"/>
+                      </a:pPr>
+                      <a:r>
+                        <a:t>-3.24</a:t>
                       </a:r>
                     </a:p>
                   </a:txBody>
                   <a:tcPr/>
                 </a:tc>
               </a:tr>
-              <a:tr h="480060">
+              <a:tr h="295421">
                 <a:tc>
                   <a:txBody>
                     <a:bodyPr/>
@@ -4134,7 +4134,7 @@
                   <a:tcPr/>
                 </a:tc>
               </a:tr>
-              <a:tr h="480060">
+              <a:tr h="295421">
                 <a:tc>
                   <a:txBody>
                     <a:bodyPr/>
@@ -4159,7 +4159,7 @@
                         <a:defRPr sz="1100"/>
                       </a:pPr>
                       <a:r>
-                        <a:t>19000</a:t>
+                        <a:t>9500</a:t>
                       </a:r>
                     </a:p>
                   </a:txBody>
@@ -4204,29 +4204,29 @@
                         <a:defRPr sz="1100"/>
                       </a:pPr>
                       <a:r>
-                        <a:t>19.61</a:t>
-                      </a:r>
-                    </a:p>
-                  </a:txBody>
-                  <a:tcPr/>
-                </a:tc>
-                <a:tc>
-                  <a:txBody>
-                    <a:bodyPr/>
-                    <a:lstStyle/>
-                    <a:p>
-                      <a:pPr>
-                        <a:defRPr sz="1100"/>
-                      </a:pPr>
-                      <a:r>
-                        <a:t>-0.29</a:t>
+                        <a:t>9.8</a:t>
+                      </a:r>
+                    </a:p>
+                  </a:txBody>
+                  <a:tcPr/>
+                </a:tc>
+                <a:tc>
+                  <a:txBody>
+                    <a:bodyPr/>
+                    <a:lstStyle/>
+                    <a:p>
+                      <a:pPr>
+                        <a:defRPr sz="1100"/>
+                      </a:pPr>
+                      <a:r>
+                        <a:t>-0.14</a:t>
                       </a:r>
                     </a:p>
                   </a:txBody>
                   <a:tcPr/>
                 </a:tc>
               </a:tr>
-              <a:tr h="480060">
+              <a:tr h="295421">
                 <a:tc>
                   <a:txBody>
                     <a:bodyPr/>
@@ -4251,7 +4251,7 @@
                         <a:defRPr sz="1100"/>
                       </a:pPr>
                       <a:r>
-                        <a:t>10000</a:t>
+                        <a:t>5000</a:t>
                       </a:r>
                     </a:p>
                   </a:txBody>
@@ -4296,22 +4296,482 @@
                         <a:defRPr sz="1100"/>
                       </a:pPr>
                       <a:r>
-                        <a:t>17.01</a:t>
-                      </a:r>
-                    </a:p>
-                  </a:txBody>
-                  <a:tcPr/>
-                </a:tc>
-                <a:tc>
-                  <a:txBody>
-                    <a:bodyPr/>
-                    <a:lstStyle/>
-                    <a:p>
-                      <a:pPr>
-                        <a:defRPr sz="1100"/>
-                      </a:pPr>
-                      <a:r>
-                        <a:t>-0.51</a:t>
+                        <a:t>8.51</a:t>
+                      </a:r>
+                    </a:p>
+                  </a:txBody>
+                  <a:tcPr/>
+                </a:tc>
+                <a:tc>
+                  <a:txBody>
+                    <a:bodyPr/>
+                    <a:lstStyle/>
+                    <a:p>
+                      <a:pPr>
+                        <a:defRPr sz="1100"/>
+                      </a:pPr>
+                      <a:r>
+                        <a:t>-0.25</a:t>
+                      </a:r>
+                    </a:p>
+                  </a:txBody>
+                  <a:tcPr/>
+                </a:tc>
+              </a:tr>
+              <a:tr h="295421">
+                <a:tc>
+                  <a:txBody>
+                    <a:bodyPr/>
+                    <a:lstStyle/>
+                    <a:p>
+                      <a:pPr>
+                        <a:defRPr sz="1100"/>
+                      </a:pPr>
+                      <a:r>
+                        <a:t>星网锐捷</a:t>
+                      </a:r>
+                    </a:p>
+                  </a:txBody>
+                  <a:tcPr/>
+                </a:tc>
+                <a:tc>
+                  <a:txBody>
+                    <a:bodyPr/>
+                    <a:lstStyle/>
+                    <a:p>
+                      <a:pPr>
+                        <a:defRPr sz="1100"/>
+                      </a:pPr>
+                      <a:r>
+                        <a:t>6100</a:t>
+                      </a:r>
+                    </a:p>
+                  </a:txBody>
+                  <a:tcPr/>
+                </a:tc>
+                <a:tc>
+                  <a:txBody>
+                    <a:bodyPr/>
+                    <a:lstStyle/>
+                    <a:p>
+                      <a:pPr>
+                        <a:defRPr sz="1100"/>
+                      </a:pPr>
+                      <a:r>
+                        <a:t>35.87</a:t>
+                      </a:r>
+                    </a:p>
+                  </a:txBody>
+                  <a:tcPr/>
+                </a:tc>
+                <a:tc>
+                  <a:txBody>
+                    <a:bodyPr/>
+                    <a:lstStyle/>
+                    <a:p>
+                      <a:pPr>
+                        <a:defRPr sz="1100"/>
+                      </a:pPr>
+                      <a:r>
+                        <a:t>34.82</a:t>
+                      </a:r>
+                    </a:p>
+                  </a:txBody>
+                  <a:tcPr/>
+                </a:tc>
+                <a:tc>
+                  <a:txBody>
+                    <a:bodyPr/>
+                    <a:lstStyle/>
+                    <a:p>
+                      <a:pPr>
+                        <a:defRPr sz="1100"/>
+                      </a:pPr>
+                      <a:r>
+                        <a:t>21.24</a:t>
+                      </a:r>
+                    </a:p>
+                  </a:txBody>
+                  <a:tcPr/>
+                </a:tc>
+                <a:tc>
+                  <a:txBody>
+                    <a:bodyPr/>
+                    <a:lstStyle/>
+                    <a:p>
+                      <a:pPr>
+                        <a:defRPr sz="1100"/>
+                      </a:pPr>
+                      <a:r>
+                        <a:t>-0.64</a:t>
+                      </a:r>
+                    </a:p>
+                  </a:txBody>
+                  <a:tcPr/>
+                </a:tc>
+              </a:tr>
+              <a:tr h="295421">
+                <a:tc>
+                  <a:txBody>
+                    <a:bodyPr/>
+                    <a:lstStyle/>
+                    <a:p>
+                      <a:pPr>
+                        <a:defRPr sz="1100"/>
+                      </a:pPr>
+                      <a:r>
+                        <a:t>深信服</a:t>
+                      </a:r>
+                    </a:p>
+                  </a:txBody>
+                  <a:tcPr/>
+                </a:tc>
+                <a:tc>
+                  <a:txBody>
+                    <a:bodyPr/>
+                    <a:lstStyle/>
+                    <a:p>
+                      <a:pPr>
+                        <a:defRPr sz="1100"/>
+                      </a:pPr>
+                      <a:r>
+                        <a:t>500</a:t>
+                      </a:r>
+                    </a:p>
+                  </a:txBody>
+                  <a:tcPr/>
+                </a:tc>
+                <a:tc>
+                  <a:txBody>
+                    <a:bodyPr/>
+                    <a:lstStyle/>
+                    <a:p>
+                      <a:pPr>
+                        <a:defRPr sz="1100"/>
+                      </a:pPr>
+                      <a:r>
+                        <a:t>136.73</a:t>
+                      </a:r>
+                    </a:p>
+                  </a:txBody>
+                  <a:tcPr/>
+                </a:tc>
+                <a:tc>
+                  <a:txBody>
+                    <a:bodyPr/>
+                    <a:lstStyle/>
+                    <a:p>
+                      <a:pPr>
+                        <a:defRPr sz="1100"/>
+                      </a:pPr>
+                      <a:r>
+                        <a:t>134.26</a:t>
+                      </a:r>
+                    </a:p>
+                  </a:txBody>
+                  <a:tcPr/>
+                </a:tc>
+                <a:tc>
+                  <a:txBody>
+                    <a:bodyPr/>
+                    <a:lstStyle/>
+                    <a:p>
+                      <a:pPr>
+                        <a:defRPr sz="1100"/>
+                      </a:pPr>
+                      <a:r>
+                        <a:t>6.71</a:t>
+                      </a:r>
+                    </a:p>
+                  </a:txBody>
+                  <a:tcPr/>
+                </a:tc>
+                <a:tc>
+                  <a:txBody>
+                    <a:bodyPr/>
+                    <a:lstStyle/>
+                    <a:p>
+                      <a:pPr>
+                        <a:defRPr sz="1100"/>
+                      </a:pPr>
+                      <a:r>
+                        <a:t>-0.12</a:t>
+                      </a:r>
+                    </a:p>
+                  </a:txBody>
+                  <a:tcPr/>
+                </a:tc>
+              </a:tr>
+              <a:tr h="295421">
+                <a:tc>
+                  <a:txBody>
+                    <a:bodyPr/>
+                    <a:lstStyle/>
+                    <a:p>
+                      <a:pPr>
+                        <a:defRPr sz="1100"/>
+                      </a:pPr>
+                      <a:r>
+                        <a:t>哈药股份</a:t>
+                      </a:r>
+                    </a:p>
+                  </a:txBody>
+                  <a:tcPr/>
+                </a:tc>
+                <a:tc>
+                  <a:txBody>
+                    <a:bodyPr/>
+                    <a:lstStyle/>
+                    <a:p>
+                      <a:pPr>
+                        <a:defRPr sz="1100"/>
+                      </a:pPr>
+                      <a:r>
+                        <a:t>5000</a:t>
+                      </a:r>
+                    </a:p>
+                  </a:txBody>
+                  <a:tcPr/>
+                </a:tc>
+                <a:tc>
+                  <a:txBody>
+                    <a:bodyPr/>
+                    <a:lstStyle/>
+                    <a:p>
+                      <a:pPr>
+                        <a:defRPr sz="1100"/>
+                      </a:pPr>
+                      <a:r>
+                        <a:t>7.33</a:t>
+                      </a:r>
+                    </a:p>
+                  </a:txBody>
+                  <a:tcPr/>
+                </a:tc>
+                <a:tc>
+                  <a:txBody>
+                    <a:bodyPr/>
+                    <a:lstStyle/>
+                    <a:p>
+                      <a:pPr>
+                        <a:defRPr sz="1100"/>
+                      </a:pPr>
+                      <a:r>
+                        <a:t>7.3</a:t>
+                      </a:r>
+                    </a:p>
+                  </a:txBody>
+                  <a:tcPr/>
+                </a:tc>
+                <a:tc>
+                  <a:txBody>
+                    <a:bodyPr/>
+                    <a:lstStyle/>
+                    <a:p>
+                      <a:pPr>
+                        <a:defRPr sz="1100"/>
+                      </a:pPr>
+                      <a:r>
+                        <a:t>3.65</a:t>
+                      </a:r>
+                    </a:p>
+                  </a:txBody>
+                  <a:tcPr/>
+                </a:tc>
+                <a:tc>
+                  <a:txBody>
+                    <a:bodyPr/>
+                    <a:lstStyle/>
+                    <a:p>
+                      <a:pPr>
+                        <a:defRPr sz="1100"/>
+                      </a:pPr>
+                      <a:r>
+                        <a:t>-0.02</a:t>
+                      </a:r>
+                    </a:p>
+                  </a:txBody>
+                  <a:tcPr/>
+                </a:tc>
+              </a:tr>
+              <a:tr h="295421">
+                <a:tc>
+                  <a:txBody>
+                    <a:bodyPr/>
+                    <a:lstStyle/>
+                    <a:p>
+                      <a:pPr>
+                        <a:defRPr sz="1100"/>
+                      </a:pPr>
+                      <a:r>
+                        <a:t>招商轮船</a:t>
+                      </a:r>
+                    </a:p>
+                  </a:txBody>
+                  <a:tcPr/>
+                </a:tc>
+                <a:tc>
+                  <a:txBody>
+                    <a:bodyPr/>
+                    <a:lstStyle/>
+                    <a:p>
+                      <a:pPr>
+                        <a:defRPr sz="1100"/>
+                      </a:pPr>
+                      <a:r>
+                        <a:t>500</a:t>
+                      </a:r>
+                    </a:p>
+                  </a:txBody>
+                  <a:tcPr/>
+                </a:tc>
+                <a:tc>
+                  <a:txBody>
+                    <a:bodyPr/>
+                    <a:lstStyle/>
+                    <a:p>
+                      <a:pPr>
+                        <a:defRPr sz="1100"/>
+                      </a:pPr>
+                      <a:r>
+                        <a:t>20.76</a:t>
+                      </a:r>
+                    </a:p>
+                  </a:txBody>
+                  <a:tcPr/>
+                </a:tc>
+                <a:tc>
+                  <a:txBody>
+                    <a:bodyPr/>
+                    <a:lstStyle/>
+                    <a:p>
+                      <a:pPr>
+                        <a:defRPr sz="1100"/>
+                      </a:pPr>
+                      <a:r>
+                        <a:t>20.0</a:t>
+                      </a:r>
+                    </a:p>
+                  </a:txBody>
+                  <a:tcPr/>
+                </a:tc>
+                <a:tc>
+                  <a:txBody>
+                    <a:bodyPr/>
+                    <a:lstStyle/>
+                    <a:p>
+                      <a:pPr>
+                        <a:defRPr sz="1100"/>
+                      </a:pPr>
+                      <a:r>
+                        <a:t>1.0</a:t>
+                      </a:r>
+                    </a:p>
+                  </a:txBody>
+                  <a:tcPr/>
+                </a:tc>
+                <a:tc>
+                  <a:txBody>
+                    <a:bodyPr/>
+                    <a:lstStyle/>
+                    <a:p>
+                      <a:pPr>
+                        <a:defRPr sz="1100"/>
+                      </a:pPr>
+                      <a:r>
+                        <a:t>-0.04</a:t>
+                      </a:r>
+                    </a:p>
+                  </a:txBody>
+                  <a:tcPr/>
+                </a:tc>
+              </a:tr>
+              <a:tr h="295428">
+                <a:tc>
+                  <a:txBody>
+                    <a:bodyPr/>
+                    <a:lstStyle/>
+                    <a:p>
+                      <a:pPr>
+                        <a:defRPr sz="1100"/>
+                      </a:pPr>
+                      <a:r>
+                        <a:t>睿创微纳</a:t>
+                      </a:r>
+                    </a:p>
+                  </a:txBody>
+                  <a:tcPr/>
+                </a:tc>
+                <a:tc>
+                  <a:txBody>
+                    <a:bodyPr/>
+                    <a:lstStyle/>
+                    <a:p>
+                      <a:pPr>
+                        <a:defRPr sz="1100"/>
+                      </a:pPr>
+                      <a:r>
+                        <a:t>1000</a:t>
+                      </a:r>
+                    </a:p>
+                  </a:txBody>
+                  <a:tcPr/>
+                </a:tc>
+                <a:tc>
+                  <a:txBody>
+                    <a:bodyPr/>
+                    <a:lstStyle/>
+                    <a:p>
+                      <a:pPr>
+                        <a:defRPr sz="1100"/>
+                      </a:pPr>
+                      <a:r>
+                        <a:t>177.58</a:t>
+                      </a:r>
+                    </a:p>
+                  </a:txBody>
+                  <a:tcPr/>
+                </a:tc>
+                <a:tc>
+                  <a:txBody>
+                    <a:bodyPr/>
+                    <a:lstStyle/>
+                    <a:p>
+                      <a:pPr>
+                        <a:defRPr sz="1100"/>
+                      </a:pPr>
+                      <a:r>
+                        <a:t>177.89</a:t>
+                      </a:r>
+                    </a:p>
+                  </a:txBody>
+                  <a:tcPr/>
+                </a:tc>
+                <a:tc>
+                  <a:txBody>
+                    <a:bodyPr/>
+                    <a:lstStyle/>
+                    <a:p>
+                      <a:pPr>
+                        <a:defRPr sz="1100"/>
+                      </a:pPr>
+                      <a:r>
+                        <a:t>17.79</a:t>
+                      </a:r>
+                    </a:p>
+                  </a:txBody>
+                  <a:tcPr/>
+                </a:tc>
+                <a:tc>
+                  <a:txBody>
+                    <a:bodyPr/>
+                    <a:lstStyle/>
+                    <a:p>
+                      <a:pPr>
+                        <a:defRPr sz="1100"/>
+                      </a:pPr>
+                      <a:r>
+                        <a:t>0.03</a:t>
                       </a:r>
                     </a:p>
                   </a:txBody>

--- a/outputs/12_中期路演.pptx
+++ b/outputs/12_中期路演.pptx
@@ -3167,7 +3167,7 @@
               <a:defRPr sz="1500"/>
             </a:pPr>
             <a:r>
-              <a:t>数据截止：2026-09-14</a:t>
+              <a:t>数据截止：2026-09-15</a:t>
             </a:r>
           </a:p>
         </p:txBody>
@@ -3255,7 +3255,7 @@
               <a:defRPr sz="1500"/>
             </a:pPr>
             <a:r>
-              <a:t>当前总资产：487.54万元</a:t>
+              <a:t>当前总资产：486.21万元</a:t>
             </a:r>
           </a:p>
           <a:p>
@@ -3263,7 +3263,7 @@
               <a:defRPr sz="1500"/>
             </a:pPr>
             <a:r>
-              <a:t>累计收益率：-2.49%</a:t>
+              <a:t>累计收益率：-2.76%</a:t>
             </a:r>
           </a:p>
           <a:p>
@@ -3271,7 +3271,7 @@
               <a:defRPr sz="1500"/>
             </a:pPr>
             <a:r>
-              <a:t>同期沪深300：-1.49%</a:t>
+              <a:t>同期沪深300：-1.51%</a:t>
             </a:r>
           </a:p>
           <a:p>
@@ -3279,7 +3279,7 @@
               <a:defRPr sz="1500"/>
             </a:pPr>
             <a:r>
-              <a:t>现金：96.09万元（19.7%）</a:t>
+              <a:t>现金：80.26万元（16.5%）</a:t>
             </a:r>
           </a:p>
           <a:p>
@@ -3287,7 +3287,7 @@
               <a:defRPr sz="1500"/>
             </a:pPr>
             <a:r>
-              <a:t>持仓：11只，累计交易25笔</a:t>
+              <a:t>持仓：12只，累计交易26笔</a:t>
             </a:r>
           </a:p>
         </p:txBody>
@@ -3582,7 +3582,7 @@
                 <a:gridCol w="1849069"/>
                 <a:gridCol w="1849070"/>
               </a:tblGrid>
-              <a:tr h="295421">
+              <a:tr h="274320">
                 <a:tc>
                   <a:txBody>
                     <a:bodyPr/>
@@ -3674,7 +3674,7 @@
                   <a:tcPr/>
                 </a:tc>
               </a:tr>
-              <a:tr h="295421">
+              <a:tr h="274320">
                 <a:tc>
                   <a:txBody>
                     <a:bodyPr/>
@@ -3766,7 +3766,7 @@
                   <a:tcPr/>
                 </a:tc>
               </a:tr>
-              <a:tr h="295421">
+              <a:tr h="274320">
                 <a:tc>
                   <a:txBody>
                     <a:bodyPr/>
@@ -3821,44 +3821,44 @@
                         <a:defRPr sz="1100"/>
                       </a:pPr>
                       <a:r>
-                        <a:t>4.552</a:t>
-                      </a:r>
-                    </a:p>
-                  </a:txBody>
-                  <a:tcPr/>
-                </a:tc>
-                <a:tc>
-                  <a:txBody>
-                    <a:bodyPr/>
-                    <a:lstStyle/>
-                    <a:p>
-                      <a:pPr>
-                        <a:defRPr sz="1100"/>
-                      </a:pPr>
-                      <a:r>
-                        <a:t>117.85</a:t>
-                      </a:r>
-                    </a:p>
-                  </a:txBody>
-                  <a:tcPr/>
-                </a:tc>
-                <a:tc>
-                  <a:txBody>
-                    <a:bodyPr/>
-                    <a:lstStyle/>
-                    <a:p>
-                      <a:pPr>
-                        <a:defRPr sz="1100"/>
-                      </a:pPr>
-                      <a:r>
-                        <a:t>-2.3</a:t>
+                        <a:t>4.547</a:t>
+                      </a:r>
+                    </a:p>
+                  </a:txBody>
+                  <a:tcPr/>
+                </a:tc>
+                <a:tc>
+                  <a:txBody>
+                    <a:bodyPr/>
+                    <a:lstStyle/>
+                    <a:p>
+                      <a:pPr>
+                        <a:defRPr sz="1100"/>
+                      </a:pPr>
+                      <a:r>
+                        <a:t>117.72</a:t>
+                      </a:r>
+                    </a:p>
+                  </a:txBody>
+                  <a:tcPr/>
+                </a:tc>
+                <a:tc>
+                  <a:txBody>
+                    <a:bodyPr/>
+                    <a:lstStyle/>
+                    <a:p>
+                      <a:pPr>
+                        <a:defRPr sz="1100"/>
+                      </a:pPr>
+                      <a:r>
+                        <a:t>-2.43</a:t>
                       </a:r>
                     </a:p>
                   </a:txBody>
                   <a:tcPr/>
                 </a:tc>
               </a:tr>
-              <a:tr h="295421">
+              <a:tr h="274320">
                 <a:tc>
                   <a:txBody>
                     <a:bodyPr/>
@@ -3913,44 +3913,44 @@
                         <a:defRPr sz="1100"/>
                       </a:pPr>
                       <a:r>
-                        <a:t>54.73</a:t>
-                      </a:r>
-                    </a:p>
-                  </a:txBody>
-                  <a:tcPr/>
-                </a:tc>
-                <a:tc>
-                  <a:txBody>
-                    <a:bodyPr/>
-                    <a:lstStyle/>
-                    <a:p>
-                      <a:pPr>
-                        <a:defRPr sz="1100"/>
-                      </a:pPr>
-                      <a:r>
-                        <a:t>116.03</a:t>
-                      </a:r>
-                    </a:p>
-                  </a:txBody>
-                  <a:tcPr/>
-                </a:tc>
-                <a:tc>
-                  <a:txBody>
-                    <a:bodyPr/>
-                    <a:lstStyle/>
-                    <a:p>
-                      <a:pPr>
-                        <a:defRPr sz="1100"/>
-                      </a:pPr>
-                      <a:r>
-                        <a:t>-2.95</a:t>
+                        <a:t>54.13</a:t>
+                      </a:r>
+                    </a:p>
+                  </a:txBody>
+                  <a:tcPr/>
+                </a:tc>
+                <a:tc>
+                  <a:txBody>
+                    <a:bodyPr/>
+                    <a:lstStyle/>
+                    <a:p>
+                      <a:pPr>
+                        <a:defRPr sz="1100"/>
+                      </a:pPr>
+                      <a:r>
+                        <a:t>114.76</a:t>
+                      </a:r>
+                    </a:p>
+                  </a:txBody>
+                  <a:tcPr/>
+                </a:tc>
+                <a:tc>
+                  <a:txBody>
+                    <a:bodyPr/>
+                    <a:lstStyle/>
+                    <a:p>
+                      <a:pPr>
+                        <a:defRPr sz="1100"/>
+                      </a:pPr>
+                      <a:r>
+                        <a:t>-4.22</a:t>
                       </a:r>
                     </a:p>
                   </a:txBody>
                   <a:tcPr/>
                 </a:tc>
               </a:tr>
-              <a:tr h="295421">
+              <a:tr h="274320">
                 <a:tc>
                   <a:txBody>
                     <a:bodyPr/>
@@ -4005,44 +4005,44 @@
                         <a:defRPr sz="1100"/>
                       </a:pPr>
                       <a:r>
-                        <a:t>32.25</a:t>
-                      </a:r>
-                    </a:p>
-                  </a:txBody>
-                  <a:tcPr/>
-                </a:tc>
-                <a:tc>
-                  <a:txBody>
-                    <a:bodyPr/>
-                    <a:lstStyle/>
-                    <a:p>
-                      <a:pPr>
-                        <a:defRPr sz="1100"/>
-                      </a:pPr>
-                      <a:r>
-                        <a:t>62.24</a:t>
-                      </a:r>
-                    </a:p>
-                  </a:txBody>
-                  <a:tcPr/>
-                </a:tc>
-                <a:tc>
-                  <a:txBody>
-                    <a:bodyPr/>
-                    <a:lstStyle/>
-                    <a:p>
-                      <a:pPr>
-                        <a:defRPr sz="1100"/>
-                      </a:pPr>
-                      <a:r>
-                        <a:t>-3.24</a:t>
+                        <a:t>32.04</a:t>
+                      </a:r>
+                    </a:p>
+                  </a:txBody>
+                  <a:tcPr/>
+                </a:tc>
+                <a:tc>
+                  <a:txBody>
+                    <a:bodyPr/>
+                    <a:lstStyle/>
+                    <a:p>
+                      <a:pPr>
+                        <a:defRPr sz="1100"/>
+                      </a:pPr>
+                      <a:r>
+                        <a:t>61.84</a:t>
+                      </a:r>
+                    </a:p>
+                  </a:txBody>
+                  <a:tcPr/>
+                </a:tc>
+                <a:tc>
+                  <a:txBody>
+                    <a:bodyPr/>
+                    <a:lstStyle/>
+                    <a:p>
+                      <a:pPr>
+                        <a:defRPr sz="1100"/>
+                      </a:pPr>
+                      <a:r>
+                        <a:t>-3.64</a:t>
                       </a:r>
                     </a:p>
                   </a:txBody>
                   <a:tcPr/>
                 </a:tc>
               </a:tr>
-              <a:tr h="295421">
+              <a:tr h="274320">
                 <a:tc>
                   <a:txBody>
                     <a:bodyPr/>
@@ -4097,44 +4097,44 @@
                         <a:defRPr sz="1100"/>
                       </a:pPr>
                       <a:r>
-                        <a:t>28.63</a:t>
-                      </a:r>
-                    </a:p>
-                  </a:txBody>
-                  <a:tcPr/>
-                </a:tc>
-                <a:tc>
-                  <a:txBody>
-                    <a:bodyPr/>
-                    <a:lstStyle/>
-                    <a:p>
-                      <a:pPr>
-                        <a:defRPr sz="1100"/>
-                      </a:pPr>
-                      <a:r>
-                        <a:t>26.63</a:t>
-                      </a:r>
-                    </a:p>
-                  </a:txBody>
-                  <a:tcPr/>
-                </a:tc>
-                <a:tc>
-                  <a:txBody>
-                    <a:bodyPr/>
-                    <a:lstStyle/>
-                    <a:p>
-                      <a:pPr>
-                        <a:defRPr sz="1100"/>
-                      </a:pPr>
-                      <a:r>
-                        <a:t>0.69</a:t>
+                        <a:t>28.5</a:t>
+                      </a:r>
+                    </a:p>
+                  </a:txBody>
+                  <a:tcPr/>
+                </a:tc>
+                <a:tc>
+                  <a:txBody>
+                    <a:bodyPr/>
+                    <a:lstStyle/>
+                    <a:p>
+                      <a:pPr>
+                        <a:defRPr sz="1100"/>
+                      </a:pPr>
+                      <a:r>
+                        <a:t>26.5</a:t>
+                      </a:r>
+                    </a:p>
+                  </a:txBody>
+                  <a:tcPr/>
+                </a:tc>
+                <a:tc>
+                  <a:txBody>
+                    <a:bodyPr/>
+                    <a:lstStyle/>
+                    <a:p>
+                      <a:pPr>
+                        <a:defRPr sz="1100"/>
+                      </a:pPr>
+                      <a:r>
+                        <a:t>0.57</a:t>
                       </a:r>
                     </a:p>
                   </a:txBody>
                   <a:tcPr/>
                 </a:tc>
               </a:tr>
-              <a:tr h="295421">
+              <a:tr h="274320">
                 <a:tc>
                   <a:txBody>
                     <a:bodyPr/>
@@ -4189,44 +4189,44 @@
                         <a:defRPr sz="1100"/>
                       </a:pPr>
                       <a:r>
-                        <a:t>10.32</a:t>
-                      </a:r>
-                    </a:p>
-                  </a:txBody>
-                  <a:tcPr/>
-                </a:tc>
-                <a:tc>
-                  <a:txBody>
-                    <a:bodyPr/>
-                    <a:lstStyle/>
-                    <a:p>
-                      <a:pPr>
-                        <a:defRPr sz="1100"/>
-                      </a:pPr>
-                      <a:r>
-                        <a:t>9.8</a:t>
-                      </a:r>
-                    </a:p>
-                  </a:txBody>
-                  <a:tcPr/>
-                </a:tc>
-                <a:tc>
-                  <a:txBody>
-                    <a:bodyPr/>
-                    <a:lstStyle/>
-                    <a:p>
-                      <a:pPr>
-                        <a:defRPr sz="1100"/>
-                      </a:pPr>
-                      <a:r>
-                        <a:t>-0.14</a:t>
+                        <a:t>10.41</a:t>
+                      </a:r>
+                    </a:p>
+                  </a:txBody>
+                  <a:tcPr/>
+                </a:tc>
+                <a:tc>
+                  <a:txBody>
+                    <a:bodyPr/>
+                    <a:lstStyle/>
+                    <a:p>
+                      <a:pPr>
+                        <a:defRPr sz="1100"/>
+                      </a:pPr>
+                      <a:r>
+                        <a:t>9.89</a:t>
+                      </a:r>
+                    </a:p>
+                  </a:txBody>
+                  <a:tcPr/>
+                </a:tc>
+                <a:tc>
+                  <a:txBody>
+                    <a:bodyPr/>
+                    <a:lstStyle/>
+                    <a:p>
+                      <a:pPr>
+                        <a:defRPr sz="1100"/>
+                      </a:pPr>
+                      <a:r>
+                        <a:t>-0.06</a:t>
                       </a:r>
                     </a:p>
                   </a:txBody>
                   <a:tcPr/>
                 </a:tc>
               </a:tr>
-              <a:tr h="295421">
+              <a:tr h="274320">
                 <a:tc>
                   <a:txBody>
                     <a:bodyPr/>
@@ -4281,22 +4281,114 @@
                         <a:defRPr sz="1100"/>
                       </a:pPr>
                       <a:r>
-                        <a:t>17.01</a:t>
-                      </a:r>
-                    </a:p>
-                  </a:txBody>
-                  <a:tcPr/>
-                </a:tc>
-                <a:tc>
-                  <a:txBody>
-                    <a:bodyPr/>
-                    <a:lstStyle/>
-                    <a:p>
-                      <a:pPr>
-                        <a:defRPr sz="1100"/>
-                      </a:pPr>
-                      <a:r>
-                        <a:t>8.51</a:t>
+                        <a:t>17.57</a:t>
+                      </a:r>
+                    </a:p>
+                  </a:txBody>
+                  <a:tcPr/>
+                </a:tc>
+                <a:tc>
+                  <a:txBody>
+                    <a:bodyPr/>
+                    <a:lstStyle/>
+                    <a:p>
+                      <a:pPr>
+                        <a:defRPr sz="1100"/>
+                      </a:pPr>
+                      <a:r>
+                        <a:t>8.79</a:t>
+                      </a:r>
+                    </a:p>
+                  </a:txBody>
+                  <a:tcPr/>
+                </a:tc>
+                <a:tc>
+                  <a:txBody>
+                    <a:bodyPr/>
+                    <a:lstStyle/>
+                    <a:p>
+                      <a:pPr>
+                        <a:defRPr sz="1100"/>
+                      </a:pPr>
+                      <a:r>
+                        <a:t>0.03</a:t>
+                      </a:r>
+                    </a:p>
+                  </a:txBody>
+                  <a:tcPr/>
+                </a:tc>
+              </a:tr>
+              <a:tr h="274320">
+                <a:tc>
+                  <a:txBody>
+                    <a:bodyPr/>
+                    <a:lstStyle/>
+                    <a:p>
+                      <a:pPr>
+                        <a:defRPr sz="1100"/>
+                      </a:pPr>
+                      <a:r>
+                        <a:t>星网锐捷</a:t>
+                      </a:r>
+                    </a:p>
+                  </a:txBody>
+                  <a:tcPr/>
+                </a:tc>
+                <a:tc>
+                  <a:txBody>
+                    <a:bodyPr/>
+                    <a:lstStyle/>
+                    <a:p>
+                      <a:pPr>
+                        <a:defRPr sz="1100"/>
+                      </a:pPr>
+                      <a:r>
+                        <a:t>6100</a:t>
+                      </a:r>
+                    </a:p>
+                  </a:txBody>
+                  <a:tcPr/>
+                </a:tc>
+                <a:tc>
+                  <a:txBody>
+                    <a:bodyPr/>
+                    <a:lstStyle/>
+                    <a:p>
+                      <a:pPr>
+                        <a:defRPr sz="1100"/>
+                      </a:pPr>
+                      <a:r>
+                        <a:t>35.87</a:t>
+                      </a:r>
+                    </a:p>
+                  </a:txBody>
+                  <a:tcPr/>
+                </a:tc>
+                <a:tc>
+                  <a:txBody>
+                    <a:bodyPr/>
+                    <a:lstStyle/>
+                    <a:p>
+                      <a:pPr>
+                        <a:defRPr sz="1100"/>
+                      </a:pPr>
+                      <a:r>
+                        <a:t>35.46</a:t>
+                      </a:r>
+                    </a:p>
+                  </a:txBody>
+                  <a:tcPr/>
+                </a:tc>
+                <a:tc>
+                  <a:txBody>
+                    <a:bodyPr/>
+                    <a:lstStyle/>
+                    <a:p>
+                      <a:pPr>
+                        <a:defRPr sz="1100"/>
+                      </a:pPr>
+                      <a:r>
+                        <a:t>21.63</a:t>
                       </a:r>
                     </a:p>
                   </a:txBody>
@@ -4318,109 +4410,201 @@
                   <a:tcPr/>
                 </a:tc>
               </a:tr>
-              <a:tr h="295421">
-                <a:tc>
-                  <a:txBody>
-                    <a:bodyPr/>
-                    <a:lstStyle/>
-                    <a:p>
-                      <a:pPr>
-                        <a:defRPr sz="1100"/>
-                      </a:pPr>
-                      <a:r>
-                        <a:t>星网锐捷</a:t>
-                      </a:r>
-                    </a:p>
-                  </a:txBody>
-                  <a:tcPr/>
-                </a:tc>
-                <a:tc>
-                  <a:txBody>
-                    <a:bodyPr/>
-                    <a:lstStyle/>
-                    <a:p>
-                      <a:pPr>
-                        <a:defRPr sz="1100"/>
-                      </a:pPr>
-                      <a:r>
-                        <a:t>6100</a:t>
-                      </a:r>
-                    </a:p>
-                  </a:txBody>
-                  <a:tcPr/>
-                </a:tc>
-                <a:tc>
-                  <a:txBody>
-                    <a:bodyPr/>
-                    <a:lstStyle/>
-                    <a:p>
-                      <a:pPr>
-                        <a:defRPr sz="1100"/>
-                      </a:pPr>
-                      <a:r>
-                        <a:t>35.87</a:t>
-                      </a:r>
-                    </a:p>
-                  </a:txBody>
-                  <a:tcPr/>
-                </a:tc>
-                <a:tc>
-                  <a:txBody>
-                    <a:bodyPr/>
-                    <a:lstStyle/>
-                    <a:p>
-                      <a:pPr>
-                        <a:defRPr sz="1100"/>
-                      </a:pPr>
-                      <a:r>
-                        <a:t>34.82</a:t>
-                      </a:r>
-                    </a:p>
-                  </a:txBody>
-                  <a:tcPr/>
-                </a:tc>
-                <a:tc>
-                  <a:txBody>
-                    <a:bodyPr/>
-                    <a:lstStyle/>
-                    <a:p>
-                      <a:pPr>
-                        <a:defRPr sz="1100"/>
-                      </a:pPr>
-                      <a:r>
-                        <a:t>21.24</a:t>
-                      </a:r>
-                    </a:p>
-                  </a:txBody>
-                  <a:tcPr/>
-                </a:tc>
-                <a:tc>
-                  <a:txBody>
-                    <a:bodyPr/>
-                    <a:lstStyle/>
-                    <a:p>
-                      <a:pPr>
-                        <a:defRPr sz="1100"/>
-                      </a:pPr>
-                      <a:r>
-                        <a:t>-0.64</a:t>
+              <a:tr h="274320">
+                <a:tc>
+                  <a:txBody>
+                    <a:bodyPr/>
+                    <a:lstStyle/>
+                    <a:p>
+                      <a:pPr>
+                        <a:defRPr sz="1100"/>
+                      </a:pPr>
+                      <a:r>
+                        <a:t>深信服</a:t>
+                      </a:r>
+                    </a:p>
+                  </a:txBody>
+                  <a:tcPr/>
+                </a:tc>
+                <a:tc>
+                  <a:txBody>
+                    <a:bodyPr/>
+                    <a:lstStyle/>
+                    <a:p>
+                      <a:pPr>
+                        <a:defRPr sz="1100"/>
+                      </a:pPr>
+                      <a:r>
+                        <a:t>500</a:t>
+                      </a:r>
+                    </a:p>
+                  </a:txBody>
+                  <a:tcPr/>
+                </a:tc>
+                <a:tc>
+                  <a:txBody>
+                    <a:bodyPr/>
+                    <a:lstStyle/>
+                    <a:p>
+                      <a:pPr>
+                        <a:defRPr sz="1100"/>
+                      </a:pPr>
+                      <a:r>
+                        <a:t>136.73</a:t>
+                      </a:r>
+                    </a:p>
+                  </a:txBody>
+                  <a:tcPr/>
+                </a:tc>
+                <a:tc>
+                  <a:txBody>
+                    <a:bodyPr/>
+                    <a:lstStyle/>
+                    <a:p>
+                      <a:pPr>
+                        <a:defRPr sz="1100"/>
+                      </a:pPr>
+                      <a:r>
+                        <a:t>134.89</a:t>
+                      </a:r>
+                    </a:p>
+                  </a:txBody>
+                  <a:tcPr/>
+                </a:tc>
+                <a:tc>
+                  <a:txBody>
+                    <a:bodyPr/>
+                    <a:lstStyle/>
+                    <a:p>
+                      <a:pPr>
+                        <a:defRPr sz="1100"/>
+                      </a:pPr>
+                      <a:r>
+                        <a:t>6.74</a:t>
+                      </a:r>
+                    </a:p>
+                  </a:txBody>
+                  <a:tcPr/>
+                </a:tc>
+                <a:tc>
+                  <a:txBody>
+                    <a:bodyPr/>
+                    <a:lstStyle/>
+                    <a:p>
+                      <a:pPr>
+                        <a:defRPr sz="1100"/>
+                      </a:pPr>
+                      <a:r>
+                        <a:t>-0.09</a:t>
                       </a:r>
                     </a:p>
                   </a:txBody>
                   <a:tcPr/>
                 </a:tc>
               </a:tr>
-              <a:tr h="295421">
-                <a:tc>
-                  <a:txBody>
-                    <a:bodyPr/>
-                    <a:lstStyle/>
-                    <a:p>
-                      <a:pPr>
-                        <a:defRPr sz="1100"/>
-                      </a:pPr>
-                      <a:r>
-                        <a:t>深信服</a:t>
+              <a:tr h="274320">
+                <a:tc>
+                  <a:txBody>
+                    <a:bodyPr/>
+                    <a:lstStyle/>
+                    <a:p>
+                      <a:pPr>
+                        <a:defRPr sz="1100"/>
+                      </a:pPr>
+                      <a:r>
+                        <a:t>哈药股份</a:t>
+                      </a:r>
+                    </a:p>
+                  </a:txBody>
+                  <a:tcPr/>
+                </a:tc>
+                <a:tc>
+                  <a:txBody>
+                    <a:bodyPr/>
+                    <a:lstStyle/>
+                    <a:p>
+                      <a:pPr>
+                        <a:defRPr sz="1100"/>
+                      </a:pPr>
+                      <a:r>
+                        <a:t>5000</a:t>
+                      </a:r>
+                    </a:p>
+                  </a:txBody>
+                  <a:tcPr/>
+                </a:tc>
+                <a:tc>
+                  <a:txBody>
+                    <a:bodyPr/>
+                    <a:lstStyle/>
+                    <a:p>
+                      <a:pPr>
+                        <a:defRPr sz="1100"/>
+                      </a:pPr>
+                      <a:r>
+                        <a:t>7.33</a:t>
+                      </a:r>
+                    </a:p>
+                  </a:txBody>
+                  <a:tcPr/>
+                </a:tc>
+                <a:tc>
+                  <a:txBody>
+                    <a:bodyPr/>
+                    <a:lstStyle/>
+                    <a:p>
+                      <a:pPr>
+                        <a:defRPr sz="1100"/>
+                      </a:pPr>
+                      <a:r>
+                        <a:t>7.27</a:t>
+                      </a:r>
+                    </a:p>
+                  </a:txBody>
+                  <a:tcPr/>
+                </a:tc>
+                <a:tc>
+                  <a:txBody>
+                    <a:bodyPr/>
+                    <a:lstStyle/>
+                    <a:p>
+                      <a:pPr>
+                        <a:defRPr sz="1100"/>
+                      </a:pPr>
+                      <a:r>
+                        <a:t>3.63</a:t>
+                      </a:r>
+                    </a:p>
+                  </a:txBody>
+                  <a:tcPr/>
+                </a:tc>
+                <a:tc>
+                  <a:txBody>
+                    <a:bodyPr/>
+                    <a:lstStyle/>
+                    <a:p>
+                      <a:pPr>
+                        <a:defRPr sz="1100"/>
+                      </a:pPr>
+                      <a:r>
+                        <a:t>-0.03</a:t>
+                      </a:r>
+                    </a:p>
+                  </a:txBody>
+                  <a:tcPr/>
+                </a:tc>
+              </a:tr>
+              <a:tr h="274320">
+                <a:tc>
+                  <a:txBody>
+                    <a:bodyPr/>
+                    <a:lstStyle/>
+                    <a:p>
+                      <a:pPr>
+                        <a:defRPr sz="1100"/>
+                      </a:pPr>
+                      <a:r>
+                        <a:t>招商轮船</a:t>
                       </a:r>
                     </a:p>
                   </a:txBody>
@@ -4450,37 +4634,129 @@
                         <a:defRPr sz="1100"/>
                       </a:pPr>
                       <a:r>
-                        <a:t>136.73</a:t>
-                      </a:r>
-                    </a:p>
-                  </a:txBody>
-                  <a:tcPr/>
-                </a:tc>
-                <a:tc>
-                  <a:txBody>
-                    <a:bodyPr/>
-                    <a:lstStyle/>
-                    <a:p>
-                      <a:pPr>
-                        <a:defRPr sz="1100"/>
-                      </a:pPr>
-                      <a:r>
-                        <a:t>134.26</a:t>
-                      </a:r>
-                    </a:p>
-                  </a:txBody>
-                  <a:tcPr/>
-                </a:tc>
-                <a:tc>
-                  <a:txBody>
-                    <a:bodyPr/>
-                    <a:lstStyle/>
-                    <a:p>
-                      <a:pPr>
-                        <a:defRPr sz="1100"/>
-                      </a:pPr>
-                      <a:r>
-                        <a:t>6.71</a:t>
+                        <a:t>20.76</a:t>
+                      </a:r>
+                    </a:p>
+                  </a:txBody>
+                  <a:tcPr/>
+                </a:tc>
+                <a:tc>
+                  <a:txBody>
+                    <a:bodyPr/>
+                    <a:lstStyle/>
+                    <a:p>
+                      <a:pPr>
+                        <a:defRPr sz="1100"/>
+                      </a:pPr>
+                      <a:r>
+                        <a:t>21.04</a:t>
+                      </a:r>
+                    </a:p>
+                  </a:txBody>
+                  <a:tcPr/>
+                </a:tc>
+                <a:tc>
+                  <a:txBody>
+                    <a:bodyPr/>
+                    <a:lstStyle/>
+                    <a:p>
+                      <a:pPr>
+                        <a:defRPr sz="1100"/>
+                      </a:pPr>
+                      <a:r>
+                        <a:t>1.05</a:t>
+                      </a:r>
+                    </a:p>
+                  </a:txBody>
+                  <a:tcPr/>
+                </a:tc>
+                <a:tc>
+                  <a:txBody>
+                    <a:bodyPr/>
+                    <a:lstStyle/>
+                    <a:p>
+                      <a:pPr>
+                        <a:defRPr sz="1100"/>
+                      </a:pPr>
+                      <a:r>
+                        <a:t>0.01</a:t>
+                      </a:r>
+                    </a:p>
+                  </a:txBody>
+                  <a:tcPr/>
+                </a:tc>
+              </a:tr>
+              <a:tr h="274320">
+                <a:tc>
+                  <a:txBody>
+                    <a:bodyPr/>
+                    <a:lstStyle/>
+                    <a:p>
+                      <a:pPr>
+                        <a:defRPr sz="1100"/>
+                      </a:pPr>
+                      <a:r>
+                        <a:t>睿创微纳</a:t>
+                      </a:r>
+                    </a:p>
+                  </a:txBody>
+                  <a:tcPr/>
+                </a:tc>
+                <a:tc>
+                  <a:txBody>
+                    <a:bodyPr/>
+                    <a:lstStyle/>
+                    <a:p>
+                      <a:pPr>
+                        <a:defRPr sz="1100"/>
+                      </a:pPr>
+                      <a:r>
+                        <a:t>1000</a:t>
+                      </a:r>
+                    </a:p>
+                  </a:txBody>
+                  <a:tcPr/>
+                </a:tc>
+                <a:tc>
+                  <a:txBody>
+                    <a:bodyPr/>
+                    <a:lstStyle/>
+                    <a:p>
+                      <a:pPr>
+                        <a:defRPr sz="1100"/>
+                      </a:pPr>
+                      <a:r>
+                        <a:t>177.58</a:t>
+                      </a:r>
+                    </a:p>
+                  </a:txBody>
+                  <a:tcPr/>
+                </a:tc>
+                <a:tc>
+                  <a:txBody>
+                    <a:bodyPr/>
+                    <a:lstStyle/>
+                    <a:p>
+                      <a:pPr>
+                        <a:defRPr sz="1100"/>
+                      </a:pPr>
+                      <a:r>
+                        <a:t>176.34</a:t>
+                      </a:r>
+                    </a:p>
+                  </a:txBody>
+                  <a:tcPr/>
+                </a:tc>
+                <a:tc>
+                  <a:txBody>
+                    <a:bodyPr/>
+                    <a:lstStyle/>
+                    <a:p>
+                      <a:pPr>
+                        <a:defRPr sz="1100"/>
+                      </a:pPr>
+                      <a:r>
+                        <a:t>17.63</a:t>
                       </a:r>
                     </a:p>
                   </a:txBody>
@@ -4502,201 +4778,17 @@
                   <a:tcPr/>
                 </a:tc>
               </a:tr>
-              <a:tr h="295421">
-                <a:tc>
-                  <a:txBody>
-                    <a:bodyPr/>
-                    <a:lstStyle/>
-                    <a:p>
-                      <a:pPr>
-                        <a:defRPr sz="1100"/>
-                      </a:pPr>
-                      <a:r>
-                        <a:t>哈药股份</a:t>
-                      </a:r>
-                    </a:p>
-                  </a:txBody>
-                  <a:tcPr/>
-                </a:tc>
-                <a:tc>
-                  <a:txBody>
-                    <a:bodyPr/>
-                    <a:lstStyle/>
-                    <a:p>
-                      <a:pPr>
-                        <a:defRPr sz="1100"/>
-                      </a:pPr>
-                      <a:r>
-                        <a:t>5000</a:t>
-                      </a:r>
-                    </a:p>
-                  </a:txBody>
-                  <a:tcPr/>
-                </a:tc>
-                <a:tc>
-                  <a:txBody>
-                    <a:bodyPr/>
-                    <a:lstStyle/>
-                    <a:p>
-                      <a:pPr>
-                        <a:defRPr sz="1100"/>
-                      </a:pPr>
-                      <a:r>
-                        <a:t>7.33</a:t>
-                      </a:r>
-                    </a:p>
-                  </a:txBody>
-                  <a:tcPr/>
-                </a:tc>
-                <a:tc>
-                  <a:txBody>
-                    <a:bodyPr/>
-                    <a:lstStyle/>
-                    <a:p>
-                      <a:pPr>
-                        <a:defRPr sz="1100"/>
-                      </a:pPr>
-                      <a:r>
-                        <a:t>7.3</a:t>
-                      </a:r>
-                    </a:p>
-                  </a:txBody>
-                  <a:tcPr/>
-                </a:tc>
-                <a:tc>
-                  <a:txBody>
-                    <a:bodyPr/>
-                    <a:lstStyle/>
-                    <a:p>
-                      <a:pPr>
-                        <a:defRPr sz="1100"/>
-                      </a:pPr>
-                      <a:r>
-                        <a:t>3.65</a:t>
-                      </a:r>
-                    </a:p>
-                  </a:txBody>
-                  <a:tcPr/>
-                </a:tc>
-                <a:tc>
-                  <a:txBody>
-                    <a:bodyPr/>
-                    <a:lstStyle/>
-                    <a:p>
-                      <a:pPr>
-                        <a:defRPr sz="1100"/>
-                      </a:pPr>
-                      <a:r>
-                        <a:t>-0.02</a:t>
-                      </a:r>
-                    </a:p>
-                  </a:txBody>
-                  <a:tcPr/>
-                </a:tc>
-              </a:tr>
-              <a:tr h="295421">
-                <a:tc>
-                  <a:txBody>
-                    <a:bodyPr/>
-                    <a:lstStyle/>
-                    <a:p>
-                      <a:pPr>
-                        <a:defRPr sz="1100"/>
-                      </a:pPr>
-                      <a:r>
-                        <a:t>招商轮船</a:t>
-                      </a:r>
-                    </a:p>
-                  </a:txBody>
-                  <a:tcPr/>
-                </a:tc>
-                <a:tc>
-                  <a:txBody>
-                    <a:bodyPr/>
-                    <a:lstStyle/>
-                    <a:p>
-                      <a:pPr>
-                        <a:defRPr sz="1100"/>
-                      </a:pPr>
-                      <a:r>
-                        <a:t>500</a:t>
-                      </a:r>
-                    </a:p>
-                  </a:txBody>
-                  <a:tcPr/>
-                </a:tc>
-                <a:tc>
-                  <a:txBody>
-                    <a:bodyPr/>
-                    <a:lstStyle/>
-                    <a:p>
-                      <a:pPr>
-                        <a:defRPr sz="1100"/>
-                      </a:pPr>
-                      <a:r>
-                        <a:t>20.76</a:t>
-                      </a:r>
-                    </a:p>
-                  </a:txBody>
-                  <a:tcPr/>
-                </a:tc>
-                <a:tc>
-                  <a:txBody>
-                    <a:bodyPr/>
-                    <a:lstStyle/>
-                    <a:p>
-                      <a:pPr>
-                        <a:defRPr sz="1100"/>
-                      </a:pPr>
-                      <a:r>
-                        <a:t>20.0</a:t>
-                      </a:r>
-                    </a:p>
-                  </a:txBody>
-                  <a:tcPr/>
-                </a:tc>
-                <a:tc>
-                  <a:txBody>
-                    <a:bodyPr/>
-                    <a:lstStyle/>
-                    <a:p>
-                      <a:pPr>
-                        <a:defRPr sz="1100"/>
-                      </a:pPr>
-                      <a:r>
-                        <a:t>1.0</a:t>
-                      </a:r>
-                    </a:p>
-                  </a:txBody>
-                  <a:tcPr/>
-                </a:tc>
-                <a:tc>
-                  <a:txBody>
-                    <a:bodyPr/>
-                    <a:lstStyle/>
-                    <a:p>
-                      <a:pPr>
-                        <a:defRPr sz="1100"/>
-                      </a:pPr>
-                      <a:r>
-                        <a:t>-0.04</a:t>
-                      </a:r>
-                    </a:p>
-                  </a:txBody>
-                  <a:tcPr/>
-                </a:tc>
-              </a:tr>
-              <a:tr h="295428">
-                <a:tc>
-                  <a:txBody>
-                    <a:bodyPr/>
-                    <a:lstStyle/>
-                    <a:p>
-                      <a:pPr>
-                        <a:defRPr sz="1100"/>
-                      </a:pPr>
-                      <a:r>
-                        <a:t>睿创微纳</a:t>
+              <a:tr h="274320">
+                <a:tc>
+                  <a:txBody>
+                    <a:bodyPr/>
+                    <a:lstStyle/>
+                    <a:p>
+                      <a:pPr>
+                        <a:defRPr sz="1100"/>
+                      </a:pPr>
+                      <a:r>
+                        <a:t>药明康德</a:t>
                       </a:r>
                     </a:p>
                   </a:txBody>
@@ -4726,52 +4818,52 @@
                         <a:defRPr sz="1100"/>
                       </a:pPr>
                       <a:r>
-                        <a:t>177.58</a:t>
-                      </a:r>
-                    </a:p>
-                  </a:txBody>
-                  <a:tcPr/>
-                </a:tc>
-                <a:tc>
-                  <a:txBody>
-                    <a:bodyPr/>
-                    <a:lstStyle/>
-                    <a:p>
-                      <a:pPr>
-                        <a:defRPr sz="1100"/>
-                      </a:pPr>
-                      <a:r>
-                        <a:t>177.89</a:t>
-                      </a:r>
-                    </a:p>
-                  </a:txBody>
-                  <a:tcPr/>
-                </a:tc>
-                <a:tc>
-                  <a:txBody>
-                    <a:bodyPr/>
-                    <a:lstStyle/>
-                    <a:p>
-                      <a:pPr>
-                        <a:defRPr sz="1100"/>
-                      </a:pPr>
-                      <a:r>
-                        <a:t>17.79</a:t>
-                      </a:r>
-                    </a:p>
-                  </a:txBody>
-                  <a:tcPr/>
-                </a:tc>
-                <a:tc>
-                  <a:txBody>
-                    <a:bodyPr/>
-                    <a:lstStyle/>
-                    <a:p>
-                      <a:pPr>
-                        <a:defRPr sz="1100"/>
-                      </a:pPr>
-                      <a:r>
-                        <a:t>0.03</a:t>
+                        <a:t>157.7</a:t>
+                      </a:r>
+                    </a:p>
+                  </a:txBody>
+                  <a:tcPr/>
+                </a:tc>
+                <a:tc>
+                  <a:txBody>
+                    <a:bodyPr/>
+                    <a:lstStyle/>
+                    <a:p>
+                      <a:pPr>
+                        <a:defRPr sz="1100"/>
+                      </a:pPr>
+                      <a:r>
+                        <a:t>157.66</a:t>
+                      </a:r>
+                    </a:p>
+                  </a:txBody>
+                  <a:tcPr/>
+                </a:tc>
+                <a:tc>
+                  <a:txBody>
+                    <a:bodyPr/>
+                    <a:lstStyle/>
+                    <a:p>
+                      <a:pPr>
+                        <a:defRPr sz="1100"/>
+                      </a:pPr>
+                      <a:r>
+                        <a:t>15.77</a:t>
+                      </a:r>
+                    </a:p>
+                  </a:txBody>
+                  <a:tcPr/>
+                </a:tc>
+                <a:tc>
+                  <a:txBody>
+                    <a:bodyPr/>
+                    <a:lstStyle/>
+                    <a:p>
+                      <a:pPr>
+                        <a:defRPr sz="1100"/>
+                      </a:pPr>
+                      <a:r>
+                        <a:t>-0.0</a:t>
                       </a:r>
                     </a:p>
                   </a:txBody>

--- a/outputs/12_中期路演.pptx
+++ b/outputs/12_中期路演.pptx
@@ -3255,7 +3255,7 @@
               <a:defRPr sz="1500"/>
             </a:pPr>
             <a:r>
-              <a:t>当前总资产：486.21万元</a:t>
+              <a:t>当前总资产：484.18万元</a:t>
             </a:r>
           </a:p>
           <a:p>
@@ -3263,7 +3263,7 @@
               <a:defRPr sz="1500"/>
             </a:pPr>
             <a:r>
-              <a:t>累计收益率：-2.76%</a:t>
+              <a:t>累计收益率：-3.16%</a:t>
             </a:r>
           </a:p>
           <a:p>
@@ -3271,7 +3271,7 @@
               <a:defRPr sz="1500"/>
             </a:pPr>
             <a:r>
-              <a:t>同期沪深300：-1.51%</a:t>
+              <a:t>同期沪深300：-2.15%</a:t>
             </a:r>
           </a:p>
           <a:p>
@@ -3279,7 +3279,7 @@
               <a:defRPr sz="1500"/>
             </a:pPr>
             <a:r>
-              <a:t>现金：80.26万元（16.5%）</a:t>
+              <a:t>现金：80.26万元（16.6%）</a:t>
             </a:r>
           </a:p>
           <a:p>
@@ -3821,37 +3821,37 @@
                         <a:defRPr sz="1100"/>
                       </a:pPr>
                       <a:r>
-                        <a:t>4.547</a:t>
-                      </a:r>
-                    </a:p>
-                  </a:txBody>
-                  <a:tcPr/>
-                </a:tc>
-                <a:tc>
-                  <a:txBody>
-                    <a:bodyPr/>
-                    <a:lstStyle/>
-                    <a:p>
-                      <a:pPr>
-                        <a:defRPr sz="1100"/>
-                      </a:pPr>
-                      <a:r>
-                        <a:t>117.72</a:t>
-                      </a:r>
-                    </a:p>
-                  </a:txBody>
-                  <a:tcPr/>
-                </a:tc>
-                <a:tc>
-                  <a:txBody>
-                    <a:bodyPr/>
-                    <a:lstStyle/>
-                    <a:p>
-                      <a:pPr>
-                        <a:defRPr sz="1100"/>
-                      </a:pPr>
-                      <a:r>
-                        <a:t>-2.43</a:t>
+                        <a:t>4.523</a:t>
+                      </a:r>
+                    </a:p>
+                  </a:txBody>
+                  <a:tcPr/>
+                </a:tc>
+                <a:tc>
+                  <a:txBody>
+                    <a:bodyPr/>
+                    <a:lstStyle/>
+                    <a:p>
+                      <a:pPr>
+                        <a:defRPr sz="1100"/>
+                      </a:pPr>
+                      <a:r>
+                        <a:t>117.1</a:t>
+                      </a:r>
+                    </a:p>
+                  </a:txBody>
+                  <a:tcPr/>
+                </a:tc>
+                <a:tc>
+                  <a:txBody>
+                    <a:bodyPr/>
+                    <a:lstStyle/>
+                    <a:p>
+                      <a:pPr>
+                        <a:defRPr sz="1100"/>
+                      </a:pPr>
+                      <a:r>
+                        <a:t>-3.06</a:t>
                       </a:r>
                     </a:p>
                   </a:txBody>
@@ -3913,37 +3913,37 @@
                         <a:defRPr sz="1100"/>
                       </a:pPr>
                       <a:r>
-                        <a:t>54.13</a:t>
-                      </a:r>
-                    </a:p>
-                  </a:txBody>
-                  <a:tcPr/>
-                </a:tc>
-                <a:tc>
-                  <a:txBody>
-                    <a:bodyPr/>
-                    <a:lstStyle/>
-                    <a:p>
-                      <a:pPr>
-                        <a:defRPr sz="1100"/>
-                      </a:pPr>
-                      <a:r>
-                        <a:t>114.76</a:t>
-                      </a:r>
-                    </a:p>
-                  </a:txBody>
-                  <a:tcPr/>
-                </a:tc>
-                <a:tc>
-                  <a:txBody>
-                    <a:bodyPr/>
-                    <a:lstStyle/>
-                    <a:p>
-                      <a:pPr>
-                        <a:defRPr sz="1100"/>
-                      </a:pPr>
-                      <a:r>
-                        <a:t>-4.22</a:t>
+                        <a:t>53.9</a:t>
+                      </a:r>
+                    </a:p>
+                  </a:txBody>
+                  <a:tcPr/>
+                </a:tc>
+                <a:tc>
+                  <a:txBody>
+                    <a:bodyPr/>
+                    <a:lstStyle/>
+                    <a:p>
+                      <a:pPr>
+                        <a:defRPr sz="1100"/>
+                      </a:pPr>
+                      <a:r>
+                        <a:t>114.27</a:t>
+                      </a:r>
+                    </a:p>
+                  </a:txBody>
+                  <a:tcPr/>
+                </a:tc>
+                <a:tc>
+                  <a:txBody>
+                    <a:bodyPr/>
+                    <a:lstStyle/>
+                    <a:p>
+                      <a:pPr>
+                        <a:defRPr sz="1100"/>
+                      </a:pPr>
+                      <a:r>
+                        <a:t>-4.71</a:t>
                       </a:r>
                     </a:p>
                   </a:txBody>
@@ -4005,37 +4005,37 @@
                         <a:defRPr sz="1100"/>
                       </a:pPr>
                       <a:r>
-                        <a:t>32.04</a:t>
-                      </a:r>
-                    </a:p>
-                  </a:txBody>
-                  <a:tcPr/>
-                </a:tc>
-                <a:tc>
-                  <a:txBody>
-                    <a:bodyPr/>
-                    <a:lstStyle/>
-                    <a:p>
-                      <a:pPr>
-                        <a:defRPr sz="1100"/>
-                      </a:pPr>
-                      <a:r>
-                        <a:t>61.84</a:t>
-                      </a:r>
-                    </a:p>
-                  </a:txBody>
-                  <a:tcPr/>
-                </a:tc>
-                <a:tc>
-                  <a:txBody>
-                    <a:bodyPr/>
-                    <a:lstStyle/>
-                    <a:p>
-                      <a:pPr>
-                        <a:defRPr sz="1100"/>
-                      </a:pPr>
-                      <a:r>
-                        <a:t>-3.64</a:t>
+                        <a:t>31.68</a:t>
+                      </a:r>
+                    </a:p>
+                  </a:txBody>
+                  <a:tcPr/>
+                </a:tc>
+                <a:tc>
+                  <a:txBody>
+                    <a:bodyPr/>
+                    <a:lstStyle/>
+                    <a:p>
+                      <a:pPr>
+                        <a:defRPr sz="1100"/>
+                      </a:pPr>
+                      <a:r>
+                        <a:t>61.14</a:t>
+                      </a:r>
+                    </a:p>
+                  </a:txBody>
+                  <a:tcPr/>
+                </a:tc>
+                <a:tc>
+                  <a:txBody>
+                    <a:bodyPr/>
+                    <a:lstStyle/>
+                    <a:p>
+                      <a:pPr>
+                        <a:defRPr sz="1100"/>
+                      </a:pPr>
+                      <a:r>
+                        <a:t>-4.34</a:t>
                       </a:r>
                     </a:p>
                   </a:txBody>
@@ -4189,37 +4189,37 @@
                         <a:defRPr sz="1100"/>
                       </a:pPr>
                       <a:r>
-                        <a:t>10.41</a:t>
-                      </a:r>
-                    </a:p>
-                  </a:txBody>
-                  <a:tcPr/>
-                </a:tc>
-                <a:tc>
-                  <a:txBody>
-                    <a:bodyPr/>
-                    <a:lstStyle/>
-                    <a:p>
-                      <a:pPr>
-                        <a:defRPr sz="1100"/>
-                      </a:pPr>
-                      <a:r>
-                        <a:t>9.89</a:t>
-                      </a:r>
-                    </a:p>
-                  </a:txBody>
-                  <a:tcPr/>
-                </a:tc>
-                <a:tc>
-                  <a:txBody>
-                    <a:bodyPr/>
-                    <a:lstStyle/>
-                    <a:p>
-                      <a:pPr>
-                        <a:defRPr sz="1100"/>
-                      </a:pPr>
-                      <a:r>
-                        <a:t>-0.06</a:t>
+                        <a:t>10.38</a:t>
+                      </a:r>
+                    </a:p>
+                  </a:txBody>
+                  <a:tcPr/>
+                </a:tc>
+                <a:tc>
+                  <a:txBody>
+                    <a:bodyPr/>
+                    <a:lstStyle/>
+                    <a:p>
+                      <a:pPr>
+                        <a:defRPr sz="1100"/>
+                      </a:pPr>
+                      <a:r>
+                        <a:t>9.86</a:t>
+                      </a:r>
+                    </a:p>
+                  </a:txBody>
+                  <a:tcPr/>
+                </a:tc>
+                <a:tc>
+                  <a:txBody>
+                    <a:bodyPr/>
+                    <a:lstStyle/>
+                    <a:p>
+                      <a:pPr>
+                        <a:defRPr sz="1100"/>
+                      </a:pPr>
+                      <a:r>
+                        <a:t>-0.09</a:t>
                       </a:r>
                     </a:p>
                   </a:txBody>
@@ -4281,37 +4281,37 @@
                         <a:defRPr sz="1100"/>
                       </a:pPr>
                       <a:r>
-                        <a:t>17.57</a:t>
-                      </a:r>
-                    </a:p>
-                  </a:txBody>
-                  <a:tcPr/>
-                </a:tc>
-                <a:tc>
-                  <a:txBody>
-                    <a:bodyPr/>
-                    <a:lstStyle/>
-                    <a:p>
-                      <a:pPr>
-                        <a:defRPr sz="1100"/>
-                      </a:pPr>
-                      <a:r>
-                        <a:t>8.79</a:t>
-                      </a:r>
-                    </a:p>
-                  </a:txBody>
-                  <a:tcPr/>
-                </a:tc>
-                <a:tc>
-                  <a:txBody>
-                    <a:bodyPr/>
-                    <a:lstStyle/>
-                    <a:p>
-                      <a:pPr>
-                        <a:defRPr sz="1100"/>
-                      </a:pPr>
-                      <a:r>
-                        <a:t>0.03</a:t>
+                        <a:t>17.33</a:t>
+                      </a:r>
+                    </a:p>
+                  </a:txBody>
+                  <a:tcPr/>
+                </a:tc>
+                <a:tc>
+                  <a:txBody>
+                    <a:bodyPr/>
+                    <a:lstStyle/>
+                    <a:p>
+                      <a:pPr>
+                        <a:defRPr sz="1100"/>
+                      </a:pPr>
+                      <a:r>
+                        <a:t>8.66</a:t>
+                      </a:r>
+                    </a:p>
+                  </a:txBody>
+                  <a:tcPr/>
+                </a:tc>
+                <a:tc>
+                  <a:txBody>
+                    <a:bodyPr/>
+                    <a:lstStyle/>
+                    <a:p>
+                      <a:pPr>
+                        <a:defRPr sz="1100"/>
+                      </a:pPr>
+                      <a:r>
+                        <a:t>-0.1</a:t>
                       </a:r>
                     </a:p>
                   </a:txBody>
@@ -4373,37 +4373,37 @@
                         <a:defRPr sz="1100"/>
                       </a:pPr>
                       <a:r>
-                        <a:t>35.46</a:t>
-                      </a:r>
-                    </a:p>
-                  </a:txBody>
-                  <a:tcPr/>
-                </a:tc>
-                <a:tc>
-                  <a:txBody>
-                    <a:bodyPr/>
-                    <a:lstStyle/>
-                    <a:p>
-                      <a:pPr>
-                        <a:defRPr sz="1100"/>
-                      </a:pPr>
-                      <a:r>
-                        <a:t>21.63</a:t>
-                      </a:r>
-                    </a:p>
-                  </a:txBody>
-                  <a:tcPr/>
-                </a:tc>
-                <a:tc>
-                  <a:txBody>
-                    <a:bodyPr/>
-                    <a:lstStyle/>
-                    <a:p>
-                      <a:pPr>
-                        <a:defRPr sz="1100"/>
-                      </a:pPr>
-                      <a:r>
-                        <a:t>-0.25</a:t>
+                        <a:t>35.3</a:t>
+                      </a:r>
+                    </a:p>
+                  </a:txBody>
+                  <a:tcPr/>
+                </a:tc>
+                <a:tc>
+                  <a:txBody>
+                    <a:bodyPr/>
+                    <a:lstStyle/>
+                    <a:p>
+                      <a:pPr>
+                        <a:defRPr sz="1100"/>
+                      </a:pPr>
+                      <a:r>
+                        <a:t>21.53</a:t>
+                      </a:r>
+                    </a:p>
+                  </a:txBody>
+                  <a:tcPr/>
+                </a:tc>
+                <a:tc>
+                  <a:txBody>
+                    <a:bodyPr/>
+                    <a:lstStyle/>
+                    <a:p>
+                      <a:pPr>
+                        <a:defRPr sz="1100"/>
+                      </a:pPr>
+                      <a:r>
+                        <a:t>-0.35</a:t>
                       </a:r>
                     </a:p>
                   </a:txBody>
@@ -4465,22 +4465,22 @@
                         <a:defRPr sz="1100"/>
                       </a:pPr>
                       <a:r>
-                        <a:t>134.89</a:t>
-                      </a:r>
-                    </a:p>
-                  </a:txBody>
-                  <a:tcPr/>
-                </a:tc>
-                <a:tc>
-                  <a:txBody>
-                    <a:bodyPr/>
-                    <a:lstStyle/>
-                    <a:p>
-                      <a:pPr>
-                        <a:defRPr sz="1100"/>
-                      </a:pPr>
-                      <a:r>
-                        <a:t>6.74</a:t>
+                        <a:t>134.99</a:t>
+                      </a:r>
+                    </a:p>
+                  </a:txBody>
+                  <a:tcPr/>
+                </a:tc>
+                <a:tc>
+                  <a:txBody>
+                    <a:bodyPr/>
+                    <a:lstStyle/>
+                    <a:p>
+                      <a:pPr>
+                        <a:defRPr sz="1100"/>
+                      </a:pPr>
+                      <a:r>
+                        <a:t>6.75</a:t>
                       </a:r>
                     </a:p>
                   </a:txBody>
@@ -4557,37 +4557,37 @@
                         <a:defRPr sz="1100"/>
                       </a:pPr>
                       <a:r>
-                        <a:t>7.27</a:t>
-                      </a:r>
-                    </a:p>
-                  </a:txBody>
-                  <a:tcPr/>
-                </a:tc>
-                <a:tc>
-                  <a:txBody>
-                    <a:bodyPr/>
-                    <a:lstStyle/>
-                    <a:p>
-                      <a:pPr>
-                        <a:defRPr sz="1100"/>
-                      </a:pPr>
-                      <a:r>
-                        <a:t>3.63</a:t>
-                      </a:r>
-                    </a:p>
-                  </a:txBody>
-                  <a:tcPr/>
-                </a:tc>
-                <a:tc>
-                  <a:txBody>
-                    <a:bodyPr/>
-                    <a:lstStyle/>
-                    <a:p>
-                      <a:pPr>
-                        <a:defRPr sz="1100"/>
-                      </a:pPr>
-                      <a:r>
-                        <a:t>-0.03</a:t>
+                        <a:t>7.12</a:t>
+                      </a:r>
+                    </a:p>
+                  </a:txBody>
+                  <a:tcPr/>
+                </a:tc>
+                <a:tc>
+                  <a:txBody>
+                    <a:bodyPr/>
+                    <a:lstStyle/>
+                    <a:p>
+                      <a:pPr>
+                        <a:defRPr sz="1100"/>
+                      </a:pPr>
+                      <a:r>
+                        <a:t>3.56</a:t>
+                      </a:r>
+                    </a:p>
+                  </a:txBody>
+                  <a:tcPr/>
+                </a:tc>
+                <a:tc>
+                  <a:txBody>
+                    <a:bodyPr/>
+                    <a:lstStyle/>
+                    <a:p>
+                      <a:pPr>
+                        <a:defRPr sz="1100"/>
+                      </a:pPr>
+                      <a:r>
+                        <a:t>-0.1</a:t>
                       </a:r>
                     </a:p>
                   </a:txBody>
@@ -4649,37 +4649,37 @@
                         <a:defRPr sz="1100"/>
                       </a:pPr>
                       <a:r>
-                        <a:t>21.04</a:t>
-                      </a:r>
-                    </a:p>
-                  </a:txBody>
-                  <a:tcPr/>
-                </a:tc>
-                <a:tc>
-                  <a:txBody>
-                    <a:bodyPr/>
-                    <a:lstStyle/>
-                    <a:p>
-                      <a:pPr>
-                        <a:defRPr sz="1100"/>
-                      </a:pPr>
-                      <a:r>
-                        <a:t>1.05</a:t>
-                      </a:r>
-                    </a:p>
-                  </a:txBody>
-                  <a:tcPr/>
-                </a:tc>
-                <a:tc>
-                  <a:txBody>
-                    <a:bodyPr/>
-                    <a:lstStyle/>
-                    <a:p>
-                      <a:pPr>
-                        <a:defRPr sz="1100"/>
-                      </a:pPr>
-                      <a:r>
-                        <a:t>0.01</a:t>
+                        <a:t>20.5</a:t>
+                      </a:r>
+                    </a:p>
+                  </a:txBody>
+                  <a:tcPr/>
+                </a:tc>
+                <a:tc>
+                  <a:txBody>
+                    <a:bodyPr/>
+                    <a:lstStyle/>
+                    <a:p>
+                      <a:pPr>
+                        <a:defRPr sz="1100"/>
+                      </a:pPr>
+                      <a:r>
+                        <a:t>1.02</a:t>
+                      </a:r>
+                    </a:p>
+                  </a:txBody>
+                  <a:tcPr/>
+                </a:tc>
+                <a:tc>
+                  <a:txBody>
+                    <a:bodyPr/>
+                    <a:lstStyle/>
+                    <a:p>
+                      <a:pPr>
+                        <a:defRPr sz="1100"/>
+                      </a:pPr>
+                      <a:r>
+                        <a:t>-0.01</a:t>
                       </a:r>
                     </a:p>
                   </a:txBody>
@@ -4741,37 +4741,37 @@
                         <a:defRPr sz="1100"/>
                       </a:pPr>
                       <a:r>
-                        <a:t>176.34</a:t>
-                      </a:r>
-                    </a:p>
-                  </a:txBody>
-                  <a:tcPr/>
-                </a:tc>
-                <a:tc>
-                  <a:txBody>
-                    <a:bodyPr/>
-                    <a:lstStyle/>
-                    <a:p>
-                      <a:pPr>
-                        <a:defRPr sz="1100"/>
-                      </a:pPr>
-                      <a:r>
-                        <a:t>17.63</a:t>
-                      </a:r>
-                    </a:p>
-                  </a:txBody>
-                  <a:tcPr/>
-                </a:tc>
-                <a:tc>
-                  <a:txBody>
-                    <a:bodyPr/>
-                    <a:lstStyle/>
-                    <a:p>
-                      <a:pPr>
-                        <a:defRPr sz="1100"/>
-                      </a:pPr>
-                      <a:r>
-                        <a:t>-0.12</a:t>
+                        <a:t>178.5</a:t>
+                      </a:r>
+                    </a:p>
+                  </a:txBody>
+                  <a:tcPr/>
+                </a:tc>
+                <a:tc>
+                  <a:txBody>
+                    <a:bodyPr/>
+                    <a:lstStyle/>
+                    <a:p>
+                      <a:pPr>
+                        <a:defRPr sz="1100"/>
+                      </a:pPr>
+                      <a:r>
+                        <a:t>17.85</a:t>
+                      </a:r>
+                    </a:p>
+                  </a:txBody>
+                  <a:tcPr/>
+                </a:tc>
+                <a:tc>
+                  <a:txBody>
+                    <a:bodyPr/>
+                    <a:lstStyle/>
+                    <a:p>
+                      <a:pPr>
+                        <a:defRPr sz="1100"/>
+                      </a:pPr>
+                      <a:r>
+                        <a:t>0.09</a:t>
                       </a:r>
                     </a:p>
                   </a:txBody>
@@ -4833,37 +4833,37 @@
                         <a:defRPr sz="1100"/>
                       </a:pPr>
                       <a:r>
-                        <a:t>157.66</a:t>
-                      </a:r>
-                    </a:p>
-                  </a:txBody>
-                  <a:tcPr/>
-                </a:tc>
-                <a:tc>
-                  <a:txBody>
-                    <a:bodyPr/>
-                    <a:lstStyle/>
-                    <a:p>
-                      <a:pPr>
-                        <a:defRPr sz="1100"/>
-                      </a:pPr>
-                      <a:r>
-                        <a:t>15.77</a:t>
-                      </a:r>
-                    </a:p>
-                  </a:txBody>
-                  <a:tcPr/>
-                </a:tc>
-                <a:tc>
-                  <a:txBody>
-                    <a:bodyPr/>
-                    <a:lstStyle/>
-                    <a:p>
-                      <a:pPr>
-                        <a:defRPr sz="1100"/>
-                      </a:pPr>
-                      <a:r>
-                        <a:t>-0.0</a:t>
+                        <a:t>156.67</a:t>
+                      </a:r>
+                    </a:p>
+                  </a:txBody>
+                  <a:tcPr/>
+                </a:tc>
+                <a:tc>
+                  <a:txBody>
+                    <a:bodyPr/>
+                    <a:lstStyle/>
+                    <a:p>
+                      <a:pPr>
+                        <a:defRPr sz="1100"/>
+                      </a:pPr>
+                      <a:r>
+                        <a:t>15.67</a:t>
+                      </a:r>
+                    </a:p>
+                  </a:txBody>
+                  <a:tcPr/>
+                </a:tc>
+                <a:tc>
+                  <a:txBody>
+                    <a:bodyPr/>
+                    <a:lstStyle/>
+                    <a:p>
+                      <a:pPr>
+                        <a:defRPr sz="1100"/>
+                      </a:pPr>
+                      <a:r>
+                        <a:t>-0.1</a:t>
                       </a:r>
                     </a:p>
                   </a:txBody>
@@ -4949,7 +4949,7 @@
               <a:defRPr sz="1500"/>
             </a:pPr>
             <a:r>
-              <a:t>紫金矿业（601899，有色金属）：综合78.0分；基本面优秀，具备中长期配置价值；趋势中性，观望。</a:t>
+              <a:t>紫金矿业（601899，有色金属）：综合80.5分；基本面优秀，具备中长期配置价值；中期趋势向上，可关注/持有。</a:t>
             </a:r>
           </a:p>
           <a:p>
@@ -4957,7 +4957,7 @@
               <a:defRPr sz="1500"/>
             </a:pPr>
             <a:r>
-              <a:t>长江电力（600900，电力）：综合74.0分；基本面优秀，具备中长期配置价值；中期趋势向上，可关注/持有。</a:t>
+              <a:t>长江电力（600900，电力）：综合72.0分；基本面优秀，具备中长期配置价值；中期趋势向上，可关注/持有。</a:t>
             </a:r>
           </a:p>
           <a:p>
@@ -4965,7 +4965,7 @@
               <a:defRPr sz="1500"/>
             </a:pPr>
             <a:r>
-              <a:t>宁德时代（300750，新能源电池）：综合70.5分；基本面优秀，具备中长期配置价值；趋势中性，观望。</a:t>
+              <a:t>中国平安（601318，保险）：综合69.0分；基本面优秀，具备中长期配置价值；趋势中性，观望。</a:t>
             </a:r>
           </a:p>
           <a:p>
@@ -4973,7 +4973,7 @@
               <a:defRPr sz="1500"/>
             </a:pPr>
             <a:r>
-              <a:t>招商银行（600036，银行）：综合69.0分；基本面优秀，具备中长期配置价值；中期趋势向上，可关注/持有。</a:t>
+              <a:t>宁德时代（300750，新能源电池）：综合68.5分；基本面优秀，具备中长期配置价值；趋势中性，观望。</a:t>
             </a:r>
           </a:p>
           <a:p>
@@ -4981,7 +4981,7 @@
               <a:defRPr sz="1500"/>
             </a:pPr>
             <a:r>
-              <a:t>中国平安（601318，保险）：综合69.0分；基本面优秀，具备中长期配置价值；趋势中性，观望。</a:t>
+              <a:t>美的集团（000333，家电）：综合67.5分；基本面优秀，具备中长期配置价值；中期趋势向上，可关注/持有。</a:t>
             </a:r>
           </a:p>
         </p:txBody>

--- a/outputs/12_中期路演.pptx
+++ b/outputs/12_中期路演.pptx
@@ -3167,7 +3167,7 @@
               <a:defRPr sz="1500"/>
             </a:pPr>
             <a:r>
-              <a:t>数据截止：2026-09-15</a:t>
+              <a:t>数据截止：2026-09-16</a:t>
             </a:r>
           </a:p>
         </p:txBody>
@@ -3255,7 +3255,7 @@
               <a:defRPr sz="1500"/>
             </a:pPr>
             <a:r>
-              <a:t>当前总资产：484.18万元</a:t>
+              <a:t>当前总资产：487.85万元</a:t>
             </a:r>
           </a:p>
           <a:p>
@@ -3263,7 +3263,7 @@
               <a:defRPr sz="1500"/>
             </a:pPr>
             <a:r>
-              <a:t>累计收益率：-3.16%</a:t>
+              <a:t>累计收益率：-2.43%</a:t>
             </a:r>
           </a:p>
           <a:p>
@@ -3271,7 +3271,7 @@
               <a:defRPr sz="1500"/>
             </a:pPr>
             <a:r>
-              <a:t>同期沪深300：-2.15%</a:t>
+              <a:t>同期沪深300：-1.49%</a:t>
             </a:r>
           </a:p>
           <a:p>
@@ -3279,7 +3279,7 @@
               <a:defRPr sz="1500"/>
             </a:pPr>
             <a:r>
-              <a:t>现金：80.26万元（16.6%）</a:t>
+              <a:t>现金：80.26万元（16.5%）</a:t>
             </a:r>
           </a:p>
           <a:p>
@@ -3821,37 +3821,37 @@
                         <a:defRPr sz="1100"/>
                       </a:pPr>
                       <a:r>
-                        <a:t>4.523</a:t>
-                      </a:r>
-                    </a:p>
-                  </a:txBody>
-                  <a:tcPr/>
-                </a:tc>
-                <a:tc>
-                  <a:txBody>
-                    <a:bodyPr/>
-                    <a:lstStyle/>
-                    <a:p>
-                      <a:pPr>
-                        <a:defRPr sz="1100"/>
-                      </a:pPr>
-                      <a:r>
-                        <a:t>117.1</a:t>
-                      </a:r>
-                    </a:p>
-                  </a:txBody>
-                  <a:tcPr/>
-                </a:tc>
-                <a:tc>
-                  <a:txBody>
-                    <a:bodyPr/>
-                    <a:lstStyle/>
-                    <a:p>
-                      <a:pPr>
-                        <a:defRPr sz="1100"/>
-                      </a:pPr>
-                      <a:r>
-                        <a:t>-3.06</a:t>
+                        <a:t>4.55</a:t>
+                      </a:r>
+                    </a:p>
+                  </a:txBody>
+                  <a:tcPr/>
+                </a:tc>
+                <a:tc>
+                  <a:txBody>
+                    <a:bodyPr/>
+                    <a:lstStyle/>
+                    <a:p>
+                      <a:pPr>
+                        <a:defRPr sz="1100"/>
+                      </a:pPr>
+                      <a:r>
+                        <a:t>117.8</a:t>
+                      </a:r>
+                    </a:p>
+                  </a:txBody>
+                  <a:tcPr/>
+                </a:tc>
+                <a:tc>
+                  <a:txBody>
+                    <a:bodyPr/>
+                    <a:lstStyle/>
+                    <a:p>
+                      <a:pPr>
+                        <a:defRPr sz="1100"/>
+                      </a:pPr>
+                      <a:r>
+                        <a:t>-2.36</a:t>
                       </a:r>
                     </a:p>
                   </a:txBody>
@@ -3913,37 +3913,37 @@
                         <a:defRPr sz="1100"/>
                       </a:pPr>
                       <a:r>
-                        <a:t>53.9</a:t>
-                      </a:r>
-                    </a:p>
-                  </a:txBody>
-                  <a:tcPr/>
-                </a:tc>
-                <a:tc>
-                  <a:txBody>
-                    <a:bodyPr/>
-                    <a:lstStyle/>
-                    <a:p>
-                      <a:pPr>
-                        <a:defRPr sz="1100"/>
-                      </a:pPr>
-                      <a:r>
-                        <a:t>114.27</a:t>
-                      </a:r>
-                    </a:p>
-                  </a:txBody>
-                  <a:tcPr/>
-                </a:tc>
-                <a:tc>
-                  <a:txBody>
-                    <a:bodyPr/>
-                    <a:lstStyle/>
-                    <a:p>
-                      <a:pPr>
-                        <a:defRPr sz="1100"/>
-                      </a:pPr>
-                      <a:r>
-                        <a:t>-4.71</a:t>
+                        <a:t>53.51</a:t>
+                      </a:r>
+                    </a:p>
+                  </a:txBody>
+                  <a:tcPr/>
+                </a:tc>
+                <a:tc>
+                  <a:txBody>
+                    <a:bodyPr/>
+                    <a:lstStyle/>
+                    <a:p>
+                      <a:pPr>
+                        <a:defRPr sz="1100"/>
+                      </a:pPr>
+                      <a:r>
+                        <a:t>113.44</a:t>
+                      </a:r>
+                    </a:p>
+                  </a:txBody>
+                  <a:tcPr/>
+                </a:tc>
+                <a:tc>
+                  <a:txBody>
+                    <a:bodyPr/>
+                    <a:lstStyle/>
+                    <a:p>
+                      <a:pPr>
+                        <a:defRPr sz="1100"/>
+                      </a:pPr>
+                      <a:r>
+                        <a:t>-5.53</a:t>
                       </a:r>
                     </a:p>
                   </a:txBody>
@@ -4005,37 +4005,37 @@
                         <a:defRPr sz="1100"/>
                       </a:pPr>
                       <a:r>
-                        <a:t>31.68</a:t>
-                      </a:r>
-                    </a:p>
-                  </a:txBody>
-                  <a:tcPr/>
-                </a:tc>
-                <a:tc>
-                  <a:txBody>
-                    <a:bodyPr/>
-                    <a:lstStyle/>
-                    <a:p>
-                      <a:pPr>
-                        <a:defRPr sz="1100"/>
-                      </a:pPr>
-                      <a:r>
-                        <a:t>61.14</a:t>
-                      </a:r>
-                    </a:p>
-                  </a:txBody>
-                  <a:tcPr/>
-                </a:tc>
-                <a:tc>
-                  <a:txBody>
-                    <a:bodyPr/>
-                    <a:lstStyle/>
-                    <a:p>
-                      <a:pPr>
-                        <a:defRPr sz="1100"/>
-                      </a:pPr>
-                      <a:r>
-                        <a:t>-4.34</a:t>
+                        <a:t>32.17</a:t>
+                      </a:r>
+                    </a:p>
+                  </a:txBody>
+                  <a:tcPr/>
+                </a:tc>
+                <a:tc>
+                  <a:txBody>
+                    <a:bodyPr/>
+                    <a:lstStyle/>
+                    <a:p>
+                      <a:pPr>
+                        <a:defRPr sz="1100"/>
+                      </a:pPr>
+                      <a:r>
+                        <a:t>62.09</a:t>
+                      </a:r>
+                    </a:p>
+                  </a:txBody>
+                  <a:tcPr/>
+                </a:tc>
+                <a:tc>
+                  <a:txBody>
+                    <a:bodyPr/>
+                    <a:lstStyle/>
+                    <a:p>
+                      <a:pPr>
+                        <a:defRPr sz="1100"/>
+                      </a:pPr>
+                      <a:r>
+                        <a:t>-3.39</a:t>
                       </a:r>
                     </a:p>
                   </a:txBody>
@@ -4097,37 +4097,37 @@
                         <a:defRPr sz="1100"/>
                       </a:pPr>
                       <a:r>
-                        <a:t>28.5</a:t>
-                      </a:r>
-                    </a:p>
-                  </a:txBody>
-                  <a:tcPr/>
-                </a:tc>
-                <a:tc>
-                  <a:txBody>
-                    <a:bodyPr/>
-                    <a:lstStyle/>
-                    <a:p>
-                      <a:pPr>
-                        <a:defRPr sz="1100"/>
-                      </a:pPr>
-                      <a:r>
-                        <a:t>26.5</a:t>
-                      </a:r>
-                    </a:p>
-                  </a:txBody>
-                  <a:tcPr/>
-                </a:tc>
-                <a:tc>
-                  <a:txBody>
-                    <a:bodyPr/>
-                    <a:lstStyle/>
-                    <a:p>
-                      <a:pPr>
-                        <a:defRPr sz="1100"/>
-                      </a:pPr>
-                      <a:r>
-                        <a:t>0.57</a:t>
+                        <a:t>28.46</a:t>
+                      </a:r>
+                    </a:p>
+                  </a:txBody>
+                  <a:tcPr/>
+                </a:tc>
+                <a:tc>
+                  <a:txBody>
+                    <a:bodyPr/>
+                    <a:lstStyle/>
+                    <a:p>
+                      <a:pPr>
+                        <a:defRPr sz="1100"/>
+                      </a:pPr>
+                      <a:r>
+                        <a:t>26.47</a:t>
+                      </a:r>
+                    </a:p>
+                  </a:txBody>
+                  <a:tcPr/>
+                </a:tc>
+                <a:tc>
+                  <a:txBody>
+                    <a:bodyPr/>
+                    <a:lstStyle/>
+                    <a:p>
+                      <a:pPr>
+                        <a:defRPr sz="1100"/>
+                      </a:pPr>
+                      <a:r>
+                        <a:t>0.53</a:t>
                       </a:r>
                     </a:p>
                   </a:txBody>
@@ -4189,37 +4189,37 @@
                         <a:defRPr sz="1100"/>
                       </a:pPr>
                       <a:r>
-                        <a:t>10.38</a:t>
-                      </a:r>
-                    </a:p>
-                  </a:txBody>
-                  <a:tcPr/>
-                </a:tc>
-                <a:tc>
-                  <a:txBody>
-                    <a:bodyPr/>
-                    <a:lstStyle/>
-                    <a:p>
-                      <a:pPr>
-                        <a:defRPr sz="1100"/>
-                      </a:pPr>
-                      <a:r>
-                        <a:t>9.86</a:t>
-                      </a:r>
-                    </a:p>
-                  </a:txBody>
-                  <a:tcPr/>
-                </a:tc>
-                <a:tc>
-                  <a:txBody>
-                    <a:bodyPr/>
-                    <a:lstStyle/>
-                    <a:p>
-                      <a:pPr>
-                        <a:defRPr sz="1100"/>
-                      </a:pPr>
-                      <a:r>
-                        <a:t>-0.09</a:t>
+                        <a:t>10.5</a:t>
+                      </a:r>
+                    </a:p>
+                  </a:txBody>
+                  <a:tcPr/>
+                </a:tc>
+                <a:tc>
+                  <a:txBody>
+                    <a:bodyPr/>
+                    <a:lstStyle/>
+                    <a:p>
+                      <a:pPr>
+                        <a:defRPr sz="1100"/>
+                      </a:pPr>
+                      <a:r>
+                        <a:t>9.97</a:t>
+                      </a:r>
+                    </a:p>
+                  </a:txBody>
+                  <a:tcPr/>
+                </a:tc>
+                <a:tc>
+                  <a:txBody>
+                    <a:bodyPr/>
+                    <a:lstStyle/>
+                    <a:p>
+                      <a:pPr>
+                        <a:defRPr sz="1100"/>
+                      </a:pPr>
+                      <a:r>
+                        <a:t>0.03</a:t>
                       </a:r>
                     </a:p>
                   </a:txBody>
@@ -4281,37 +4281,37 @@
                         <a:defRPr sz="1100"/>
                       </a:pPr>
                       <a:r>
-                        <a:t>17.33</a:t>
-                      </a:r>
-                    </a:p>
-                  </a:txBody>
-                  <a:tcPr/>
-                </a:tc>
-                <a:tc>
-                  <a:txBody>
-                    <a:bodyPr/>
-                    <a:lstStyle/>
-                    <a:p>
-                      <a:pPr>
-                        <a:defRPr sz="1100"/>
-                      </a:pPr>
-                      <a:r>
-                        <a:t>8.66</a:t>
-                      </a:r>
-                    </a:p>
-                  </a:txBody>
-                  <a:tcPr/>
-                </a:tc>
-                <a:tc>
-                  <a:txBody>
-                    <a:bodyPr/>
-                    <a:lstStyle/>
-                    <a:p>
-                      <a:pPr>
-                        <a:defRPr sz="1100"/>
-                      </a:pPr>
-                      <a:r>
-                        <a:t>-0.1</a:t>
+                        <a:t>16.81</a:t>
+                      </a:r>
+                    </a:p>
+                  </a:txBody>
+                  <a:tcPr/>
+                </a:tc>
+                <a:tc>
+                  <a:txBody>
+                    <a:bodyPr/>
+                    <a:lstStyle/>
+                    <a:p>
+                      <a:pPr>
+                        <a:defRPr sz="1100"/>
+                      </a:pPr>
+                      <a:r>
+                        <a:t>8.4</a:t>
+                      </a:r>
+                    </a:p>
+                  </a:txBody>
+                  <a:tcPr/>
+                </a:tc>
+                <a:tc>
+                  <a:txBody>
+                    <a:bodyPr/>
+                    <a:lstStyle/>
+                    <a:p>
+                      <a:pPr>
+                        <a:defRPr sz="1100"/>
+                      </a:pPr>
+                      <a:r>
+                        <a:t>-0.36</a:t>
                       </a:r>
                     </a:p>
                   </a:txBody>
@@ -4373,37 +4373,37 @@
                         <a:defRPr sz="1100"/>
                       </a:pPr>
                       <a:r>
-                        <a:t>35.3</a:t>
-                      </a:r>
-                    </a:p>
-                  </a:txBody>
-                  <a:tcPr/>
-                </a:tc>
-                <a:tc>
-                  <a:txBody>
-                    <a:bodyPr/>
-                    <a:lstStyle/>
-                    <a:p>
-                      <a:pPr>
-                        <a:defRPr sz="1100"/>
-                      </a:pPr>
-                      <a:r>
-                        <a:t>21.53</a:t>
-                      </a:r>
-                    </a:p>
-                  </a:txBody>
-                  <a:tcPr/>
-                </a:tc>
-                <a:tc>
-                  <a:txBody>
-                    <a:bodyPr/>
-                    <a:lstStyle/>
-                    <a:p>
-                      <a:pPr>
-                        <a:defRPr sz="1100"/>
-                      </a:pPr>
-                      <a:r>
-                        <a:t>-0.35</a:t>
+                        <a:t>38.83</a:t>
+                      </a:r>
+                    </a:p>
+                  </a:txBody>
+                  <a:tcPr/>
+                </a:tc>
+                <a:tc>
+                  <a:txBody>
+                    <a:bodyPr/>
+                    <a:lstStyle/>
+                    <a:p>
+                      <a:pPr>
+                        <a:defRPr sz="1100"/>
+                      </a:pPr>
+                      <a:r>
+                        <a:t>23.69</a:t>
+                      </a:r>
+                    </a:p>
+                  </a:txBody>
+                  <a:tcPr/>
+                </a:tc>
+                <a:tc>
+                  <a:txBody>
+                    <a:bodyPr/>
+                    <a:lstStyle/>
+                    <a:p>
+                      <a:pPr>
+                        <a:defRPr sz="1100"/>
+                      </a:pPr>
+                      <a:r>
+                        <a:t>1.81</a:t>
                       </a:r>
                     </a:p>
                   </a:txBody>
@@ -4465,37 +4465,37 @@
                         <a:defRPr sz="1100"/>
                       </a:pPr>
                       <a:r>
-                        <a:t>134.99</a:t>
-                      </a:r>
-                    </a:p>
-                  </a:txBody>
-                  <a:tcPr/>
-                </a:tc>
-                <a:tc>
-                  <a:txBody>
-                    <a:bodyPr/>
-                    <a:lstStyle/>
-                    <a:p>
-                      <a:pPr>
-                        <a:defRPr sz="1100"/>
-                      </a:pPr>
-                      <a:r>
-                        <a:t>6.75</a:t>
-                      </a:r>
-                    </a:p>
-                  </a:txBody>
-                  <a:tcPr/>
-                </a:tc>
-                <a:tc>
-                  <a:txBody>
-                    <a:bodyPr/>
-                    <a:lstStyle/>
-                    <a:p>
-                      <a:pPr>
-                        <a:defRPr sz="1100"/>
-                      </a:pPr>
-                      <a:r>
-                        <a:t>-0.09</a:t>
+                        <a:t>133.58</a:t>
+                      </a:r>
+                    </a:p>
+                  </a:txBody>
+                  <a:tcPr/>
+                </a:tc>
+                <a:tc>
+                  <a:txBody>
+                    <a:bodyPr/>
+                    <a:lstStyle/>
+                    <a:p>
+                      <a:pPr>
+                        <a:defRPr sz="1100"/>
+                      </a:pPr>
+                      <a:r>
+                        <a:t>6.68</a:t>
+                      </a:r>
+                    </a:p>
+                  </a:txBody>
+                  <a:tcPr/>
+                </a:tc>
+                <a:tc>
+                  <a:txBody>
+                    <a:bodyPr/>
+                    <a:lstStyle/>
+                    <a:p>
+                      <a:pPr>
+                        <a:defRPr sz="1100"/>
+                      </a:pPr>
+                      <a:r>
+                        <a:t>-0.16</a:t>
                       </a:r>
                     </a:p>
                   </a:txBody>
@@ -4557,37 +4557,37 @@
                         <a:defRPr sz="1100"/>
                       </a:pPr>
                       <a:r>
-                        <a:t>7.12</a:t>
-                      </a:r>
-                    </a:p>
-                  </a:txBody>
-                  <a:tcPr/>
-                </a:tc>
-                <a:tc>
-                  <a:txBody>
-                    <a:bodyPr/>
-                    <a:lstStyle/>
-                    <a:p>
-                      <a:pPr>
-                        <a:defRPr sz="1100"/>
-                      </a:pPr>
-                      <a:r>
-                        <a:t>3.56</a:t>
-                      </a:r>
-                    </a:p>
-                  </a:txBody>
-                  <a:tcPr/>
-                </a:tc>
-                <a:tc>
-                  <a:txBody>
-                    <a:bodyPr/>
-                    <a:lstStyle/>
-                    <a:p>
-                      <a:pPr>
-                        <a:defRPr sz="1100"/>
-                      </a:pPr>
-                      <a:r>
-                        <a:t>-0.1</a:t>
+                        <a:t>7.36</a:t>
+                      </a:r>
+                    </a:p>
+                  </a:txBody>
+                  <a:tcPr/>
+                </a:tc>
+                <a:tc>
+                  <a:txBody>
+                    <a:bodyPr/>
+                    <a:lstStyle/>
+                    <a:p>
+                      <a:pPr>
+                        <a:defRPr sz="1100"/>
+                      </a:pPr>
+                      <a:r>
+                        <a:t>3.68</a:t>
+                      </a:r>
+                    </a:p>
+                  </a:txBody>
+                  <a:tcPr/>
+                </a:tc>
+                <a:tc>
+                  <a:txBody>
+                    <a:bodyPr/>
+                    <a:lstStyle/>
+                    <a:p>
+                      <a:pPr>
+                        <a:defRPr sz="1100"/>
+                      </a:pPr>
+                      <a:r>
+                        <a:t>0.02</a:t>
                       </a:r>
                     </a:p>
                   </a:txBody>
@@ -4649,37 +4649,37 @@
                         <a:defRPr sz="1100"/>
                       </a:pPr>
                       <a:r>
-                        <a:t>20.5</a:t>
-                      </a:r>
-                    </a:p>
-                  </a:txBody>
-                  <a:tcPr/>
-                </a:tc>
-                <a:tc>
-                  <a:txBody>
-                    <a:bodyPr/>
-                    <a:lstStyle/>
-                    <a:p>
-                      <a:pPr>
-                        <a:defRPr sz="1100"/>
-                      </a:pPr>
-                      <a:r>
-                        <a:t>1.02</a:t>
-                      </a:r>
-                    </a:p>
-                  </a:txBody>
-                  <a:tcPr/>
-                </a:tc>
-                <a:tc>
-                  <a:txBody>
-                    <a:bodyPr/>
-                    <a:lstStyle/>
-                    <a:p>
-                      <a:pPr>
-                        <a:defRPr sz="1100"/>
-                      </a:pPr>
-                      <a:r>
-                        <a:t>-0.01</a:t>
+                        <a:t>19.86</a:t>
+                      </a:r>
+                    </a:p>
+                  </a:txBody>
+                  <a:tcPr/>
+                </a:tc>
+                <a:tc>
+                  <a:txBody>
+                    <a:bodyPr/>
+                    <a:lstStyle/>
+                    <a:p>
+                      <a:pPr>
+                        <a:defRPr sz="1100"/>
+                      </a:pPr>
+                      <a:r>
+                        <a:t>0.99</a:t>
+                      </a:r>
+                    </a:p>
+                  </a:txBody>
+                  <a:tcPr/>
+                </a:tc>
+                <a:tc>
+                  <a:txBody>
+                    <a:bodyPr/>
+                    <a:lstStyle/>
+                    <a:p>
+                      <a:pPr>
+                        <a:defRPr sz="1100"/>
+                      </a:pPr>
+                      <a:r>
+                        <a:t>-0.05</a:t>
                       </a:r>
                     </a:p>
                   </a:txBody>
@@ -4741,37 +4741,37 @@
                         <a:defRPr sz="1100"/>
                       </a:pPr>
                       <a:r>
-                        <a:t>178.5</a:t>
-                      </a:r>
-                    </a:p>
-                  </a:txBody>
-                  <a:tcPr/>
-                </a:tc>
-                <a:tc>
-                  <a:txBody>
-                    <a:bodyPr/>
-                    <a:lstStyle/>
-                    <a:p>
-                      <a:pPr>
-                        <a:defRPr sz="1100"/>
-                      </a:pPr>
-                      <a:r>
-                        <a:t>17.85</a:t>
-                      </a:r>
-                    </a:p>
-                  </a:txBody>
-                  <a:tcPr/>
-                </a:tc>
-                <a:tc>
-                  <a:txBody>
-                    <a:bodyPr/>
-                    <a:lstStyle/>
-                    <a:p>
-                      <a:pPr>
-                        <a:defRPr sz="1100"/>
-                      </a:pPr>
-                      <a:r>
-                        <a:t>0.09</a:t>
+                        <a:t>186.09</a:t>
+                      </a:r>
+                    </a:p>
+                  </a:txBody>
+                  <a:tcPr/>
+                </a:tc>
+                <a:tc>
+                  <a:txBody>
+                    <a:bodyPr/>
+                    <a:lstStyle/>
+                    <a:p>
+                      <a:pPr>
+                        <a:defRPr sz="1100"/>
+                      </a:pPr>
+                      <a:r>
+                        <a:t>18.61</a:t>
+                      </a:r>
+                    </a:p>
+                  </a:txBody>
+                  <a:tcPr/>
+                </a:tc>
+                <a:tc>
+                  <a:txBody>
+                    <a:bodyPr/>
+                    <a:lstStyle/>
+                    <a:p>
+                      <a:pPr>
+                        <a:defRPr sz="1100"/>
+                      </a:pPr>
+                      <a:r>
+                        <a:t>0.85</a:t>
                       </a:r>
                     </a:p>
                   </a:txBody>
@@ -4833,37 +4833,37 @@
                         <a:defRPr sz="1100"/>
                       </a:pPr>
                       <a:r>
-                        <a:t>156.67</a:t>
-                      </a:r>
-                    </a:p>
-                  </a:txBody>
-                  <a:tcPr/>
-                </a:tc>
-                <a:tc>
-                  <a:txBody>
-                    <a:bodyPr/>
-                    <a:lstStyle/>
-                    <a:p>
-                      <a:pPr>
-                        <a:defRPr sz="1100"/>
-                      </a:pPr>
-                      <a:r>
-                        <a:t>15.67</a:t>
-                      </a:r>
-                    </a:p>
-                  </a:txBody>
-                  <a:tcPr/>
-                </a:tc>
-                <a:tc>
-                  <a:txBody>
-                    <a:bodyPr/>
-                    <a:lstStyle/>
-                    <a:p>
-                      <a:pPr>
-                        <a:defRPr sz="1100"/>
-                      </a:pPr>
-                      <a:r>
-                        <a:t>-0.1</a:t>
+                        <a:t>157.71</a:t>
+                      </a:r>
+                    </a:p>
+                  </a:txBody>
+                  <a:tcPr/>
+                </a:tc>
+                <a:tc>
+                  <a:txBody>
+                    <a:bodyPr/>
+                    <a:lstStyle/>
+                    <a:p>
+                      <a:pPr>
+                        <a:defRPr sz="1100"/>
+                      </a:pPr>
+                      <a:r>
+                        <a:t>15.77</a:t>
+                      </a:r>
+                    </a:p>
+                  </a:txBody>
+                  <a:tcPr/>
+                </a:tc>
+                <a:tc>
+                  <a:txBody>
+                    <a:bodyPr/>
+                    <a:lstStyle/>
+                    <a:p>
+                      <a:pPr>
+                        <a:defRPr sz="1100"/>
+                      </a:pPr>
+                      <a:r>
+                        <a:t>0.0</a:t>
                       </a:r>
                     </a:p>
                   </a:txBody>
@@ -4949,7 +4949,7 @@
               <a:defRPr sz="1500"/>
             </a:pPr>
             <a:r>
-              <a:t>紫金矿业（601899，有色金属）：综合80.5分；基本面优秀，具备中长期配置价值；中期趋势向上，可关注/持有。</a:t>
+              <a:t>紫金矿业（601899，有色金属）：综合82.5分；基本面优秀，具备中长期配置价值；中期趋势向上，可关注/持有。</a:t>
             </a:r>
           </a:p>
           <a:p>
@@ -4965,7 +4965,7 @@
               <a:defRPr sz="1500"/>
             </a:pPr>
             <a:r>
-              <a:t>中国平安（601318，保险）：综合69.0分；基本面优秀，具备中长期配置价值；趋势中性，观望。</a:t>
+              <a:t>宁德时代（300750，新能源电池）：综合71.0分；基本面优秀，具备中长期配置价值；趋势中性，观望。</a:t>
             </a:r>
           </a:p>
           <a:p>
@@ -4973,7 +4973,7 @@
               <a:defRPr sz="1500"/>
             </a:pPr>
             <a:r>
-              <a:t>宁德时代（300750，新能源电池）：综合68.5分；基本面优秀，具备中长期配置价值；趋势中性，观望。</a:t>
+              <a:t>中国平安（601318，保险）：综合69.0分；基本面优秀，具备中长期配置价值；趋势中性，观望。</a:t>
             </a:r>
           </a:p>
           <a:p>
@@ -4981,7 +4981,7 @@
               <a:defRPr sz="1500"/>
             </a:pPr>
             <a:r>
-              <a:t>美的集团（000333，家电）：综合67.5分；基本面优秀，具备中长期配置价值；中期趋势向上，可关注/持有。</a:t>
+              <a:t>美的集团（000333，家电）：综合65.5分；基本面优秀，具备中长期配置价值；趋势中性，观望。</a:t>
             </a:r>
           </a:p>
         </p:txBody>

--- a/outputs/12_中期路演.pptx
+++ b/outputs/12_中期路演.pptx
@@ -3167,7 +3167,7 @@
               <a:defRPr sz="1500"/>
             </a:pPr>
             <a:r>
-              <a:t>数据截止：2026-09-16</a:t>
+              <a:t>数据截止：2026-09-15</a:t>
             </a:r>
           </a:p>
         </p:txBody>
@@ -3255,7 +3255,7 @@
               <a:defRPr sz="1500"/>
             </a:pPr>
             <a:r>
-              <a:t>当前总资产：487.85万元</a:t>
+              <a:t>当前总资产：484.18万元</a:t>
             </a:r>
           </a:p>
           <a:p>
@@ -3263,7 +3263,7 @@
               <a:defRPr sz="1500"/>
             </a:pPr>
             <a:r>
-              <a:t>累计收益率：-2.43%</a:t>
+              <a:t>累计收益率：-3.16%</a:t>
             </a:r>
           </a:p>
           <a:p>
@@ -3271,7 +3271,7 @@
               <a:defRPr sz="1500"/>
             </a:pPr>
             <a:r>
-              <a:t>同期沪深300：-1.49%</a:t>
+              <a:t>同期沪深300：-2.15%</a:t>
             </a:r>
           </a:p>
           <a:p>
@@ -3279,7 +3279,7 @@
               <a:defRPr sz="1500"/>
             </a:pPr>
             <a:r>
-              <a:t>现金：80.26万元（16.5%）</a:t>
+              <a:t>现金：80.26万元（16.6%）</a:t>
             </a:r>
           </a:p>
           <a:p>
@@ -3821,37 +3821,37 @@
                         <a:defRPr sz="1100"/>
                       </a:pPr>
                       <a:r>
-                        <a:t>4.55</a:t>
-                      </a:r>
-                    </a:p>
-                  </a:txBody>
-                  <a:tcPr/>
-                </a:tc>
-                <a:tc>
-                  <a:txBody>
-                    <a:bodyPr/>
-                    <a:lstStyle/>
-                    <a:p>
-                      <a:pPr>
-                        <a:defRPr sz="1100"/>
-                      </a:pPr>
-                      <a:r>
-                        <a:t>117.8</a:t>
-                      </a:r>
-                    </a:p>
-                  </a:txBody>
-                  <a:tcPr/>
-                </a:tc>
-                <a:tc>
-                  <a:txBody>
-                    <a:bodyPr/>
-                    <a:lstStyle/>
-                    <a:p>
-                      <a:pPr>
-                        <a:defRPr sz="1100"/>
-                      </a:pPr>
-                      <a:r>
-                        <a:t>-2.36</a:t>
+                        <a:t>4.523</a:t>
+                      </a:r>
+                    </a:p>
+                  </a:txBody>
+                  <a:tcPr/>
+                </a:tc>
+                <a:tc>
+                  <a:txBody>
+                    <a:bodyPr/>
+                    <a:lstStyle/>
+                    <a:p>
+                      <a:pPr>
+                        <a:defRPr sz="1100"/>
+                      </a:pPr>
+                      <a:r>
+                        <a:t>117.1</a:t>
+                      </a:r>
+                    </a:p>
+                  </a:txBody>
+                  <a:tcPr/>
+                </a:tc>
+                <a:tc>
+                  <a:txBody>
+                    <a:bodyPr/>
+                    <a:lstStyle/>
+                    <a:p>
+                      <a:pPr>
+                        <a:defRPr sz="1100"/>
+                      </a:pPr>
+                      <a:r>
+                        <a:t>-3.06</a:t>
                       </a:r>
                     </a:p>
                   </a:txBody>
@@ -3913,37 +3913,37 @@
                         <a:defRPr sz="1100"/>
                       </a:pPr>
                       <a:r>
-                        <a:t>53.51</a:t>
-                      </a:r>
-                    </a:p>
-                  </a:txBody>
-                  <a:tcPr/>
-                </a:tc>
-                <a:tc>
-                  <a:txBody>
-                    <a:bodyPr/>
-                    <a:lstStyle/>
-                    <a:p>
-                      <a:pPr>
-                        <a:defRPr sz="1100"/>
-                      </a:pPr>
-                      <a:r>
-                        <a:t>113.44</a:t>
-                      </a:r>
-                    </a:p>
-                  </a:txBody>
-                  <a:tcPr/>
-                </a:tc>
-                <a:tc>
-                  <a:txBody>
-                    <a:bodyPr/>
-                    <a:lstStyle/>
-                    <a:p>
-                      <a:pPr>
-                        <a:defRPr sz="1100"/>
-                      </a:pPr>
-                      <a:r>
-                        <a:t>-5.53</a:t>
+                        <a:t>53.9</a:t>
+                      </a:r>
+                    </a:p>
+                  </a:txBody>
+                  <a:tcPr/>
+                </a:tc>
+                <a:tc>
+                  <a:txBody>
+                    <a:bodyPr/>
+                    <a:lstStyle/>
+                    <a:p>
+                      <a:pPr>
+                        <a:defRPr sz="1100"/>
+                      </a:pPr>
+                      <a:r>
+                        <a:t>114.27</a:t>
+                      </a:r>
+                    </a:p>
+                  </a:txBody>
+                  <a:tcPr/>
+                </a:tc>
+                <a:tc>
+                  <a:txBody>
+                    <a:bodyPr/>
+                    <a:lstStyle/>
+                    <a:p>
+                      <a:pPr>
+                        <a:defRPr sz="1100"/>
+                      </a:pPr>
+                      <a:r>
+                        <a:t>-4.71</a:t>
                       </a:r>
                     </a:p>
                   </a:txBody>
@@ -4005,37 +4005,37 @@
                         <a:defRPr sz="1100"/>
                       </a:pPr>
                       <a:r>
-                        <a:t>32.17</a:t>
-                      </a:r>
-                    </a:p>
-                  </a:txBody>
-                  <a:tcPr/>
-                </a:tc>
-                <a:tc>
-                  <a:txBody>
-                    <a:bodyPr/>
-                    <a:lstStyle/>
-                    <a:p>
-                      <a:pPr>
-                        <a:defRPr sz="1100"/>
-                      </a:pPr>
-                      <a:r>
-                        <a:t>62.09</a:t>
-                      </a:r>
-                    </a:p>
-                  </a:txBody>
-                  <a:tcPr/>
-                </a:tc>
-                <a:tc>
-                  <a:txBody>
-                    <a:bodyPr/>
-                    <a:lstStyle/>
-                    <a:p>
-                      <a:pPr>
-                        <a:defRPr sz="1100"/>
-                      </a:pPr>
-                      <a:r>
-                        <a:t>-3.39</a:t>
+                        <a:t>31.68</a:t>
+                      </a:r>
+                    </a:p>
+                  </a:txBody>
+                  <a:tcPr/>
+                </a:tc>
+                <a:tc>
+                  <a:txBody>
+                    <a:bodyPr/>
+                    <a:lstStyle/>
+                    <a:p>
+                      <a:pPr>
+                        <a:defRPr sz="1100"/>
+                      </a:pPr>
+                      <a:r>
+                        <a:t>61.14</a:t>
+                      </a:r>
+                    </a:p>
+                  </a:txBody>
+                  <a:tcPr/>
+                </a:tc>
+                <a:tc>
+                  <a:txBody>
+                    <a:bodyPr/>
+                    <a:lstStyle/>
+                    <a:p>
+                      <a:pPr>
+                        <a:defRPr sz="1100"/>
+                      </a:pPr>
+                      <a:r>
+                        <a:t>-4.34</a:t>
                       </a:r>
                     </a:p>
                   </a:txBody>
@@ -4097,37 +4097,37 @@
                         <a:defRPr sz="1100"/>
                       </a:pPr>
                       <a:r>
-                        <a:t>28.46</a:t>
-                      </a:r>
-                    </a:p>
-                  </a:txBody>
-                  <a:tcPr/>
-                </a:tc>
-                <a:tc>
-                  <a:txBody>
-                    <a:bodyPr/>
-                    <a:lstStyle/>
-                    <a:p>
-                      <a:pPr>
-                        <a:defRPr sz="1100"/>
-                      </a:pPr>
-                      <a:r>
-                        <a:t>26.47</a:t>
-                      </a:r>
-                    </a:p>
-                  </a:txBody>
-                  <a:tcPr/>
-                </a:tc>
-                <a:tc>
-                  <a:txBody>
-                    <a:bodyPr/>
-                    <a:lstStyle/>
-                    <a:p>
-                      <a:pPr>
-                        <a:defRPr sz="1100"/>
-                      </a:pPr>
-                      <a:r>
-                        <a:t>0.53</a:t>
+                        <a:t>28.5</a:t>
+                      </a:r>
+                    </a:p>
+                  </a:txBody>
+                  <a:tcPr/>
+                </a:tc>
+                <a:tc>
+                  <a:txBody>
+                    <a:bodyPr/>
+                    <a:lstStyle/>
+                    <a:p>
+                      <a:pPr>
+                        <a:defRPr sz="1100"/>
+                      </a:pPr>
+                      <a:r>
+                        <a:t>26.5</a:t>
+                      </a:r>
+                    </a:p>
+                  </a:txBody>
+                  <a:tcPr/>
+                </a:tc>
+                <a:tc>
+                  <a:txBody>
+                    <a:bodyPr/>
+                    <a:lstStyle/>
+                    <a:p>
+                      <a:pPr>
+                        <a:defRPr sz="1100"/>
+                      </a:pPr>
+                      <a:r>
+                        <a:t>0.57</a:t>
                       </a:r>
                     </a:p>
                   </a:txBody>
@@ -4189,37 +4189,37 @@
                         <a:defRPr sz="1100"/>
                       </a:pPr>
                       <a:r>
-                        <a:t>10.5</a:t>
-                      </a:r>
-                    </a:p>
-                  </a:txBody>
-                  <a:tcPr/>
-                </a:tc>
-                <a:tc>
-                  <a:txBody>
-                    <a:bodyPr/>
-                    <a:lstStyle/>
-                    <a:p>
-                      <a:pPr>
-                        <a:defRPr sz="1100"/>
-                      </a:pPr>
-                      <a:r>
-                        <a:t>9.97</a:t>
-                      </a:r>
-                    </a:p>
-                  </a:txBody>
-                  <a:tcPr/>
-                </a:tc>
-                <a:tc>
-                  <a:txBody>
-                    <a:bodyPr/>
-                    <a:lstStyle/>
-                    <a:p>
-                      <a:pPr>
-                        <a:defRPr sz="1100"/>
-                      </a:pPr>
-                      <a:r>
-                        <a:t>0.03</a:t>
+                        <a:t>10.38</a:t>
+                      </a:r>
+                    </a:p>
+                  </a:txBody>
+                  <a:tcPr/>
+                </a:tc>
+                <a:tc>
+                  <a:txBody>
+                    <a:bodyPr/>
+                    <a:lstStyle/>
+                    <a:p>
+                      <a:pPr>
+                        <a:defRPr sz="1100"/>
+                      </a:pPr>
+                      <a:r>
+                        <a:t>9.86</a:t>
+                      </a:r>
+                    </a:p>
+                  </a:txBody>
+                  <a:tcPr/>
+                </a:tc>
+                <a:tc>
+                  <a:txBody>
+                    <a:bodyPr/>
+                    <a:lstStyle/>
+                    <a:p>
+                      <a:pPr>
+                        <a:defRPr sz="1100"/>
+                      </a:pPr>
+                      <a:r>
+                        <a:t>-0.09</a:t>
                       </a:r>
                     </a:p>
                   </a:txBody>
@@ -4281,37 +4281,37 @@
                         <a:defRPr sz="1100"/>
                       </a:pPr>
                       <a:r>
-                        <a:t>16.81</a:t>
-                      </a:r>
-                    </a:p>
-                  </a:txBody>
-                  <a:tcPr/>
-                </a:tc>
-                <a:tc>
-                  <a:txBody>
-                    <a:bodyPr/>
-                    <a:lstStyle/>
-                    <a:p>
-                      <a:pPr>
-                        <a:defRPr sz="1100"/>
-                      </a:pPr>
-                      <a:r>
-                        <a:t>8.4</a:t>
-                      </a:r>
-                    </a:p>
-                  </a:txBody>
-                  <a:tcPr/>
-                </a:tc>
-                <a:tc>
-                  <a:txBody>
-                    <a:bodyPr/>
-                    <a:lstStyle/>
-                    <a:p>
-                      <a:pPr>
-                        <a:defRPr sz="1100"/>
-                      </a:pPr>
-                      <a:r>
-                        <a:t>-0.36</a:t>
+                        <a:t>17.33</a:t>
+                      </a:r>
+                    </a:p>
+                  </a:txBody>
+                  <a:tcPr/>
+                </a:tc>
+                <a:tc>
+                  <a:txBody>
+                    <a:bodyPr/>
+                    <a:lstStyle/>
+                    <a:p>
+                      <a:pPr>
+                        <a:defRPr sz="1100"/>
+                      </a:pPr>
+                      <a:r>
+                        <a:t>8.66</a:t>
+                      </a:r>
+                    </a:p>
+                  </a:txBody>
+                  <a:tcPr/>
+                </a:tc>
+                <a:tc>
+                  <a:txBody>
+                    <a:bodyPr/>
+                    <a:lstStyle/>
+                    <a:p>
+                      <a:pPr>
+                        <a:defRPr sz="1100"/>
+                      </a:pPr>
+                      <a:r>
+                        <a:t>-0.1</a:t>
                       </a:r>
                     </a:p>
                   </a:txBody>
@@ -4373,37 +4373,37 @@
                         <a:defRPr sz="1100"/>
                       </a:pPr>
                       <a:r>
-                        <a:t>38.83</a:t>
-                      </a:r>
-                    </a:p>
-                  </a:txBody>
-                  <a:tcPr/>
-                </a:tc>
-                <a:tc>
-                  <a:txBody>
-                    <a:bodyPr/>
-                    <a:lstStyle/>
-                    <a:p>
-                      <a:pPr>
-                        <a:defRPr sz="1100"/>
-                      </a:pPr>
-                      <a:r>
-                        <a:t>23.69</a:t>
-                      </a:r>
-                    </a:p>
-                  </a:txBody>
-                  <a:tcPr/>
-                </a:tc>
-                <a:tc>
-                  <a:txBody>
-                    <a:bodyPr/>
-                    <a:lstStyle/>
-                    <a:p>
-                      <a:pPr>
-                        <a:defRPr sz="1100"/>
-                      </a:pPr>
-                      <a:r>
-                        <a:t>1.81</a:t>
+                        <a:t>35.3</a:t>
+                      </a:r>
+                    </a:p>
+                  </a:txBody>
+                  <a:tcPr/>
+                </a:tc>
+                <a:tc>
+                  <a:txBody>
+                    <a:bodyPr/>
+                    <a:lstStyle/>
+                    <a:p>
+                      <a:pPr>
+                        <a:defRPr sz="1100"/>
+                      </a:pPr>
+                      <a:r>
+                        <a:t>21.53</a:t>
+                      </a:r>
+                    </a:p>
+                  </a:txBody>
+                  <a:tcPr/>
+                </a:tc>
+                <a:tc>
+                  <a:txBody>
+                    <a:bodyPr/>
+                    <a:lstStyle/>
+                    <a:p>
+                      <a:pPr>
+                        <a:defRPr sz="1100"/>
+                      </a:pPr>
+                      <a:r>
+                        <a:t>-0.35</a:t>
                       </a:r>
                     </a:p>
                   </a:txBody>
@@ -4465,37 +4465,37 @@
                         <a:defRPr sz="1100"/>
                       </a:pPr>
                       <a:r>
-                        <a:t>133.58</a:t>
-                      </a:r>
-                    </a:p>
-                  </a:txBody>
-                  <a:tcPr/>
-                </a:tc>
-                <a:tc>
-                  <a:txBody>
-                    <a:bodyPr/>
-                    <a:lstStyle/>
-                    <a:p>
-                      <a:pPr>
-                        <a:defRPr sz="1100"/>
-                      </a:pPr>
-                      <a:r>
-                        <a:t>6.68</a:t>
-                      </a:r>
-                    </a:p>
-                  </a:txBody>
-                  <a:tcPr/>
-                </a:tc>
-                <a:tc>
-                  <a:txBody>
-                    <a:bodyPr/>
-                    <a:lstStyle/>
-                    <a:p>
-                      <a:pPr>
-                        <a:defRPr sz="1100"/>
-                      </a:pPr>
-                      <a:r>
-                        <a:t>-0.16</a:t>
+                        <a:t>134.99</a:t>
+                      </a:r>
+                    </a:p>
+                  </a:txBody>
+                  <a:tcPr/>
+                </a:tc>
+                <a:tc>
+                  <a:txBody>
+                    <a:bodyPr/>
+                    <a:lstStyle/>
+                    <a:p>
+                      <a:pPr>
+                        <a:defRPr sz="1100"/>
+                      </a:pPr>
+                      <a:r>
+                        <a:t>6.75</a:t>
+                      </a:r>
+                    </a:p>
+                  </a:txBody>
+                  <a:tcPr/>
+                </a:tc>
+                <a:tc>
+                  <a:txBody>
+                    <a:bodyPr/>
+                    <a:lstStyle/>
+                    <a:p>
+                      <a:pPr>
+                        <a:defRPr sz="1100"/>
+                      </a:pPr>
+                      <a:r>
+                        <a:t>-0.09</a:t>
                       </a:r>
                     </a:p>
                   </a:txBody>
@@ -4557,37 +4557,37 @@
                         <a:defRPr sz="1100"/>
                       </a:pPr>
                       <a:r>
-                        <a:t>7.36</a:t>
-                      </a:r>
-                    </a:p>
-                  </a:txBody>
-                  <a:tcPr/>
-                </a:tc>
-                <a:tc>
-                  <a:txBody>
-                    <a:bodyPr/>
-                    <a:lstStyle/>
-                    <a:p>
-                      <a:pPr>
-                        <a:defRPr sz="1100"/>
-                      </a:pPr>
-                      <a:r>
-                        <a:t>3.68</a:t>
-                      </a:r>
-                    </a:p>
-                  </a:txBody>
-                  <a:tcPr/>
-                </a:tc>
-                <a:tc>
-                  <a:txBody>
-                    <a:bodyPr/>
-                    <a:lstStyle/>
-                    <a:p>
-                      <a:pPr>
-                        <a:defRPr sz="1100"/>
-                      </a:pPr>
-                      <a:r>
-                        <a:t>0.02</a:t>
+                        <a:t>7.12</a:t>
+                      </a:r>
+                    </a:p>
+                  </a:txBody>
+                  <a:tcPr/>
+                </a:tc>
+                <a:tc>
+                  <a:txBody>
+                    <a:bodyPr/>
+                    <a:lstStyle/>
+                    <a:p>
+                      <a:pPr>
+                        <a:defRPr sz="1100"/>
+                      </a:pPr>
+                      <a:r>
+                        <a:t>3.56</a:t>
+                      </a:r>
+                    </a:p>
+                  </a:txBody>
+                  <a:tcPr/>
+                </a:tc>
+                <a:tc>
+                  <a:txBody>
+                    <a:bodyPr/>
+                    <a:lstStyle/>
+                    <a:p>
+                      <a:pPr>
+                        <a:defRPr sz="1100"/>
+                      </a:pPr>
+                      <a:r>
+                        <a:t>-0.1</a:t>
                       </a:r>
                     </a:p>
                   </a:txBody>
@@ -4649,37 +4649,37 @@
                         <a:defRPr sz="1100"/>
                       </a:pPr>
                       <a:r>
-                        <a:t>19.86</a:t>
-                      </a:r>
-                    </a:p>
-                  </a:txBody>
-                  <a:tcPr/>
-                </a:tc>
-                <a:tc>
-                  <a:txBody>
-                    <a:bodyPr/>
-                    <a:lstStyle/>
-                    <a:p>
-                      <a:pPr>
-                        <a:defRPr sz="1100"/>
-                      </a:pPr>
-                      <a:r>
-                        <a:t>0.99</a:t>
-                      </a:r>
-                    </a:p>
-                  </a:txBody>
-                  <a:tcPr/>
-                </a:tc>
-                <a:tc>
-                  <a:txBody>
-                    <a:bodyPr/>
-                    <a:lstStyle/>
-                    <a:p>
-                      <a:pPr>
-                        <a:defRPr sz="1100"/>
-                      </a:pPr>
-                      <a:r>
-                        <a:t>-0.05</a:t>
+                        <a:t>20.5</a:t>
+                      </a:r>
+                    </a:p>
+                  </a:txBody>
+                  <a:tcPr/>
+                </a:tc>
+                <a:tc>
+                  <a:txBody>
+                    <a:bodyPr/>
+                    <a:lstStyle/>
+                    <a:p>
+                      <a:pPr>
+                        <a:defRPr sz="1100"/>
+                      </a:pPr>
+                      <a:r>
+                        <a:t>1.02</a:t>
+                      </a:r>
+                    </a:p>
+                  </a:txBody>
+                  <a:tcPr/>
+                </a:tc>
+                <a:tc>
+                  <a:txBody>
+                    <a:bodyPr/>
+                    <a:lstStyle/>
+                    <a:p>
+                      <a:pPr>
+                        <a:defRPr sz="1100"/>
+                      </a:pPr>
+                      <a:r>
+                        <a:t>-0.01</a:t>
                       </a:r>
                     </a:p>
                   </a:txBody>
@@ -4741,37 +4741,37 @@
                         <a:defRPr sz="1100"/>
                       </a:pPr>
                       <a:r>
-                        <a:t>186.09</a:t>
-                      </a:r>
-                    </a:p>
-                  </a:txBody>
-                  <a:tcPr/>
-                </a:tc>
-                <a:tc>
-                  <a:txBody>
-                    <a:bodyPr/>
-                    <a:lstStyle/>
-                    <a:p>
-                      <a:pPr>
-                        <a:defRPr sz="1100"/>
-                      </a:pPr>
-                      <a:r>
-                        <a:t>18.61</a:t>
-                      </a:r>
-                    </a:p>
-                  </a:txBody>
-                  <a:tcPr/>
-                </a:tc>
-                <a:tc>
-                  <a:txBody>
-                    <a:bodyPr/>
-                    <a:lstStyle/>
-                    <a:p>
-                      <a:pPr>
-                        <a:defRPr sz="1100"/>
-                      </a:pPr>
-                      <a:r>
-                        <a:t>0.85</a:t>
+                        <a:t>178.5</a:t>
+                      </a:r>
+                    </a:p>
+                  </a:txBody>
+                  <a:tcPr/>
+                </a:tc>
+                <a:tc>
+                  <a:txBody>
+                    <a:bodyPr/>
+                    <a:lstStyle/>
+                    <a:p>
+                      <a:pPr>
+                        <a:defRPr sz="1100"/>
+                      </a:pPr>
+                      <a:r>
+                        <a:t>17.85</a:t>
+                      </a:r>
+                    </a:p>
+                  </a:txBody>
+                  <a:tcPr/>
+                </a:tc>
+                <a:tc>
+                  <a:txBody>
+                    <a:bodyPr/>
+                    <a:lstStyle/>
+                    <a:p>
+                      <a:pPr>
+                        <a:defRPr sz="1100"/>
+                      </a:pPr>
+                      <a:r>
+                        <a:t>0.09</a:t>
                       </a:r>
                     </a:p>
                   </a:txBody>
@@ -4833,37 +4833,37 @@
                         <a:defRPr sz="1100"/>
                       </a:pPr>
                       <a:r>
-                        <a:t>157.71</a:t>
-                      </a:r>
-                    </a:p>
-                  </a:txBody>
-                  <a:tcPr/>
-                </a:tc>
-                <a:tc>
-                  <a:txBody>
-                    <a:bodyPr/>
-                    <a:lstStyle/>
-                    <a:p>
-                      <a:pPr>
-                        <a:defRPr sz="1100"/>
-                      </a:pPr>
-                      <a:r>
-                        <a:t>15.77</a:t>
-                      </a:r>
-                    </a:p>
-                  </a:txBody>
-                  <a:tcPr/>
-                </a:tc>
-                <a:tc>
-                  <a:txBody>
-                    <a:bodyPr/>
-                    <a:lstStyle/>
-                    <a:p>
-                      <a:pPr>
-                        <a:defRPr sz="1100"/>
-                      </a:pPr>
-                      <a:r>
-                        <a:t>0.0</a:t>
+                        <a:t>156.67</a:t>
+                      </a:r>
+                    </a:p>
+                  </a:txBody>
+                  <a:tcPr/>
+                </a:tc>
+                <a:tc>
+                  <a:txBody>
+                    <a:bodyPr/>
+                    <a:lstStyle/>
+                    <a:p>
+                      <a:pPr>
+                        <a:defRPr sz="1100"/>
+                      </a:pPr>
+                      <a:r>
+                        <a:t>15.67</a:t>
+                      </a:r>
+                    </a:p>
+                  </a:txBody>
+                  <a:tcPr/>
+                </a:tc>
+                <a:tc>
+                  <a:txBody>
+                    <a:bodyPr/>
+                    <a:lstStyle/>
+                    <a:p>
+                      <a:pPr>
+                        <a:defRPr sz="1100"/>
+                      </a:pPr>
+                      <a:r>
+                        <a:t>-0.1</a:t>
                       </a:r>
                     </a:p>
                   </a:txBody>
@@ -4949,7 +4949,7 @@
               <a:defRPr sz="1500"/>
             </a:pPr>
             <a:r>
-              <a:t>紫金矿业（601899，有色金属）：综合82.5分；基本面优秀，具备中长期配置价值；中期趋势向上，可关注/持有。</a:t>
+              <a:t>紫金矿业（601899，有色金属）：综合80.5分；基本面优秀，具备中长期配置价值；中期趋势向上，可关注/持有。</a:t>
             </a:r>
           </a:p>
           <a:p>
@@ -4965,7 +4965,7 @@
               <a:defRPr sz="1500"/>
             </a:pPr>
             <a:r>
-              <a:t>宁德时代（300750，新能源电池）：综合71.0分；基本面优秀，具备中长期配置价值；趋势中性，观望。</a:t>
+              <a:t>中国平安（601318，保险）：综合69.0分；基本面优秀，具备中长期配置价值；趋势中性，观望。</a:t>
             </a:r>
           </a:p>
           <a:p>
@@ -4973,7 +4973,7 @@
               <a:defRPr sz="1500"/>
             </a:pPr>
             <a:r>
-              <a:t>中国平安（601318，保险）：综合69.0分；基本面优秀，具备中长期配置价值；趋势中性，观望。</a:t>
+              <a:t>宁德时代（300750，新能源电池）：综合68.5分；基本面优秀，具备中长期配置价值；趋势中性，观望。</a:t>
             </a:r>
           </a:p>
           <a:p>
@@ -4981,7 +4981,7 @@
               <a:defRPr sz="1500"/>
             </a:pPr>
             <a:r>
-              <a:t>美的集团（000333，家电）：综合65.5分；基本面优秀，具备中长期配置价值；趋势中性，观望。</a:t>
+              <a:t>美的集团（000333，家电）：综合67.5分；基本面优秀，具备中长期配置价值；中期趋势向上，可关注/持有。</a:t>
             </a:r>
           </a:p>
         </p:txBody>

--- a/outputs/12_中期路演.pptx
+++ b/outputs/12_中期路演.pptx
@@ -3167,7 +3167,7 @@
               <a:defRPr sz="1500"/>
             </a:pPr>
             <a:r>
-              <a:t>数据截止：2026-09-15</a:t>
+              <a:t>数据截止：2026-09-16</a:t>
             </a:r>
           </a:p>
         </p:txBody>
@@ -3255,7 +3255,7 @@
               <a:defRPr sz="1500"/>
             </a:pPr>
             <a:r>
-              <a:t>当前总资产：484.18万元</a:t>
+              <a:t>当前总资产：488.79万元</a:t>
             </a:r>
           </a:p>
           <a:p>
@@ -3263,7 +3263,7 @@
               <a:defRPr sz="1500"/>
             </a:pPr>
             <a:r>
-              <a:t>累计收益率：-3.16%</a:t>
+              <a:t>累计收益率：-2.24%</a:t>
             </a:r>
           </a:p>
           <a:p>
@@ -3271,7 +3271,7 @@
               <a:defRPr sz="1500"/>
             </a:pPr>
             <a:r>
-              <a:t>同期沪深300：-2.15%</a:t>
+              <a:t>同期沪深300：-1.49%</a:t>
             </a:r>
           </a:p>
           <a:p>
@@ -3279,7 +3279,7 @@
               <a:defRPr sz="1500"/>
             </a:pPr>
             <a:r>
-              <a:t>现金：80.26万元（16.6%）</a:t>
+              <a:t>现金：58.50万元（12.0%）</a:t>
             </a:r>
           </a:p>
           <a:p>
@@ -3287,7 +3287,7 @@
               <a:defRPr sz="1500"/>
             </a:pPr>
             <a:r>
-              <a:t>持仓：12只，累计交易26笔</a:t>
+              <a:t>持仓：14只，累计交易28笔</a:t>
             </a:r>
           </a:p>
         </p:txBody>
@@ -3582,7 +3582,7 @@
                 <a:gridCol w="1849069"/>
                 <a:gridCol w="1849070"/>
               </a:tblGrid>
-              <a:tr h="274320">
+              <a:tr h="240030">
                 <a:tc>
                   <a:txBody>
                     <a:bodyPr/>
@@ -3674,7 +3674,7 @@
                   <a:tcPr/>
                 </a:tc>
               </a:tr>
-              <a:tr h="274320">
+              <a:tr h="240030">
                 <a:tc>
                   <a:txBody>
                     <a:bodyPr/>
@@ -3766,7 +3766,7 @@
                   <a:tcPr/>
                 </a:tc>
               </a:tr>
-              <a:tr h="274320">
+              <a:tr h="240030">
                 <a:tc>
                   <a:txBody>
                     <a:bodyPr/>
@@ -3821,44 +3821,44 @@
                         <a:defRPr sz="1100"/>
                       </a:pPr>
                       <a:r>
-                        <a:t>4.523</a:t>
-                      </a:r>
-                    </a:p>
-                  </a:txBody>
-                  <a:tcPr/>
-                </a:tc>
-                <a:tc>
-                  <a:txBody>
-                    <a:bodyPr/>
-                    <a:lstStyle/>
-                    <a:p>
-                      <a:pPr>
-                        <a:defRPr sz="1100"/>
-                      </a:pPr>
-                      <a:r>
-                        <a:t>117.1</a:t>
-                      </a:r>
-                    </a:p>
-                  </a:txBody>
-                  <a:tcPr/>
-                </a:tc>
-                <a:tc>
-                  <a:txBody>
-                    <a:bodyPr/>
-                    <a:lstStyle/>
-                    <a:p>
-                      <a:pPr>
-                        <a:defRPr sz="1100"/>
-                      </a:pPr>
-                      <a:r>
-                        <a:t>-3.06</a:t>
+                        <a:t>4.55</a:t>
+                      </a:r>
+                    </a:p>
+                  </a:txBody>
+                  <a:tcPr/>
+                </a:tc>
+                <a:tc>
+                  <a:txBody>
+                    <a:bodyPr/>
+                    <a:lstStyle/>
+                    <a:p>
+                      <a:pPr>
+                        <a:defRPr sz="1100"/>
+                      </a:pPr>
+                      <a:r>
+                        <a:t>117.8</a:t>
+                      </a:r>
+                    </a:p>
+                  </a:txBody>
+                  <a:tcPr/>
+                </a:tc>
+                <a:tc>
+                  <a:txBody>
+                    <a:bodyPr/>
+                    <a:lstStyle/>
+                    <a:p>
+                      <a:pPr>
+                        <a:defRPr sz="1100"/>
+                      </a:pPr>
+                      <a:r>
+                        <a:t>-2.36</a:t>
                       </a:r>
                     </a:p>
                   </a:txBody>
                   <a:tcPr/>
                 </a:tc>
               </a:tr>
-              <a:tr h="274320">
+              <a:tr h="240030">
                 <a:tc>
                   <a:txBody>
                     <a:bodyPr/>
@@ -3913,44 +3913,44 @@
                         <a:defRPr sz="1100"/>
                       </a:pPr>
                       <a:r>
-                        <a:t>53.9</a:t>
-                      </a:r>
-                    </a:p>
-                  </a:txBody>
-                  <a:tcPr/>
-                </a:tc>
-                <a:tc>
-                  <a:txBody>
-                    <a:bodyPr/>
-                    <a:lstStyle/>
-                    <a:p>
-                      <a:pPr>
-                        <a:defRPr sz="1100"/>
-                      </a:pPr>
-                      <a:r>
-                        <a:t>114.27</a:t>
-                      </a:r>
-                    </a:p>
-                  </a:txBody>
-                  <a:tcPr/>
-                </a:tc>
-                <a:tc>
-                  <a:txBody>
-                    <a:bodyPr/>
-                    <a:lstStyle/>
-                    <a:p>
-                      <a:pPr>
-                        <a:defRPr sz="1100"/>
-                      </a:pPr>
-                      <a:r>
-                        <a:t>-4.71</a:t>
+                        <a:t>53.51</a:t>
+                      </a:r>
+                    </a:p>
+                  </a:txBody>
+                  <a:tcPr/>
+                </a:tc>
+                <a:tc>
+                  <a:txBody>
+                    <a:bodyPr/>
+                    <a:lstStyle/>
+                    <a:p>
+                      <a:pPr>
+                        <a:defRPr sz="1100"/>
+                      </a:pPr>
+                      <a:r>
+                        <a:t>113.44</a:t>
+                      </a:r>
+                    </a:p>
+                  </a:txBody>
+                  <a:tcPr/>
+                </a:tc>
+                <a:tc>
+                  <a:txBody>
+                    <a:bodyPr/>
+                    <a:lstStyle/>
+                    <a:p>
+                      <a:pPr>
+                        <a:defRPr sz="1100"/>
+                      </a:pPr>
+                      <a:r>
+                        <a:t>-5.53</a:t>
                       </a:r>
                     </a:p>
                   </a:txBody>
                   <a:tcPr/>
                 </a:tc>
               </a:tr>
-              <a:tr h="274320">
+              <a:tr h="240030">
                 <a:tc>
                   <a:txBody>
                     <a:bodyPr/>
@@ -3975,7 +3975,7 @@
                         <a:defRPr sz="1100"/>
                       </a:pPr>
                       <a:r>
-                        <a:t>19300</a:t>
+                        <a:t>12300</a:t>
                       </a:r>
                     </a:p>
                   </a:txBody>
@@ -4005,44 +4005,44 @@
                         <a:defRPr sz="1100"/>
                       </a:pPr>
                       <a:r>
-                        <a:t>31.68</a:t>
-                      </a:r>
-                    </a:p>
-                  </a:txBody>
-                  <a:tcPr/>
-                </a:tc>
-                <a:tc>
-                  <a:txBody>
-                    <a:bodyPr/>
-                    <a:lstStyle/>
-                    <a:p>
-                      <a:pPr>
-                        <a:defRPr sz="1100"/>
-                      </a:pPr>
-                      <a:r>
-                        <a:t>61.14</a:t>
-                      </a:r>
-                    </a:p>
-                  </a:txBody>
-                  <a:tcPr/>
-                </a:tc>
-                <a:tc>
-                  <a:txBody>
-                    <a:bodyPr/>
-                    <a:lstStyle/>
-                    <a:p>
-                      <a:pPr>
-                        <a:defRPr sz="1100"/>
-                      </a:pPr>
-                      <a:r>
-                        <a:t>-4.34</a:t>
+                        <a:t>32.17</a:t>
+                      </a:r>
+                    </a:p>
+                  </a:txBody>
+                  <a:tcPr/>
+                </a:tc>
+                <a:tc>
+                  <a:txBody>
+                    <a:bodyPr/>
+                    <a:lstStyle/>
+                    <a:p>
+                      <a:pPr>
+                        <a:defRPr sz="1100"/>
+                      </a:pPr>
+                      <a:r>
+                        <a:t>39.57</a:t>
+                      </a:r>
+                    </a:p>
+                  </a:txBody>
+                  <a:tcPr/>
+                </a:tc>
+                <a:tc>
+                  <a:txBody>
+                    <a:bodyPr/>
+                    <a:lstStyle/>
+                    <a:p>
+                      <a:pPr>
+                        <a:defRPr sz="1100"/>
+                      </a:pPr>
+                      <a:r>
+                        <a:t>-2.16</a:t>
                       </a:r>
                     </a:p>
                   </a:txBody>
                   <a:tcPr/>
                 </a:tc>
               </a:tr>
-              <a:tr h="274320">
+              <a:tr h="240030">
                 <a:tc>
                   <a:txBody>
                     <a:bodyPr/>
@@ -4097,44 +4097,44 @@
                         <a:defRPr sz="1100"/>
                       </a:pPr>
                       <a:r>
-                        <a:t>28.5</a:t>
-                      </a:r>
-                    </a:p>
-                  </a:txBody>
-                  <a:tcPr/>
-                </a:tc>
-                <a:tc>
-                  <a:txBody>
-                    <a:bodyPr/>
-                    <a:lstStyle/>
-                    <a:p>
-                      <a:pPr>
-                        <a:defRPr sz="1100"/>
-                      </a:pPr>
-                      <a:r>
-                        <a:t>26.5</a:t>
-                      </a:r>
-                    </a:p>
-                  </a:txBody>
-                  <a:tcPr/>
-                </a:tc>
-                <a:tc>
-                  <a:txBody>
-                    <a:bodyPr/>
-                    <a:lstStyle/>
-                    <a:p>
-                      <a:pPr>
-                        <a:defRPr sz="1100"/>
-                      </a:pPr>
-                      <a:r>
-                        <a:t>0.57</a:t>
+                        <a:t>28.46</a:t>
+                      </a:r>
+                    </a:p>
+                  </a:txBody>
+                  <a:tcPr/>
+                </a:tc>
+                <a:tc>
+                  <a:txBody>
+                    <a:bodyPr/>
+                    <a:lstStyle/>
+                    <a:p>
+                      <a:pPr>
+                        <a:defRPr sz="1100"/>
+                      </a:pPr>
+                      <a:r>
+                        <a:t>26.47</a:t>
+                      </a:r>
+                    </a:p>
+                  </a:txBody>
+                  <a:tcPr/>
+                </a:tc>
+                <a:tc>
+                  <a:txBody>
+                    <a:bodyPr/>
+                    <a:lstStyle/>
+                    <a:p>
+                      <a:pPr>
+                        <a:defRPr sz="1100"/>
+                      </a:pPr>
+                      <a:r>
+                        <a:t>0.53</a:t>
                       </a:r>
                     </a:p>
                   </a:txBody>
                   <a:tcPr/>
                 </a:tc>
               </a:tr>
-              <a:tr h="274320">
+              <a:tr h="240030">
                 <a:tc>
                   <a:txBody>
                     <a:bodyPr/>
@@ -4189,44 +4189,44 @@
                         <a:defRPr sz="1100"/>
                       </a:pPr>
                       <a:r>
-                        <a:t>10.38</a:t>
-                      </a:r>
-                    </a:p>
-                  </a:txBody>
-                  <a:tcPr/>
-                </a:tc>
-                <a:tc>
-                  <a:txBody>
-                    <a:bodyPr/>
-                    <a:lstStyle/>
-                    <a:p>
-                      <a:pPr>
-                        <a:defRPr sz="1100"/>
-                      </a:pPr>
-                      <a:r>
-                        <a:t>9.86</a:t>
-                      </a:r>
-                    </a:p>
-                  </a:txBody>
-                  <a:tcPr/>
-                </a:tc>
-                <a:tc>
-                  <a:txBody>
-                    <a:bodyPr/>
-                    <a:lstStyle/>
-                    <a:p>
-                      <a:pPr>
-                        <a:defRPr sz="1100"/>
-                      </a:pPr>
-                      <a:r>
-                        <a:t>-0.09</a:t>
+                        <a:t>10.5</a:t>
+                      </a:r>
+                    </a:p>
+                  </a:txBody>
+                  <a:tcPr/>
+                </a:tc>
+                <a:tc>
+                  <a:txBody>
+                    <a:bodyPr/>
+                    <a:lstStyle/>
+                    <a:p>
+                      <a:pPr>
+                        <a:defRPr sz="1100"/>
+                      </a:pPr>
+                      <a:r>
+                        <a:t>9.97</a:t>
+                      </a:r>
+                    </a:p>
+                  </a:txBody>
+                  <a:tcPr/>
+                </a:tc>
+                <a:tc>
+                  <a:txBody>
+                    <a:bodyPr/>
+                    <a:lstStyle/>
+                    <a:p>
+                      <a:pPr>
+                        <a:defRPr sz="1100"/>
+                      </a:pPr>
+                      <a:r>
+                        <a:t>0.03</a:t>
                       </a:r>
                     </a:p>
                   </a:txBody>
                   <a:tcPr/>
                 </a:tc>
               </a:tr>
-              <a:tr h="274320">
+              <a:tr h="240030">
                 <a:tc>
                   <a:txBody>
                     <a:bodyPr/>
@@ -4281,44 +4281,44 @@
                         <a:defRPr sz="1100"/>
                       </a:pPr>
                       <a:r>
-                        <a:t>17.33</a:t>
-                      </a:r>
-                    </a:p>
-                  </a:txBody>
-                  <a:tcPr/>
-                </a:tc>
-                <a:tc>
-                  <a:txBody>
-                    <a:bodyPr/>
-                    <a:lstStyle/>
-                    <a:p>
-                      <a:pPr>
-                        <a:defRPr sz="1100"/>
-                      </a:pPr>
-                      <a:r>
-                        <a:t>8.66</a:t>
-                      </a:r>
-                    </a:p>
-                  </a:txBody>
-                  <a:tcPr/>
-                </a:tc>
-                <a:tc>
-                  <a:txBody>
-                    <a:bodyPr/>
-                    <a:lstStyle/>
-                    <a:p>
-                      <a:pPr>
-                        <a:defRPr sz="1100"/>
-                      </a:pPr>
-                      <a:r>
-                        <a:t>-0.1</a:t>
+                        <a:t>16.81</a:t>
+                      </a:r>
+                    </a:p>
+                  </a:txBody>
+                  <a:tcPr/>
+                </a:tc>
+                <a:tc>
+                  <a:txBody>
+                    <a:bodyPr/>
+                    <a:lstStyle/>
+                    <a:p>
+                      <a:pPr>
+                        <a:defRPr sz="1100"/>
+                      </a:pPr>
+                      <a:r>
+                        <a:t>8.4</a:t>
+                      </a:r>
+                    </a:p>
+                  </a:txBody>
+                  <a:tcPr/>
+                </a:tc>
+                <a:tc>
+                  <a:txBody>
+                    <a:bodyPr/>
+                    <a:lstStyle/>
+                    <a:p>
+                      <a:pPr>
+                        <a:defRPr sz="1100"/>
+                      </a:pPr>
+                      <a:r>
+                        <a:t>-0.36</a:t>
                       </a:r>
                     </a:p>
                   </a:txBody>
                   <a:tcPr/>
                 </a:tc>
               </a:tr>
-              <a:tr h="274320">
+              <a:tr h="240030">
                 <a:tc>
                   <a:txBody>
                     <a:bodyPr/>
@@ -4373,44 +4373,44 @@
                         <a:defRPr sz="1100"/>
                       </a:pPr>
                       <a:r>
-                        <a:t>35.3</a:t>
-                      </a:r>
-                    </a:p>
-                  </a:txBody>
-                  <a:tcPr/>
-                </a:tc>
-                <a:tc>
-                  <a:txBody>
-                    <a:bodyPr/>
-                    <a:lstStyle/>
-                    <a:p>
-                      <a:pPr>
-                        <a:defRPr sz="1100"/>
-                      </a:pPr>
-                      <a:r>
-                        <a:t>21.53</a:t>
-                      </a:r>
-                    </a:p>
-                  </a:txBody>
-                  <a:tcPr/>
-                </a:tc>
-                <a:tc>
-                  <a:txBody>
-                    <a:bodyPr/>
-                    <a:lstStyle/>
-                    <a:p>
-                      <a:pPr>
-                        <a:defRPr sz="1100"/>
-                      </a:pPr>
-                      <a:r>
-                        <a:t>-0.35</a:t>
+                        <a:t>38.83</a:t>
+                      </a:r>
+                    </a:p>
+                  </a:txBody>
+                  <a:tcPr/>
+                </a:tc>
+                <a:tc>
+                  <a:txBody>
+                    <a:bodyPr/>
+                    <a:lstStyle/>
+                    <a:p>
+                      <a:pPr>
+                        <a:defRPr sz="1100"/>
+                      </a:pPr>
+                      <a:r>
+                        <a:t>23.69</a:t>
+                      </a:r>
+                    </a:p>
+                  </a:txBody>
+                  <a:tcPr/>
+                </a:tc>
+                <a:tc>
+                  <a:txBody>
+                    <a:bodyPr/>
+                    <a:lstStyle/>
+                    <a:p>
+                      <a:pPr>
+                        <a:defRPr sz="1100"/>
+                      </a:pPr>
+                      <a:r>
+                        <a:t>1.81</a:t>
                       </a:r>
                     </a:p>
                   </a:txBody>
                   <a:tcPr/>
                 </a:tc>
               </a:tr>
-              <a:tr h="274320">
+              <a:tr h="240030">
                 <a:tc>
                   <a:txBody>
                     <a:bodyPr/>
@@ -4465,44 +4465,44 @@
                         <a:defRPr sz="1100"/>
                       </a:pPr>
                       <a:r>
-                        <a:t>134.99</a:t>
-                      </a:r>
-                    </a:p>
-                  </a:txBody>
-                  <a:tcPr/>
-                </a:tc>
-                <a:tc>
-                  <a:txBody>
-                    <a:bodyPr/>
-                    <a:lstStyle/>
-                    <a:p>
-                      <a:pPr>
-                        <a:defRPr sz="1100"/>
-                      </a:pPr>
-                      <a:r>
-                        <a:t>6.75</a:t>
-                      </a:r>
-                    </a:p>
-                  </a:txBody>
-                  <a:tcPr/>
-                </a:tc>
-                <a:tc>
-                  <a:txBody>
-                    <a:bodyPr/>
-                    <a:lstStyle/>
-                    <a:p>
-                      <a:pPr>
-                        <a:defRPr sz="1100"/>
-                      </a:pPr>
-                      <a:r>
-                        <a:t>-0.09</a:t>
+                        <a:t>133.58</a:t>
+                      </a:r>
+                    </a:p>
+                  </a:txBody>
+                  <a:tcPr/>
+                </a:tc>
+                <a:tc>
+                  <a:txBody>
+                    <a:bodyPr/>
+                    <a:lstStyle/>
+                    <a:p>
+                      <a:pPr>
+                        <a:defRPr sz="1100"/>
+                      </a:pPr>
+                      <a:r>
+                        <a:t>6.68</a:t>
+                      </a:r>
+                    </a:p>
+                  </a:txBody>
+                  <a:tcPr/>
+                </a:tc>
+                <a:tc>
+                  <a:txBody>
+                    <a:bodyPr/>
+                    <a:lstStyle/>
+                    <a:p>
+                      <a:pPr>
+                        <a:defRPr sz="1100"/>
+                      </a:pPr>
+                      <a:r>
+                        <a:t>-0.16</a:t>
                       </a:r>
                     </a:p>
                   </a:txBody>
                   <a:tcPr/>
                 </a:tc>
               </a:tr>
-              <a:tr h="274320">
+              <a:tr h="240030">
                 <a:tc>
                   <a:txBody>
                     <a:bodyPr/>
@@ -4557,44 +4557,44 @@
                         <a:defRPr sz="1100"/>
                       </a:pPr>
                       <a:r>
-                        <a:t>7.12</a:t>
-                      </a:r>
-                    </a:p>
-                  </a:txBody>
-                  <a:tcPr/>
-                </a:tc>
-                <a:tc>
-                  <a:txBody>
-                    <a:bodyPr/>
-                    <a:lstStyle/>
-                    <a:p>
-                      <a:pPr>
-                        <a:defRPr sz="1100"/>
-                      </a:pPr>
-                      <a:r>
-                        <a:t>3.56</a:t>
-                      </a:r>
-                    </a:p>
-                  </a:txBody>
-                  <a:tcPr/>
-                </a:tc>
-                <a:tc>
-                  <a:txBody>
-                    <a:bodyPr/>
-                    <a:lstStyle/>
-                    <a:p>
-                      <a:pPr>
-                        <a:defRPr sz="1100"/>
-                      </a:pPr>
-                      <a:r>
-                        <a:t>-0.1</a:t>
+                        <a:t>7.36</a:t>
+                      </a:r>
+                    </a:p>
+                  </a:txBody>
+                  <a:tcPr/>
+                </a:tc>
+                <a:tc>
+                  <a:txBody>
+                    <a:bodyPr/>
+                    <a:lstStyle/>
+                    <a:p>
+                      <a:pPr>
+                        <a:defRPr sz="1100"/>
+                      </a:pPr>
+                      <a:r>
+                        <a:t>3.68</a:t>
+                      </a:r>
+                    </a:p>
+                  </a:txBody>
+                  <a:tcPr/>
+                </a:tc>
+                <a:tc>
+                  <a:txBody>
+                    <a:bodyPr/>
+                    <a:lstStyle/>
+                    <a:p>
+                      <a:pPr>
+                        <a:defRPr sz="1100"/>
+                      </a:pPr>
+                      <a:r>
+                        <a:t>0.02</a:t>
                       </a:r>
                     </a:p>
                   </a:txBody>
                   <a:tcPr/>
                 </a:tc>
               </a:tr>
-              <a:tr h="274320">
+              <a:tr h="240030">
                 <a:tc>
                   <a:txBody>
                     <a:bodyPr/>
@@ -4649,44 +4649,44 @@
                         <a:defRPr sz="1100"/>
                       </a:pPr>
                       <a:r>
-                        <a:t>20.5</a:t>
-                      </a:r>
-                    </a:p>
-                  </a:txBody>
-                  <a:tcPr/>
-                </a:tc>
-                <a:tc>
-                  <a:txBody>
-                    <a:bodyPr/>
-                    <a:lstStyle/>
-                    <a:p>
-                      <a:pPr>
-                        <a:defRPr sz="1100"/>
-                      </a:pPr>
-                      <a:r>
-                        <a:t>1.02</a:t>
-                      </a:r>
-                    </a:p>
-                  </a:txBody>
-                  <a:tcPr/>
-                </a:tc>
-                <a:tc>
-                  <a:txBody>
-                    <a:bodyPr/>
-                    <a:lstStyle/>
-                    <a:p>
-                      <a:pPr>
-                        <a:defRPr sz="1100"/>
-                      </a:pPr>
-                      <a:r>
-                        <a:t>-0.01</a:t>
+                        <a:t>19.86</a:t>
+                      </a:r>
+                    </a:p>
+                  </a:txBody>
+                  <a:tcPr/>
+                </a:tc>
+                <a:tc>
+                  <a:txBody>
+                    <a:bodyPr/>
+                    <a:lstStyle/>
+                    <a:p>
+                      <a:pPr>
+                        <a:defRPr sz="1100"/>
+                      </a:pPr>
+                      <a:r>
+                        <a:t>0.99</a:t>
+                      </a:r>
+                    </a:p>
+                  </a:txBody>
+                  <a:tcPr/>
+                </a:tc>
+                <a:tc>
+                  <a:txBody>
+                    <a:bodyPr/>
+                    <a:lstStyle/>
+                    <a:p>
+                      <a:pPr>
+                        <a:defRPr sz="1100"/>
+                      </a:pPr>
+                      <a:r>
+                        <a:t>-0.05</a:t>
                       </a:r>
                     </a:p>
                   </a:txBody>
                   <a:tcPr/>
                 </a:tc>
               </a:tr>
-              <a:tr h="274320">
+              <a:tr h="240030">
                 <a:tc>
                   <a:txBody>
                     <a:bodyPr/>
@@ -4741,44 +4741,44 @@
                         <a:defRPr sz="1100"/>
                       </a:pPr>
                       <a:r>
-                        <a:t>178.5</a:t>
-                      </a:r>
-                    </a:p>
-                  </a:txBody>
-                  <a:tcPr/>
-                </a:tc>
-                <a:tc>
-                  <a:txBody>
-                    <a:bodyPr/>
-                    <a:lstStyle/>
-                    <a:p>
-                      <a:pPr>
-                        <a:defRPr sz="1100"/>
-                      </a:pPr>
-                      <a:r>
-                        <a:t>17.85</a:t>
-                      </a:r>
-                    </a:p>
-                  </a:txBody>
-                  <a:tcPr/>
-                </a:tc>
-                <a:tc>
-                  <a:txBody>
-                    <a:bodyPr/>
-                    <a:lstStyle/>
-                    <a:p>
-                      <a:pPr>
-                        <a:defRPr sz="1100"/>
-                      </a:pPr>
-                      <a:r>
-                        <a:t>0.09</a:t>
+                        <a:t>186.09</a:t>
+                      </a:r>
+                    </a:p>
+                  </a:txBody>
+                  <a:tcPr/>
+                </a:tc>
+                <a:tc>
+                  <a:txBody>
+                    <a:bodyPr/>
+                    <a:lstStyle/>
+                    <a:p>
+                      <a:pPr>
+                        <a:defRPr sz="1100"/>
+                      </a:pPr>
+                      <a:r>
+                        <a:t>18.61</a:t>
+                      </a:r>
+                    </a:p>
+                  </a:txBody>
+                  <a:tcPr/>
+                </a:tc>
+                <a:tc>
+                  <a:txBody>
+                    <a:bodyPr/>
+                    <a:lstStyle/>
+                    <a:p>
+                      <a:pPr>
+                        <a:defRPr sz="1100"/>
+                      </a:pPr>
+                      <a:r>
+                        <a:t>0.85</a:t>
                       </a:r>
                     </a:p>
                   </a:txBody>
                   <a:tcPr/>
                 </a:tc>
               </a:tr>
-              <a:tr h="274320">
+              <a:tr h="240030">
                 <a:tc>
                   <a:txBody>
                     <a:bodyPr/>
@@ -4833,37 +4833,221 @@
                         <a:defRPr sz="1100"/>
                       </a:pPr>
                       <a:r>
-                        <a:t>156.67</a:t>
-                      </a:r>
-                    </a:p>
-                  </a:txBody>
-                  <a:tcPr/>
-                </a:tc>
-                <a:tc>
-                  <a:txBody>
-                    <a:bodyPr/>
-                    <a:lstStyle/>
-                    <a:p>
-                      <a:pPr>
-                        <a:defRPr sz="1100"/>
-                      </a:pPr>
-                      <a:r>
-                        <a:t>15.67</a:t>
-                      </a:r>
-                    </a:p>
-                  </a:txBody>
-                  <a:tcPr/>
-                </a:tc>
-                <a:tc>
-                  <a:txBody>
-                    <a:bodyPr/>
-                    <a:lstStyle/>
-                    <a:p>
-                      <a:pPr>
-                        <a:defRPr sz="1100"/>
-                      </a:pPr>
-                      <a:r>
-                        <a:t>-0.1</a:t>
+                        <a:t>157.71</a:t>
+                      </a:r>
+                    </a:p>
+                  </a:txBody>
+                  <a:tcPr/>
+                </a:tc>
+                <a:tc>
+                  <a:txBody>
+                    <a:bodyPr/>
+                    <a:lstStyle/>
+                    <a:p>
+                      <a:pPr>
+                        <a:defRPr sz="1100"/>
+                      </a:pPr>
+                      <a:r>
+                        <a:t>15.77</a:t>
+                      </a:r>
+                    </a:p>
+                  </a:txBody>
+                  <a:tcPr/>
+                </a:tc>
+                <a:tc>
+                  <a:txBody>
+                    <a:bodyPr/>
+                    <a:lstStyle/>
+                    <a:p>
+                      <a:pPr>
+                        <a:defRPr sz="1100"/>
+                      </a:pPr>
+                      <a:r>
+                        <a:t>0.0</a:t>
+                      </a:r>
+                    </a:p>
+                  </a:txBody>
+                  <a:tcPr/>
+                </a:tc>
+              </a:tr>
+              <a:tr h="240030">
+                <a:tc>
+                  <a:txBody>
+                    <a:bodyPr/>
+                    <a:lstStyle/>
+                    <a:p>
+                      <a:pPr>
+                        <a:defRPr sz="1100"/>
+                      </a:pPr>
+                      <a:r>
+                        <a:t>康龙化成</a:t>
+                      </a:r>
+                    </a:p>
+                  </a:txBody>
+                  <a:tcPr/>
+                </a:tc>
+                <a:tc>
+                  <a:txBody>
+                    <a:bodyPr/>
+                    <a:lstStyle/>
+                    <a:p>
+                      <a:pPr>
+                        <a:defRPr sz="1100"/>
+                      </a:pPr>
+                      <a:r>
+                        <a:t>1000</a:t>
+                      </a:r>
+                    </a:p>
+                  </a:txBody>
+                  <a:tcPr/>
+                </a:tc>
+                <a:tc>
+                  <a:txBody>
+                    <a:bodyPr/>
+                    <a:lstStyle/>
+                    <a:p>
+                      <a:pPr>
+                        <a:defRPr sz="1100"/>
+                      </a:pPr>
+                      <a:r>
+                        <a:t>42.65</a:t>
+                      </a:r>
+                    </a:p>
+                  </a:txBody>
+                  <a:tcPr/>
+                </a:tc>
+                <a:tc>
+                  <a:txBody>
+                    <a:bodyPr/>
+                    <a:lstStyle/>
+                    <a:p>
+                      <a:pPr>
+                        <a:defRPr sz="1100"/>
+                      </a:pPr>
+                      <a:r>
+                        <a:t>43.15</a:t>
+                      </a:r>
+                    </a:p>
+                  </a:txBody>
+                  <a:tcPr/>
+                </a:tc>
+                <a:tc>
+                  <a:txBody>
+                    <a:bodyPr/>
+                    <a:lstStyle/>
+                    <a:p>
+                      <a:pPr>
+                        <a:defRPr sz="1100"/>
+                      </a:pPr>
+                      <a:r>
+                        <a:t>4.32</a:t>
+                      </a:r>
+                    </a:p>
+                  </a:txBody>
+                  <a:tcPr/>
+                </a:tc>
+                <a:tc>
+                  <a:txBody>
+                    <a:bodyPr/>
+                    <a:lstStyle/>
+                    <a:p>
+                      <a:pPr>
+                        <a:defRPr sz="1100"/>
+                      </a:pPr>
+                      <a:r>
+                        <a:t>0.05</a:t>
+                      </a:r>
+                    </a:p>
+                  </a:txBody>
+                  <a:tcPr/>
+                </a:tc>
+              </a:tr>
+              <a:tr h="240030">
+                <a:tc>
+                  <a:txBody>
+                    <a:bodyPr/>
+                    <a:lstStyle/>
+                    <a:p>
+                      <a:pPr>
+                        <a:defRPr sz="1100"/>
+                      </a:pPr>
+                      <a:r>
+                        <a:t>赤峰黄金</a:t>
+                      </a:r>
+                    </a:p>
+                  </a:txBody>
+                  <a:tcPr/>
+                </a:tc>
+                <a:tc>
+                  <a:txBody>
+                    <a:bodyPr/>
+                    <a:lstStyle/>
+                    <a:p>
+                      <a:pPr>
+                        <a:defRPr sz="1100"/>
+                      </a:pPr>
+                      <a:r>
+                        <a:t>9000</a:t>
+                      </a:r>
+                    </a:p>
+                  </a:txBody>
+                  <a:tcPr/>
+                </a:tc>
+                <a:tc>
+                  <a:txBody>
+                    <a:bodyPr/>
+                    <a:lstStyle/>
+                    <a:p>
+                      <a:pPr>
+                        <a:defRPr sz="1100"/>
+                      </a:pPr>
+                      <a:r>
+                        <a:t>43.56</a:t>
+                      </a:r>
+                    </a:p>
+                  </a:txBody>
+                  <a:tcPr/>
+                </a:tc>
+                <a:tc>
+                  <a:txBody>
+                    <a:bodyPr/>
+                    <a:lstStyle/>
+                    <a:p>
+                      <a:pPr>
+                        <a:defRPr sz="1100"/>
+                      </a:pPr>
+                      <a:r>
+                        <a:t>45.44</a:t>
+                      </a:r>
+                    </a:p>
+                  </a:txBody>
+                  <a:tcPr/>
+                </a:tc>
+                <a:tc>
+                  <a:txBody>
+                    <a:bodyPr/>
+                    <a:lstStyle/>
+                    <a:p>
+                      <a:pPr>
+                        <a:defRPr sz="1100"/>
+                      </a:pPr>
+                      <a:r>
+                        <a:t>40.9</a:t>
+                      </a:r>
+                    </a:p>
+                  </a:txBody>
+                  <a:tcPr/>
+                </a:tc>
+                <a:tc>
+                  <a:txBody>
+                    <a:bodyPr/>
+                    <a:lstStyle/>
+                    <a:p>
+                      <a:pPr>
+                        <a:defRPr sz="1100"/>
+                      </a:pPr>
+                      <a:r>
+                        <a:t>1.69</a:t>
                       </a:r>
                     </a:p>
                   </a:txBody>

--- a/outputs/12_中期路演.pptx
+++ b/outputs/12_中期路演.pptx
@@ -5133,7 +5133,7 @@
               <a:defRPr sz="1500"/>
             </a:pPr>
             <a:r>
-              <a:t>紫金矿业（601899，有色金属）：综合80.5分；基本面优秀，具备中长期配置价值；中期趋势向上，可关注/持有。</a:t>
+              <a:t>紫金矿业（601899，有色金属）：综合82.5分；基本面优秀，具备中长期配置价值；中期趋势向上，可关注/持有。</a:t>
             </a:r>
           </a:p>
           <a:p>
@@ -5149,7 +5149,7 @@
               <a:defRPr sz="1500"/>
             </a:pPr>
             <a:r>
-              <a:t>中国平安（601318，保险）：综合69.0分；基本面优秀，具备中长期配置价值；趋势中性，观望。</a:t>
+              <a:t>宁德时代（300750，新能源电池）：综合71.0分；基本面优秀，具备中长期配置价值；趋势中性，观望。</a:t>
             </a:r>
           </a:p>
           <a:p>
@@ -5157,7 +5157,7 @@
               <a:defRPr sz="1500"/>
             </a:pPr>
             <a:r>
-              <a:t>宁德时代（300750，新能源电池）：综合68.5分；基本面优秀，具备中长期配置价值；趋势中性，观望。</a:t>
+              <a:t>中国平安（601318，保险）：综合69.0分；基本面优秀，具备中长期配置价值；趋势中性，观望。</a:t>
             </a:r>
           </a:p>
           <a:p>
@@ -5165,7 +5165,7 @@
               <a:defRPr sz="1500"/>
             </a:pPr>
             <a:r>
-              <a:t>美的集团（000333，家电）：综合67.5分；基本面优秀，具备中长期配置价值；中期趋势向上，可关注/持有。</a:t>
+              <a:t>美的集团（000333，家电）：综合65.5分；基本面优秀，具备中长期配置价值；趋势中性，观望。</a:t>
             </a:r>
           </a:p>
         </p:txBody>

--- a/outputs/12_中期路演.pptx
+++ b/outputs/12_中期路演.pptx
@@ -3167,7 +3167,7 @@
               <a:defRPr sz="1500"/>
             </a:pPr>
             <a:r>
-              <a:t>数据截止：2026-09-16</a:t>
+              <a:t>数据截止：2026-09-17</a:t>
             </a:r>
           </a:p>
         </p:txBody>
@@ -3255,7 +3255,7 @@
               <a:defRPr sz="1500"/>
             </a:pPr>
             <a:r>
-              <a:t>当前总资产：488.79万元</a:t>
+              <a:t>当前总资产：484.39万元</a:t>
             </a:r>
           </a:p>
           <a:p>
@@ -3263,7 +3263,7 @@
               <a:defRPr sz="1500"/>
             </a:pPr>
             <a:r>
-              <a:t>累计收益率：-2.24%</a:t>
+              <a:t>累计收益率：-3.12%</a:t>
             </a:r>
           </a:p>
           <a:p>
@@ -3271,7 +3271,7 @@
               <a:defRPr sz="1500"/>
             </a:pPr>
             <a:r>
-              <a:t>同期沪深300：-1.49%</a:t>
+              <a:t>同期沪深300：-1.93%</a:t>
             </a:r>
           </a:p>
           <a:p>
@@ -3279,7 +3279,7 @@
               <a:defRPr sz="1500"/>
             </a:pPr>
             <a:r>
-              <a:t>现金：58.50万元（12.0%）</a:t>
+              <a:t>现金：58.50万元（12.1%）</a:t>
             </a:r>
           </a:p>
           <a:p>
@@ -3821,37 +3821,37 @@
                         <a:defRPr sz="1100"/>
                       </a:pPr>
                       <a:r>
-                        <a:t>4.55</a:t>
-                      </a:r>
-                    </a:p>
-                  </a:txBody>
-                  <a:tcPr/>
-                </a:tc>
-                <a:tc>
-                  <a:txBody>
-                    <a:bodyPr/>
-                    <a:lstStyle/>
-                    <a:p>
-                      <a:pPr>
-                        <a:defRPr sz="1100"/>
-                      </a:pPr>
-                      <a:r>
-                        <a:t>117.8</a:t>
-                      </a:r>
-                    </a:p>
-                  </a:txBody>
-                  <a:tcPr/>
-                </a:tc>
-                <a:tc>
-                  <a:txBody>
-                    <a:bodyPr/>
-                    <a:lstStyle/>
-                    <a:p>
-                      <a:pPr>
-                        <a:defRPr sz="1100"/>
-                      </a:pPr>
-                      <a:r>
-                        <a:t>-2.36</a:t>
+                        <a:t>4.532</a:t>
+                      </a:r>
+                    </a:p>
+                  </a:txBody>
+                  <a:tcPr/>
+                </a:tc>
+                <a:tc>
+                  <a:txBody>
+                    <a:bodyPr/>
+                    <a:lstStyle/>
+                    <a:p>
+                      <a:pPr>
+                        <a:defRPr sz="1100"/>
+                      </a:pPr>
+                      <a:r>
+                        <a:t>117.33</a:t>
+                      </a:r>
+                    </a:p>
+                  </a:txBody>
+                  <a:tcPr/>
+                </a:tc>
+                <a:tc>
+                  <a:txBody>
+                    <a:bodyPr/>
+                    <a:lstStyle/>
+                    <a:p>
+                      <a:pPr>
+                        <a:defRPr sz="1100"/>
+                      </a:pPr>
+                      <a:r>
+                        <a:t>-2.82</a:t>
                       </a:r>
                     </a:p>
                   </a:txBody>
@@ -3913,37 +3913,37 @@
                         <a:defRPr sz="1100"/>
                       </a:pPr>
                       <a:r>
-                        <a:t>53.51</a:t>
-                      </a:r>
-                    </a:p>
-                  </a:txBody>
-                  <a:tcPr/>
-                </a:tc>
-                <a:tc>
-                  <a:txBody>
-                    <a:bodyPr/>
-                    <a:lstStyle/>
-                    <a:p>
-                      <a:pPr>
-                        <a:defRPr sz="1100"/>
-                      </a:pPr>
-                      <a:r>
-                        <a:t>113.44</a:t>
-                      </a:r>
-                    </a:p>
-                  </a:txBody>
-                  <a:tcPr/>
-                </a:tc>
-                <a:tc>
-                  <a:txBody>
-                    <a:bodyPr/>
-                    <a:lstStyle/>
-                    <a:p>
-                      <a:pPr>
-                        <a:defRPr sz="1100"/>
-                      </a:pPr>
-                      <a:r>
-                        <a:t>-5.53</a:t>
+                        <a:t>53.35</a:t>
+                      </a:r>
+                    </a:p>
+                  </a:txBody>
+                  <a:tcPr/>
+                </a:tc>
+                <a:tc>
+                  <a:txBody>
+                    <a:bodyPr/>
+                    <a:lstStyle/>
+                    <a:p>
+                      <a:pPr>
+                        <a:defRPr sz="1100"/>
+                      </a:pPr>
+                      <a:r>
+                        <a:t>113.1</a:t>
+                      </a:r>
+                    </a:p>
+                  </a:txBody>
+                  <a:tcPr/>
+                </a:tc>
+                <a:tc>
+                  <a:txBody>
+                    <a:bodyPr/>
+                    <a:lstStyle/>
+                    <a:p>
+                      <a:pPr>
+                        <a:defRPr sz="1100"/>
+                      </a:pPr>
+                      <a:r>
+                        <a:t>-5.87</a:t>
                       </a:r>
                     </a:p>
                   </a:txBody>
@@ -4005,37 +4005,37 @@
                         <a:defRPr sz="1100"/>
                       </a:pPr>
                       <a:r>
-                        <a:t>32.17</a:t>
-                      </a:r>
-                    </a:p>
-                  </a:txBody>
-                  <a:tcPr/>
-                </a:tc>
-                <a:tc>
-                  <a:txBody>
-                    <a:bodyPr/>
-                    <a:lstStyle/>
-                    <a:p>
-                      <a:pPr>
-                        <a:defRPr sz="1100"/>
-                      </a:pPr>
-                      <a:r>
-                        <a:t>39.57</a:t>
-                      </a:r>
-                    </a:p>
-                  </a:txBody>
-                  <a:tcPr/>
-                </a:tc>
-                <a:tc>
-                  <a:txBody>
-                    <a:bodyPr/>
-                    <a:lstStyle/>
-                    <a:p>
-                      <a:pPr>
-                        <a:defRPr sz="1100"/>
-                      </a:pPr>
-                      <a:r>
-                        <a:t>-2.16</a:t>
+                        <a:t>30.9</a:t>
+                      </a:r>
+                    </a:p>
+                  </a:txBody>
+                  <a:tcPr/>
+                </a:tc>
+                <a:tc>
+                  <a:txBody>
+                    <a:bodyPr/>
+                    <a:lstStyle/>
+                    <a:p>
+                      <a:pPr>
+                        <a:defRPr sz="1100"/>
+                      </a:pPr>
+                      <a:r>
+                        <a:t>38.01</a:t>
+                      </a:r>
+                    </a:p>
+                  </a:txBody>
+                  <a:tcPr/>
+                </a:tc>
+                <a:tc>
+                  <a:txBody>
+                    <a:bodyPr/>
+                    <a:lstStyle/>
+                    <a:p>
+                      <a:pPr>
+                        <a:defRPr sz="1100"/>
+                      </a:pPr>
+                      <a:r>
+                        <a:t>-3.72</a:t>
                       </a:r>
                     </a:p>
                   </a:txBody>
@@ -4189,37 +4189,37 @@
                         <a:defRPr sz="1100"/>
                       </a:pPr>
                       <a:r>
-                        <a:t>10.5</a:t>
-                      </a:r>
-                    </a:p>
-                  </a:txBody>
-                  <a:tcPr/>
-                </a:tc>
-                <a:tc>
-                  <a:txBody>
-                    <a:bodyPr/>
-                    <a:lstStyle/>
-                    <a:p>
-                      <a:pPr>
-                        <a:defRPr sz="1100"/>
-                      </a:pPr>
-                      <a:r>
-                        <a:t>9.97</a:t>
-                      </a:r>
-                    </a:p>
-                  </a:txBody>
-                  <a:tcPr/>
-                </a:tc>
-                <a:tc>
-                  <a:txBody>
-                    <a:bodyPr/>
-                    <a:lstStyle/>
-                    <a:p>
-                      <a:pPr>
-                        <a:defRPr sz="1100"/>
-                      </a:pPr>
-                      <a:r>
-                        <a:t>0.03</a:t>
+                        <a:t>10.22</a:t>
+                      </a:r>
+                    </a:p>
+                  </a:txBody>
+                  <a:tcPr/>
+                </a:tc>
+                <a:tc>
+                  <a:txBody>
+                    <a:bodyPr/>
+                    <a:lstStyle/>
+                    <a:p>
+                      <a:pPr>
+                        <a:defRPr sz="1100"/>
+                      </a:pPr>
+                      <a:r>
+                        <a:t>9.71</a:t>
+                      </a:r>
+                    </a:p>
+                  </a:txBody>
+                  <a:tcPr/>
+                </a:tc>
+                <a:tc>
+                  <a:txBody>
+                    <a:bodyPr/>
+                    <a:lstStyle/>
+                    <a:p>
+                      <a:pPr>
+                        <a:defRPr sz="1100"/>
+                      </a:pPr>
+                      <a:r>
+                        <a:t>-0.24</a:t>
                       </a:r>
                     </a:p>
                   </a:txBody>
@@ -4281,37 +4281,37 @@
                         <a:defRPr sz="1100"/>
                       </a:pPr>
                       <a:r>
-                        <a:t>16.81</a:t>
-                      </a:r>
-                    </a:p>
-                  </a:txBody>
-                  <a:tcPr/>
-                </a:tc>
-                <a:tc>
-                  <a:txBody>
-                    <a:bodyPr/>
-                    <a:lstStyle/>
-                    <a:p>
-                      <a:pPr>
-                        <a:defRPr sz="1100"/>
-                      </a:pPr>
-                      <a:r>
-                        <a:t>8.4</a:t>
-                      </a:r>
-                    </a:p>
-                  </a:txBody>
-                  <a:tcPr/>
-                </a:tc>
-                <a:tc>
-                  <a:txBody>
-                    <a:bodyPr/>
-                    <a:lstStyle/>
-                    <a:p>
-                      <a:pPr>
-                        <a:defRPr sz="1100"/>
-                      </a:pPr>
-                      <a:r>
-                        <a:t>-0.36</a:t>
+                        <a:t>16.54</a:t>
+                      </a:r>
+                    </a:p>
+                  </a:txBody>
+                  <a:tcPr/>
+                </a:tc>
+                <a:tc>
+                  <a:txBody>
+                    <a:bodyPr/>
+                    <a:lstStyle/>
+                    <a:p>
+                      <a:pPr>
+                        <a:defRPr sz="1100"/>
+                      </a:pPr>
+                      <a:r>
+                        <a:t>8.27</a:t>
+                      </a:r>
+                    </a:p>
+                  </a:txBody>
+                  <a:tcPr/>
+                </a:tc>
+                <a:tc>
+                  <a:txBody>
+                    <a:bodyPr/>
+                    <a:lstStyle/>
+                    <a:p>
+                      <a:pPr>
+                        <a:defRPr sz="1100"/>
+                      </a:pPr>
+                      <a:r>
+                        <a:t>-0.49</a:t>
                       </a:r>
                     </a:p>
                   </a:txBody>
@@ -4373,37 +4373,37 @@
                         <a:defRPr sz="1100"/>
                       </a:pPr>
                       <a:r>
-                        <a:t>38.83</a:t>
-                      </a:r>
-                    </a:p>
-                  </a:txBody>
-                  <a:tcPr/>
-                </a:tc>
-                <a:tc>
-                  <a:txBody>
-                    <a:bodyPr/>
-                    <a:lstStyle/>
-                    <a:p>
-                      <a:pPr>
-                        <a:defRPr sz="1100"/>
-                      </a:pPr>
-                      <a:r>
-                        <a:t>23.69</a:t>
-                      </a:r>
-                    </a:p>
-                  </a:txBody>
-                  <a:tcPr/>
-                </a:tc>
-                <a:tc>
-                  <a:txBody>
-                    <a:bodyPr/>
-                    <a:lstStyle/>
-                    <a:p>
-                      <a:pPr>
-                        <a:defRPr sz="1100"/>
-                      </a:pPr>
-                      <a:r>
-                        <a:t>1.81</a:t>
+                        <a:t>38.2</a:t>
+                      </a:r>
+                    </a:p>
+                  </a:txBody>
+                  <a:tcPr/>
+                </a:tc>
+                <a:tc>
+                  <a:txBody>
+                    <a:bodyPr/>
+                    <a:lstStyle/>
+                    <a:p>
+                      <a:pPr>
+                        <a:defRPr sz="1100"/>
+                      </a:pPr>
+                      <a:r>
+                        <a:t>23.3</a:t>
+                      </a:r>
+                    </a:p>
+                  </a:txBody>
+                  <a:tcPr/>
+                </a:tc>
+                <a:tc>
+                  <a:txBody>
+                    <a:bodyPr/>
+                    <a:lstStyle/>
+                    <a:p>
+                      <a:pPr>
+                        <a:defRPr sz="1100"/>
+                      </a:pPr>
+                      <a:r>
+                        <a:t>1.42</a:t>
                       </a:r>
                     </a:p>
                   </a:txBody>
@@ -4465,37 +4465,37 @@
                         <a:defRPr sz="1100"/>
                       </a:pPr>
                       <a:r>
-                        <a:t>133.58</a:t>
-                      </a:r>
-                    </a:p>
-                  </a:txBody>
-                  <a:tcPr/>
-                </a:tc>
-                <a:tc>
-                  <a:txBody>
-                    <a:bodyPr/>
-                    <a:lstStyle/>
-                    <a:p>
-                      <a:pPr>
-                        <a:defRPr sz="1100"/>
-                      </a:pPr>
-                      <a:r>
-                        <a:t>6.68</a:t>
-                      </a:r>
-                    </a:p>
-                  </a:txBody>
-                  <a:tcPr/>
-                </a:tc>
-                <a:tc>
-                  <a:txBody>
-                    <a:bodyPr/>
-                    <a:lstStyle/>
-                    <a:p>
-                      <a:pPr>
-                        <a:defRPr sz="1100"/>
-                      </a:pPr>
-                      <a:r>
-                        <a:t>-0.16</a:t>
+                        <a:t>137.47</a:t>
+                      </a:r>
+                    </a:p>
+                  </a:txBody>
+                  <a:tcPr/>
+                </a:tc>
+                <a:tc>
+                  <a:txBody>
+                    <a:bodyPr/>
+                    <a:lstStyle/>
+                    <a:p>
+                      <a:pPr>
+                        <a:defRPr sz="1100"/>
+                      </a:pPr>
+                      <a:r>
+                        <a:t>6.87</a:t>
+                      </a:r>
+                    </a:p>
+                  </a:txBody>
+                  <a:tcPr/>
+                </a:tc>
+                <a:tc>
+                  <a:txBody>
+                    <a:bodyPr/>
+                    <a:lstStyle/>
+                    <a:p>
+                      <a:pPr>
+                        <a:defRPr sz="1100"/>
+                      </a:pPr>
+                      <a:r>
+                        <a:t>0.04</a:t>
                       </a:r>
                     </a:p>
                   </a:txBody>
@@ -4557,37 +4557,37 @@
                         <a:defRPr sz="1100"/>
                       </a:pPr>
                       <a:r>
-                        <a:t>7.36</a:t>
-                      </a:r>
-                    </a:p>
-                  </a:txBody>
-                  <a:tcPr/>
-                </a:tc>
-                <a:tc>
-                  <a:txBody>
-                    <a:bodyPr/>
-                    <a:lstStyle/>
-                    <a:p>
-                      <a:pPr>
-                        <a:defRPr sz="1100"/>
-                      </a:pPr>
-                      <a:r>
-                        <a:t>3.68</a:t>
-                      </a:r>
-                    </a:p>
-                  </a:txBody>
-                  <a:tcPr/>
-                </a:tc>
-                <a:tc>
-                  <a:txBody>
-                    <a:bodyPr/>
-                    <a:lstStyle/>
-                    <a:p>
-                      <a:pPr>
-                        <a:defRPr sz="1100"/>
-                      </a:pPr>
-                      <a:r>
-                        <a:t>0.02</a:t>
+                        <a:t>7.42</a:t>
+                      </a:r>
+                    </a:p>
+                  </a:txBody>
+                  <a:tcPr/>
+                </a:tc>
+                <a:tc>
+                  <a:txBody>
+                    <a:bodyPr/>
+                    <a:lstStyle/>
+                    <a:p>
+                      <a:pPr>
+                        <a:defRPr sz="1100"/>
+                      </a:pPr>
+                      <a:r>
+                        <a:t>3.71</a:t>
+                      </a:r>
+                    </a:p>
+                  </a:txBody>
+                  <a:tcPr/>
+                </a:tc>
+                <a:tc>
+                  <a:txBody>
+                    <a:bodyPr/>
+                    <a:lstStyle/>
+                    <a:p>
+                      <a:pPr>
+                        <a:defRPr sz="1100"/>
+                      </a:pPr>
+                      <a:r>
+                        <a:t>0.04</a:t>
                       </a:r>
                     </a:p>
                   </a:txBody>
@@ -4649,37 +4649,37 @@
                         <a:defRPr sz="1100"/>
                       </a:pPr>
                       <a:r>
-                        <a:t>19.86</a:t>
-                      </a:r>
-                    </a:p>
-                  </a:txBody>
-                  <a:tcPr/>
-                </a:tc>
-                <a:tc>
-                  <a:txBody>
-                    <a:bodyPr/>
-                    <a:lstStyle/>
-                    <a:p>
-                      <a:pPr>
-                        <a:defRPr sz="1100"/>
-                      </a:pPr>
-                      <a:r>
-                        <a:t>0.99</a:t>
-                      </a:r>
-                    </a:p>
-                  </a:txBody>
-                  <a:tcPr/>
-                </a:tc>
-                <a:tc>
-                  <a:txBody>
-                    <a:bodyPr/>
-                    <a:lstStyle/>
-                    <a:p>
-                      <a:pPr>
-                        <a:defRPr sz="1100"/>
-                      </a:pPr>
-                      <a:r>
-                        <a:t>-0.05</a:t>
+                        <a:t>21.85</a:t>
+                      </a:r>
+                    </a:p>
+                  </a:txBody>
+                  <a:tcPr/>
+                </a:tc>
+                <a:tc>
+                  <a:txBody>
+                    <a:bodyPr/>
+                    <a:lstStyle/>
+                    <a:p>
+                      <a:pPr>
+                        <a:defRPr sz="1100"/>
+                      </a:pPr>
+                      <a:r>
+                        <a:t>1.09</a:t>
+                      </a:r>
+                    </a:p>
+                  </a:txBody>
+                  <a:tcPr/>
+                </a:tc>
+                <a:tc>
+                  <a:txBody>
+                    <a:bodyPr/>
+                    <a:lstStyle/>
+                    <a:p>
+                      <a:pPr>
+                        <a:defRPr sz="1100"/>
+                      </a:pPr>
+                      <a:r>
+                        <a:t>0.05</a:t>
                       </a:r>
                     </a:p>
                   </a:txBody>
@@ -4741,37 +4741,37 @@
                         <a:defRPr sz="1100"/>
                       </a:pPr>
                       <a:r>
-                        <a:t>186.09</a:t>
-                      </a:r>
-                    </a:p>
-                  </a:txBody>
-                  <a:tcPr/>
-                </a:tc>
-                <a:tc>
-                  <a:txBody>
-                    <a:bodyPr/>
-                    <a:lstStyle/>
-                    <a:p>
-                      <a:pPr>
-                        <a:defRPr sz="1100"/>
-                      </a:pPr>
-                      <a:r>
-                        <a:t>18.61</a:t>
-                      </a:r>
-                    </a:p>
-                  </a:txBody>
-                  <a:tcPr/>
-                </a:tc>
-                <a:tc>
-                  <a:txBody>
-                    <a:bodyPr/>
-                    <a:lstStyle/>
-                    <a:p>
-                      <a:pPr>
-                        <a:defRPr sz="1100"/>
-                      </a:pPr>
-                      <a:r>
-                        <a:t>0.85</a:t>
+                        <a:t>185.0</a:t>
+                      </a:r>
+                    </a:p>
+                  </a:txBody>
+                  <a:tcPr/>
+                </a:tc>
+                <a:tc>
+                  <a:txBody>
+                    <a:bodyPr/>
+                    <a:lstStyle/>
+                    <a:p>
+                      <a:pPr>
+                        <a:defRPr sz="1100"/>
+                      </a:pPr>
+                      <a:r>
+                        <a:t>18.5</a:t>
+                      </a:r>
+                    </a:p>
+                  </a:txBody>
+                  <a:tcPr/>
+                </a:tc>
+                <a:tc>
+                  <a:txBody>
+                    <a:bodyPr/>
+                    <a:lstStyle/>
+                    <a:p>
+                      <a:pPr>
+                        <a:defRPr sz="1100"/>
+                      </a:pPr>
+                      <a:r>
+                        <a:t>0.74</a:t>
                       </a:r>
                     </a:p>
                   </a:txBody>
@@ -4833,37 +4833,37 @@
                         <a:defRPr sz="1100"/>
                       </a:pPr>
                       <a:r>
-                        <a:t>157.71</a:t>
-                      </a:r>
-                    </a:p>
-                  </a:txBody>
-                  <a:tcPr/>
-                </a:tc>
-                <a:tc>
-                  <a:txBody>
-                    <a:bodyPr/>
-                    <a:lstStyle/>
-                    <a:p>
-                      <a:pPr>
-                        <a:defRPr sz="1100"/>
-                      </a:pPr>
-                      <a:r>
-                        <a:t>15.77</a:t>
-                      </a:r>
-                    </a:p>
-                  </a:txBody>
-                  <a:tcPr/>
-                </a:tc>
-                <a:tc>
-                  <a:txBody>
-                    <a:bodyPr/>
-                    <a:lstStyle/>
-                    <a:p>
-                      <a:pPr>
-                        <a:defRPr sz="1100"/>
-                      </a:pPr>
-                      <a:r>
-                        <a:t>0.0</a:t>
+                        <a:t>160.49</a:t>
+                      </a:r>
+                    </a:p>
+                  </a:txBody>
+                  <a:tcPr/>
+                </a:tc>
+                <a:tc>
+                  <a:txBody>
+                    <a:bodyPr/>
+                    <a:lstStyle/>
+                    <a:p>
+                      <a:pPr>
+                        <a:defRPr sz="1100"/>
+                      </a:pPr>
+                      <a:r>
+                        <a:t>16.05</a:t>
+                      </a:r>
+                    </a:p>
+                  </a:txBody>
+                  <a:tcPr/>
+                </a:tc>
+                <a:tc>
+                  <a:txBody>
+                    <a:bodyPr/>
+                    <a:lstStyle/>
+                    <a:p>
+                      <a:pPr>
+                        <a:defRPr sz="1100"/>
+                      </a:pPr>
+                      <a:r>
+                        <a:t>0.28</a:t>
                       </a:r>
                     </a:p>
                   </a:txBody>
@@ -4925,37 +4925,37 @@
                         <a:defRPr sz="1100"/>
                       </a:pPr>
                       <a:r>
-                        <a:t>43.15</a:t>
-                      </a:r>
-                    </a:p>
-                  </a:txBody>
-                  <a:tcPr/>
-                </a:tc>
-                <a:tc>
-                  <a:txBody>
-                    <a:bodyPr/>
-                    <a:lstStyle/>
-                    <a:p>
-                      <a:pPr>
-                        <a:defRPr sz="1100"/>
-                      </a:pPr>
-                      <a:r>
-                        <a:t>4.32</a:t>
-                      </a:r>
-                    </a:p>
-                  </a:txBody>
-                  <a:tcPr/>
-                </a:tc>
-                <a:tc>
-                  <a:txBody>
-                    <a:bodyPr/>
-                    <a:lstStyle/>
-                    <a:p>
-                      <a:pPr>
-                        <a:defRPr sz="1100"/>
-                      </a:pPr>
-                      <a:r>
-                        <a:t>0.05</a:t>
+                        <a:t>43.75</a:t>
+                      </a:r>
+                    </a:p>
+                  </a:txBody>
+                  <a:tcPr/>
+                </a:tc>
+                <a:tc>
+                  <a:txBody>
+                    <a:bodyPr/>
+                    <a:lstStyle/>
+                    <a:p>
+                      <a:pPr>
+                        <a:defRPr sz="1100"/>
+                      </a:pPr>
+                      <a:r>
+                        <a:t>4.38</a:t>
+                      </a:r>
+                    </a:p>
+                  </a:txBody>
+                  <a:tcPr/>
+                </a:tc>
+                <a:tc>
+                  <a:txBody>
+                    <a:bodyPr/>
+                    <a:lstStyle/>
+                    <a:p>
+                      <a:pPr>
+                        <a:defRPr sz="1100"/>
+                      </a:pPr>
+                      <a:r>
+                        <a:t>0.11</a:t>
                       </a:r>
                     </a:p>
                   </a:txBody>
@@ -5017,37 +5017,37 @@
                         <a:defRPr sz="1100"/>
                       </a:pPr>
                       <a:r>
-                        <a:t>45.44</a:t>
-                      </a:r>
-                    </a:p>
-                  </a:txBody>
-                  <a:tcPr/>
-                </a:tc>
-                <a:tc>
-                  <a:txBody>
-                    <a:bodyPr/>
-                    <a:lstStyle/>
-                    <a:p>
-                      <a:pPr>
-                        <a:defRPr sz="1100"/>
-                      </a:pPr>
-                      <a:r>
-                        <a:t>40.9</a:t>
-                      </a:r>
-                    </a:p>
-                  </a:txBody>
-                  <a:tcPr/>
-                </a:tc>
-                <a:tc>
-                  <a:txBody>
-                    <a:bodyPr/>
-                    <a:lstStyle/>
-                    <a:p>
-                      <a:pPr>
-                        <a:defRPr sz="1100"/>
-                      </a:pPr>
-                      <a:r>
-                        <a:t>1.69</a:t>
+                        <a:t>43.44</a:t>
+                      </a:r>
+                    </a:p>
+                  </a:txBody>
+                  <a:tcPr/>
+                </a:tc>
+                <a:tc>
+                  <a:txBody>
+                    <a:bodyPr/>
+                    <a:lstStyle/>
+                    <a:p>
+                      <a:pPr>
+                        <a:defRPr sz="1100"/>
+                      </a:pPr>
+                      <a:r>
+                        <a:t>39.1</a:t>
+                      </a:r>
+                    </a:p>
+                  </a:txBody>
+                  <a:tcPr/>
+                </a:tc>
+                <a:tc>
+                  <a:txBody>
+                    <a:bodyPr/>
+                    <a:lstStyle/>
+                    <a:p>
+                      <a:pPr>
+                        <a:defRPr sz="1100"/>
+                      </a:pPr>
+                      <a:r>
+                        <a:t>-0.11</a:t>
                       </a:r>
                     </a:p>
                   </a:txBody>
@@ -5133,7 +5133,7 @@
               <a:defRPr sz="1500"/>
             </a:pPr>
             <a:r>
-              <a:t>紫金矿业（601899，有色金属）：综合82.5分；基本面优秀，具备中长期配置价值；中期趋势向上，可关注/持有。</a:t>
+              <a:t>紫金矿业（601899，有色金属）：综合73.5分；基本面优秀，具备中长期配置价值；趋势中性，观望。</a:t>
             </a:r>
           </a:p>
           <a:p>
@@ -5141,7 +5141,7 @@
               <a:defRPr sz="1500"/>
             </a:pPr>
             <a:r>
-              <a:t>长江电力（600900，电力）：综合72.0分；基本面优秀，具备中长期配置价值；中期趋势向上，可关注/持有。</a:t>
+              <a:t>宁德时代（300750，新能源电池）：综合71.0分；基本面优秀，具备中长期配置价值；趋势中性，观望。</a:t>
             </a:r>
           </a:p>
           <a:p>
@@ -5149,7 +5149,7 @@
               <a:defRPr sz="1500"/>
             </a:pPr>
             <a:r>
-              <a:t>宁德时代（300750，新能源电池）：综合71.0分；基本面优秀，具备中长期配置价值；趋势中性，观望。</a:t>
+              <a:t>长江电力（600900，电力）：综合70.0分；基本面优秀，具备中长期配置价值；中期趋势向上，可关注/持有。</a:t>
             </a:r>
           </a:p>
           <a:p>

--- a/outputs/12_中期路演.pptx
+++ b/outputs/12_中期路演.pptx
@@ -3255,7 +3255,7 @@
               <a:defRPr sz="1500"/>
             </a:pPr>
             <a:r>
-              <a:t>当前总资产：484.39万元</a:t>
+              <a:t>当前总资产：483.95万元</a:t>
             </a:r>
           </a:p>
           <a:p>
@@ -3263,7 +3263,7 @@
               <a:defRPr sz="1500"/>
             </a:pPr>
             <a:r>
-              <a:t>累计收益率：-3.12%</a:t>
+              <a:t>累计收益率：-3.21%</a:t>
             </a:r>
           </a:p>
           <a:p>
@@ -3279,7 +3279,7 @@
               <a:defRPr sz="1500"/>
             </a:pPr>
             <a:r>
-              <a:t>现金：58.50万元（12.1%）</a:t>
+              <a:t>现金：133.80万元（27.6%）</a:t>
             </a:r>
           </a:p>
           <a:p>
@@ -3287,7 +3287,7 @@
               <a:defRPr sz="1500"/>
             </a:pPr>
             <a:r>
-              <a:t>持仓：14只，累计交易28笔</a:t>
+              <a:t>持仓：13只，累计交易32笔</a:t>
             </a:r>
           </a:p>
         </p:txBody>
@@ -3582,7 +3582,7 @@
                 <a:gridCol w="1849069"/>
                 <a:gridCol w="1849070"/>
               </a:tblGrid>
-              <a:tr h="240030">
+              <a:tr h="256032">
                 <a:tc>
                   <a:txBody>
                     <a:bodyPr/>
@@ -3674,7 +3674,7 @@
                   <a:tcPr/>
                 </a:tc>
               </a:tr>
-              <a:tr h="240030">
+              <a:tr h="256032">
                 <a:tc>
                   <a:txBody>
                     <a:bodyPr/>
@@ -3766,7 +3766,7 @@
                   <a:tcPr/>
                 </a:tc>
               </a:tr>
-              <a:tr h="240030">
+              <a:tr h="256032">
                 <a:tc>
                   <a:txBody>
                     <a:bodyPr/>
@@ -3858,7 +3858,7 @@
                   <a:tcPr/>
                 </a:tc>
               </a:tr>
-              <a:tr h="240030">
+              <a:tr h="256032">
                 <a:tc>
                   <a:txBody>
                     <a:bodyPr/>
@@ -3883,7 +3883,7 @@
                         <a:defRPr sz="1100"/>
                       </a:pPr>
                       <a:r>
-                        <a:t>21200</a:t>
+                        <a:t>18200</a:t>
                       </a:r>
                     </a:p>
                   </a:txBody>
@@ -3928,315 +3928,499 @@
                         <a:defRPr sz="1100"/>
                       </a:pPr>
                       <a:r>
-                        <a:t>113.1</a:t>
-                      </a:r>
-                    </a:p>
-                  </a:txBody>
-                  <a:tcPr/>
-                </a:tc>
-                <a:tc>
-                  <a:txBody>
-                    <a:bodyPr/>
-                    <a:lstStyle/>
-                    <a:p>
-                      <a:pPr>
-                        <a:defRPr sz="1100"/>
-                      </a:pPr>
-                      <a:r>
-                        <a:t>-5.87</a:t>
+                        <a:t>97.1</a:t>
+                      </a:r>
+                    </a:p>
+                  </a:txBody>
+                  <a:tcPr/>
+                </a:tc>
+                <a:tc>
+                  <a:txBody>
+                    <a:bodyPr/>
+                    <a:lstStyle/>
+                    <a:p>
+                      <a:pPr>
+                        <a:defRPr sz="1100"/>
+                      </a:pPr>
+                      <a:r>
+                        <a:t>-5.04</a:t>
                       </a:r>
                     </a:p>
                   </a:txBody>
                   <a:tcPr/>
                 </a:tc>
               </a:tr>
-              <a:tr h="240030">
-                <a:tc>
-                  <a:txBody>
-                    <a:bodyPr/>
-                    <a:lstStyle/>
-                    <a:p>
-                      <a:pPr>
-                        <a:defRPr sz="1100"/>
-                      </a:pPr>
-                      <a:r>
-                        <a:t>紫金矿业</a:t>
-                      </a:r>
-                    </a:p>
-                  </a:txBody>
-                  <a:tcPr/>
-                </a:tc>
-                <a:tc>
-                  <a:txBody>
-                    <a:bodyPr/>
-                    <a:lstStyle/>
-                    <a:p>
-                      <a:pPr>
-                        <a:defRPr sz="1100"/>
-                      </a:pPr>
-                      <a:r>
-                        <a:t>12300</a:t>
-                      </a:r>
-                    </a:p>
-                  </a:txBody>
-                  <a:tcPr/>
-                </a:tc>
-                <a:tc>
-                  <a:txBody>
-                    <a:bodyPr/>
-                    <a:lstStyle/>
-                    <a:p>
-                      <a:pPr>
-                        <a:defRPr sz="1100"/>
-                      </a:pPr>
-                      <a:r>
-                        <a:t>33.93</a:t>
-                      </a:r>
-                    </a:p>
-                  </a:txBody>
-                  <a:tcPr/>
-                </a:tc>
-                <a:tc>
-                  <a:txBody>
-                    <a:bodyPr/>
-                    <a:lstStyle/>
-                    <a:p>
-                      <a:pPr>
-                        <a:defRPr sz="1100"/>
-                      </a:pPr>
-                      <a:r>
-                        <a:t>30.9</a:t>
-                      </a:r>
-                    </a:p>
-                  </a:txBody>
-                  <a:tcPr/>
-                </a:tc>
-                <a:tc>
-                  <a:txBody>
-                    <a:bodyPr/>
-                    <a:lstStyle/>
-                    <a:p>
-                      <a:pPr>
-                        <a:defRPr sz="1100"/>
-                      </a:pPr>
-                      <a:r>
-                        <a:t>38.01</a:t>
-                      </a:r>
-                    </a:p>
-                  </a:txBody>
-                  <a:tcPr/>
-                </a:tc>
-                <a:tc>
-                  <a:txBody>
-                    <a:bodyPr/>
-                    <a:lstStyle/>
-                    <a:p>
-                      <a:pPr>
-                        <a:defRPr sz="1100"/>
-                      </a:pPr>
-                      <a:r>
-                        <a:t>-3.72</a:t>
+              <a:tr h="256032">
+                <a:tc>
+                  <a:txBody>
+                    <a:bodyPr/>
+                    <a:lstStyle/>
+                    <a:p>
+                      <a:pPr>
+                        <a:defRPr sz="1100"/>
+                      </a:pPr>
+                      <a:r>
+                        <a:t>长江电力</a:t>
+                      </a:r>
+                    </a:p>
+                  </a:txBody>
+                  <a:tcPr/>
+                </a:tc>
+                <a:tc>
+                  <a:txBody>
+                    <a:bodyPr/>
+                    <a:lstStyle/>
+                    <a:p>
+                      <a:pPr>
+                        <a:defRPr sz="1100"/>
+                      </a:pPr>
+                      <a:r>
+                        <a:t>9300</a:t>
+                      </a:r>
+                    </a:p>
+                  </a:txBody>
+                  <a:tcPr/>
+                </a:tc>
+                <a:tc>
+                  <a:txBody>
+                    <a:bodyPr/>
+                    <a:lstStyle/>
+                    <a:p>
+                      <a:pPr>
+                        <a:defRPr sz="1100"/>
+                      </a:pPr>
+                      <a:r>
+                        <a:t>27.89</a:t>
+                      </a:r>
+                    </a:p>
+                  </a:txBody>
+                  <a:tcPr/>
+                </a:tc>
+                <a:tc>
+                  <a:txBody>
+                    <a:bodyPr/>
+                    <a:lstStyle/>
+                    <a:p>
+                      <a:pPr>
+                        <a:defRPr sz="1100"/>
+                      </a:pPr>
+                      <a:r>
+                        <a:t>28.46</a:t>
+                      </a:r>
+                    </a:p>
+                  </a:txBody>
+                  <a:tcPr/>
+                </a:tc>
+                <a:tc>
+                  <a:txBody>
+                    <a:bodyPr/>
+                    <a:lstStyle/>
+                    <a:p>
+                      <a:pPr>
+                        <a:defRPr sz="1100"/>
+                      </a:pPr>
+                      <a:r>
+                        <a:t>26.47</a:t>
+                      </a:r>
+                    </a:p>
+                  </a:txBody>
+                  <a:tcPr/>
+                </a:tc>
+                <a:tc>
+                  <a:txBody>
+                    <a:bodyPr/>
+                    <a:lstStyle/>
+                    <a:p>
+                      <a:pPr>
+                        <a:defRPr sz="1100"/>
+                      </a:pPr>
+                      <a:r>
+                        <a:t>0.53</a:t>
                       </a:r>
                     </a:p>
                   </a:txBody>
                   <a:tcPr/>
                 </a:tc>
               </a:tr>
-              <a:tr h="240030">
-                <a:tc>
-                  <a:txBody>
-                    <a:bodyPr/>
-                    <a:lstStyle/>
-                    <a:p>
-                      <a:pPr>
-                        <a:defRPr sz="1100"/>
-                      </a:pPr>
-                      <a:r>
-                        <a:t>长江电力</a:t>
-                      </a:r>
-                    </a:p>
-                  </a:txBody>
-                  <a:tcPr/>
-                </a:tc>
-                <a:tc>
-                  <a:txBody>
-                    <a:bodyPr/>
-                    <a:lstStyle/>
-                    <a:p>
-                      <a:pPr>
-                        <a:defRPr sz="1100"/>
-                      </a:pPr>
-                      <a:r>
-                        <a:t>9300</a:t>
-                      </a:r>
-                    </a:p>
-                  </a:txBody>
-                  <a:tcPr/>
-                </a:tc>
-                <a:tc>
-                  <a:txBody>
-                    <a:bodyPr/>
-                    <a:lstStyle/>
-                    <a:p>
-                      <a:pPr>
-                        <a:defRPr sz="1100"/>
-                      </a:pPr>
-                      <a:r>
-                        <a:t>27.89</a:t>
-                      </a:r>
-                    </a:p>
-                  </a:txBody>
-                  <a:tcPr/>
-                </a:tc>
-                <a:tc>
-                  <a:txBody>
-                    <a:bodyPr/>
-                    <a:lstStyle/>
-                    <a:p>
-                      <a:pPr>
-                        <a:defRPr sz="1100"/>
-                      </a:pPr>
-                      <a:r>
-                        <a:t>28.46</a:t>
-                      </a:r>
-                    </a:p>
-                  </a:txBody>
-                  <a:tcPr/>
-                </a:tc>
-                <a:tc>
-                  <a:txBody>
-                    <a:bodyPr/>
-                    <a:lstStyle/>
-                    <a:p>
-                      <a:pPr>
-                        <a:defRPr sz="1100"/>
-                      </a:pPr>
-                      <a:r>
-                        <a:t>26.47</a:t>
-                      </a:r>
-                    </a:p>
-                  </a:txBody>
-                  <a:tcPr/>
-                </a:tc>
-                <a:tc>
-                  <a:txBody>
-                    <a:bodyPr/>
-                    <a:lstStyle/>
-                    <a:p>
-                      <a:pPr>
-                        <a:defRPr sz="1100"/>
-                      </a:pPr>
-                      <a:r>
-                        <a:t>0.53</a:t>
+              <a:tr h="256032">
+                <a:tc>
+                  <a:txBody>
+                    <a:bodyPr/>
+                    <a:lstStyle/>
+                    <a:p>
+                      <a:pPr>
+                        <a:defRPr sz="1100"/>
+                      </a:pPr>
+                      <a:r>
+                        <a:t>新集能源</a:t>
+                      </a:r>
+                    </a:p>
+                  </a:txBody>
+                  <a:tcPr/>
+                </a:tc>
+                <a:tc>
+                  <a:txBody>
+                    <a:bodyPr/>
+                    <a:lstStyle/>
+                    <a:p>
+                      <a:pPr>
+                        <a:defRPr sz="1100"/>
+                      </a:pPr>
+                      <a:r>
+                        <a:t>9500</a:t>
+                      </a:r>
+                    </a:p>
+                  </a:txBody>
+                  <a:tcPr/>
+                </a:tc>
+                <a:tc>
+                  <a:txBody>
+                    <a:bodyPr/>
+                    <a:lstStyle/>
+                    <a:p>
+                      <a:pPr>
+                        <a:defRPr sz="1100"/>
+                      </a:pPr>
+                      <a:r>
+                        <a:t>10.47</a:t>
+                      </a:r>
+                    </a:p>
+                  </a:txBody>
+                  <a:tcPr/>
+                </a:tc>
+                <a:tc>
+                  <a:txBody>
+                    <a:bodyPr/>
+                    <a:lstStyle/>
+                    <a:p>
+                      <a:pPr>
+                        <a:defRPr sz="1100"/>
+                      </a:pPr>
+                      <a:r>
+                        <a:t>10.22</a:t>
+                      </a:r>
+                    </a:p>
+                  </a:txBody>
+                  <a:tcPr/>
+                </a:tc>
+                <a:tc>
+                  <a:txBody>
+                    <a:bodyPr/>
+                    <a:lstStyle/>
+                    <a:p>
+                      <a:pPr>
+                        <a:defRPr sz="1100"/>
+                      </a:pPr>
+                      <a:r>
+                        <a:t>9.71</a:t>
+                      </a:r>
+                    </a:p>
+                  </a:txBody>
+                  <a:tcPr/>
+                </a:tc>
+                <a:tc>
+                  <a:txBody>
+                    <a:bodyPr/>
+                    <a:lstStyle/>
+                    <a:p>
+                      <a:pPr>
+                        <a:defRPr sz="1100"/>
+                      </a:pPr>
+                      <a:r>
+                        <a:t>-0.24</a:t>
                       </a:r>
                     </a:p>
                   </a:txBody>
                   <a:tcPr/>
                 </a:tc>
               </a:tr>
-              <a:tr h="240030">
-                <a:tc>
-                  <a:txBody>
-                    <a:bodyPr/>
-                    <a:lstStyle/>
-                    <a:p>
-                      <a:pPr>
-                        <a:defRPr sz="1100"/>
-                      </a:pPr>
-                      <a:r>
-                        <a:t>新集能源</a:t>
-                      </a:r>
-                    </a:p>
-                  </a:txBody>
-                  <a:tcPr/>
-                </a:tc>
-                <a:tc>
-                  <a:txBody>
-                    <a:bodyPr/>
-                    <a:lstStyle/>
-                    <a:p>
-                      <a:pPr>
-                        <a:defRPr sz="1100"/>
-                      </a:pPr>
-                      <a:r>
-                        <a:t>9500</a:t>
-                      </a:r>
-                    </a:p>
-                  </a:txBody>
-                  <a:tcPr/>
-                </a:tc>
-                <a:tc>
-                  <a:txBody>
-                    <a:bodyPr/>
-                    <a:lstStyle/>
-                    <a:p>
-                      <a:pPr>
-                        <a:defRPr sz="1100"/>
-                      </a:pPr>
-                      <a:r>
-                        <a:t>10.47</a:t>
-                      </a:r>
-                    </a:p>
-                  </a:txBody>
-                  <a:tcPr/>
-                </a:tc>
-                <a:tc>
-                  <a:txBody>
-                    <a:bodyPr/>
-                    <a:lstStyle/>
-                    <a:p>
-                      <a:pPr>
-                        <a:defRPr sz="1100"/>
-                      </a:pPr>
-                      <a:r>
-                        <a:t>10.22</a:t>
-                      </a:r>
-                    </a:p>
-                  </a:txBody>
-                  <a:tcPr/>
-                </a:tc>
-                <a:tc>
-                  <a:txBody>
-                    <a:bodyPr/>
-                    <a:lstStyle/>
-                    <a:p>
-                      <a:pPr>
-                        <a:defRPr sz="1100"/>
-                      </a:pPr>
-                      <a:r>
-                        <a:t>9.71</a:t>
-                      </a:r>
-                    </a:p>
-                  </a:txBody>
-                  <a:tcPr/>
-                </a:tc>
-                <a:tc>
-                  <a:txBody>
-                    <a:bodyPr/>
-                    <a:lstStyle/>
-                    <a:p>
-                      <a:pPr>
-                        <a:defRPr sz="1100"/>
-                      </a:pPr>
-                      <a:r>
-                        <a:t>-0.24</a:t>
+              <a:tr h="256032">
+                <a:tc>
+                  <a:txBody>
+                    <a:bodyPr/>
+                    <a:lstStyle/>
+                    <a:p>
+                      <a:pPr>
+                        <a:defRPr sz="1100"/>
+                      </a:pPr>
+                      <a:r>
+                        <a:t>恺英网络</a:t>
+                      </a:r>
+                    </a:p>
+                  </a:txBody>
+                  <a:tcPr/>
+                </a:tc>
+                <a:tc>
+                  <a:txBody>
+                    <a:bodyPr/>
+                    <a:lstStyle/>
+                    <a:p>
+                      <a:pPr>
+                        <a:defRPr sz="1100"/>
+                      </a:pPr>
+                      <a:r>
+                        <a:t>5000</a:t>
+                      </a:r>
+                    </a:p>
+                  </a:txBody>
+                  <a:tcPr/>
+                </a:tc>
+                <a:tc>
+                  <a:txBody>
+                    <a:bodyPr/>
+                    <a:lstStyle/>
+                    <a:p>
+                      <a:pPr>
+                        <a:defRPr sz="1100"/>
+                      </a:pPr>
+                      <a:r>
+                        <a:t>17.52</a:t>
+                      </a:r>
+                    </a:p>
+                  </a:txBody>
+                  <a:tcPr/>
+                </a:tc>
+                <a:tc>
+                  <a:txBody>
+                    <a:bodyPr/>
+                    <a:lstStyle/>
+                    <a:p>
+                      <a:pPr>
+                        <a:defRPr sz="1100"/>
+                      </a:pPr>
+                      <a:r>
+                        <a:t>16.54</a:t>
+                      </a:r>
+                    </a:p>
+                  </a:txBody>
+                  <a:tcPr/>
+                </a:tc>
+                <a:tc>
+                  <a:txBody>
+                    <a:bodyPr/>
+                    <a:lstStyle/>
+                    <a:p>
+                      <a:pPr>
+                        <a:defRPr sz="1100"/>
+                      </a:pPr>
+                      <a:r>
+                        <a:t>8.27</a:t>
+                      </a:r>
+                    </a:p>
+                  </a:txBody>
+                  <a:tcPr/>
+                </a:tc>
+                <a:tc>
+                  <a:txBody>
+                    <a:bodyPr/>
+                    <a:lstStyle/>
+                    <a:p>
+                      <a:pPr>
+                        <a:defRPr sz="1100"/>
+                      </a:pPr>
+                      <a:r>
+                        <a:t>-0.49</a:t>
                       </a:r>
                     </a:p>
                   </a:txBody>
                   <a:tcPr/>
                 </a:tc>
               </a:tr>
-              <a:tr h="240030">
-                <a:tc>
-                  <a:txBody>
-                    <a:bodyPr/>
-                    <a:lstStyle/>
-                    <a:p>
-                      <a:pPr>
-                        <a:defRPr sz="1100"/>
-                      </a:pPr>
-                      <a:r>
-                        <a:t>恺英网络</a:t>
+              <a:tr h="256032">
+                <a:tc>
+                  <a:txBody>
+                    <a:bodyPr/>
+                    <a:lstStyle/>
+                    <a:p>
+                      <a:pPr>
+                        <a:defRPr sz="1100"/>
+                      </a:pPr>
+                      <a:r>
+                        <a:t>星网锐捷</a:t>
+                      </a:r>
+                    </a:p>
+                  </a:txBody>
+                  <a:tcPr/>
+                </a:tc>
+                <a:tc>
+                  <a:txBody>
+                    <a:bodyPr/>
+                    <a:lstStyle/>
+                    <a:p>
+                      <a:pPr>
+                        <a:defRPr sz="1100"/>
+                      </a:pPr>
+                      <a:r>
+                        <a:t>6100</a:t>
+                      </a:r>
+                    </a:p>
+                  </a:txBody>
+                  <a:tcPr/>
+                </a:tc>
+                <a:tc>
+                  <a:txBody>
+                    <a:bodyPr/>
+                    <a:lstStyle/>
+                    <a:p>
+                      <a:pPr>
+                        <a:defRPr sz="1100"/>
+                      </a:pPr>
+                      <a:r>
+                        <a:t>35.87</a:t>
+                      </a:r>
+                    </a:p>
+                  </a:txBody>
+                  <a:tcPr/>
+                </a:tc>
+                <a:tc>
+                  <a:txBody>
+                    <a:bodyPr/>
+                    <a:lstStyle/>
+                    <a:p>
+                      <a:pPr>
+                        <a:defRPr sz="1100"/>
+                      </a:pPr>
+                      <a:r>
+                        <a:t>38.2</a:t>
+                      </a:r>
+                    </a:p>
+                  </a:txBody>
+                  <a:tcPr/>
+                </a:tc>
+                <a:tc>
+                  <a:txBody>
+                    <a:bodyPr/>
+                    <a:lstStyle/>
+                    <a:p>
+                      <a:pPr>
+                        <a:defRPr sz="1100"/>
+                      </a:pPr>
+                      <a:r>
+                        <a:t>23.3</a:t>
+                      </a:r>
+                    </a:p>
+                  </a:txBody>
+                  <a:tcPr/>
+                </a:tc>
+                <a:tc>
+                  <a:txBody>
+                    <a:bodyPr/>
+                    <a:lstStyle/>
+                    <a:p>
+                      <a:pPr>
+                        <a:defRPr sz="1100"/>
+                      </a:pPr>
+                      <a:r>
+                        <a:t>1.42</a:t>
+                      </a:r>
+                    </a:p>
+                  </a:txBody>
+                  <a:tcPr/>
+                </a:tc>
+              </a:tr>
+              <a:tr h="256032">
+                <a:tc>
+                  <a:txBody>
+                    <a:bodyPr/>
+                    <a:lstStyle/>
+                    <a:p>
+                      <a:pPr>
+                        <a:defRPr sz="1100"/>
+                      </a:pPr>
+                      <a:r>
+                        <a:t>深信服</a:t>
+                      </a:r>
+                    </a:p>
+                  </a:txBody>
+                  <a:tcPr/>
+                </a:tc>
+                <a:tc>
+                  <a:txBody>
+                    <a:bodyPr/>
+                    <a:lstStyle/>
+                    <a:p>
+                      <a:pPr>
+                        <a:defRPr sz="1100"/>
+                      </a:pPr>
+                      <a:r>
+                        <a:t>500</a:t>
+                      </a:r>
+                    </a:p>
+                  </a:txBody>
+                  <a:tcPr/>
+                </a:tc>
+                <a:tc>
+                  <a:txBody>
+                    <a:bodyPr/>
+                    <a:lstStyle/>
+                    <a:p>
+                      <a:pPr>
+                        <a:defRPr sz="1100"/>
+                      </a:pPr>
+                      <a:r>
+                        <a:t>136.73</a:t>
+                      </a:r>
+                    </a:p>
+                  </a:txBody>
+                  <a:tcPr/>
+                </a:tc>
+                <a:tc>
+                  <a:txBody>
+                    <a:bodyPr/>
+                    <a:lstStyle/>
+                    <a:p>
+                      <a:pPr>
+                        <a:defRPr sz="1100"/>
+                      </a:pPr>
+                      <a:r>
+                        <a:t>137.47</a:t>
+                      </a:r>
+                    </a:p>
+                  </a:txBody>
+                  <a:tcPr/>
+                </a:tc>
+                <a:tc>
+                  <a:txBody>
+                    <a:bodyPr/>
+                    <a:lstStyle/>
+                    <a:p>
+                      <a:pPr>
+                        <a:defRPr sz="1100"/>
+                      </a:pPr>
+                      <a:r>
+                        <a:t>6.87</a:t>
+                      </a:r>
+                    </a:p>
+                  </a:txBody>
+                  <a:tcPr/>
+                </a:tc>
+                <a:tc>
+                  <a:txBody>
+                    <a:bodyPr/>
+                    <a:lstStyle/>
+                    <a:p>
+                      <a:pPr>
+                        <a:defRPr sz="1100"/>
+                      </a:pPr>
+                      <a:r>
+                        <a:t>0.04</a:t>
+                      </a:r>
+                    </a:p>
+                  </a:txBody>
+                  <a:tcPr/>
+                </a:tc>
+              </a:tr>
+              <a:tr h="256032">
+                <a:tc>
+                  <a:txBody>
+                    <a:bodyPr/>
+                    <a:lstStyle/>
+                    <a:p>
+                      <a:pPr>
+                        <a:defRPr sz="1100"/>
+                      </a:pPr>
+                      <a:r>
+                        <a:t>哈药股份</a:t>
                       </a:r>
                     </a:p>
                   </a:txBody>
@@ -4266,703 +4450,427 @@
                         <a:defRPr sz="1100"/>
                       </a:pPr>
                       <a:r>
-                        <a:t>17.52</a:t>
-                      </a:r>
-                    </a:p>
-                  </a:txBody>
-                  <a:tcPr/>
-                </a:tc>
-                <a:tc>
-                  <a:txBody>
-                    <a:bodyPr/>
-                    <a:lstStyle/>
-                    <a:p>
-                      <a:pPr>
-                        <a:defRPr sz="1100"/>
-                      </a:pPr>
-                      <a:r>
-                        <a:t>16.54</a:t>
-                      </a:r>
-                    </a:p>
-                  </a:txBody>
-                  <a:tcPr/>
-                </a:tc>
-                <a:tc>
-                  <a:txBody>
-                    <a:bodyPr/>
-                    <a:lstStyle/>
-                    <a:p>
-                      <a:pPr>
-                        <a:defRPr sz="1100"/>
-                      </a:pPr>
-                      <a:r>
-                        <a:t>8.27</a:t>
-                      </a:r>
-                    </a:p>
-                  </a:txBody>
-                  <a:tcPr/>
-                </a:tc>
-                <a:tc>
-                  <a:txBody>
-                    <a:bodyPr/>
-                    <a:lstStyle/>
-                    <a:p>
-                      <a:pPr>
-                        <a:defRPr sz="1100"/>
-                      </a:pPr>
-                      <a:r>
-                        <a:t>-0.49</a:t>
+                        <a:t>7.33</a:t>
+                      </a:r>
+                    </a:p>
+                  </a:txBody>
+                  <a:tcPr/>
+                </a:tc>
+                <a:tc>
+                  <a:txBody>
+                    <a:bodyPr/>
+                    <a:lstStyle/>
+                    <a:p>
+                      <a:pPr>
+                        <a:defRPr sz="1100"/>
+                      </a:pPr>
+                      <a:r>
+                        <a:t>7.42</a:t>
+                      </a:r>
+                    </a:p>
+                  </a:txBody>
+                  <a:tcPr/>
+                </a:tc>
+                <a:tc>
+                  <a:txBody>
+                    <a:bodyPr/>
+                    <a:lstStyle/>
+                    <a:p>
+                      <a:pPr>
+                        <a:defRPr sz="1100"/>
+                      </a:pPr>
+                      <a:r>
+                        <a:t>3.71</a:t>
+                      </a:r>
+                    </a:p>
+                  </a:txBody>
+                  <a:tcPr/>
+                </a:tc>
+                <a:tc>
+                  <a:txBody>
+                    <a:bodyPr/>
+                    <a:lstStyle/>
+                    <a:p>
+                      <a:pPr>
+                        <a:defRPr sz="1100"/>
+                      </a:pPr>
+                      <a:r>
+                        <a:t>0.04</a:t>
                       </a:r>
                     </a:p>
                   </a:txBody>
                   <a:tcPr/>
                 </a:tc>
               </a:tr>
-              <a:tr h="240030">
-                <a:tc>
-                  <a:txBody>
-                    <a:bodyPr/>
-                    <a:lstStyle/>
-                    <a:p>
-                      <a:pPr>
-                        <a:defRPr sz="1100"/>
-                      </a:pPr>
-                      <a:r>
-                        <a:t>星网锐捷</a:t>
-                      </a:r>
-                    </a:p>
-                  </a:txBody>
-                  <a:tcPr/>
-                </a:tc>
-                <a:tc>
-                  <a:txBody>
-                    <a:bodyPr/>
-                    <a:lstStyle/>
-                    <a:p>
-                      <a:pPr>
-                        <a:defRPr sz="1100"/>
-                      </a:pPr>
-                      <a:r>
-                        <a:t>6100</a:t>
-                      </a:r>
-                    </a:p>
-                  </a:txBody>
-                  <a:tcPr/>
-                </a:tc>
-                <a:tc>
-                  <a:txBody>
-                    <a:bodyPr/>
-                    <a:lstStyle/>
-                    <a:p>
-                      <a:pPr>
-                        <a:defRPr sz="1100"/>
-                      </a:pPr>
-                      <a:r>
-                        <a:t>35.87</a:t>
-                      </a:r>
-                    </a:p>
-                  </a:txBody>
-                  <a:tcPr/>
-                </a:tc>
-                <a:tc>
-                  <a:txBody>
-                    <a:bodyPr/>
-                    <a:lstStyle/>
-                    <a:p>
-                      <a:pPr>
-                        <a:defRPr sz="1100"/>
-                      </a:pPr>
-                      <a:r>
-                        <a:t>38.2</a:t>
-                      </a:r>
-                    </a:p>
-                  </a:txBody>
-                  <a:tcPr/>
-                </a:tc>
-                <a:tc>
-                  <a:txBody>
-                    <a:bodyPr/>
-                    <a:lstStyle/>
-                    <a:p>
-                      <a:pPr>
-                        <a:defRPr sz="1100"/>
-                      </a:pPr>
-                      <a:r>
-                        <a:t>23.3</a:t>
-                      </a:r>
-                    </a:p>
-                  </a:txBody>
-                  <a:tcPr/>
-                </a:tc>
-                <a:tc>
-                  <a:txBody>
-                    <a:bodyPr/>
-                    <a:lstStyle/>
-                    <a:p>
-                      <a:pPr>
-                        <a:defRPr sz="1100"/>
-                      </a:pPr>
-                      <a:r>
-                        <a:t>1.42</a:t>
+              <a:tr h="256032">
+                <a:tc>
+                  <a:txBody>
+                    <a:bodyPr/>
+                    <a:lstStyle/>
+                    <a:p>
+                      <a:pPr>
+                        <a:defRPr sz="1100"/>
+                      </a:pPr>
+                      <a:r>
+                        <a:t>招商轮船</a:t>
+                      </a:r>
+                    </a:p>
+                  </a:txBody>
+                  <a:tcPr/>
+                </a:tc>
+                <a:tc>
+                  <a:txBody>
+                    <a:bodyPr/>
+                    <a:lstStyle/>
+                    <a:p>
+                      <a:pPr>
+                        <a:defRPr sz="1100"/>
+                      </a:pPr>
+                      <a:r>
+                        <a:t>500</a:t>
+                      </a:r>
+                    </a:p>
+                  </a:txBody>
+                  <a:tcPr/>
+                </a:tc>
+                <a:tc>
+                  <a:txBody>
+                    <a:bodyPr/>
+                    <a:lstStyle/>
+                    <a:p>
+                      <a:pPr>
+                        <a:defRPr sz="1100"/>
+                      </a:pPr>
+                      <a:r>
+                        <a:t>20.76</a:t>
+                      </a:r>
+                    </a:p>
+                  </a:txBody>
+                  <a:tcPr/>
+                </a:tc>
+                <a:tc>
+                  <a:txBody>
+                    <a:bodyPr/>
+                    <a:lstStyle/>
+                    <a:p>
+                      <a:pPr>
+                        <a:defRPr sz="1100"/>
+                      </a:pPr>
+                      <a:r>
+                        <a:t>21.85</a:t>
+                      </a:r>
+                    </a:p>
+                  </a:txBody>
+                  <a:tcPr/>
+                </a:tc>
+                <a:tc>
+                  <a:txBody>
+                    <a:bodyPr/>
+                    <a:lstStyle/>
+                    <a:p>
+                      <a:pPr>
+                        <a:defRPr sz="1100"/>
+                      </a:pPr>
+                      <a:r>
+                        <a:t>1.09</a:t>
+                      </a:r>
+                    </a:p>
+                  </a:txBody>
+                  <a:tcPr/>
+                </a:tc>
+                <a:tc>
+                  <a:txBody>
+                    <a:bodyPr/>
+                    <a:lstStyle/>
+                    <a:p>
+                      <a:pPr>
+                        <a:defRPr sz="1100"/>
+                      </a:pPr>
+                      <a:r>
+                        <a:t>0.05</a:t>
                       </a:r>
                     </a:p>
                   </a:txBody>
                   <a:tcPr/>
                 </a:tc>
               </a:tr>
-              <a:tr h="240030">
-                <a:tc>
-                  <a:txBody>
-                    <a:bodyPr/>
-                    <a:lstStyle/>
-                    <a:p>
-                      <a:pPr>
-                        <a:defRPr sz="1100"/>
-                      </a:pPr>
-                      <a:r>
-                        <a:t>深信服</a:t>
-                      </a:r>
-                    </a:p>
-                  </a:txBody>
-                  <a:tcPr/>
-                </a:tc>
-                <a:tc>
-                  <a:txBody>
-                    <a:bodyPr/>
-                    <a:lstStyle/>
-                    <a:p>
-                      <a:pPr>
-                        <a:defRPr sz="1100"/>
-                      </a:pPr>
-                      <a:r>
-                        <a:t>500</a:t>
-                      </a:r>
-                    </a:p>
-                  </a:txBody>
-                  <a:tcPr/>
-                </a:tc>
-                <a:tc>
-                  <a:txBody>
-                    <a:bodyPr/>
-                    <a:lstStyle/>
-                    <a:p>
-                      <a:pPr>
-                        <a:defRPr sz="1100"/>
-                      </a:pPr>
-                      <a:r>
-                        <a:t>136.73</a:t>
-                      </a:r>
-                    </a:p>
-                  </a:txBody>
-                  <a:tcPr/>
-                </a:tc>
-                <a:tc>
-                  <a:txBody>
-                    <a:bodyPr/>
-                    <a:lstStyle/>
-                    <a:p>
-                      <a:pPr>
-                        <a:defRPr sz="1100"/>
-                      </a:pPr>
-                      <a:r>
-                        <a:t>137.47</a:t>
-                      </a:r>
-                    </a:p>
-                  </a:txBody>
-                  <a:tcPr/>
-                </a:tc>
-                <a:tc>
-                  <a:txBody>
-                    <a:bodyPr/>
-                    <a:lstStyle/>
-                    <a:p>
-                      <a:pPr>
-                        <a:defRPr sz="1100"/>
-                      </a:pPr>
-                      <a:r>
-                        <a:t>6.87</a:t>
-                      </a:r>
-                    </a:p>
-                  </a:txBody>
-                  <a:tcPr/>
-                </a:tc>
-                <a:tc>
-                  <a:txBody>
-                    <a:bodyPr/>
-                    <a:lstStyle/>
-                    <a:p>
-                      <a:pPr>
-                        <a:defRPr sz="1100"/>
-                      </a:pPr>
-                      <a:r>
-                        <a:t>0.04</a:t>
+              <a:tr h="256032">
+                <a:tc>
+                  <a:txBody>
+                    <a:bodyPr/>
+                    <a:lstStyle/>
+                    <a:p>
+                      <a:pPr>
+                        <a:defRPr sz="1100"/>
+                      </a:pPr>
+                      <a:r>
+                        <a:t>睿创微纳</a:t>
+                      </a:r>
+                    </a:p>
+                  </a:txBody>
+                  <a:tcPr/>
+                </a:tc>
+                <a:tc>
+                  <a:txBody>
+                    <a:bodyPr/>
+                    <a:lstStyle/>
+                    <a:p>
+                      <a:pPr>
+                        <a:defRPr sz="1100"/>
+                      </a:pPr>
+                      <a:r>
+                        <a:t>1000</a:t>
+                      </a:r>
+                    </a:p>
+                  </a:txBody>
+                  <a:tcPr/>
+                </a:tc>
+                <a:tc>
+                  <a:txBody>
+                    <a:bodyPr/>
+                    <a:lstStyle/>
+                    <a:p>
+                      <a:pPr>
+                        <a:defRPr sz="1100"/>
+                      </a:pPr>
+                      <a:r>
+                        <a:t>177.58</a:t>
+                      </a:r>
+                    </a:p>
+                  </a:txBody>
+                  <a:tcPr/>
+                </a:tc>
+                <a:tc>
+                  <a:txBody>
+                    <a:bodyPr/>
+                    <a:lstStyle/>
+                    <a:p>
+                      <a:pPr>
+                        <a:defRPr sz="1100"/>
+                      </a:pPr>
+                      <a:r>
+                        <a:t>185.0</a:t>
+                      </a:r>
+                    </a:p>
+                  </a:txBody>
+                  <a:tcPr/>
+                </a:tc>
+                <a:tc>
+                  <a:txBody>
+                    <a:bodyPr/>
+                    <a:lstStyle/>
+                    <a:p>
+                      <a:pPr>
+                        <a:defRPr sz="1100"/>
+                      </a:pPr>
+                      <a:r>
+                        <a:t>18.5</a:t>
+                      </a:r>
+                    </a:p>
+                  </a:txBody>
+                  <a:tcPr/>
+                </a:tc>
+                <a:tc>
+                  <a:txBody>
+                    <a:bodyPr/>
+                    <a:lstStyle/>
+                    <a:p>
+                      <a:pPr>
+                        <a:defRPr sz="1100"/>
+                      </a:pPr>
+                      <a:r>
+                        <a:t>0.74</a:t>
                       </a:r>
                     </a:p>
                   </a:txBody>
                   <a:tcPr/>
                 </a:tc>
               </a:tr>
-              <a:tr h="240030">
-                <a:tc>
-                  <a:txBody>
-                    <a:bodyPr/>
-                    <a:lstStyle/>
-                    <a:p>
-                      <a:pPr>
-                        <a:defRPr sz="1100"/>
-                      </a:pPr>
-                      <a:r>
-                        <a:t>哈药股份</a:t>
-                      </a:r>
-                    </a:p>
-                  </a:txBody>
-                  <a:tcPr/>
-                </a:tc>
-                <a:tc>
-                  <a:txBody>
-                    <a:bodyPr/>
-                    <a:lstStyle/>
-                    <a:p>
-                      <a:pPr>
-                        <a:defRPr sz="1100"/>
-                      </a:pPr>
-                      <a:r>
-                        <a:t>5000</a:t>
-                      </a:r>
-                    </a:p>
-                  </a:txBody>
-                  <a:tcPr/>
-                </a:tc>
-                <a:tc>
-                  <a:txBody>
-                    <a:bodyPr/>
-                    <a:lstStyle/>
-                    <a:p>
-                      <a:pPr>
-                        <a:defRPr sz="1100"/>
-                      </a:pPr>
-                      <a:r>
-                        <a:t>7.33</a:t>
-                      </a:r>
-                    </a:p>
-                  </a:txBody>
-                  <a:tcPr/>
-                </a:tc>
-                <a:tc>
-                  <a:txBody>
-                    <a:bodyPr/>
-                    <a:lstStyle/>
-                    <a:p>
-                      <a:pPr>
-                        <a:defRPr sz="1100"/>
-                      </a:pPr>
-                      <a:r>
-                        <a:t>7.42</a:t>
-                      </a:r>
-                    </a:p>
-                  </a:txBody>
-                  <a:tcPr/>
-                </a:tc>
-                <a:tc>
-                  <a:txBody>
-                    <a:bodyPr/>
-                    <a:lstStyle/>
-                    <a:p>
-                      <a:pPr>
-                        <a:defRPr sz="1100"/>
-                      </a:pPr>
-                      <a:r>
-                        <a:t>3.71</a:t>
-                      </a:r>
-                    </a:p>
-                  </a:txBody>
-                  <a:tcPr/>
-                </a:tc>
-                <a:tc>
-                  <a:txBody>
-                    <a:bodyPr/>
-                    <a:lstStyle/>
-                    <a:p>
-                      <a:pPr>
-                        <a:defRPr sz="1100"/>
-                      </a:pPr>
-                      <a:r>
-                        <a:t>0.04</a:t>
+              <a:tr h="256032">
+                <a:tc>
+                  <a:txBody>
+                    <a:bodyPr/>
+                    <a:lstStyle/>
+                    <a:p>
+                      <a:pPr>
+                        <a:defRPr sz="1100"/>
+                      </a:pPr>
+                      <a:r>
+                        <a:t>药明康德</a:t>
+                      </a:r>
+                    </a:p>
+                  </a:txBody>
+                  <a:tcPr/>
+                </a:tc>
+                <a:tc>
+                  <a:txBody>
+                    <a:bodyPr/>
+                    <a:lstStyle/>
+                    <a:p>
+                      <a:pPr>
+                        <a:defRPr sz="1100"/>
+                      </a:pPr>
+                      <a:r>
+                        <a:t>1000</a:t>
+                      </a:r>
+                    </a:p>
+                  </a:txBody>
+                  <a:tcPr/>
+                </a:tc>
+                <a:tc>
+                  <a:txBody>
+                    <a:bodyPr/>
+                    <a:lstStyle/>
+                    <a:p>
+                      <a:pPr>
+                        <a:defRPr sz="1100"/>
+                      </a:pPr>
+                      <a:r>
+                        <a:t>157.7</a:t>
+                      </a:r>
+                    </a:p>
+                  </a:txBody>
+                  <a:tcPr/>
+                </a:tc>
+                <a:tc>
+                  <a:txBody>
+                    <a:bodyPr/>
+                    <a:lstStyle/>
+                    <a:p>
+                      <a:pPr>
+                        <a:defRPr sz="1100"/>
+                      </a:pPr>
+                      <a:r>
+                        <a:t>160.49</a:t>
+                      </a:r>
+                    </a:p>
+                  </a:txBody>
+                  <a:tcPr/>
+                </a:tc>
+                <a:tc>
+                  <a:txBody>
+                    <a:bodyPr/>
+                    <a:lstStyle/>
+                    <a:p>
+                      <a:pPr>
+                        <a:defRPr sz="1100"/>
+                      </a:pPr>
+                      <a:r>
+                        <a:t>16.05</a:t>
+                      </a:r>
+                    </a:p>
+                  </a:txBody>
+                  <a:tcPr/>
+                </a:tc>
+                <a:tc>
+                  <a:txBody>
+                    <a:bodyPr/>
+                    <a:lstStyle/>
+                    <a:p>
+                      <a:pPr>
+                        <a:defRPr sz="1100"/>
+                      </a:pPr>
+                      <a:r>
+                        <a:t>0.28</a:t>
                       </a:r>
                     </a:p>
                   </a:txBody>
                   <a:tcPr/>
                 </a:tc>
               </a:tr>
-              <a:tr h="240030">
-                <a:tc>
-                  <a:txBody>
-                    <a:bodyPr/>
-                    <a:lstStyle/>
-                    <a:p>
-                      <a:pPr>
-                        <a:defRPr sz="1100"/>
-                      </a:pPr>
-                      <a:r>
-                        <a:t>招商轮船</a:t>
-                      </a:r>
-                    </a:p>
-                  </a:txBody>
-                  <a:tcPr/>
-                </a:tc>
-                <a:tc>
-                  <a:txBody>
-                    <a:bodyPr/>
-                    <a:lstStyle/>
-                    <a:p>
-                      <a:pPr>
-                        <a:defRPr sz="1100"/>
-                      </a:pPr>
-                      <a:r>
-                        <a:t>500</a:t>
-                      </a:r>
-                    </a:p>
-                  </a:txBody>
-                  <a:tcPr/>
-                </a:tc>
-                <a:tc>
-                  <a:txBody>
-                    <a:bodyPr/>
-                    <a:lstStyle/>
-                    <a:p>
-                      <a:pPr>
-                        <a:defRPr sz="1100"/>
-                      </a:pPr>
-                      <a:r>
-                        <a:t>20.76</a:t>
-                      </a:r>
-                    </a:p>
-                  </a:txBody>
-                  <a:tcPr/>
-                </a:tc>
-                <a:tc>
-                  <a:txBody>
-                    <a:bodyPr/>
-                    <a:lstStyle/>
-                    <a:p>
-                      <a:pPr>
-                        <a:defRPr sz="1100"/>
-                      </a:pPr>
-                      <a:r>
-                        <a:t>21.85</a:t>
-                      </a:r>
-                    </a:p>
-                  </a:txBody>
-                  <a:tcPr/>
-                </a:tc>
-                <a:tc>
-                  <a:txBody>
-                    <a:bodyPr/>
-                    <a:lstStyle/>
-                    <a:p>
-                      <a:pPr>
-                        <a:defRPr sz="1100"/>
-                      </a:pPr>
-                      <a:r>
-                        <a:t>1.09</a:t>
-                      </a:r>
-                    </a:p>
-                  </a:txBody>
-                  <a:tcPr/>
-                </a:tc>
-                <a:tc>
-                  <a:txBody>
-                    <a:bodyPr/>
-                    <a:lstStyle/>
-                    <a:p>
-                      <a:pPr>
-                        <a:defRPr sz="1100"/>
-                      </a:pPr>
-                      <a:r>
-                        <a:t>0.05</a:t>
+              <a:tr h="256032">
+                <a:tc>
+                  <a:txBody>
+                    <a:bodyPr/>
+                    <a:lstStyle/>
+                    <a:p>
+                      <a:pPr>
+                        <a:defRPr sz="1100"/>
+                      </a:pPr>
+                      <a:r>
+                        <a:t>康龙化成</a:t>
+                      </a:r>
+                    </a:p>
+                  </a:txBody>
+                  <a:tcPr/>
+                </a:tc>
+                <a:tc>
+                  <a:txBody>
+                    <a:bodyPr/>
+                    <a:lstStyle/>
+                    <a:p>
+                      <a:pPr>
+                        <a:defRPr sz="1100"/>
+                      </a:pPr>
+                      <a:r>
+                        <a:t>1000</a:t>
+                      </a:r>
+                    </a:p>
+                  </a:txBody>
+                  <a:tcPr/>
+                </a:tc>
+                <a:tc>
+                  <a:txBody>
+                    <a:bodyPr/>
+                    <a:lstStyle/>
+                    <a:p>
+                      <a:pPr>
+                        <a:defRPr sz="1100"/>
+                      </a:pPr>
+                      <a:r>
+                        <a:t>42.65</a:t>
+                      </a:r>
+                    </a:p>
+                  </a:txBody>
+                  <a:tcPr/>
+                </a:tc>
+                <a:tc>
+                  <a:txBody>
+                    <a:bodyPr/>
+                    <a:lstStyle/>
+                    <a:p>
+                      <a:pPr>
+                        <a:defRPr sz="1100"/>
+                      </a:pPr>
+                      <a:r>
+                        <a:t>43.75</a:t>
+                      </a:r>
+                    </a:p>
+                  </a:txBody>
+                  <a:tcPr/>
+                </a:tc>
+                <a:tc>
+                  <a:txBody>
+                    <a:bodyPr/>
+                    <a:lstStyle/>
+                    <a:p>
+                      <a:pPr>
+                        <a:defRPr sz="1100"/>
+                      </a:pPr>
+                      <a:r>
+                        <a:t>4.38</a:t>
+                      </a:r>
+                    </a:p>
+                  </a:txBody>
+                  <a:tcPr/>
+                </a:tc>
+                <a:tc>
+                  <a:txBody>
+                    <a:bodyPr/>
+                    <a:lstStyle/>
+                    <a:p>
+                      <a:pPr>
+                        <a:defRPr sz="1100"/>
+                      </a:pPr>
+                      <a:r>
+                        <a:t>0.11</a:t>
                       </a:r>
                     </a:p>
                   </a:txBody>
                   <a:tcPr/>
                 </a:tc>
               </a:tr>
-              <a:tr h="240030">
-                <a:tc>
-                  <a:txBody>
-                    <a:bodyPr/>
-                    <a:lstStyle/>
-                    <a:p>
-                      <a:pPr>
-                        <a:defRPr sz="1100"/>
-                      </a:pPr>
-                      <a:r>
-                        <a:t>睿创微纳</a:t>
-                      </a:r>
-                    </a:p>
-                  </a:txBody>
-                  <a:tcPr/>
-                </a:tc>
-                <a:tc>
-                  <a:txBody>
-                    <a:bodyPr/>
-                    <a:lstStyle/>
-                    <a:p>
-                      <a:pPr>
-                        <a:defRPr sz="1100"/>
-                      </a:pPr>
-                      <a:r>
-                        <a:t>1000</a:t>
-                      </a:r>
-                    </a:p>
-                  </a:txBody>
-                  <a:tcPr/>
-                </a:tc>
-                <a:tc>
-                  <a:txBody>
-                    <a:bodyPr/>
-                    <a:lstStyle/>
-                    <a:p>
-                      <a:pPr>
-                        <a:defRPr sz="1100"/>
-                      </a:pPr>
-                      <a:r>
-                        <a:t>177.58</a:t>
-                      </a:r>
-                    </a:p>
-                  </a:txBody>
-                  <a:tcPr/>
-                </a:tc>
-                <a:tc>
-                  <a:txBody>
-                    <a:bodyPr/>
-                    <a:lstStyle/>
-                    <a:p>
-                      <a:pPr>
-                        <a:defRPr sz="1100"/>
-                      </a:pPr>
-                      <a:r>
-                        <a:t>185.0</a:t>
-                      </a:r>
-                    </a:p>
-                  </a:txBody>
-                  <a:tcPr/>
-                </a:tc>
-                <a:tc>
-                  <a:txBody>
-                    <a:bodyPr/>
-                    <a:lstStyle/>
-                    <a:p>
-                      <a:pPr>
-                        <a:defRPr sz="1100"/>
-                      </a:pPr>
-                      <a:r>
-                        <a:t>18.5</a:t>
-                      </a:r>
-                    </a:p>
-                  </a:txBody>
-                  <a:tcPr/>
-                </a:tc>
-                <a:tc>
-                  <a:txBody>
-                    <a:bodyPr/>
-                    <a:lstStyle/>
-                    <a:p>
-                      <a:pPr>
-                        <a:defRPr sz="1100"/>
-                      </a:pPr>
-                      <a:r>
-                        <a:t>0.74</a:t>
-                      </a:r>
-                    </a:p>
-                  </a:txBody>
-                  <a:tcPr/>
-                </a:tc>
-              </a:tr>
-              <a:tr h="240030">
-                <a:tc>
-                  <a:txBody>
-                    <a:bodyPr/>
-                    <a:lstStyle/>
-                    <a:p>
-                      <a:pPr>
-                        <a:defRPr sz="1100"/>
-                      </a:pPr>
-                      <a:r>
-                        <a:t>药明康德</a:t>
-                      </a:r>
-                    </a:p>
-                  </a:txBody>
-                  <a:tcPr/>
-                </a:tc>
-                <a:tc>
-                  <a:txBody>
-                    <a:bodyPr/>
-                    <a:lstStyle/>
-                    <a:p>
-                      <a:pPr>
-                        <a:defRPr sz="1100"/>
-                      </a:pPr>
-                      <a:r>
-                        <a:t>1000</a:t>
-                      </a:r>
-                    </a:p>
-                  </a:txBody>
-                  <a:tcPr/>
-                </a:tc>
-                <a:tc>
-                  <a:txBody>
-                    <a:bodyPr/>
-                    <a:lstStyle/>
-                    <a:p>
-                      <a:pPr>
-                        <a:defRPr sz="1100"/>
-                      </a:pPr>
-                      <a:r>
-                        <a:t>157.7</a:t>
-                      </a:r>
-                    </a:p>
-                  </a:txBody>
-                  <a:tcPr/>
-                </a:tc>
-                <a:tc>
-                  <a:txBody>
-                    <a:bodyPr/>
-                    <a:lstStyle/>
-                    <a:p>
-                      <a:pPr>
-                        <a:defRPr sz="1100"/>
-                      </a:pPr>
-                      <a:r>
-                        <a:t>160.49</a:t>
-                      </a:r>
-                    </a:p>
-                  </a:txBody>
-                  <a:tcPr/>
-                </a:tc>
-                <a:tc>
-                  <a:txBody>
-                    <a:bodyPr/>
-                    <a:lstStyle/>
-                    <a:p>
-                      <a:pPr>
-                        <a:defRPr sz="1100"/>
-                      </a:pPr>
-                      <a:r>
-                        <a:t>16.05</a:t>
-                      </a:r>
-                    </a:p>
-                  </a:txBody>
-                  <a:tcPr/>
-                </a:tc>
-                <a:tc>
-                  <a:txBody>
-                    <a:bodyPr/>
-                    <a:lstStyle/>
-                    <a:p>
-                      <a:pPr>
-                        <a:defRPr sz="1100"/>
-                      </a:pPr>
-                      <a:r>
-                        <a:t>0.28</a:t>
-                      </a:r>
-                    </a:p>
-                  </a:txBody>
-                  <a:tcPr/>
-                </a:tc>
-              </a:tr>
-              <a:tr h="240030">
-                <a:tc>
-                  <a:txBody>
-                    <a:bodyPr/>
-                    <a:lstStyle/>
-                    <a:p>
-                      <a:pPr>
-                        <a:defRPr sz="1100"/>
-                      </a:pPr>
-                      <a:r>
-                        <a:t>康龙化成</a:t>
-                      </a:r>
-                    </a:p>
-                  </a:txBody>
-                  <a:tcPr/>
-                </a:tc>
-                <a:tc>
-                  <a:txBody>
-                    <a:bodyPr/>
-                    <a:lstStyle/>
-                    <a:p>
-                      <a:pPr>
-                        <a:defRPr sz="1100"/>
-                      </a:pPr>
-                      <a:r>
-                        <a:t>1000</a:t>
-                      </a:r>
-                    </a:p>
-                  </a:txBody>
-                  <a:tcPr/>
-                </a:tc>
-                <a:tc>
-                  <a:txBody>
-                    <a:bodyPr/>
-                    <a:lstStyle/>
-                    <a:p>
-                      <a:pPr>
-                        <a:defRPr sz="1100"/>
-                      </a:pPr>
-                      <a:r>
-                        <a:t>42.65</a:t>
-                      </a:r>
-                    </a:p>
-                  </a:txBody>
-                  <a:tcPr/>
-                </a:tc>
-                <a:tc>
-                  <a:txBody>
-                    <a:bodyPr/>
-                    <a:lstStyle/>
-                    <a:p>
-                      <a:pPr>
-                        <a:defRPr sz="1100"/>
-                      </a:pPr>
-                      <a:r>
-                        <a:t>43.75</a:t>
-                      </a:r>
-                    </a:p>
-                  </a:txBody>
-                  <a:tcPr/>
-                </a:tc>
-                <a:tc>
-                  <a:txBody>
-                    <a:bodyPr/>
-                    <a:lstStyle/>
-                    <a:p>
-                      <a:pPr>
-                        <a:defRPr sz="1100"/>
-                      </a:pPr>
-                      <a:r>
-                        <a:t>4.38</a:t>
-                      </a:r>
-                    </a:p>
-                  </a:txBody>
-                  <a:tcPr/>
-                </a:tc>
-                <a:tc>
-                  <a:txBody>
-                    <a:bodyPr/>
-                    <a:lstStyle/>
-                    <a:p>
-                      <a:pPr>
-                        <a:defRPr sz="1100"/>
-                      </a:pPr>
-                      <a:r>
-                        <a:t>0.11</a:t>
-                      </a:r>
-                    </a:p>
-                  </a:txBody>
-                  <a:tcPr/>
-                </a:tc>
-              </a:tr>
-              <a:tr h="240030">
+              <a:tr h="256032">
                 <a:tc>
                   <a:txBody>
                     <a:bodyPr/>
@@ -4987,7 +4895,7 @@
                         <a:defRPr sz="1100"/>
                       </a:pPr>
                       <a:r>
-                        <a:t>9000</a:t>
+                        <a:t>4000</a:t>
                       </a:r>
                     </a:p>
                   </a:txBody>
@@ -5032,22 +4940,22 @@
                         <a:defRPr sz="1100"/>
                       </a:pPr>
                       <a:r>
-                        <a:t>39.1</a:t>
-                      </a:r>
-                    </a:p>
-                  </a:txBody>
-                  <a:tcPr/>
-                </a:tc>
-                <a:tc>
-                  <a:txBody>
-                    <a:bodyPr/>
-                    <a:lstStyle/>
-                    <a:p>
-                      <a:pPr>
-                        <a:defRPr sz="1100"/>
-                      </a:pPr>
-                      <a:r>
-                        <a:t>-0.11</a:t>
+                        <a:t>17.38</a:t>
+                      </a:r>
+                    </a:p>
+                  </a:txBody>
+                  <a:tcPr/>
+                </a:tc>
+                <a:tc>
+                  <a:txBody>
+                    <a:bodyPr/>
+                    <a:lstStyle/>
+                    <a:p>
+                      <a:pPr>
+                        <a:defRPr sz="1100"/>
+                      </a:pPr>
+                      <a:r>
+                        <a:t>-0.05</a:t>
                       </a:r>
                     </a:p>
                   </a:txBody>
@@ -5141,7 +5049,7 @@
               <a:defRPr sz="1500"/>
             </a:pPr>
             <a:r>
-              <a:t>宁德时代（300750，新能源电池）：综合71.0分；基本面优秀，具备中长期配置价值；趋势中性，观望。</a:t>
+              <a:t>长江电力（600900，电力）：综合70.0分；基本面优秀，具备中长期配置价值；中期趋势向上，可关注/持有。</a:t>
             </a:r>
           </a:p>
           <a:p>
@@ -5149,7 +5057,7 @@
               <a:defRPr sz="1500"/>
             </a:pPr>
             <a:r>
-              <a:t>长江电力（600900，电力）：综合70.0分；基本面优秀，具备中长期配置价值；中期趋势向上，可关注/持有。</a:t>
+              <a:t>中国平安（601318，保险）：综合69.0分；基本面优秀，具备中长期配置价值；趋势中性，观望。</a:t>
             </a:r>
           </a:p>
           <a:p>
@@ -5157,7 +5065,7 @@
               <a:defRPr sz="1500"/>
             </a:pPr>
             <a:r>
-              <a:t>中国平安（601318，保险）：综合69.0分；基本面优秀，具备中长期配置价值；趋势中性，观望。</a:t>
+              <a:t>宁德时代（300750，新能源电池）：综合68.5分；基本面优秀，具备中长期配置价值；趋势中性，观望。</a:t>
             </a:r>
           </a:p>
           <a:p>

--- a/outputs/12_中期路演.pptx
+++ b/outputs/12_中期路演.pptx
@@ -5049,7 +5049,7 @@
               <a:defRPr sz="1500"/>
             </a:pPr>
             <a:r>
-              <a:t>长江电力（600900，电力）：综合70.0分；基本面优秀，具备中长期配置价值；中期趋势向上，可关注/持有。</a:t>
+              <a:t>宁德时代（300750，新能源电池）：综合71.0分；基本面优秀，具备中长期配置价值；趋势中性，观望。</a:t>
             </a:r>
           </a:p>
           <a:p>
@@ -5057,7 +5057,7 @@
               <a:defRPr sz="1500"/>
             </a:pPr>
             <a:r>
-              <a:t>中国平安（601318，保险）：综合69.0分；基本面优秀，具备中长期配置价值；趋势中性，观望。</a:t>
+              <a:t>长江电力（600900，电力）：综合70.0分；基本面优秀，具备中长期配置价值；中期趋势向上，可关注/持有。</a:t>
             </a:r>
           </a:p>
           <a:p>
@@ -5065,7 +5065,7 @@
               <a:defRPr sz="1500"/>
             </a:pPr>
             <a:r>
-              <a:t>宁德时代（300750，新能源电池）：综合68.5分；基本面优秀，具备中长期配置价值；趋势中性，观望。</a:t>
+              <a:t>中国平安（601318，保险）：综合69.0分；基本面优秀，具备中长期配置价值；趋势中性，观望。</a:t>
             </a:r>
           </a:p>
           <a:p>

--- a/outputs/12_中期路演.pptx
+++ b/outputs/12_中期路演.pptx
@@ -3167,7 +3167,7 @@
               <a:defRPr sz="1500"/>
             </a:pPr>
             <a:r>
-              <a:t>数据截止：2026-09-17</a:t>
+              <a:t>数据截止：2026-09-18</a:t>
             </a:r>
           </a:p>
         </p:txBody>
@@ -3255,7 +3255,7 @@
               <a:defRPr sz="1500"/>
             </a:pPr>
             <a:r>
-              <a:t>当前总资产：483.95万元</a:t>
+              <a:t>当前总资产：486.41万元</a:t>
             </a:r>
           </a:p>
           <a:p>
@@ -3263,7 +3263,7 @@
               <a:defRPr sz="1500"/>
             </a:pPr>
             <a:r>
-              <a:t>累计收益率：-3.21%</a:t>
+              <a:t>累计收益率：-2.72%</a:t>
             </a:r>
           </a:p>
           <a:p>
@@ -3271,7 +3271,7 @@
               <a:defRPr sz="1500"/>
             </a:pPr>
             <a:r>
-              <a:t>同期沪深300：-1.93%</a:t>
+              <a:t>同期沪深300：-0.89%</a:t>
             </a:r>
           </a:p>
           <a:p>
@@ -3279,7 +3279,7 @@
               <a:defRPr sz="1500"/>
             </a:pPr>
             <a:r>
-              <a:t>现金：133.80万元（27.6%）</a:t>
+              <a:t>现金：96.73万元（19.9%）</a:t>
             </a:r>
           </a:p>
           <a:p>
@@ -3287,7 +3287,7 @@
               <a:defRPr sz="1500"/>
             </a:pPr>
             <a:r>
-              <a:t>持仓：13只，累计交易32笔</a:t>
+              <a:t>持仓：14只，累计交易33笔</a:t>
             </a:r>
           </a:p>
         </p:txBody>
@@ -3582,7 +3582,7 @@
                 <a:gridCol w="1849069"/>
                 <a:gridCol w="1849070"/>
               </a:tblGrid>
-              <a:tr h="256032">
+              <a:tr h="240030">
                 <a:tc>
                   <a:txBody>
                     <a:bodyPr/>
@@ -3674,7 +3674,7 @@
                   <a:tcPr/>
                 </a:tc>
               </a:tr>
-              <a:tr h="256032">
+              <a:tr h="240030">
                 <a:tc>
                   <a:txBody>
                     <a:bodyPr/>
@@ -3766,7 +3766,7 @@
                   <a:tcPr/>
                 </a:tc>
               </a:tr>
-              <a:tr h="256032">
+              <a:tr h="240030">
                 <a:tc>
                   <a:txBody>
                     <a:bodyPr/>
@@ -3821,44 +3821,44 @@
                         <a:defRPr sz="1100"/>
                       </a:pPr>
                       <a:r>
-                        <a:t>4.532</a:t>
-                      </a:r>
-                    </a:p>
-                  </a:txBody>
-                  <a:tcPr/>
-                </a:tc>
-                <a:tc>
-                  <a:txBody>
-                    <a:bodyPr/>
-                    <a:lstStyle/>
-                    <a:p>
-                      <a:pPr>
-                        <a:defRPr sz="1100"/>
-                      </a:pPr>
-                      <a:r>
-                        <a:t>117.33</a:t>
-                      </a:r>
-                    </a:p>
-                  </a:txBody>
-                  <a:tcPr/>
-                </a:tc>
-                <a:tc>
-                  <a:txBody>
-                    <a:bodyPr/>
-                    <a:lstStyle/>
-                    <a:p>
-                      <a:pPr>
-                        <a:defRPr sz="1100"/>
-                      </a:pPr>
-                      <a:r>
-                        <a:t>-2.82</a:t>
+                        <a:t>4.582</a:t>
+                      </a:r>
+                    </a:p>
+                  </a:txBody>
+                  <a:tcPr/>
+                </a:tc>
+                <a:tc>
+                  <a:txBody>
+                    <a:bodyPr/>
+                    <a:lstStyle/>
+                    <a:p>
+                      <a:pPr>
+                        <a:defRPr sz="1100"/>
+                      </a:pPr>
+                      <a:r>
+                        <a:t>118.63</a:t>
+                      </a:r>
+                    </a:p>
+                  </a:txBody>
+                  <a:tcPr/>
+                </a:tc>
+                <a:tc>
+                  <a:txBody>
+                    <a:bodyPr/>
+                    <a:lstStyle/>
+                    <a:p>
+                      <a:pPr>
+                        <a:defRPr sz="1100"/>
+                      </a:pPr>
+                      <a:r>
+                        <a:t>-1.53</a:t>
                       </a:r>
                     </a:p>
                   </a:txBody>
                   <a:tcPr/>
                 </a:tc>
               </a:tr>
-              <a:tr h="256032">
+              <a:tr h="240030">
                 <a:tc>
                   <a:txBody>
                     <a:bodyPr/>
@@ -3913,44 +3913,136 @@
                         <a:defRPr sz="1100"/>
                       </a:pPr>
                       <a:r>
-                        <a:t>53.35</a:t>
-                      </a:r>
-                    </a:p>
-                  </a:txBody>
-                  <a:tcPr/>
-                </a:tc>
-                <a:tc>
-                  <a:txBody>
-                    <a:bodyPr/>
-                    <a:lstStyle/>
-                    <a:p>
-                      <a:pPr>
-                        <a:defRPr sz="1100"/>
-                      </a:pPr>
-                      <a:r>
-                        <a:t>97.1</a:t>
-                      </a:r>
-                    </a:p>
-                  </a:txBody>
-                  <a:tcPr/>
-                </a:tc>
-                <a:tc>
-                  <a:txBody>
-                    <a:bodyPr/>
-                    <a:lstStyle/>
-                    <a:p>
-                      <a:pPr>
-                        <a:defRPr sz="1100"/>
-                      </a:pPr>
-                      <a:r>
-                        <a:t>-5.04</a:t>
+                        <a:t>53.37</a:t>
+                      </a:r>
+                    </a:p>
+                  </a:txBody>
+                  <a:tcPr/>
+                </a:tc>
+                <a:tc>
+                  <a:txBody>
+                    <a:bodyPr/>
+                    <a:lstStyle/>
+                    <a:p>
+                      <a:pPr>
+                        <a:defRPr sz="1100"/>
+                      </a:pPr>
+                      <a:r>
+                        <a:t>97.13</a:t>
+                      </a:r>
+                    </a:p>
+                  </a:txBody>
+                  <a:tcPr/>
+                </a:tc>
+                <a:tc>
+                  <a:txBody>
+                    <a:bodyPr/>
+                    <a:lstStyle/>
+                    <a:p>
+                      <a:pPr>
+                        <a:defRPr sz="1100"/>
+                      </a:pPr>
+                      <a:r>
+                        <a:t>-5.0</a:t>
                       </a:r>
                     </a:p>
                   </a:txBody>
                   <a:tcPr/>
                 </a:tc>
               </a:tr>
-              <a:tr h="256032">
+              <a:tr h="240030">
+                <a:tc>
+                  <a:txBody>
+                    <a:bodyPr/>
+                    <a:lstStyle/>
+                    <a:p>
+                      <a:pPr>
+                        <a:defRPr sz="1100"/>
+                      </a:pPr>
+                      <a:r>
+                        <a:t>紫金矿业</a:t>
+                      </a:r>
+                    </a:p>
+                  </a:txBody>
+                  <a:tcPr/>
+                </a:tc>
+                <a:tc>
+                  <a:txBody>
+                    <a:bodyPr/>
+                    <a:lstStyle/>
+                    <a:p>
+                      <a:pPr>
+                        <a:defRPr sz="1100"/>
+                      </a:pPr>
+                      <a:r>
+                        <a:t>11800</a:t>
+                      </a:r>
+                    </a:p>
+                  </a:txBody>
+                  <a:tcPr/>
+                </a:tc>
+                <a:tc>
+                  <a:txBody>
+                    <a:bodyPr/>
+                    <a:lstStyle/>
+                    <a:p>
+                      <a:pPr>
+                        <a:defRPr sz="1100"/>
+                      </a:pPr>
+                      <a:r>
+                        <a:t>31.41</a:t>
+                      </a:r>
+                    </a:p>
+                  </a:txBody>
+                  <a:tcPr/>
+                </a:tc>
+                <a:tc>
+                  <a:txBody>
+                    <a:bodyPr/>
+                    <a:lstStyle/>
+                    <a:p>
+                      <a:pPr>
+                        <a:defRPr sz="1100"/>
+                      </a:pPr>
+                      <a:r>
+                        <a:t>31.41</a:t>
+                      </a:r>
+                    </a:p>
+                  </a:txBody>
+                  <a:tcPr/>
+                </a:tc>
+                <a:tc>
+                  <a:txBody>
+                    <a:bodyPr/>
+                    <a:lstStyle/>
+                    <a:p>
+                      <a:pPr>
+                        <a:defRPr sz="1100"/>
+                      </a:pPr>
+                      <a:r>
+                        <a:t>37.06</a:t>
+                      </a:r>
+                    </a:p>
+                  </a:txBody>
+                  <a:tcPr/>
+                </a:tc>
+                <a:tc>
+                  <a:txBody>
+                    <a:bodyPr/>
+                    <a:lstStyle/>
+                    <a:p>
+                      <a:pPr>
+                        <a:defRPr sz="1100"/>
+                      </a:pPr>
+                      <a:r>
+                        <a:t>0.0</a:t>
+                      </a:r>
+                    </a:p>
+                  </a:txBody>
+                  <a:tcPr/>
+                </a:tc>
+              </a:tr>
+              <a:tr h="240030">
                 <a:tc>
                   <a:txBody>
                     <a:bodyPr/>
@@ -4005,44 +4097,44 @@
                         <a:defRPr sz="1100"/>
                       </a:pPr>
                       <a:r>
-                        <a:t>28.46</a:t>
-                      </a:r>
-                    </a:p>
-                  </a:txBody>
-                  <a:tcPr/>
-                </a:tc>
-                <a:tc>
-                  <a:txBody>
-                    <a:bodyPr/>
-                    <a:lstStyle/>
-                    <a:p>
-                      <a:pPr>
-                        <a:defRPr sz="1100"/>
-                      </a:pPr>
-                      <a:r>
-                        <a:t>26.47</a:t>
-                      </a:r>
-                    </a:p>
-                  </a:txBody>
-                  <a:tcPr/>
-                </a:tc>
-                <a:tc>
-                  <a:txBody>
-                    <a:bodyPr/>
-                    <a:lstStyle/>
-                    <a:p>
-                      <a:pPr>
-                        <a:defRPr sz="1100"/>
-                      </a:pPr>
-                      <a:r>
-                        <a:t>0.53</a:t>
+                        <a:t>28.27</a:t>
+                      </a:r>
+                    </a:p>
+                  </a:txBody>
+                  <a:tcPr/>
+                </a:tc>
+                <a:tc>
+                  <a:txBody>
+                    <a:bodyPr/>
+                    <a:lstStyle/>
+                    <a:p>
+                      <a:pPr>
+                        <a:defRPr sz="1100"/>
+                      </a:pPr>
+                      <a:r>
+                        <a:t>26.29</a:t>
+                      </a:r>
+                    </a:p>
+                  </a:txBody>
+                  <a:tcPr/>
+                </a:tc>
+                <a:tc>
+                  <a:txBody>
+                    <a:bodyPr/>
+                    <a:lstStyle/>
+                    <a:p>
+                      <a:pPr>
+                        <a:defRPr sz="1100"/>
+                      </a:pPr>
+                      <a:r>
+                        <a:t>0.36</a:t>
                       </a:r>
                     </a:p>
                   </a:txBody>
                   <a:tcPr/>
                 </a:tc>
               </a:tr>
-              <a:tr h="256032">
+              <a:tr h="240030">
                 <a:tc>
                   <a:txBody>
                     <a:bodyPr/>
@@ -4097,44 +4189,44 @@
                         <a:defRPr sz="1100"/>
                       </a:pPr>
                       <a:r>
-                        <a:t>10.22</a:t>
-                      </a:r>
-                    </a:p>
-                  </a:txBody>
-                  <a:tcPr/>
-                </a:tc>
-                <a:tc>
-                  <a:txBody>
-                    <a:bodyPr/>
-                    <a:lstStyle/>
-                    <a:p>
-                      <a:pPr>
-                        <a:defRPr sz="1100"/>
-                      </a:pPr>
-                      <a:r>
-                        <a:t>9.71</a:t>
-                      </a:r>
-                    </a:p>
-                  </a:txBody>
-                  <a:tcPr/>
-                </a:tc>
-                <a:tc>
-                  <a:txBody>
-                    <a:bodyPr/>
-                    <a:lstStyle/>
-                    <a:p>
-                      <a:pPr>
-                        <a:defRPr sz="1100"/>
-                      </a:pPr>
-                      <a:r>
-                        <a:t>-0.24</a:t>
+                        <a:t>10.31</a:t>
+                      </a:r>
+                    </a:p>
+                  </a:txBody>
+                  <a:tcPr/>
+                </a:tc>
+                <a:tc>
+                  <a:txBody>
+                    <a:bodyPr/>
+                    <a:lstStyle/>
+                    <a:p>
+                      <a:pPr>
+                        <a:defRPr sz="1100"/>
+                      </a:pPr>
+                      <a:r>
+                        <a:t>9.79</a:t>
+                      </a:r>
+                    </a:p>
+                  </a:txBody>
+                  <a:tcPr/>
+                </a:tc>
+                <a:tc>
+                  <a:txBody>
+                    <a:bodyPr/>
+                    <a:lstStyle/>
+                    <a:p>
+                      <a:pPr>
+                        <a:defRPr sz="1100"/>
+                      </a:pPr>
+                      <a:r>
+                        <a:t>-0.15</a:t>
                       </a:r>
                     </a:p>
                   </a:txBody>
                   <a:tcPr/>
                 </a:tc>
               </a:tr>
-              <a:tr h="256032">
+              <a:tr h="240030">
                 <a:tc>
                   <a:txBody>
                     <a:bodyPr/>
@@ -4189,44 +4281,44 @@
                         <a:defRPr sz="1100"/>
                       </a:pPr>
                       <a:r>
-                        <a:t>16.54</a:t>
-                      </a:r>
-                    </a:p>
-                  </a:txBody>
-                  <a:tcPr/>
-                </a:tc>
-                <a:tc>
-                  <a:txBody>
-                    <a:bodyPr/>
-                    <a:lstStyle/>
-                    <a:p>
-                      <a:pPr>
-                        <a:defRPr sz="1100"/>
-                      </a:pPr>
-                      <a:r>
-                        <a:t>8.27</a:t>
-                      </a:r>
-                    </a:p>
-                  </a:txBody>
-                  <a:tcPr/>
-                </a:tc>
-                <a:tc>
-                  <a:txBody>
-                    <a:bodyPr/>
-                    <a:lstStyle/>
-                    <a:p>
-                      <a:pPr>
-                        <a:defRPr sz="1100"/>
-                      </a:pPr>
-                      <a:r>
-                        <a:t>-0.49</a:t>
+                        <a:t>16.61</a:t>
+                      </a:r>
+                    </a:p>
+                  </a:txBody>
+                  <a:tcPr/>
+                </a:tc>
+                <a:tc>
+                  <a:txBody>
+                    <a:bodyPr/>
+                    <a:lstStyle/>
+                    <a:p>
+                      <a:pPr>
+                        <a:defRPr sz="1100"/>
+                      </a:pPr>
+                      <a:r>
+                        <a:t>8.3</a:t>
+                      </a:r>
+                    </a:p>
+                  </a:txBody>
+                  <a:tcPr/>
+                </a:tc>
+                <a:tc>
+                  <a:txBody>
+                    <a:bodyPr/>
+                    <a:lstStyle/>
+                    <a:p>
+                      <a:pPr>
+                        <a:defRPr sz="1100"/>
+                      </a:pPr>
+                      <a:r>
+                        <a:t>-0.46</a:t>
                       </a:r>
                     </a:p>
                   </a:txBody>
                   <a:tcPr/>
                 </a:tc>
               </a:tr>
-              <a:tr h="256032">
+              <a:tr h="240030">
                 <a:tc>
                   <a:txBody>
                     <a:bodyPr/>
@@ -4281,44 +4373,44 @@
                         <a:defRPr sz="1100"/>
                       </a:pPr>
                       <a:r>
-                        <a:t>38.2</a:t>
-                      </a:r>
-                    </a:p>
-                  </a:txBody>
-                  <a:tcPr/>
-                </a:tc>
-                <a:tc>
-                  <a:txBody>
-                    <a:bodyPr/>
-                    <a:lstStyle/>
-                    <a:p>
-                      <a:pPr>
-                        <a:defRPr sz="1100"/>
-                      </a:pPr>
-                      <a:r>
-                        <a:t>23.3</a:t>
-                      </a:r>
-                    </a:p>
-                  </a:txBody>
-                  <a:tcPr/>
-                </a:tc>
-                <a:tc>
-                  <a:txBody>
-                    <a:bodyPr/>
-                    <a:lstStyle/>
-                    <a:p>
-                      <a:pPr>
-                        <a:defRPr sz="1100"/>
-                      </a:pPr>
-                      <a:r>
-                        <a:t>1.42</a:t>
+                        <a:t>38.9</a:t>
+                      </a:r>
+                    </a:p>
+                  </a:txBody>
+                  <a:tcPr/>
+                </a:tc>
+                <a:tc>
+                  <a:txBody>
+                    <a:bodyPr/>
+                    <a:lstStyle/>
+                    <a:p>
+                      <a:pPr>
+                        <a:defRPr sz="1100"/>
+                      </a:pPr>
+                      <a:r>
+                        <a:t>23.73</a:t>
+                      </a:r>
+                    </a:p>
+                  </a:txBody>
+                  <a:tcPr/>
+                </a:tc>
+                <a:tc>
+                  <a:txBody>
+                    <a:bodyPr/>
+                    <a:lstStyle/>
+                    <a:p>
+                      <a:pPr>
+                        <a:defRPr sz="1100"/>
+                      </a:pPr>
+                      <a:r>
+                        <a:t>1.85</a:t>
                       </a:r>
                     </a:p>
                   </a:txBody>
                   <a:tcPr/>
                 </a:tc>
               </a:tr>
-              <a:tr h="256032">
+              <a:tr h="240030">
                 <a:tc>
                   <a:txBody>
                     <a:bodyPr/>
@@ -4373,44 +4465,44 @@
                         <a:defRPr sz="1100"/>
                       </a:pPr>
                       <a:r>
-                        <a:t>137.47</a:t>
-                      </a:r>
-                    </a:p>
-                  </a:txBody>
-                  <a:tcPr/>
-                </a:tc>
-                <a:tc>
-                  <a:txBody>
-                    <a:bodyPr/>
-                    <a:lstStyle/>
-                    <a:p>
-                      <a:pPr>
-                        <a:defRPr sz="1100"/>
-                      </a:pPr>
-                      <a:r>
-                        <a:t>6.87</a:t>
-                      </a:r>
-                    </a:p>
-                  </a:txBody>
-                  <a:tcPr/>
-                </a:tc>
-                <a:tc>
-                  <a:txBody>
-                    <a:bodyPr/>
-                    <a:lstStyle/>
-                    <a:p>
-                      <a:pPr>
-                        <a:defRPr sz="1100"/>
-                      </a:pPr>
-                      <a:r>
-                        <a:t>0.04</a:t>
+                        <a:t>143.06</a:t>
+                      </a:r>
+                    </a:p>
+                  </a:txBody>
+                  <a:tcPr/>
+                </a:tc>
+                <a:tc>
+                  <a:txBody>
+                    <a:bodyPr/>
+                    <a:lstStyle/>
+                    <a:p>
+                      <a:pPr>
+                        <a:defRPr sz="1100"/>
+                      </a:pPr>
+                      <a:r>
+                        <a:t>7.15</a:t>
+                      </a:r>
+                    </a:p>
+                  </a:txBody>
+                  <a:tcPr/>
+                </a:tc>
+                <a:tc>
+                  <a:txBody>
+                    <a:bodyPr/>
+                    <a:lstStyle/>
+                    <a:p>
+                      <a:pPr>
+                        <a:defRPr sz="1100"/>
+                      </a:pPr>
+                      <a:r>
+                        <a:t>0.32</a:t>
                       </a:r>
                     </a:p>
                   </a:txBody>
                   <a:tcPr/>
                 </a:tc>
               </a:tr>
-              <a:tr h="256032">
+              <a:tr h="240030">
                 <a:tc>
                   <a:txBody>
                     <a:bodyPr/>
@@ -4465,44 +4557,44 @@
                         <a:defRPr sz="1100"/>
                       </a:pPr>
                       <a:r>
-                        <a:t>7.42</a:t>
-                      </a:r>
-                    </a:p>
-                  </a:txBody>
-                  <a:tcPr/>
-                </a:tc>
-                <a:tc>
-                  <a:txBody>
-                    <a:bodyPr/>
-                    <a:lstStyle/>
-                    <a:p>
-                      <a:pPr>
-                        <a:defRPr sz="1100"/>
-                      </a:pPr>
-                      <a:r>
-                        <a:t>3.71</a:t>
-                      </a:r>
-                    </a:p>
-                  </a:txBody>
-                  <a:tcPr/>
-                </a:tc>
-                <a:tc>
-                  <a:txBody>
-                    <a:bodyPr/>
-                    <a:lstStyle/>
-                    <a:p>
-                      <a:pPr>
-                        <a:defRPr sz="1100"/>
-                      </a:pPr>
-                      <a:r>
-                        <a:t>0.04</a:t>
+                        <a:t>7.5</a:t>
+                      </a:r>
+                    </a:p>
+                  </a:txBody>
+                  <a:tcPr/>
+                </a:tc>
+                <a:tc>
+                  <a:txBody>
+                    <a:bodyPr/>
+                    <a:lstStyle/>
+                    <a:p>
+                      <a:pPr>
+                        <a:defRPr sz="1100"/>
+                      </a:pPr>
+                      <a:r>
+                        <a:t>3.75</a:t>
+                      </a:r>
+                    </a:p>
+                  </a:txBody>
+                  <a:tcPr/>
+                </a:tc>
+                <a:tc>
+                  <a:txBody>
+                    <a:bodyPr/>
+                    <a:lstStyle/>
+                    <a:p>
+                      <a:pPr>
+                        <a:defRPr sz="1100"/>
+                      </a:pPr>
+                      <a:r>
+                        <a:t>0.08</a:t>
                       </a:r>
                     </a:p>
                   </a:txBody>
                   <a:tcPr/>
                 </a:tc>
               </a:tr>
-              <a:tr h="256032">
+              <a:tr h="240030">
                 <a:tc>
                   <a:txBody>
                     <a:bodyPr/>
@@ -4557,44 +4649,44 @@
                         <a:defRPr sz="1100"/>
                       </a:pPr>
                       <a:r>
-                        <a:t>21.85</a:t>
-                      </a:r>
-                    </a:p>
-                  </a:txBody>
-                  <a:tcPr/>
-                </a:tc>
-                <a:tc>
-                  <a:txBody>
-                    <a:bodyPr/>
-                    <a:lstStyle/>
-                    <a:p>
-                      <a:pPr>
-                        <a:defRPr sz="1100"/>
-                      </a:pPr>
-                      <a:r>
-                        <a:t>1.09</a:t>
-                      </a:r>
-                    </a:p>
-                  </a:txBody>
-                  <a:tcPr/>
-                </a:tc>
-                <a:tc>
-                  <a:txBody>
-                    <a:bodyPr/>
-                    <a:lstStyle/>
-                    <a:p>
-                      <a:pPr>
-                        <a:defRPr sz="1100"/>
-                      </a:pPr>
-                      <a:r>
-                        <a:t>0.05</a:t>
+                        <a:t>22.36</a:t>
+                      </a:r>
+                    </a:p>
+                  </a:txBody>
+                  <a:tcPr/>
+                </a:tc>
+                <a:tc>
+                  <a:txBody>
+                    <a:bodyPr/>
+                    <a:lstStyle/>
+                    <a:p>
+                      <a:pPr>
+                        <a:defRPr sz="1100"/>
+                      </a:pPr>
+                      <a:r>
+                        <a:t>1.12</a:t>
+                      </a:r>
+                    </a:p>
+                  </a:txBody>
+                  <a:tcPr/>
+                </a:tc>
+                <a:tc>
+                  <a:txBody>
+                    <a:bodyPr/>
+                    <a:lstStyle/>
+                    <a:p>
+                      <a:pPr>
+                        <a:defRPr sz="1100"/>
+                      </a:pPr>
+                      <a:r>
+                        <a:t>0.08</a:t>
                       </a:r>
                     </a:p>
                   </a:txBody>
                   <a:tcPr/>
                 </a:tc>
               </a:tr>
-              <a:tr h="256032">
+              <a:tr h="240030">
                 <a:tc>
                   <a:txBody>
                     <a:bodyPr/>
@@ -4649,44 +4741,44 @@
                         <a:defRPr sz="1100"/>
                       </a:pPr>
                       <a:r>
-                        <a:t>185.0</a:t>
-                      </a:r>
-                    </a:p>
-                  </a:txBody>
-                  <a:tcPr/>
-                </a:tc>
-                <a:tc>
-                  <a:txBody>
-                    <a:bodyPr/>
-                    <a:lstStyle/>
-                    <a:p>
-                      <a:pPr>
-                        <a:defRPr sz="1100"/>
-                      </a:pPr>
-                      <a:r>
-                        <a:t>18.5</a:t>
-                      </a:r>
-                    </a:p>
-                  </a:txBody>
-                  <a:tcPr/>
-                </a:tc>
-                <a:tc>
-                  <a:txBody>
-                    <a:bodyPr/>
-                    <a:lstStyle/>
-                    <a:p>
-                      <a:pPr>
-                        <a:defRPr sz="1100"/>
-                      </a:pPr>
-                      <a:r>
-                        <a:t>0.74</a:t>
+                        <a:t>186.8</a:t>
+                      </a:r>
+                    </a:p>
+                  </a:txBody>
+                  <a:tcPr/>
+                </a:tc>
+                <a:tc>
+                  <a:txBody>
+                    <a:bodyPr/>
+                    <a:lstStyle/>
+                    <a:p>
+                      <a:pPr>
+                        <a:defRPr sz="1100"/>
+                      </a:pPr>
+                      <a:r>
+                        <a:t>18.68</a:t>
+                      </a:r>
+                    </a:p>
+                  </a:txBody>
+                  <a:tcPr/>
+                </a:tc>
+                <a:tc>
+                  <a:txBody>
+                    <a:bodyPr/>
+                    <a:lstStyle/>
+                    <a:p>
+                      <a:pPr>
+                        <a:defRPr sz="1100"/>
+                      </a:pPr>
+                      <a:r>
+                        <a:t>0.92</a:t>
                       </a:r>
                     </a:p>
                   </a:txBody>
                   <a:tcPr/>
                 </a:tc>
               </a:tr>
-              <a:tr h="256032">
+              <a:tr h="240030">
                 <a:tc>
                   <a:txBody>
                     <a:bodyPr/>
@@ -4741,22 +4833,206 @@
                         <a:defRPr sz="1100"/>
                       </a:pPr>
                       <a:r>
-                        <a:t>160.49</a:t>
-                      </a:r>
-                    </a:p>
-                  </a:txBody>
-                  <a:tcPr/>
-                </a:tc>
-                <a:tc>
-                  <a:txBody>
-                    <a:bodyPr/>
-                    <a:lstStyle/>
-                    <a:p>
-                      <a:pPr>
-                        <a:defRPr sz="1100"/>
-                      </a:pPr>
-                      <a:r>
-                        <a:t>16.05</a:t>
+                        <a:t>160.0</a:t>
+                      </a:r>
+                    </a:p>
+                  </a:txBody>
+                  <a:tcPr/>
+                </a:tc>
+                <a:tc>
+                  <a:txBody>
+                    <a:bodyPr/>
+                    <a:lstStyle/>
+                    <a:p>
+                      <a:pPr>
+                        <a:defRPr sz="1100"/>
+                      </a:pPr>
+                      <a:r>
+                        <a:t>16.0</a:t>
+                      </a:r>
+                    </a:p>
+                  </a:txBody>
+                  <a:tcPr/>
+                </a:tc>
+                <a:tc>
+                  <a:txBody>
+                    <a:bodyPr/>
+                    <a:lstStyle/>
+                    <a:p>
+                      <a:pPr>
+                        <a:defRPr sz="1100"/>
+                      </a:pPr>
+                      <a:r>
+                        <a:t>0.23</a:t>
+                      </a:r>
+                    </a:p>
+                  </a:txBody>
+                  <a:tcPr/>
+                </a:tc>
+              </a:tr>
+              <a:tr h="240030">
+                <a:tc>
+                  <a:txBody>
+                    <a:bodyPr/>
+                    <a:lstStyle/>
+                    <a:p>
+                      <a:pPr>
+                        <a:defRPr sz="1100"/>
+                      </a:pPr>
+                      <a:r>
+                        <a:t>康龙化成</a:t>
+                      </a:r>
+                    </a:p>
+                  </a:txBody>
+                  <a:tcPr/>
+                </a:tc>
+                <a:tc>
+                  <a:txBody>
+                    <a:bodyPr/>
+                    <a:lstStyle/>
+                    <a:p>
+                      <a:pPr>
+                        <a:defRPr sz="1100"/>
+                      </a:pPr>
+                      <a:r>
+                        <a:t>1000</a:t>
+                      </a:r>
+                    </a:p>
+                  </a:txBody>
+                  <a:tcPr/>
+                </a:tc>
+                <a:tc>
+                  <a:txBody>
+                    <a:bodyPr/>
+                    <a:lstStyle/>
+                    <a:p>
+                      <a:pPr>
+                        <a:defRPr sz="1100"/>
+                      </a:pPr>
+                      <a:r>
+                        <a:t>42.65</a:t>
+                      </a:r>
+                    </a:p>
+                  </a:txBody>
+                  <a:tcPr/>
+                </a:tc>
+                <a:tc>
+                  <a:txBody>
+                    <a:bodyPr/>
+                    <a:lstStyle/>
+                    <a:p>
+                      <a:pPr>
+                        <a:defRPr sz="1100"/>
+                      </a:pPr>
+                      <a:r>
+                        <a:t>43.3</a:t>
+                      </a:r>
+                    </a:p>
+                  </a:txBody>
+                  <a:tcPr/>
+                </a:tc>
+                <a:tc>
+                  <a:txBody>
+                    <a:bodyPr/>
+                    <a:lstStyle/>
+                    <a:p>
+                      <a:pPr>
+                        <a:defRPr sz="1100"/>
+                      </a:pPr>
+                      <a:r>
+                        <a:t>4.33</a:t>
+                      </a:r>
+                    </a:p>
+                  </a:txBody>
+                  <a:tcPr/>
+                </a:tc>
+                <a:tc>
+                  <a:txBody>
+                    <a:bodyPr/>
+                    <a:lstStyle/>
+                    <a:p>
+                      <a:pPr>
+                        <a:defRPr sz="1100"/>
+                      </a:pPr>
+                      <a:r>
+                        <a:t>0.06</a:t>
+                      </a:r>
+                    </a:p>
+                  </a:txBody>
+                  <a:tcPr/>
+                </a:tc>
+              </a:tr>
+              <a:tr h="240030">
+                <a:tc>
+                  <a:txBody>
+                    <a:bodyPr/>
+                    <a:lstStyle/>
+                    <a:p>
+                      <a:pPr>
+                        <a:defRPr sz="1100"/>
+                      </a:pPr>
+                      <a:r>
+                        <a:t>赤峰黄金</a:t>
+                      </a:r>
+                    </a:p>
+                  </a:txBody>
+                  <a:tcPr/>
+                </a:tc>
+                <a:tc>
+                  <a:txBody>
+                    <a:bodyPr/>
+                    <a:lstStyle/>
+                    <a:p>
+                      <a:pPr>
+                        <a:defRPr sz="1100"/>
+                      </a:pPr>
+                      <a:r>
+                        <a:t>4000</a:t>
+                      </a:r>
+                    </a:p>
+                  </a:txBody>
+                  <a:tcPr/>
+                </a:tc>
+                <a:tc>
+                  <a:txBody>
+                    <a:bodyPr/>
+                    <a:lstStyle/>
+                    <a:p>
+                      <a:pPr>
+                        <a:defRPr sz="1100"/>
+                      </a:pPr>
+                      <a:r>
+                        <a:t>43.56</a:t>
+                      </a:r>
+                    </a:p>
+                  </a:txBody>
+                  <a:tcPr/>
+                </a:tc>
+                <a:tc>
+                  <a:txBody>
+                    <a:bodyPr/>
+                    <a:lstStyle/>
+                    <a:p>
+                      <a:pPr>
+                        <a:defRPr sz="1100"/>
+                      </a:pPr>
+                      <a:r>
+                        <a:t>44.26</a:t>
+                      </a:r>
+                    </a:p>
+                  </a:txBody>
+                  <a:tcPr/>
+                </a:tc>
+                <a:tc>
+                  <a:txBody>
+                    <a:bodyPr/>
+                    <a:lstStyle/>
+                    <a:p>
+                      <a:pPr>
+                        <a:defRPr sz="1100"/>
+                      </a:pPr>
+                      <a:r>
+                        <a:t>17.7</a:t>
                       </a:r>
                     </a:p>
                   </a:txBody>
@@ -4772,190 +5048,6 @@
                       </a:pPr>
                       <a:r>
                         <a:t>0.28</a:t>
-                      </a:r>
-                    </a:p>
-                  </a:txBody>
-                  <a:tcPr/>
-                </a:tc>
-              </a:tr>
-              <a:tr h="256032">
-                <a:tc>
-                  <a:txBody>
-                    <a:bodyPr/>
-                    <a:lstStyle/>
-                    <a:p>
-                      <a:pPr>
-                        <a:defRPr sz="1100"/>
-                      </a:pPr>
-                      <a:r>
-                        <a:t>康龙化成</a:t>
-                      </a:r>
-                    </a:p>
-                  </a:txBody>
-                  <a:tcPr/>
-                </a:tc>
-                <a:tc>
-                  <a:txBody>
-                    <a:bodyPr/>
-                    <a:lstStyle/>
-                    <a:p>
-                      <a:pPr>
-                        <a:defRPr sz="1100"/>
-                      </a:pPr>
-                      <a:r>
-                        <a:t>1000</a:t>
-                      </a:r>
-                    </a:p>
-                  </a:txBody>
-                  <a:tcPr/>
-                </a:tc>
-                <a:tc>
-                  <a:txBody>
-                    <a:bodyPr/>
-                    <a:lstStyle/>
-                    <a:p>
-                      <a:pPr>
-                        <a:defRPr sz="1100"/>
-                      </a:pPr>
-                      <a:r>
-                        <a:t>42.65</a:t>
-                      </a:r>
-                    </a:p>
-                  </a:txBody>
-                  <a:tcPr/>
-                </a:tc>
-                <a:tc>
-                  <a:txBody>
-                    <a:bodyPr/>
-                    <a:lstStyle/>
-                    <a:p>
-                      <a:pPr>
-                        <a:defRPr sz="1100"/>
-                      </a:pPr>
-                      <a:r>
-                        <a:t>43.75</a:t>
-                      </a:r>
-                    </a:p>
-                  </a:txBody>
-                  <a:tcPr/>
-                </a:tc>
-                <a:tc>
-                  <a:txBody>
-                    <a:bodyPr/>
-                    <a:lstStyle/>
-                    <a:p>
-                      <a:pPr>
-                        <a:defRPr sz="1100"/>
-                      </a:pPr>
-                      <a:r>
-                        <a:t>4.38</a:t>
-                      </a:r>
-                    </a:p>
-                  </a:txBody>
-                  <a:tcPr/>
-                </a:tc>
-                <a:tc>
-                  <a:txBody>
-                    <a:bodyPr/>
-                    <a:lstStyle/>
-                    <a:p>
-                      <a:pPr>
-                        <a:defRPr sz="1100"/>
-                      </a:pPr>
-                      <a:r>
-                        <a:t>0.11</a:t>
-                      </a:r>
-                    </a:p>
-                  </a:txBody>
-                  <a:tcPr/>
-                </a:tc>
-              </a:tr>
-              <a:tr h="256032">
-                <a:tc>
-                  <a:txBody>
-                    <a:bodyPr/>
-                    <a:lstStyle/>
-                    <a:p>
-                      <a:pPr>
-                        <a:defRPr sz="1100"/>
-                      </a:pPr>
-                      <a:r>
-                        <a:t>赤峰黄金</a:t>
-                      </a:r>
-                    </a:p>
-                  </a:txBody>
-                  <a:tcPr/>
-                </a:tc>
-                <a:tc>
-                  <a:txBody>
-                    <a:bodyPr/>
-                    <a:lstStyle/>
-                    <a:p>
-                      <a:pPr>
-                        <a:defRPr sz="1100"/>
-                      </a:pPr>
-                      <a:r>
-                        <a:t>4000</a:t>
-                      </a:r>
-                    </a:p>
-                  </a:txBody>
-                  <a:tcPr/>
-                </a:tc>
-                <a:tc>
-                  <a:txBody>
-                    <a:bodyPr/>
-                    <a:lstStyle/>
-                    <a:p>
-                      <a:pPr>
-                        <a:defRPr sz="1100"/>
-                      </a:pPr>
-                      <a:r>
-                        <a:t>43.56</a:t>
-                      </a:r>
-                    </a:p>
-                  </a:txBody>
-                  <a:tcPr/>
-                </a:tc>
-                <a:tc>
-                  <a:txBody>
-                    <a:bodyPr/>
-                    <a:lstStyle/>
-                    <a:p>
-                      <a:pPr>
-                        <a:defRPr sz="1100"/>
-                      </a:pPr>
-                      <a:r>
-                        <a:t>43.44</a:t>
-                      </a:r>
-                    </a:p>
-                  </a:txBody>
-                  <a:tcPr/>
-                </a:tc>
-                <a:tc>
-                  <a:txBody>
-                    <a:bodyPr/>
-                    <a:lstStyle/>
-                    <a:p>
-                      <a:pPr>
-                        <a:defRPr sz="1100"/>
-                      </a:pPr>
-                      <a:r>
-                        <a:t>17.38</a:t>
-                      </a:r>
-                    </a:p>
-                  </a:txBody>
-                  <a:tcPr/>
-                </a:tc>
-                <a:tc>
-                  <a:txBody>
-                    <a:bodyPr/>
-                    <a:lstStyle/>
-                    <a:p>
-                      <a:pPr>
-                        <a:defRPr sz="1100"/>
-                      </a:pPr>
-                      <a:r>
-                        <a:t>-0.05</a:t>
                       </a:r>
                     </a:p>
                   </a:txBody>
@@ -5041,7 +5133,7 @@
               <a:defRPr sz="1500"/>
             </a:pPr>
             <a:r>
-              <a:t>紫金矿业（601899，有色金属）：综合73.5分；基本面优秀，具备中长期配置价值；趋势中性，观望。</a:t>
+              <a:t>紫金矿业（601899，有色金属）：综合80.0分；基本面优秀，具备中长期配置价值；中期趋势向上，可关注/持有。</a:t>
             </a:r>
           </a:p>
           <a:p>
@@ -5049,7 +5141,7 @@
               <a:defRPr sz="1500"/>
             </a:pPr>
             <a:r>
-              <a:t>宁德时代（300750，新能源电池）：综合71.0分；基本面优秀，具备中长期配置价值；趋势中性，观望。</a:t>
+              <a:t>宁德时代（300750，新能源电池）：综合73.0分；基本面优秀，具备中长期配置价值；趋势中性，观望。</a:t>
             </a:r>
           </a:p>
           <a:p>
@@ -5057,7 +5149,7 @@
               <a:defRPr sz="1500"/>
             </a:pPr>
             <a:r>
-              <a:t>长江电力（600900，电力）：综合70.0分；基本面优秀，具备中长期配置价值；中期趋势向上，可关注/持有。</a:t>
+              <a:t>中国平安（601318，保险）：综合69.0分；基本面优秀，具备中长期配置价值；趋势中性，观望。</a:t>
             </a:r>
           </a:p>
           <a:p>
@@ -5065,7 +5157,7 @@
               <a:defRPr sz="1500"/>
             </a:pPr>
             <a:r>
-              <a:t>中国平安（601318，保险）：综合69.0分；基本面优秀，具备中长期配置价值；趋势中性，观望。</a:t>
+              <a:t>美的集团（000333，家电）：综合68.0分；基本面优秀，具备中长期配置价值；中期趋势向上，可关注/持有。</a:t>
             </a:r>
           </a:p>
           <a:p>
@@ -5073,7 +5165,7 @@
               <a:defRPr sz="1500"/>
             </a:pPr>
             <a:r>
-              <a:t>美的集团（000333，家电）：综合65.5分；基本面优秀，具备中长期配置价值；趋势中性，观望。</a:t>
+              <a:t>长江电力（600900，电力）：综合67.0分；基本面优秀，具备中长期配置价值；趋势中性，观望。</a:t>
             </a:r>
           </a:p>
         </p:txBody>

--- a/outputs/12_中期路演.pptx
+++ b/outputs/12_中期路演.pptx
@@ -3255,7 +3255,7 @@
               <a:defRPr sz="1500"/>
             </a:pPr>
             <a:r>
-              <a:t>当前总资产：486.41万元</a:t>
+              <a:t>当前总资产：486.43万元</a:t>
             </a:r>
           </a:p>
           <a:p>
@@ -3263,7 +3263,7 @@
               <a:defRPr sz="1500"/>
             </a:pPr>
             <a:r>
-              <a:t>累计收益率：-2.72%</a:t>
+              <a:t>累计收益率：-2.71%</a:t>
             </a:r>
           </a:p>
           <a:p>
@@ -3279,7 +3279,7 @@
               <a:defRPr sz="1500"/>
             </a:pPr>
             <a:r>
-              <a:t>现金：96.73万元（19.9%）</a:t>
+              <a:t>现金：96.66万元（19.9%）</a:t>
             </a:r>
           </a:p>
           <a:p>
@@ -3287,7 +3287,7 @@
               <a:defRPr sz="1500"/>
             </a:pPr>
             <a:r>
-              <a:t>持仓：14只，累计交易33笔</a:t>
+              <a:t>持仓：14只，累计交易34笔</a:t>
             </a:r>
           </a:p>
         </p:txBody>
@@ -3975,7 +3975,7 @@
                         <a:defRPr sz="1100"/>
                       </a:pPr>
                       <a:r>
-                        <a:t>11800</a:t>
+                        <a:t>10300</a:t>
                       </a:r>
                     </a:p>
                   </a:txBody>
@@ -4020,7 +4020,7 @@
                         <a:defRPr sz="1100"/>
                       </a:pPr>
                       <a:r>
-                        <a:t>37.06</a:t>
+                        <a:t>32.35</a:t>
                       </a:r>
                     </a:p>
                   </a:txBody>
@@ -4803,22 +4803,22 @@
                         <a:defRPr sz="1100"/>
                       </a:pPr>
                       <a:r>
-                        <a:t>1000</a:t>
-                      </a:r>
-                    </a:p>
-                  </a:txBody>
-                  <a:tcPr/>
-                </a:tc>
-                <a:tc>
-                  <a:txBody>
-                    <a:bodyPr/>
-                    <a:lstStyle/>
-                    <a:p>
-                      <a:pPr>
-                        <a:defRPr sz="1100"/>
-                      </a:pPr>
-                      <a:r>
-                        <a:t>157.7</a:t>
+                        <a:t>1300</a:t>
+                      </a:r>
+                    </a:p>
+                  </a:txBody>
+                  <a:tcPr/>
+                </a:tc>
+                <a:tc>
+                  <a:txBody>
+                    <a:bodyPr/>
+                    <a:lstStyle/>
+                    <a:p>
+                      <a:pPr>
+                        <a:defRPr sz="1100"/>
+                      </a:pPr>
+                      <a:r>
+                        <a:t>158.08</a:t>
                       </a:r>
                     </a:p>
                   </a:txBody>
@@ -4848,22 +4848,22 @@
                         <a:defRPr sz="1100"/>
                       </a:pPr>
                       <a:r>
-                        <a:t>16.0</a:t>
-                      </a:r>
-                    </a:p>
-                  </a:txBody>
-                  <a:tcPr/>
-                </a:tc>
-                <a:tc>
-                  <a:txBody>
-                    <a:bodyPr/>
-                    <a:lstStyle/>
-                    <a:p>
-                      <a:pPr>
-                        <a:defRPr sz="1100"/>
-                      </a:pPr>
-                      <a:r>
-                        <a:t>0.23</a:t>
+                        <a:t>20.8</a:t>
+                      </a:r>
+                    </a:p>
+                  </a:txBody>
+                  <a:tcPr/>
+                </a:tc>
+                <a:tc>
+                  <a:txBody>
+                    <a:bodyPr/>
+                    <a:lstStyle/>
+                    <a:p>
+                      <a:pPr>
+                        <a:defRPr sz="1100"/>
+                      </a:pPr>
+                      <a:r>
+                        <a:t>0.25</a:t>
                       </a:r>
                     </a:p>
                   </a:txBody>

--- a/outputs/12_中期路演.pptx
+++ b/outputs/12_中期路演.pptx
@@ -3167,7 +3167,7 @@
               <a:defRPr sz="1500"/>
             </a:pPr>
             <a:r>
-              <a:t>数据截止：2026-09-18</a:t>
+              <a:t>数据截止：2026-09-21</a:t>
             </a:r>
           </a:p>
         </p:txBody>
@@ -3255,7 +3255,7 @@
               <a:defRPr sz="1500"/>
             </a:pPr>
             <a:r>
-              <a:t>当前总资产：486.43万元</a:t>
+              <a:t>当前总资产：488.79万元</a:t>
             </a:r>
           </a:p>
           <a:p>
@@ -3263,7 +3263,7 @@
               <a:defRPr sz="1500"/>
             </a:pPr>
             <a:r>
-              <a:t>累计收益率：-2.71%</a:t>
+              <a:t>累计收益率：-2.24%</a:t>
             </a:r>
           </a:p>
           <a:p>
@@ -3271,7 +3271,7 @@
               <a:defRPr sz="1500"/>
             </a:pPr>
             <a:r>
-              <a:t>同期沪深300：-0.89%</a:t>
+              <a:t>同期沪深300：-0.19%</a:t>
             </a:r>
           </a:p>
           <a:p>
@@ -3279,7 +3279,7 @@
               <a:defRPr sz="1500"/>
             </a:pPr>
             <a:r>
-              <a:t>现金：96.66万元（19.9%）</a:t>
+              <a:t>现金：96.66万元（19.8%）</a:t>
             </a:r>
           </a:p>
           <a:p>
@@ -3821,37 +3821,37 @@
                         <a:defRPr sz="1100"/>
                       </a:pPr>
                       <a:r>
-                        <a:t>4.582</a:t>
-                      </a:r>
-                    </a:p>
-                  </a:txBody>
-                  <a:tcPr/>
-                </a:tc>
-                <a:tc>
-                  <a:txBody>
-                    <a:bodyPr/>
-                    <a:lstStyle/>
-                    <a:p>
-                      <a:pPr>
-                        <a:defRPr sz="1100"/>
-                      </a:pPr>
-                      <a:r>
-                        <a:t>118.63</a:t>
-                      </a:r>
-                    </a:p>
-                  </a:txBody>
-                  <a:tcPr/>
-                </a:tc>
-                <a:tc>
-                  <a:txBody>
-                    <a:bodyPr/>
-                    <a:lstStyle/>
-                    <a:p>
-                      <a:pPr>
-                        <a:defRPr sz="1100"/>
-                      </a:pPr>
-                      <a:r>
-                        <a:t>-1.53</a:t>
+                        <a:t>4.608</a:t>
+                      </a:r>
+                    </a:p>
+                  </a:txBody>
+                  <a:tcPr/>
+                </a:tc>
+                <a:tc>
+                  <a:txBody>
+                    <a:bodyPr/>
+                    <a:lstStyle/>
+                    <a:p>
+                      <a:pPr>
+                        <a:defRPr sz="1100"/>
+                      </a:pPr>
+                      <a:r>
+                        <a:t>119.3</a:t>
+                      </a:r>
+                    </a:p>
+                  </a:txBody>
+                  <a:tcPr/>
+                </a:tc>
+                <a:tc>
+                  <a:txBody>
+                    <a:bodyPr/>
+                    <a:lstStyle/>
+                    <a:p>
+                      <a:pPr>
+                        <a:defRPr sz="1100"/>
+                      </a:pPr>
+                      <a:r>
+                        <a:t>-0.85</a:t>
                       </a:r>
                     </a:p>
                   </a:txBody>
@@ -3913,37 +3913,37 @@
                         <a:defRPr sz="1100"/>
                       </a:pPr>
                       <a:r>
-                        <a:t>53.37</a:t>
-                      </a:r>
-                    </a:p>
-                  </a:txBody>
-                  <a:tcPr/>
-                </a:tc>
-                <a:tc>
-                  <a:txBody>
-                    <a:bodyPr/>
-                    <a:lstStyle/>
-                    <a:p>
-                      <a:pPr>
-                        <a:defRPr sz="1100"/>
-                      </a:pPr>
-                      <a:r>
-                        <a:t>97.13</a:t>
-                      </a:r>
-                    </a:p>
-                  </a:txBody>
-                  <a:tcPr/>
-                </a:tc>
-                <a:tc>
-                  <a:txBody>
-                    <a:bodyPr/>
-                    <a:lstStyle/>
-                    <a:p>
-                      <a:pPr>
-                        <a:defRPr sz="1100"/>
-                      </a:pPr>
-                      <a:r>
-                        <a:t>-5.0</a:t>
+                        <a:t>53.98</a:t>
+                      </a:r>
+                    </a:p>
+                  </a:txBody>
+                  <a:tcPr/>
+                </a:tc>
+                <a:tc>
+                  <a:txBody>
+                    <a:bodyPr/>
+                    <a:lstStyle/>
+                    <a:p>
+                      <a:pPr>
+                        <a:defRPr sz="1100"/>
+                      </a:pPr>
+                      <a:r>
+                        <a:t>98.24</a:t>
+                      </a:r>
+                    </a:p>
+                  </a:txBody>
+                  <a:tcPr/>
+                </a:tc>
+                <a:tc>
+                  <a:txBody>
+                    <a:bodyPr/>
+                    <a:lstStyle/>
+                    <a:p>
+                      <a:pPr>
+                        <a:defRPr sz="1100"/>
+                      </a:pPr>
+                      <a:r>
+                        <a:t>-3.89</a:t>
                       </a:r>
                     </a:p>
                   </a:txBody>
@@ -4005,37 +4005,37 @@
                         <a:defRPr sz="1100"/>
                       </a:pPr>
                       <a:r>
-                        <a:t>31.41</a:t>
-                      </a:r>
-                    </a:p>
-                  </a:txBody>
-                  <a:tcPr/>
-                </a:tc>
-                <a:tc>
-                  <a:txBody>
-                    <a:bodyPr/>
-                    <a:lstStyle/>
-                    <a:p>
-                      <a:pPr>
-                        <a:defRPr sz="1100"/>
-                      </a:pPr>
-                      <a:r>
-                        <a:t>32.35</a:t>
-                      </a:r>
-                    </a:p>
-                  </a:txBody>
-                  <a:tcPr/>
-                </a:tc>
-                <a:tc>
-                  <a:txBody>
-                    <a:bodyPr/>
-                    <a:lstStyle/>
-                    <a:p>
-                      <a:pPr>
-                        <a:defRPr sz="1100"/>
-                      </a:pPr>
-                      <a:r>
-                        <a:t>0.0</a:t>
+                        <a:t>31.3</a:t>
+                      </a:r>
+                    </a:p>
+                  </a:txBody>
+                  <a:tcPr/>
+                </a:tc>
+                <a:tc>
+                  <a:txBody>
+                    <a:bodyPr/>
+                    <a:lstStyle/>
+                    <a:p>
+                      <a:pPr>
+                        <a:defRPr sz="1100"/>
+                      </a:pPr>
+                      <a:r>
+                        <a:t>32.24</a:t>
+                      </a:r>
+                    </a:p>
+                  </a:txBody>
+                  <a:tcPr/>
+                </a:tc>
+                <a:tc>
+                  <a:txBody>
+                    <a:bodyPr/>
+                    <a:lstStyle/>
+                    <a:p>
+                      <a:pPr>
+                        <a:defRPr sz="1100"/>
+                      </a:pPr>
+                      <a:r>
+                        <a:t>-0.11</a:t>
                       </a:r>
                     </a:p>
                   </a:txBody>
@@ -4097,37 +4097,37 @@
                         <a:defRPr sz="1100"/>
                       </a:pPr>
                       <a:r>
-                        <a:t>28.27</a:t>
-                      </a:r>
-                    </a:p>
-                  </a:txBody>
-                  <a:tcPr/>
-                </a:tc>
-                <a:tc>
-                  <a:txBody>
-                    <a:bodyPr/>
-                    <a:lstStyle/>
-                    <a:p>
-                      <a:pPr>
-                        <a:defRPr sz="1100"/>
-                      </a:pPr>
-                      <a:r>
-                        <a:t>26.29</a:t>
-                      </a:r>
-                    </a:p>
-                  </a:txBody>
-                  <a:tcPr/>
-                </a:tc>
-                <a:tc>
-                  <a:txBody>
-                    <a:bodyPr/>
-                    <a:lstStyle/>
-                    <a:p>
-                      <a:pPr>
-                        <a:defRPr sz="1100"/>
-                      </a:pPr>
-                      <a:r>
-                        <a:t>0.36</a:t>
+                        <a:t>28.1</a:t>
+                      </a:r>
+                    </a:p>
+                  </a:txBody>
+                  <a:tcPr/>
+                </a:tc>
+                <a:tc>
+                  <a:txBody>
+                    <a:bodyPr/>
+                    <a:lstStyle/>
+                    <a:p>
+                      <a:pPr>
+                        <a:defRPr sz="1100"/>
+                      </a:pPr>
+                      <a:r>
+                        <a:t>26.13</a:t>
+                      </a:r>
+                    </a:p>
+                  </a:txBody>
+                  <a:tcPr/>
+                </a:tc>
+                <a:tc>
+                  <a:txBody>
+                    <a:bodyPr/>
+                    <a:lstStyle/>
+                    <a:p>
+                      <a:pPr>
+                        <a:defRPr sz="1100"/>
+                      </a:pPr>
+                      <a:r>
+                        <a:t>0.2</a:t>
                       </a:r>
                     </a:p>
                   </a:txBody>
@@ -4189,37 +4189,37 @@
                         <a:defRPr sz="1100"/>
                       </a:pPr>
                       <a:r>
-                        <a:t>10.31</a:t>
-                      </a:r>
-                    </a:p>
-                  </a:txBody>
-                  <a:tcPr/>
-                </a:tc>
-                <a:tc>
-                  <a:txBody>
-                    <a:bodyPr/>
-                    <a:lstStyle/>
-                    <a:p>
-                      <a:pPr>
-                        <a:defRPr sz="1100"/>
-                      </a:pPr>
-                      <a:r>
-                        <a:t>9.79</a:t>
-                      </a:r>
-                    </a:p>
-                  </a:txBody>
-                  <a:tcPr/>
-                </a:tc>
-                <a:tc>
-                  <a:txBody>
-                    <a:bodyPr/>
-                    <a:lstStyle/>
-                    <a:p>
-                      <a:pPr>
-                        <a:defRPr sz="1100"/>
-                      </a:pPr>
-                      <a:r>
-                        <a:t>-0.15</a:t>
+                        <a:t>10.7</a:t>
+                      </a:r>
+                    </a:p>
+                  </a:txBody>
+                  <a:tcPr/>
+                </a:tc>
+                <a:tc>
+                  <a:txBody>
+                    <a:bodyPr/>
+                    <a:lstStyle/>
+                    <a:p>
+                      <a:pPr>
+                        <a:defRPr sz="1100"/>
+                      </a:pPr>
+                      <a:r>
+                        <a:t>10.16</a:t>
+                      </a:r>
+                    </a:p>
+                  </a:txBody>
+                  <a:tcPr/>
+                </a:tc>
+                <a:tc>
+                  <a:txBody>
+                    <a:bodyPr/>
+                    <a:lstStyle/>
+                    <a:p>
+                      <a:pPr>
+                        <a:defRPr sz="1100"/>
+                      </a:pPr>
+                      <a:r>
+                        <a:t>0.22</a:t>
                       </a:r>
                     </a:p>
                   </a:txBody>
@@ -4281,37 +4281,37 @@
                         <a:defRPr sz="1100"/>
                       </a:pPr>
                       <a:r>
-                        <a:t>16.61</a:t>
-                      </a:r>
-                    </a:p>
-                  </a:txBody>
-                  <a:tcPr/>
-                </a:tc>
-                <a:tc>
-                  <a:txBody>
-                    <a:bodyPr/>
-                    <a:lstStyle/>
-                    <a:p>
-                      <a:pPr>
-                        <a:defRPr sz="1100"/>
-                      </a:pPr>
-                      <a:r>
-                        <a:t>8.3</a:t>
-                      </a:r>
-                    </a:p>
-                  </a:txBody>
-                  <a:tcPr/>
-                </a:tc>
-                <a:tc>
-                  <a:txBody>
-                    <a:bodyPr/>
-                    <a:lstStyle/>
-                    <a:p>
-                      <a:pPr>
-                        <a:defRPr sz="1100"/>
-                      </a:pPr>
-                      <a:r>
-                        <a:t>-0.46</a:t>
+                        <a:t>16.78</a:t>
+                      </a:r>
+                    </a:p>
+                  </a:txBody>
+                  <a:tcPr/>
+                </a:tc>
+                <a:tc>
+                  <a:txBody>
+                    <a:bodyPr/>
+                    <a:lstStyle/>
+                    <a:p>
+                      <a:pPr>
+                        <a:defRPr sz="1100"/>
+                      </a:pPr>
+                      <a:r>
+                        <a:t>8.39</a:t>
+                      </a:r>
+                    </a:p>
+                  </a:txBody>
+                  <a:tcPr/>
+                </a:tc>
+                <a:tc>
+                  <a:txBody>
+                    <a:bodyPr/>
+                    <a:lstStyle/>
+                    <a:p>
+                      <a:pPr>
+                        <a:defRPr sz="1100"/>
+                      </a:pPr>
+                      <a:r>
+                        <a:t>-0.37</a:t>
                       </a:r>
                     </a:p>
                   </a:txBody>
@@ -4373,37 +4373,37 @@
                         <a:defRPr sz="1100"/>
                       </a:pPr>
                       <a:r>
-                        <a:t>38.9</a:t>
-                      </a:r>
-                    </a:p>
-                  </a:txBody>
-                  <a:tcPr/>
-                </a:tc>
-                <a:tc>
-                  <a:txBody>
-                    <a:bodyPr/>
-                    <a:lstStyle/>
-                    <a:p>
-                      <a:pPr>
-                        <a:defRPr sz="1100"/>
-                      </a:pPr>
-                      <a:r>
-                        <a:t>23.73</a:t>
-                      </a:r>
-                    </a:p>
-                  </a:txBody>
-                  <a:tcPr/>
-                </a:tc>
-                <a:tc>
-                  <a:txBody>
-                    <a:bodyPr/>
-                    <a:lstStyle/>
-                    <a:p>
-                      <a:pPr>
-                        <a:defRPr sz="1100"/>
-                      </a:pPr>
-                      <a:r>
-                        <a:t>1.85</a:t>
+                        <a:t>37.74</a:t>
+                      </a:r>
+                    </a:p>
+                  </a:txBody>
+                  <a:tcPr/>
+                </a:tc>
+                <a:tc>
+                  <a:txBody>
+                    <a:bodyPr/>
+                    <a:lstStyle/>
+                    <a:p>
+                      <a:pPr>
+                        <a:defRPr sz="1100"/>
+                      </a:pPr>
+                      <a:r>
+                        <a:t>23.02</a:t>
+                      </a:r>
+                    </a:p>
+                  </a:txBody>
+                  <a:tcPr/>
+                </a:tc>
+                <a:tc>
+                  <a:txBody>
+                    <a:bodyPr/>
+                    <a:lstStyle/>
+                    <a:p>
+                      <a:pPr>
+                        <a:defRPr sz="1100"/>
+                      </a:pPr>
+                      <a:r>
+                        <a:t>1.14</a:t>
                       </a:r>
                     </a:p>
                   </a:txBody>
@@ -4465,37 +4465,37 @@
                         <a:defRPr sz="1100"/>
                       </a:pPr>
                       <a:r>
-                        <a:t>143.06</a:t>
-                      </a:r>
-                    </a:p>
-                  </a:txBody>
-                  <a:tcPr/>
-                </a:tc>
-                <a:tc>
-                  <a:txBody>
-                    <a:bodyPr/>
-                    <a:lstStyle/>
-                    <a:p>
-                      <a:pPr>
-                        <a:defRPr sz="1100"/>
-                      </a:pPr>
-                      <a:r>
-                        <a:t>7.15</a:t>
-                      </a:r>
-                    </a:p>
-                  </a:txBody>
-                  <a:tcPr/>
-                </a:tc>
-                <a:tc>
-                  <a:txBody>
-                    <a:bodyPr/>
-                    <a:lstStyle/>
-                    <a:p>
-                      <a:pPr>
-                        <a:defRPr sz="1100"/>
-                      </a:pPr>
-                      <a:r>
-                        <a:t>0.32</a:t>
+                        <a:t>143.25</a:t>
+                      </a:r>
+                    </a:p>
+                  </a:txBody>
+                  <a:tcPr/>
+                </a:tc>
+                <a:tc>
+                  <a:txBody>
+                    <a:bodyPr/>
+                    <a:lstStyle/>
+                    <a:p>
+                      <a:pPr>
+                        <a:defRPr sz="1100"/>
+                      </a:pPr>
+                      <a:r>
+                        <a:t>7.16</a:t>
+                      </a:r>
+                    </a:p>
+                  </a:txBody>
+                  <a:tcPr/>
+                </a:tc>
+                <a:tc>
+                  <a:txBody>
+                    <a:bodyPr/>
+                    <a:lstStyle/>
+                    <a:p>
+                      <a:pPr>
+                        <a:defRPr sz="1100"/>
+                      </a:pPr>
+                      <a:r>
+                        <a:t>0.33</a:t>
                       </a:r>
                     </a:p>
                   </a:txBody>
@@ -4557,37 +4557,37 @@
                         <a:defRPr sz="1100"/>
                       </a:pPr>
                       <a:r>
-                        <a:t>7.5</a:t>
-                      </a:r>
-                    </a:p>
-                  </a:txBody>
-                  <a:tcPr/>
-                </a:tc>
-                <a:tc>
-                  <a:txBody>
-                    <a:bodyPr/>
-                    <a:lstStyle/>
-                    <a:p>
-                      <a:pPr>
-                        <a:defRPr sz="1100"/>
-                      </a:pPr>
-                      <a:r>
-                        <a:t>3.75</a:t>
-                      </a:r>
-                    </a:p>
-                  </a:txBody>
-                  <a:tcPr/>
-                </a:tc>
-                <a:tc>
-                  <a:txBody>
-                    <a:bodyPr/>
-                    <a:lstStyle/>
-                    <a:p>
-                      <a:pPr>
-                        <a:defRPr sz="1100"/>
-                      </a:pPr>
-                      <a:r>
-                        <a:t>0.08</a:t>
+                        <a:t>8.25</a:t>
+                      </a:r>
+                    </a:p>
+                  </a:txBody>
+                  <a:tcPr/>
+                </a:tc>
+                <a:tc>
+                  <a:txBody>
+                    <a:bodyPr/>
+                    <a:lstStyle/>
+                    <a:p>
+                      <a:pPr>
+                        <a:defRPr sz="1100"/>
+                      </a:pPr>
+                      <a:r>
+                        <a:t>4.12</a:t>
+                      </a:r>
+                    </a:p>
+                  </a:txBody>
+                  <a:tcPr/>
+                </a:tc>
+                <a:tc>
+                  <a:txBody>
+                    <a:bodyPr/>
+                    <a:lstStyle/>
+                    <a:p>
+                      <a:pPr>
+                        <a:defRPr sz="1100"/>
+                      </a:pPr>
+                      <a:r>
+                        <a:t>0.46</a:t>
                       </a:r>
                     </a:p>
                   </a:txBody>
@@ -4649,37 +4649,37 @@
                         <a:defRPr sz="1100"/>
                       </a:pPr>
                       <a:r>
-                        <a:t>22.36</a:t>
-                      </a:r>
-                    </a:p>
-                  </a:txBody>
-                  <a:tcPr/>
-                </a:tc>
-                <a:tc>
-                  <a:txBody>
-                    <a:bodyPr/>
-                    <a:lstStyle/>
-                    <a:p>
-                      <a:pPr>
-                        <a:defRPr sz="1100"/>
-                      </a:pPr>
-                      <a:r>
-                        <a:t>1.12</a:t>
-                      </a:r>
-                    </a:p>
-                  </a:txBody>
-                  <a:tcPr/>
-                </a:tc>
-                <a:tc>
-                  <a:txBody>
-                    <a:bodyPr/>
-                    <a:lstStyle/>
-                    <a:p>
-                      <a:pPr>
-                        <a:defRPr sz="1100"/>
-                      </a:pPr>
-                      <a:r>
-                        <a:t>0.08</a:t>
+                        <a:t>22.91</a:t>
+                      </a:r>
+                    </a:p>
+                  </a:txBody>
+                  <a:tcPr/>
+                </a:tc>
+                <a:tc>
+                  <a:txBody>
+                    <a:bodyPr/>
+                    <a:lstStyle/>
+                    <a:p>
+                      <a:pPr>
+                        <a:defRPr sz="1100"/>
+                      </a:pPr>
+                      <a:r>
+                        <a:t>1.15</a:t>
+                      </a:r>
+                    </a:p>
+                  </a:txBody>
+                  <a:tcPr/>
+                </a:tc>
+                <a:tc>
+                  <a:txBody>
+                    <a:bodyPr/>
+                    <a:lstStyle/>
+                    <a:p>
+                      <a:pPr>
+                        <a:defRPr sz="1100"/>
+                      </a:pPr>
+                      <a:r>
+                        <a:t>0.11</a:t>
                       </a:r>
                     </a:p>
                   </a:txBody>
@@ -4741,37 +4741,37 @@
                         <a:defRPr sz="1100"/>
                       </a:pPr>
                       <a:r>
-                        <a:t>186.8</a:t>
-                      </a:r>
-                    </a:p>
-                  </a:txBody>
-                  <a:tcPr/>
-                </a:tc>
-                <a:tc>
-                  <a:txBody>
-                    <a:bodyPr/>
-                    <a:lstStyle/>
-                    <a:p>
-                      <a:pPr>
-                        <a:defRPr sz="1100"/>
-                      </a:pPr>
-                      <a:r>
-                        <a:t>18.68</a:t>
-                      </a:r>
-                    </a:p>
-                  </a:txBody>
-                  <a:tcPr/>
-                </a:tc>
-                <a:tc>
-                  <a:txBody>
-                    <a:bodyPr/>
-                    <a:lstStyle/>
-                    <a:p>
-                      <a:pPr>
-                        <a:defRPr sz="1100"/>
-                      </a:pPr>
-                      <a:r>
-                        <a:t>0.92</a:t>
+                        <a:t>186.73</a:t>
+                      </a:r>
+                    </a:p>
+                  </a:txBody>
+                  <a:tcPr/>
+                </a:tc>
+                <a:tc>
+                  <a:txBody>
+                    <a:bodyPr/>
+                    <a:lstStyle/>
+                    <a:p>
+                      <a:pPr>
+                        <a:defRPr sz="1100"/>
+                      </a:pPr>
+                      <a:r>
+                        <a:t>18.67</a:t>
+                      </a:r>
+                    </a:p>
+                  </a:txBody>
+                  <a:tcPr/>
+                </a:tc>
+                <a:tc>
+                  <a:txBody>
+                    <a:bodyPr/>
+                    <a:lstStyle/>
+                    <a:p>
+                      <a:pPr>
+                        <a:defRPr sz="1100"/>
+                      </a:pPr>
+                      <a:r>
+                        <a:t>0.91</a:t>
                       </a:r>
                     </a:p>
                   </a:txBody>
@@ -4833,37 +4833,37 @@
                         <a:defRPr sz="1100"/>
                       </a:pPr>
                       <a:r>
-                        <a:t>160.0</a:t>
-                      </a:r>
-                    </a:p>
-                  </a:txBody>
-                  <a:tcPr/>
-                </a:tc>
-                <a:tc>
-                  <a:txBody>
-                    <a:bodyPr/>
-                    <a:lstStyle/>
-                    <a:p>
-                      <a:pPr>
-                        <a:defRPr sz="1100"/>
-                      </a:pPr>
-                      <a:r>
-                        <a:t>20.8</a:t>
-                      </a:r>
-                    </a:p>
-                  </a:txBody>
-                  <a:tcPr/>
-                </a:tc>
-                <a:tc>
-                  <a:txBody>
-                    <a:bodyPr/>
-                    <a:lstStyle/>
-                    <a:p>
-                      <a:pPr>
-                        <a:defRPr sz="1100"/>
-                      </a:pPr>
-                      <a:r>
-                        <a:t>0.25</a:t>
+                        <a:t>167.96</a:t>
+                      </a:r>
+                    </a:p>
+                  </a:txBody>
+                  <a:tcPr/>
+                </a:tc>
+                <a:tc>
+                  <a:txBody>
+                    <a:bodyPr/>
+                    <a:lstStyle/>
+                    <a:p>
+                      <a:pPr>
+                        <a:defRPr sz="1100"/>
+                      </a:pPr>
+                      <a:r>
+                        <a:t>21.83</a:t>
+                      </a:r>
+                    </a:p>
+                  </a:txBody>
+                  <a:tcPr/>
+                </a:tc>
+                <a:tc>
+                  <a:txBody>
+                    <a:bodyPr/>
+                    <a:lstStyle/>
+                    <a:p>
+                      <a:pPr>
+                        <a:defRPr sz="1100"/>
+                      </a:pPr>
+                      <a:r>
+                        <a:t>1.28</a:t>
                       </a:r>
                     </a:p>
                   </a:txBody>
@@ -4925,37 +4925,37 @@
                         <a:defRPr sz="1100"/>
                       </a:pPr>
                       <a:r>
-                        <a:t>43.3</a:t>
-                      </a:r>
-                    </a:p>
-                  </a:txBody>
-                  <a:tcPr/>
-                </a:tc>
-                <a:tc>
-                  <a:txBody>
-                    <a:bodyPr/>
-                    <a:lstStyle/>
-                    <a:p>
-                      <a:pPr>
-                        <a:defRPr sz="1100"/>
-                      </a:pPr>
-                      <a:r>
-                        <a:t>4.33</a:t>
-                      </a:r>
-                    </a:p>
-                  </a:txBody>
-                  <a:tcPr/>
-                </a:tc>
-                <a:tc>
-                  <a:txBody>
-                    <a:bodyPr/>
-                    <a:lstStyle/>
-                    <a:p>
-                      <a:pPr>
-                        <a:defRPr sz="1100"/>
-                      </a:pPr>
-                      <a:r>
-                        <a:t>0.06</a:t>
+                        <a:t>45.13</a:t>
+                      </a:r>
+                    </a:p>
+                  </a:txBody>
+                  <a:tcPr/>
+                </a:tc>
+                <a:tc>
+                  <a:txBody>
+                    <a:bodyPr/>
+                    <a:lstStyle/>
+                    <a:p>
+                      <a:pPr>
+                        <a:defRPr sz="1100"/>
+                      </a:pPr>
+                      <a:r>
+                        <a:t>4.51</a:t>
+                      </a:r>
+                    </a:p>
+                  </a:txBody>
+                  <a:tcPr/>
+                </a:tc>
+                <a:tc>
+                  <a:txBody>
+                    <a:bodyPr/>
+                    <a:lstStyle/>
+                    <a:p>
+                      <a:pPr>
+                        <a:defRPr sz="1100"/>
+                      </a:pPr>
+                      <a:r>
+                        <a:t>0.25</a:t>
                       </a:r>
                     </a:p>
                   </a:txBody>
@@ -5017,37 +5017,37 @@
                         <a:defRPr sz="1100"/>
                       </a:pPr>
                       <a:r>
-                        <a:t>44.26</a:t>
-                      </a:r>
-                    </a:p>
-                  </a:txBody>
-                  <a:tcPr/>
-                </a:tc>
-                <a:tc>
-                  <a:txBody>
-                    <a:bodyPr/>
-                    <a:lstStyle/>
-                    <a:p>
-                      <a:pPr>
-                        <a:defRPr sz="1100"/>
-                      </a:pPr>
-                      <a:r>
-                        <a:t>17.7</a:t>
-                      </a:r>
-                    </a:p>
-                  </a:txBody>
-                  <a:tcPr/>
-                </a:tc>
-                <a:tc>
-                  <a:txBody>
-                    <a:bodyPr/>
-                    <a:lstStyle/>
-                    <a:p>
-                      <a:pPr>
-                        <a:defRPr sz="1100"/>
-                      </a:pPr>
-                      <a:r>
-                        <a:t>0.28</a:t>
+                        <a:t>42.96</a:t>
+                      </a:r>
+                    </a:p>
+                  </a:txBody>
+                  <a:tcPr/>
+                </a:tc>
+                <a:tc>
+                  <a:txBody>
+                    <a:bodyPr/>
+                    <a:lstStyle/>
+                    <a:p>
+                      <a:pPr>
+                        <a:defRPr sz="1100"/>
+                      </a:pPr>
+                      <a:r>
+                        <a:t>17.18</a:t>
+                      </a:r>
+                    </a:p>
+                  </a:txBody>
+                  <a:tcPr/>
+                </a:tc>
+                <a:tc>
+                  <a:txBody>
+                    <a:bodyPr/>
+                    <a:lstStyle/>
+                    <a:p>
+                      <a:pPr>
+                        <a:defRPr sz="1100"/>
+                      </a:pPr>
+                      <a:r>
+                        <a:t>-0.24</a:t>
                       </a:r>
                     </a:p>
                   </a:txBody>
@@ -5133,7 +5133,7 @@
               <a:defRPr sz="1500"/>
             </a:pPr>
             <a:r>
-              <a:t>紫金矿业（601899，有色金属）：综合80.0分；基本面优秀，具备中长期配置价值；中期趋势向上，可关注/持有。</a:t>
+              <a:t>宁德时代（300750，新能源电池）：综合73.0分；基本面优秀，具备中长期配置价值；趋势中性，观望。</a:t>
             </a:r>
           </a:p>
           <a:p>
@@ -5141,7 +5141,7 @@
               <a:defRPr sz="1500"/>
             </a:pPr>
             <a:r>
-              <a:t>宁德时代（300750，新能源电池）：综合73.0分；基本面优秀，具备中长期配置价值；趋势中性，观望。</a:t>
+              <a:t>紫金矿业（601899，有色金属）：综合73.0分；基本面优秀，具备中长期配置价值；趋势中性，观望。</a:t>
             </a:r>
           </a:p>
           <a:p>
@@ -5149,7 +5149,7 @@
               <a:defRPr sz="1500"/>
             </a:pPr>
             <a:r>
-              <a:t>中国平安（601318，保险）：综合69.0分；基本面优秀，具备中长期配置价值；趋势中性，观望。</a:t>
+              <a:t>中国平安（601318，保险）：综合71.0分；基本面优秀，具备中长期配置价值；中期趋势向上，可关注/持有。</a:t>
             </a:r>
           </a:p>
           <a:p>
@@ -5157,7 +5157,7 @@
               <a:defRPr sz="1500"/>
             </a:pPr>
             <a:r>
-              <a:t>美的集团（000333，家电）：综合68.0分；基本面优秀，具备中长期配置价值；中期趋势向上，可关注/持有。</a:t>
+              <a:t>招商银行（600036，银行）：综合66.0分；基本面优秀，具备中长期配置价值；中期趋势向上，可关注/持有。</a:t>
             </a:r>
           </a:p>
           <a:p>
@@ -5165,7 +5165,7 @@
               <a:defRPr sz="1500"/>
             </a:pPr>
             <a:r>
-              <a:t>长江电力（600900，电力）：综合67.0分；基本面优秀，具备中长期配置价值；趋势中性，观望。</a:t>
+              <a:t>长江电力（600900，电力）：综合65.0分；基本面优秀，具备中长期配置价值；趋势中性，观望。</a:t>
             </a:r>
           </a:p>
         </p:txBody>

--- a/outputs/12_中期路演.pptx
+++ b/outputs/12_中期路演.pptx
@@ -3167,7 +3167,7 @@
               <a:defRPr sz="1500"/>
             </a:pPr>
             <a:r>
-              <a:t>数据截止：2026-09-21</a:t>
+              <a:t>数据截止：2026-09-22</a:t>
             </a:r>
           </a:p>
         </p:txBody>
@@ -3255,7 +3255,7 @@
               <a:defRPr sz="1500"/>
             </a:pPr>
             <a:r>
-              <a:t>当前总资产：488.79万元</a:t>
+              <a:t>当前总资产：490.55万元</a:t>
             </a:r>
           </a:p>
           <a:p>
@@ -3263,7 +3263,7 @@
               <a:defRPr sz="1500"/>
             </a:pPr>
             <a:r>
-              <a:t>累计收益率：-2.24%</a:t>
+              <a:t>累计收益率：-1.89%</a:t>
             </a:r>
           </a:p>
           <a:p>
@@ -3271,7 +3271,7 @@
               <a:defRPr sz="1500"/>
             </a:pPr>
             <a:r>
-              <a:t>同期沪深300：-0.19%</a:t>
+              <a:t>同期沪深300：-0.08%</a:t>
             </a:r>
           </a:p>
           <a:p>
@@ -3279,7 +3279,7 @@
               <a:defRPr sz="1500"/>
             </a:pPr>
             <a:r>
-              <a:t>现金：96.66万元（19.8%）</a:t>
+              <a:t>现金：96.66万元（19.7%）</a:t>
             </a:r>
           </a:p>
           <a:p>
@@ -3821,37 +3821,37 @@
                         <a:defRPr sz="1100"/>
                       </a:pPr>
                       <a:r>
-                        <a:t>4.608</a:t>
-                      </a:r>
-                    </a:p>
-                  </a:txBody>
-                  <a:tcPr/>
-                </a:tc>
-                <a:tc>
-                  <a:txBody>
-                    <a:bodyPr/>
-                    <a:lstStyle/>
-                    <a:p>
-                      <a:pPr>
-                        <a:defRPr sz="1100"/>
-                      </a:pPr>
-                      <a:r>
-                        <a:t>119.3</a:t>
-                      </a:r>
-                    </a:p>
-                  </a:txBody>
-                  <a:tcPr/>
-                </a:tc>
-                <a:tc>
-                  <a:txBody>
-                    <a:bodyPr/>
-                    <a:lstStyle/>
-                    <a:p>
-                      <a:pPr>
-                        <a:defRPr sz="1100"/>
-                      </a:pPr>
-                      <a:r>
-                        <a:t>-0.85</a:t>
+                        <a:t>4.613</a:t>
+                      </a:r>
+                    </a:p>
+                  </a:txBody>
+                  <a:tcPr/>
+                </a:tc>
+                <a:tc>
+                  <a:txBody>
+                    <a:bodyPr/>
+                    <a:lstStyle/>
+                    <a:p>
+                      <a:pPr>
+                        <a:defRPr sz="1100"/>
+                      </a:pPr>
+                      <a:r>
+                        <a:t>119.43</a:t>
+                      </a:r>
+                    </a:p>
+                  </a:txBody>
+                  <a:tcPr/>
+                </a:tc>
+                <a:tc>
+                  <a:txBody>
+                    <a:bodyPr/>
+                    <a:lstStyle/>
+                    <a:p>
+                      <a:pPr>
+                        <a:defRPr sz="1100"/>
+                      </a:pPr>
+                      <a:r>
+                        <a:t>-0.72</a:t>
                       </a:r>
                     </a:p>
                   </a:txBody>
@@ -3913,37 +3913,37 @@
                         <a:defRPr sz="1100"/>
                       </a:pPr>
                       <a:r>
-                        <a:t>53.98</a:t>
-                      </a:r>
-                    </a:p>
-                  </a:txBody>
-                  <a:tcPr/>
-                </a:tc>
-                <a:tc>
-                  <a:txBody>
-                    <a:bodyPr/>
-                    <a:lstStyle/>
-                    <a:p>
-                      <a:pPr>
-                        <a:defRPr sz="1100"/>
-                      </a:pPr>
-                      <a:r>
-                        <a:t>98.24</a:t>
-                      </a:r>
-                    </a:p>
-                  </a:txBody>
-                  <a:tcPr/>
-                </a:tc>
-                <a:tc>
-                  <a:txBody>
-                    <a:bodyPr/>
-                    <a:lstStyle/>
-                    <a:p>
-                      <a:pPr>
-                        <a:defRPr sz="1100"/>
-                      </a:pPr>
-                      <a:r>
-                        <a:t>-3.89</a:t>
+                        <a:t>54.46</a:t>
+                      </a:r>
+                    </a:p>
+                  </a:txBody>
+                  <a:tcPr/>
+                </a:tc>
+                <a:tc>
+                  <a:txBody>
+                    <a:bodyPr/>
+                    <a:lstStyle/>
+                    <a:p>
+                      <a:pPr>
+                        <a:defRPr sz="1100"/>
+                      </a:pPr>
+                      <a:r>
+                        <a:t>99.12</a:t>
+                      </a:r>
+                    </a:p>
+                  </a:txBody>
+                  <a:tcPr/>
+                </a:tc>
+                <a:tc>
+                  <a:txBody>
+                    <a:bodyPr/>
+                    <a:lstStyle/>
+                    <a:p>
+                      <a:pPr>
+                        <a:defRPr sz="1100"/>
+                      </a:pPr>
+                      <a:r>
+                        <a:t>-3.02</a:t>
                       </a:r>
                     </a:p>
                   </a:txBody>
@@ -4005,37 +4005,37 @@
                         <a:defRPr sz="1100"/>
                       </a:pPr>
                       <a:r>
-                        <a:t>31.3</a:t>
-                      </a:r>
-                    </a:p>
-                  </a:txBody>
-                  <a:tcPr/>
-                </a:tc>
-                <a:tc>
-                  <a:txBody>
-                    <a:bodyPr/>
-                    <a:lstStyle/>
-                    <a:p>
-                      <a:pPr>
-                        <a:defRPr sz="1100"/>
-                      </a:pPr>
-                      <a:r>
-                        <a:t>32.24</a:t>
-                      </a:r>
-                    </a:p>
-                  </a:txBody>
-                  <a:tcPr/>
-                </a:tc>
-                <a:tc>
-                  <a:txBody>
-                    <a:bodyPr/>
-                    <a:lstStyle/>
-                    <a:p>
-                      <a:pPr>
-                        <a:defRPr sz="1100"/>
-                      </a:pPr>
-                      <a:r>
-                        <a:t>-0.11</a:t>
+                        <a:t>31.41</a:t>
+                      </a:r>
+                    </a:p>
+                  </a:txBody>
+                  <a:tcPr/>
+                </a:tc>
+                <a:tc>
+                  <a:txBody>
+                    <a:bodyPr/>
+                    <a:lstStyle/>
+                    <a:p>
+                      <a:pPr>
+                        <a:defRPr sz="1100"/>
+                      </a:pPr>
+                      <a:r>
+                        <a:t>32.35</a:t>
+                      </a:r>
+                    </a:p>
+                  </a:txBody>
+                  <a:tcPr/>
+                </a:tc>
+                <a:tc>
+                  <a:txBody>
+                    <a:bodyPr/>
+                    <a:lstStyle/>
+                    <a:p>
+                      <a:pPr>
+                        <a:defRPr sz="1100"/>
+                      </a:pPr>
+                      <a:r>
+                        <a:t>0.0</a:t>
                       </a:r>
                     </a:p>
                   </a:txBody>
@@ -4097,37 +4097,37 @@
                         <a:defRPr sz="1100"/>
                       </a:pPr>
                       <a:r>
-                        <a:t>28.1</a:t>
-                      </a:r>
-                    </a:p>
-                  </a:txBody>
-                  <a:tcPr/>
-                </a:tc>
-                <a:tc>
-                  <a:txBody>
-                    <a:bodyPr/>
-                    <a:lstStyle/>
-                    <a:p>
-                      <a:pPr>
-                        <a:defRPr sz="1100"/>
-                      </a:pPr>
-                      <a:r>
-                        <a:t>26.13</a:t>
-                      </a:r>
-                    </a:p>
-                  </a:txBody>
-                  <a:tcPr/>
-                </a:tc>
-                <a:tc>
-                  <a:txBody>
-                    <a:bodyPr/>
-                    <a:lstStyle/>
-                    <a:p>
-                      <a:pPr>
-                        <a:defRPr sz="1100"/>
-                      </a:pPr>
-                      <a:r>
-                        <a:t>0.2</a:t>
+                        <a:t>28.02</a:t>
+                      </a:r>
+                    </a:p>
+                  </a:txBody>
+                  <a:tcPr/>
+                </a:tc>
+                <a:tc>
+                  <a:txBody>
+                    <a:bodyPr/>
+                    <a:lstStyle/>
+                    <a:p>
+                      <a:pPr>
+                        <a:defRPr sz="1100"/>
+                      </a:pPr>
+                      <a:r>
+                        <a:t>26.06</a:t>
+                      </a:r>
+                    </a:p>
+                  </a:txBody>
+                  <a:tcPr/>
+                </a:tc>
+                <a:tc>
+                  <a:txBody>
+                    <a:bodyPr/>
+                    <a:lstStyle/>
+                    <a:p>
+                      <a:pPr>
+                        <a:defRPr sz="1100"/>
+                      </a:pPr>
+                      <a:r>
+                        <a:t>0.13</a:t>
                       </a:r>
                     </a:p>
                   </a:txBody>
@@ -4189,37 +4189,37 @@
                         <a:defRPr sz="1100"/>
                       </a:pPr>
                       <a:r>
-                        <a:t>10.7</a:t>
-                      </a:r>
-                    </a:p>
-                  </a:txBody>
-                  <a:tcPr/>
-                </a:tc>
-                <a:tc>
-                  <a:txBody>
-                    <a:bodyPr/>
-                    <a:lstStyle/>
-                    <a:p>
-                      <a:pPr>
-                        <a:defRPr sz="1100"/>
-                      </a:pPr>
-                      <a:r>
-                        <a:t>10.16</a:t>
-                      </a:r>
-                    </a:p>
-                  </a:txBody>
-                  <a:tcPr/>
-                </a:tc>
-                <a:tc>
-                  <a:txBody>
-                    <a:bodyPr/>
-                    <a:lstStyle/>
-                    <a:p>
-                      <a:pPr>
-                        <a:defRPr sz="1100"/>
-                      </a:pPr>
-                      <a:r>
-                        <a:t>0.22</a:t>
+                        <a:t>10.95</a:t>
+                      </a:r>
+                    </a:p>
+                  </a:txBody>
+                  <a:tcPr/>
+                </a:tc>
+                <a:tc>
+                  <a:txBody>
+                    <a:bodyPr/>
+                    <a:lstStyle/>
+                    <a:p>
+                      <a:pPr>
+                        <a:defRPr sz="1100"/>
+                      </a:pPr>
+                      <a:r>
+                        <a:t>10.4</a:t>
+                      </a:r>
+                    </a:p>
+                  </a:txBody>
+                  <a:tcPr/>
+                </a:tc>
+                <a:tc>
+                  <a:txBody>
+                    <a:bodyPr/>
+                    <a:lstStyle/>
+                    <a:p>
+                      <a:pPr>
+                        <a:defRPr sz="1100"/>
+                      </a:pPr>
+                      <a:r>
+                        <a:t>0.45</a:t>
                       </a:r>
                     </a:p>
                   </a:txBody>
@@ -4281,37 +4281,37 @@
                         <a:defRPr sz="1100"/>
                       </a:pPr>
                       <a:r>
-                        <a:t>16.78</a:t>
-                      </a:r>
-                    </a:p>
-                  </a:txBody>
-                  <a:tcPr/>
-                </a:tc>
-                <a:tc>
-                  <a:txBody>
-                    <a:bodyPr/>
-                    <a:lstStyle/>
-                    <a:p>
-                      <a:pPr>
-                        <a:defRPr sz="1100"/>
-                      </a:pPr>
-                      <a:r>
-                        <a:t>8.39</a:t>
-                      </a:r>
-                    </a:p>
-                  </a:txBody>
-                  <a:tcPr/>
-                </a:tc>
-                <a:tc>
-                  <a:txBody>
-                    <a:bodyPr/>
-                    <a:lstStyle/>
-                    <a:p>
-                      <a:pPr>
-                        <a:defRPr sz="1100"/>
-                      </a:pPr>
-                      <a:r>
-                        <a:t>-0.37</a:t>
+                        <a:t>16.89</a:t>
+                      </a:r>
+                    </a:p>
+                  </a:txBody>
+                  <a:tcPr/>
+                </a:tc>
+                <a:tc>
+                  <a:txBody>
+                    <a:bodyPr/>
+                    <a:lstStyle/>
+                    <a:p>
+                      <a:pPr>
+                        <a:defRPr sz="1100"/>
+                      </a:pPr>
+                      <a:r>
+                        <a:t>8.45</a:t>
+                      </a:r>
+                    </a:p>
+                  </a:txBody>
+                  <a:tcPr/>
+                </a:tc>
+                <a:tc>
+                  <a:txBody>
+                    <a:bodyPr/>
+                    <a:lstStyle/>
+                    <a:p>
+                      <a:pPr>
+                        <a:defRPr sz="1100"/>
+                      </a:pPr>
+                      <a:r>
+                        <a:t>-0.31</a:t>
                       </a:r>
                     </a:p>
                   </a:txBody>
@@ -4373,37 +4373,37 @@
                         <a:defRPr sz="1100"/>
                       </a:pPr>
                       <a:r>
-                        <a:t>37.74</a:t>
-                      </a:r>
-                    </a:p>
-                  </a:txBody>
-                  <a:tcPr/>
-                </a:tc>
-                <a:tc>
-                  <a:txBody>
-                    <a:bodyPr/>
-                    <a:lstStyle/>
-                    <a:p>
-                      <a:pPr>
-                        <a:defRPr sz="1100"/>
-                      </a:pPr>
-                      <a:r>
-                        <a:t>23.02</a:t>
-                      </a:r>
-                    </a:p>
-                  </a:txBody>
-                  <a:tcPr/>
-                </a:tc>
-                <a:tc>
-                  <a:txBody>
-                    <a:bodyPr/>
-                    <a:lstStyle/>
-                    <a:p>
-                      <a:pPr>
-                        <a:defRPr sz="1100"/>
-                      </a:pPr>
-                      <a:r>
-                        <a:t>1.14</a:t>
+                        <a:t>37.72</a:t>
+                      </a:r>
+                    </a:p>
+                  </a:txBody>
+                  <a:tcPr/>
+                </a:tc>
+                <a:tc>
+                  <a:txBody>
+                    <a:bodyPr/>
+                    <a:lstStyle/>
+                    <a:p>
+                      <a:pPr>
+                        <a:defRPr sz="1100"/>
+                      </a:pPr>
+                      <a:r>
+                        <a:t>23.01</a:t>
+                      </a:r>
+                    </a:p>
+                  </a:txBody>
+                  <a:tcPr/>
+                </a:tc>
+                <a:tc>
+                  <a:txBody>
+                    <a:bodyPr/>
+                    <a:lstStyle/>
+                    <a:p>
+                      <a:pPr>
+                        <a:defRPr sz="1100"/>
+                      </a:pPr>
+                      <a:r>
+                        <a:t>1.13</a:t>
                       </a:r>
                     </a:p>
                   </a:txBody>
@@ -4465,37 +4465,37 @@
                         <a:defRPr sz="1100"/>
                       </a:pPr>
                       <a:r>
-                        <a:t>143.25</a:t>
-                      </a:r>
-                    </a:p>
-                  </a:txBody>
-                  <a:tcPr/>
-                </a:tc>
-                <a:tc>
-                  <a:txBody>
-                    <a:bodyPr/>
-                    <a:lstStyle/>
-                    <a:p>
-                      <a:pPr>
-                        <a:defRPr sz="1100"/>
-                      </a:pPr>
-                      <a:r>
-                        <a:t>7.16</a:t>
-                      </a:r>
-                    </a:p>
-                  </a:txBody>
-                  <a:tcPr/>
-                </a:tc>
-                <a:tc>
-                  <a:txBody>
-                    <a:bodyPr/>
-                    <a:lstStyle/>
-                    <a:p>
-                      <a:pPr>
-                        <a:defRPr sz="1100"/>
-                      </a:pPr>
-                      <a:r>
-                        <a:t>0.33</a:t>
+                        <a:t>151.13</a:t>
+                      </a:r>
+                    </a:p>
+                  </a:txBody>
+                  <a:tcPr/>
+                </a:tc>
+                <a:tc>
+                  <a:txBody>
+                    <a:bodyPr/>
+                    <a:lstStyle/>
+                    <a:p>
+                      <a:pPr>
+                        <a:defRPr sz="1100"/>
+                      </a:pPr>
+                      <a:r>
+                        <a:t>7.56</a:t>
+                      </a:r>
+                    </a:p>
+                  </a:txBody>
+                  <a:tcPr/>
+                </a:tc>
+                <a:tc>
+                  <a:txBody>
+                    <a:bodyPr/>
+                    <a:lstStyle/>
+                    <a:p>
+                      <a:pPr>
+                        <a:defRPr sz="1100"/>
+                      </a:pPr>
+                      <a:r>
+                        <a:t>0.72</a:t>
                       </a:r>
                     </a:p>
                   </a:txBody>
@@ -4557,37 +4557,37 @@
                         <a:defRPr sz="1100"/>
                       </a:pPr>
                       <a:r>
-                        <a:t>8.25</a:t>
-                      </a:r>
-                    </a:p>
-                  </a:txBody>
-                  <a:tcPr/>
-                </a:tc>
-                <a:tc>
-                  <a:txBody>
-                    <a:bodyPr/>
-                    <a:lstStyle/>
-                    <a:p>
-                      <a:pPr>
-                        <a:defRPr sz="1100"/>
-                      </a:pPr>
-                      <a:r>
-                        <a:t>4.12</a:t>
-                      </a:r>
-                    </a:p>
-                  </a:txBody>
-                  <a:tcPr/>
-                </a:tc>
-                <a:tc>
-                  <a:txBody>
-                    <a:bodyPr/>
-                    <a:lstStyle/>
-                    <a:p>
-                      <a:pPr>
-                        <a:defRPr sz="1100"/>
-                      </a:pPr>
-                      <a:r>
-                        <a:t>0.46</a:t>
+                        <a:t>9.08</a:t>
+                      </a:r>
+                    </a:p>
+                  </a:txBody>
+                  <a:tcPr/>
+                </a:tc>
+                <a:tc>
+                  <a:txBody>
+                    <a:bodyPr/>
+                    <a:lstStyle/>
+                    <a:p>
+                      <a:pPr>
+                        <a:defRPr sz="1100"/>
+                      </a:pPr>
+                      <a:r>
+                        <a:t>4.54</a:t>
+                      </a:r>
+                    </a:p>
+                  </a:txBody>
+                  <a:tcPr/>
+                </a:tc>
+                <a:tc>
+                  <a:txBody>
+                    <a:bodyPr/>
+                    <a:lstStyle/>
+                    <a:p>
+                      <a:pPr>
+                        <a:defRPr sz="1100"/>
+                      </a:pPr>
+                      <a:r>
+                        <a:t>0.88</a:t>
                       </a:r>
                     </a:p>
                   </a:txBody>
@@ -4649,37 +4649,37 @@
                         <a:defRPr sz="1100"/>
                       </a:pPr>
                       <a:r>
-                        <a:t>22.91</a:t>
-                      </a:r>
-                    </a:p>
-                  </a:txBody>
-                  <a:tcPr/>
-                </a:tc>
-                <a:tc>
-                  <a:txBody>
-                    <a:bodyPr/>
-                    <a:lstStyle/>
-                    <a:p>
-                      <a:pPr>
-                        <a:defRPr sz="1100"/>
-                      </a:pPr>
-                      <a:r>
-                        <a:t>1.15</a:t>
-                      </a:r>
-                    </a:p>
-                  </a:txBody>
-                  <a:tcPr/>
-                </a:tc>
-                <a:tc>
-                  <a:txBody>
-                    <a:bodyPr/>
-                    <a:lstStyle/>
-                    <a:p>
-                      <a:pPr>
-                        <a:defRPr sz="1100"/>
-                      </a:pPr>
-                      <a:r>
-                        <a:t>0.11</a:t>
+                        <a:t>21.48</a:t>
+                      </a:r>
+                    </a:p>
+                  </a:txBody>
+                  <a:tcPr/>
+                </a:tc>
+                <a:tc>
+                  <a:txBody>
+                    <a:bodyPr/>
+                    <a:lstStyle/>
+                    <a:p>
+                      <a:pPr>
+                        <a:defRPr sz="1100"/>
+                      </a:pPr>
+                      <a:r>
+                        <a:t>1.07</a:t>
+                      </a:r>
+                    </a:p>
+                  </a:txBody>
+                  <a:tcPr/>
+                </a:tc>
+                <a:tc>
+                  <a:txBody>
+                    <a:bodyPr/>
+                    <a:lstStyle/>
+                    <a:p>
+                      <a:pPr>
+                        <a:defRPr sz="1100"/>
+                      </a:pPr>
+                      <a:r>
+                        <a:t>0.04</a:t>
                       </a:r>
                     </a:p>
                   </a:txBody>
@@ -4741,37 +4741,37 @@
                         <a:defRPr sz="1100"/>
                       </a:pPr>
                       <a:r>
-                        <a:t>186.73</a:t>
-                      </a:r>
-                    </a:p>
-                  </a:txBody>
-                  <a:tcPr/>
-                </a:tc>
-                <a:tc>
-                  <a:txBody>
-                    <a:bodyPr/>
-                    <a:lstStyle/>
-                    <a:p>
-                      <a:pPr>
-                        <a:defRPr sz="1100"/>
-                      </a:pPr>
-                      <a:r>
-                        <a:t>18.67</a:t>
-                      </a:r>
-                    </a:p>
-                  </a:txBody>
-                  <a:tcPr/>
-                </a:tc>
-                <a:tc>
-                  <a:txBody>
-                    <a:bodyPr/>
-                    <a:lstStyle/>
-                    <a:p>
-                      <a:pPr>
-                        <a:defRPr sz="1100"/>
-                      </a:pPr>
-                      <a:r>
-                        <a:t>0.91</a:t>
+                        <a:t>186.8</a:t>
+                      </a:r>
+                    </a:p>
+                  </a:txBody>
+                  <a:tcPr/>
+                </a:tc>
+                <a:tc>
+                  <a:txBody>
+                    <a:bodyPr/>
+                    <a:lstStyle/>
+                    <a:p>
+                      <a:pPr>
+                        <a:defRPr sz="1100"/>
+                      </a:pPr>
+                      <a:r>
+                        <a:t>18.68</a:t>
+                      </a:r>
+                    </a:p>
+                  </a:txBody>
+                  <a:tcPr/>
+                </a:tc>
+                <a:tc>
+                  <a:txBody>
+                    <a:bodyPr/>
+                    <a:lstStyle/>
+                    <a:p>
+                      <a:pPr>
+                        <a:defRPr sz="1100"/>
+                      </a:pPr>
+                      <a:r>
+                        <a:t>0.92</a:t>
                       </a:r>
                     </a:p>
                   </a:txBody>
@@ -4833,37 +4833,37 @@
                         <a:defRPr sz="1100"/>
                       </a:pPr>
                       <a:r>
-                        <a:t>167.96</a:t>
-                      </a:r>
-                    </a:p>
-                  </a:txBody>
-                  <a:tcPr/>
-                </a:tc>
-                <a:tc>
-                  <a:txBody>
-                    <a:bodyPr/>
-                    <a:lstStyle/>
-                    <a:p>
-                      <a:pPr>
-                        <a:defRPr sz="1100"/>
-                      </a:pPr>
-                      <a:r>
-                        <a:t>21.83</a:t>
-                      </a:r>
-                    </a:p>
-                  </a:txBody>
-                  <a:tcPr/>
-                </a:tc>
-                <a:tc>
-                  <a:txBody>
-                    <a:bodyPr/>
-                    <a:lstStyle/>
-                    <a:p>
-                      <a:pPr>
-                        <a:defRPr sz="1100"/>
-                      </a:pPr>
-                      <a:r>
-                        <a:t>1.28</a:t>
+                        <a:t>167.85</a:t>
+                      </a:r>
+                    </a:p>
+                  </a:txBody>
+                  <a:tcPr/>
+                </a:tc>
+                <a:tc>
+                  <a:txBody>
+                    <a:bodyPr/>
+                    <a:lstStyle/>
+                    <a:p>
+                      <a:pPr>
+                        <a:defRPr sz="1100"/>
+                      </a:pPr>
+                      <a:r>
+                        <a:t>21.82</a:t>
+                      </a:r>
+                    </a:p>
+                  </a:txBody>
+                  <a:tcPr/>
+                </a:tc>
+                <a:tc>
+                  <a:txBody>
+                    <a:bodyPr/>
+                    <a:lstStyle/>
+                    <a:p>
+                      <a:pPr>
+                        <a:defRPr sz="1100"/>
+                      </a:pPr>
+                      <a:r>
+                        <a:t>1.27</a:t>
                       </a:r>
                     </a:p>
                   </a:txBody>
@@ -4925,37 +4925,37 @@
                         <a:defRPr sz="1100"/>
                       </a:pPr>
                       <a:r>
-                        <a:t>45.13</a:t>
-                      </a:r>
-                    </a:p>
-                  </a:txBody>
-                  <a:tcPr/>
-                </a:tc>
-                <a:tc>
-                  <a:txBody>
-                    <a:bodyPr/>
-                    <a:lstStyle/>
-                    <a:p>
-                      <a:pPr>
-                        <a:defRPr sz="1100"/>
-                      </a:pPr>
-                      <a:r>
-                        <a:t>4.51</a:t>
-                      </a:r>
-                    </a:p>
-                  </a:txBody>
-                  <a:tcPr/>
-                </a:tc>
-                <a:tc>
-                  <a:txBody>
-                    <a:bodyPr/>
-                    <a:lstStyle/>
-                    <a:p>
-                      <a:pPr>
-                        <a:defRPr sz="1100"/>
-                      </a:pPr>
-                      <a:r>
-                        <a:t>0.25</a:t>
+                        <a:t>44.46</a:t>
+                      </a:r>
+                    </a:p>
+                  </a:txBody>
+                  <a:tcPr/>
+                </a:tc>
+                <a:tc>
+                  <a:txBody>
+                    <a:bodyPr/>
+                    <a:lstStyle/>
+                    <a:p>
+                      <a:pPr>
+                        <a:defRPr sz="1100"/>
+                      </a:pPr>
+                      <a:r>
+                        <a:t>4.45</a:t>
+                      </a:r>
+                    </a:p>
+                  </a:txBody>
+                  <a:tcPr/>
+                </a:tc>
+                <a:tc>
+                  <a:txBody>
+                    <a:bodyPr/>
+                    <a:lstStyle/>
+                    <a:p>
+                      <a:pPr>
+                        <a:defRPr sz="1100"/>
+                      </a:pPr>
+                      <a:r>
+                        <a:t>0.18</a:t>
                       </a:r>
                     </a:p>
                   </a:txBody>
@@ -5017,37 +5017,37 @@
                         <a:defRPr sz="1100"/>
                       </a:pPr>
                       <a:r>
-                        <a:t>42.96</a:t>
-                      </a:r>
-                    </a:p>
-                  </a:txBody>
-                  <a:tcPr/>
-                </a:tc>
-                <a:tc>
-                  <a:txBody>
-                    <a:bodyPr/>
-                    <a:lstStyle/>
-                    <a:p>
-                      <a:pPr>
-                        <a:defRPr sz="1100"/>
-                      </a:pPr>
-                      <a:r>
-                        <a:t>17.18</a:t>
-                      </a:r>
-                    </a:p>
-                  </a:txBody>
-                  <a:tcPr/>
-                </a:tc>
-                <a:tc>
-                  <a:txBody>
-                    <a:bodyPr/>
-                    <a:lstStyle/>
-                    <a:p>
-                      <a:pPr>
-                        <a:defRPr sz="1100"/>
-                      </a:pPr>
-                      <a:r>
-                        <a:t>-0.24</a:t>
+                        <a:t>42.4</a:t>
+                      </a:r>
+                    </a:p>
+                  </a:txBody>
+                  <a:tcPr/>
+                </a:tc>
+                <a:tc>
+                  <a:txBody>
+                    <a:bodyPr/>
+                    <a:lstStyle/>
+                    <a:p>
+                      <a:pPr>
+                        <a:defRPr sz="1100"/>
+                      </a:pPr>
+                      <a:r>
+                        <a:t>16.96</a:t>
+                      </a:r>
+                    </a:p>
+                  </a:txBody>
+                  <a:tcPr/>
+                </a:tc>
+                <a:tc>
+                  <a:txBody>
+                    <a:bodyPr/>
+                    <a:lstStyle/>
+                    <a:p>
+                      <a:pPr>
+                        <a:defRPr sz="1100"/>
+                      </a:pPr>
+                      <a:r>
+                        <a:t>-0.46</a:t>
                       </a:r>
                     </a:p>
                   </a:txBody>
@@ -5157,7 +5157,7 @@
               <a:defRPr sz="1500"/>
             </a:pPr>
             <a:r>
-              <a:t>招商银行（600036，银行）：综合66.0分；基本面优秀，具备中长期配置价值；中期趋势向上，可关注/持有。</a:t>
+              <a:t>立讯精密（002475，消费电子）：综合70.0分；基本面优秀，具备中长期配置价值；趋势中性，观望。</a:t>
             </a:r>
           </a:p>
           <a:p>
@@ -5165,7 +5165,7 @@
               <a:defRPr sz="1500"/>
             </a:pPr>
             <a:r>
-              <a:t>长江电力（600900，电力）：综合65.0分；基本面优秀，具备中长期配置价值；趋势中性，观望。</a:t>
+              <a:t>招商银行（600036，银行）：综合64.0分；基本面优秀，具备中长期配置价值；趋势中性，观望。</a:t>
             </a:r>
           </a:p>
         </p:txBody>

--- a/outputs/12_中期路演.pptx
+++ b/outputs/12_中期路演.pptx
@@ -3167,7 +3167,7 @@
               <a:defRPr sz="1500"/>
             </a:pPr>
             <a:r>
-              <a:t>数据截止：2026-09-22</a:t>
+              <a:t>数据截止：2026-09-23</a:t>
             </a:r>
           </a:p>
         </p:txBody>
@@ -3255,7 +3255,7 @@
               <a:defRPr sz="1500"/>
             </a:pPr>
             <a:r>
-              <a:t>当前总资产：490.55万元</a:t>
+              <a:t>当前总资产：487.42万元</a:t>
             </a:r>
           </a:p>
           <a:p>
@@ -3263,7 +3263,7 @@
               <a:defRPr sz="1500"/>
             </a:pPr>
             <a:r>
-              <a:t>累计收益率：-1.89%</a:t>
+              <a:t>累计收益率：-2.52%</a:t>
             </a:r>
           </a:p>
           <a:p>
@@ -3271,7 +3271,7 @@
               <a:defRPr sz="1500"/>
             </a:pPr>
             <a:r>
-              <a:t>同期沪深300：-0.08%</a:t>
+              <a:t>同期沪深300：-0.68%</a:t>
             </a:r>
           </a:p>
           <a:p>
@@ -3279,7 +3279,7 @@
               <a:defRPr sz="1500"/>
             </a:pPr>
             <a:r>
-              <a:t>现金：96.66万元（19.7%）</a:t>
+              <a:t>现金：96.66万元（19.8%）</a:t>
             </a:r>
           </a:p>
           <a:p>
@@ -3821,37 +3821,37 @@
                         <a:defRPr sz="1100"/>
                       </a:pPr>
                       <a:r>
-                        <a:t>4.613</a:t>
-                      </a:r>
-                    </a:p>
-                  </a:txBody>
-                  <a:tcPr/>
-                </a:tc>
-                <a:tc>
-                  <a:txBody>
-                    <a:bodyPr/>
-                    <a:lstStyle/>
-                    <a:p>
-                      <a:pPr>
-                        <a:defRPr sz="1100"/>
-                      </a:pPr>
-                      <a:r>
-                        <a:t>119.43</a:t>
-                      </a:r>
-                    </a:p>
-                  </a:txBody>
-                  <a:tcPr/>
-                </a:tc>
-                <a:tc>
-                  <a:txBody>
-                    <a:bodyPr/>
-                    <a:lstStyle/>
-                    <a:p>
-                      <a:pPr>
-                        <a:defRPr sz="1100"/>
-                      </a:pPr>
-                      <a:r>
-                        <a:t>-0.72</a:t>
+                        <a:t>4.59</a:t>
+                      </a:r>
+                    </a:p>
+                  </a:txBody>
+                  <a:tcPr/>
+                </a:tc>
+                <a:tc>
+                  <a:txBody>
+                    <a:bodyPr/>
+                    <a:lstStyle/>
+                    <a:p>
+                      <a:pPr>
+                        <a:defRPr sz="1100"/>
+                      </a:pPr>
+                      <a:r>
+                        <a:t>118.84</a:t>
+                      </a:r>
+                    </a:p>
+                  </a:txBody>
+                  <a:tcPr/>
+                </a:tc>
+                <a:tc>
+                  <a:txBody>
+                    <a:bodyPr/>
+                    <a:lstStyle/>
+                    <a:p>
+                      <a:pPr>
+                        <a:defRPr sz="1100"/>
+                      </a:pPr>
+                      <a:r>
+                        <a:t>-1.32</a:t>
                       </a:r>
                     </a:p>
                   </a:txBody>
@@ -3913,37 +3913,37 @@
                         <a:defRPr sz="1100"/>
                       </a:pPr>
                       <a:r>
-                        <a:t>54.46</a:t>
-                      </a:r>
-                    </a:p>
-                  </a:txBody>
-                  <a:tcPr/>
-                </a:tc>
-                <a:tc>
-                  <a:txBody>
-                    <a:bodyPr/>
-                    <a:lstStyle/>
-                    <a:p>
-                      <a:pPr>
-                        <a:defRPr sz="1100"/>
-                      </a:pPr>
-                      <a:r>
-                        <a:t>99.12</a:t>
-                      </a:r>
-                    </a:p>
-                  </a:txBody>
-                  <a:tcPr/>
-                </a:tc>
-                <a:tc>
-                  <a:txBody>
-                    <a:bodyPr/>
-                    <a:lstStyle/>
-                    <a:p>
-                      <a:pPr>
-                        <a:defRPr sz="1100"/>
-                      </a:pPr>
-                      <a:r>
-                        <a:t>-3.02</a:t>
+                        <a:t>53.87</a:t>
+                      </a:r>
+                    </a:p>
+                  </a:txBody>
+                  <a:tcPr/>
+                </a:tc>
+                <a:tc>
+                  <a:txBody>
+                    <a:bodyPr/>
+                    <a:lstStyle/>
+                    <a:p>
+                      <a:pPr>
+                        <a:defRPr sz="1100"/>
+                      </a:pPr>
+                      <a:r>
+                        <a:t>98.04</a:t>
+                      </a:r>
+                    </a:p>
+                  </a:txBody>
+                  <a:tcPr/>
+                </a:tc>
+                <a:tc>
+                  <a:txBody>
+                    <a:bodyPr/>
+                    <a:lstStyle/>
+                    <a:p>
+                      <a:pPr>
+                        <a:defRPr sz="1100"/>
+                      </a:pPr>
+                      <a:r>
+                        <a:t>-4.09</a:t>
                       </a:r>
                     </a:p>
                   </a:txBody>
@@ -4097,37 +4097,37 @@
                         <a:defRPr sz="1100"/>
                       </a:pPr>
                       <a:r>
-                        <a:t>28.02</a:t>
-                      </a:r>
-                    </a:p>
-                  </a:txBody>
-                  <a:tcPr/>
-                </a:tc>
-                <a:tc>
-                  <a:txBody>
-                    <a:bodyPr/>
-                    <a:lstStyle/>
-                    <a:p>
-                      <a:pPr>
-                        <a:defRPr sz="1100"/>
-                      </a:pPr>
-                      <a:r>
-                        <a:t>26.06</a:t>
-                      </a:r>
-                    </a:p>
-                  </a:txBody>
-                  <a:tcPr/>
-                </a:tc>
-                <a:tc>
-                  <a:txBody>
-                    <a:bodyPr/>
-                    <a:lstStyle/>
-                    <a:p>
-                      <a:pPr>
-                        <a:defRPr sz="1100"/>
-                      </a:pPr>
-                      <a:r>
-                        <a:t>0.13</a:t>
+                        <a:t>28.08</a:t>
+                      </a:r>
+                    </a:p>
+                  </a:txBody>
+                  <a:tcPr/>
+                </a:tc>
+                <a:tc>
+                  <a:txBody>
+                    <a:bodyPr/>
+                    <a:lstStyle/>
+                    <a:p>
+                      <a:pPr>
+                        <a:defRPr sz="1100"/>
+                      </a:pPr>
+                      <a:r>
+                        <a:t>26.11</a:t>
+                      </a:r>
+                    </a:p>
+                  </a:txBody>
+                  <a:tcPr/>
+                </a:tc>
+                <a:tc>
+                  <a:txBody>
+                    <a:bodyPr/>
+                    <a:lstStyle/>
+                    <a:p>
+                      <a:pPr>
+                        <a:defRPr sz="1100"/>
+                      </a:pPr>
+                      <a:r>
+                        <a:t>0.18</a:t>
                       </a:r>
                     </a:p>
                   </a:txBody>
@@ -4189,37 +4189,37 @@
                         <a:defRPr sz="1100"/>
                       </a:pPr>
                       <a:r>
-                        <a:t>10.95</a:t>
-                      </a:r>
-                    </a:p>
-                  </a:txBody>
-                  <a:tcPr/>
-                </a:tc>
-                <a:tc>
-                  <a:txBody>
-                    <a:bodyPr/>
-                    <a:lstStyle/>
-                    <a:p>
-                      <a:pPr>
-                        <a:defRPr sz="1100"/>
-                      </a:pPr>
-                      <a:r>
-                        <a:t>10.4</a:t>
-                      </a:r>
-                    </a:p>
-                  </a:txBody>
-                  <a:tcPr/>
-                </a:tc>
-                <a:tc>
-                  <a:txBody>
-                    <a:bodyPr/>
-                    <a:lstStyle/>
-                    <a:p>
-                      <a:pPr>
-                        <a:defRPr sz="1100"/>
-                      </a:pPr>
-                      <a:r>
-                        <a:t>0.45</a:t>
+                        <a:t>10.87</a:t>
+                      </a:r>
+                    </a:p>
+                  </a:txBody>
+                  <a:tcPr/>
+                </a:tc>
+                <a:tc>
+                  <a:txBody>
+                    <a:bodyPr/>
+                    <a:lstStyle/>
+                    <a:p>
+                      <a:pPr>
+                        <a:defRPr sz="1100"/>
+                      </a:pPr>
+                      <a:r>
+                        <a:t>10.33</a:t>
+                      </a:r>
+                    </a:p>
+                  </a:txBody>
+                  <a:tcPr/>
+                </a:tc>
+                <a:tc>
+                  <a:txBody>
+                    <a:bodyPr/>
+                    <a:lstStyle/>
+                    <a:p>
+                      <a:pPr>
+                        <a:defRPr sz="1100"/>
+                      </a:pPr>
+                      <a:r>
+                        <a:t>0.38</a:t>
                       </a:r>
                     </a:p>
                   </a:txBody>
@@ -4281,37 +4281,37 @@
                         <a:defRPr sz="1100"/>
                       </a:pPr>
                       <a:r>
-                        <a:t>16.89</a:t>
-                      </a:r>
-                    </a:p>
-                  </a:txBody>
-                  <a:tcPr/>
-                </a:tc>
-                <a:tc>
-                  <a:txBody>
-                    <a:bodyPr/>
-                    <a:lstStyle/>
-                    <a:p>
-                      <a:pPr>
-                        <a:defRPr sz="1100"/>
-                      </a:pPr>
-                      <a:r>
-                        <a:t>8.45</a:t>
-                      </a:r>
-                    </a:p>
-                  </a:txBody>
-                  <a:tcPr/>
-                </a:tc>
-                <a:tc>
-                  <a:txBody>
-                    <a:bodyPr/>
-                    <a:lstStyle/>
-                    <a:p>
-                      <a:pPr>
-                        <a:defRPr sz="1100"/>
-                      </a:pPr>
-                      <a:r>
-                        <a:t>-0.31</a:t>
+                        <a:t>16.38</a:t>
+                      </a:r>
+                    </a:p>
+                  </a:txBody>
+                  <a:tcPr/>
+                </a:tc>
+                <a:tc>
+                  <a:txBody>
+                    <a:bodyPr/>
+                    <a:lstStyle/>
+                    <a:p>
+                      <a:pPr>
+                        <a:defRPr sz="1100"/>
+                      </a:pPr>
+                      <a:r>
+                        <a:t>8.19</a:t>
+                      </a:r>
+                    </a:p>
+                  </a:txBody>
+                  <a:tcPr/>
+                </a:tc>
+                <a:tc>
+                  <a:txBody>
+                    <a:bodyPr/>
+                    <a:lstStyle/>
+                    <a:p>
+                      <a:pPr>
+                        <a:defRPr sz="1100"/>
+                      </a:pPr>
+                      <a:r>
+                        <a:t>-0.57</a:t>
                       </a:r>
                     </a:p>
                   </a:txBody>
@@ -4373,37 +4373,37 @@
                         <a:defRPr sz="1100"/>
                       </a:pPr>
                       <a:r>
-                        <a:t>37.72</a:t>
-                      </a:r>
-                    </a:p>
-                  </a:txBody>
-                  <a:tcPr/>
-                </a:tc>
-                <a:tc>
-                  <a:txBody>
-                    <a:bodyPr/>
-                    <a:lstStyle/>
-                    <a:p>
-                      <a:pPr>
-                        <a:defRPr sz="1100"/>
-                      </a:pPr>
-                      <a:r>
-                        <a:t>23.01</a:t>
-                      </a:r>
-                    </a:p>
-                  </a:txBody>
-                  <a:tcPr/>
-                </a:tc>
-                <a:tc>
-                  <a:txBody>
-                    <a:bodyPr/>
-                    <a:lstStyle/>
-                    <a:p>
-                      <a:pPr>
-                        <a:defRPr sz="1100"/>
-                      </a:pPr>
-                      <a:r>
-                        <a:t>1.13</a:t>
+                        <a:t>36.52</a:t>
+                      </a:r>
+                    </a:p>
+                  </a:txBody>
+                  <a:tcPr/>
+                </a:tc>
+                <a:tc>
+                  <a:txBody>
+                    <a:bodyPr/>
+                    <a:lstStyle/>
+                    <a:p>
+                      <a:pPr>
+                        <a:defRPr sz="1100"/>
+                      </a:pPr>
+                      <a:r>
+                        <a:t>22.28</a:t>
+                      </a:r>
+                    </a:p>
+                  </a:txBody>
+                  <a:tcPr/>
+                </a:tc>
+                <a:tc>
+                  <a:txBody>
+                    <a:bodyPr/>
+                    <a:lstStyle/>
+                    <a:p>
+                      <a:pPr>
+                        <a:defRPr sz="1100"/>
+                      </a:pPr>
+                      <a:r>
+                        <a:t>0.4</a:t>
                       </a:r>
                     </a:p>
                   </a:txBody>
@@ -4465,37 +4465,37 @@
                         <a:defRPr sz="1100"/>
                       </a:pPr>
                       <a:r>
-                        <a:t>151.13</a:t>
-                      </a:r>
-                    </a:p>
-                  </a:txBody>
-                  <a:tcPr/>
-                </a:tc>
-                <a:tc>
-                  <a:txBody>
-                    <a:bodyPr/>
-                    <a:lstStyle/>
-                    <a:p>
-                      <a:pPr>
-                        <a:defRPr sz="1100"/>
-                      </a:pPr>
-                      <a:r>
-                        <a:t>7.56</a:t>
-                      </a:r>
-                    </a:p>
-                  </a:txBody>
-                  <a:tcPr/>
-                </a:tc>
-                <a:tc>
-                  <a:txBody>
-                    <a:bodyPr/>
-                    <a:lstStyle/>
-                    <a:p>
-                      <a:pPr>
-                        <a:defRPr sz="1100"/>
-                      </a:pPr>
-                      <a:r>
-                        <a:t>0.72</a:t>
+                        <a:t>146.43</a:t>
+                      </a:r>
+                    </a:p>
+                  </a:txBody>
+                  <a:tcPr/>
+                </a:tc>
+                <a:tc>
+                  <a:txBody>
+                    <a:bodyPr/>
+                    <a:lstStyle/>
+                    <a:p>
+                      <a:pPr>
+                        <a:defRPr sz="1100"/>
+                      </a:pPr>
+                      <a:r>
+                        <a:t>7.32</a:t>
+                      </a:r>
+                    </a:p>
+                  </a:txBody>
+                  <a:tcPr/>
+                </a:tc>
+                <a:tc>
+                  <a:txBody>
+                    <a:bodyPr/>
+                    <a:lstStyle/>
+                    <a:p>
+                      <a:pPr>
+                        <a:defRPr sz="1100"/>
+                      </a:pPr>
+                      <a:r>
+                        <a:t>0.49</a:t>
                       </a:r>
                     </a:p>
                   </a:txBody>
@@ -4557,37 +4557,37 @@
                         <a:defRPr sz="1100"/>
                       </a:pPr>
                       <a:r>
-                        <a:t>9.08</a:t>
-                      </a:r>
-                    </a:p>
-                  </a:txBody>
-                  <a:tcPr/>
-                </a:tc>
-                <a:tc>
-                  <a:txBody>
-                    <a:bodyPr/>
-                    <a:lstStyle/>
-                    <a:p>
-                      <a:pPr>
-                        <a:defRPr sz="1100"/>
-                      </a:pPr>
-                      <a:r>
-                        <a:t>4.54</a:t>
-                      </a:r>
-                    </a:p>
-                  </a:txBody>
-                  <a:tcPr/>
-                </a:tc>
-                <a:tc>
-                  <a:txBody>
-                    <a:bodyPr/>
-                    <a:lstStyle/>
-                    <a:p>
-                      <a:pPr>
-                        <a:defRPr sz="1100"/>
-                      </a:pPr>
-                      <a:r>
-                        <a:t>0.88</a:t>
+                        <a:t>9.04</a:t>
+                      </a:r>
+                    </a:p>
+                  </a:txBody>
+                  <a:tcPr/>
+                </a:tc>
+                <a:tc>
+                  <a:txBody>
+                    <a:bodyPr/>
+                    <a:lstStyle/>
+                    <a:p>
+                      <a:pPr>
+                        <a:defRPr sz="1100"/>
+                      </a:pPr>
+                      <a:r>
+                        <a:t>4.52</a:t>
+                      </a:r>
+                    </a:p>
+                  </a:txBody>
+                  <a:tcPr/>
+                </a:tc>
+                <a:tc>
+                  <a:txBody>
+                    <a:bodyPr/>
+                    <a:lstStyle/>
+                    <a:p>
+                      <a:pPr>
+                        <a:defRPr sz="1100"/>
+                      </a:pPr>
+                      <a:r>
+                        <a:t>0.85</a:t>
                       </a:r>
                     </a:p>
                   </a:txBody>
@@ -4649,37 +4649,37 @@
                         <a:defRPr sz="1100"/>
                       </a:pPr>
                       <a:r>
-                        <a:t>21.48</a:t>
-                      </a:r>
-                    </a:p>
-                  </a:txBody>
-                  <a:tcPr/>
-                </a:tc>
-                <a:tc>
-                  <a:txBody>
-                    <a:bodyPr/>
-                    <a:lstStyle/>
-                    <a:p>
-                      <a:pPr>
-                        <a:defRPr sz="1100"/>
-                      </a:pPr>
-                      <a:r>
-                        <a:t>1.07</a:t>
-                      </a:r>
-                    </a:p>
-                  </a:txBody>
-                  <a:tcPr/>
-                </a:tc>
-                <a:tc>
-                  <a:txBody>
-                    <a:bodyPr/>
-                    <a:lstStyle/>
-                    <a:p>
-                      <a:pPr>
-                        <a:defRPr sz="1100"/>
-                      </a:pPr>
-                      <a:r>
-                        <a:t>0.04</a:t>
+                        <a:t>20.78</a:t>
+                      </a:r>
+                    </a:p>
+                  </a:txBody>
+                  <a:tcPr/>
+                </a:tc>
+                <a:tc>
+                  <a:txBody>
+                    <a:bodyPr/>
+                    <a:lstStyle/>
+                    <a:p>
+                      <a:pPr>
+                        <a:defRPr sz="1100"/>
+                      </a:pPr>
+                      <a:r>
+                        <a:t>1.04</a:t>
+                      </a:r>
+                    </a:p>
+                  </a:txBody>
+                  <a:tcPr/>
+                </a:tc>
+                <a:tc>
+                  <a:txBody>
+                    <a:bodyPr/>
+                    <a:lstStyle/>
+                    <a:p>
+                      <a:pPr>
+                        <a:defRPr sz="1100"/>
+                      </a:pPr>
+                      <a:r>
+                        <a:t>0.0</a:t>
                       </a:r>
                     </a:p>
                   </a:txBody>
@@ -4741,37 +4741,37 @@
                         <a:defRPr sz="1100"/>
                       </a:pPr>
                       <a:r>
-                        <a:t>186.8</a:t>
-                      </a:r>
-                    </a:p>
-                  </a:txBody>
-                  <a:tcPr/>
-                </a:tc>
-                <a:tc>
-                  <a:txBody>
-                    <a:bodyPr/>
-                    <a:lstStyle/>
-                    <a:p>
-                      <a:pPr>
-                        <a:defRPr sz="1100"/>
-                      </a:pPr>
-                      <a:r>
-                        <a:t>18.68</a:t>
-                      </a:r>
-                    </a:p>
-                  </a:txBody>
-                  <a:tcPr/>
-                </a:tc>
-                <a:tc>
-                  <a:txBody>
-                    <a:bodyPr/>
-                    <a:lstStyle/>
-                    <a:p>
-                      <a:pPr>
-                        <a:defRPr sz="1100"/>
-                      </a:pPr>
-                      <a:r>
-                        <a:t>0.92</a:t>
+                        <a:t>184.06</a:t>
+                      </a:r>
+                    </a:p>
+                  </a:txBody>
+                  <a:tcPr/>
+                </a:tc>
+                <a:tc>
+                  <a:txBody>
+                    <a:bodyPr/>
+                    <a:lstStyle/>
+                    <a:p>
+                      <a:pPr>
+                        <a:defRPr sz="1100"/>
+                      </a:pPr>
+                      <a:r>
+                        <a:t>18.41</a:t>
+                      </a:r>
+                    </a:p>
+                  </a:txBody>
+                  <a:tcPr/>
+                </a:tc>
+                <a:tc>
+                  <a:txBody>
+                    <a:bodyPr/>
+                    <a:lstStyle/>
+                    <a:p>
+                      <a:pPr>
+                        <a:defRPr sz="1100"/>
+                      </a:pPr>
+                      <a:r>
+                        <a:t>0.65</a:t>
                       </a:r>
                     </a:p>
                   </a:txBody>
@@ -4833,37 +4833,37 @@
                         <a:defRPr sz="1100"/>
                       </a:pPr>
                       <a:r>
-                        <a:t>167.85</a:t>
-                      </a:r>
-                    </a:p>
-                  </a:txBody>
-                  <a:tcPr/>
-                </a:tc>
-                <a:tc>
-                  <a:txBody>
-                    <a:bodyPr/>
-                    <a:lstStyle/>
-                    <a:p>
-                      <a:pPr>
-                        <a:defRPr sz="1100"/>
-                      </a:pPr>
-                      <a:r>
-                        <a:t>21.82</a:t>
-                      </a:r>
-                    </a:p>
-                  </a:txBody>
-                  <a:tcPr/>
-                </a:tc>
-                <a:tc>
-                  <a:txBody>
-                    <a:bodyPr/>
-                    <a:lstStyle/>
-                    <a:p>
-                      <a:pPr>
-                        <a:defRPr sz="1100"/>
-                      </a:pPr>
-                      <a:r>
-                        <a:t>1.27</a:t>
+                        <a:t>167.95</a:t>
+                      </a:r>
+                    </a:p>
+                  </a:txBody>
+                  <a:tcPr/>
+                </a:tc>
+                <a:tc>
+                  <a:txBody>
+                    <a:bodyPr/>
+                    <a:lstStyle/>
+                    <a:p>
+                      <a:pPr>
+                        <a:defRPr sz="1100"/>
+                      </a:pPr>
+                      <a:r>
+                        <a:t>21.83</a:t>
+                      </a:r>
+                    </a:p>
+                  </a:txBody>
+                  <a:tcPr/>
+                </a:tc>
+                <a:tc>
+                  <a:txBody>
+                    <a:bodyPr/>
+                    <a:lstStyle/>
+                    <a:p>
+                      <a:pPr>
+                        <a:defRPr sz="1100"/>
+                      </a:pPr>
+                      <a:r>
+                        <a:t>1.28</a:t>
                       </a:r>
                     </a:p>
                   </a:txBody>
@@ -4925,37 +4925,37 @@
                         <a:defRPr sz="1100"/>
                       </a:pPr>
                       <a:r>
-                        <a:t>44.46</a:t>
-                      </a:r>
-                    </a:p>
-                  </a:txBody>
-                  <a:tcPr/>
-                </a:tc>
-                <a:tc>
-                  <a:txBody>
-                    <a:bodyPr/>
-                    <a:lstStyle/>
-                    <a:p>
-                      <a:pPr>
-                        <a:defRPr sz="1100"/>
-                      </a:pPr>
-                      <a:r>
-                        <a:t>4.45</a:t>
-                      </a:r>
-                    </a:p>
-                  </a:txBody>
-                  <a:tcPr/>
-                </a:tc>
-                <a:tc>
-                  <a:txBody>
-                    <a:bodyPr/>
-                    <a:lstStyle/>
-                    <a:p>
-                      <a:pPr>
-                        <a:defRPr sz="1100"/>
-                      </a:pPr>
-                      <a:r>
-                        <a:t>0.18</a:t>
+                        <a:t>45.02</a:t>
+                      </a:r>
+                    </a:p>
+                  </a:txBody>
+                  <a:tcPr/>
+                </a:tc>
+                <a:tc>
+                  <a:txBody>
+                    <a:bodyPr/>
+                    <a:lstStyle/>
+                    <a:p>
+                      <a:pPr>
+                        <a:defRPr sz="1100"/>
+                      </a:pPr>
+                      <a:r>
+                        <a:t>4.5</a:t>
+                      </a:r>
+                    </a:p>
+                  </a:txBody>
+                  <a:tcPr/>
+                </a:tc>
+                <a:tc>
+                  <a:txBody>
+                    <a:bodyPr/>
+                    <a:lstStyle/>
+                    <a:p>
+                      <a:pPr>
+                        <a:defRPr sz="1100"/>
+                      </a:pPr>
+                      <a:r>
+                        <a:t>0.24</a:t>
                       </a:r>
                     </a:p>
                   </a:txBody>
@@ -5017,37 +5017,37 @@
                         <a:defRPr sz="1100"/>
                       </a:pPr>
                       <a:r>
-                        <a:t>42.4</a:t>
-                      </a:r>
-                    </a:p>
-                  </a:txBody>
-                  <a:tcPr/>
-                </a:tc>
-                <a:tc>
-                  <a:txBody>
-                    <a:bodyPr/>
-                    <a:lstStyle/>
-                    <a:p>
-                      <a:pPr>
-                        <a:defRPr sz="1100"/>
-                      </a:pPr>
-                      <a:r>
-                        <a:t>16.96</a:t>
-                      </a:r>
-                    </a:p>
-                  </a:txBody>
-                  <a:tcPr/>
-                </a:tc>
-                <a:tc>
-                  <a:txBody>
-                    <a:bodyPr/>
-                    <a:lstStyle/>
-                    <a:p>
-                      <a:pPr>
-                        <a:defRPr sz="1100"/>
-                      </a:pPr>
-                      <a:r>
-                        <a:t>-0.46</a:t>
+                        <a:t>42.5</a:t>
+                      </a:r>
+                    </a:p>
+                  </a:txBody>
+                  <a:tcPr/>
+                </a:tc>
+                <a:tc>
+                  <a:txBody>
+                    <a:bodyPr/>
+                    <a:lstStyle/>
+                    <a:p>
+                      <a:pPr>
+                        <a:defRPr sz="1100"/>
+                      </a:pPr>
+                      <a:r>
+                        <a:t>17.0</a:t>
+                      </a:r>
+                    </a:p>
+                  </a:txBody>
+                  <a:tcPr/>
+                </a:tc>
+                <a:tc>
+                  <a:txBody>
+                    <a:bodyPr/>
+                    <a:lstStyle/>
+                    <a:p>
+                      <a:pPr>
+                        <a:defRPr sz="1100"/>
+                      </a:pPr>
+                      <a:r>
+                        <a:t>-0.42</a:t>
                       </a:r>
                     </a:p>
                   </a:txBody>
@@ -5133,7 +5133,7 @@
               <a:defRPr sz="1500"/>
             </a:pPr>
             <a:r>
-              <a:t>宁德时代（300750，新能源电池）：综合73.0分；基本面优秀，具备中长期配置价值；趋势中性，观望。</a:t>
+              <a:t>中国平安（601318，保险）：综合73.5分；基本面优秀，具备中长期配置价值；中期趋势向上，可关注/持有。</a:t>
             </a:r>
           </a:p>
           <a:p>
@@ -5149,7 +5149,7 @@
               <a:defRPr sz="1500"/>
             </a:pPr>
             <a:r>
-              <a:t>中国平安（601318，保险）：综合71.0分；基本面优秀，具备中长期配置价值；中期趋势向上，可关注/持有。</a:t>
+              <a:t>宁德时代（300750，新能源电池）：综合70.5分；基本面优秀，具备中长期配置价值；趋势中性，观望。</a:t>
             </a:r>
           </a:p>
           <a:p>
@@ -5157,7 +5157,7 @@
               <a:defRPr sz="1500"/>
             </a:pPr>
             <a:r>
-              <a:t>立讯精密（002475，消费电子）：综合70.0分；基本面优秀，具备中长期配置价值；趋势中性，观望。</a:t>
+              <a:t>立讯精密（002475，消费电子）：综合65.0分；基本面优秀，具备中长期配置价值；趋势中性，观望。</a:t>
             </a:r>
           </a:p>
           <a:p>

--- a/outputs/12_中期路演.pptx
+++ b/outputs/12_中期路演.pptx
@@ -3167,7 +3167,7 @@
               <a:defRPr sz="1500"/>
             </a:pPr>
             <a:r>
-              <a:t>数据截止：2026-09-23</a:t>
+              <a:t>数据截止：2026-09-24</a:t>
             </a:r>
           </a:p>
         </p:txBody>
@@ -3255,7 +3255,7 @@
               <a:defRPr sz="1500"/>
             </a:pPr>
             <a:r>
-              <a:t>当前总资产：487.42万元</a:t>
+              <a:t>当前总资产：480.46万元</a:t>
             </a:r>
           </a:p>
           <a:p>
@@ -3263,7 +3263,7 @@
               <a:defRPr sz="1500"/>
             </a:pPr>
             <a:r>
-              <a:t>累计收益率：-2.52%</a:t>
+              <a:t>累计收益率：-3.91%</a:t>
             </a:r>
           </a:p>
           <a:p>
@@ -3271,7 +3271,7 @@
               <a:defRPr sz="1500"/>
             </a:pPr>
             <a:r>
-              <a:t>同期沪深300：-0.68%</a:t>
+              <a:t>同期沪深300：-2.39%</a:t>
             </a:r>
           </a:p>
           <a:p>
@@ -3279,7 +3279,7 @@
               <a:defRPr sz="1500"/>
             </a:pPr>
             <a:r>
-              <a:t>现金：96.66万元（19.8%）</a:t>
+              <a:t>现金：96.66万元（20.1%）</a:t>
             </a:r>
           </a:p>
           <a:p>
@@ -3821,37 +3821,37 @@
                         <a:defRPr sz="1100"/>
                       </a:pPr>
                       <a:r>
-                        <a:t>4.59</a:t>
-                      </a:r>
-                    </a:p>
-                  </a:txBody>
-                  <a:tcPr/>
-                </a:tc>
-                <a:tc>
-                  <a:txBody>
-                    <a:bodyPr/>
-                    <a:lstStyle/>
-                    <a:p>
-                      <a:pPr>
-                        <a:defRPr sz="1100"/>
-                      </a:pPr>
-                      <a:r>
-                        <a:t>118.84</a:t>
-                      </a:r>
-                    </a:p>
-                  </a:txBody>
-                  <a:tcPr/>
-                </a:tc>
-                <a:tc>
-                  <a:txBody>
-                    <a:bodyPr/>
-                    <a:lstStyle/>
-                    <a:p>
-                      <a:pPr>
-                        <a:defRPr sz="1100"/>
-                      </a:pPr>
-                      <a:r>
-                        <a:t>-1.32</a:t>
+                        <a:t>4.515</a:t>
+                      </a:r>
+                    </a:p>
+                  </a:txBody>
+                  <a:tcPr/>
+                </a:tc>
+                <a:tc>
+                  <a:txBody>
+                    <a:bodyPr/>
+                    <a:lstStyle/>
+                    <a:p>
+                      <a:pPr>
+                        <a:defRPr sz="1100"/>
+                      </a:pPr>
+                      <a:r>
+                        <a:t>116.89</a:t>
+                      </a:r>
+                    </a:p>
+                  </a:txBody>
+                  <a:tcPr/>
+                </a:tc>
+                <a:tc>
+                  <a:txBody>
+                    <a:bodyPr/>
+                    <a:lstStyle/>
+                    <a:p>
+                      <a:pPr>
+                        <a:defRPr sz="1100"/>
+                      </a:pPr>
+                      <a:r>
+                        <a:t>-3.26</a:t>
                       </a:r>
                     </a:p>
                   </a:txBody>
@@ -3913,37 +3913,37 @@
                         <a:defRPr sz="1100"/>
                       </a:pPr>
                       <a:r>
-                        <a:t>53.87</a:t>
-                      </a:r>
-                    </a:p>
-                  </a:txBody>
-                  <a:tcPr/>
-                </a:tc>
-                <a:tc>
-                  <a:txBody>
-                    <a:bodyPr/>
-                    <a:lstStyle/>
-                    <a:p>
-                      <a:pPr>
-                        <a:defRPr sz="1100"/>
-                      </a:pPr>
-                      <a:r>
-                        <a:t>98.04</a:t>
-                      </a:r>
-                    </a:p>
-                  </a:txBody>
-                  <a:tcPr/>
-                </a:tc>
-                <a:tc>
-                  <a:txBody>
-                    <a:bodyPr/>
-                    <a:lstStyle/>
-                    <a:p>
-                      <a:pPr>
-                        <a:defRPr sz="1100"/>
-                      </a:pPr>
-                      <a:r>
-                        <a:t>-4.09</a:t>
+                        <a:t>53.25</a:t>
+                      </a:r>
+                    </a:p>
+                  </a:txBody>
+                  <a:tcPr/>
+                </a:tc>
+                <a:tc>
+                  <a:txBody>
+                    <a:bodyPr/>
+                    <a:lstStyle/>
+                    <a:p>
+                      <a:pPr>
+                        <a:defRPr sz="1100"/>
+                      </a:pPr>
+                      <a:r>
+                        <a:t>96.92</a:t>
+                      </a:r>
+                    </a:p>
+                  </a:txBody>
+                  <a:tcPr/>
+                </a:tc>
+                <a:tc>
+                  <a:txBody>
+                    <a:bodyPr/>
+                    <a:lstStyle/>
+                    <a:p>
+                      <a:pPr>
+                        <a:defRPr sz="1100"/>
+                      </a:pPr>
+                      <a:r>
+                        <a:t>-5.22</a:t>
                       </a:r>
                     </a:p>
                   </a:txBody>
@@ -4005,37 +4005,37 @@
                         <a:defRPr sz="1100"/>
                       </a:pPr>
                       <a:r>
-                        <a:t>31.41</a:t>
-                      </a:r>
-                    </a:p>
-                  </a:txBody>
-                  <a:tcPr/>
-                </a:tc>
-                <a:tc>
-                  <a:txBody>
-                    <a:bodyPr/>
-                    <a:lstStyle/>
-                    <a:p>
-                      <a:pPr>
-                        <a:defRPr sz="1100"/>
-                      </a:pPr>
-                      <a:r>
-                        <a:t>32.35</a:t>
-                      </a:r>
-                    </a:p>
-                  </a:txBody>
-                  <a:tcPr/>
-                </a:tc>
-                <a:tc>
-                  <a:txBody>
-                    <a:bodyPr/>
-                    <a:lstStyle/>
-                    <a:p>
-                      <a:pPr>
-                        <a:defRPr sz="1100"/>
-                      </a:pPr>
-                      <a:r>
-                        <a:t>0.0</a:t>
+                        <a:t>30.01</a:t>
+                      </a:r>
+                    </a:p>
+                  </a:txBody>
+                  <a:tcPr/>
+                </a:tc>
+                <a:tc>
+                  <a:txBody>
+                    <a:bodyPr/>
+                    <a:lstStyle/>
+                    <a:p>
+                      <a:pPr>
+                        <a:defRPr sz="1100"/>
+                      </a:pPr>
+                      <a:r>
+                        <a:t>30.91</a:t>
+                      </a:r>
+                    </a:p>
+                  </a:txBody>
+                  <a:tcPr/>
+                </a:tc>
+                <a:tc>
+                  <a:txBody>
+                    <a:bodyPr/>
+                    <a:lstStyle/>
+                    <a:p>
+                      <a:pPr>
+                        <a:defRPr sz="1100"/>
+                      </a:pPr>
+                      <a:r>
+                        <a:t>-1.44</a:t>
                       </a:r>
                     </a:p>
                   </a:txBody>
@@ -4097,37 +4097,37 @@
                         <a:defRPr sz="1100"/>
                       </a:pPr>
                       <a:r>
-                        <a:t>28.08</a:t>
-                      </a:r>
-                    </a:p>
-                  </a:txBody>
-                  <a:tcPr/>
-                </a:tc>
-                <a:tc>
-                  <a:txBody>
-                    <a:bodyPr/>
-                    <a:lstStyle/>
-                    <a:p>
-                      <a:pPr>
-                        <a:defRPr sz="1100"/>
-                      </a:pPr>
-                      <a:r>
-                        <a:t>26.11</a:t>
-                      </a:r>
-                    </a:p>
-                  </a:txBody>
-                  <a:tcPr/>
-                </a:tc>
-                <a:tc>
-                  <a:txBody>
-                    <a:bodyPr/>
-                    <a:lstStyle/>
-                    <a:p>
-                      <a:pPr>
-                        <a:defRPr sz="1100"/>
-                      </a:pPr>
-                      <a:r>
-                        <a:t>0.18</a:t>
+                        <a:t>28.36</a:t>
+                      </a:r>
+                    </a:p>
+                  </a:txBody>
+                  <a:tcPr/>
+                </a:tc>
+                <a:tc>
+                  <a:txBody>
+                    <a:bodyPr/>
+                    <a:lstStyle/>
+                    <a:p>
+                      <a:pPr>
+                        <a:defRPr sz="1100"/>
+                      </a:pPr>
+                      <a:r>
+                        <a:t>26.37</a:t>
+                      </a:r>
+                    </a:p>
+                  </a:txBody>
+                  <a:tcPr/>
+                </a:tc>
+                <a:tc>
+                  <a:txBody>
+                    <a:bodyPr/>
+                    <a:lstStyle/>
+                    <a:p>
+                      <a:pPr>
+                        <a:defRPr sz="1100"/>
+                      </a:pPr>
+                      <a:r>
+                        <a:t>0.44</a:t>
                       </a:r>
                     </a:p>
                   </a:txBody>
@@ -4189,37 +4189,37 @@
                         <a:defRPr sz="1100"/>
                       </a:pPr>
                       <a:r>
-                        <a:t>10.87</a:t>
-                      </a:r>
-                    </a:p>
-                  </a:txBody>
-                  <a:tcPr/>
-                </a:tc>
-                <a:tc>
-                  <a:txBody>
-                    <a:bodyPr/>
-                    <a:lstStyle/>
-                    <a:p>
-                      <a:pPr>
-                        <a:defRPr sz="1100"/>
-                      </a:pPr>
-                      <a:r>
-                        <a:t>10.33</a:t>
-                      </a:r>
-                    </a:p>
-                  </a:txBody>
-                  <a:tcPr/>
-                </a:tc>
-                <a:tc>
-                  <a:txBody>
-                    <a:bodyPr/>
-                    <a:lstStyle/>
-                    <a:p>
-                      <a:pPr>
-                        <a:defRPr sz="1100"/>
-                      </a:pPr>
-                      <a:r>
-                        <a:t>0.38</a:t>
+                        <a:t>11.15</a:t>
+                      </a:r>
+                    </a:p>
+                  </a:txBody>
+                  <a:tcPr/>
+                </a:tc>
+                <a:tc>
+                  <a:txBody>
+                    <a:bodyPr/>
+                    <a:lstStyle/>
+                    <a:p>
+                      <a:pPr>
+                        <a:defRPr sz="1100"/>
+                      </a:pPr>
+                      <a:r>
+                        <a:t>10.59</a:t>
+                      </a:r>
+                    </a:p>
+                  </a:txBody>
+                  <a:tcPr/>
+                </a:tc>
+                <a:tc>
+                  <a:txBody>
+                    <a:bodyPr/>
+                    <a:lstStyle/>
+                    <a:p>
+                      <a:pPr>
+                        <a:defRPr sz="1100"/>
+                      </a:pPr>
+                      <a:r>
+                        <a:t>0.64</a:t>
                       </a:r>
                     </a:p>
                   </a:txBody>
@@ -4281,37 +4281,37 @@
                         <a:defRPr sz="1100"/>
                       </a:pPr>
                       <a:r>
-                        <a:t>16.38</a:t>
-                      </a:r>
-                    </a:p>
-                  </a:txBody>
-                  <a:tcPr/>
-                </a:tc>
-                <a:tc>
-                  <a:txBody>
-                    <a:bodyPr/>
-                    <a:lstStyle/>
-                    <a:p>
-                      <a:pPr>
-                        <a:defRPr sz="1100"/>
-                      </a:pPr>
-                      <a:r>
-                        <a:t>8.19</a:t>
-                      </a:r>
-                    </a:p>
-                  </a:txBody>
-                  <a:tcPr/>
-                </a:tc>
-                <a:tc>
-                  <a:txBody>
-                    <a:bodyPr/>
-                    <a:lstStyle/>
-                    <a:p>
-                      <a:pPr>
-                        <a:defRPr sz="1100"/>
-                      </a:pPr>
-                      <a:r>
-                        <a:t>-0.57</a:t>
+                        <a:t>16.17</a:t>
+                      </a:r>
+                    </a:p>
+                  </a:txBody>
+                  <a:tcPr/>
+                </a:tc>
+                <a:tc>
+                  <a:txBody>
+                    <a:bodyPr/>
+                    <a:lstStyle/>
+                    <a:p>
+                      <a:pPr>
+                        <a:defRPr sz="1100"/>
+                      </a:pPr>
+                      <a:r>
+                        <a:t>8.09</a:t>
+                      </a:r>
+                    </a:p>
+                  </a:txBody>
+                  <a:tcPr/>
+                </a:tc>
+                <a:tc>
+                  <a:txBody>
+                    <a:bodyPr/>
+                    <a:lstStyle/>
+                    <a:p>
+                      <a:pPr>
+                        <a:defRPr sz="1100"/>
+                      </a:pPr>
+                      <a:r>
+                        <a:t>-0.67</a:t>
                       </a:r>
                     </a:p>
                   </a:txBody>
@@ -4373,37 +4373,37 @@
                         <a:defRPr sz="1100"/>
                       </a:pPr>
                       <a:r>
-                        <a:t>36.52</a:t>
-                      </a:r>
-                    </a:p>
-                  </a:txBody>
-                  <a:tcPr/>
-                </a:tc>
-                <a:tc>
-                  <a:txBody>
-                    <a:bodyPr/>
-                    <a:lstStyle/>
-                    <a:p>
-                      <a:pPr>
-                        <a:defRPr sz="1100"/>
-                      </a:pPr>
-                      <a:r>
-                        <a:t>22.28</a:t>
-                      </a:r>
-                    </a:p>
-                  </a:txBody>
-                  <a:tcPr/>
-                </a:tc>
-                <a:tc>
-                  <a:txBody>
-                    <a:bodyPr/>
-                    <a:lstStyle/>
-                    <a:p>
-                      <a:pPr>
-                        <a:defRPr sz="1100"/>
-                      </a:pPr>
-                      <a:r>
-                        <a:t>0.4</a:t>
+                        <a:t>36.65</a:t>
+                      </a:r>
+                    </a:p>
+                  </a:txBody>
+                  <a:tcPr/>
+                </a:tc>
+                <a:tc>
+                  <a:txBody>
+                    <a:bodyPr/>
+                    <a:lstStyle/>
+                    <a:p>
+                      <a:pPr>
+                        <a:defRPr sz="1100"/>
+                      </a:pPr>
+                      <a:r>
+                        <a:t>22.36</a:t>
+                      </a:r>
+                    </a:p>
+                  </a:txBody>
+                  <a:tcPr/>
+                </a:tc>
+                <a:tc>
+                  <a:txBody>
+                    <a:bodyPr/>
+                    <a:lstStyle/>
+                    <a:p>
+                      <a:pPr>
+                        <a:defRPr sz="1100"/>
+                      </a:pPr>
+                      <a:r>
+                        <a:t>0.48</a:t>
                       </a:r>
                     </a:p>
                   </a:txBody>
@@ -4465,37 +4465,37 @@
                         <a:defRPr sz="1100"/>
                       </a:pPr>
                       <a:r>
-                        <a:t>146.43</a:t>
-                      </a:r>
-                    </a:p>
-                  </a:txBody>
-                  <a:tcPr/>
-                </a:tc>
-                <a:tc>
-                  <a:txBody>
-                    <a:bodyPr/>
-                    <a:lstStyle/>
-                    <a:p>
-                      <a:pPr>
-                        <a:defRPr sz="1100"/>
-                      </a:pPr>
-                      <a:r>
-                        <a:t>7.32</a:t>
-                      </a:r>
-                    </a:p>
-                  </a:txBody>
-                  <a:tcPr/>
-                </a:tc>
-                <a:tc>
-                  <a:txBody>
-                    <a:bodyPr/>
-                    <a:lstStyle/>
-                    <a:p>
-                      <a:pPr>
-                        <a:defRPr sz="1100"/>
-                      </a:pPr>
-                      <a:r>
-                        <a:t>0.49</a:t>
+                        <a:t>141.99</a:t>
+                      </a:r>
+                    </a:p>
+                  </a:txBody>
+                  <a:tcPr/>
+                </a:tc>
+                <a:tc>
+                  <a:txBody>
+                    <a:bodyPr/>
+                    <a:lstStyle/>
+                    <a:p>
+                      <a:pPr>
+                        <a:defRPr sz="1100"/>
+                      </a:pPr>
+                      <a:r>
+                        <a:t>7.1</a:t>
+                      </a:r>
+                    </a:p>
+                  </a:txBody>
+                  <a:tcPr/>
+                </a:tc>
+                <a:tc>
+                  <a:txBody>
+                    <a:bodyPr/>
+                    <a:lstStyle/>
+                    <a:p>
+                      <a:pPr>
+                        <a:defRPr sz="1100"/>
+                      </a:pPr>
+                      <a:r>
+                        <a:t>0.26</a:t>
                       </a:r>
                     </a:p>
                   </a:txBody>
@@ -4557,37 +4557,37 @@
                         <a:defRPr sz="1100"/>
                       </a:pPr>
                       <a:r>
-                        <a:t>9.04</a:t>
-                      </a:r>
-                    </a:p>
-                  </a:txBody>
-                  <a:tcPr/>
-                </a:tc>
-                <a:tc>
-                  <a:txBody>
-                    <a:bodyPr/>
-                    <a:lstStyle/>
-                    <a:p>
-                      <a:pPr>
-                        <a:defRPr sz="1100"/>
-                      </a:pPr>
-                      <a:r>
-                        <a:t>4.52</a:t>
-                      </a:r>
-                    </a:p>
-                  </a:txBody>
-                  <a:tcPr/>
-                </a:tc>
-                <a:tc>
-                  <a:txBody>
-                    <a:bodyPr/>
-                    <a:lstStyle/>
-                    <a:p>
-                      <a:pPr>
-                        <a:defRPr sz="1100"/>
-                      </a:pPr>
-                      <a:r>
-                        <a:t>0.85</a:t>
+                        <a:t>8.14</a:t>
+                      </a:r>
+                    </a:p>
+                  </a:txBody>
+                  <a:tcPr/>
+                </a:tc>
+                <a:tc>
+                  <a:txBody>
+                    <a:bodyPr/>
+                    <a:lstStyle/>
+                    <a:p>
+                      <a:pPr>
+                        <a:defRPr sz="1100"/>
+                      </a:pPr>
+                      <a:r>
+                        <a:t>4.07</a:t>
+                      </a:r>
+                    </a:p>
+                  </a:txBody>
+                  <a:tcPr/>
+                </a:tc>
+                <a:tc>
+                  <a:txBody>
+                    <a:bodyPr/>
+                    <a:lstStyle/>
+                    <a:p>
+                      <a:pPr>
+                        <a:defRPr sz="1100"/>
+                      </a:pPr>
+                      <a:r>
+                        <a:t>0.41</a:t>
                       </a:r>
                     </a:p>
                   </a:txBody>
@@ -4649,37 +4649,37 @@
                         <a:defRPr sz="1100"/>
                       </a:pPr>
                       <a:r>
-                        <a:t>20.78</a:t>
-                      </a:r>
-                    </a:p>
-                  </a:txBody>
-                  <a:tcPr/>
-                </a:tc>
-                <a:tc>
-                  <a:txBody>
-                    <a:bodyPr/>
-                    <a:lstStyle/>
-                    <a:p>
-                      <a:pPr>
-                        <a:defRPr sz="1100"/>
-                      </a:pPr>
-                      <a:r>
-                        <a:t>1.04</a:t>
-                      </a:r>
-                    </a:p>
-                  </a:txBody>
-                  <a:tcPr/>
-                </a:tc>
-                <a:tc>
-                  <a:txBody>
-                    <a:bodyPr/>
-                    <a:lstStyle/>
-                    <a:p>
-                      <a:pPr>
-                        <a:defRPr sz="1100"/>
-                      </a:pPr>
-                      <a:r>
-                        <a:t>0.0</a:t>
+                        <a:t>20.93</a:t>
+                      </a:r>
+                    </a:p>
+                  </a:txBody>
+                  <a:tcPr/>
+                </a:tc>
+                <a:tc>
+                  <a:txBody>
+                    <a:bodyPr/>
+                    <a:lstStyle/>
+                    <a:p>
+                      <a:pPr>
+                        <a:defRPr sz="1100"/>
+                      </a:pPr>
+                      <a:r>
+                        <a:t>1.05</a:t>
+                      </a:r>
+                    </a:p>
+                  </a:txBody>
+                  <a:tcPr/>
+                </a:tc>
+                <a:tc>
+                  <a:txBody>
+                    <a:bodyPr/>
+                    <a:lstStyle/>
+                    <a:p>
+                      <a:pPr>
+                        <a:defRPr sz="1100"/>
+                      </a:pPr>
+                      <a:r>
+                        <a:t>0.01</a:t>
                       </a:r>
                     </a:p>
                   </a:txBody>
@@ -4741,37 +4741,37 @@
                         <a:defRPr sz="1100"/>
                       </a:pPr>
                       <a:r>
-                        <a:t>184.06</a:t>
-                      </a:r>
-                    </a:p>
-                  </a:txBody>
-                  <a:tcPr/>
-                </a:tc>
-                <a:tc>
-                  <a:txBody>
-                    <a:bodyPr/>
-                    <a:lstStyle/>
-                    <a:p>
-                      <a:pPr>
-                        <a:defRPr sz="1100"/>
-                      </a:pPr>
-                      <a:r>
-                        <a:t>18.41</a:t>
-                      </a:r>
-                    </a:p>
-                  </a:txBody>
-                  <a:tcPr/>
-                </a:tc>
-                <a:tc>
-                  <a:txBody>
-                    <a:bodyPr/>
-                    <a:lstStyle/>
-                    <a:p>
-                      <a:pPr>
-                        <a:defRPr sz="1100"/>
-                      </a:pPr>
-                      <a:r>
-                        <a:t>0.65</a:t>
+                        <a:t>178.85</a:t>
+                      </a:r>
+                    </a:p>
+                  </a:txBody>
+                  <a:tcPr/>
+                </a:tc>
+                <a:tc>
+                  <a:txBody>
+                    <a:bodyPr/>
+                    <a:lstStyle/>
+                    <a:p>
+                      <a:pPr>
+                        <a:defRPr sz="1100"/>
+                      </a:pPr>
+                      <a:r>
+                        <a:t>17.89</a:t>
+                      </a:r>
+                    </a:p>
+                  </a:txBody>
+                  <a:tcPr/>
+                </a:tc>
+                <a:tc>
+                  <a:txBody>
+                    <a:bodyPr/>
+                    <a:lstStyle/>
+                    <a:p>
+                      <a:pPr>
+                        <a:defRPr sz="1100"/>
+                      </a:pPr>
+                      <a:r>
+                        <a:t>0.13</a:t>
                       </a:r>
                     </a:p>
                   </a:txBody>
@@ -4833,37 +4833,37 @@
                         <a:defRPr sz="1100"/>
                       </a:pPr>
                       <a:r>
-                        <a:t>167.95</a:t>
-                      </a:r>
-                    </a:p>
-                  </a:txBody>
-                  <a:tcPr/>
-                </a:tc>
-                <a:tc>
-                  <a:txBody>
-                    <a:bodyPr/>
-                    <a:lstStyle/>
-                    <a:p>
-                      <a:pPr>
-                        <a:defRPr sz="1100"/>
-                      </a:pPr>
-                      <a:r>
-                        <a:t>21.83</a:t>
-                      </a:r>
-                    </a:p>
-                  </a:txBody>
-                  <a:tcPr/>
-                </a:tc>
-                <a:tc>
-                  <a:txBody>
-                    <a:bodyPr/>
-                    <a:lstStyle/>
-                    <a:p>
-                      <a:pPr>
-                        <a:defRPr sz="1100"/>
-                      </a:pPr>
-                      <a:r>
-                        <a:t>1.28</a:t>
+                        <a:t>162.4</a:t>
+                      </a:r>
+                    </a:p>
+                  </a:txBody>
+                  <a:tcPr/>
+                </a:tc>
+                <a:tc>
+                  <a:txBody>
+                    <a:bodyPr/>
+                    <a:lstStyle/>
+                    <a:p>
+                      <a:pPr>
+                        <a:defRPr sz="1100"/>
+                      </a:pPr>
+                      <a:r>
+                        <a:t>21.11</a:t>
+                      </a:r>
+                    </a:p>
+                  </a:txBody>
+                  <a:tcPr/>
+                </a:tc>
+                <a:tc>
+                  <a:txBody>
+                    <a:bodyPr/>
+                    <a:lstStyle/>
+                    <a:p>
+                      <a:pPr>
+                        <a:defRPr sz="1100"/>
+                      </a:pPr>
+                      <a:r>
+                        <a:t>0.56</a:t>
                       </a:r>
                     </a:p>
                   </a:txBody>
@@ -4925,37 +4925,37 @@
                         <a:defRPr sz="1100"/>
                       </a:pPr>
                       <a:r>
-                        <a:t>45.02</a:t>
-                      </a:r>
-                    </a:p>
-                  </a:txBody>
-                  <a:tcPr/>
-                </a:tc>
-                <a:tc>
-                  <a:txBody>
-                    <a:bodyPr/>
-                    <a:lstStyle/>
-                    <a:p>
-                      <a:pPr>
-                        <a:defRPr sz="1100"/>
-                      </a:pPr>
-                      <a:r>
-                        <a:t>4.5</a:t>
-                      </a:r>
-                    </a:p>
-                  </a:txBody>
-                  <a:tcPr/>
-                </a:tc>
-                <a:tc>
-                  <a:txBody>
-                    <a:bodyPr/>
-                    <a:lstStyle/>
-                    <a:p>
-                      <a:pPr>
-                        <a:defRPr sz="1100"/>
-                      </a:pPr>
-                      <a:r>
-                        <a:t>0.24</a:t>
+                        <a:t>43.5</a:t>
+                      </a:r>
+                    </a:p>
+                  </a:txBody>
+                  <a:tcPr/>
+                </a:tc>
+                <a:tc>
+                  <a:txBody>
+                    <a:bodyPr/>
+                    <a:lstStyle/>
+                    <a:p>
+                      <a:pPr>
+                        <a:defRPr sz="1100"/>
+                      </a:pPr>
+                      <a:r>
+                        <a:t>4.35</a:t>
+                      </a:r>
+                    </a:p>
+                  </a:txBody>
+                  <a:tcPr/>
+                </a:tc>
+                <a:tc>
+                  <a:txBody>
+                    <a:bodyPr/>
+                    <a:lstStyle/>
+                    <a:p>
+                      <a:pPr>
+                        <a:defRPr sz="1100"/>
+                      </a:pPr>
+                      <a:r>
+                        <a:t>0.09</a:t>
                       </a:r>
                     </a:p>
                   </a:txBody>
@@ -5017,37 +5017,37 @@
                         <a:defRPr sz="1100"/>
                       </a:pPr>
                       <a:r>
-                        <a:t>42.5</a:t>
-                      </a:r>
-                    </a:p>
-                  </a:txBody>
-                  <a:tcPr/>
-                </a:tc>
-                <a:tc>
-                  <a:txBody>
-                    <a:bodyPr/>
-                    <a:lstStyle/>
-                    <a:p>
-                      <a:pPr>
-                        <a:defRPr sz="1100"/>
-                      </a:pPr>
-                      <a:r>
-                        <a:t>17.0</a:t>
-                      </a:r>
-                    </a:p>
-                  </a:txBody>
-                  <a:tcPr/>
-                </a:tc>
-                <a:tc>
-                  <a:txBody>
-                    <a:bodyPr/>
-                    <a:lstStyle/>
-                    <a:p>
-                      <a:pPr>
-                        <a:defRPr sz="1100"/>
-                      </a:pPr>
-                      <a:r>
-                        <a:t>-0.42</a:t>
+                        <a:t>40.28</a:t>
+                      </a:r>
+                    </a:p>
+                  </a:txBody>
+                  <a:tcPr/>
+                </a:tc>
+                <a:tc>
+                  <a:txBody>
+                    <a:bodyPr/>
+                    <a:lstStyle/>
+                    <a:p>
+                      <a:pPr>
+                        <a:defRPr sz="1100"/>
+                      </a:pPr>
+                      <a:r>
+                        <a:t>16.11</a:t>
+                      </a:r>
+                    </a:p>
+                  </a:txBody>
+                  <a:tcPr/>
+                </a:tc>
+                <a:tc>
+                  <a:txBody>
+                    <a:bodyPr/>
+                    <a:lstStyle/>
+                    <a:p>
+                      <a:pPr>
+                        <a:defRPr sz="1100"/>
+                      </a:pPr>
+                      <a:r>
+                        <a:t>-1.31</a:t>
                       </a:r>
                     </a:p>
                   </a:txBody>
@@ -5133,7 +5133,7 @@
               <a:defRPr sz="1500"/>
             </a:pPr>
             <a:r>
-              <a:t>中国平安（601318，保险）：综合73.5分；基本面优秀，具备中长期配置价值；中期趋势向上，可关注/持有。</a:t>
+              <a:t>紫金矿业（601899，有色金属）：综合75.0分；基本面优秀，具备中长期配置价值；趋势中性，观望。</a:t>
             </a:r>
           </a:p>
           <a:p>
@@ -5141,7 +5141,7 @@
               <a:defRPr sz="1500"/>
             </a:pPr>
             <a:r>
-              <a:t>紫金矿业（601899，有色金属）：综合73.0分；基本面优秀，具备中长期配置价值；趋势中性，观望。</a:t>
+              <a:t>中国平安（601318，保险）：综合71.5分；基本面优秀，具备中长期配置价值；中期趋势向上，可关注/持有。</a:t>
             </a:r>
           </a:p>
           <a:p>
@@ -5157,7 +5157,7 @@
               <a:defRPr sz="1500"/>
             </a:pPr>
             <a:r>
-              <a:t>立讯精密（002475，消费电子）：综合65.0分；基本面优秀，具备中长期配置价值；趋势中性，观望。</a:t>
+              <a:t>长江电力（600900，电力）：综合69.0分；基本面优秀，具备中长期配置价值；中期趋势向上，可关注/持有。</a:t>
             </a:r>
           </a:p>
           <a:p>

--- a/outputs/12_中期路演.pptx
+++ b/outputs/12_中期路演.pptx
@@ -3167,7 +3167,7 @@
               <a:defRPr sz="1500"/>
             </a:pPr>
             <a:r>
-              <a:t>数据截止：2026-09-24</a:t>
+              <a:t>数据截止：2026-09-28</a:t>
             </a:r>
           </a:p>
         </p:txBody>
@@ -3255,7 +3255,7 @@
               <a:defRPr sz="1500"/>
             </a:pPr>
             <a:r>
-              <a:t>当前总资产：480.46万元</a:t>
+              <a:t>当前总资产：471.89万元</a:t>
             </a:r>
           </a:p>
           <a:p>
@@ -3263,7 +3263,7 @@
               <a:defRPr sz="1500"/>
             </a:pPr>
             <a:r>
-              <a:t>累计收益率：-3.91%</a:t>
+              <a:t>累计收益率：-5.62%</a:t>
             </a:r>
           </a:p>
           <a:p>
@@ -3271,7 +3271,7 @@
               <a:defRPr sz="1500"/>
             </a:pPr>
             <a:r>
-              <a:t>同期沪深300：-2.39%</a:t>
+              <a:t>同期沪深300：-4.56%</a:t>
             </a:r>
           </a:p>
           <a:p>
@@ -3279,7 +3279,7 @@
               <a:defRPr sz="1500"/>
             </a:pPr>
             <a:r>
-              <a:t>现金：96.66万元（20.1%）</a:t>
+              <a:t>现金：211.02万元（44.7%）</a:t>
             </a:r>
           </a:p>
           <a:p>
@@ -3287,7 +3287,7 @@
               <a:defRPr sz="1500"/>
             </a:pPr>
             <a:r>
-              <a:t>持仓：14只，累计交易34笔</a:t>
+              <a:t>持仓：13只，累计交易35笔</a:t>
             </a:r>
           </a:p>
         </p:txBody>
@@ -3582,7 +3582,7 @@
                 <a:gridCol w="1849069"/>
                 <a:gridCol w="1849070"/>
               </a:tblGrid>
-              <a:tr h="240030">
+              <a:tr h="256032">
                 <a:tc>
                   <a:txBody>
                     <a:bodyPr/>
@@ -3674,7 +3674,7 @@
                   <a:tcPr/>
                 </a:tc>
               </a:tr>
-              <a:tr h="240030">
+              <a:tr h="256032">
                 <a:tc>
                   <a:txBody>
                     <a:bodyPr/>
@@ -3766,477 +3766,661 @@
                   <a:tcPr/>
                 </a:tc>
               </a:tr>
-              <a:tr h="240030">
-                <a:tc>
-                  <a:txBody>
-                    <a:bodyPr/>
-                    <a:lstStyle/>
-                    <a:p>
-                      <a:pPr>
-                        <a:defRPr sz="1100"/>
-                      </a:pPr>
-                      <a:r>
-                        <a:t>沪深300ETF</a:t>
-                      </a:r>
-                    </a:p>
-                  </a:txBody>
-                  <a:tcPr/>
-                </a:tc>
-                <a:tc>
-                  <a:txBody>
-                    <a:bodyPr/>
-                    <a:lstStyle/>
-                    <a:p>
-                      <a:pPr>
-                        <a:defRPr sz="1100"/>
-                      </a:pPr>
-                      <a:r>
-                        <a:t>258900</a:t>
-                      </a:r>
-                    </a:p>
-                  </a:txBody>
-                  <a:tcPr/>
-                </a:tc>
-                <a:tc>
-                  <a:txBody>
-                    <a:bodyPr/>
-                    <a:lstStyle/>
-                    <a:p>
-                      <a:pPr>
-                        <a:defRPr sz="1100"/>
-                      </a:pPr>
-                      <a:r>
-                        <a:t>4.64</a:t>
-                      </a:r>
-                    </a:p>
-                  </a:txBody>
-                  <a:tcPr/>
-                </a:tc>
-                <a:tc>
-                  <a:txBody>
-                    <a:bodyPr/>
-                    <a:lstStyle/>
-                    <a:p>
-                      <a:pPr>
-                        <a:defRPr sz="1100"/>
-                      </a:pPr>
-                      <a:r>
-                        <a:t>4.515</a:t>
-                      </a:r>
-                    </a:p>
-                  </a:txBody>
-                  <a:tcPr/>
-                </a:tc>
-                <a:tc>
-                  <a:txBody>
-                    <a:bodyPr/>
-                    <a:lstStyle/>
-                    <a:p>
-                      <a:pPr>
-                        <a:defRPr sz="1100"/>
-                      </a:pPr>
-                      <a:r>
-                        <a:t>116.89</a:t>
-                      </a:r>
-                    </a:p>
-                  </a:txBody>
-                  <a:tcPr/>
-                </a:tc>
-                <a:tc>
-                  <a:txBody>
-                    <a:bodyPr/>
-                    <a:lstStyle/>
-                    <a:p>
-                      <a:pPr>
-                        <a:defRPr sz="1100"/>
-                      </a:pPr>
-                      <a:r>
-                        <a:t>-3.26</a:t>
+              <a:tr h="256032">
+                <a:tc>
+                  <a:txBody>
+                    <a:bodyPr/>
+                    <a:lstStyle/>
+                    <a:p>
+                      <a:pPr>
+                        <a:defRPr sz="1100"/>
+                      </a:pPr>
+                      <a:r>
+                        <a:t>中国平安</a:t>
+                      </a:r>
+                    </a:p>
+                  </a:txBody>
+                  <a:tcPr/>
+                </a:tc>
+                <a:tc>
+                  <a:txBody>
+                    <a:bodyPr/>
+                    <a:lstStyle/>
+                    <a:p>
+                      <a:pPr>
+                        <a:defRPr sz="1100"/>
+                      </a:pPr>
+                      <a:r>
+                        <a:t>18200</a:t>
+                      </a:r>
+                    </a:p>
+                  </a:txBody>
+                  <a:tcPr/>
+                </a:tc>
+                <a:tc>
+                  <a:txBody>
+                    <a:bodyPr/>
+                    <a:lstStyle/>
+                    <a:p>
+                      <a:pPr>
+                        <a:defRPr sz="1100"/>
+                      </a:pPr>
+                      <a:r>
+                        <a:t>56.12</a:t>
+                      </a:r>
+                    </a:p>
+                  </a:txBody>
+                  <a:tcPr/>
+                </a:tc>
+                <a:tc>
+                  <a:txBody>
+                    <a:bodyPr/>
+                    <a:lstStyle/>
+                    <a:p>
+                      <a:pPr>
+                        <a:defRPr sz="1100"/>
+                      </a:pPr>
+                      <a:r>
+                        <a:t>52.4</a:t>
+                      </a:r>
+                    </a:p>
+                  </a:txBody>
+                  <a:tcPr/>
+                </a:tc>
+                <a:tc>
+                  <a:txBody>
+                    <a:bodyPr/>
+                    <a:lstStyle/>
+                    <a:p>
+                      <a:pPr>
+                        <a:defRPr sz="1100"/>
+                      </a:pPr>
+                      <a:r>
+                        <a:t>95.37</a:t>
+                      </a:r>
+                    </a:p>
+                  </a:txBody>
+                  <a:tcPr/>
+                </a:tc>
+                <a:tc>
+                  <a:txBody>
+                    <a:bodyPr/>
+                    <a:lstStyle/>
+                    <a:p>
+                      <a:pPr>
+                        <a:defRPr sz="1100"/>
+                      </a:pPr>
+                      <a:r>
+                        <a:t>-6.77</a:t>
                       </a:r>
                     </a:p>
                   </a:txBody>
                   <a:tcPr/>
                 </a:tc>
               </a:tr>
-              <a:tr h="240030">
-                <a:tc>
-                  <a:txBody>
-                    <a:bodyPr/>
-                    <a:lstStyle/>
-                    <a:p>
-                      <a:pPr>
-                        <a:defRPr sz="1100"/>
-                      </a:pPr>
-                      <a:r>
-                        <a:t>中国平安</a:t>
-                      </a:r>
-                    </a:p>
-                  </a:txBody>
-                  <a:tcPr/>
-                </a:tc>
-                <a:tc>
-                  <a:txBody>
-                    <a:bodyPr/>
-                    <a:lstStyle/>
-                    <a:p>
-                      <a:pPr>
-                        <a:defRPr sz="1100"/>
-                      </a:pPr>
-                      <a:r>
-                        <a:t>18200</a:t>
-                      </a:r>
-                    </a:p>
-                  </a:txBody>
-                  <a:tcPr/>
-                </a:tc>
-                <a:tc>
-                  <a:txBody>
-                    <a:bodyPr/>
-                    <a:lstStyle/>
-                    <a:p>
-                      <a:pPr>
-                        <a:defRPr sz="1100"/>
-                      </a:pPr>
-                      <a:r>
-                        <a:t>56.12</a:t>
-                      </a:r>
-                    </a:p>
-                  </a:txBody>
-                  <a:tcPr/>
-                </a:tc>
-                <a:tc>
-                  <a:txBody>
-                    <a:bodyPr/>
-                    <a:lstStyle/>
-                    <a:p>
-                      <a:pPr>
-                        <a:defRPr sz="1100"/>
-                      </a:pPr>
-                      <a:r>
-                        <a:t>53.25</a:t>
-                      </a:r>
-                    </a:p>
-                  </a:txBody>
-                  <a:tcPr/>
-                </a:tc>
-                <a:tc>
-                  <a:txBody>
-                    <a:bodyPr/>
-                    <a:lstStyle/>
-                    <a:p>
-                      <a:pPr>
-                        <a:defRPr sz="1100"/>
-                      </a:pPr>
-                      <a:r>
-                        <a:t>96.92</a:t>
-                      </a:r>
-                    </a:p>
-                  </a:txBody>
-                  <a:tcPr/>
-                </a:tc>
-                <a:tc>
-                  <a:txBody>
-                    <a:bodyPr/>
-                    <a:lstStyle/>
-                    <a:p>
-                      <a:pPr>
-                        <a:defRPr sz="1100"/>
-                      </a:pPr>
-                      <a:r>
-                        <a:t>-5.22</a:t>
+              <a:tr h="256032">
+                <a:tc>
+                  <a:txBody>
+                    <a:bodyPr/>
+                    <a:lstStyle/>
+                    <a:p>
+                      <a:pPr>
+                        <a:defRPr sz="1100"/>
+                      </a:pPr>
+                      <a:r>
+                        <a:t>紫金矿业</a:t>
+                      </a:r>
+                    </a:p>
+                  </a:txBody>
+                  <a:tcPr/>
+                </a:tc>
+                <a:tc>
+                  <a:txBody>
+                    <a:bodyPr/>
+                    <a:lstStyle/>
+                    <a:p>
+                      <a:pPr>
+                        <a:defRPr sz="1100"/>
+                      </a:pPr>
+                      <a:r>
+                        <a:t>10300</a:t>
+                      </a:r>
+                    </a:p>
+                  </a:txBody>
+                  <a:tcPr/>
+                </a:tc>
+                <a:tc>
+                  <a:txBody>
+                    <a:bodyPr/>
+                    <a:lstStyle/>
+                    <a:p>
+                      <a:pPr>
+                        <a:defRPr sz="1100"/>
+                      </a:pPr>
+                      <a:r>
+                        <a:t>31.41</a:t>
+                      </a:r>
+                    </a:p>
+                  </a:txBody>
+                  <a:tcPr/>
+                </a:tc>
+                <a:tc>
+                  <a:txBody>
+                    <a:bodyPr/>
+                    <a:lstStyle/>
+                    <a:p>
+                      <a:pPr>
+                        <a:defRPr sz="1100"/>
+                      </a:pPr>
+                      <a:r>
+                        <a:t>29.42</a:t>
+                      </a:r>
+                    </a:p>
+                  </a:txBody>
+                  <a:tcPr/>
+                </a:tc>
+                <a:tc>
+                  <a:txBody>
+                    <a:bodyPr/>
+                    <a:lstStyle/>
+                    <a:p>
+                      <a:pPr>
+                        <a:defRPr sz="1100"/>
+                      </a:pPr>
+                      <a:r>
+                        <a:t>30.3</a:t>
+                      </a:r>
+                    </a:p>
+                  </a:txBody>
+                  <a:tcPr/>
+                </a:tc>
+                <a:tc>
+                  <a:txBody>
+                    <a:bodyPr/>
+                    <a:lstStyle/>
+                    <a:p>
+                      <a:pPr>
+                        <a:defRPr sz="1100"/>
+                      </a:pPr>
+                      <a:r>
+                        <a:t>-2.05</a:t>
                       </a:r>
                     </a:p>
                   </a:txBody>
                   <a:tcPr/>
                 </a:tc>
               </a:tr>
-              <a:tr h="240030">
-                <a:tc>
-                  <a:txBody>
-                    <a:bodyPr/>
-                    <a:lstStyle/>
-                    <a:p>
-                      <a:pPr>
-                        <a:defRPr sz="1100"/>
-                      </a:pPr>
-                      <a:r>
-                        <a:t>紫金矿业</a:t>
-                      </a:r>
-                    </a:p>
-                  </a:txBody>
-                  <a:tcPr/>
-                </a:tc>
-                <a:tc>
-                  <a:txBody>
-                    <a:bodyPr/>
-                    <a:lstStyle/>
-                    <a:p>
-                      <a:pPr>
-                        <a:defRPr sz="1100"/>
-                      </a:pPr>
-                      <a:r>
-                        <a:t>10300</a:t>
-                      </a:r>
-                    </a:p>
-                  </a:txBody>
-                  <a:tcPr/>
-                </a:tc>
-                <a:tc>
-                  <a:txBody>
-                    <a:bodyPr/>
-                    <a:lstStyle/>
-                    <a:p>
-                      <a:pPr>
-                        <a:defRPr sz="1100"/>
-                      </a:pPr>
-                      <a:r>
-                        <a:t>31.41</a:t>
-                      </a:r>
-                    </a:p>
-                  </a:txBody>
-                  <a:tcPr/>
-                </a:tc>
-                <a:tc>
-                  <a:txBody>
-                    <a:bodyPr/>
-                    <a:lstStyle/>
-                    <a:p>
-                      <a:pPr>
-                        <a:defRPr sz="1100"/>
-                      </a:pPr>
-                      <a:r>
-                        <a:t>30.01</a:t>
-                      </a:r>
-                    </a:p>
-                  </a:txBody>
-                  <a:tcPr/>
-                </a:tc>
-                <a:tc>
-                  <a:txBody>
-                    <a:bodyPr/>
-                    <a:lstStyle/>
-                    <a:p>
-                      <a:pPr>
-                        <a:defRPr sz="1100"/>
-                      </a:pPr>
-                      <a:r>
-                        <a:t>30.91</a:t>
-                      </a:r>
-                    </a:p>
-                  </a:txBody>
-                  <a:tcPr/>
-                </a:tc>
-                <a:tc>
-                  <a:txBody>
-                    <a:bodyPr/>
-                    <a:lstStyle/>
-                    <a:p>
-                      <a:pPr>
-                        <a:defRPr sz="1100"/>
-                      </a:pPr>
-                      <a:r>
-                        <a:t>-1.44</a:t>
+              <a:tr h="256032">
+                <a:tc>
+                  <a:txBody>
+                    <a:bodyPr/>
+                    <a:lstStyle/>
+                    <a:p>
+                      <a:pPr>
+                        <a:defRPr sz="1100"/>
+                      </a:pPr>
+                      <a:r>
+                        <a:t>长江电力</a:t>
+                      </a:r>
+                    </a:p>
+                  </a:txBody>
+                  <a:tcPr/>
+                </a:tc>
+                <a:tc>
+                  <a:txBody>
+                    <a:bodyPr/>
+                    <a:lstStyle/>
+                    <a:p>
+                      <a:pPr>
+                        <a:defRPr sz="1100"/>
+                      </a:pPr>
+                      <a:r>
+                        <a:t>9300</a:t>
+                      </a:r>
+                    </a:p>
+                  </a:txBody>
+                  <a:tcPr/>
+                </a:tc>
+                <a:tc>
+                  <a:txBody>
+                    <a:bodyPr/>
+                    <a:lstStyle/>
+                    <a:p>
+                      <a:pPr>
+                        <a:defRPr sz="1100"/>
+                      </a:pPr>
+                      <a:r>
+                        <a:t>27.89</a:t>
+                      </a:r>
+                    </a:p>
+                  </a:txBody>
+                  <a:tcPr/>
+                </a:tc>
+                <a:tc>
+                  <a:txBody>
+                    <a:bodyPr/>
+                    <a:lstStyle/>
+                    <a:p>
+                      <a:pPr>
+                        <a:defRPr sz="1100"/>
+                      </a:pPr>
+                      <a:r>
+                        <a:t>28.55</a:t>
+                      </a:r>
+                    </a:p>
+                  </a:txBody>
+                  <a:tcPr/>
+                </a:tc>
+                <a:tc>
+                  <a:txBody>
+                    <a:bodyPr/>
+                    <a:lstStyle/>
+                    <a:p>
+                      <a:pPr>
+                        <a:defRPr sz="1100"/>
+                      </a:pPr>
+                      <a:r>
+                        <a:t>26.55</a:t>
+                      </a:r>
+                    </a:p>
+                  </a:txBody>
+                  <a:tcPr/>
+                </a:tc>
+                <a:tc>
+                  <a:txBody>
+                    <a:bodyPr/>
+                    <a:lstStyle/>
+                    <a:p>
+                      <a:pPr>
+                        <a:defRPr sz="1100"/>
+                      </a:pPr>
+                      <a:r>
+                        <a:t>0.62</a:t>
                       </a:r>
                     </a:p>
                   </a:txBody>
                   <a:tcPr/>
                 </a:tc>
               </a:tr>
-              <a:tr h="240030">
-                <a:tc>
-                  <a:txBody>
-                    <a:bodyPr/>
-                    <a:lstStyle/>
-                    <a:p>
-                      <a:pPr>
-                        <a:defRPr sz="1100"/>
-                      </a:pPr>
-                      <a:r>
-                        <a:t>长江电力</a:t>
-                      </a:r>
-                    </a:p>
-                  </a:txBody>
-                  <a:tcPr/>
-                </a:tc>
-                <a:tc>
-                  <a:txBody>
-                    <a:bodyPr/>
-                    <a:lstStyle/>
-                    <a:p>
-                      <a:pPr>
-                        <a:defRPr sz="1100"/>
-                      </a:pPr>
-                      <a:r>
-                        <a:t>9300</a:t>
-                      </a:r>
-                    </a:p>
-                  </a:txBody>
-                  <a:tcPr/>
-                </a:tc>
-                <a:tc>
-                  <a:txBody>
-                    <a:bodyPr/>
-                    <a:lstStyle/>
-                    <a:p>
-                      <a:pPr>
-                        <a:defRPr sz="1100"/>
-                      </a:pPr>
-                      <a:r>
-                        <a:t>27.89</a:t>
-                      </a:r>
-                    </a:p>
-                  </a:txBody>
-                  <a:tcPr/>
-                </a:tc>
-                <a:tc>
-                  <a:txBody>
-                    <a:bodyPr/>
-                    <a:lstStyle/>
-                    <a:p>
-                      <a:pPr>
-                        <a:defRPr sz="1100"/>
-                      </a:pPr>
-                      <a:r>
-                        <a:t>28.36</a:t>
-                      </a:r>
-                    </a:p>
-                  </a:txBody>
-                  <a:tcPr/>
-                </a:tc>
-                <a:tc>
-                  <a:txBody>
-                    <a:bodyPr/>
-                    <a:lstStyle/>
-                    <a:p>
-                      <a:pPr>
-                        <a:defRPr sz="1100"/>
-                      </a:pPr>
-                      <a:r>
-                        <a:t>26.37</a:t>
-                      </a:r>
-                    </a:p>
-                  </a:txBody>
-                  <a:tcPr/>
-                </a:tc>
-                <a:tc>
-                  <a:txBody>
-                    <a:bodyPr/>
-                    <a:lstStyle/>
-                    <a:p>
-                      <a:pPr>
-                        <a:defRPr sz="1100"/>
-                      </a:pPr>
-                      <a:r>
-                        <a:t>0.44</a:t>
+              <a:tr h="256032">
+                <a:tc>
+                  <a:txBody>
+                    <a:bodyPr/>
+                    <a:lstStyle/>
+                    <a:p>
+                      <a:pPr>
+                        <a:defRPr sz="1100"/>
+                      </a:pPr>
+                      <a:r>
+                        <a:t>新集能源</a:t>
+                      </a:r>
+                    </a:p>
+                  </a:txBody>
+                  <a:tcPr/>
+                </a:tc>
+                <a:tc>
+                  <a:txBody>
+                    <a:bodyPr/>
+                    <a:lstStyle/>
+                    <a:p>
+                      <a:pPr>
+                        <a:defRPr sz="1100"/>
+                      </a:pPr>
+                      <a:r>
+                        <a:t>9500</a:t>
+                      </a:r>
+                    </a:p>
+                  </a:txBody>
+                  <a:tcPr/>
+                </a:tc>
+                <a:tc>
+                  <a:txBody>
+                    <a:bodyPr/>
+                    <a:lstStyle/>
+                    <a:p>
+                      <a:pPr>
+                        <a:defRPr sz="1100"/>
+                      </a:pPr>
+                      <a:r>
+                        <a:t>10.47</a:t>
+                      </a:r>
+                    </a:p>
+                  </a:txBody>
+                  <a:tcPr/>
+                </a:tc>
+                <a:tc>
+                  <a:txBody>
+                    <a:bodyPr/>
+                    <a:lstStyle/>
+                    <a:p>
+                      <a:pPr>
+                        <a:defRPr sz="1100"/>
+                      </a:pPr>
+                      <a:r>
+                        <a:t>11.45</a:t>
+                      </a:r>
+                    </a:p>
+                  </a:txBody>
+                  <a:tcPr/>
+                </a:tc>
+                <a:tc>
+                  <a:txBody>
+                    <a:bodyPr/>
+                    <a:lstStyle/>
+                    <a:p>
+                      <a:pPr>
+                        <a:defRPr sz="1100"/>
+                      </a:pPr>
+                      <a:r>
+                        <a:t>10.88</a:t>
+                      </a:r>
+                    </a:p>
+                  </a:txBody>
+                  <a:tcPr/>
+                </a:tc>
+                <a:tc>
+                  <a:txBody>
+                    <a:bodyPr/>
+                    <a:lstStyle/>
+                    <a:p>
+                      <a:pPr>
+                        <a:defRPr sz="1100"/>
+                      </a:pPr>
+                      <a:r>
+                        <a:t>0.93</a:t>
                       </a:r>
                     </a:p>
                   </a:txBody>
                   <a:tcPr/>
                 </a:tc>
               </a:tr>
-              <a:tr h="240030">
-                <a:tc>
-                  <a:txBody>
-                    <a:bodyPr/>
-                    <a:lstStyle/>
-                    <a:p>
-                      <a:pPr>
-                        <a:defRPr sz="1100"/>
-                      </a:pPr>
-                      <a:r>
-                        <a:t>新集能源</a:t>
-                      </a:r>
-                    </a:p>
-                  </a:txBody>
-                  <a:tcPr/>
-                </a:tc>
-                <a:tc>
-                  <a:txBody>
-                    <a:bodyPr/>
-                    <a:lstStyle/>
-                    <a:p>
-                      <a:pPr>
-                        <a:defRPr sz="1100"/>
-                      </a:pPr>
-                      <a:r>
-                        <a:t>9500</a:t>
-                      </a:r>
-                    </a:p>
-                  </a:txBody>
-                  <a:tcPr/>
-                </a:tc>
-                <a:tc>
-                  <a:txBody>
-                    <a:bodyPr/>
-                    <a:lstStyle/>
-                    <a:p>
-                      <a:pPr>
-                        <a:defRPr sz="1100"/>
-                      </a:pPr>
-                      <a:r>
-                        <a:t>10.47</a:t>
-                      </a:r>
-                    </a:p>
-                  </a:txBody>
-                  <a:tcPr/>
-                </a:tc>
-                <a:tc>
-                  <a:txBody>
-                    <a:bodyPr/>
-                    <a:lstStyle/>
-                    <a:p>
-                      <a:pPr>
-                        <a:defRPr sz="1100"/>
-                      </a:pPr>
-                      <a:r>
-                        <a:t>11.15</a:t>
-                      </a:r>
-                    </a:p>
-                  </a:txBody>
-                  <a:tcPr/>
-                </a:tc>
-                <a:tc>
-                  <a:txBody>
-                    <a:bodyPr/>
-                    <a:lstStyle/>
-                    <a:p>
-                      <a:pPr>
-                        <a:defRPr sz="1100"/>
-                      </a:pPr>
-                      <a:r>
-                        <a:t>10.59</a:t>
-                      </a:r>
-                    </a:p>
-                  </a:txBody>
-                  <a:tcPr/>
-                </a:tc>
-                <a:tc>
-                  <a:txBody>
-                    <a:bodyPr/>
-                    <a:lstStyle/>
-                    <a:p>
-                      <a:pPr>
-                        <a:defRPr sz="1100"/>
-                      </a:pPr>
-                      <a:r>
-                        <a:t>0.64</a:t>
+              <a:tr h="256032">
+                <a:tc>
+                  <a:txBody>
+                    <a:bodyPr/>
+                    <a:lstStyle/>
+                    <a:p>
+                      <a:pPr>
+                        <a:defRPr sz="1100"/>
+                      </a:pPr>
+                      <a:r>
+                        <a:t>恺英网络</a:t>
+                      </a:r>
+                    </a:p>
+                  </a:txBody>
+                  <a:tcPr/>
+                </a:tc>
+                <a:tc>
+                  <a:txBody>
+                    <a:bodyPr/>
+                    <a:lstStyle/>
+                    <a:p>
+                      <a:pPr>
+                        <a:defRPr sz="1100"/>
+                      </a:pPr>
+                      <a:r>
+                        <a:t>5000</a:t>
+                      </a:r>
+                    </a:p>
+                  </a:txBody>
+                  <a:tcPr/>
+                </a:tc>
+                <a:tc>
+                  <a:txBody>
+                    <a:bodyPr/>
+                    <a:lstStyle/>
+                    <a:p>
+                      <a:pPr>
+                        <a:defRPr sz="1100"/>
+                      </a:pPr>
+                      <a:r>
+                        <a:t>17.52</a:t>
+                      </a:r>
+                    </a:p>
+                  </a:txBody>
+                  <a:tcPr/>
+                </a:tc>
+                <a:tc>
+                  <a:txBody>
+                    <a:bodyPr/>
+                    <a:lstStyle/>
+                    <a:p>
+                      <a:pPr>
+                        <a:defRPr sz="1100"/>
+                      </a:pPr>
+                      <a:r>
+                        <a:t>15.68</a:t>
+                      </a:r>
+                    </a:p>
+                  </a:txBody>
+                  <a:tcPr/>
+                </a:tc>
+                <a:tc>
+                  <a:txBody>
+                    <a:bodyPr/>
+                    <a:lstStyle/>
+                    <a:p>
+                      <a:pPr>
+                        <a:defRPr sz="1100"/>
+                      </a:pPr>
+                      <a:r>
+                        <a:t>7.84</a:t>
+                      </a:r>
+                    </a:p>
+                  </a:txBody>
+                  <a:tcPr/>
+                </a:tc>
+                <a:tc>
+                  <a:txBody>
+                    <a:bodyPr/>
+                    <a:lstStyle/>
+                    <a:p>
+                      <a:pPr>
+                        <a:defRPr sz="1100"/>
+                      </a:pPr>
+                      <a:r>
+                        <a:t>-0.92</a:t>
                       </a:r>
                     </a:p>
                   </a:txBody>
                   <a:tcPr/>
                 </a:tc>
               </a:tr>
-              <a:tr h="240030">
-                <a:tc>
-                  <a:txBody>
-                    <a:bodyPr/>
-                    <a:lstStyle/>
-                    <a:p>
-                      <a:pPr>
-                        <a:defRPr sz="1100"/>
-                      </a:pPr>
-                      <a:r>
-                        <a:t>恺英网络</a:t>
+              <a:tr h="256032">
+                <a:tc>
+                  <a:txBody>
+                    <a:bodyPr/>
+                    <a:lstStyle/>
+                    <a:p>
+                      <a:pPr>
+                        <a:defRPr sz="1100"/>
+                      </a:pPr>
+                      <a:r>
+                        <a:t>星网锐捷</a:t>
+                      </a:r>
+                    </a:p>
+                  </a:txBody>
+                  <a:tcPr/>
+                </a:tc>
+                <a:tc>
+                  <a:txBody>
+                    <a:bodyPr/>
+                    <a:lstStyle/>
+                    <a:p>
+                      <a:pPr>
+                        <a:defRPr sz="1100"/>
+                      </a:pPr>
+                      <a:r>
+                        <a:t>6100</a:t>
+                      </a:r>
+                    </a:p>
+                  </a:txBody>
+                  <a:tcPr/>
+                </a:tc>
+                <a:tc>
+                  <a:txBody>
+                    <a:bodyPr/>
+                    <a:lstStyle/>
+                    <a:p>
+                      <a:pPr>
+                        <a:defRPr sz="1100"/>
+                      </a:pPr>
+                      <a:r>
+                        <a:t>35.87</a:t>
+                      </a:r>
+                    </a:p>
+                  </a:txBody>
+                  <a:tcPr/>
+                </a:tc>
+                <a:tc>
+                  <a:txBody>
+                    <a:bodyPr/>
+                    <a:lstStyle/>
+                    <a:p>
+                      <a:pPr>
+                        <a:defRPr sz="1100"/>
+                      </a:pPr>
+                      <a:r>
+                        <a:t>32.99</a:t>
+                      </a:r>
+                    </a:p>
+                  </a:txBody>
+                  <a:tcPr/>
+                </a:tc>
+                <a:tc>
+                  <a:txBody>
+                    <a:bodyPr/>
+                    <a:lstStyle/>
+                    <a:p>
+                      <a:pPr>
+                        <a:defRPr sz="1100"/>
+                      </a:pPr>
+                      <a:r>
+                        <a:t>20.12</a:t>
+                      </a:r>
+                    </a:p>
+                  </a:txBody>
+                  <a:tcPr/>
+                </a:tc>
+                <a:tc>
+                  <a:txBody>
+                    <a:bodyPr/>
+                    <a:lstStyle/>
+                    <a:p>
+                      <a:pPr>
+                        <a:defRPr sz="1100"/>
+                      </a:pPr>
+                      <a:r>
+                        <a:t>-1.76</a:t>
+                      </a:r>
+                    </a:p>
+                  </a:txBody>
+                  <a:tcPr/>
+                </a:tc>
+              </a:tr>
+              <a:tr h="256032">
+                <a:tc>
+                  <a:txBody>
+                    <a:bodyPr/>
+                    <a:lstStyle/>
+                    <a:p>
+                      <a:pPr>
+                        <a:defRPr sz="1100"/>
+                      </a:pPr>
+                      <a:r>
+                        <a:t>深信服</a:t>
+                      </a:r>
+                    </a:p>
+                  </a:txBody>
+                  <a:tcPr/>
+                </a:tc>
+                <a:tc>
+                  <a:txBody>
+                    <a:bodyPr/>
+                    <a:lstStyle/>
+                    <a:p>
+                      <a:pPr>
+                        <a:defRPr sz="1100"/>
+                      </a:pPr>
+                      <a:r>
+                        <a:t>500</a:t>
+                      </a:r>
+                    </a:p>
+                  </a:txBody>
+                  <a:tcPr/>
+                </a:tc>
+                <a:tc>
+                  <a:txBody>
+                    <a:bodyPr/>
+                    <a:lstStyle/>
+                    <a:p>
+                      <a:pPr>
+                        <a:defRPr sz="1100"/>
+                      </a:pPr>
+                      <a:r>
+                        <a:t>136.73</a:t>
+                      </a:r>
+                    </a:p>
+                  </a:txBody>
+                  <a:tcPr/>
+                </a:tc>
+                <a:tc>
+                  <a:txBody>
+                    <a:bodyPr/>
+                    <a:lstStyle/>
+                    <a:p>
+                      <a:pPr>
+                        <a:defRPr sz="1100"/>
+                      </a:pPr>
+                      <a:r>
+                        <a:t>139.37</a:t>
+                      </a:r>
+                    </a:p>
+                  </a:txBody>
+                  <a:tcPr/>
+                </a:tc>
+                <a:tc>
+                  <a:txBody>
+                    <a:bodyPr/>
+                    <a:lstStyle/>
+                    <a:p>
+                      <a:pPr>
+                        <a:defRPr sz="1100"/>
+                      </a:pPr>
+                      <a:r>
+                        <a:t>6.97</a:t>
+                      </a:r>
+                    </a:p>
+                  </a:txBody>
+                  <a:tcPr/>
+                </a:tc>
+                <a:tc>
+                  <a:txBody>
+                    <a:bodyPr/>
+                    <a:lstStyle/>
+                    <a:p>
+                      <a:pPr>
+                        <a:defRPr sz="1100"/>
+                      </a:pPr>
+                      <a:r>
+                        <a:t>0.13</a:t>
+                      </a:r>
+                    </a:p>
+                  </a:txBody>
+                  <a:tcPr/>
+                </a:tc>
+              </a:tr>
+              <a:tr h="256032">
+                <a:tc>
+                  <a:txBody>
+                    <a:bodyPr/>
+                    <a:lstStyle/>
+                    <a:p>
+                      <a:pPr>
+                        <a:defRPr sz="1100"/>
+                      </a:pPr>
+                      <a:r>
+                        <a:t>哈药股份</a:t>
                       </a:r>
                     </a:p>
                   </a:txBody>
@@ -4266,129 +4450,313 @@
                         <a:defRPr sz="1100"/>
                       </a:pPr>
                       <a:r>
-                        <a:t>17.52</a:t>
-                      </a:r>
-                    </a:p>
-                  </a:txBody>
-                  <a:tcPr/>
-                </a:tc>
-                <a:tc>
-                  <a:txBody>
-                    <a:bodyPr/>
-                    <a:lstStyle/>
-                    <a:p>
-                      <a:pPr>
-                        <a:defRPr sz="1100"/>
-                      </a:pPr>
-                      <a:r>
-                        <a:t>16.17</a:t>
-                      </a:r>
-                    </a:p>
-                  </a:txBody>
-                  <a:tcPr/>
-                </a:tc>
-                <a:tc>
-                  <a:txBody>
-                    <a:bodyPr/>
-                    <a:lstStyle/>
-                    <a:p>
-                      <a:pPr>
-                        <a:defRPr sz="1100"/>
-                      </a:pPr>
-                      <a:r>
-                        <a:t>8.09</a:t>
-                      </a:r>
-                    </a:p>
-                  </a:txBody>
-                  <a:tcPr/>
-                </a:tc>
-                <a:tc>
-                  <a:txBody>
-                    <a:bodyPr/>
-                    <a:lstStyle/>
-                    <a:p>
-                      <a:pPr>
-                        <a:defRPr sz="1100"/>
-                      </a:pPr>
-                      <a:r>
-                        <a:t>-0.67</a:t>
+                        <a:t>7.33</a:t>
+                      </a:r>
+                    </a:p>
+                  </a:txBody>
+                  <a:tcPr/>
+                </a:tc>
+                <a:tc>
+                  <a:txBody>
+                    <a:bodyPr/>
+                    <a:lstStyle/>
+                    <a:p>
+                      <a:pPr>
+                        <a:defRPr sz="1100"/>
+                      </a:pPr>
+                      <a:r>
+                        <a:t>7.33</a:t>
+                      </a:r>
+                    </a:p>
+                  </a:txBody>
+                  <a:tcPr/>
+                </a:tc>
+                <a:tc>
+                  <a:txBody>
+                    <a:bodyPr/>
+                    <a:lstStyle/>
+                    <a:p>
+                      <a:pPr>
+                        <a:defRPr sz="1100"/>
+                      </a:pPr>
+                      <a:r>
+                        <a:t>3.67</a:t>
+                      </a:r>
+                    </a:p>
+                  </a:txBody>
+                  <a:tcPr/>
+                </a:tc>
+                <a:tc>
+                  <a:txBody>
+                    <a:bodyPr/>
+                    <a:lstStyle/>
+                    <a:p>
+                      <a:pPr>
+                        <a:defRPr sz="1100"/>
+                      </a:pPr>
+                      <a:r>
+                        <a:t>0.0</a:t>
                       </a:r>
                     </a:p>
                   </a:txBody>
                   <a:tcPr/>
                 </a:tc>
               </a:tr>
-              <a:tr h="240030">
-                <a:tc>
-                  <a:txBody>
-                    <a:bodyPr/>
-                    <a:lstStyle/>
-                    <a:p>
-                      <a:pPr>
-                        <a:defRPr sz="1100"/>
-                      </a:pPr>
-                      <a:r>
-                        <a:t>星网锐捷</a:t>
-                      </a:r>
-                    </a:p>
-                  </a:txBody>
-                  <a:tcPr/>
-                </a:tc>
-                <a:tc>
-                  <a:txBody>
-                    <a:bodyPr/>
-                    <a:lstStyle/>
-                    <a:p>
-                      <a:pPr>
-                        <a:defRPr sz="1100"/>
-                      </a:pPr>
-                      <a:r>
-                        <a:t>6100</a:t>
-                      </a:r>
-                    </a:p>
-                  </a:txBody>
-                  <a:tcPr/>
-                </a:tc>
-                <a:tc>
-                  <a:txBody>
-                    <a:bodyPr/>
-                    <a:lstStyle/>
-                    <a:p>
-                      <a:pPr>
-                        <a:defRPr sz="1100"/>
-                      </a:pPr>
-                      <a:r>
-                        <a:t>35.87</a:t>
-                      </a:r>
-                    </a:p>
-                  </a:txBody>
-                  <a:tcPr/>
-                </a:tc>
-                <a:tc>
-                  <a:txBody>
-                    <a:bodyPr/>
-                    <a:lstStyle/>
-                    <a:p>
-                      <a:pPr>
-                        <a:defRPr sz="1100"/>
-                      </a:pPr>
-                      <a:r>
-                        <a:t>36.65</a:t>
-                      </a:r>
-                    </a:p>
-                  </a:txBody>
-                  <a:tcPr/>
-                </a:tc>
-                <a:tc>
-                  <a:txBody>
-                    <a:bodyPr/>
-                    <a:lstStyle/>
-                    <a:p>
-                      <a:pPr>
-                        <a:defRPr sz="1100"/>
-                      </a:pPr>
-                      <a:r>
-                        <a:t>22.36</a:t>
+              <a:tr h="256032">
+                <a:tc>
+                  <a:txBody>
+                    <a:bodyPr/>
+                    <a:lstStyle/>
+                    <a:p>
+                      <a:pPr>
+                        <a:defRPr sz="1100"/>
+                      </a:pPr>
+                      <a:r>
+                        <a:t>招商轮船</a:t>
+                      </a:r>
+                    </a:p>
+                  </a:txBody>
+                  <a:tcPr/>
+                </a:tc>
+                <a:tc>
+                  <a:txBody>
+                    <a:bodyPr/>
+                    <a:lstStyle/>
+                    <a:p>
+                      <a:pPr>
+                        <a:defRPr sz="1100"/>
+                      </a:pPr>
+                      <a:r>
+                        <a:t>500</a:t>
+                      </a:r>
+                    </a:p>
+                  </a:txBody>
+                  <a:tcPr/>
+                </a:tc>
+                <a:tc>
+                  <a:txBody>
+                    <a:bodyPr/>
+                    <a:lstStyle/>
+                    <a:p>
+                      <a:pPr>
+                        <a:defRPr sz="1100"/>
+                      </a:pPr>
+                      <a:r>
+                        <a:t>20.76</a:t>
+                      </a:r>
+                    </a:p>
+                  </a:txBody>
+                  <a:tcPr/>
+                </a:tc>
+                <a:tc>
+                  <a:txBody>
+                    <a:bodyPr/>
+                    <a:lstStyle/>
+                    <a:p>
+                      <a:pPr>
+                        <a:defRPr sz="1100"/>
+                      </a:pPr>
+                      <a:r>
+                        <a:t>20.65</a:t>
+                      </a:r>
+                    </a:p>
+                  </a:txBody>
+                  <a:tcPr/>
+                </a:tc>
+                <a:tc>
+                  <a:txBody>
+                    <a:bodyPr/>
+                    <a:lstStyle/>
+                    <a:p>
+                      <a:pPr>
+                        <a:defRPr sz="1100"/>
+                      </a:pPr>
+                      <a:r>
+                        <a:t>1.03</a:t>
+                      </a:r>
+                    </a:p>
+                  </a:txBody>
+                  <a:tcPr/>
+                </a:tc>
+                <a:tc>
+                  <a:txBody>
+                    <a:bodyPr/>
+                    <a:lstStyle/>
+                    <a:p>
+                      <a:pPr>
+                        <a:defRPr sz="1100"/>
+                      </a:pPr>
+                      <a:r>
+                        <a:t>-0.01</a:t>
+                      </a:r>
+                    </a:p>
+                  </a:txBody>
+                  <a:tcPr/>
+                </a:tc>
+              </a:tr>
+              <a:tr h="256032">
+                <a:tc>
+                  <a:txBody>
+                    <a:bodyPr/>
+                    <a:lstStyle/>
+                    <a:p>
+                      <a:pPr>
+                        <a:defRPr sz="1100"/>
+                      </a:pPr>
+                      <a:r>
+                        <a:t>睿创微纳</a:t>
+                      </a:r>
+                    </a:p>
+                  </a:txBody>
+                  <a:tcPr/>
+                </a:tc>
+                <a:tc>
+                  <a:txBody>
+                    <a:bodyPr/>
+                    <a:lstStyle/>
+                    <a:p>
+                      <a:pPr>
+                        <a:defRPr sz="1100"/>
+                      </a:pPr>
+                      <a:r>
+                        <a:t>1000</a:t>
+                      </a:r>
+                    </a:p>
+                  </a:txBody>
+                  <a:tcPr/>
+                </a:tc>
+                <a:tc>
+                  <a:txBody>
+                    <a:bodyPr/>
+                    <a:lstStyle/>
+                    <a:p>
+                      <a:pPr>
+                        <a:defRPr sz="1100"/>
+                      </a:pPr>
+                      <a:r>
+                        <a:t>177.58</a:t>
+                      </a:r>
+                    </a:p>
+                  </a:txBody>
+                  <a:tcPr/>
+                </a:tc>
+                <a:tc>
+                  <a:txBody>
+                    <a:bodyPr/>
+                    <a:lstStyle/>
+                    <a:p>
+                      <a:pPr>
+                        <a:defRPr sz="1100"/>
+                      </a:pPr>
+                      <a:r>
+                        <a:t>175.66</a:t>
+                      </a:r>
+                    </a:p>
+                  </a:txBody>
+                  <a:tcPr/>
+                </a:tc>
+                <a:tc>
+                  <a:txBody>
+                    <a:bodyPr/>
+                    <a:lstStyle/>
+                    <a:p>
+                      <a:pPr>
+                        <a:defRPr sz="1100"/>
+                      </a:pPr>
+                      <a:r>
+                        <a:t>17.57</a:t>
+                      </a:r>
+                    </a:p>
+                  </a:txBody>
+                  <a:tcPr/>
+                </a:tc>
+                <a:tc>
+                  <a:txBody>
+                    <a:bodyPr/>
+                    <a:lstStyle/>
+                    <a:p>
+                      <a:pPr>
+                        <a:defRPr sz="1100"/>
+                      </a:pPr>
+                      <a:r>
+                        <a:t>-0.19</a:t>
+                      </a:r>
+                    </a:p>
+                  </a:txBody>
+                  <a:tcPr/>
+                </a:tc>
+              </a:tr>
+              <a:tr h="256032">
+                <a:tc>
+                  <a:txBody>
+                    <a:bodyPr/>
+                    <a:lstStyle/>
+                    <a:p>
+                      <a:pPr>
+                        <a:defRPr sz="1100"/>
+                      </a:pPr>
+                      <a:r>
+                        <a:t>药明康德</a:t>
+                      </a:r>
+                    </a:p>
+                  </a:txBody>
+                  <a:tcPr/>
+                </a:tc>
+                <a:tc>
+                  <a:txBody>
+                    <a:bodyPr/>
+                    <a:lstStyle/>
+                    <a:p>
+                      <a:pPr>
+                        <a:defRPr sz="1100"/>
+                      </a:pPr>
+                      <a:r>
+                        <a:t>1300</a:t>
+                      </a:r>
+                    </a:p>
+                  </a:txBody>
+                  <a:tcPr/>
+                </a:tc>
+                <a:tc>
+                  <a:txBody>
+                    <a:bodyPr/>
+                    <a:lstStyle/>
+                    <a:p>
+                      <a:pPr>
+                        <a:defRPr sz="1100"/>
+                      </a:pPr>
+                      <a:r>
+                        <a:t>158.08</a:t>
+                      </a:r>
+                    </a:p>
+                  </a:txBody>
+                  <a:tcPr/>
+                </a:tc>
+                <a:tc>
+                  <a:txBody>
+                    <a:bodyPr/>
+                    <a:lstStyle/>
+                    <a:p>
+                      <a:pPr>
+                        <a:defRPr sz="1100"/>
+                      </a:pPr>
+                      <a:r>
+                        <a:t>161.8</a:t>
+                      </a:r>
+                    </a:p>
+                  </a:txBody>
+                  <a:tcPr/>
+                </a:tc>
+                <a:tc>
+                  <a:txBody>
+                    <a:bodyPr/>
+                    <a:lstStyle/>
+                    <a:p>
+                      <a:pPr>
+                        <a:defRPr sz="1100"/>
+                      </a:pPr>
+                      <a:r>
+                        <a:t>21.03</a:t>
                       </a:r>
                     </a:p>
                   </a:txBody>
@@ -4410,559 +4778,99 @@
                   <a:tcPr/>
                 </a:tc>
               </a:tr>
-              <a:tr h="240030">
-                <a:tc>
-                  <a:txBody>
-                    <a:bodyPr/>
-                    <a:lstStyle/>
-                    <a:p>
-                      <a:pPr>
-                        <a:defRPr sz="1100"/>
-                      </a:pPr>
-                      <a:r>
-                        <a:t>深信服</a:t>
-                      </a:r>
-                    </a:p>
-                  </a:txBody>
-                  <a:tcPr/>
-                </a:tc>
-                <a:tc>
-                  <a:txBody>
-                    <a:bodyPr/>
-                    <a:lstStyle/>
-                    <a:p>
-                      <a:pPr>
-                        <a:defRPr sz="1100"/>
-                      </a:pPr>
-                      <a:r>
-                        <a:t>500</a:t>
-                      </a:r>
-                    </a:p>
-                  </a:txBody>
-                  <a:tcPr/>
-                </a:tc>
-                <a:tc>
-                  <a:txBody>
-                    <a:bodyPr/>
-                    <a:lstStyle/>
-                    <a:p>
-                      <a:pPr>
-                        <a:defRPr sz="1100"/>
-                      </a:pPr>
-                      <a:r>
-                        <a:t>136.73</a:t>
-                      </a:r>
-                    </a:p>
-                  </a:txBody>
-                  <a:tcPr/>
-                </a:tc>
-                <a:tc>
-                  <a:txBody>
-                    <a:bodyPr/>
-                    <a:lstStyle/>
-                    <a:p>
-                      <a:pPr>
-                        <a:defRPr sz="1100"/>
-                      </a:pPr>
-                      <a:r>
-                        <a:t>141.99</a:t>
-                      </a:r>
-                    </a:p>
-                  </a:txBody>
-                  <a:tcPr/>
-                </a:tc>
-                <a:tc>
-                  <a:txBody>
-                    <a:bodyPr/>
-                    <a:lstStyle/>
-                    <a:p>
-                      <a:pPr>
-                        <a:defRPr sz="1100"/>
-                      </a:pPr>
-                      <a:r>
-                        <a:t>7.1</a:t>
-                      </a:r>
-                    </a:p>
-                  </a:txBody>
-                  <a:tcPr/>
-                </a:tc>
-                <a:tc>
-                  <a:txBody>
-                    <a:bodyPr/>
-                    <a:lstStyle/>
-                    <a:p>
-                      <a:pPr>
-                        <a:defRPr sz="1100"/>
-                      </a:pPr>
-                      <a:r>
-                        <a:t>0.26</a:t>
+              <a:tr h="256032">
+                <a:tc>
+                  <a:txBody>
+                    <a:bodyPr/>
+                    <a:lstStyle/>
+                    <a:p>
+                      <a:pPr>
+                        <a:defRPr sz="1100"/>
+                      </a:pPr>
+                      <a:r>
+                        <a:t>康龙化成</a:t>
+                      </a:r>
+                    </a:p>
+                  </a:txBody>
+                  <a:tcPr/>
+                </a:tc>
+                <a:tc>
+                  <a:txBody>
+                    <a:bodyPr/>
+                    <a:lstStyle/>
+                    <a:p>
+                      <a:pPr>
+                        <a:defRPr sz="1100"/>
+                      </a:pPr>
+                      <a:r>
+                        <a:t>1000</a:t>
+                      </a:r>
+                    </a:p>
+                  </a:txBody>
+                  <a:tcPr/>
+                </a:tc>
+                <a:tc>
+                  <a:txBody>
+                    <a:bodyPr/>
+                    <a:lstStyle/>
+                    <a:p>
+                      <a:pPr>
+                        <a:defRPr sz="1100"/>
+                      </a:pPr>
+                      <a:r>
+                        <a:t>42.65</a:t>
+                      </a:r>
+                    </a:p>
+                  </a:txBody>
+                  <a:tcPr/>
+                </a:tc>
+                <a:tc>
+                  <a:txBody>
+                    <a:bodyPr/>
+                    <a:lstStyle/>
+                    <a:p>
+                      <a:pPr>
+                        <a:defRPr sz="1100"/>
+                      </a:pPr>
+                      <a:r>
+                        <a:t>43.13</a:t>
+                      </a:r>
+                    </a:p>
+                  </a:txBody>
+                  <a:tcPr/>
+                </a:tc>
+                <a:tc>
+                  <a:txBody>
+                    <a:bodyPr/>
+                    <a:lstStyle/>
+                    <a:p>
+                      <a:pPr>
+                        <a:defRPr sz="1100"/>
+                      </a:pPr>
+                      <a:r>
+                        <a:t>4.31</a:t>
+                      </a:r>
+                    </a:p>
+                  </a:txBody>
+                  <a:tcPr/>
+                </a:tc>
+                <a:tc>
+                  <a:txBody>
+                    <a:bodyPr/>
+                    <a:lstStyle/>
+                    <a:p>
+                      <a:pPr>
+                        <a:defRPr sz="1100"/>
+                      </a:pPr>
+                      <a:r>
+                        <a:t>0.05</a:t>
                       </a:r>
                     </a:p>
                   </a:txBody>
                   <a:tcPr/>
                 </a:tc>
               </a:tr>
-              <a:tr h="240030">
-                <a:tc>
-                  <a:txBody>
-                    <a:bodyPr/>
-                    <a:lstStyle/>
-                    <a:p>
-                      <a:pPr>
-                        <a:defRPr sz="1100"/>
-                      </a:pPr>
-                      <a:r>
-                        <a:t>哈药股份</a:t>
-                      </a:r>
-                    </a:p>
-                  </a:txBody>
-                  <a:tcPr/>
-                </a:tc>
-                <a:tc>
-                  <a:txBody>
-                    <a:bodyPr/>
-                    <a:lstStyle/>
-                    <a:p>
-                      <a:pPr>
-                        <a:defRPr sz="1100"/>
-                      </a:pPr>
-                      <a:r>
-                        <a:t>5000</a:t>
-                      </a:r>
-                    </a:p>
-                  </a:txBody>
-                  <a:tcPr/>
-                </a:tc>
-                <a:tc>
-                  <a:txBody>
-                    <a:bodyPr/>
-                    <a:lstStyle/>
-                    <a:p>
-                      <a:pPr>
-                        <a:defRPr sz="1100"/>
-                      </a:pPr>
-                      <a:r>
-                        <a:t>7.33</a:t>
-                      </a:r>
-                    </a:p>
-                  </a:txBody>
-                  <a:tcPr/>
-                </a:tc>
-                <a:tc>
-                  <a:txBody>
-                    <a:bodyPr/>
-                    <a:lstStyle/>
-                    <a:p>
-                      <a:pPr>
-                        <a:defRPr sz="1100"/>
-                      </a:pPr>
-                      <a:r>
-                        <a:t>8.14</a:t>
-                      </a:r>
-                    </a:p>
-                  </a:txBody>
-                  <a:tcPr/>
-                </a:tc>
-                <a:tc>
-                  <a:txBody>
-                    <a:bodyPr/>
-                    <a:lstStyle/>
-                    <a:p>
-                      <a:pPr>
-                        <a:defRPr sz="1100"/>
-                      </a:pPr>
-                      <a:r>
-                        <a:t>4.07</a:t>
-                      </a:r>
-                    </a:p>
-                  </a:txBody>
-                  <a:tcPr/>
-                </a:tc>
-                <a:tc>
-                  <a:txBody>
-                    <a:bodyPr/>
-                    <a:lstStyle/>
-                    <a:p>
-                      <a:pPr>
-                        <a:defRPr sz="1100"/>
-                      </a:pPr>
-                      <a:r>
-                        <a:t>0.41</a:t>
-                      </a:r>
-                    </a:p>
-                  </a:txBody>
-                  <a:tcPr/>
-                </a:tc>
-              </a:tr>
-              <a:tr h="240030">
-                <a:tc>
-                  <a:txBody>
-                    <a:bodyPr/>
-                    <a:lstStyle/>
-                    <a:p>
-                      <a:pPr>
-                        <a:defRPr sz="1100"/>
-                      </a:pPr>
-                      <a:r>
-                        <a:t>招商轮船</a:t>
-                      </a:r>
-                    </a:p>
-                  </a:txBody>
-                  <a:tcPr/>
-                </a:tc>
-                <a:tc>
-                  <a:txBody>
-                    <a:bodyPr/>
-                    <a:lstStyle/>
-                    <a:p>
-                      <a:pPr>
-                        <a:defRPr sz="1100"/>
-                      </a:pPr>
-                      <a:r>
-                        <a:t>500</a:t>
-                      </a:r>
-                    </a:p>
-                  </a:txBody>
-                  <a:tcPr/>
-                </a:tc>
-                <a:tc>
-                  <a:txBody>
-                    <a:bodyPr/>
-                    <a:lstStyle/>
-                    <a:p>
-                      <a:pPr>
-                        <a:defRPr sz="1100"/>
-                      </a:pPr>
-                      <a:r>
-                        <a:t>20.76</a:t>
-                      </a:r>
-                    </a:p>
-                  </a:txBody>
-                  <a:tcPr/>
-                </a:tc>
-                <a:tc>
-                  <a:txBody>
-                    <a:bodyPr/>
-                    <a:lstStyle/>
-                    <a:p>
-                      <a:pPr>
-                        <a:defRPr sz="1100"/>
-                      </a:pPr>
-                      <a:r>
-                        <a:t>20.93</a:t>
-                      </a:r>
-                    </a:p>
-                  </a:txBody>
-                  <a:tcPr/>
-                </a:tc>
-                <a:tc>
-                  <a:txBody>
-                    <a:bodyPr/>
-                    <a:lstStyle/>
-                    <a:p>
-                      <a:pPr>
-                        <a:defRPr sz="1100"/>
-                      </a:pPr>
-                      <a:r>
-                        <a:t>1.05</a:t>
-                      </a:r>
-                    </a:p>
-                  </a:txBody>
-                  <a:tcPr/>
-                </a:tc>
-                <a:tc>
-                  <a:txBody>
-                    <a:bodyPr/>
-                    <a:lstStyle/>
-                    <a:p>
-                      <a:pPr>
-                        <a:defRPr sz="1100"/>
-                      </a:pPr>
-                      <a:r>
-                        <a:t>0.01</a:t>
-                      </a:r>
-                    </a:p>
-                  </a:txBody>
-                  <a:tcPr/>
-                </a:tc>
-              </a:tr>
-              <a:tr h="240030">
-                <a:tc>
-                  <a:txBody>
-                    <a:bodyPr/>
-                    <a:lstStyle/>
-                    <a:p>
-                      <a:pPr>
-                        <a:defRPr sz="1100"/>
-                      </a:pPr>
-                      <a:r>
-                        <a:t>睿创微纳</a:t>
-                      </a:r>
-                    </a:p>
-                  </a:txBody>
-                  <a:tcPr/>
-                </a:tc>
-                <a:tc>
-                  <a:txBody>
-                    <a:bodyPr/>
-                    <a:lstStyle/>
-                    <a:p>
-                      <a:pPr>
-                        <a:defRPr sz="1100"/>
-                      </a:pPr>
-                      <a:r>
-                        <a:t>1000</a:t>
-                      </a:r>
-                    </a:p>
-                  </a:txBody>
-                  <a:tcPr/>
-                </a:tc>
-                <a:tc>
-                  <a:txBody>
-                    <a:bodyPr/>
-                    <a:lstStyle/>
-                    <a:p>
-                      <a:pPr>
-                        <a:defRPr sz="1100"/>
-                      </a:pPr>
-                      <a:r>
-                        <a:t>177.58</a:t>
-                      </a:r>
-                    </a:p>
-                  </a:txBody>
-                  <a:tcPr/>
-                </a:tc>
-                <a:tc>
-                  <a:txBody>
-                    <a:bodyPr/>
-                    <a:lstStyle/>
-                    <a:p>
-                      <a:pPr>
-                        <a:defRPr sz="1100"/>
-                      </a:pPr>
-                      <a:r>
-                        <a:t>178.85</a:t>
-                      </a:r>
-                    </a:p>
-                  </a:txBody>
-                  <a:tcPr/>
-                </a:tc>
-                <a:tc>
-                  <a:txBody>
-                    <a:bodyPr/>
-                    <a:lstStyle/>
-                    <a:p>
-                      <a:pPr>
-                        <a:defRPr sz="1100"/>
-                      </a:pPr>
-                      <a:r>
-                        <a:t>17.89</a:t>
-                      </a:r>
-                    </a:p>
-                  </a:txBody>
-                  <a:tcPr/>
-                </a:tc>
-                <a:tc>
-                  <a:txBody>
-                    <a:bodyPr/>
-                    <a:lstStyle/>
-                    <a:p>
-                      <a:pPr>
-                        <a:defRPr sz="1100"/>
-                      </a:pPr>
-                      <a:r>
-                        <a:t>0.13</a:t>
-                      </a:r>
-                    </a:p>
-                  </a:txBody>
-                  <a:tcPr/>
-                </a:tc>
-              </a:tr>
-              <a:tr h="240030">
-                <a:tc>
-                  <a:txBody>
-                    <a:bodyPr/>
-                    <a:lstStyle/>
-                    <a:p>
-                      <a:pPr>
-                        <a:defRPr sz="1100"/>
-                      </a:pPr>
-                      <a:r>
-                        <a:t>药明康德</a:t>
-                      </a:r>
-                    </a:p>
-                  </a:txBody>
-                  <a:tcPr/>
-                </a:tc>
-                <a:tc>
-                  <a:txBody>
-                    <a:bodyPr/>
-                    <a:lstStyle/>
-                    <a:p>
-                      <a:pPr>
-                        <a:defRPr sz="1100"/>
-                      </a:pPr>
-                      <a:r>
-                        <a:t>1300</a:t>
-                      </a:r>
-                    </a:p>
-                  </a:txBody>
-                  <a:tcPr/>
-                </a:tc>
-                <a:tc>
-                  <a:txBody>
-                    <a:bodyPr/>
-                    <a:lstStyle/>
-                    <a:p>
-                      <a:pPr>
-                        <a:defRPr sz="1100"/>
-                      </a:pPr>
-                      <a:r>
-                        <a:t>158.08</a:t>
-                      </a:r>
-                    </a:p>
-                  </a:txBody>
-                  <a:tcPr/>
-                </a:tc>
-                <a:tc>
-                  <a:txBody>
-                    <a:bodyPr/>
-                    <a:lstStyle/>
-                    <a:p>
-                      <a:pPr>
-                        <a:defRPr sz="1100"/>
-                      </a:pPr>
-                      <a:r>
-                        <a:t>162.4</a:t>
-                      </a:r>
-                    </a:p>
-                  </a:txBody>
-                  <a:tcPr/>
-                </a:tc>
-                <a:tc>
-                  <a:txBody>
-                    <a:bodyPr/>
-                    <a:lstStyle/>
-                    <a:p>
-                      <a:pPr>
-                        <a:defRPr sz="1100"/>
-                      </a:pPr>
-                      <a:r>
-                        <a:t>21.11</a:t>
-                      </a:r>
-                    </a:p>
-                  </a:txBody>
-                  <a:tcPr/>
-                </a:tc>
-                <a:tc>
-                  <a:txBody>
-                    <a:bodyPr/>
-                    <a:lstStyle/>
-                    <a:p>
-                      <a:pPr>
-                        <a:defRPr sz="1100"/>
-                      </a:pPr>
-                      <a:r>
-                        <a:t>0.56</a:t>
-                      </a:r>
-                    </a:p>
-                  </a:txBody>
-                  <a:tcPr/>
-                </a:tc>
-              </a:tr>
-              <a:tr h="240030">
-                <a:tc>
-                  <a:txBody>
-                    <a:bodyPr/>
-                    <a:lstStyle/>
-                    <a:p>
-                      <a:pPr>
-                        <a:defRPr sz="1100"/>
-                      </a:pPr>
-                      <a:r>
-                        <a:t>康龙化成</a:t>
-                      </a:r>
-                    </a:p>
-                  </a:txBody>
-                  <a:tcPr/>
-                </a:tc>
-                <a:tc>
-                  <a:txBody>
-                    <a:bodyPr/>
-                    <a:lstStyle/>
-                    <a:p>
-                      <a:pPr>
-                        <a:defRPr sz="1100"/>
-                      </a:pPr>
-                      <a:r>
-                        <a:t>1000</a:t>
-                      </a:r>
-                    </a:p>
-                  </a:txBody>
-                  <a:tcPr/>
-                </a:tc>
-                <a:tc>
-                  <a:txBody>
-                    <a:bodyPr/>
-                    <a:lstStyle/>
-                    <a:p>
-                      <a:pPr>
-                        <a:defRPr sz="1100"/>
-                      </a:pPr>
-                      <a:r>
-                        <a:t>42.65</a:t>
-                      </a:r>
-                    </a:p>
-                  </a:txBody>
-                  <a:tcPr/>
-                </a:tc>
-                <a:tc>
-                  <a:txBody>
-                    <a:bodyPr/>
-                    <a:lstStyle/>
-                    <a:p>
-                      <a:pPr>
-                        <a:defRPr sz="1100"/>
-                      </a:pPr>
-                      <a:r>
-                        <a:t>43.5</a:t>
-                      </a:r>
-                    </a:p>
-                  </a:txBody>
-                  <a:tcPr/>
-                </a:tc>
-                <a:tc>
-                  <a:txBody>
-                    <a:bodyPr/>
-                    <a:lstStyle/>
-                    <a:p>
-                      <a:pPr>
-                        <a:defRPr sz="1100"/>
-                      </a:pPr>
-                      <a:r>
-                        <a:t>4.35</a:t>
-                      </a:r>
-                    </a:p>
-                  </a:txBody>
-                  <a:tcPr/>
-                </a:tc>
-                <a:tc>
-                  <a:txBody>
-                    <a:bodyPr/>
-                    <a:lstStyle/>
-                    <a:p>
-                      <a:pPr>
-                        <a:defRPr sz="1100"/>
-                      </a:pPr>
-                      <a:r>
-                        <a:t>0.09</a:t>
-                      </a:r>
-                    </a:p>
-                  </a:txBody>
-                  <a:tcPr/>
-                </a:tc>
-              </a:tr>
-              <a:tr h="240030">
+              <a:tr h="256032">
                 <a:tc>
                   <a:txBody>
                     <a:bodyPr/>
@@ -5017,37 +4925,37 @@
                         <a:defRPr sz="1100"/>
                       </a:pPr>
                       <a:r>
-                        <a:t>40.28</a:t>
-                      </a:r>
-                    </a:p>
-                  </a:txBody>
-                  <a:tcPr/>
-                </a:tc>
-                <a:tc>
-                  <a:txBody>
-                    <a:bodyPr/>
-                    <a:lstStyle/>
-                    <a:p>
-                      <a:pPr>
-                        <a:defRPr sz="1100"/>
-                      </a:pPr>
-                      <a:r>
-                        <a:t>16.11</a:t>
-                      </a:r>
-                    </a:p>
-                  </a:txBody>
-                  <a:tcPr/>
-                </a:tc>
-                <a:tc>
-                  <a:txBody>
-                    <a:bodyPr/>
-                    <a:lstStyle/>
-                    <a:p>
-                      <a:pPr>
-                        <a:defRPr sz="1100"/>
-                      </a:pPr>
-                      <a:r>
-                        <a:t>-1.31</a:t>
+                        <a:t>38.07</a:t>
+                      </a:r>
+                    </a:p>
+                  </a:txBody>
+                  <a:tcPr/>
+                </a:tc>
+                <a:tc>
+                  <a:txBody>
+                    <a:bodyPr/>
+                    <a:lstStyle/>
+                    <a:p>
+                      <a:pPr>
+                        <a:defRPr sz="1100"/>
+                      </a:pPr>
+                      <a:r>
+                        <a:t>15.23</a:t>
+                      </a:r>
+                    </a:p>
+                  </a:txBody>
+                  <a:tcPr/>
+                </a:tc>
+                <a:tc>
+                  <a:txBody>
+                    <a:bodyPr/>
+                    <a:lstStyle/>
+                    <a:p>
+                      <a:pPr>
+                        <a:defRPr sz="1100"/>
+                      </a:pPr>
+                      <a:r>
+                        <a:t>-2.2</a:t>
                       </a:r>
                     </a:p>
                   </a:txBody>
@@ -5141,7 +5049,7 @@
               <a:defRPr sz="1500"/>
             </a:pPr>
             <a:r>
-              <a:t>中国平安（601318，保险）：综合71.5分；基本面优秀，具备中长期配置价值；中期趋势向上，可关注/持有。</a:t>
+              <a:t>长江电力（600900，电力）：综合74.0分；基本面优秀，具备中长期配置价值；中期趋势向上，可关注/持有。</a:t>
             </a:r>
           </a:p>
           <a:p>
@@ -5157,7 +5065,7 @@
               <a:defRPr sz="1500"/>
             </a:pPr>
             <a:r>
-              <a:t>长江电力（600900，电力）：综合69.0分；基本面优秀，具备中长期配置价值；中期趋势向上，可关注/持有。</a:t>
+              <a:t>中国平安（601318，保险）：综合64.5分；基本面优秀，具备中长期配置价值；趋势中性，观望。</a:t>
             </a:r>
           </a:p>
           <a:p>

--- a/outputs/12_中期路演.pptx
+++ b/outputs/12_中期路演.pptx
@@ -3167,7 +3167,7 @@
               <a:defRPr sz="1500"/>
             </a:pPr>
             <a:r>
-              <a:t>数据截止：2026-09-28</a:t>
+              <a:t>数据截止：2026-09-29</a:t>
             </a:r>
           </a:p>
         </p:txBody>
@@ -3255,7 +3255,7 @@
               <a:defRPr sz="1500"/>
             </a:pPr>
             <a:r>
-              <a:t>当前总资产：471.89万元</a:t>
+              <a:t>当前总资产：471.64万元</a:t>
             </a:r>
           </a:p>
           <a:p>
@@ -3263,7 +3263,7 @@
               <a:defRPr sz="1500"/>
             </a:pPr>
             <a:r>
-              <a:t>累计收益率：-5.62%</a:t>
+              <a:t>累计收益率：-5.67%</a:t>
             </a:r>
           </a:p>
           <a:p>
@@ -3271,7 +3271,7 @@
               <a:defRPr sz="1500"/>
             </a:pPr>
             <a:r>
-              <a:t>同期沪深300：-4.56%</a:t>
+              <a:t>同期沪深300：-4.29%</a:t>
             </a:r>
           </a:p>
           <a:p>
@@ -3279,7 +3279,7 @@
               <a:defRPr sz="1500"/>
             </a:pPr>
             <a:r>
-              <a:t>现金：211.02万元（44.7%）</a:t>
+              <a:t>现金：95.84万元（20.3%）</a:t>
             </a:r>
           </a:p>
           <a:p>
@@ -3287,7 +3287,7 @@
               <a:defRPr sz="1500"/>
             </a:pPr>
             <a:r>
-              <a:t>持仓：13只，累计交易35笔</a:t>
+              <a:t>持仓：14只，累计交易37笔</a:t>
             </a:r>
           </a:p>
         </p:txBody>
@@ -3582,7 +3582,7 @@
                 <a:gridCol w="1849069"/>
                 <a:gridCol w="1849070"/>
               </a:tblGrid>
-              <a:tr h="256032">
+              <a:tr h="240030">
                 <a:tc>
                   <a:txBody>
                     <a:bodyPr/>
@@ -3674,7 +3674,7 @@
                   <a:tcPr/>
                 </a:tc>
               </a:tr>
-              <a:tr h="256032">
+              <a:tr h="240030">
                 <a:tc>
                   <a:txBody>
                     <a:bodyPr/>
@@ -3766,7 +3766,7 @@
                   <a:tcPr/>
                 </a:tc>
               </a:tr>
-              <a:tr h="256032">
+              <a:tr h="240030">
                 <a:tc>
                   <a:txBody>
                     <a:bodyPr/>
@@ -3821,44 +3821,44 @@
                         <a:defRPr sz="1100"/>
                       </a:pPr>
                       <a:r>
-                        <a:t>52.4</a:t>
-                      </a:r>
-                    </a:p>
-                  </a:txBody>
-                  <a:tcPr/>
-                </a:tc>
-                <a:tc>
-                  <a:txBody>
-                    <a:bodyPr/>
-                    <a:lstStyle/>
-                    <a:p>
-                      <a:pPr>
-                        <a:defRPr sz="1100"/>
-                      </a:pPr>
-                      <a:r>
-                        <a:t>95.37</a:t>
-                      </a:r>
-                    </a:p>
-                  </a:txBody>
-                  <a:tcPr/>
-                </a:tc>
-                <a:tc>
-                  <a:txBody>
-                    <a:bodyPr/>
-                    <a:lstStyle/>
-                    <a:p>
-                      <a:pPr>
-                        <a:defRPr sz="1100"/>
-                      </a:pPr>
-                      <a:r>
-                        <a:t>-6.77</a:t>
+                        <a:t>52.5</a:t>
+                      </a:r>
+                    </a:p>
+                  </a:txBody>
+                  <a:tcPr/>
+                </a:tc>
+                <a:tc>
+                  <a:txBody>
+                    <a:bodyPr/>
+                    <a:lstStyle/>
+                    <a:p>
+                      <a:pPr>
+                        <a:defRPr sz="1100"/>
+                      </a:pPr>
+                      <a:r>
+                        <a:t>95.55</a:t>
+                      </a:r>
+                    </a:p>
+                  </a:txBody>
+                  <a:tcPr/>
+                </a:tc>
+                <a:tc>
+                  <a:txBody>
+                    <a:bodyPr/>
+                    <a:lstStyle/>
+                    <a:p>
+                      <a:pPr>
+                        <a:defRPr sz="1100"/>
+                      </a:pPr>
+                      <a:r>
+                        <a:t>-6.59</a:t>
                       </a:r>
                     </a:p>
                   </a:txBody>
                   <a:tcPr/>
                 </a:tc>
               </a:tr>
-              <a:tr h="256032">
+              <a:tr h="240030">
                 <a:tc>
                   <a:txBody>
                     <a:bodyPr/>
@@ -3883,52 +3883,1064 @@
                         <a:defRPr sz="1100"/>
                       </a:pPr>
                       <a:r>
-                        <a:t>10300</a:t>
-                      </a:r>
-                    </a:p>
-                  </a:txBody>
-                  <a:tcPr/>
-                </a:tc>
-                <a:tc>
-                  <a:txBody>
-                    <a:bodyPr/>
-                    <a:lstStyle/>
-                    <a:p>
-                      <a:pPr>
-                        <a:defRPr sz="1100"/>
-                      </a:pPr>
-                      <a:r>
-                        <a:t>31.41</a:t>
-                      </a:r>
-                    </a:p>
-                  </a:txBody>
-                  <a:tcPr/>
-                </a:tc>
-                <a:tc>
-                  <a:txBody>
-                    <a:bodyPr/>
-                    <a:lstStyle/>
-                    <a:p>
-                      <a:pPr>
-                        <a:defRPr sz="1100"/>
-                      </a:pPr>
-                      <a:r>
-                        <a:t>29.42</a:t>
-                      </a:r>
-                    </a:p>
-                  </a:txBody>
-                  <a:tcPr/>
-                </a:tc>
-                <a:tc>
-                  <a:txBody>
-                    <a:bodyPr/>
-                    <a:lstStyle/>
-                    <a:p>
-                      <a:pPr>
-                        <a:defRPr sz="1100"/>
-                      </a:pPr>
-                      <a:r>
-                        <a:t>30.3</a:t>
+                        <a:t>38600</a:t>
+                      </a:r>
+                    </a:p>
+                  </a:txBody>
+                  <a:tcPr/>
+                </a:tc>
+                <a:tc>
+                  <a:txBody>
+                    <a:bodyPr/>
+                    <a:lstStyle/>
+                    <a:p>
+                      <a:pPr>
+                        <a:defRPr sz="1100"/>
+                      </a:pPr>
+                      <a:r>
+                        <a:t>30.05</a:t>
+                      </a:r>
+                    </a:p>
+                  </a:txBody>
+                  <a:tcPr/>
+                </a:tc>
+                <a:tc>
+                  <a:txBody>
+                    <a:bodyPr/>
+                    <a:lstStyle/>
+                    <a:p>
+                      <a:pPr>
+                        <a:defRPr sz="1100"/>
+                      </a:pPr>
+                      <a:r>
+                        <a:t>29.46</a:t>
+                      </a:r>
+                    </a:p>
+                  </a:txBody>
+                  <a:tcPr/>
+                </a:tc>
+                <a:tc>
+                  <a:txBody>
+                    <a:bodyPr/>
+                    <a:lstStyle/>
+                    <a:p>
+                      <a:pPr>
+                        <a:defRPr sz="1100"/>
+                      </a:pPr>
+                      <a:r>
+                        <a:t>113.72</a:t>
+                      </a:r>
+                    </a:p>
+                  </a:txBody>
+                  <a:tcPr/>
+                </a:tc>
+                <a:tc>
+                  <a:txBody>
+                    <a:bodyPr/>
+                    <a:lstStyle/>
+                    <a:p>
+                      <a:pPr>
+                        <a:defRPr sz="1100"/>
+                      </a:pPr>
+                      <a:r>
+                        <a:t>-2.26</a:t>
+                      </a:r>
+                    </a:p>
+                  </a:txBody>
+                  <a:tcPr/>
+                </a:tc>
+              </a:tr>
+              <a:tr h="240030">
+                <a:tc>
+                  <a:txBody>
+                    <a:bodyPr/>
+                    <a:lstStyle/>
+                    <a:p>
+                      <a:pPr>
+                        <a:defRPr sz="1100"/>
+                      </a:pPr>
+                      <a:r>
+                        <a:t>长江电力</a:t>
+                      </a:r>
+                    </a:p>
+                  </a:txBody>
+                  <a:tcPr/>
+                </a:tc>
+                <a:tc>
+                  <a:txBody>
+                    <a:bodyPr/>
+                    <a:lstStyle/>
+                    <a:p>
+                      <a:pPr>
+                        <a:defRPr sz="1100"/>
+                      </a:pPr>
+                      <a:r>
+                        <a:t>9300</a:t>
+                      </a:r>
+                    </a:p>
+                  </a:txBody>
+                  <a:tcPr/>
+                </a:tc>
+                <a:tc>
+                  <a:txBody>
+                    <a:bodyPr/>
+                    <a:lstStyle/>
+                    <a:p>
+                      <a:pPr>
+                        <a:defRPr sz="1100"/>
+                      </a:pPr>
+                      <a:r>
+                        <a:t>27.89</a:t>
+                      </a:r>
+                    </a:p>
+                  </a:txBody>
+                  <a:tcPr/>
+                </a:tc>
+                <a:tc>
+                  <a:txBody>
+                    <a:bodyPr/>
+                    <a:lstStyle/>
+                    <a:p>
+                      <a:pPr>
+                        <a:defRPr sz="1100"/>
+                      </a:pPr>
+                      <a:r>
+                        <a:t>28.38</a:t>
+                      </a:r>
+                    </a:p>
+                  </a:txBody>
+                  <a:tcPr/>
+                </a:tc>
+                <a:tc>
+                  <a:txBody>
+                    <a:bodyPr/>
+                    <a:lstStyle/>
+                    <a:p>
+                      <a:pPr>
+                        <a:defRPr sz="1100"/>
+                      </a:pPr>
+                      <a:r>
+                        <a:t>26.39</a:t>
+                      </a:r>
+                    </a:p>
+                  </a:txBody>
+                  <a:tcPr/>
+                </a:tc>
+                <a:tc>
+                  <a:txBody>
+                    <a:bodyPr/>
+                    <a:lstStyle/>
+                    <a:p>
+                      <a:pPr>
+                        <a:defRPr sz="1100"/>
+                      </a:pPr>
+                      <a:r>
+                        <a:t>0.46</a:t>
+                      </a:r>
+                    </a:p>
+                  </a:txBody>
+                  <a:tcPr/>
+                </a:tc>
+              </a:tr>
+              <a:tr h="240030">
+                <a:tc>
+                  <a:txBody>
+                    <a:bodyPr/>
+                    <a:lstStyle/>
+                    <a:p>
+                      <a:pPr>
+                        <a:defRPr sz="1100"/>
+                      </a:pPr>
+                      <a:r>
+                        <a:t>新集能源</a:t>
+                      </a:r>
+                    </a:p>
+                  </a:txBody>
+                  <a:tcPr/>
+                </a:tc>
+                <a:tc>
+                  <a:txBody>
+                    <a:bodyPr/>
+                    <a:lstStyle/>
+                    <a:p>
+                      <a:pPr>
+                        <a:defRPr sz="1100"/>
+                      </a:pPr>
+                      <a:r>
+                        <a:t>9500</a:t>
+                      </a:r>
+                    </a:p>
+                  </a:txBody>
+                  <a:tcPr/>
+                </a:tc>
+                <a:tc>
+                  <a:txBody>
+                    <a:bodyPr/>
+                    <a:lstStyle/>
+                    <a:p>
+                      <a:pPr>
+                        <a:defRPr sz="1100"/>
+                      </a:pPr>
+                      <a:r>
+                        <a:t>10.47</a:t>
+                      </a:r>
+                    </a:p>
+                  </a:txBody>
+                  <a:tcPr/>
+                </a:tc>
+                <a:tc>
+                  <a:txBody>
+                    <a:bodyPr/>
+                    <a:lstStyle/>
+                    <a:p>
+                      <a:pPr>
+                        <a:defRPr sz="1100"/>
+                      </a:pPr>
+                      <a:r>
+                        <a:t>11.36</a:t>
+                      </a:r>
+                    </a:p>
+                  </a:txBody>
+                  <a:tcPr/>
+                </a:tc>
+                <a:tc>
+                  <a:txBody>
+                    <a:bodyPr/>
+                    <a:lstStyle/>
+                    <a:p>
+                      <a:pPr>
+                        <a:defRPr sz="1100"/>
+                      </a:pPr>
+                      <a:r>
+                        <a:t>10.79</a:t>
+                      </a:r>
+                    </a:p>
+                  </a:txBody>
+                  <a:tcPr/>
+                </a:tc>
+                <a:tc>
+                  <a:txBody>
+                    <a:bodyPr/>
+                    <a:lstStyle/>
+                    <a:p>
+                      <a:pPr>
+                        <a:defRPr sz="1100"/>
+                      </a:pPr>
+                      <a:r>
+                        <a:t>0.84</a:t>
+                      </a:r>
+                    </a:p>
+                  </a:txBody>
+                  <a:tcPr/>
+                </a:tc>
+              </a:tr>
+              <a:tr h="240030">
+                <a:tc>
+                  <a:txBody>
+                    <a:bodyPr/>
+                    <a:lstStyle/>
+                    <a:p>
+                      <a:pPr>
+                        <a:defRPr sz="1100"/>
+                      </a:pPr>
+                      <a:r>
+                        <a:t>恺英网络</a:t>
+                      </a:r>
+                    </a:p>
+                  </a:txBody>
+                  <a:tcPr/>
+                </a:tc>
+                <a:tc>
+                  <a:txBody>
+                    <a:bodyPr/>
+                    <a:lstStyle/>
+                    <a:p>
+                      <a:pPr>
+                        <a:defRPr sz="1100"/>
+                      </a:pPr>
+                      <a:r>
+                        <a:t>5000</a:t>
+                      </a:r>
+                    </a:p>
+                  </a:txBody>
+                  <a:tcPr/>
+                </a:tc>
+                <a:tc>
+                  <a:txBody>
+                    <a:bodyPr/>
+                    <a:lstStyle/>
+                    <a:p>
+                      <a:pPr>
+                        <a:defRPr sz="1100"/>
+                      </a:pPr>
+                      <a:r>
+                        <a:t>17.52</a:t>
+                      </a:r>
+                    </a:p>
+                  </a:txBody>
+                  <a:tcPr/>
+                </a:tc>
+                <a:tc>
+                  <a:txBody>
+                    <a:bodyPr/>
+                    <a:lstStyle/>
+                    <a:p>
+                      <a:pPr>
+                        <a:defRPr sz="1100"/>
+                      </a:pPr>
+                      <a:r>
+                        <a:t>15.87</a:t>
+                      </a:r>
+                    </a:p>
+                  </a:txBody>
+                  <a:tcPr/>
+                </a:tc>
+                <a:tc>
+                  <a:txBody>
+                    <a:bodyPr/>
+                    <a:lstStyle/>
+                    <a:p>
+                      <a:pPr>
+                        <a:defRPr sz="1100"/>
+                      </a:pPr>
+                      <a:r>
+                        <a:t>7.93</a:t>
+                      </a:r>
+                    </a:p>
+                  </a:txBody>
+                  <a:tcPr/>
+                </a:tc>
+                <a:tc>
+                  <a:txBody>
+                    <a:bodyPr/>
+                    <a:lstStyle/>
+                    <a:p>
+                      <a:pPr>
+                        <a:defRPr sz="1100"/>
+                      </a:pPr>
+                      <a:r>
+                        <a:t>-0.83</a:t>
+                      </a:r>
+                    </a:p>
+                  </a:txBody>
+                  <a:tcPr/>
+                </a:tc>
+              </a:tr>
+              <a:tr h="240030">
+                <a:tc>
+                  <a:txBody>
+                    <a:bodyPr/>
+                    <a:lstStyle/>
+                    <a:p>
+                      <a:pPr>
+                        <a:defRPr sz="1100"/>
+                      </a:pPr>
+                      <a:r>
+                        <a:t>星网锐捷</a:t>
+                      </a:r>
+                    </a:p>
+                  </a:txBody>
+                  <a:tcPr/>
+                </a:tc>
+                <a:tc>
+                  <a:txBody>
+                    <a:bodyPr/>
+                    <a:lstStyle/>
+                    <a:p>
+                      <a:pPr>
+                        <a:defRPr sz="1100"/>
+                      </a:pPr>
+                      <a:r>
+                        <a:t>6100</a:t>
+                      </a:r>
+                    </a:p>
+                  </a:txBody>
+                  <a:tcPr/>
+                </a:tc>
+                <a:tc>
+                  <a:txBody>
+                    <a:bodyPr/>
+                    <a:lstStyle/>
+                    <a:p>
+                      <a:pPr>
+                        <a:defRPr sz="1100"/>
+                      </a:pPr>
+                      <a:r>
+                        <a:t>35.87</a:t>
+                      </a:r>
+                    </a:p>
+                  </a:txBody>
+                  <a:tcPr/>
+                </a:tc>
+                <a:tc>
+                  <a:txBody>
+                    <a:bodyPr/>
+                    <a:lstStyle/>
+                    <a:p>
+                      <a:pPr>
+                        <a:defRPr sz="1100"/>
+                      </a:pPr>
+                      <a:r>
+                        <a:t>32.86</a:t>
+                      </a:r>
+                    </a:p>
+                  </a:txBody>
+                  <a:tcPr/>
+                </a:tc>
+                <a:tc>
+                  <a:txBody>
+                    <a:bodyPr/>
+                    <a:lstStyle/>
+                    <a:p>
+                      <a:pPr>
+                        <a:defRPr sz="1100"/>
+                      </a:pPr>
+                      <a:r>
+                        <a:t>20.04</a:t>
+                      </a:r>
+                    </a:p>
+                  </a:txBody>
+                  <a:tcPr/>
+                </a:tc>
+                <a:tc>
+                  <a:txBody>
+                    <a:bodyPr/>
+                    <a:lstStyle/>
+                    <a:p>
+                      <a:pPr>
+                        <a:defRPr sz="1100"/>
+                      </a:pPr>
+                      <a:r>
+                        <a:t>-1.84</a:t>
+                      </a:r>
+                    </a:p>
+                  </a:txBody>
+                  <a:tcPr/>
+                </a:tc>
+              </a:tr>
+              <a:tr h="240030">
+                <a:tc>
+                  <a:txBody>
+                    <a:bodyPr/>
+                    <a:lstStyle/>
+                    <a:p>
+                      <a:pPr>
+                        <a:defRPr sz="1100"/>
+                      </a:pPr>
+                      <a:r>
+                        <a:t>深信服</a:t>
+                      </a:r>
+                    </a:p>
+                  </a:txBody>
+                  <a:tcPr/>
+                </a:tc>
+                <a:tc>
+                  <a:txBody>
+                    <a:bodyPr/>
+                    <a:lstStyle/>
+                    <a:p>
+                      <a:pPr>
+                        <a:defRPr sz="1100"/>
+                      </a:pPr>
+                      <a:r>
+                        <a:t>500</a:t>
+                      </a:r>
+                    </a:p>
+                  </a:txBody>
+                  <a:tcPr/>
+                </a:tc>
+                <a:tc>
+                  <a:txBody>
+                    <a:bodyPr/>
+                    <a:lstStyle/>
+                    <a:p>
+                      <a:pPr>
+                        <a:defRPr sz="1100"/>
+                      </a:pPr>
+                      <a:r>
+                        <a:t>136.73</a:t>
+                      </a:r>
+                    </a:p>
+                  </a:txBody>
+                  <a:tcPr/>
+                </a:tc>
+                <a:tc>
+                  <a:txBody>
+                    <a:bodyPr/>
+                    <a:lstStyle/>
+                    <a:p>
+                      <a:pPr>
+                        <a:defRPr sz="1100"/>
+                      </a:pPr>
+                      <a:r>
+                        <a:t>140.7</a:t>
+                      </a:r>
+                    </a:p>
+                  </a:txBody>
+                  <a:tcPr/>
+                </a:tc>
+                <a:tc>
+                  <a:txBody>
+                    <a:bodyPr/>
+                    <a:lstStyle/>
+                    <a:p>
+                      <a:pPr>
+                        <a:defRPr sz="1100"/>
+                      </a:pPr>
+                      <a:r>
+                        <a:t>7.04</a:t>
+                      </a:r>
+                    </a:p>
+                  </a:txBody>
+                  <a:tcPr/>
+                </a:tc>
+                <a:tc>
+                  <a:txBody>
+                    <a:bodyPr/>
+                    <a:lstStyle/>
+                    <a:p>
+                      <a:pPr>
+                        <a:defRPr sz="1100"/>
+                      </a:pPr>
+                      <a:r>
+                        <a:t>0.2</a:t>
+                      </a:r>
+                    </a:p>
+                  </a:txBody>
+                  <a:tcPr/>
+                </a:tc>
+              </a:tr>
+              <a:tr h="240030">
+                <a:tc>
+                  <a:txBody>
+                    <a:bodyPr/>
+                    <a:lstStyle/>
+                    <a:p>
+                      <a:pPr>
+                        <a:defRPr sz="1100"/>
+                      </a:pPr>
+                      <a:r>
+                        <a:t>哈药股份</a:t>
+                      </a:r>
+                    </a:p>
+                  </a:txBody>
+                  <a:tcPr/>
+                </a:tc>
+                <a:tc>
+                  <a:txBody>
+                    <a:bodyPr/>
+                    <a:lstStyle/>
+                    <a:p>
+                      <a:pPr>
+                        <a:defRPr sz="1100"/>
+                      </a:pPr>
+                      <a:r>
+                        <a:t>5000</a:t>
+                      </a:r>
+                    </a:p>
+                  </a:txBody>
+                  <a:tcPr/>
+                </a:tc>
+                <a:tc>
+                  <a:txBody>
+                    <a:bodyPr/>
+                    <a:lstStyle/>
+                    <a:p>
+                      <a:pPr>
+                        <a:defRPr sz="1100"/>
+                      </a:pPr>
+                      <a:r>
+                        <a:t>7.33</a:t>
+                      </a:r>
+                    </a:p>
+                  </a:txBody>
+                  <a:tcPr/>
+                </a:tc>
+                <a:tc>
+                  <a:txBody>
+                    <a:bodyPr/>
+                    <a:lstStyle/>
+                    <a:p>
+                      <a:pPr>
+                        <a:defRPr sz="1100"/>
+                      </a:pPr>
+                      <a:r>
+                        <a:t>7.14</a:t>
+                      </a:r>
+                    </a:p>
+                  </a:txBody>
+                  <a:tcPr/>
+                </a:tc>
+                <a:tc>
+                  <a:txBody>
+                    <a:bodyPr/>
+                    <a:lstStyle/>
+                    <a:p>
+                      <a:pPr>
+                        <a:defRPr sz="1100"/>
+                      </a:pPr>
+                      <a:r>
+                        <a:t>3.57</a:t>
+                      </a:r>
+                    </a:p>
+                  </a:txBody>
+                  <a:tcPr/>
+                </a:tc>
+                <a:tc>
+                  <a:txBody>
+                    <a:bodyPr/>
+                    <a:lstStyle/>
+                    <a:p>
+                      <a:pPr>
+                        <a:defRPr sz="1100"/>
+                      </a:pPr>
+                      <a:r>
+                        <a:t>-0.1</a:t>
+                      </a:r>
+                    </a:p>
+                  </a:txBody>
+                  <a:tcPr/>
+                </a:tc>
+              </a:tr>
+              <a:tr h="240030">
+                <a:tc>
+                  <a:txBody>
+                    <a:bodyPr/>
+                    <a:lstStyle/>
+                    <a:p>
+                      <a:pPr>
+                        <a:defRPr sz="1100"/>
+                      </a:pPr>
+                      <a:r>
+                        <a:t>招商轮船</a:t>
+                      </a:r>
+                    </a:p>
+                  </a:txBody>
+                  <a:tcPr/>
+                </a:tc>
+                <a:tc>
+                  <a:txBody>
+                    <a:bodyPr/>
+                    <a:lstStyle/>
+                    <a:p>
+                      <a:pPr>
+                        <a:defRPr sz="1100"/>
+                      </a:pPr>
+                      <a:r>
+                        <a:t>500</a:t>
+                      </a:r>
+                    </a:p>
+                  </a:txBody>
+                  <a:tcPr/>
+                </a:tc>
+                <a:tc>
+                  <a:txBody>
+                    <a:bodyPr/>
+                    <a:lstStyle/>
+                    <a:p>
+                      <a:pPr>
+                        <a:defRPr sz="1100"/>
+                      </a:pPr>
+                      <a:r>
+                        <a:t>20.76</a:t>
+                      </a:r>
+                    </a:p>
+                  </a:txBody>
+                  <a:tcPr/>
+                </a:tc>
+                <a:tc>
+                  <a:txBody>
+                    <a:bodyPr/>
+                    <a:lstStyle/>
+                    <a:p>
+                      <a:pPr>
+                        <a:defRPr sz="1100"/>
+                      </a:pPr>
+                      <a:r>
+                        <a:t>19.89</a:t>
+                      </a:r>
+                    </a:p>
+                  </a:txBody>
+                  <a:tcPr/>
+                </a:tc>
+                <a:tc>
+                  <a:txBody>
+                    <a:bodyPr/>
+                    <a:lstStyle/>
+                    <a:p>
+                      <a:pPr>
+                        <a:defRPr sz="1100"/>
+                      </a:pPr>
+                      <a:r>
+                        <a:t>0.99</a:t>
+                      </a:r>
+                    </a:p>
+                  </a:txBody>
+                  <a:tcPr/>
+                </a:tc>
+                <a:tc>
+                  <a:txBody>
+                    <a:bodyPr/>
+                    <a:lstStyle/>
+                    <a:p>
+                      <a:pPr>
+                        <a:defRPr sz="1100"/>
+                      </a:pPr>
+                      <a:r>
+                        <a:t>-0.04</a:t>
+                      </a:r>
+                    </a:p>
+                  </a:txBody>
+                  <a:tcPr/>
+                </a:tc>
+              </a:tr>
+              <a:tr h="240030">
+                <a:tc>
+                  <a:txBody>
+                    <a:bodyPr/>
+                    <a:lstStyle/>
+                    <a:p>
+                      <a:pPr>
+                        <a:defRPr sz="1100"/>
+                      </a:pPr>
+                      <a:r>
+                        <a:t>睿创微纳</a:t>
+                      </a:r>
+                    </a:p>
+                  </a:txBody>
+                  <a:tcPr/>
+                </a:tc>
+                <a:tc>
+                  <a:txBody>
+                    <a:bodyPr/>
+                    <a:lstStyle/>
+                    <a:p>
+                      <a:pPr>
+                        <a:defRPr sz="1100"/>
+                      </a:pPr>
+                      <a:r>
+                        <a:t>1000</a:t>
+                      </a:r>
+                    </a:p>
+                  </a:txBody>
+                  <a:tcPr/>
+                </a:tc>
+                <a:tc>
+                  <a:txBody>
+                    <a:bodyPr/>
+                    <a:lstStyle/>
+                    <a:p>
+                      <a:pPr>
+                        <a:defRPr sz="1100"/>
+                      </a:pPr>
+                      <a:r>
+                        <a:t>177.58</a:t>
+                      </a:r>
+                    </a:p>
+                  </a:txBody>
+                  <a:tcPr/>
+                </a:tc>
+                <a:tc>
+                  <a:txBody>
+                    <a:bodyPr/>
+                    <a:lstStyle/>
+                    <a:p>
+                      <a:pPr>
+                        <a:defRPr sz="1100"/>
+                      </a:pPr>
+                      <a:r>
+                        <a:t>176.56</a:t>
+                      </a:r>
+                    </a:p>
+                  </a:txBody>
+                  <a:tcPr/>
+                </a:tc>
+                <a:tc>
+                  <a:txBody>
+                    <a:bodyPr/>
+                    <a:lstStyle/>
+                    <a:p>
+                      <a:pPr>
+                        <a:defRPr sz="1100"/>
+                      </a:pPr>
+                      <a:r>
+                        <a:t>17.66</a:t>
+                      </a:r>
+                    </a:p>
+                  </a:txBody>
+                  <a:tcPr/>
+                </a:tc>
+                <a:tc>
+                  <a:txBody>
+                    <a:bodyPr/>
+                    <a:lstStyle/>
+                    <a:p>
+                      <a:pPr>
+                        <a:defRPr sz="1100"/>
+                      </a:pPr>
+                      <a:r>
+                        <a:t>-0.1</a:t>
+                      </a:r>
+                    </a:p>
+                  </a:txBody>
+                  <a:tcPr/>
+                </a:tc>
+              </a:tr>
+              <a:tr h="240030">
+                <a:tc>
+                  <a:txBody>
+                    <a:bodyPr/>
+                    <a:lstStyle/>
+                    <a:p>
+                      <a:pPr>
+                        <a:defRPr sz="1100"/>
+                      </a:pPr>
+                      <a:r>
+                        <a:t>药明康德</a:t>
+                      </a:r>
+                    </a:p>
+                  </a:txBody>
+                  <a:tcPr/>
+                </a:tc>
+                <a:tc>
+                  <a:txBody>
+                    <a:bodyPr/>
+                    <a:lstStyle/>
+                    <a:p>
+                      <a:pPr>
+                        <a:defRPr sz="1100"/>
+                      </a:pPr>
+                      <a:r>
+                        <a:t>1300</a:t>
+                      </a:r>
+                    </a:p>
+                  </a:txBody>
+                  <a:tcPr/>
+                </a:tc>
+                <a:tc>
+                  <a:txBody>
+                    <a:bodyPr/>
+                    <a:lstStyle/>
+                    <a:p>
+                      <a:pPr>
+                        <a:defRPr sz="1100"/>
+                      </a:pPr>
+                      <a:r>
+                        <a:t>158.08</a:t>
+                      </a:r>
+                    </a:p>
+                  </a:txBody>
+                  <a:tcPr/>
+                </a:tc>
+                <a:tc>
+                  <a:txBody>
+                    <a:bodyPr/>
+                    <a:lstStyle/>
+                    <a:p>
+                      <a:pPr>
+                        <a:defRPr sz="1100"/>
+                      </a:pPr>
+                      <a:r>
+                        <a:t>160.66</a:t>
+                      </a:r>
+                    </a:p>
+                  </a:txBody>
+                  <a:tcPr/>
+                </a:tc>
+                <a:tc>
+                  <a:txBody>
+                    <a:bodyPr/>
+                    <a:lstStyle/>
+                    <a:p>
+                      <a:pPr>
+                        <a:defRPr sz="1100"/>
+                      </a:pPr>
+                      <a:r>
+                        <a:t>20.89</a:t>
+                      </a:r>
+                    </a:p>
+                  </a:txBody>
+                  <a:tcPr/>
+                </a:tc>
+                <a:tc>
+                  <a:txBody>
+                    <a:bodyPr/>
+                    <a:lstStyle/>
+                    <a:p>
+                      <a:pPr>
+                        <a:defRPr sz="1100"/>
+                      </a:pPr>
+                      <a:r>
+                        <a:t>0.34</a:t>
+                      </a:r>
+                    </a:p>
+                  </a:txBody>
+                  <a:tcPr/>
+                </a:tc>
+              </a:tr>
+              <a:tr h="240030">
+                <a:tc>
+                  <a:txBody>
+                    <a:bodyPr/>
+                    <a:lstStyle/>
+                    <a:p>
+                      <a:pPr>
+                        <a:defRPr sz="1100"/>
+                      </a:pPr>
+                      <a:r>
+                        <a:t>康龙化成</a:t>
+                      </a:r>
+                    </a:p>
+                  </a:txBody>
+                  <a:tcPr/>
+                </a:tc>
+                <a:tc>
+                  <a:txBody>
+                    <a:bodyPr/>
+                    <a:lstStyle/>
+                    <a:p>
+                      <a:pPr>
+                        <a:defRPr sz="1100"/>
+                      </a:pPr>
+                      <a:r>
+                        <a:t>1000</a:t>
+                      </a:r>
+                    </a:p>
+                  </a:txBody>
+                  <a:tcPr/>
+                </a:tc>
+                <a:tc>
+                  <a:txBody>
+                    <a:bodyPr/>
+                    <a:lstStyle/>
+                    <a:p>
+                      <a:pPr>
+                        <a:defRPr sz="1100"/>
+                      </a:pPr>
+                      <a:r>
+                        <a:t>42.65</a:t>
+                      </a:r>
+                    </a:p>
+                  </a:txBody>
+                  <a:tcPr/>
+                </a:tc>
+                <a:tc>
+                  <a:txBody>
+                    <a:bodyPr/>
+                    <a:lstStyle/>
+                    <a:p>
+                      <a:pPr>
+                        <a:defRPr sz="1100"/>
+                      </a:pPr>
+                      <a:r>
+                        <a:t>42.98</a:t>
+                      </a:r>
+                    </a:p>
+                  </a:txBody>
+                  <a:tcPr/>
+                </a:tc>
+                <a:tc>
+                  <a:txBody>
+                    <a:bodyPr/>
+                    <a:lstStyle/>
+                    <a:p>
+                      <a:pPr>
+                        <a:defRPr sz="1100"/>
+                      </a:pPr>
+                      <a:r>
+                        <a:t>4.3</a:t>
+                      </a:r>
+                    </a:p>
+                  </a:txBody>
+                  <a:tcPr/>
+                </a:tc>
+                <a:tc>
+                  <a:txBody>
+                    <a:bodyPr/>
+                    <a:lstStyle/>
+                    <a:p>
+                      <a:pPr>
+                        <a:defRPr sz="1100"/>
+                      </a:pPr>
+                      <a:r>
+                        <a:t>0.03</a:t>
+                      </a:r>
+                    </a:p>
+                  </a:txBody>
+                  <a:tcPr/>
+                </a:tc>
+              </a:tr>
+              <a:tr h="240030">
+                <a:tc>
+                  <a:txBody>
+                    <a:bodyPr/>
+                    <a:lstStyle/>
+                    <a:p>
+                      <a:pPr>
+                        <a:defRPr sz="1100"/>
+                      </a:pPr>
+                      <a:r>
+                        <a:t>赤峰黄金</a:t>
+                      </a:r>
+                    </a:p>
+                  </a:txBody>
+                  <a:tcPr/>
+                </a:tc>
+                <a:tc>
+                  <a:txBody>
+                    <a:bodyPr/>
+                    <a:lstStyle/>
+                    <a:p>
+                      <a:pPr>
+                        <a:defRPr sz="1100"/>
+                      </a:pPr>
+                      <a:r>
+                        <a:t>4000</a:t>
+                      </a:r>
+                    </a:p>
+                  </a:txBody>
+                  <a:tcPr/>
+                </a:tc>
+                <a:tc>
+                  <a:txBody>
+                    <a:bodyPr/>
+                    <a:lstStyle/>
+                    <a:p>
+                      <a:pPr>
+                        <a:defRPr sz="1100"/>
+                      </a:pPr>
+                      <a:r>
+                        <a:t>43.56</a:t>
+                      </a:r>
+                    </a:p>
+                  </a:txBody>
+                  <a:tcPr/>
+                </a:tc>
+                <a:tc>
+                  <a:txBody>
+                    <a:bodyPr/>
+                    <a:lstStyle/>
+                    <a:p>
+                      <a:pPr>
+                        <a:defRPr sz="1100"/>
+                      </a:pPr>
+                      <a:r>
+                        <a:t>38.44</a:t>
+                      </a:r>
+                    </a:p>
+                  </a:txBody>
+                  <a:tcPr/>
+                </a:tc>
+                <a:tc>
+                  <a:txBody>
+                    <a:bodyPr/>
+                    <a:lstStyle/>
+                    <a:p>
+                      <a:pPr>
+                        <a:defRPr sz="1100"/>
+                      </a:pPr>
+                      <a:r>
+                        <a:t>15.38</a:t>
                       </a:r>
                     </a:p>
                   </a:txBody>
@@ -3950,537 +4962,77 @@
                   <a:tcPr/>
                 </a:tc>
               </a:tr>
-              <a:tr h="256032">
-                <a:tc>
-                  <a:txBody>
-                    <a:bodyPr/>
-                    <a:lstStyle/>
-                    <a:p>
-                      <a:pPr>
-                        <a:defRPr sz="1100"/>
-                      </a:pPr>
-                      <a:r>
-                        <a:t>长江电力</a:t>
-                      </a:r>
-                    </a:p>
-                  </a:txBody>
-                  <a:tcPr/>
-                </a:tc>
-                <a:tc>
-                  <a:txBody>
-                    <a:bodyPr/>
-                    <a:lstStyle/>
-                    <a:p>
-                      <a:pPr>
-                        <a:defRPr sz="1100"/>
-                      </a:pPr>
-                      <a:r>
-                        <a:t>9300</a:t>
-                      </a:r>
-                    </a:p>
-                  </a:txBody>
-                  <a:tcPr/>
-                </a:tc>
-                <a:tc>
-                  <a:txBody>
-                    <a:bodyPr/>
-                    <a:lstStyle/>
-                    <a:p>
-                      <a:pPr>
-                        <a:defRPr sz="1100"/>
-                      </a:pPr>
-                      <a:r>
-                        <a:t>27.89</a:t>
-                      </a:r>
-                    </a:p>
-                  </a:txBody>
-                  <a:tcPr/>
-                </a:tc>
-                <a:tc>
-                  <a:txBody>
-                    <a:bodyPr/>
-                    <a:lstStyle/>
-                    <a:p>
-                      <a:pPr>
-                        <a:defRPr sz="1100"/>
-                      </a:pPr>
-                      <a:r>
-                        <a:t>28.55</a:t>
-                      </a:r>
-                    </a:p>
-                  </a:txBody>
-                  <a:tcPr/>
-                </a:tc>
-                <a:tc>
-                  <a:txBody>
-                    <a:bodyPr/>
-                    <a:lstStyle/>
-                    <a:p>
-                      <a:pPr>
-                        <a:defRPr sz="1100"/>
-                      </a:pPr>
-                      <a:r>
-                        <a:t>26.55</a:t>
-                      </a:r>
-                    </a:p>
-                  </a:txBody>
-                  <a:tcPr/>
-                </a:tc>
-                <a:tc>
-                  <a:txBody>
-                    <a:bodyPr/>
-                    <a:lstStyle/>
-                    <a:p>
-                      <a:pPr>
-                        <a:defRPr sz="1100"/>
-                      </a:pPr>
-                      <a:r>
-                        <a:t>0.62</a:t>
-                      </a:r>
-                    </a:p>
-                  </a:txBody>
-                  <a:tcPr/>
-                </a:tc>
-              </a:tr>
-              <a:tr h="256032">
-                <a:tc>
-                  <a:txBody>
-                    <a:bodyPr/>
-                    <a:lstStyle/>
-                    <a:p>
-                      <a:pPr>
-                        <a:defRPr sz="1100"/>
-                      </a:pPr>
-                      <a:r>
-                        <a:t>新集能源</a:t>
-                      </a:r>
-                    </a:p>
-                  </a:txBody>
-                  <a:tcPr/>
-                </a:tc>
-                <a:tc>
-                  <a:txBody>
-                    <a:bodyPr/>
-                    <a:lstStyle/>
-                    <a:p>
-                      <a:pPr>
-                        <a:defRPr sz="1100"/>
-                      </a:pPr>
-                      <a:r>
-                        <a:t>9500</a:t>
-                      </a:r>
-                    </a:p>
-                  </a:txBody>
-                  <a:tcPr/>
-                </a:tc>
-                <a:tc>
-                  <a:txBody>
-                    <a:bodyPr/>
-                    <a:lstStyle/>
-                    <a:p>
-                      <a:pPr>
-                        <a:defRPr sz="1100"/>
-                      </a:pPr>
-                      <a:r>
-                        <a:t>10.47</a:t>
-                      </a:r>
-                    </a:p>
-                  </a:txBody>
-                  <a:tcPr/>
-                </a:tc>
-                <a:tc>
-                  <a:txBody>
-                    <a:bodyPr/>
-                    <a:lstStyle/>
-                    <a:p>
-                      <a:pPr>
-                        <a:defRPr sz="1100"/>
-                      </a:pPr>
-                      <a:r>
-                        <a:t>11.45</a:t>
-                      </a:r>
-                    </a:p>
-                  </a:txBody>
-                  <a:tcPr/>
-                </a:tc>
-                <a:tc>
-                  <a:txBody>
-                    <a:bodyPr/>
-                    <a:lstStyle/>
-                    <a:p>
-                      <a:pPr>
-                        <a:defRPr sz="1100"/>
-                      </a:pPr>
-                      <a:r>
-                        <a:t>10.88</a:t>
-                      </a:r>
-                    </a:p>
-                  </a:txBody>
-                  <a:tcPr/>
-                </a:tc>
-                <a:tc>
-                  <a:txBody>
-                    <a:bodyPr/>
-                    <a:lstStyle/>
-                    <a:p>
-                      <a:pPr>
-                        <a:defRPr sz="1100"/>
-                      </a:pPr>
-                      <a:r>
-                        <a:t>0.93</a:t>
-                      </a:r>
-                    </a:p>
-                  </a:txBody>
-                  <a:tcPr/>
-                </a:tc>
-              </a:tr>
-              <a:tr h="256032">
-                <a:tc>
-                  <a:txBody>
-                    <a:bodyPr/>
-                    <a:lstStyle/>
-                    <a:p>
-                      <a:pPr>
-                        <a:defRPr sz="1100"/>
-                      </a:pPr>
-                      <a:r>
-                        <a:t>恺英网络</a:t>
-                      </a:r>
-                    </a:p>
-                  </a:txBody>
-                  <a:tcPr/>
-                </a:tc>
-                <a:tc>
-                  <a:txBody>
-                    <a:bodyPr/>
-                    <a:lstStyle/>
-                    <a:p>
-                      <a:pPr>
-                        <a:defRPr sz="1100"/>
-                      </a:pPr>
-                      <a:r>
-                        <a:t>5000</a:t>
-                      </a:r>
-                    </a:p>
-                  </a:txBody>
-                  <a:tcPr/>
-                </a:tc>
-                <a:tc>
-                  <a:txBody>
-                    <a:bodyPr/>
-                    <a:lstStyle/>
-                    <a:p>
-                      <a:pPr>
-                        <a:defRPr sz="1100"/>
-                      </a:pPr>
-                      <a:r>
-                        <a:t>17.52</a:t>
-                      </a:r>
-                    </a:p>
-                  </a:txBody>
-                  <a:tcPr/>
-                </a:tc>
-                <a:tc>
-                  <a:txBody>
-                    <a:bodyPr/>
-                    <a:lstStyle/>
-                    <a:p>
-                      <a:pPr>
-                        <a:defRPr sz="1100"/>
-                      </a:pPr>
-                      <a:r>
-                        <a:t>15.68</a:t>
-                      </a:r>
-                    </a:p>
-                  </a:txBody>
-                  <a:tcPr/>
-                </a:tc>
-                <a:tc>
-                  <a:txBody>
-                    <a:bodyPr/>
-                    <a:lstStyle/>
-                    <a:p>
-                      <a:pPr>
-                        <a:defRPr sz="1100"/>
-                      </a:pPr>
-                      <a:r>
-                        <a:t>7.84</a:t>
-                      </a:r>
-                    </a:p>
-                  </a:txBody>
-                  <a:tcPr/>
-                </a:tc>
-                <a:tc>
-                  <a:txBody>
-                    <a:bodyPr/>
-                    <a:lstStyle/>
-                    <a:p>
-                      <a:pPr>
-                        <a:defRPr sz="1100"/>
-                      </a:pPr>
-                      <a:r>
-                        <a:t>-0.92</a:t>
-                      </a:r>
-                    </a:p>
-                  </a:txBody>
-                  <a:tcPr/>
-                </a:tc>
-              </a:tr>
-              <a:tr h="256032">
-                <a:tc>
-                  <a:txBody>
-                    <a:bodyPr/>
-                    <a:lstStyle/>
-                    <a:p>
-                      <a:pPr>
-                        <a:defRPr sz="1100"/>
-                      </a:pPr>
-                      <a:r>
-                        <a:t>星网锐捷</a:t>
-                      </a:r>
-                    </a:p>
-                  </a:txBody>
-                  <a:tcPr/>
-                </a:tc>
-                <a:tc>
-                  <a:txBody>
-                    <a:bodyPr/>
-                    <a:lstStyle/>
-                    <a:p>
-                      <a:pPr>
-                        <a:defRPr sz="1100"/>
-                      </a:pPr>
-                      <a:r>
-                        <a:t>6100</a:t>
-                      </a:r>
-                    </a:p>
-                  </a:txBody>
-                  <a:tcPr/>
-                </a:tc>
-                <a:tc>
-                  <a:txBody>
-                    <a:bodyPr/>
-                    <a:lstStyle/>
-                    <a:p>
-                      <a:pPr>
-                        <a:defRPr sz="1100"/>
-                      </a:pPr>
-                      <a:r>
-                        <a:t>35.87</a:t>
-                      </a:r>
-                    </a:p>
-                  </a:txBody>
-                  <a:tcPr/>
-                </a:tc>
-                <a:tc>
-                  <a:txBody>
-                    <a:bodyPr/>
-                    <a:lstStyle/>
-                    <a:p>
-                      <a:pPr>
-                        <a:defRPr sz="1100"/>
-                      </a:pPr>
-                      <a:r>
-                        <a:t>32.99</a:t>
-                      </a:r>
-                    </a:p>
-                  </a:txBody>
-                  <a:tcPr/>
-                </a:tc>
-                <a:tc>
-                  <a:txBody>
-                    <a:bodyPr/>
-                    <a:lstStyle/>
-                    <a:p>
-                      <a:pPr>
-                        <a:defRPr sz="1100"/>
-                      </a:pPr>
-                      <a:r>
-                        <a:t>20.12</a:t>
-                      </a:r>
-                    </a:p>
-                  </a:txBody>
-                  <a:tcPr/>
-                </a:tc>
-                <a:tc>
-                  <a:txBody>
-                    <a:bodyPr/>
-                    <a:lstStyle/>
-                    <a:p>
-                      <a:pPr>
-                        <a:defRPr sz="1100"/>
-                      </a:pPr>
-                      <a:r>
-                        <a:t>-1.76</a:t>
-                      </a:r>
-                    </a:p>
-                  </a:txBody>
-                  <a:tcPr/>
-                </a:tc>
-              </a:tr>
-              <a:tr h="256032">
-                <a:tc>
-                  <a:txBody>
-                    <a:bodyPr/>
-                    <a:lstStyle/>
-                    <a:p>
-                      <a:pPr>
-                        <a:defRPr sz="1100"/>
-                      </a:pPr>
-                      <a:r>
-                        <a:t>深信服</a:t>
-                      </a:r>
-                    </a:p>
-                  </a:txBody>
-                  <a:tcPr/>
-                </a:tc>
-                <a:tc>
-                  <a:txBody>
-                    <a:bodyPr/>
-                    <a:lstStyle/>
-                    <a:p>
-                      <a:pPr>
-                        <a:defRPr sz="1100"/>
-                      </a:pPr>
-                      <a:r>
-                        <a:t>500</a:t>
-                      </a:r>
-                    </a:p>
-                  </a:txBody>
-                  <a:tcPr/>
-                </a:tc>
-                <a:tc>
-                  <a:txBody>
-                    <a:bodyPr/>
-                    <a:lstStyle/>
-                    <a:p>
-                      <a:pPr>
-                        <a:defRPr sz="1100"/>
-                      </a:pPr>
-                      <a:r>
-                        <a:t>136.73</a:t>
-                      </a:r>
-                    </a:p>
-                  </a:txBody>
-                  <a:tcPr/>
-                </a:tc>
-                <a:tc>
-                  <a:txBody>
-                    <a:bodyPr/>
-                    <a:lstStyle/>
-                    <a:p>
-                      <a:pPr>
-                        <a:defRPr sz="1100"/>
-                      </a:pPr>
-                      <a:r>
-                        <a:t>139.37</a:t>
-                      </a:r>
-                    </a:p>
-                  </a:txBody>
-                  <a:tcPr/>
-                </a:tc>
-                <a:tc>
-                  <a:txBody>
-                    <a:bodyPr/>
-                    <a:lstStyle/>
-                    <a:p>
-                      <a:pPr>
-                        <a:defRPr sz="1100"/>
-                      </a:pPr>
-                      <a:r>
-                        <a:t>6.97</a:t>
-                      </a:r>
-                    </a:p>
-                  </a:txBody>
-                  <a:tcPr/>
-                </a:tc>
-                <a:tc>
-                  <a:txBody>
-                    <a:bodyPr/>
-                    <a:lstStyle/>
-                    <a:p>
-                      <a:pPr>
-                        <a:defRPr sz="1100"/>
-                      </a:pPr>
-                      <a:r>
-                        <a:t>0.13</a:t>
-                      </a:r>
-                    </a:p>
-                  </a:txBody>
-                  <a:tcPr/>
-                </a:tc>
-              </a:tr>
-              <a:tr h="256032">
-                <a:tc>
-                  <a:txBody>
-                    <a:bodyPr/>
-                    <a:lstStyle/>
-                    <a:p>
-                      <a:pPr>
-                        <a:defRPr sz="1100"/>
-                      </a:pPr>
-                      <a:r>
-                        <a:t>哈药股份</a:t>
-                      </a:r>
-                    </a:p>
-                  </a:txBody>
-                  <a:tcPr/>
-                </a:tc>
-                <a:tc>
-                  <a:txBody>
-                    <a:bodyPr/>
-                    <a:lstStyle/>
-                    <a:p>
-                      <a:pPr>
-                        <a:defRPr sz="1100"/>
-                      </a:pPr>
-                      <a:r>
-                        <a:t>5000</a:t>
-                      </a:r>
-                    </a:p>
-                  </a:txBody>
-                  <a:tcPr/>
-                </a:tc>
-                <a:tc>
-                  <a:txBody>
-                    <a:bodyPr/>
-                    <a:lstStyle/>
-                    <a:p>
-                      <a:pPr>
-                        <a:defRPr sz="1100"/>
-                      </a:pPr>
-                      <a:r>
-                        <a:t>7.33</a:t>
-                      </a:r>
-                    </a:p>
-                  </a:txBody>
-                  <a:tcPr/>
-                </a:tc>
-                <a:tc>
-                  <a:txBody>
-                    <a:bodyPr/>
-                    <a:lstStyle/>
-                    <a:p>
-                      <a:pPr>
-                        <a:defRPr sz="1100"/>
-                      </a:pPr>
-                      <a:r>
-                        <a:t>7.33</a:t>
-                      </a:r>
-                    </a:p>
-                  </a:txBody>
-                  <a:tcPr/>
-                </a:tc>
-                <a:tc>
-                  <a:txBody>
-                    <a:bodyPr/>
-                    <a:lstStyle/>
-                    <a:p>
-                      <a:pPr>
-                        <a:defRPr sz="1100"/>
-                      </a:pPr>
-                      <a:r>
-                        <a:t>3.67</a:t>
+              <a:tr h="240030">
+                <a:tc>
+                  <a:txBody>
+                    <a:bodyPr/>
+                    <a:lstStyle/>
+                    <a:p>
+                      <a:pPr>
+                        <a:defRPr sz="1100"/>
+                      </a:pPr>
+                      <a:r>
+                        <a:t>宁德时代</a:t>
+                      </a:r>
+                    </a:p>
+                  </a:txBody>
+                  <a:tcPr/>
+                </a:tc>
+                <a:tc>
+                  <a:txBody>
+                    <a:bodyPr/>
+                    <a:lstStyle/>
+                    <a:p>
+                      <a:pPr>
+                        <a:defRPr sz="1100"/>
+                      </a:pPr>
+                      <a:r>
+                        <a:t>1100</a:t>
+                      </a:r>
+                    </a:p>
+                  </a:txBody>
+                  <a:tcPr/>
+                </a:tc>
+                <a:tc>
+                  <a:txBody>
+                    <a:bodyPr/>
+                    <a:lstStyle/>
+                    <a:p>
+                      <a:pPr>
+                        <a:defRPr sz="1100"/>
+                      </a:pPr>
+                      <a:r>
+                        <a:t>286.8</a:t>
+                      </a:r>
+                    </a:p>
+                  </a:txBody>
+                  <a:tcPr/>
+                </a:tc>
+                <a:tc>
+                  <a:txBody>
+                    <a:bodyPr/>
+                    <a:lstStyle/>
+                    <a:p>
+                      <a:pPr>
+                        <a:defRPr sz="1100"/>
+                      </a:pPr>
+                      <a:r>
+                        <a:t>286.8</a:t>
+                      </a:r>
+                    </a:p>
+                  </a:txBody>
+                  <a:tcPr/>
+                </a:tc>
+                <a:tc>
+                  <a:txBody>
+                    <a:bodyPr/>
+                    <a:lstStyle/>
+                    <a:p>
+                      <a:pPr>
+                        <a:defRPr sz="1100"/>
+                      </a:pPr>
+                      <a:r>
+                        <a:t>31.55</a:t>
                       </a:r>
                     </a:p>
                   </a:txBody>
@@ -4496,466 +5048,6 @@
                       </a:pPr>
                       <a:r>
                         <a:t>0.0</a:t>
-                      </a:r>
-                    </a:p>
-                  </a:txBody>
-                  <a:tcPr/>
-                </a:tc>
-              </a:tr>
-              <a:tr h="256032">
-                <a:tc>
-                  <a:txBody>
-                    <a:bodyPr/>
-                    <a:lstStyle/>
-                    <a:p>
-                      <a:pPr>
-                        <a:defRPr sz="1100"/>
-                      </a:pPr>
-                      <a:r>
-                        <a:t>招商轮船</a:t>
-                      </a:r>
-                    </a:p>
-                  </a:txBody>
-                  <a:tcPr/>
-                </a:tc>
-                <a:tc>
-                  <a:txBody>
-                    <a:bodyPr/>
-                    <a:lstStyle/>
-                    <a:p>
-                      <a:pPr>
-                        <a:defRPr sz="1100"/>
-                      </a:pPr>
-                      <a:r>
-                        <a:t>500</a:t>
-                      </a:r>
-                    </a:p>
-                  </a:txBody>
-                  <a:tcPr/>
-                </a:tc>
-                <a:tc>
-                  <a:txBody>
-                    <a:bodyPr/>
-                    <a:lstStyle/>
-                    <a:p>
-                      <a:pPr>
-                        <a:defRPr sz="1100"/>
-                      </a:pPr>
-                      <a:r>
-                        <a:t>20.76</a:t>
-                      </a:r>
-                    </a:p>
-                  </a:txBody>
-                  <a:tcPr/>
-                </a:tc>
-                <a:tc>
-                  <a:txBody>
-                    <a:bodyPr/>
-                    <a:lstStyle/>
-                    <a:p>
-                      <a:pPr>
-                        <a:defRPr sz="1100"/>
-                      </a:pPr>
-                      <a:r>
-                        <a:t>20.65</a:t>
-                      </a:r>
-                    </a:p>
-                  </a:txBody>
-                  <a:tcPr/>
-                </a:tc>
-                <a:tc>
-                  <a:txBody>
-                    <a:bodyPr/>
-                    <a:lstStyle/>
-                    <a:p>
-                      <a:pPr>
-                        <a:defRPr sz="1100"/>
-                      </a:pPr>
-                      <a:r>
-                        <a:t>1.03</a:t>
-                      </a:r>
-                    </a:p>
-                  </a:txBody>
-                  <a:tcPr/>
-                </a:tc>
-                <a:tc>
-                  <a:txBody>
-                    <a:bodyPr/>
-                    <a:lstStyle/>
-                    <a:p>
-                      <a:pPr>
-                        <a:defRPr sz="1100"/>
-                      </a:pPr>
-                      <a:r>
-                        <a:t>-0.01</a:t>
-                      </a:r>
-                    </a:p>
-                  </a:txBody>
-                  <a:tcPr/>
-                </a:tc>
-              </a:tr>
-              <a:tr h="256032">
-                <a:tc>
-                  <a:txBody>
-                    <a:bodyPr/>
-                    <a:lstStyle/>
-                    <a:p>
-                      <a:pPr>
-                        <a:defRPr sz="1100"/>
-                      </a:pPr>
-                      <a:r>
-                        <a:t>睿创微纳</a:t>
-                      </a:r>
-                    </a:p>
-                  </a:txBody>
-                  <a:tcPr/>
-                </a:tc>
-                <a:tc>
-                  <a:txBody>
-                    <a:bodyPr/>
-                    <a:lstStyle/>
-                    <a:p>
-                      <a:pPr>
-                        <a:defRPr sz="1100"/>
-                      </a:pPr>
-                      <a:r>
-                        <a:t>1000</a:t>
-                      </a:r>
-                    </a:p>
-                  </a:txBody>
-                  <a:tcPr/>
-                </a:tc>
-                <a:tc>
-                  <a:txBody>
-                    <a:bodyPr/>
-                    <a:lstStyle/>
-                    <a:p>
-                      <a:pPr>
-                        <a:defRPr sz="1100"/>
-                      </a:pPr>
-                      <a:r>
-                        <a:t>177.58</a:t>
-                      </a:r>
-                    </a:p>
-                  </a:txBody>
-                  <a:tcPr/>
-                </a:tc>
-                <a:tc>
-                  <a:txBody>
-                    <a:bodyPr/>
-                    <a:lstStyle/>
-                    <a:p>
-                      <a:pPr>
-                        <a:defRPr sz="1100"/>
-                      </a:pPr>
-                      <a:r>
-                        <a:t>175.66</a:t>
-                      </a:r>
-                    </a:p>
-                  </a:txBody>
-                  <a:tcPr/>
-                </a:tc>
-                <a:tc>
-                  <a:txBody>
-                    <a:bodyPr/>
-                    <a:lstStyle/>
-                    <a:p>
-                      <a:pPr>
-                        <a:defRPr sz="1100"/>
-                      </a:pPr>
-                      <a:r>
-                        <a:t>17.57</a:t>
-                      </a:r>
-                    </a:p>
-                  </a:txBody>
-                  <a:tcPr/>
-                </a:tc>
-                <a:tc>
-                  <a:txBody>
-                    <a:bodyPr/>
-                    <a:lstStyle/>
-                    <a:p>
-                      <a:pPr>
-                        <a:defRPr sz="1100"/>
-                      </a:pPr>
-                      <a:r>
-                        <a:t>-0.19</a:t>
-                      </a:r>
-                    </a:p>
-                  </a:txBody>
-                  <a:tcPr/>
-                </a:tc>
-              </a:tr>
-              <a:tr h="256032">
-                <a:tc>
-                  <a:txBody>
-                    <a:bodyPr/>
-                    <a:lstStyle/>
-                    <a:p>
-                      <a:pPr>
-                        <a:defRPr sz="1100"/>
-                      </a:pPr>
-                      <a:r>
-                        <a:t>药明康德</a:t>
-                      </a:r>
-                    </a:p>
-                  </a:txBody>
-                  <a:tcPr/>
-                </a:tc>
-                <a:tc>
-                  <a:txBody>
-                    <a:bodyPr/>
-                    <a:lstStyle/>
-                    <a:p>
-                      <a:pPr>
-                        <a:defRPr sz="1100"/>
-                      </a:pPr>
-                      <a:r>
-                        <a:t>1300</a:t>
-                      </a:r>
-                    </a:p>
-                  </a:txBody>
-                  <a:tcPr/>
-                </a:tc>
-                <a:tc>
-                  <a:txBody>
-                    <a:bodyPr/>
-                    <a:lstStyle/>
-                    <a:p>
-                      <a:pPr>
-                        <a:defRPr sz="1100"/>
-                      </a:pPr>
-                      <a:r>
-                        <a:t>158.08</a:t>
-                      </a:r>
-                    </a:p>
-                  </a:txBody>
-                  <a:tcPr/>
-                </a:tc>
-                <a:tc>
-                  <a:txBody>
-                    <a:bodyPr/>
-                    <a:lstStyle/>
-                    <a:p>
-                      <a:pPr>
-                        <a:defRPr sz="1100"/>
-                      </a:pPr>
-                      <a:r>
-                        <a:t>161.8</a:t>
-                      </a:r>
-                    </a:p>
-                  </a:txBody>
-                  <a:tcPr/>
-                </a:tc>
-                <a:tc>
-                  <a:txBody>
-                    <a:bodyPr/>
-                    <a:lstStyle/>
-                    <a:p>
-                      <a:pPr>
-                        <a:defRPr sz="1100"/>
-                      </a:pPr>
-                      <a:r>
-                        <a:t>21.03</a:t>
-                      </a:r>
-                    </a:p>
-                  </a:txBody>
-                  <a:tcPr/>
-                </a:tc>
-                <a:tc>
-                  <a:txBody>
-                    <a:bodyPr/>
-                    <a:lstStyle/>
-                    <a:p>
-                      <a:pPr>
-                        <a:defRPr sz="1100"/>
-                      </a:pPr>
-                      <a:r>
-                        <a:t>0.48</a:t>
-                      </a:r>
-                    </a:p>
-                  </a:txBody>
-                  <a:tcPr/>
-                </a:tc>
-              </a:tr>
-              <a:tr h="256032">
-                <a:tc>
-                  <a:txBody>
-                    <a:bodyPr/>
-                    <a:lstStyle/>
-                    <a:p>
-                      <a:pPr>
-                        <a:defRPr sz="1100"/>
-                      </a:pPr>
-                      <a:r>
-                        <a:t>康龙化成</a:t>
-                      </a:r>
-                    </a:p>
-                  </a:txBody>
-                  <a:tcPr/>
-                </a:tc>
-                <a:tc>
-                  <a:txBody>
-                    <a:bodyPr/>
-                    <a:lstStyle/>
-                    <a:p>
-                      <a:pPr>
-                        <a:defRPr sz="1100"/>
-                      </a:pPr>
-                      <a:r>
-                        <a:t>1000</a:t>
-                      </a:r>
-                    </a:p>
-                  </a:txBody>
-                  <a:tcPr/>
-                </a:tc>
-                <a:tc>
-                  <a:txBody>
-                    <a:bodyPr/>
-                    <a:lstStyle/>
-                    <a:p>
-                      <a:pPr>
-                        <a:defRPr sz="1100"/>
-                      </a:pPr>
-                      <a:r>
-                        <a:t>42.65</a:t>
-                      </a:r>
-                    </a:p>
-                  </a:txBody>
-                  <a:tcPr/>
-                </a:tc>
-                <a:tc>
-                  <a:txBody>
-                    <a:bodyPr/>
-                    <a:lstStyle/>
-                    <a:p>
-                      <a:pPr>
-                        <a:defRPr sz="1100"/>
-                      </a:pPr>
-                      <a:r>
-                        <a:t>43.13</a:t>
-                      </a:r>
-                    </a:p>
-                  </a:txBody>
-                  <a:tcPr/>
-                </a:tc>
-                <a:tc>
-                  <a:txBody>
-                    <a:bodyPr/>
-                    <a:lstStyle/>
-                    <a:p>
-                      <a:pPr>
-                        <a:defRPr sz="1100"/>
-                      </a:pPr>
-                      <a:r>
-                        <a:t>4.31</a:t>
-                      </a:r>
-                    </a:p>
-                  </a:txBody>
-                  <a:tcPr/>
-                </a:tc>
-                <a:tc>
-                  <a:txBody>
-                    <a:bodyPr/>
-                    <a:lstStyle/>
-                    <a:p>
-                      <a:pPr>
-                        <a:defRPr sz="1100"/>
-                      </a:pPr>
-                      <a:r>
-                        <a:t>0.05</a:t>
-                      </a:r>
-                    </a:p>
-                  </a:txBody>
-                  <a:tcPr/>
-                </a:tc>
-              </a:tr>
-              <a:tr h="256032">
-                <a:tc>
-                  <a:txBody>
-                    <a:bodyPr/>
-                    <a:lstStyle/>
-                    <a:p>
-                      <a:pPr>
-                        <a:defRPr sz="1100"/>
-                      </a:pPr>
-                      <a:r>
-                        <a:t>赤峰黄金</a:t>
-                      </a:r>
-                    </a:p>
-                  </a:txBody>
-                  <a:tcPr/>
-                </a:tc>
-                <a:tc>
-                  <a:txBody>
-                    <a:bodyPr/>
-                    <a:lstStyle/>
-                    <a:p>
-                      <a:pPr>
-                        <a:defRPr sz="1100"/>
-                      </a:pPr>
-                      <a:r>
-                        <a:t>4000</a:t>
-                      </a:r>
-                    </a:p>
-                  </a:txBody>
-                  <a:tcPr/>
-                </a:tc>
-                <a:tc>
-                  <a:txBody>
-                    <a:bodyPr/>
-                    <a:lstStyle/>
-                    <a:p>
-                      <a:pPr>
-                        <a:defRPr sz="1100"/>
-                      </a:pPr>
-                      <a:r>
-                        <a:t>43.56</a:t>
-                      </a:r>
-                    </a:p>
-                  </a:txBody>
-                  <a:tcPr/>
-                </a:tc>
-                <a:tc>
-                  <a:txBody>
-                    <a:bodyPr/>
-                    <a:lstStyle/>
-                    <a:p>
-                      <a:pPr>
-                        <a:defRPr sz="1100"/>
-                      </a:pPr>
-                      <a:r>
-                        <a:t>38.07</a:t>
-                      </a:r>
-                    </a:p>
-                  </a:txBody>
-                  <a:tcPr/>
-                </a:tc>
-                <a:tc>
-                  <a:txBody>
-                    <a:bodyPr/>
-                    <a:lstStyle/>
-                    <a:p>
-                      <a:pPr>
-                        <a:defRPr sz="1100"/>
-                      </a:pPr>
-                      <a:r>
-                        <a:t>15.23</a:t>
-                      </a:r>
-                    </a:p>
-                  </a:txBody>
-                  <a:tcPr/>
-                </a:tc>
-                <a:tc>
-                  <a:txBody>
-                    <a:bodyPr/>
-                    <a:lstStyle/>
-                    <a:p>
-                      <a:pPr>
-                        <a:defRPr sz="1100"/>
-                      </a:pPr>
-                      <a:r>
-                        <a:t>-2.2</a:t>
                       </a:r>
                     </a:p>
                   </a:txBody>
@@ -5041,7 +5133,7 @@
               <a:defRPr sz="1500"/>
             </a:pPr>
             <a:r>
-              <a:t>紫金矿业（601899，有色金属）：综合75.0分；基本面优秀，具备中长期配置价值；趋势中性，观望。</a:t>
+              <a:t>紫金矿业（601899，有色金属）：综合77.0分；基本面优秀，具备中长期配置价值；趋势中性，观望。</a:t>
             </a:r>
           </a:p>
           <a:p>
@@ -5049,7 +5141,7 @@
               <a:defRPr sz="1500"/>
             </a:pPr>
             <a:r>
-              <a:t>长江电力（600900，电力）：综合74.0分；基本面优秀，具备中长期配置价值；中期趋势向上，可关注/持有。</a:t>
+              <a:t>宁德时代（300750，新能源电池）：综合70.5分；基本面优秀，具备中长期配置价值；趋势中性，观望。</a:t>
             </a:r>
           </a:p>
           <a:p>
@@ -5057,7 +5149,7 @@
               <a:defRPr sz="1500"/>
             </a:pPr>
             <a:r>
-              <a:t>宁德时代（300750，新能源电池）：综合70.5分；基本面优秀，具备中长期配置价值；趋势中性，观望。</a:t>
+              <a:t>长江电力（600900，电力）：综合69.0分；基本面优秀，具备中长期配置价值；中期趋势向上，可关注/持有。</a:t>
             </a:r>
           </a:p>
           <a:p>
@@ -5065,7 +5157,7 @@
               <a:defRPr sz="1500"/>
             </a:pPr>
             <a:r>
-              <a:t>中国平安（601318，保险）：综合64.5分；基本面优秀，具备中长期配置价值；趋势中性，观望。</a:t>
+              <a:t>立讯精密（002475，消费电子）：综合64.5分；基本面优秀，具备中长期配置价值；趋势中性，观望。</a:t>
             </a:r>
           </a:p>
           <a:p>
@@ -5073,7 +5165,7 @@
               <a:defRPr sz="1500"/>
             </a:pPr>
             <a:r>
-              <a:t>招商银行（600036，银行）：综合64.0分；基本面优秀，具备中长期配置价值；趋势中性，观望。</a:t>
+              <a:t>中国平安（601318，保险）：综合64.5分；基本面优秀，具备中长期配置价值；趋势中性，观望。</a:t>
             </a:r>
           </a:p>
         </p:txBody>

--- a/outputs/12_中期路演.pptx
+++ b/outputs/12_中期路演.pptx
@@ -3271,7 +3271,7 @@
               <a:defRPr sz="1500"/>
             </a:pPr>
             <a:r>
-              <a:t>同期沪深300：-4.29%</a:t>
+              <a:t>同期沪深300：-4.46%</a:t>
             </a:r>
           </a:p>
           <a:p>
@@ -5133,7 +5133,7 @@
               <a:defRPr sz="1500"/>
             </a:pPr>
             <a:r>
-              <a:t>紫金矿业（601899，有色金属）：综合77.0分；基本面优秀，具备中长期配置价值；趋势中性，观望。</a:t>
+              <a:t>紫金矿业（601899，有色金属）：综合75.0分；基本面优秀，具备中长期配置价值；趋势中性，观望。</a:t>
             </a:r>
           </a:p>
           <a:p>

--- a/outputs/12_中期路演.pptx
+++ b/outputs/12_中期路演.pptx
@@ -3167,7 +3167,7 @@
               <a:defRPr sz="1500"/>
             </a:pPr>
             <a:r>
-              <a:t>数据截止：2026-09-29</a:t>
+              <a:t>数据截止：2026-09-30</a:t>
             </a:r>
           </a:p>
         </p:txBody>
@@ -3255,7 +3255,7 @@
               <a:defRPr sz="1500"/>
             </a:pPr>
             <a:r>
-              <a:t>当前总资产：471.64万元</a:t>
+              <a:t>当前总资产：476.00万元</a:t>
             </a:r>
           </a:p>
           <a:p>
@@ -3263,7 +3263,7 @@
               <a:defRPr sz="1500"/>
             </a:pPr>
             <a:r>
-              <a:t>累计收益率：-5.67%</a:t>
+              <a:t>累计收益率：-4.80%</a:t>
             </a:r>
           </a:p>
           <a:p>
@@ -3271,7 +3271,7 @@
               <a:defRPr sz="1500"/>
             </a:pPr>
             <a:r>
-              <a:t>同期沪深300：-4.46%</a:t>
+              <a:t>同期沪深300：-4.19%</a:t>
             </a:r>
           </a:p>
           <a:p>
@@ -3279,7 +3279,7 @@
               <a:defRPr sz="1500"/>
             </a:pPr>
             <a:r>
-              <a:t>现金：95.84万元（20.3%）</a:t>
+              <a:t>现金：95.84万元（20.1%）</a:t>
             </a:r>
           </a:p>
           <a:p>
@@ -3821,37 +3821,37 @@
                         <a:defRPr sz="1100"/>
                       </a:pPr>
                       <a:r>
-                        <a:t>52.5</a:t>
-                      </a:r>
-                    </a:p>
-                  </a:txBody>
-                  <a:tcPr/>
-                </a:tc>
-                <a:tc>
-                  <a:txBody>
-                    <a:bodyPr/>
-                    <a:lstStyle/>
-                    <a:p>
-                      <a:pPr>
-                        <a:defRPr sz="1100"/>
-                      </a:pPr>
-                      <a:r>
-                        <a:t>95.55</a:t>
-                      </a:r>
-                    </a:p>
-                  </a:txBody>
-                  <a:tcPr/>
-                </a:tc>
-                <a:tc>
-                  <a:txBody>
-                    <a:bodyPr/>
-                    <a:lstStyle/>
-                    <a:p>
-                      <a:pPr>
-                        <a:defRPr sz="1100"/>
-                      </a:pPr>
-                      <a:r>
-                        <a:t>-6.59</a:t>
+                        <a:t>53.29</a:t>
+                      </a:r>
+                    </a:p>
+                  </a:txBody>
+                  <a:tcPr/>
+                </a:tc>
+                <a:tc>
+                  <a:txBody>
+                    <a:bodyPr/>
+                    <a:lstStyle/>
+                    <a:p>
+                      <a:pPr>
+                        <a:defRPr sz="1100"/>
+                      </a:pPr>
+                      <a:r>
+                        <a:t>96.99</a:t>
+                      </a:r>
+                    </a:p>
+                  </a:txBody>
+                  <a:tcPr/>
+                </a:tc>
+                <a:tc>
+                  <a:txBody>
+                    <a:bodyPr/>
+                    <a:lstStyle/>
+                    <a:p>
+                      <a:pPr>
+                        <a:defRPr sz="1100"/>
+                      </a:pPr>
+                      <a:r>
+                        <a:t>-5.15</a:t>
                       </a:r>
                     </a:p>
                   </a:txBody>
@@ -3913,37 +3913,37 @@
                         <a:defRPr sz="1100"/>
                       </a:pPr>
                       <a:r>
-                        <a:t>29.46</a:t>
-                      </a:r>
-                    </a:p>
-                  </a:txBody>
-                  <a:tcPr/>
-                </a:tc>
-                <a:tc>
-                  <a:txBody>
-                    <a:bodyPr/>
-                    <a:lstStyle/>
-                    <a:p>
-                      <a:pPr>
-                        <a:defRPr sz="1100"/>
-                      </a:pPr>
-                      <a:r>
-                        <a:t>113.72</a:t>
-                      </a:r>
-                    </a:p>
-                  </a:txBody>
-                  <a:tcPr/>
-                </a:tc>
-                <a:tc>
-                  <a:txBody>
-                    <a:bodyPr/>
-                    <a:lstStyle/>
-                    <a:p>
-                      <a:pPr>
-                        <a:defRPr sz="1100"/>
-                      </a:pPr>
-                      <a:r>
-                        <a:t>-2.26</a:t>
+                        <a:t>29.79</a:t>
+                      </a:r>
+                    </a:p>
+                  </a:txBody>
+                  <a:tcPr/>
+                </a:tc>
+                <a:tc>
+                  <a:txBody>
+                    <a:bodyPr/>
+                    <a:lstStyle/>
+                    <a:p>
+                      <a:pPr>
+                        <a:defRPr sz="1100"/>
+                      </a:pPr>
+                      <a:r>
+                        <a:t>114.99</a:t>
+                      </a:r>
+                    </a:p>
+                  </a:txBody>
+                  <a:tcPr/>
+                </a:tc>
+                <a:tc>
+                  <a:txBody>
+                    <a:bodyPr/>
+                    <a:lstStyle/>
+                    <a:p>
+                      <a:pPr>
+                        <a:defRPr sz="1100"/>
+                      </a:pPr>
+                      <a:r>
+                        <a:t>-0.99</a:t>
                       </a:r>
                     </a:p>
                   </a:txBody>
@@ -4005,37 +4005,37 @@
                         <a:defRPr sz="1100"/>
                       </a:pPr>
                       <a:r>
-                        <a:t>28.38</a:t>
-                      </a:r>
-                    </a:p>
-                  </a:txBody>
-                  <a:tcPr/>
-                </a:tc>
-                <a:tc>
-                  <a:txBody>
-                    <a:bodyPr/>
-                    <a:lstStyle/>
-                    <a:p>
-                      <a:pPr>
-                        <a:defRPr sz="1100"/>
-                      </a:pPr>
-                      <a:r>
-                        <a:t>26.39</a:t>
-                      </a:r>
-                    </a:p>
-                  </a:txBody>
-                  <a:tcPr/>
-                </a:tc>
-                <a:tc>
-                  <a:txBody>
-                    <a:bodyPr/>
-                    <a:lstStyle/>
-                    <a:p>
-                      <a:pPr>
-                        <a:defRPr sz="1100"/>
-                      </a:pPr>
-                      <a:r>
-                        <a:t>0.46</a:t>
+                        <a:t>28.54</a:t>
+                      </a:r>
+                    </a:p>
+                  </a:txBody>
+                  <a:tcPr/>
+                </a:tc>
+                <a:tc>
+                  <a:txBody>
+                    <a:bodyPr/>
+                    <a:lstStyle/>
+                    <a:p>
+                      <a:pPr>
+                        <a:defRPr sz="1100"/>
+                      </a:pPr>
+                      <a:r>
+                        <a:t>26.54</a:t>
+                      </a:r>
+                    </a:p>
+                  </a:txBody>
+                  <a:tcPr/>
+                </a:tc>
+                <a:tc>
+                  <a:txBody>
+                    <a:bodyPr/>
+                    <a:lstStyle/>
+                    <a:p>
+                      <a:pPr>
+                        <a:defRPr sz="1100"/>
+                      </a:pPr>
+                      <a:r>
+                        <a:t>0.61</a:t>
                       </a:r>
                     </a:p>
                   </a:txBody>
@@ -4097,37 +4097,37 @@
                         <a:defRPr sz="1100"/>
                       </a:pPr>
                       <a:r>
-                        <a:t>11.36</a:t>
-                      </a:r>
-                    </a:p>
-                  </a:txBody>
-                  <a:tcPr/>
-                </a:tc>
-                <a:tc>
-                  <a:txBody>
-                    <a:bodyPr/>
-                    <a:lstStyle/>
-                    <a:p>
-                      <a:pPr>
-                        <a:defRPr sz="1100"/>
-                      </a:pPr>
-                      <a:r>
-                        <a:t>10.79</a:t>
-                      </a:r>
-                    </a:p>
-                  </a:txBody>
-                  <a:tcPr/>
-                </a:tc>
-                <a:tc>
-                  <a:txBody>
-                    <a:bodyPr/>
-                    <a:lstStyle/>
-                    <a:p>
-                      <a:pPr>
-                        <a:defRPr sz="1100"/>
-                      </a:pPr>
-                      <a:r>
-                        <a:t>0.84</a:t>
+                        <a:t>11.29</a:t>
+                      </a:r>
+                    </a:p>
+                  </a:txBody>
+                  <a:tcPr/>
+                </a:tc>
+                <a:tc>
+                  <a:txBody>
+                    <a:bodyPr/>
+                    <a:lstStyle/>
+                    <a:p>
+                      <a:pPr>
+                        <a:defRPr sz="1100"/>
+                      </a:pPr>
+                      <a:r>
+                        <a:t>10.73</a:t>
+                      </a:r>
+                    </a:p>
+                  </a:txBody>
+                  <a:tcPr/>
+                </a:tc>
+                <a:tc>
+                  <a:txBody>
+                    <a:bodyPr/>
+                    <a:lstStyle/>
+                    <a:p>
+                      <a:pPr>
+                        <a:defRPr sz="1100"/>
+                      </a:pPr>
+                      <a:r>
+                        <a:t>0.78</a:t>
                       </a:r>
                     </a:p>
                   </a:txBody>
@@ -4189,37 +4189,37 @@
                         <a:defRPr sz="1100"/>
                       </a:pPr>
                       <a:r>
-                        <a:t>15.87</a:t>
-                      </a:r>
-                    </a:p>
-                  </a:txBody>
-                  <a:tcPr/>
-                </a:tc>
-                <a:tc>
-                  <a:txBody>
-                    <a:bodyPr/>
-                    <a:lstStyle/>
-                    <a:p>
-                      <a:pPr>
-                        <a:defRPr sz="1100"/>
-                      </a:pPr>
-                      <a:r>
-                        <a:t>7.93</a:t>
-                      </a:r>
-                    </a:p>
-                  </a:txBody>
-                  <a:tcPr/>
-                </a:tc>
-                <a:tc>
-                  <a:txBody>
-                    <a:bodyPr/>
-                    <a:lstStyle/>
-                    <a:p>
-                      <a:pPr>
-                        <a:defRPr sz="1100"/>
-                      </a:pPr>
-                      <a:r>
-                        <a:t>-0.83</a:t>
+                        <a:t>16.01</a:t>
+                      </a:r>
+                    </a:p>
+                  </a:txBody>
+                  <a:tcPr/>
+                </a:tc>
+                <a:tc>
+                  <a:txBody>
+                    <a:bodyPr/>
+                    <a:lstStyle/>
+                    <a:p>
+                      <a:pPr>
+                        <a:defRPr sz="1100"/>
+                      </a:pPr>
+                      <a:r>
+                        <a:t>8.01</a:t>
+                      </a:r>
+                    </a:p>
+                  </a:txBody>
+                  <a:tcPr/>
+                </a:tc>
+                <a:tc>
+                  <a:txBody>
+                    <a:bodyPr/>
+                    <a:lstStyle/>
+                    <a:p>
+                      <a:pPr>
+                        <a:defRPr sz="1100"/>
+                      </a:pPr>
+                      <a:r>
+                        <a:t>-0.75</a:t>
                       </a:r>
                     </a:p>
                   </a:txBody>
@@ -4281,37 +4281,37 @@
                         <a:defRPr sz="1100"/>
                       </a:pPr>
                       <a:r>
-                        <a:t>32.86</a:t>
-                      </a:r>
-                    </a:p>
-                  </a:txBody>
-                  <a:tcPr/>
-                </a:tc>
-                <a:tc>
-                  <a:txBody>
-                    <a:bodyPr/>
-                    <a:lstStyle/>
-                    <a:p>
-                      <a:pPr>
-                        <a:defRPr sz="1100"/>
-                      </a:pPr>
-                      <a:r>
-                        <a:t>20.04</a:t>
-                      </a:r>
-                    </a:p>
-                  </a:txBody>
-                  <a:tcPr/>
-                </a:tc>
-                <a:tc>
-                  <a:txBody>
-                    <a:bodyPr/>
-                    <a:lstStyle/>
-                    <a:p>
-                      <a:pPr>
-                        <a:defRPr sz="1100"/>
-                      </a:pPr>
-                      <a:r>
-                        <a:t>-1.84</a:t>
+                        <a:t>32.6</a:t>
+                      </a:r>
+                    </a:p>
+                  </a:txBody>
+                  <a:tcPr/>
+                </a:tc>
+                <a:tc>
+                  <a:txBody>
+                    <a:bodyPr/>
+                    <a:lstStyle/>
+                    <a:p>
+                      <a:pPr>
+                        <a:defRPr sz="1100"/>
+                      </a:pPr>
+                      <a:r>
+                        <a:t>19.89</a:t>
+                      </a:r>
+                    </a:p>
+                  </a:txBody>
+                  <a:tcPr/>
+                </a:tc>
+                <a:tc>
+                  <a:txBody>
+                    <a:bodyPr/>
+                    <a:lstStyle/>
+                    <a:p>
+                      <a:pPr>
+                        <a:defRPr sz="1100"/>
+                      </a:pPr>
+                      <a:r>
+                        <a:t>-1.99</a:t>
                       </a:r>
                     </a:p>
                   </a:txBody>
@@ -4373,37 +4373,37 @@
                         <a:defRPr sz="1100"/>
                       </a:pPr>
                       <a:r>
-                        <a:t>140.7</a:t>
-                      </a:r>
-                    </a:p>
-                  </a:txBody>
-                  <a:tcPr/>
-                </a:tc>
-                <a:tc>
-                  <a:txBody>
-                    <a:bodyPr/>
-                    <a:lstStyle/>
-                    <a:p>
-                      <a:pPr>
-                        <a:defRPr sz="1100"/>
-                      </a:pPr>
-                      <a:r>
-                        <a:t>7.04</a:t>
-                      </a:r>
-                    </a:p>
-                  </a:txBody>
-                  <a:tcPr/>
-                </a:tc>
-                <a:tc>
-                  <a:txBody>
-                    <a:bodyPr/>
-                    <a:lstStyle/>
-                    <a:p>
-                      <a:pPr>
-                        <a:defRPr sz="1100"/>
-                      </a:pPr>
-                      <a:r>
-                        <a:t>0.2</a:t>
+                        <a:t>137.42</a:t>
+                      </a:r>
+                    </a:p>
+                  </a:txBody>
+                  <a:tcPr/>
+                </a:tc>
+                <a:tc>
+                  <a:txBody>
+                    <a:bodyPr/>
+                    <a:lstStyle/>
+                    <a:p>
+                      <a:pPr>
+                        <a:defRPr sz="1100"/>
+                      </a:pPr>
+                      <a:r>
+                        <a:t>6.87</a:t>
+                      </a:r>
+                    </a:p>
+                  </a:txBody>
+                  <a:tcPr/>
+                </a:tc>
+                <a:tc>
+                  <a:txBody>
+                    <a:bodyPr/>
+                    <a:lstStyle/>
+                    <a:p>
+                      <a:pPr>
+                        <a:defRPr sz="1100"/>
+                      </a:pPr>
+                      <a:r>
+                        <a:t>0.03</a:t>
                       </a:r>
                     </a:p>
                   </a:txBody>
@@ -4465,37 +4465,37 @@
                         <a:defRPr sz="1100"/>
                       </a:pPr>
                       <a:r>
-                        <a:t>7.14</a:t>
-                      </a:r>
-                    </a:p>
-                  </a:txBody>
-                  <a:tcPr/>
-                </a:tc>
-                <a:tc>
-                  <a:txBody>
-                    <a:bodyPr/>
-                    <a:lstStyle/>
-                    <a:p>
-                      <a:pPr>
-                        <a:defRPr sz="1100"/>
-                      </a:pPr>
-                      <a:r>
-                        <a:t>3.57</a:t>
-                      </a:r>
-                    </a:p>
-                  </a:txBody>
-                  <a:tcPr/>
-                </a:tc>
-                <a:tc>
-                  <a:txBody>
-                    <a:bodyPr/>
-                    <a:lstStyle/>
-                    <a:p>
-                      <a:pPr>
-                        <a:defRPr sz="1100"/>
-                      </a:pPr>
-                      <a:r>
-                        <a:t>-0.1</a:t>
+                        <a:t>7.4</a:t>
+                      </a:r>
+                    </a:p>
+                  </a:txBody>
+                  <a:tcPr/>
+                </a:tc>
+                <a:tc>
+                  <a:txBody>
+                    <a:bodyPr/>
+                    <a:lstStyle/>
+                    <a:p>
+                      <a:pPr>
+                        <a:defRPr sz="1100"/>
+                      </a:pPr>
+                      <a:r>
+                        <a:t>3.7</a:t>
+                      </a:r>
+                    </a:p>
+                  </a:txBody>
+                  <a:tcPr/>
+                </a:tc>
+                <a:tc>
+                  <a:txBody>
+                    <a:bodyPr/>
+                    <a:lstStyle/>
+                    <a:p>
+                      <a:pPr>
+                        <a:defRPr sz="1100"/>
+                      </a:pPr>
+                      <a:r>
+                        <a:t>0.04</a:t>
                       </a:r>
                     </a:p>
                   </a:txBody>
@@ -4557,37 +4557,37 @@
                         <a:defRPr sz="1100"/>
                       </a:pPr>
                       <a:r>
-                        <a:t>19.89</a:t>
-                      </a:r>
-                    </a:p>
-                  </a:txBody>
-                  <a:tcPr/>
-                </a:tc>
-                <a:tc>
-                  <a:txBody>
-                    <a:bodyPr/>
-                    <a:lstStyle/>
-                    <a:p>
-                      <a:pPr>
-                        <a:defRPr sz="1100"/>
-                      </a:pPr>
-                      <a:r>
-                        <a:t>0.99</a:t>
-                      </a:r>
-                    </a:p>
-                  </a:txBody>
-                  <a:tcPr/>
-                </a:tc>
-                <a:tc>
-                  <a:txBody>
-                    <a:bodyPr/>
-                    <a:lstStyle/>
-                    <a:p>
-                      <a:pPr>
-                        <a:defRPr sz="1100"/>
-                      </a:pPr>
-                      <a:r>
-                        <a:t>-0.04</a:t>
+                        <a:t>20.15</a:t>
+                      </a:r>
+                    </a:p>
+                  </a:txBody>
+                  <a:tcPr/>
+                </a:tc>
+                <a:tc>
+                  <a:txBody>
+                    <a:bodyPr/>
+                    <a:lstStyle/>
+                    <a:p>
+                      <a:pPr>
+                        <a:defRPr sz="1100"/>
+                      </a:pPr>
+                      <a:r>
+                        <a:t>1.01</a:t>
+                      </a:r>
+                    </a:p>
+                  </a:txBody>
+                  <a:tcPr/>
+                </a:tc>
+                <a:tc>
+                  <a:txBody>
+                    <a:bodyPr/>
+                    <a:lstStyle/>
+                    <a:p>
+                      <a:pPr>
+                        <a:defRPr sz="1100"/>
+                      </a:pPr>
+                      <a:r>
+                        <a:t>-0.03</a:t>
                       </a:r>
                     </a:p>
                   </a:txBody>
@@ -4649,37 +4649,37 @@
                         <a:defRPr sz="1100"/>
                       </a:pPr>
                       <a:r>
-                        <a:t>176.56</a:t>
-                      </a:r>
-                    </a:p>
-                  </a:txBody>
-                  <a:tcPr/>
-                </a:tc>
-                <a:tc>
-                  <a:txBody>
-                    <a:bodyPr/>
-                    <a:lstStyle/>
-                    <a:p>
-                      <a:pPr>
-                        <a:defRPr sz="1100"/>
-                      </a:pPr>
-                      <a:r>
-                        <a:t>17.66</a:t>
-                      </a:r>
-                    </a:p>
-                  </a:txBody>
-                  <a:tcPr/>
-                </a:tc>
-                <a:tc>
-                  <a:txBody>
-                    <a:bodyPr/>
-                    <a:lstStyle/>
-                    <a:p>
-                      <a:pPr>
-                        <a:defRPr sz="1100"/>
-                      </a:pPr>
-                      <a:r>
-                        <a:t>-0.1</a:t>
+                        <a:t>173.42</a:t>
+                      </a:r>
+                    </a:p>
+                  </a:txBody>
+                  <a:tcPr/>
+                </a:tc>
+                <a:tc>
+                  <a:txBody>
+                    <a:bodyPr/>
+                    <a:lstStyle/>
+                    <a:p>
+                      <a:pPr>
+                        <a:defRPr sz="1100"/>
+                      </a:pPr>
+                      <a:r>
+                        <a:t>17.34</a:t>
+                      </a:r>
+                    </a:p>
+                  </a:txBody>
+                  <a:tcPr/>
+                </a:tc>
+                <a:tc>
+                  <a:txBody>
+                    <a:bodyPr/>
+                    <a:lstStyle/>
+                    <a:p>
+                      <a:pPr>
+                        <a:defRPr sz="1100"/>
+                      </a:pPr>
+                      <a:r>
+                        <a:t>-0.42</a:t>
                       </a:r>
                     </a:p>
                   </a:txBody>
@@ -4741,37 +4741,37 @@
                         <a:defRPr sz="1100"/>
                       </a:pPr>
                       <a:r>
-                        <a:t>160.66</a:t>
-                      </a:r>
-                    </a:p>
-                  </a:txBody>
-                  <a:tcPr/>
-                </a:tc>
-                <a:tc>
-                  <a:txBody>
-                    <a:bodyPr/>
-                    <a:lstStyle/>
-                    <a:p>
-                      <a:pPr>
-                        <a:defRPr sz="1100"/>
-                      </a:pPr>
-                      <a:r>
-                        <a:t>20.89</a:t>
-                      </a:r>
-                    </a:p>
-                  </a:txBody>
-                  <a:tcPr/>
-                </a:tc>
-                <a:tc>
-                  <a:txBody>
-                    <a:bodyPr/>
-                    <a:lstStyle/>
-                    <a:p>
-                      <a:pPr>
-                        <a:defRPr sz="1100"/>
-                      </a:pPr>
-                      <a:r>
-                        <a:t>0.34</a:t>
+                        <a:t>167.34</a:t>
+                      </a:r>
+                    </a:p>
+                  </a:txBody>
+                  <a:tcPr/>
+                </a:tc>
+                <a:tc>
+                  <a:txBody>
+                    <a:bodyPr/>
+                    <a:lstStyle/>
+                    <a:p>
+                      <a:pPr>
+                        <a:defRPr sz="1100"/>
+                      </a:pPr>
+                      <a:r>
+                        <a:t>21.75</a:t>
+                      </a:r>
+                    </a:p>
+                  </a:txBody>
+                  <a:tcPr/>
+                </a:tc>
+                <a:tc>
+                  <a:txBody>
+                    <a:bodyPr/>
+                    <a:lstStyle/>
+                    <a:p>
+                      <a:pPr>
+                        <a:defRPr sz="1100"/>
+                      </a:pPr>
+                      <a:r>
+                        <a:t>1.2</a:t>
                       </a:r>
                     </a:p>
                   </a:txBody>
@@ -4833,37 +4833,37 @@
                         <a:defRPr sz="1100"/>
                       </a:pPr>
                       <a:r>
-                        <a:t>42.98</a:t>
-                      </a:r>
-                    </a:p>
-                  </a:txBody>
-                  <a:tcPr/>
-                </a:tc>
-                <a:tc>
-                  <a:txBody>
-                    <a:bodyPr/>
-                    <a:lstStyle/>
-                    <a:p>
-                      <a:pPr>
-                        <a:defRPr sz="1100"/>
-                      </a:pPr>
-                      <a:r>
-                        <a:t>4.3</a:t>
-                      </a:r>
-                    </a:p>
-                  </a:txBody>
-                  <a:tcPr/>
-                </a:tc>
-                <a:tc>
-                  <a:txBody>
-                    <a:bodyPr/>
-                    <a:lstStyle/>
-                    <a:p>
-                      <a:pPr>
-                        <a:defRPr sz="1100"/>
-                      </a:pPr>
-                      <a:r>
-                        <a:t>0.03</a:t>
+                        <a:t>44.97</a:t>
+                      </a:r>
+                    </a:p>
+                  </a:txBody>
+                  <a:tcPr/>
+                </a:tc>
+                <a:tc>
+                  <a:txBody>
+                    <a:bodyPr/>
+                    <a:lstStyle/>
+                    <a:p>
+                      <a:pPr>
+                        <a:defRPr sz="1100"/>
+                      </a:pPr>
+                      <a:r>
+                        <a:t>4.5</a:t>
+                      </a:r>
+                    </a:p>
+                  </a:txBody>
+                  <a:tcPr/>
+                </a:tc>
+                <a:tc>
+                  <a:txBody>
+                    <a:bodyPr/>
+                    <a:lstStyle/>
+                    <a:p>
+                      <a:pPr>
+                        <a:defRPr sz="1100"/>
+                      </a:pPr>
+                      <a:r>
+                        <a:t>0.23</a:t>
                       </a:r>
                     </a:p>
                   </a:txBody>
@@ -4925,37 +4925,37 @@
                         <a:defRPr sz="1100"/>
                       </a:pPr>
                       <a:r>
-                        <a:t>38.44</a:t>
-                      </a:r>
-                    </a:p>
-                  </a:txBody>
-                  <a:tcPr/>
-                </a:tc>
-                <a:tc>
-                  <a:txBody>
-                    <a:bodyPr/>
-                    <a:lstStyle/>
-                    <a:p>
-                      <a:pPr>
-                        <a:defRPr sz="1100"/>
-                      </a:pPr>
-                      <a:r>
-                        <a:t>15.38</a:t>
-                      </a:r>
-                    </a:p>
-                  </a:txBody>
-                  <a:tcPr/>
-                </a:tc>
-                <a:tc>
-                  <a:txBody>
-                    <a:bodyPr/>
-                    <a:lstStyle/>
-                    <a:p>
-                      <a:pPr>
-                        <a:defRPr sz="1100"/>
-                      </a:pPr>
-                      <a:r>
-                        <a:t>-2.05</a:t>
+                        <a:t>39.56</a:t>
+                      </a:r>
+                    </a:p>
+                  </a:txBody>
+                  <a:tcPr/>
+                </a:tc>
+                <a:tc>
+                  <a:txBody>
+                    <a:bodyPr/>
+                    <a:lstStyle/>
+                    <a:p>
+                      <a:pPr>
+                        <a:defRPr sz="1100"/>
+                      </a:pPr>
+                      <a:r>
+                        <a:t>15.82</a:t>
+                      </a:r>
+                    </a:p>
+                  </a:txBody>
+                  <a:tcPr/>
+                </a:tc>
+                <a:tc>
+                  <a:txBody>
+                    <a:bodyPr/>
+                    <a:lstStyle/>
+                    <a:p>
+                      <a:pPr>
+                        <a:defRPr sz="1100"/>
+                      </a:pPr>
+                      <a:r>
+                        <a:t>-1.6</a:t>
                       </a:r>
                     </a:p>
                   </a:txBody>
@@ -5017,37 +5017,37 @@
                         <a:defRPr sz="1100"/>
                       </a:pPr>
                       <a:r>
-                        <a:t>286.8</a:t>
-                      </a:r>
-                    </a:p>
-                  </a:txBody>
-                  <a:tcPr/>
-                </a:tc>
-                <a:tc>
-                  <a:txBody>
-                    <a:bodyPr/>
-                    <a:lstStyle/>
-                    <a:p>
-                      <a:pPr>
-                        <a:defRPr sz="1100"/>
-                      </a:pPr>
-                      <a:r>
-                        <a:t>31.55</a:t>
-                      </a:r>
-                    </a:p>
-                  </a:txBody>
-                  <a:tcPr/>
-                </a:tc>
-                <a:tc>
-                  <a:txBody>
-                    <a:bodyPr/>
-                    <a:lstStyle/>
-                    <a:p>
-                      <a:pPr>
-                        <a:defRPr sz="1100"/>
-                      </a:pPr>
-                      <a:r>
-                        <a:t>0.0</a:t>
+                        <a:t>291.11</a:t>
+                      </a:r>
+                    </a:p>
+                  </a:txBody>
+                  <a:tcPr/>
+                </a:tc>
+                <a:tc>
+                  <a:txBody>
+                    <a:bodyPr/>
+                    <a:lstStyle/>
+                    <a:p>
+                      <a:pPr>
+                        <a:defRPr sz="1100"/>
+                      </a:pPr>
+                      <a:r>
+                        <a:t>32.02</a:t>
+                      </a:r>
+                    </a:p>
+                  </a:txBody>
+                  <a:tcPr/>
+                </a:tc>
+                <a:tc>
+                  <a:txBody>
+                    <a:bodyPr/>
+                    <a:lstStyle/>
+                    <a:p>
+                      <a:pPr>
+                        <a:defRPr sz="1100"/>
+                      </a:pPr>
+                      <a:r>
+                        <a:t>0.47</a:t>
                       </a:r>
                     </a:p>
                   </a:txBody>
@@ -5133,7 +5133,7 @@
               <a:defRPr sz="1500"/>
             </a:pPr>
             <a:r>
-              <a:t>紫金矿业（601899，有色金属）：综合75.0分；基本面优秀，具备中长期配置价值；趋势中性，观望。</a:t>
+              <a:t>紫金矿业（601899，有色金属）：综合75.5分；基本面优秀，具备中长期配置价值；趋势中性，观望。</a:t>
             </a:r>
           </a:p>
           <a:p>
@@ -5141,7 +5141,7 @@
               <a:defRPr sz="1500"/>
             </a:pPr>
             <a:r>
-              <a:t>宁德时代（300750，新能源电池）：综合70.5分；基本面优秀，具备中长期配置价值；趋势中性，观望。</a:t>
+              <a:t>中国平安（601318，保险）：综合73.5分；基本面优秀，具备中长期配置价值；中期趋势向上，可关注/持有。</a:t>
             </a:r>
           </a:p>
           <a:p>
@@ -5149,7 +5149,7 @@
               <a:defRPr sz="1500"/>
             </a:pPr>
             <a:r>
-              <a:t>长江电力（600900，电力）：综合69.0分；基本面优秀，具备中长期配置价值；中期趋势向上，可关注/持有。</a:t>
+              <a:t>长江电力（600900，电力）：综合72.0分；基本面优秀，具备中长期配置价值；中期趋势向上，可关注/持有。</a:t>
             </a:r>
           </a:p>
           <a:p>
@@ -5157,7 +5157,7 @@
               <a:defRPr sz="1500"/>
             </a:pPr>
             <a:r>
-              <a:t>立讯精密（002475，消费电子）：综合64.5分；基本面优秀，具备中长期配置价值；趋势中性，观望。</a:t>
+              <a:t>宁德时代（300750，新能源电池）：综合70.5分；基本面优秀，具备中长期配置价值；趋势中性，观望。</a:t>
             </a:r>
           </a:p>
           <a:p>
@@ -5165,7 +5165,7 @@
               <a:defRPr sz="1500"/>
             </a:pPr>
             <a:r>
-              <a:t>中国平安（601318，保险）：综合64.5分；基本面优秀，具备中长期配置价值；趋势中性，观望。</a:t>
+              <a:t>立讯精密（002475，消费电子）：综合67.0分；基本面优秀，具备中长期配置价值；趋势中性，观望。</a:t>
             </a:r>
           </a:p>
         </p:txBody>

--- a/outputs/12_中期路演.pptx
+++ b/outputs/12_中期路演.pptx
@@ -3167,7 +3167,7 @@
               <a:defRPr sz="1500"/>
             </a:pPr>
             <a:r>
-              <a:t>数据截止：2026-09-30</a:t>
+              <a:t>数据截止：2026-10-08</a:t>
             </a:r>
           </a:p>
         </p:txBody>
@@ -3255,7 +3255,7 @@
               <a:defRPr sz="1500"/>
             </a:pPr>
             <a:r>
-              <a:t>当前总资产：476.00万元</a:t>
+              <a:t>当前总资产：471.01万元</a:t>
             </a:r>
           </a:p>
           <a:p>
@@ -3263,7 +3263,7 @@
               <a:defRPr sz="1500"/>
             </a:pPr>
             <a:r>
-              <a:t>累计收益率：-4.80%</a:t>
+              <a:t>累计收益率：-5.80%</a:t>
             </a:r>
           </a:p>
           <a:p>
@@ -3271,7 +3271,7 @@
               <a:defRPr sz="1500"/>
             </a:pPr>
             <a:r>
-              <a:t>同期沪深300：-4.19%</a:t>
+              <a:t>同期沪深300：-5.23%</a:t>
             </a:r>
           </a:p>
           <a:p>
@@ -3279,7 +3279,7 @@
               <a:defRPr sz="1500"/>
             </a:pPr>
             <a:r>
-              <a:t>现金：95.84万元（20.1%）</a:t>
+              <a:t>现金：95.84万元（20.3%）</a:t>
             </a:r>
           </a:p>
           <a:p>
@@ -3821,37 +3821,37 @@
                         <a:defRPr sz="1100"/>
                       </a:pPr>
                       <a:r>
-                        <a:t>53.29</a:t>
-                      </a:r>
-                    </a:p>
-                  </a:txBody>
-                  <a:tcPr/>
-                </a:tc>
-                <a:tc>
-                  <a:txBody>
-                    <a:bodyPr/>
-                    <a:lstStyle/>
-                    <a:p>
-                      <a:pPr>
-                        <a:defRPr sz="1100"/>
-                      </a:pPr>
-                      <a:r>
-                        <a:t>96.99</a:t>
-                      </a:r>
-                    </a:p>
-                  </a:txBody>
-                  <a:tcPr/>
-                </a:tc>
-                <a:tc>
-                  <a:txBody>
-                    <a:bodyPr/>
-                    <a:lstStyle/>
-                    <a:p>
-                      <a:pPr>
-                        <a:defRPr sz="1100"/>
-                      </a:pPr>
-                      <a:r>
-                        <a:t>-5.15</a:t>
+                        <a:t>52.67</a:t>
+                      </a:r>
+                    </a:p>
+                  </a:txBody>
+                  <a:tcPr/>
+                </a:tc>
+                <a:tc>
+                  <a:txBody>
+                    <a:bodyPr/>
+                    <a:lstStyle/>
+                    <a:p>
+                      <a:pPr>
+                        <a:defRPr sz="1100"/>
+                      </a:pPr>
+                      <a:r>
+                        <a:t>95.86</a:t>
+                      </a:r>
+                    </a:p>
+                  </a:txBody>
+                  <a:tcPr/>
+                </a:tc>
+                <a:tc>
+                  <a:txBody>
+                    <a:bodyPr/>
+                    <a:lstStyle/>
+                    <a:p>
+                      <a:pPr>
+                        <a:defRPr sz="1100"/>
+                      </a:pPr>
+                      <a:r>
+                        <a:t>-6.28</a:t>
                       </a:r>
                     </a:p>
                   </a:txBody>
@@ -3913,37 +3913,37 @@
                         <a:defRPr sz="1100"/>
                       </a:pPr>
                       <a:r>
-                        <a:t>29.79</a:t>
-                      </a:r>
-                    </a:p>
-                  </a:txBody>
-                  <a:tcPr/>
-                </a:tc>
-                <a:tc>
-                  <a:txBody>
-                    <a:bodyPr/>
-                    <a:lstStyle/>
-                    <a:p>
-                      <a:pPr>
-                        <a:defRPr sz="1100"/>
-                      </a:pPr>
-                      <a:r>
-                        <a:t>114.99</a:t>
-                      </a:r>
-                    </a:p>
-                  </a:txBody>
-                  <a:tcPr/>
-                </a:tc>
-                <a:tc>
-                  <a:txBody>
-                    <a:bodyPr/>
-                    <a:lstStyle/>
-                    <a:p>
-                      <a:pPr>
-                        <a:defRPr sz="1100"/>
-                      </a:pPr>
-                      <a:r>
-                        <a:t>-0.99</a:t>
+                        <a:t>29.37</a:t>
+                      </a:r>
+                    </a:p>
+                  </a:txBody>
+                  <a:tcPr/>
+                </a:tc>
+                <a:tc>
+                  <a:txBody>
+                    <a:bodyPr/>
+                    <a:lstStyle/>
+                    <a:p>
+                      <a:pPr>
+                        <a:defRPr sz="1100"/>
+                      </a:pPr>
+                      <a:r>
+                        <a:t>113.37</a:t>
+                      </a:r>
+                    </a:p>
+                  </a:txBody>
+                  <a:tcPr/>
+                </a:tc>
+                <a:tc>
+                  <a:txBody>
+                    <a:bodyPr/>
+                    <a:lstStyle/>
+                    <a:p>
+                      <a:pPr>
+                        <a:defRPr sz="1100"/>
+                      </a:pPr>
+                      <a:r>
+                        <a:t>-2.61</a:t>
                       </a:r>
                     </a:p>
                   </a:txBody>
@@ -4005,37 +4005,37 @@
                         <a:defRPr sz="1100"/>
                       </a:pPr>
                       <a:r>
-                        <a:t>28.54</a:t>
-                      </a:r>
-                    </a:p>
-                  </a:txBody>
-                  <a:tcPr/>
-                </a:tc>
-                <a:tc>
-                  <a:txBody>
-                    <a:bodyPr/>
-                    <a:lstStyle/>
-                    <a:p>
-                      <a:pPr>
-                        <a:defRPr sz="1100"/>
-                      </a:pPr>
-                      <a:r>
-                        <a:t>26.54</a:t>
-                      </a:r>
-                    </a:p>
-                  </a:txBody>
-                  <a:tcPr/>
-                </a:tc>
-                <a:tc>
-                  <a:txBody>
-                    <a:bodyPr/>
-                    <a:lstStyle/>
-                    <a:p>
-                      <a:pPr>
-                        <a:defRPr sz="1100"/>
-                      </a:pPr>
-                      <a:r>
-                        <a:t>0.61</a:t>
+                        <a:t>28.9</a:t>
+                      </a:r>
+                    </a:p>
+                  </a:txBody>
+                  <a:tcPr/>
+                </a:tc>
+                <a:tc>
+                  <a:txBody>
+                    <a:bodyPr/>
+                    <a:lstStyle/>
+                    <a:p>
+                      <a:pPr>
+                        <a:defRPr sz="1100"/>
+                      </a:pPr>
+                      <a:r>
+                        <a:t>26.88</a:t>
+                      </a:r>
+                    </a:p>
+                  </a:txBody>
+                  <a:tcPr/>
+                </a:tc>
+                <a:tc>
+                  <a:txBody>
+                    <a:bodyPr/>
+                    <a:lstStyle/>
+                    <a:p>
+                      <a:pPr>
+                        <a:defRPr sz="1100"/>
+                      </a:pPr>
+                      <a:r>
+                        <a:t>0.94</a:t>
                       </a:r>
                     </a:p>
                   </a:txBody>
@@ -4097,37 +4097,37 @@
                         <a:defRPr sz="1100"/>
                       </a:pPr>
                       <a:r>
-                        <a:t>11.29</a:t>
-                      </a:r>
-                    </a:p>
-                  </a:txBody>
-                  <a:tcPr/>
-                </a:tc>
-                <a:tc>
-                  <a:txBody>
-                    <a:bodyPr/>
-                    <a:lstStyle/>
-                    <a:p>
-                      <a:pPr>
-                        <a:defRPr sz="1100"/>
-                      </a:pPr>
-                      <a:r>
-                        <a:t>10.73</a:t>
-                      </a:r>
-                    </a:p>
-                  </a:txBody>
-                  <a:tcPr/>
-                </a:tc>
-                <a:tc>
-                  <a:txBody>
-                    <a:bodyPr/>
-                    <a:lstStyle/>
-                    <a:p>
-                      <a:pPr>
-                        <a:defRPr sz="1100"/>
-                      </a:pPr>
-                      <a:r>
-                        <a:t>0.78</a:t>
+                        <a:t>11.53</a:t>
+                      </a:r>
+                    </a:p>
+                  </a:txBody>
+                  <a:tcPr/>
+                </a:tc>
+                <a:tc>
+                  <a:txBody>
+                    <a:bodyPr/>
+                    <a:lstStyle/>
+                    <a:p>
+                      <a:pPr>
+                        <a:defRPr sz="1100"/>
+                      </a:pPr>
+                      <a:r>
+                        <a:t>10.95</a:t>
+                      </a:r>
+                    </a:p>
+                  </a:txBody>
+                  <a:tcPr/>
+                </a:tc>
+                <a:tc>
+                  <a:txBody>
+                    <a:bodyPr/>
+                    <a:lstStyle/>
+                    <a:p>
+                      <a:pPr>
+                        <a:defRPr sz="1100"/>
+                      </a:pPr>
+                      <a:r>
+                        <a:t>1.0</a:t>
                       </a:r>
                     </a:p>
                   </a:txBody>
@@ -4189,37 +4189,37 @@
                         <a:defRPr sz="1100"/>
                       </a:pPr>
                       <a:r>
-                        <a:t>16.01</a:t>
-                      </a:r>
-                    </a:p>
-                  </a:txBody>
-                  <a:tcPr/>
-                </a:tc>
-                <a:tc>
-                  <a:txBody>
-                    <a:bodyPr/>
-                    <a:lstStyle/>
-                    <a:p>
-                      <a:pPr>
-                        <a:defRPr sz="1100"/>
-                      </a:pPr>
-                      <a:r>
-                        <a:t>8.01</a:t>
-                      </a:r>
-                    </a:p>
-                  </a:txBody>
-                  <a:tcPr/>
-                </a:tc>
-                <a:tc>
-                  <a:txBody>
-                    <a:bodyPr/>
-                    <a:lstStyle/>
-                    <a:p>
-                      <a:pPr>
-                        <a:defRPr sz="1100"/>
-                      </a:pPr>
-                      <a:r>
-                        <a:t>-0.75</a:t>
+                        <a:t>15.69</a:t>
+                      </a:r>
+                    </a:p>
+                  </a:txBody>
+                  <a:tcPr/>
+                </a:tc>
+                <a:tc>
+                  <a:txBody>
+                    <a:bodyPr/>
+                    <a:lstStyle/>
+                    <a:p>
+                      <a:pPr>
+                        <a:defRPr sz="1100"/>
+                      </a:pPr>
+                      <a:r>
+                        <a:t>7.84</a:t>
+                      </a:r>
+                    </a:p>
+                  </a:txBody>
+                  <a:tcPr/>
+                </a:tc>
+                <a:tc>
+                  <a:txBody>
+                    <a:bodyPr/>
+                    <a:lstStyle/>
+                    <a:p>
+                      <a:pPr>
+                        <a:defRPr sz="1100"/>
+                      </a:pPr>
+                      <a:r>
+                        <a:t>-0.92</a:t>
                       </a:r>
                     </a:p>
                   </a:txBody>
@@ -4281,37 +4281,37 @@
                         <a:defRPr sz="1100"/>
                       </a:pPr>
                       <a:r>
-                        <a:t>32.6</a:t>
-                      </a:r>
-                    </a:p>
-                  </a:txBody>
-                  <a:tcPr/>
-                </a:tc>
-                <a:tc>
-                  <a:txBody>
-                    <a:bodyPr/>
-                    <a:lstStyle/>
-                    <a:p>
-                      <a:pPr>
-                        <a:defRPr sz="1100"/>
-                      </a:pPr>
-                      <a:r>
-                        <a:t>19.89</a:t>
-                      </a:r>
-                    </a:p>
-                  </a:txBody>
-                  <a:tcPr/>
-                </a:tc>
-                <a:tc>
-                  <a:txBody>
-                    <a:bodyPr/>
-                    <a:lstStyle/>
-                    <a:p>
-                      <a:pPr>
-                        <a:defRPr sz="1100"/>
-                      </a:pPr>
-                      <a:r>
-                        <a:t>-1.99</a:t>
+                        <a:t>31.74</a:t>
+                      </a:r>
+                    </a:p>
+                  </a:txBody>
+                  <a:tcPr/>
+                </a:tc>
+                <a:tc>
+                  <a:txBody>
+                    <a:bodyPr/>
+                    <a:lstStyle/>
+                    <a:p>
+                      <a:pPr>
+                        <a:defRPr sz="1100"/>
+                      </a:pPr>
+                      <a:r>
+                        <a:t>19.36</a:t>
+                      </a:r>
+                    </a:p>
+                  </a:txBody>
+                  <a:tcPr/>
+                </a:tc>
+                <a:tc>
+                  <a:txBody>
+                    <a:bodyPr/>
+                    <a:lstStyle/>
+                    <a:p>
+                      <a:pPr>
+                        <a:defRPr sz="1100"/>
+                      </a:pPr>
+                      <a:r>
+                        <a:t>-2.52</a:t>
                       </a:r>
                     </a:p>
                   </a:txBody>
@@ -4373,37 +4373,37 @@
                         <a:defRPr sz="1100"/>
                       </a:pPr>
                       <a:r>
-                        <a:t>137.42</a:t>
-                      </a:r>
-                    </a:p>
-                  </a:txBody>
-                  <a:tcPr/>
-                </a:tc>
-                <a:tc>
-                  <a:txBody>
-                    <a:bodyPr/>
-                    <a:lstStyle/>
-                    <a:p>
-                      <a:pPr>
-                        <a:defRPr sz="1100"/>
-                      </a:pPr>
-                      <a:r>
-                        <a:t>6.87</a:t>
-                      </a:r>
-                    </a:p>
-                  </a:txBody>
-                  <a:tcPr/>
-                </a:tc>
-                <a:tc>
-                  <a:txBody>
-                    <a:bodyPr/>
-                    <a:lstStyle/>
-                    <a:p>
-                      <a:pPr>
-                        <a:defRPr sz="1100"/>
-                      </a:pPr>
-                      <a:r>
-                        <a:t>0.03</a:t>
+                        <a:t>127.9</a:t>
+                      </a:r>
+                    </a:p>
+                  </a:txBody>
+                  <a:tcPr/>
+                </a:tc>
+                <a:tc>
+                  <a:txBody>
+                    <a:bodyPr/>
+                    <a:lstStyle/>
+                    <a:p>
+                      <a:pPr>
+                        <a:defRPr sz="1100"/>
+                      </a:pPr>
+                      <a:r>
+                        <a:t>6.39</a:t>
+                      </a:r>
+                    </a:p>
+                  </a:txBody>
+                  <a:tcPr/>
+                </a:tc>
+                <a:tc>
+                  <a:txBody>
+                    <a:bodyPr/>
+                    <a:lstStyle/>
+                    <a:p>
+                      <a:pPr>
+                        <a:defRPr sz="1100"/>
+                      </a:pPr>
+                      <a:r>
+                        <a:t>-0.44</a:t>
                       </a:r>
                     </a:p>
                   </a:txBody>
@@ -4465,37 +4465,37 @@
                         <a:defRPr sz="1100"/>
                       </a:pPr>
                       <a:r>
-                        <a:t>7.4</a:t>
-                      </a:r>
-                    </a:p>
-                  </a:txBody>
-                  <a:tcPr/>
-                </a:tc>
-                <a:tc>
-                  <a:txBody>
-                    <a:bodyPr/>
-                    <a:lstStyle/>
-                    <a:p>
-                      <a:pPr>
-                        <a:defRPr sz="1100"/>
-                      </a:pPr>
-                      <a:r>
-                        <a:t>3.7</a:t>
-                      </a:r>
-                    </a:p>
-                  </a:txBody>
-                  <a:tcPr/>
-                </a:tc>
-                <a:tc>
-                  <a:txBody>
-                    <a:bodyPr/>
-                    <a:lstStyle/>
-                    <a:p>
-                      <a:pPr>
-                        <a:defRPr sz="1100"/>
-                      </a:pPr>
-                      <a:r>
-                        <a:t>0.04</a:t>
+                        <a:t>7.24</a:t>
+                      </a:r>
+                    </a:p>
+                  </a:txBody>
+                  <a:tcPr/>
+                </a:tc>
+                <a:tc>
+                  <a:txBody>
+                    <a:bodyPr/>
+                    <a:lstStyle/>
+                    <a:p>
+                      <a:pPr>
+                        <a:defRPr sz="1100"/>
+                      </a:pPr>
+                      <a:r>
+                        <a:t>3.62</a:t>
+                      </a:r>
+                    </a:p>
+                  </a:txBody>
+                  <a:tcPr/>
+                </a:tc>
+                <a:tc>
+                  <a:txBody>
+                    <a:bodyPr/>
+                    <a:lstStyle/>
+                    <a:p>
+                      <a:pPr>
+                        <a:defRPr sz="1100"/>
+                      </a:pPr>
+                      <a:r>
+                        <a:t>-0.04</a:t>
                       </a:r>
                     </a:p>
                   </a:txBody>
@@ -4557,37 +4557,37 @@
                         <a:defRPr sz="1100"/>
                       </a:pPr>
                       <a:r>
-                        <a:t>20.15</a:t>
-                      </a:r>
-                    </a:p>
-                  </a:txBody>
-                  <a:tcPr/>
-                </a:tc>
-                <a:tc>
-                  <a:txBody>
-                    <a:bodyPr/>
-                    <a:lstStyle/>
-                    <a:p>
-                      <a:pPr>
-                        <a:defRPr sz="1100"/>
-                      </a:pPr>
-                      <a:r>
-                        <a:t>1.01</a:t>
-                      </a:r>
-                    </a:p>
-                  </a:txBody>
-                  <a:tcPr/>
-                </a:tc>
-                <a:tc>
-                  <a:txBody>
-                    <a:bodyPr/>
-                    <a:lstStyle/>
-                    <a:p>
-                      <a:pPr>
-                        <a:defRPr sz="1100"/>
-                      </a:pPr>
-                      <a:r>
-                        <a:t>-0.03</a:t>
+                        <a:t>22.03</a:t>
+                      </a:r>
+                    </a:p>
+                  </a:txBody>
+                  <a:tcPr/>
+                </a:tc>
+                <a:tc>
+                  <a:txBody>
+                    <a:bodyPr/>
+                    <a:lstStyle/>
+                    <a:p>
+                      <a:pPr>
+                        <a:defRPr sz="1100"/>
+                      </a:pPr>
+                      <a:r>
+                        <a:t>1.1</a:t>
+                      </a:r>
+                    </a:p>
+                  </a:txBody>
+                  <a:tcPr/>
+                </a:tc>
+                <a:tc>
+                  <a:txBody>
+                    <a:bodyPr/>
+                    <a:lstStyle/>
+                    <a:p>
+                      <a:pPr>
+                        <a:defRPr sz="1100"/>
+                      </a:pPr>
+                      <a:r>
+                        <a:t>0.06</a:t>
                       </a:r>
                     </a:p>
                   </a:txBody>
@@ -4649,37 +4649,37 @@
                         <a:defRPr sz="1100"/>
                       </a:pPr>
                       <a:r>
-                        <a:t>173.42</a:t>
-                      </a:r>
-                    </a:p>
-                  </a:txBody>
-                  <a:tcPr/>
-                </a:tc>
-                <a:tc>
-                  <a:txBody>
-                    <a:bodyPr/>
-                    <a:lstStyle/>
-                    <a:p>
-                      <a:pPr>
-                        <a:defRPr sz="1100"/>
-                      </a:pPr>
-                      <a:r>
-                        <a:t>17.34</a:t>
-                      </a:r>
-                    </a:p>
-                  </a:txBody>
-                  <a:tcPr/>
-                </a:tc>
-                <a:tc>
-                  <a:txBody>
-                    <a:bodyPr/>
-                    <a:lstStyle/>
-                    <a:p>
-                      <a:pPr>
-                        <a:defRPr sz="1100"/>
-                      </a:pPr>
-                      <a:r>
-                        <a:t>-0.42</a:t>
+                        <a:t>171.82</a:t>
+                      </a:r>
+                    </a:p>
+                  </a:txBody>
+                  <a:tcPr/>
+                </a:tc>
+                <a:tc>
+                  <a:txBody>
+                    <a:bodyPr/>
+                    <a:lstStyle/>
+                    <a:p>
+                      <a:pPr>
+                        <a:defRPr sz="1100"/>
+                      </a:pPr>
+                      <a:r>
+                        <a:t>17.18</a:t>
+                      </a:r>
+                    </a:p>
+                  </a:txBody>
+                  <a:tcPr/>
+                </a:tc>
+                <a:tc>
+                  <a:txBody>
+                    <a:bodyPr/>
+                    <a:lstStyle/>
+                    <a:p>
+                      <a:pPr>
+                        <a:defRPr sz="1100"/>
+                      </a:pPr>
+                      <a:r>
+                        <a:t>-0.58</a:t>
                       </a:r>
                     </a:p>
                   </a:txBody>
@@ -4741,37 +4741,37 @@
                         <a:defRPr sz="1100"/>
                       </a:pPr>
                       <a:r>
-                        <a:t>167.34</a:t>
-                      </a:r>
-                    </a:p>
-                  </a:txBody>
-                  <a:tcPr/>
-                </a:tc>
-                <a:tc>
-                  <a:txBody>
-                    <a:bodyPr/>
-                    <a:lstStyle/>
-                    <a:p>
-                      <a:pPr>
-                        <a:defRPr sz="1100"/>
-                      </a:pPr>
-                      <a:r>
-                        <a:t>21.75</a:t>
-                      </a:r>
-                    </a:p>
-                  </a:txBody>
-                  <a:tcPr/>
-                </a:tc>
-                <a:tc>
-                  <a:txBody>
-                    <a:bodyPr/>
-                    <a:lstStyle/>
-                    <a:p>
-                      <a:pPr>
-                        <a:defRPr sz="1100"/>
-                      </a:pPr>
-                      <a:r>
-                        <a:t>1.2</a:t>
+                        <a:t>162.0</a:t>
+                      </a:r>
+                    </a:p>
+                  </a:txBody>
+                  <a:tcPr/>
+                </a:tc>
+                <a:tc>
+                  <a:txBody>
+                    <a:bodyPr/>
+                    <a:lstStyle/>
+                    <a:p>
+                      <a:pPr>
+                        <a:defRPr sz="1100"/>
+                      </a:pPr>
+                      <a:r>
+                        <a:t>21.06</a:t>
+                      </a:r>
+                    </a:p>
+                  </a:txBody>
+                  <a:tcPr/>
+                </a:tc>
+                <a:tc>
+                  <a:txBody>
+                    <a:bodyPr/>
+                    <a:lstStyle/>
+                    <a:p>
+                      <a:pPr>
+                        <a:defRPr sz="1100"/>
+                      </a:pPr>
+                      <a:r>
+                        <a:t>0.51</a:t>
                       </a:r>
                     </a:p>
                   </a:txBody>
@@ -4833,37 +4833,37 @@
                         <a:defRPr sz="1100"/>
                       </a:pPr>
                       <a:r>
-                        <a:t>44.97</a:t>
-                      </a:r>
-                    </a:p>
-                  </a:txBody>
-                  <a:tcPr/>
-                </a:tc>
-                <a:tc>
-                  <a:txBody>
-                    <a:bodyPr/>
-                    <a:lstStyle/>
-                    <a:p>
-                      <a:pPr>
-                        <a:defRPr sz="1100"/>
-                      </a:pPr>
-                      <a:r>
-                        <a:t>4.5</a:t>
-                      </a:r>
-                    </a:p>
-                  </a:txBody>
-                  <a:tcPr/>
-                </a:tc>
-                <a:tc>
-                  <a:txBody>
-                    <a:bodyPr/>
-                    <a:lstStyle/>
-                    <a:p>
-                      <a:pPr>
-                        <a:defRPr sz="1100"/>
-                      </a:pPr>
-                      <a:r>
-                        <a:t>0.23</a:t>
+                        <a:t>43.75</a:t>
+                      </a:r>
+                    </a:p>
+                  </a:txBody>
+                  <a:tcPr/>
+                </a:tc>
+                <a:tc>
+                  <a:txBody>
+                    <a:bodyPr/>
+                    <a:lstStyle/>
+                    <a:p>
+                      <a:pPr>
+                        <a:defRPr sz="1100"/>
+                      </a:pPr>
+                      <a:r>
+                        <a:t>4.38</a:t>
+                      </a:r>
+                    </a:p>
+                  </a:txBody>
+                  <a:tcPr/>
+                </a:tc>
+                <a:tc>
+                  <a:txBody>
+                    <a:bodyPr/>
+                    <a:lstStyle/>
+                    <a:p>
+                      <a:pPr>
+                        <a:defRPr sz="1100"/>
+                      </a:pPr>
+                      <a:r>
+                        <a:t>0.11</a:t>
                       </a:r>
                     </a:p>
                   </a:txBody>
@@ -4925,37 +4925,37 @@
                         <a:defRPr sz="1100"/>
                       </a:pPr>
                       <a:r>
-                        <a:t>39.56</a:t>
-                      </a:r>
-                    </a:p>
-                  </a:txBody>
-                  <a:tcPr/>
-                </a:tc>
-                <a:tc>
-                  <a:txBody>
-                    <a:bodyPr/>
-                    <a:lstStyle/>
-                    <a:p>
-                      <a:pPr>
-                        <a:defRPr sz="1100"/>
-                      </a:pPr>
-                      <a:r>
-                        <a:t>15.82</a:t>
-                      </a:r>
-                    </a:p>
-                  </a:txBody>
-                  <a:tcPr/>
-                </a:tc>
-                <a:tc>
-                  <a:txBody>
-                    <a:bodyPr/>
-                    <a:lstStyle/>
-                    <a:p>
-                      <a:pPr>
-                        <a:defRPr sz="1100"/>
-                      </a:pPr>
-                      <a:r>
-                        <a:t>-1.6</a:t>
+                        <a:t>39.07</a:t>
+                      </a:r>
+                    </a:p>
+                  </a:txBody>
+                  <a:tcPr/>
+                </a:tc>
+                <a:tc>
+                  <a:txBody>
+                    <a:bodyPr/>
+                    <a:lstStyle/>
+                    <a:p>
+                      <a:pPr>
+                        <a:defRPr sz="1100"/>
+                      </a:pPr>
+                      <a:r>
+                        <a:t>15.63</a:t>
+                      </a:r>
+                    </a:p>
+                  </a:txBody>
+                  <a:tcPr/>
+                </a:tc>
+                <a:tc>
+                  <a:txBody>
+                    <a:bodyPr/>
+                    <a:lstStyle/>
+                    <a:p>
+                      <a:pPr>
+                        <a:defRPr sz="1100"/>
+                      </a:pPr>
+                      <a:r>
+                        <a:t>-1.8</a:t>
                       </a:r>
                     </a:p>
                   </a:txBody>
@@ -5017,37 +5017,37 @@
                         <a:defRPr sz="1100"/>
                       </a:pPr>
                       <a:r>
-                        <a:t>291.11</a:t>
-                      </a:r>
-                    </a:p>
-                  </a:txBody>
-                  <a:tcPr/>
-                </a:tc>
-                <a:tc>
-                  <a:txBody>
-                    <a:bodyPr/>
-                    <a:lstStyle/>
-                    <a:p>
-                      <a:pPr>
-                        <a:defRPr sz="1100"/>
-                      </a:pPr>
-                      <a:r>
-                        <a:t>32.02</a:t>
-                      </a:r>
-                    </a:p>
-                  </a:txBody>
-                  <a:tcPr/>
-                </a:tc>
-                <a:tc>
-                  <a:txBody>
-                    <a:bodyPr/>
-                    <a:lstStyle/>
-                    <a:p>
-                      <a:pPr>
-                        <a:defRPr sz="1100"/>
-                      </a:pPr>
-                      <a:r>
-                        <a:t>0.47</a:t>
+                        <a:t>286.75</a:t>
+                      </a:r>
+                    </a:p>
+                  </a:txBody>
+                  <a:tcPr/>
+                </a:tc>
+                <a:tc>
+                  <a:txBody>
+                    <a:bodyPr/>
+                    <a:lstStyle/>
+                    <a:p>
+                      <a:pPr>
+                        <a:defRPr sz="1100"/>
+                      </a:pPr>
+                      <a:r>
+                        <a:t>31.54</a:t>
+                      </a:r>
+                    </a:p>
+                  </a:txBody>
+                  <a:tcPr/>
+                </a:tc>
+                <a:tc>
+                  <a:txBody>
+                    <a:bodyPr/>
+                    <a:lstStyle/>
+                    <a:p>
+                      <a:pPr>
+                        <a:defRPr sz="1100"/>
+                      </a:pPr>
+                      <a:r>
+                        <a:t>-0.01</a:t>
                       </a:r>
                     </a:p>
                   </a:txBody>
@@ -5141,7 +5141,7 @@
               <a:defRPr sz="1500"/>
             </a:pPr>
             <a:r>
-              <a:t>中国平安（601318，保险）：综合73.5分；基本面优秀，具备中长期配置价值；中期趋势向上，可关注/持有。</a:t>
+              <a:t>长江电力（600900，电力）：综合72.0分；基本面优秀，具备中长期配置价值；中期趋势向上，可关注/持有。</a:t>
             </a:r>
           </a:p>
           <a:p>
@@ -5149,7 +5149,7 @@
               <a:defRPr sz="1500"/>
             </a:pPr>
             <a:r>
-              <a:t>长江电力（600900，电力）：综合72.0分；基本面优秀，具备中长期配置价值；中期趋势向上，可关注/持有。</a:t>
+              <a:t>宁德时代（300750，新能源电池）：综合70.5分；基本面优秀，具备中长期配置价值；趋势中性，观望。</a:t>
             </a:r>
           </a:p>
           <a:p>
@@ -5157,7 +5157,7 @@
               <a:defRPr sz="1500"/>
             </a:pPr>
             <a:r>
-              <a:t>宁德时代（300750，新能源电池）：综合70.5分；基本面优秀，具备中长期配置价值；趋势中性，观望。</a:t>
+              <a:t>立讯精密（002475，消费电子）：综合67.0分；基本面优秀，具备中长期配置价值；趋势中性，观望。</a:t>
             </a:r>
           </a:p>
           <a:p>
@@ -5165,7 +5165,7 @@
               <a:defRPr sz="1500"/>
             </a:pPr>
             <a:r>
-              <a:t>立讯精密（002475，消费电子）：综合67.0分；基本面优秀，具备中长期配置价值；趋势中性，观望。</a:t>
+              <a:t>中国平安（601318，保险）：综合66.5分；基本面优秀，具备中长期配置价值；趋势中性，观望。</a:t>
             </a:r>
           </a:p>
         </p:txBody>

--- a/outputs/12_中期路演.pptx
+++ b/outputs/12_中期路演.pptx
@@ -3167,7 +3167,7 @@
               <a:defRPr sz="1500"/>
             </a:pPr>
             <a:r>
-              <a:t>数据截止：2026-10-08</a:t>
+              <a:t>数据截止：2026-10-09</a:t>
             </a:r>
           </a:p>
         </p:txBody>
@@ -3255,7 +3255,7 @@
               <a:defRPr sz="1500"/>
             </a:pPr>
             <a:r>
-              <a:t>当前总资产：471.01万元</a:t>
+              <a:t>当前总资产：478.95万元</a:t>
             </a:r>
           </a:p>
           <a:p>
@@ -3263,7 +3263,7 @@
               <a:defRPr sz="1500"/>
             </a:pPr>
             <a:r>
-              <a:t>累计收益率：-5.80%</a:t>
+              <a:t>累计收益率：-4.21%</a:t>
             </a:r>
           </a:p>
           <a:p>
@@ -3271,7 +3271,7 @@
               <a:defRPr sz="1500"/>
             </a:pPr>
             <a:r>
-              <a:t>同期沪深300：-5.23%</a:t>
+              <a:t>同期沪深300：-4.98%</a:t>
             </a:r>
           </a:p>
           <a:p>
@@ -3279,7 +3279,7 @@
               <a:defRPr sz="1500"/>
             </a:pPr>
             <a:r>
-              <a:t>现金：95.84万元（20.3%）</a:t>
+              <a:t>现金：95.84万元（20.0%）</a:t>
             </a:r>
           </a:p>
           <a:p>
@@ -3821,37 +3821,37 @@
                         <a:defRPr sz="1100"/>
                       </a:pPr>
                       <a:r>
-                        <a:t>52.67</a:t>
-                      </a:r>
-                    </a:p>
-                  </a:txBody>
-                  <a:tcPr/>
-                </a:tc>
-                <a:tc>
-                  <a:txBody>
-                    <a:bodyPr/>
-                    <a:lstStyle/>
-                    <a:p>
-                      <a:pPr>
-                        <a:defRPr sz="1100"/>
-                      </a:pPr>
-                      <a:r>
-                        <a:t>95.86</a:t>
-                      </a:r>
-                    </a:p>
-                  </a:txBody>
-                  <a:tcPr/>
-                </a:tc>
-                <a:tc>
-                  <a:txBody>
-                    <a:bodyPr/>
-                    <a:lstStyle/>
-                    <a:p>
-                      <a:pPr>
-                        <a:defRPr sz="1100"/>
-                      </a:pPr>
-                      <a:r>
-                        <a:t>-6.28</a:t>
+                        <a:t>52.83</a:t>
+                      </a:r>
+                    </a:p>
+                  </a:txBody>
+                  <a:tcPr/>
+                </a:tc>
+                <a:tc>
+                  <a:txBody>
+                    <a:bodyPr/>
+                    <a:lstStyle/>
+                    <a:p>
+                      <a:pPr>
+                        <a:defRPr sz="1100"/>
+                      </a:pPr>
+                      <a:r>
+                        <a:t>96.15</a:t>
+                      </a:r>
+                    </a:p>
+                  </a:txBody>
+                  <a:tcPr/>
+                </a:tc>
+                <a:tc>
+                  <a:txBody>
+                    <a:bodyPr/>
+                    <a:lstStyle/>
+                    <a:p>
+                      <a:pPr>
+                        <a:defRPr sz="1100"/>
+                      </a:pPr>
+                      <a:r>
+                        <a:t>-5.99</a:t>
                       </a:r>
                     </a:p>
                   </a:txBody>
@@ -3913,37 +3913,37 @@
                         <a:defRPr sz="1100"/>
                       </a:pPr>
                       <a:r>
-                        <a:t>29.37</a:t>
-                      </a:r>
-                    </a:p>
-                  </a:txBody>
-                  <a:tcPr/>
-                </a:tc>
-                <a:tc>
-                  <a:txBody>
-                    <a:bodyPr/>
-                    <a:lstStyle/>
-                    <a:p>
-                      <a:pPr>
-                        <a:defRPr sz="1100"/>
-                      </a:pPr>
-                      <a:r>
-                        <a:t>113.37</a:t>
-                      </a:r>
-                    </a:p>
-                  </a:txBody>
-                  <a:tcPr/>
-                </a:tc>
-                <a:tc>
-                  <a:txBody>
-                    <a:bodyPr/>
-                    <a:lstStyle/>
-                    <a:p>
-                      <a:pPr>
-                        <a:defRPr sz="1100"/>
-                      </a:pPr>
-                      <a:r>
-                        <a:t>-2.61</a:t>
+                        <a:t>30.8</a:t>
+                      </a:r>
+                    </a:p>
+                  </a:txBody>
+                  <a:tcPr/>
+                </a:tc>
+                <a:tc>
+                  <a:txBody>
+                    <a:bodyPr/>
+                    <a:lstStyle/>
+                    <a:p>
+                      <a:pPr>
+                        <a:defRPr sz="1100"/>
+                      </a:pPr>
+                      <a:r>
+                        <a:t>118.89</a:t>
+                      </a:r>
+                    </a:p>
+                  </a:txBody>
+                  <a:tcPr/>
+                </a:tc>
+                <a:tc>
+                  <a:txBody>
+                    <a:bodyPr/>
+                    <a:lstStyle/>
+                    <a:p>
+                      <a:pPr>
+                        <a:defRPr sz="1100"/>
+                      </a:pPr>
+                      <a:r>
+                        <a:t>2.91</a:t>
                       </a:r>
                     </a:p>
                   </a:txBody>
@@ -4005,37 +4005,37 @@
                         <a:defRPr sz="1100"/>
                       </a:pPr>
                       <a:r>
-                        <a:t>28.9</a:t>
-                      </a:r>
-                    </a:p>
-                  </a:txBody>
-                  <a:tcPr/>
-                </a:tc>
-                <a:tc>
-                  <a:txBody>
-                    <a:bodyPr/>
-                    <a:lstStyle/>
-                    <a:p>
-                      <a:pPr>
-                        <a:defRPr sz="1100"/>
-                      </a:pPr>
-                      <a:r>
-                        <a:t>26.88</a:t>
-                      </a:r>
-                    </a:p>
-                  </a:txBody>
-                  <a:tcPr/>
-                </a:tc>
-                <a:tc>
-                  <a:txBody>
-                    <a:bodyPr/>
-                    <a:lstStyle/>
-                    <a:p>
-                      <a:pPr>
-                        <a:defRPr sz="1100"/>
-                      </a:pPr>
-                      <a:r>
-                        <a:t>0.94</a:t>
+                        <a:t>28.99</a:t>
+                      </a:r>
+                    </a:p>
+                  </a:txBody>
+                  <a:tcPr/>
+                </a:tc>
+                <a:tc>
+                  <a:txBody>
+                    <a:bodyPr/>
+                    <a:lstStyle/>
+                    <a:p>
+                      <a:pPr>
+                        <a:defRPr sz="1100"/>
+                      </a:pPr>
+                      <a:r>
+                        <a:t>26.96</a:t>
+                      </a:r>
+                    </a:p>
+                  </a:txBody>
+                  <a:tcPr/>
+                </a:tc>
+                <a:tc>
+                  <a:txBody>
+                    <a:bodyPr/>
+                    <a:lstStyle/>
+                    <a:p>
+                      <a:pPr>
+                        <a:defRPr sz="1100"/>
+                      </a:pPr>
+                      <a:r>
+                        <a:t>1.03</a:t>
                       </a:r>
                     </a:p>
                   </a:txBody>
@@ -4097,37 +4097,37 @@
                         <a:defRPr sz="1100"/>
                       </a:pPr>
                       <a:r>
-                        <a:t>11.53</a:t>
-                      </a:r>
-                    </a:p>
-                  </a:txBody>
-                  <a:tcPr/>
-                </a:tc>
-                <a:tc>
-                  <a:txBody>
-                    <a:bodyPr/>
-                    <a:lstStyle/>
-                    <a:p>
-                      <a:pPr>
-                        <a:defRPr sz="1100"/>
-                      </a:pPr>
-                      <a:r>
-                        <a:t>10.95</a:t>
-                      </a:r>
-                    </a:p>
-                  </a:txBody>
-                  <a:tcPr/>
-                </a:tc>
-                <a:tc>
-                  <a:txBody>
-                    <a:bodyPr/>
-                    <a:lstStyle/>
-                    <a:p>
-                      <a:pPr>
-                        <a:defRPr sz="1100"/>
-                      </a:pPr>
-                      <a:r>
-                        <a:t>1.0</a:t>
+                        <a:t>11.58</a:t>
+                      </a:r>
+                    </a:p>
+                  </a:txBody>
+                  <a:tcPr/>
+                </a:tc>
+                <a:tc>
+                  <a:txBody>
+                    <a:bodyPr/>
+                    <a:lstStyle/>
+                    <a:p>
+                      <a:pPr>
+                        <a:defRPr sz="1100"/>
+                      </a:pPr>
+                      <a:r>
+                        <a:t>11.0</a:t>
+                      </a:r>
+                    </a:p>
+                  </a:txBody>
+                  <a:tcPr/>
+                </a:tc>
+                <a:tc>
+                  <a:txBody>
+                    <a:bodyPr/>
+                    <a:lstStyle/>
+                    <a:p>
+                      <a:pPr>
+                        <a:defRPr sz="1100"/>
+                      </a:pPr>
+                      <a:r>
+                        <a:t>1.05</a:t>
                       </a:r>
                     </a:p>
                   </a:txBody>
@@ -4189,37 +4189,37 @@
                         <a:defRPr sz="1100"/>
                       </a:pPr>
                       <a:r>
-                        <a:t>15.69</a:t>
-                      </a:r>
-                    </a:p>
-                  </a:txBody>
-                  <a:tcPr/>
-                </a:tc>
-                <a:tc>
-                  <a:txBody>
-                    <a:bodyPr/>
-                    <a:lstStyle/>
-                    <a:p>
-                      <a:pPr>
-                        <a:defRPr sz="1100"/>
-                      </a:pPr>
-                      <a:r>
-                        <a:t>7.84</a:t>
-                      </a:r>
-                    </a:p>
-                  </a:txBody>
-                  <a:tcPr/>
-                </a:tc>
-                <a:tc>
-                  <a:txBody>
-                    <a:bodyPr/>
-                    <a:lstStyle/>
-                    <a:p>
-                      <a:pPr>
-                        <a:defRPr sz="1100"/>
-                      </a:pPr>
-                      <a:r>
-                        <a:t>-0.92</a:t>
+                        <a:t>16.21</a:t>
+                      </a:r>
+                    </a:p>
+                  </a:txBody>
+                  <a:tcPr/>
+                </a:tc>
+                <a:tc>
+                  <a:txBody>
+                    <a:bodyPr/>
+                    <a:lstStyle/>
+                    <a:p>
+                      <a:pPr>
+                        <a:defRPr sz="1100"/>
+                      </a:pPr>
+                      <a:r>
+                        <a:t>8.11</a:t>
+                      </a:r>
+                    </a:p>
+                  </a:txBody>
+                  <a:tcPr/>
+                </a:tc>
+                <a:tc>
+                  <a:txBody>
+                    <a:bodyPr/>
+                    <a:lstStyle/>
+                    <a:p>
+                      <a:pPr>
+                        <a:defRPr sz="1100"/>
+                      </a:pPr>
+                      <a:r>
+                        <a:t>-0.65</a:t>
                       </a:r>
                     </a:p>
                   </a:txBody>
@@ -4281,37 +4281,37 @@
                         <a:defRPr sz="1100"/>
                       </a:pPr>
                       <a:r>
-                        <a:t>31.74</a:t>
-                      </a:r>
-                    </a:p>
-                  </a:txBody>
-                  <a:tcPr/>
-                </a:tc>
-                <a:tc>
-                  <a:txBody>
-                    <a:bodyPr/>
-                    <a:lstStyle/>
-                    <a:p>
-                      <a:pPr>
-                        <a:defRPr sz="1100"/>
-                      </a:pPr>
-                      <a:r>
-                        <a:t>19.36</a:t>
-                      </a:r>
-                    </a:p>
-                  </a:txBody>
-                  <a:tcPr/>
-                </a:tc>
-                <a:tc>
-                  <a:txBody>
-                    <a:bodyPr/>
-                    <a:lstStyle/>
-                    <a:p>
-                      <a:pPr>
-                        <a:defRPr sz="1100"/>
-                      </a:pPr>
-                      <a:r>
-                        <a:t>-2.52</a:t>
+                        <a:t>31.23</a:t>
+                      </a:r>
+                    </a:p>
+                  </a:txBody>
+                  <a:tcPr/>
+                </a:tc>
+                <a:tc>
+                  <a:txBody>
+                    <a:bodyPr/>
+                    <a:lstStyle/>
+                    <a:p>
+                      <a:pPr>
+                        <a:defRPr sz="1100"/>
+                      </a:pPr>
+                      <a:r>
+                        <a:t>19.05</a:t>
+                      </a:r>
+                    </a:p>
+                  </a:txBody>
+                  <a:tcPr/>
+                </a:tc>
+                <a:tc>
+                  <a:txBody>
+                    <a:bodyPr/>
+                    <a:lstStyle/>
+                    <a:p>
+                      <a:pPr>
+                        <a:defRPr sz="1100"/>
+                      </a:pPr>
+                      <a:r>
+                        <a:t>-2.83</a:t>
                       </a:r>
                     </a:p>
                   </a:txBody>
@@ -4373,37 +4373,37 @@
                         <a:defRPr sz="1100"/>
                       </a:pPr>
                       <a:r>
-                        <a:t>127.9</a:t>
-                      </a:r>
-                    </a:p>
-                  </a:txBody>
-                  <a:tcPr/>
-                </a:tc>
-                <a:tc>
-                  <a:txBody>
-                    <a:bodyPr/>
-                    <a:lstStyle/>
-                    <a:p>
-                      <a:pPr>
-                        <a:defRPr sz="1100"/>
-                      </a:pPr>
-                      <a:r>
-                        <a:t>6.39</a:t>
-                      </a:r>
-                    </a:p>
-                  </a:txBody>
-                  <a:tcPr/>
-                </a:tc>
-                <a:tc>
-                  <a:txBody>
-                    <a:bodyPr/>
-                    <a:lstStyle/>
-                    <a:p>
-                      <a:pPr>
-                        <a:defRPr sz="1100"/>
-                      </a:pPr>
-                      <a:r>
-                        <a:t>-0.44</a:t>
+                        <a:t>138.96</a:t>
+                      </a:r>
+                    </a:p>
+                  </a:txBody>
+                  <a:tcPr/>
+                </a:tc>
+                <a:tc>
+                  <a:txBody>
+                    <a:bodyPr/>
+                    <a:lstStyle/>
+                    <a:p>
+                      <a:pPr>
+                        <a:defRPr sz="1100"/>
+                      </a:pPr>
+                      <a:r>
+                        <a:t>6.95</a:t>
+                      </a:r>
+                    </a:p>
+                  </a:txBody>
+                  <a:tcPr/>
+                </a:tc>
+                <a:tc>
+                  <a:txBody>
+                    <a:bodyPr/>
+                    <a:lstStyle/>
+                    <a:p>
+                      <a:pPr>
+                        <a:defRPr sz="1100"/>
+                      </a:pPr>
+                      <a:r>
+                        <a:t>0.11</a:t>
                       </a:r>
                     </a:p>
                   </a:txBody>
@@ -4465,37 +4465,37 @@
                         <a:defRPr sz="1100"/>
                       </a:pPr>
                       <a:r>
-                        <a:t>7.24</a:t>
-                      </a:r>
-                    </a:p>
-                  </a:txBody>
-                  <a:tcPr/>
-                </a:tc>
-                <a:tc>
-                  <a:txBody>
-                    <a:bodyPr/>
-                    <a:lstStyle/>
-                    <a:p>
-                      <a:pPr>
-                        <a:defRPr sz="1100"/>
-                      </a:pPr>
-                      <a:r>
-                        <a:t>3.62</a:t>
-                      </a:r>
-                    </a:p>
-                  </a:txBody>
-                  <a:tcPr/>
-                </a:tc>
-                <a:tc>
-                  <a:txBody>
-                    <a:bodyPr/>
-                    <a:lstStyle/>
-                    <a:p>
-                      <a:pPr>
-                        <a:defRPr sz="1100"/>
-                      </a:pPr>
-                      <a:r>
-                        <a:t>-0.04</a:t>
+                        <a:t>7.39</a:t>
+                      </a:r>
+                    </a:p>
+                  </a:txBody>
+                  <a:tcPr/>
+                </a:tc>
+                <a:tc>
+                  <a:txBody>
+                    <a:bodyPr/>
+                    <a:lstStyle/>
+                    <a:p>
+                      <a:pPr>
+                        <a:defRPr sz="1100"/>
+                      </a:pPr>
+                      <a:r>
+                        <a:t>3.69</a:t>
+                      </a:r>
+                    </a:p>
+                  </a:txBody>
+                  <a:tcPr/>
+                </a:tc>
+                <a:tc>
+                  <a:txBody>
+                    <a:bodyPr/>
+                    <a:lstStyle/>
+                    <a:p>
+                      <a:pPr>
+                        <a:defRPr sz="1100"/>
+                      </a:pPr>
+                      <a:r>
+                        <a:t>0.03</a:t>
                       </a:r>
                     </a:p>
                   </a:txBody>
@@ -4557,7 +4557,7 @@
                         <a:defRPr sz="1100"/>
                       </a:pPr>
                       <a:r>
-                        <a:t>22.03</a:t>
+                        <a:t>22.07</a:t>
                       </a:r>
                     </a:p>
                   </a:txBody>
@@ -4587,7 +4587,7 @@
                         <a:defRPr sz="1100"/>
                       </a:pPr>
                       <a:r>
-                        <a:t>0.06</a:t>
+                        <a:t>0.07</a:t>
                       </a:r>
                     </a:p>
                   </a:txBody>
@@ -4649,37 +4649,37 @@
                         <a:defRPr sz="1100"/>
                       </a:pPr>
                       <a:r>
-                        <a:t>171.82</a:t>
-                      </a:r>
-                    </a:p>
-                  </a:txBody>
-                  <a:tcPr/>
-                </a:tc>
-                <a:tc>
-                  <a:txBody>
-                    <a:bodyPr/>
-                    <a:lstStyle/>
-                    <a:p>
-                      <a:pPr>
-                        <a:defRPr sz="1100"/>
-                      </a:pPr>
-                      <a:r>
-                        <a:t>17.18</a:t>
-                      </a:r>
-                    </a:p>
-                  </a:txBody>
-                  <a:tcPr/>
-                </a:tc>
-                <a:tc>
-                  <a:txBody>
-                    <a:bodyPr/>
-                    <a:lstStyle/>
-                    <a:p>
-                      <a:pPr>
-                        <a:defRPr sz="1100"/>
-                      </a:pPr>
-                      <a:r>
-                        <a:t>-0.58</a:t>
+                        <a:t>170.72</a:t>
+                      </a:r>
+                    </a:p>
+                  </a:txBody>
+                  <a:tcPr/>
+                </a:tc>
+                <a:tc>
+                  <a:txBody>
+                    <a:bodyPr/>
+                    <a:lstStyle/>
+                    <a:p>
+                      <a:pPr>
+                        <a:defRPr sz="1100"/>
+                      </a:pPr>
+                      <a:r>
+                        <a:t>17.07</a:t>
+                      </a:r>
+                    </a:p>
+                  </a:txBody>
+                  <a:tcPr/>
+                </a:tc>
+                <a:tc>
+                  <a:txBody>
+                    <a:bodyPr/>
+                    <a:lstStyle/>
+                    <a:p>
+                      <a:pPr>
+                        <a:defRPr sz="1100"/>
+                      </a:pPr>
+                      <a:r>
+                        <a:t>-0.69</a:t>
                       </a:r>
                     </a:p>
                   </a:txBody>
@@ -4741,37 +4741,37 @@
                         <a:defRPr sz="1100"/>
                       </a:pPr>
                       <a:r>
-                        <a:t>162.0</a:t>
-                      </a:r>
-                    </a:p>
-                  </a:txBody>
-                  <a:tcPr/>
-                </a:tc>
-                <a:tc>
-                  <a:txBody>
-                    <a:bodyPr/>
-                    <a:lstStyle/>
-                    <a:p>
-                      <a:pPr>
-                        <a:defRPr sz="1100"/>
-                      </a:pPr>
-                      <a:r>
-                        <a:t>21.06</a:t>
-                      </a:r>
-                    </a:p>
-                  </a:txBody>
-                  <a:tcPr/>
-                </a:tc>
-                <a:tc>
-                  <a:txBody>
-                    <a:bodyPr/>
-                    <a:lstStyle/>
-                    <a:p>
-                      <a:pPr>
-                        <a:defRPr sz="1100"/>
-                      </a:pPr>
-                      <a:r>
-                        <a:t>0.51</a:t>
+                        <a:t>157.8</a:t>
+                      </a:r>
+                    </a:p>
+                  </a:txBody>
+                  <a:tcPr/>
+                </a:tc>
+                <a:tc>
+                  <a:txBody>
+                    <a:bodyPr/>
+                    <a:lstStyle/>
+                    <a:p>
+                      <a:pPr>
+                        <a:defRPr sz="1100"/>
+                      </a:pPr>
+                      <a:r>
+                        <a:t>20.51</a:t>
+                      </a:r>
+                    </a:p>
+                  </a:txBody>
+                  <a:tcPr/>
+                </a:tc>
+                <a:tc>
+                  <a:txBody>
+                    <a:bodyPr/>
+                    <a:lstStyle/>
+                    <a:p>
+                      <a:pPr>
+                        <a:defRPr sz="1100"/>
+                      </a:pPr>
+                      <a:r>
+                        <a:t>-0.04</a:t>
                       </a:r>
                     </a:p>
                   </a:txBody>
@@ -4833,37 +4833,37 @@
                         <a:defRPr sz="1100"/>
                       </a:pPr>
                       <a:r>
-                        <a:t>43.75</a:t>
-                      </a:r>
-                    </a:p>
-                  </a:txBody>
-                  <a:tcPr/>
-                </a:tc>
-                <a:tc>
-                  <a:txBody>
-                    <a:bodyPr/>
-                    <a:lstStyle/>
-                    <a:p>
-                      <a:pPr>
-                        <a:defRPr sz="1100"/>
-                      </a:pPr>
-                      <a:r>
-                        <a:t>4.38</a:t>
-                      </a:r>
-                    </a:p>
-                  </a:txBody>
-                  <a:tcPr/>
-                </a:tc>
-                <a:tc>
-                  <a:txBody>
-                    <a:bodyPr/>
-                    <a:lstStyle/>
-                    <a:p>
-                      <a:pPr>
-                        <a:defRPr sz="1100"/>
-                      </a:pPr>
-                      <a:r>
-                        <a:t>0.11</a:t>
+                        <a:t>43.11</a:t>
+                      </a:r>
+                    </a:p>
+                  </a:txBody>
+                  <a:tcPr/>
+                </a:tc>
+                <a:tc>
+                  <a:txBody>
+                    <a:bodyPr/>
+                    <a:lstStyle/>
+                    <a:p>
+                      <a:pPr>
+                        <a:defRPr sz="1100"/>
+                      </a:pPr>
+                      <a:r>
+                        <a:t>4.31</a:t>
+                      </a:r>
+                    </a:p>
+                  </a:txBody>
+                  <a:tcPr/>
+                </a:tc>
+                <a:tc>
+                  <a:txBody>
+                    <a:bodyPr/>
+                    <a:lstStyle/>
+                    <a:p>
+                      <a:pPr>
+                        <a:defRPr sz="1100"/>
+                      </a:pPr>
+                      <a:r>
+                        <a:t>0.05</a:t>
                       </a:r>
                     </a:p>
                   </a:txBody>
@@ -4925,37 +4925,37 @@
                         <a:defRPr sz="1100"/>
                       </a:pPr>
                       <a:r>
-                        <a:t>39.07</a:t>
-                      </a:r>
-                    </a:p>
-                  </a:txBody>
-                  <a:tcPr/>
-                </a:tc>
-                <a:tc>
-                  <a:txBody>
-                    <a:bodyPr/>
-                    <a:lstStyle/>
-                    <a:p>
-                      <a:pPr>
-                        <a:defRPr sz="1100"/>
-                      </a:pPr>
-                      <a:r>
-                        <a:t>15.63</a:t>
-                      </a:r>
-                    </a:p>
-                  </a:txBody>
-                  <a:tcPr/>
-                </a:tc>
-                <a:tc>
-                  <a:txBody>
-                    <a:bodyPr/>
-                    <a:lstStyle/>
-                    <a:p>
-                      <a:pPr>
-                        <a:defRPr sz="1100"/>
-                      </a:pPr>
-                      <a:r>
-                        <a:t>-1.8</a:t>
+                        <a:t>41.38</a:t>
+                      </a:r>
+                    </a:p>
+                  </a:txBody>
+                  <a:tcPr/>
+                </a:tc>
+                <a:tc>
+                  <a:txBody>
+                    <a:bodyPr/>
+                    <a:lstStyle/>
+                    <a:p>
+                      <a:pPr>
+                        <a:defRPr sz="1100"/>
+                      </a:pPr>
+                      <a:r>
+                        <a:t>16.55</a:t>
+                      </a:r>
+                    </a:p>
+                  </a:txBody>
+                  <a:tcPr/>
+                </a:tc>
+                <a:tc>
+                  <a:txBody>
+                    <a:bodyPr/>
+                    <a:lstStyle/>
+                    <a:p>
+                      <a:pPr>
+                        <a:defRPr sz="1100"/>
+                      </a:pPr>
+                      <a:r>
+                        <a:t>-0.87</a:t>
                       </a:r>
                     </a:p>
                   </a:txBody>
@@ -5017,37 +5017,37 @@
                         <a:defRPr sz="1100"/>
                       </a:pPr>
                       <a:r>
-                        <a:t>286.75</a:t>
-                      </a:r>
-                    </a:p>
-                  </a:txBody>
-                  <a:tcPr/>
-                </a:tc>
-                <a:tc>
-                  <a:txBody>
-                    <a:bodyPr/>
-                    <a:lstStyle/>
-                    <a:p>
-                      <a:pPr>
-                        <a:defRPr sz="1100"/>
-                      </a:pPr>
-                      <a:r>
-                        <a:t>31.54</a:t>
-                      </a:r>
-                    </a:p>
-                  </a:txBody>
-                  <a:tcPr/>
-                </a:tc>
-                <a:tc>
-                  <a:txBody>
-                    <a:bodyPr/>
-                    <a:lstStyle/>
-                    <a:p>
-                      <a:pPr>
-                        <a:defRPr sz="1100"/>
-                      </a:pPr>
-                      <a:r>
-                        <a:t>-0.01</a:t>
+                        <a:t>297.75</a:t>
+                      </a:r>
+                    </a:p>
+                  </a:txBody>
+                  <a:tcPr/>
+                </a:tc>
+                <a:tc>
+                  <a:txBody>
+                    <a:bodyPr/>
+                    <a:lstStyle/>
+                    <a:p>
+                      <a:pPr>
+                        <a:defRPr sz="1100"/>
+                      </a:pPr>
+                      <a:r>
+                        <a:t>32.75</a:t>
+                      </a:r>
+                    </a:p>
+                  </a:txBody>
+                  <a:tcPr/>
+                </a:tc>
+                <a:tc>
+                  <a:txBody>
+                    <a:bodyPr/>
+                    <a:lstStyle/>
+                    <a:p>
+                      <a:pPr>
+                        <a:defRPr sz="1100"/>
+                      </a:pPr>
+                      <a:r>
+                        <a:t>1.2</a:t>
                       </a:r>
                     </a:p>
                   </a:txBody>
@@ -5133,7 +5133,7 @@
               <a:defRPr sz="1500"/>
             </a:pPr>
             <a:r>
-              <a:t>紫金矿业（601899，有色金属）：综合75.5分；基本面优秀，具备中长期配置价值；趋势中性，观望。</a:t>
+              <a:t>宁德时代（300750，新能源电池）：综合75.5分；基本面优秀，具备中长期配置价值；中期趋势向上，可关注/持有。</a:t>
             </a:r>
           </a:p>
           <a:p>
@@ -5141,7 +5141,7 @@
               <a:defRPr sz="1500"/>
             </a:pPr>
             <a:r>
-              <a:t>长江电力（600900，电力）：综合72.0分；基本面优秀，具备中长期配置价值；中期趋势向上，可关注/持有。</a:t>
+              <a:t>紫金矿业（601899，有色金属）：综合73.0分；基本面优秀，具备中长期配置价值；趋势中性，观望。</a:t>
             </a:r>
           </a:p>
           <a:p>
@@ -5149,7 +5149,7 @@
               <a:defRPr sz="1500"/>
             </a:pPr>
             <a:r>
-              <a:t>宁德时代（300750，新能源电池）：综合70.5分；基本面优秀，具备中长期配置价值；趋势中性，观望。</a:t>
+              <a:t>长江电力（600900，电力）：综合72.0分；基本面优秀，具备中长期配置价值；中期趋势向上，可关注/持有。</a:t>
             </a:r>
           </a:p>
           <a:p>
@@ -5165,7 +5165,7 @@
               <a:defRPr sz="1500"/>
             </a:pPr>
             <a:r>
-              <a:t>中国平安（601318，保险）：综合66.5分；基本面优秀，具备中长期配置价值；趋势中性，观望。</a:t>
+              <a:t>招商银行（600036，银行）：综合66.0分；基本面优秀，具备中长期配置价值；中期趋势向上，可关注/持有。</a:t>
             </a:r>
           </a:p>
         </p:txBody>

--- a/outputs/12_中期路演.pptx
+++ b/outputs/12_中期路演.pptx
@@ -3271,7 +3271,7 @@
               <a:defRPr sz="1500"/>
             </a:pPr>
             <a:r>
-              <a:t>同期沪深300：-4.98%</a:t>
+              <a:t>同期沪深300：-5.07%</a:t>
             </a:r>
           </a:p>
           <a:p>
@@ -5165,7 +5165,7 @@
               <a:defRPr sz="1500"/>
             </a:pPr>
             <a:r>
-              <a:t>招商银行（600036，银行）：综合66.0分；基本面优秀，具备中长期配置价值；中期趋势向上，可关注/持有。</a:t>
+              <a:t>中国平安（601318，保险）：综合66.5分；基本面优秀，具备中长期配置价值；趋势中性，观望。</a:t>
             </a:r>
           </a:p>
         </p:txBody>

--- a/outputs/12_中期路演.pptx
+++ b/outputs/12_中期路演.pptx
@@ -3167,7 +3167,7 @@
               <a:defRPr sz="1500"/>
             </a:pPr>
             <a:r>
-              <a:t>数据截止：2026-10-09</a:t>
+              <a:t>数据截止：2026-10-12</a:t>
             </a:r>
           </a:p>
         </p:txBody>
@@ -3255,7 +3255,7 @@
               <a:defRPr sz="1500"/>
             </a:pPr>
             <a:r>
-              <a:t>当前总资产：478.95万元</a:t>
+              <a:t>当前总资产：472.86万元</a:t>
             </a:r>
           </a:p>
           <a:p>
@@ -3263,7 +3263,7 @@
               <a:defRPr sz="1500"/>
             </a:pPr>
             <a:r>
-              <a:t>累计收益率：-4.21%</a:t>
+              <a:t>累计收益率：-5.43%</a:t>
             </a:r>
           </a:p>
           <a:p>
@@ -3271,7 +3271,7 @@
               <a:defRPr sz="1500"/>
             </a:pPr>
             <a:r>
-              <a:t>同期沪深300：-5.07%</a:t>
+              <a:t>同期沪深300：-5.72%</a:t>
             </a:r>
           </a:p>
           <a:p>
@@ -3279,7 +3279,7 @@
               <a:defRPr sz="1500"/>
             </a:pPr>
             <a:r>
-              <a:t>现金：95.84万元（20.0%）</a:t>
+              <a:t>现金：95.84万元（20.3%）</a:t>
             </a:r>
           </a:p>
           <a:p>
@@ -3821,37 +3821,37 @@
                         <a:defRPr sz="1100"/>
                       </a:pPr>
                       <a:r>
-                        <a:t>52.83</a:t>
-                      </a:r>
-                    </a:p>
-                  </a:txBody>
-                  <a:tcPr/>
-                </a:tc>
-                <a:tc>
-                  <a:txBody>
-                    <a:bodyPr/>
-                    <a:lstStyle/>
-                    <a:p>
-                      <a:pPr>
-                        <a:defRPr sz="1100"/>
-                      </a:pPr>
-                      <a:r>
-                        <a:t>96.15</a:t>
-                      </a:r>
-                    </a:p>
-                  </a:txBody>
-                  <a:tcPr/>
-                </a:tc>
-                <a:tc>
-                  <a:txBody>
-                    <a:bodyPr/>
-                    <a:lstStyle/>
-                    <a:p>
-                      <a:pPr>
-                        <a:defRPr sz="1100"/>
-                      </a:pPr>
-                      <a:r>
-                        <a:t>-5.99</a:t>
+                        <a:t>53.24</a:t>
+                      </a:r>
+                    </a:p>
+                  </a:txBody>
+                  <a:tcPr/>
+                </a:tc>
+                <a:tc>
+                  <a:txBody>
+                    <a:bodyPr/>
+                    <a:lstStyle/>
+                    <a:p>
+                      <a:pPr>
+                        <a:defRPr sz="1100"/>
+                      </a:pPr>
+                      <a:r>
+                        <a:t>96.9</a:t>
+                      </a:r>
+                    </a:p>
+                  </a:txBody>
+                  <a:tcPr/>
+                </a:tc>
+                <a:tc>
+                  <a:txBody>
+                    <a:bodyPr/>
+                    <a:lstStyle/>
+                    <a:p>
+                      <a:pPr>
+                        <a:defRPr sz="1100"/>
+                      </a:pPr>
+                      <a:r>
+                        <a:t>-5.24</a:t>
                       </a:r>
                     </a:p>
                   </a:txBody>
@@ -3913,37 +3913,37 @@
                         <a:defRPr sz="1100"/>
                       </a:pPr>
                       <a:r>
-                        <a:t>30.8</a:t>
-                      </a:r>
-                    </a:p>
-                  </a:txBody>
-                  <a:tcPr/>
-                </a:tc>
-                <a:tc>
-                  <a:txBody>
-                    <a:bodyPr/>
-                    <a:lstStyle/>
-                    <a:p>
-                      <a:pPr>
-                        <a:defRPr sz="1100"/>
-                      </a:pPr>
-                      <a:r>
-                        <a:t>118.89</a:t>
-                      </a:r>
-                    </a:p>
-                  </a:txBody>
-                  <a:tcPr/>
-                </a:tc>
-                <a:tc>
-                  <a:txBody>
-                    <a:bodyPr/>
-                    <a:lstStyle/>
-                    <a:p>
-                      <a:pPr>
-                        <a:defRPr sz="1100"/>
-                      </a:pPr>
-                      <a:r>
-                        <a:t>2.91</a:t>
+                        <a:t>30.22</a:t>
+                      </a:r>
+                    </a:p>
+                  </a:txBody>
+                  <a:tcPr/>
+                </a:tc>
+                <a:tc>
+                  <a:txBody>
+                    <a:bodyPr/>
+                    <a:lstStyle/>
+                    <a:p>
+                      <a:pPr>
+                        <a:defRPr sz="1100"/>
+                      </a:pPr>
+                      <a:r>
+                        <a:t>116.65</a:t>
+                      </a:r>
+                    </a:p>
+                  </a:txBody>
+                  <a:tcPr/>
+                </a:tc>
+                <a:tc>
+                  <a:txBody>
+                    <a:bodyPr/>
+                    <a:lstStyle/>
+                    <a:p>
+                      <a:pPr>
+                        <a:defRPr sz="1100"/>
+                      </a:pPr>
+                      <a:r>
+                        <a:t>0.67</a:t>
                       </a:r>
                     </a:p>
                   </a:txBody>
@@ -4005,37 +4005,37 @@
                         <a:defRPr sz="1100"/>
                       </a:pPr>
                       <a:r>
-                        <a:t>28.99</a:t>
-                      </a:r>
-                    </a:p>
-                  </a:txBody>
-                  <a:tcPr/>
-                </a:tc>
-                <a:tc>
-                  <a:txBody>
-                    <a:bodyPr/>
-                    <a:lstStyle/>
-                    <a:p>
-                      <a:pPr>
-                        <a:defRPr sz="1100"/>
-                      </a:pPr>
-                      <a:r>
-                        <a:t>26.96</a:t>
-                      </a:r>
-                    </a:p>
-                  </a:txBody>
-                  <a:tcPr/>
-                </a:tc>
-                <a:tc>
-                  <a:txBody>
-                    <a:bodyPr/>
-                    <a:lstStyle/>
-                    <a:p>
-                      <a:pPr>
-                        <a:defRPr sz="1100"/>
-                      </a:pPr>
-                      <a:r>
-                        <a:t>1.03</a:t>
+                        <a:t>29.38</a:t>
+                      </a:r>
+                    </a:p>
+                  </a:txBody>
+                  <a:tcPr/>
+                </a:tc>
+                <a:tc>
+                  <a:txBody>
+                    <a:bodyPr/>
+                    <a:lstStyle/>
+                    <a:p>
+                      <a:pPr>
+                        <a:defRPr sz="1100"/>
+                      </a:pPr>
+                      <a:r>
+                        <a:t>27.32</a:t>
+                      </a:r>
+                    </a:p>
+                  </a:txBody>
+                  <a:tcPr/>
+                </a:tc>
+                <a:tc>
+                  <a:txBody>
+                    <a:bodyPr/>
+                    <a:lstStyle/>
+                    <a:p>
+                      <a:pPr>
+                        <a:defRPr sz="1100"/>
+                      </a:pPr>
+                      <a:r>
+                        <a:t>1.39</a:t>
                       </a:r>
                     </a:p>
                   </a:txBody>
@@ -4097,37 +4097,37 @@
                         <a:defRPr sz="1100"/>
                       </a:pPr>
                       <a:r>
-                        <a:t>11.58</a:t>
-                      </a:r>
-                    </a:p>
-                  </a:txBody>
-                  <a:tcPr/>
-                </a:tc>
-                <a:tc>
-                  <a:txBody>
-                    <a:bodyPr/>
-                    <a:lstStyle/>
-                    <a:p>
-                      <a:pPr>
-                        <a:defRPr sz="1100"/>
-                      </a:pPr>
-                      <a:r>
-                        <a:t>11.0</a:t>
-                      </a:r>
-                    </a:p>
-                  </a:txBody>
-                  <a:tcPr/>
-                </a:tc>
-                <a:tc>
-                  <a:txBody>
-                    <a:bodyPr/>
-                    <a:lstStyle/>
-                    <a:p>
-                      <a:pPr>
-                        <a:defRPr sz="1100"/>
-                      </a:pPr>
-                      <a:r>
-                        <a:t>1.05</a:t>
+                        <a:t>10.7</a:t>
+                      </a:r>
+                    </a:p>
+                  </a:txBody>
+                  <a:tcPr/>
+                </a:tc>
+                <a:tc>
+                  <a:txBody>
+                    <a:bodyPr/>
+                    <a:lstStyle/>
+                    <a:p>
+                      <a:pPr>
+                        <a:defRPr sz="1100"/>
+                      </a:pPr>
+                      <a:r>
+                        <a:t>10.16</a:t>
+                      </a:r>
+                    </a:p>
+                  </a:txBody>
+                  <a:tcPr/>
+                </a:tc>
+                <a:tc>
+                  <a:txBody>
+                    <a:bodyPr/>
+                    <a:lstStyle/>
+                    <a:p>
+                      <a:pPr>
+                        <a:defRPr sz="1100"/>
+                      </a:pPr>
+                      <a:r>
+                        <a:t>0.22</a:t>
                       </a:r>
                     </a:p>
                   </a:txBody>
@@ -4189,37 +4189,37 @@
                         <a:defRPr sz="1100"/>
                       </a:pPr>
                       <a:r>
-                        <a:t>16.21</a:t>
-                      </a:r>
-                    </a:p>
-                  </a:txBody>
-                  <a:tcPr/>
-                </a:tc>
-                <a:tc>
-                  <a:txBody>
-                    <a:bodyPr/>
-                    <a:lstStyle/>
-                    <a:p>
-                      <a:pPr>
-                        <a:defRPr sz="1100"/>
-                      </a:pPr>
-                      <a:r>
-                        <a:t>8.11</a:t>
-                      </a:r>
-                    </a:p>
-                  </a:txBody>
-                  <a:tcPr/>
-                </a:tc>
-                <a:tc>
-                  <a:txBody>
-                    <a:bodyPr/>
-                    <a:lstStyle/>
-                    <a:p>
-                      <a:pPr>
-                        <a:defRPr sz="1100"/>
-                      </a:pPr>
-                      <a:r>
-                        <a:t>-0.65</a:t>
+                        <a:t>16.37</a:t>
+                      </a:r>
+                    </a:p>
+                  </a:txBody>
+                  <a:tcPr/>
+                </a:tc>
+                <a:tc>
+                  <a:txBody>
+                    <a:bodyPr/>
+                    <a:lstStyle/>
+                    <a:p>
+                      <a:pPr>
+                        <a:defRPr sz="1100"/>
+                      </a:pPr>
+                      <a:r>
+                        <a:t>8.19</a:t>
+                      </a:r>
+                    </a:p>
+                  </a:txBody>
+                  <a:tcPr/>
+                </a:tc>
+                <a:tc>
+                  <a:txBody>
+                    <a:bodyPr/>
+                    <a:lstStyle/>
+                    <a:p>
+                      <a:pPr>
+                        <a:defRPr sz="1100"/>
+                      </a:pPr>
+                      <a:r>
+                        <a:t>-0.57</a:t>
                       </a:r>
                     </a:p>
                   </a:txBody>
@@ -4281,37 +4281,37 @@
                         <a:defRPr sz="1100"/>
                       </a:pPr>
                       <a:r>
-                        <a:t>31.23</a:t>
-                      </a:r>
-                    </a:p>
-                  </a:txBody>
-                  <a:tcPr/>
-                </a:tc>
-                <a:tc>
-                  <a:txBody>
-                    <a:bodyPr/>
-                    <a:lstStyle/>
-                    <a:p>
-                      <a:pPr>
-                        <a:defRPr sz="1100"/>
-                      </a:pPr>
-                      <a:r>
-                        <a:t>19.05</a:t>
-                      </a:r>
-                    </a:p>
-                  </a:txBody>
-                  <a:tcPr/>
-                </a:tc>
-                <a:tc>
-                  <a:txBody>
-                    <a:bodyPr/>
-                    <a:lstStyle/>
-                    <a:p>
-                      <a:pPr>
-                        <a:defRPr sz="1100"/>
-                      </a:pPr>
-                      <a:r>
-                        <a:t>-2.83</a:t>
+                        <a:t>28.11</a:t>
+                      </a:r>
+                    </a:p>
+                  </a:txBody>
+                  <a:tcPr/>
+                </a:tc>
+                <a:tc>
+                  <a:txBody>
+                    <a:bodyPr/>
+                    <a:lstStyle/>
+                    <a:p>
+                      <a:pPr>
+                        <a:defRPr sz="1100"/>
+                      </a:pPr>
+                      <a:r>
+                        <a:t>17.15</a:t>
+                      </a:r>
+                    </a:p>
+                  </a:txBody>
+                  <a:tcPr/>
+                </a:tc>
+                <a:tc>
+                  <a:txBody>
+                    <a:bodyPr/>
+                    <a:lstStyle/>
+                    <a:p>
+                      <a:pPr>
+                        <a:defRPr sz="1100"/>
+                      </a:pPr>
+                      <a:r>
+                        <a:t>-4.73</a:t>
                       </a:r>
                     </a:p>
                   </a:txBody>
@@ -4373,37 +4373,37 @@
                         <a:defRPr sz="1100"/>
                       </a:pPr>
                       <a:r>
-                        <a:t>138.96</a:t>
-                      </a:r>
-                    </a:p>
-                  </a:txBody>
-                  <a:tcPr/>
-                </a:tc>
-                <a:tc>
-                  <a:txBody>
-                    <a:bodyPr/>
-                    <a:lstStyle/>
-                    <a:p>
-                      <a:pPr>
-                        <a:defRPr sz="1100"/>
-                      </a:pPr>
-                      <a:r>
-                        <a:t>6.95</a:t>
-                      </a:r>
-                    </a:p>
-                  </a:txBody>
-                  <a:tcPr/>
-                </a:tc>
-                <a:tc>
-                  <a:txBody>
-                    <a:bodyPr/>
-                    <a:lstStyle/>
-                    <a:p>
-                      <a:pPr>
-                        <a:defRPr sz="1100"/>
-                      </a:pPr>
-                      <a:r>
-                        <a:t>0.11</a:t>
+                        <a:t>137.9</a:t>
+                      </a:r>
+                    </a:p>
+                  </a:txBody>
+                  <a:tcPr/>
+                </a:tc>
+                <a:tc>
+                  <a:txBody>
+                    <a:bodyPr/>
+                    <a:lstStyle/>
+                    <a:p>
+                      <a:pPr>
+                        <a:defRPr sz="1100"/>
+                      </a:pPr>
+                      <a:r>
+                        <a:t>6.89</a:t>
+                      </a:r>
+                    </a:p>
+                  </a:txBody>
+                  <a:tcPr/>
+                </a:tc>
+                <a:tc>
+                  <a:txBody>
+                    <a:bodyPr/>
+                    <a:lstStyle/>
+                    <a:p>
+                      <a:pPr>
+                        <a:defRPr sz="1100"/>
+                      </a:pPr>
+                      <a:r>
+                        <a:t>0.06</a:t>
                       </a:r>
                     </a:p>
                   </a:txBody>
@@ -4465,37 +4465,37 @@
                         <a:defRPr sz="1100"/>
                       </a:pPr>
                       <a:r>
-                        <a:t>7.39</a:t>
-                      </a:r>
-                    </a:p>
-                  </a:txBody>
-                  <a:tcPr/>
-                </a:tc>
-                <a:tc>
-                  <a:txBody>
-                    <a:bodyPr/>
-                    <a:lstStyle/>
-                    <a:p>
-                      <a:pPr>
-                        <a:defRPr sz="1100"/>
-                      </a:pPr>
-                      <a:r>
-                        <a:t>3.69</a:t>
-                      </a:r>
-                    </a:p>
-                  </a:txBody>
-                  <a:tcPr/>
-                </a:tc>
-                <a:tc>
-                  <a:txBody>
-                    <a:bodyPr/>
-                    <a:lstStyle/>
-                    <a:p>
-                      <a:pPr>
-                        <a:defRPr sz="1100"/>
-                      </a:pPr>
-                      <a:r>
-                        <a:t>0.03</a:t>
+                        <a:t>6.65</a:t>
+                      </a:r>
+                    </a:p>
+                  </a:txBody>
+                  <a:tcPr/>
+                </a:tc>
+                <a:tc>
+                  <a:txBody>
+                    <a:bodyPr/>
+                    <a:lstStyle/>
+                    <a:p>
+                      <a:pPr>
+                        <a:defRPr sz="1100"/>
+                      </a:pPr>
+                      <a:r>
+                        <a:t>3.33</a:t>
+                      </a:r>
+                    </a:p>
+                  </a:txBody>
+                  <a:tcPr/>
+                </a:tc>
+                <a:tc>
+                  <a:txBody>
+                    <a:bodyPr/>
+                    <a:lstStyle/>
+                    <a:p>
+                      <a:pPr>
+                        <a:defRPr sz="1100"/>
+                      </a:pPr>
+                      <a:r>
+                        <a:t>-0.34</a:t>
                       </a:r>
                     </a:p>
                   </a:txBody>
@@ -4557,37 +4557,37 @@
                         <a:defRPr sz="1100"/>
                       </a:pPr>
                       <a:r>
-                        <a:t>22.07</a:t>
-                      </a:r>
-                    </a:p>
-                  </a:txBody>
-                  <a:tcPr/>
-                </a:tc>
-                <a:tc>
-                  <a:txBody>
-                    <a:bodyPr/>
-                    <a:lstStyle/>
-                    <a:p>
-                      <a:pPr>
-                        <a:defRPr sz="1100"/>
-                      </a:pPr>
-                      <a:r>
-                        <a:t>1.1</a:t>
-                      </a:r>
-                    </a:p>
-                  </a:txBody>
-                  <a:tcPr/>
-                </a:tc>
-                <a:tc>
-                  <a:txBody>
-                    <a:bodyPr/>
-                    <a:lstStyle/>
-                    <a:p>
-                      <a:pPr>
-                        <a:defRPr sz="1100"/>
-                      </a:pPr>
-                      <a:r>
-                        <a:t>0.07</a:t>
+                        <a:t>20.0</a:t>
+                      </a:r>
+                    </a:p>
+                  </a:txBody>
+                  <a:tcPr/>
+                </a:tc>
+                <a:tc>
+                  <a:txBody>
+                    <a:bodyPr/>
+                    <a:lstStyle/>
+                    <a:p>
+                      <a:pPr>
+                        <a:defRPr sz="1100"/>
+                      </a:pPr>
+                      <a:r>
+                        <a:t>1.0</a:t>
+                      </a:r>
+                    </a:p>
+                  </a:txBody>
+                  <a:tcPr/>
+                </a:tc>
+                <a:tc>
+                  <a:txBody>
+                    <a:bodyPr/>
+                    <a:lstStyle/>
+                    <a:p>
+                      <a:pPr>
+                        <a:defRPr sz="1100"/>
+                      </a:pPr>
+                      <a:r>
+                        <a:t>-0.04</a:t>
                       </a:r>
                     </a:p>
                   </a:txBody>
@@ -4649,37 +4649,37 @@
                         <a:defRPr sz="1100"/>
                       </a:pPr>
                       <a:r>
-                        <a:t>170.72</a:t>
-                      </a:r>
-                    </a:p>
-                  </a:txBody>
-                  <a:tcPr/>
-                </a:tc>
-                <a:tc>
-                  <a:txBody>
-                    <a:bodyPr/>
-                    <a:lstStyle/>
-                    <a:p>
-                      <a:pPr>
-                        <a:defRPr sz="1100"/>
-                      </a:pPr>
-                      <a:r>
-                        <a:t>17.07</a:t>
-                      </a:r>
-                    </a:p>
-                  </a:txBody>
-                  <a:tcPr/>
-                </a:tc>
-                <a:tc>
-                  <a:txBody>
-                    <a:bodyPr/>
-                    <a:lstStyle/>
-                    <a:p>
-                      <a:pPr>
-                        <a:defRPr sz="1100"/>
-                      </a:pPr>
-                      <a:r>
-                        <a:t>-0.69</a:t>
+                        <a:t>162.31</a:t>
+                      </a:r>
+                    </a:p>
+                  </a:txBody>
+                  <a:tcPr/>
+                </a:tc>
+                <a:tc>
+                  <a:txBody>
+                    <a:bodyPr/>
+                    <a:lstStyle/>
+                    <a:p>
+                      <a:pPr>
+                        <a:defRPr sz="1100"/>
+                      </a:pPr>
+                      <a:r>
+                        <a:t>16.23</a:t>
+                      </a:r>
+                    </a:p>
+                  </a:txBody>
+                  <a:tcPr/>
+                </a:tc>
+                <a:tc>
+                  <a:txBody>
+                    <a:bodyPr/>
+                    <a:lstStyle/>
+                    <a:p>
+                      <a:pPr>
+                        <a:defRPr sz="1100"/>
+                      </a:pPr>
+                      <a:r>
+                        <a:t>-1.53</a:t>
                       </a:r>
                     </a:p>
                   </a:txBody>
@@ -4741,37 +4741,37 @@
                         <a:defRPr sz="1100"/>
                       </a:pPr>
                       <a:r>
-                        <a:t>157.8</a:t>
-                      </a:r>
-                    </a:p>
-                  </a:txBody>
-                  <a:tcPr/>
-                </a:tc>
-                <a:tc>
-                  <a:txBody>
-                    <a:bodyPr/>
-                    <a:lstStyle/>
-                    <a:p>
-                      <a:pPr>
-                        <a:defRPr sz="1100"/>
-                      </a:pPr>
-                      <a:r>
-                        <a:t>20.51</a:t>
-                      </a:r>
-                    </a:p>
-                  </a:txBody>
-                  <a:tcPr/>
-                </a:tc>
-                <a:tc>
-                  <a:txBody>
-                    <a:bodyPr/>
-                    <a:lstStyle/>
-                    <a:p>
-                      <a:pPr>
-                        <a:defRPr sz="1100"/>
-                      </a:pPr>
-                      <a:r>
-                        <a:t>-0.04</a:t>
+                        <a:t>157.85</a:t>
+                      </a:r>
+                    </a:p>
+                  </a:txBody>
+                  <a:tcPr/>
+                </a:tc>
+                <a:tc>
+                  <a:txBody>
+                    <a:bodyPr/>
+                    <a:lstStyle/>
+                    <a:p>
+                      <a:pPr>
+                        <a:defRPr sz="1100"/>
+                      </a:pPr>
+                      <a:r>
+                        <a:t>20.52</a:t>
+                      </a:r>
+                    </a:p>
+                  </a:txBody>
+                  <a:tcPr/>
+                </a:tc>
+                <a:tc>
+                  <a:txBody>
+                    <a:bodyPr/>
+                    <a:lstStyle/>
+                    <a:p>
+                      <a:pPr>
+                        <a:defRPr sz="1100"/>
+                      </a:pPr>
+                      <a:r>
+                        <a:t>-0.03</a:t>
                       </a:r>
                     </a:p>
                   </a:txBody>
@@ -4833,37 +4833,37 @@
                         <a:defRPr sz="1100"/>
                       </a:pPr>
                       <a:r>
-                        <a:t>43.11</a:t>
-                      </a:r>
-                    </a:p>
-                  </a:txBody>
-                  <a:tcPr/>
-                </a:tc>
-                <a:tc>
-                  <a:txBody>
-                    <a:bodyPr/>
-                    <a:lstStyle/>
-                    <a:p>
-                      <a:pPr>
-                        <a:defRPr sz="1100"/>
-                      </a:pPr>
-                      <a:r>
-                        <a:t>4.31</a:t>
-                      </a:r>
-                    </a:p>
-                  </a:txBody>
-                  <a:tcPr/>
-                </a:tc>
-                <a:tc>
-                  <a:txBody>
-                    <a:bodyPr/>
-                    <a:lstStyle/>
-                    <a:p>
-                      <a:pPr>
-                        <a:defRPr sz="1100"/>
-                      </a:pPr>
-                      <a:r>
-                        <a:t>0.05</a:t>
+                        <a:t>41.8</a:t>
+                      </a:r>
+                    </a:p>
+                  </a:txBody>
+                  <a:tcPr/>
+                </a:tc>
+                <a:tc>
+                  <a:txBody>
+                    <a:bodyPr/>
+                    <a:lstStyle/>
+                    <a:p>
+                      <a:pPr>
+                        <a:defRPr sz="1100"/>
+                      </a:pPr>
+                      <a:r>
+                        <a:t>4.18</a:t>
+                      </a:r>
+                    </a:p>
+                  </a:txBody>
+                  <a:tcPr/>
+                </a:tc>
+                <a:tc>
+                  <a:txBody>
+                    <a:bodyPr/>
+                    <a:lstStyle/>
+                    <a:p>
+                      <a:pPr>
+                        <a:defRPr sz="1100"/>
+                      </a:pPr>
+                      <a:r>
+                        <a:t>-0.09</a:t>
                       </a:r>
                     </a:p>
                   </a:txBody>
@@ -4925,37 +4925,37 @@
                         <a:defRPr sz="1100"/>
                       </a:pPr>
                       <a:r>
-                        <a:t>41.38</a:t>
-                      </a:r>
-                    </a:p>
-                  </a:txBody>
-                  <a:tcPr/>
-                </a:tc>
-                <a:tc>
-                  <a:txBody>
-                    <a:bodyPr/>
-                    <a:lstStyle/>
-                    <a:p>
-                      <a:pPr>
-                        <a:defRPr sz="1100"/>
-                      </a:pPr>
-                      <a:r>
-                        <a:t>16.55</a:t>
-                      </a:r>
-                    </a:p>
-                  </a:txBody>
-                  <a:tcPr/>
-                </a:tc>
-                <a:tc>
-                  <a:txBody>
-                    <a:bodyPr/>
-                    <a:lstStyle/>
-                    <a:p>
-                      <a:pPr>
-                        <a:defRPr sz="1100"/>
-                      </a:pPr>
-                      <a:r>
-                        <a:t>-0.87</a:t>
+                        <a:t>39.2</a:t>
+                      </a:r>
+                    </a:p>
+                  </a:txBody>
+                  <a:tcPr/>
+                </a:tc>
+                <a:tc>
+                  <a:txBody>
+                    <a:bodyPr/>
+                    <a:lstStyle/>
+                    <a:p>
+                      <a:pPr>
+                        <a:defRPr sz="1100"/>
+                      </a:pPr>
+                      <a:r>
+                        <a:t>15.68</a:t>
+                      </a:r>
+                    </a:p>
+                  </a:txBody>
+                  <a:tcPr/>
+                </a:tc>
+                <a:tc>
+                  <a:txBody>
+                    <a:bodyPr/>
+                    <a:lstStyle/>
+                    <a:p>
+                      <a:pPr>
+                        <a:defRPr sz="1100"/>
+                      </a:pPr>
+                      <a:r>
+                        <a:t>-1.74</a:t>
                       </a:r>
                     </a:p>
                   </a:txBody>
@@ -5017,37 +5017,37 @@
                         <a:defRPr sz="1100"/>
                       </a:pPr>
                       <a:r>
-                        <a:t>297.75</a:t>
-                      </a:r>
-                    </a:p>
-                  </a:txBody>
-                  <a:tcPr/>
-                </a:tc>
-                <a:tc>
-                  <a:txBody>
-                    <a:bodyPr/>
-                    <a:lstStyle/>
-                    <a:p>
-                      <a:pPr>
-                        <a:defRPr sz="1100"/>
-                      </a:pPr>
-                      <a:r>
-                        <a:t>32.75</a:t>
-                      </a:r>
-                    </a:p>
-                  </a:txBody>
-                  <a:tcPr/>
-                </a:tc>
-                <a:tc>
-                  <a:txBody>
-                    <a:bodyPr/>
-                    <a:lstStyle/>
-                    <a:p>
-                      <a:pPr>
-                        <a:defRPr sz="1100"/>
-                      </a:pPr>
-                      <a:r>
-                        <a:t>1.2</a:t>
+                        <a:t>298.38</a:t>
+                      </a:r>
+                    </a:p>
+                  </a:txBody>
+                  <a:tcPr/>
+                </a:tc>
+                <a:tc>
+                  <a:txBody>
+                    <a:bodyPr/>
+                    <a:lstStyle/>
+                    <a:p>
+                      <a:pPr>
+                        <a:defRPr sz="1100"/>
+                      </a:pPr>
+                      <a:r>
+                        <a:t>32.82</a:t>
+                      </a:r>
+                    </a:p>
+                  </a:txBody>
+                  <a:tcPr/>
+                </a:tc>
+                <a:tc>
+                  <a:txBody>
+                    <a:bodyPr/>
+                    <a:lstStyle/>
+                    <a:p>
+                      <a:pPr>
+                        <a:defRPr sz="1100"/>
+                      </a:pPr>
+                      <a:r>
+                        <a:t>1.27</a:t>
                       </a:r>
                     </a:p>
                   </a:txBody>
@@ -5133,7 +5133,7 @@
               <a:defRPr sz="1500"/>
             </a:pPr>
             <a:r>
-              <a:t>宁德时代（300750，新能源电池）：综合75.5分；基本面优秀，具备中长期配置价值；中期趋势向上，可关注/持有。</a:t>
+              <a:t>招商银行（600036，银行）：综合74.0分；基本面优秀，具备中长期配置价值；中期趋势向上，可关注/持有。</a:t>
             </a:r>
           </a:p>
           <a:p>
@@ -5157,7 +5157,7 @@
               <a:defRPr sz="1500"/>
             </a:pPr>
             <a:r>
-              <a:t>立讯精密（002475，消费电子）：综合67.0分；基本面优秀，具备中长期配置价值；趋势中性，观望。</a:t>
+              <a:t>中国平安（601318，保险）：综合71.0分；基本面优秀，具备中长期配置价值；中期趋势向上，可关注/持有。</a:t>
             </a:r>
           </a:p>
           <a:p>
@@ -5165,7 +5165,7 @@
               <a:defRPr sz="1500"/>
             </a:pPr>
             <a:r>
-              <a:t>中国平安（601318，保险）：综合66.5分；基本面优秀，具备中长期配置价值；趋势中性，观望。</a:t>
+              <a:t>宁德时代（300750，新能源电池）：综合70.5分；基本面优秀，具备中长期配置价值；趋势中性，观望。</a:t>
             </a:r>
           </a:p>
         </p:txBody>

--- a/outputs/12_中期路演.pptx
+++ b/outputs/12_中期路演.pptx
@@ -3167,7 +3167,7 @@
               <a:defRPr sz="1500"/>
             </a:pPr>
             <a:r>
-              <a:t>数据截止：2026-10-12</a:t>
+              <a:t>数据截止：2026-10-13</a:t>
             </a:r>
           </a:p>
         </p:txBody>
@@ -3255,7 +3255,7 @@
               <a:defRPr sz="1500"/>
             </a:pPr>
             <a:r>
-              <a:t>当前总资产：472.86万元</a:t>
+              <a:t>当前总资产：470.42万元</a:t>
             </a:r>
           </a:p>
           <a:p>
@@ -3263,7 +3263,7 @@
               <a:defRPr sz="1500"/>
             </a:pPr>
             <a:r>
-              <a:t>累计收益率：-5.43%</a:t>
+              <a:t>累计收益率：-5.92%</a:t>
             </a:r>
           </a:p>
           <a:p>
@@ -3271,7 +3271,7 @@
               <a:defRPr sz="1500"/>
             </a:pPr>
             <a:r>
-              <a:t>同期沪深300：-5.72%</a:t>
+              <a:t>同期沪深300：-5.99%</a:t>
             </a:r>
           </a:p>
           <a:p>
@@ -3279,7 +3279,7 @@
               <a:defRPr sz="1500"/>
             </a:pPr>
             <a:r>
-              <a:t>现金：95.84万元（20.3%）</a:t>
+              <a:t>现金：95.84万元（20.4%）</a:t>
             </a:r>
           </a:p>
           <a:p>
@@ -3821,37 +3821,37 @@
                         <a:defRPr sz="1100"/>
                       </a:pPr>
                       <a:r>
-                        <a:t>53.24</a:t>
-                      </a:r>
-                    </a:p>
-                  </a:txBody>
-                  <a:tcPr/>
-                </a:tc>
-                <a:tc>
-                  <a:txBody>
-                    <a:bodyPr/>
-                    <a:lstStyle/>
-                    <a:p>
-                      <a:pPr>
-                        <a:defRPr sz="1100"/>
-                      </a:pPr>
-                      <a:r>
-                        <a:t>96.9</a:t>
-                      </a:r>
-                    </a:p>
-                  </a:txBody>
-                  <a:tcPr/>
-                </a:tc>
-                <a:tc>
-                  <a:txBody>
-                    <a:bodyPr/>
-                    <a:lstStyle/>
-                    <a:p>
-                      <a:pPr>
-                        <a:defRPr sz="1100"/>
-                      </a:pPr>
-                      <a:r>
-                        <a:t>-5.24</a:t>
+                        <a:t>51.69</a:t>
+                      </a:r>
+                    </a:p>
+                  </a:txBody>
+                  <a:tcPr/>
+                </a:tc>
+                <a:tc>
+                  <a:txBody>
+                    <a:bodyPr/>
+                    <a:lstStyle/>
+                    <a:p>
+                      <a:pPr>
+                        <a:defRPr sz="1100"/>
+                      </a:pPr>
+                      <a:r>
+                        <a:t>94.08</a:t>
+                      </a:r>
+                    </a:p>
+                  </a:txBody>
+                  <a:tcPr/>
+                </a:tc>
+                <a:tc>
+                  <a:txBody>
+                    <a:bodyPr/>
+                    <a:lstStyle/>
+                    <a:p>
+                      <a:pPr>
+                        <a:defRPr sz="1100"/>
+                      </a:pPr>
+                      <a:r>
+                        <a:t>-8.06</a:t>
                       </a:r>
                     </a:p>
                   </a:txBody>
@@ -3913,37 +3913,37 @@
                         <a:defRPr sz="1100"/>
                       </a:pPr>
                       <a:r>
-                        <a:t>30.22</a:t>
-                      </a:r>
-                    </a:p>
-                  </a:txBody>
-                  <a:tcPr/>
-                </a:tc>
-                <a:tc>
-                  <a:txBody>
-                    <a:bodyPr/>
-                    <a:lstStyle/>
-                    <a:p>
-                      <a:pPr>
-                        <a:defRPr sz="1100"/>
-                      </a:pPr>
-                      <a:r>
-                        <a:t>116.65</a:t>
-                      </a:r>
-                    </a:p>
-                  </a:txBody>
-                  <a:tcPr/>
-                </a:tc>
-                <a:tc>
-                  <a:txBody>
-                    <a:bodyPr/>
-                    <a:lstStyle/>
-                    <a:p>
-                      <a:pPr>
-                        <a:defRPr sz="1100"/>
-                      </a:pPr>
-                      <a:r>
-                        <a:t>0.67</a:t>
+                        <a:t>30.4</a:t>
+                      </a:r>
+                    </a:p>
+                  </a:txBody>
+                  <a:tcPr/>
+                </a:tc>
+                <a:tc>
+                  <a:txBody>
+                    <a:bodyPr/>
+                    <a:lstStyle/>
+                    <a:p>
+                      <a:pPr>
+                        <a:defRPr sz="1100"/>
+                      </a:pPr>
+                      <a:r>
+                        <a:t>117.34</a:t>
+                      </a:r>
+                    </a:p>
+                  </a:txBody>
+                  <a:tcPr/>
+                </a:tc>
+                <a:tc>
+                  <a:txBody>
+                    <a:bodyPr/>
+                    <a:lstStyle/>
+                    <a:p>
+                      <a:pPr>
+                        <a:defRPr sz="1100"/>
+                      </a:pPr>
+                      <a:r>
+                        <a:t>1.37</a:t>
                       </a:r>
                     </a:p>
                   </a:txBody>
@@ -4005,37 +4005,37 @@
                         <a:defRPr sz="1100"/>
                       </a:pPr>
                       <a:r>
-                        <a:t>29.38</a:t>
-                      </a:r>
-                    </a:p>
-                  </a:txBody>
-                  <a:tcPr/>
-                </a:tc>
-                <a:tc>
-                  <a:txBody>
-                    <a:bodyPr/>
-                    <a:lstStyle/>
-                    <a:p>
-                      <a:pPr>
-                        <a:defRPr sz="1100"/>
-                      </a:pPr>
-                      <a:r>
-                        <a:t>27.32</a:t>
-                      </a:r>
-                    </a:p>
-                  </a:txBody>
-                  <a:tcPr/>
-                </a:tc>
-                <a:tc>
-                  <a:txBody>
-                    <a:bodyPr/>
-                    <a:lstStyle/>
-                    <a:p>
-                      <a:pPr>
-                        <a:defRPr sz="1100"/>
-                      </a:pPr>
-                      <a:r>
-                        <a:t>1.39</a:t>
+                        <a:t>29.15</a:t>
+                      </a:r>
+                    </a:p>
+                  </a:txBody>
+                  <a:tcPr/>
+                </a:tc>
+                <a:tc>
+                  <a:txBody>
+                    <a:bodyPr/>
+                    <a:lstStyle/>
+                    <a:p>
+                      <a:pPr>
+                        <a:defRPr sz="1100"/>
+                      </a:pPr>
+                      <a:r>
+                        <a:t>27.11</a:t>
+                      </a:r>
+                    </a:p>
+                  </a:txBody>
+                  <a:tcPr/>
+                </a:tc>
+                <a:tc>
+                  <a:txBody>
+                    <a:bodyPr/>
+                    <a:lstStyle/>
+                    <a:p>
+                      <a:pPr>
+                        <a:defRPr sz="1100"/>
+                      </a:pPr>
+                      <a:r>
+                        <a:t>1.18</a:t>
                       </a:r>
                     </a:p>
                   </a:txBody>
@@ -4097,37 +4097,37 @@
                         <a:defRPr sz="1100"/>
                       </a:pPr>
                       <a:r>
-                        <a:t>10.7</a:t>
-                      </a:r>
-                    </a:p>
-                  </a:txBody>
-                  <a:tcPr/>
-                </a:tc>
-                <a:tc>
-                  <a:txBody>
-                    <a:bodyPr/>
-                    <a:lstStyle/>
-                    <a:p>
-                      <a:pPr>
-                        <a:defRPr sz="1100"/>
-                      </a:pPr>
-                      <a:r>
-                        <a:t>10.16</a:t>
-                      </a:r>
-                    </a:p>
-                  </a:txBody>
-                  <a:tcPr/>
-                </a:tc>
-                <a:tc>
-                  <a:txBody>
-                    <a:bodyPr/>
-                    <a:lstStyle/>
-                    <a:p>
-                      <a:pPr>
-                        <a:defRPr sz="1100"/>
-                      </a:pPr>
-                      <a:r>
-                        <a:t>0.22</a:t>
+                        <a:t>11.1</a:t>
+                      </a:r>
+                    </a:p>
+                  </a:txBody>
+                  <a:tcPr/>
+                </a:tc>
+                <a:tc>
+                  <a:txBody>
+                    <a:bodyPr/>
+                    <a:lstStyle/>
+                    <a:p>
+                      <a:pPr>
+                        <a:defRPr sz="1100"/>
+                      </a:pPr>
+                      <a:r>
+                        <a:t>10.54</a:t>
+                      </a:r>
+                    </a:p>
+                  </a:txBody>
+                  <a:tcPr/>
+                </a:tc>
+                <a:tc>
+                  <a:txBody>
+                    <a:bodyPr/>
+                    <a:lstStyle/>
+                    <a:p>
+                      <a:pPr>
+                        <a:defRPr sz="1100"/>
+                      </a:pPr>
+                      <a:r>
+                        <a:t>0.6</a:t>
                       </a:r>
                     </a:p>
                   </a:txBody>
@@ -4189,37 +4189,37 @@
                         <a:defRPr sz="1100"/>
                       </a:pPr>
                       <a:r>
-                        <a:t>16.37</a:t>
-                      </a:r>
-                    </a:p>
-                  </a:txBody>
-                  <a:tcPr/>
-                </a:tc>
-                <a:tc>
-                  <a:txBody>
-                    <a:bodyPr/>
-                    <a:lstStyle/>
-                    <a:p>
-                      <a:pPr>
-                        <a:defRPr sz="1100"/>
-                      </a:pPr>
-                      <a:r>
-                        <a:t>8.19</a:t>
-                      </a:r>
-                    </a:p>
-                  </a:txBody>
-                  <a:tcPr/>
-                </a:tc>
-                <a:tc>
-                  <a:txBody>
-                    <a:bodyPr/>
-                    <a:lstStyle/>
-                    <a:p>
-                      <a:pPr>
-                        <a:defRPr sz="1100"/>
-                      </a:pPr>
-                      <a:r>
-                        <a:t>-0.57</a:t>
+                        <a:t>16.05</a:t>
+                      </a:r>
+                    </a:p>
+                  </a:txBody>
+                  <a:tcPr/>
+                </a:tc>
+                <a:tc>
+                  <a:txBody>
+                    <a:bodyPr/>
+                    <a:lstStyle/>
+                    <a:p>
+                      <a:pPr>
+                        <a:defRPr sz="1100"/>
+                      </a:pPr>
+                      <a:r>
+                        <a:t>8.03</a:t>
+                      </a:r>
+                    </a:p>
+                  </a:txBody>
+                  <a:tcPr/>
+                </a:tc>
+                <a:tc>
+                  <a:txBody>
+                    <a:bodyPr/>
+                    <a:lstStyle/>
+                    <a:p>
+                      <a:pPr>
+                        <a:defRPr sz="1100"/>
+                      </a:pPr>
+                      <a:r>
+                        <a:t>-0.73</a:t>
                       </a:r>
                     </a:p>
                   </a:txBody>
@@ -4281,37 +4281,37 @@
                         <a:defRPr sz="1100"/>
                       </a:pPr>
                       <a:r>
-                        <a:t>28.11</a:t>
-                      </a:r>
-                    </a:p>
-                  </a:txBody>
-                  <a:tcPr/>
-                </a:tc>
-                <a:tc>
-                  <a:txBody>
-                    <a:bodyPr/>
-                    <a:lstStyle/>
-                    <a:p>
-                      <a:pPr>
-                        <a:defRPr sz="1100"/>
-                      </a:pPr>
-                      <a:r>
-                        <a:t>17.15</a:t>
-                      </a:r>
-                    </a:p>
-                  </a:txBody>
-                  <a:tcPr/>
-                </a:tc>
-                <a:tc>
-                  <a:txBody>
-                    <a:bodyPr/>
-                    <a:lstStyle/>
-                    <a:p>
-                      <a:pPr>
-                        <a:defRPr sz="1100"/>
-                      </a:pPr>
-                      <a:r>
-                        <a:t>-4.73</a:t>
+                        <a:t>28.41</a:t>
+                      </a:r>
+                    </a:p>
+                  </a:txBody>
+                  <a:tcPr/>
+                </a:tc>
+                <a:tc>
+                  <a:txBody>
+                    <a:bodyPr/>
+                    <a:lstStyle/>
+                    <a:p>
+                      <a:pPr>
+                        <a:defRPr sz="1100"/>
+                      </a:pPr>
+                      <a:r>
+                        <a:t>17.33</a:t>
+                      </a:r>
+                    </a:p>
+                  </a:txBody>
+                  <a:tcPr/>
+                </a:tc>
+                <a:tc>
+                  <a:txBody>
+                    <a:bodyPr/>
+                    <a:lstStyle/>
+                    <a:p>
+                      <a:pPr>
+                        <a:defRPr sz="1100"/>
+                      </a:pPr>
+                      <a:r>
+                        <a:t>-4.55</a:t>
                       </a:r>
                     </a:p>
                   </a:txBody>
@@ -4373,37 +4373,37 @@
                         <a:defRPr sz="1100"/>
                       </a:pPr>
                       <a:r>
-                        <a:t>137.9</a:t>
-                      </a:r>
-                    </a:p>
-                  </a:txBody>
-                  <a:tcPr/>
-                </a:tc>
-                <a:tc>
-                  <a:txBody>
-                    <a:bodyPr/>
-                    <a:lstStyle/>
-                    <a:p>
-                      <a:pPr>
-                        <a:defRPr sz="1100"/>
-                      </a:pPr>
-                      <a:r>
-                        <a:t>6.89</a:t>
-                      </a:r>
-                    </a:p>
-                  </a:txBody>
-                  <a:tcPr/>
-                </a:tc>
-                <a:tc>
-                  <a:txBody>
-                    <a:bodyPr/>
-                    <a:lstStyle/>
-                    <a:p>
-                      <a:pPr>
-                        <a:defRPr sz="1100"/>
-                      </a:pPr>
-                      <a:r>
-                        <a:t>0.06</a:t>
+                        <a:t>134.98</a:t>
+                      </a:r>
+                    </a:p>
+                  </a:txBody>
+                  <a:tcPr/>
+                </a:tc>
+                <a:tc>
+                  <a:txBody>
+                    <a:bodyPr/>
+                    <a:lstStyle/>
+                    <a:p>
+                      <a:pPr>
+                        <a:defRPr sz="1100"/>
+                      </a:pPr>
+                      <a:r>
+                        <a:t>6.75</a:t>
+                      </a:r>
+                    </a:p>
+                  </a:txBody>
+                  <a:tcPr/>
+                </a:tc>
+                <a:tc>
+                  <a:txBody>
+                    <a:bodyPr/>
+                    <a:lstStyle/>
+                    <a:p>
+                      <a:pPr>
+                        <a:defRPr sz="1100"/>
+                      </a:pPr>
+                      <a:r>
+                        <a:t>-0.09</a:t>
                       </a:r>
                     </a:p>
                   </a:txBody>
@@ -4465,37 +4465,37 @@
                         <a:defRPr sz="1100"/>
                       </a:pPr>
                       <a:r>
-                        <a:t>6.65</a:t>
-                      </a:r>
-                    </a:p>
-                  </a:txBody>
-                  <a:tcPr/>
-                </a:tc>
-                <a:tc>
-                  <a:txBody>
-                    <a:bodyPr/>
-                    <a:lstStyle/>
-                    <a:p>
-                      <a:pPr>
-                        <a:defRPr sz="1100"/>
-                      </a:pPr>
-                      <a:r>
-                        <a:t>3.33</a:t>
-                      </a:r>
-                    </a:p>
-                  </a:txBody>
-                  <a:tcPr/>
-                </a:tc>
-                <a:tc>
-                  <a:txBody>
-                    <a:bodyPr/>
-                    <a:lstStyle/>
-                    <a:p>
-                      <a:pPr>
-                        <a:defRPr sz="1100"/>
-                      </a:pPr>
-                      <a:r>
-                        <a:t>-0.34</a:t>
+                        <a:t>6.56</a:t>
+                      </a:r>
+                    </a:p>
+                  </a:txBody>
+                  <a:tcPr/>
+                </a:tc>
+                <a:tc>
+                  <a:txBody>
+                    <a:bodyPr/>
+                    <a:lstStyle/>
+                    <a:p>
+                      <a:pPr>
+                        <a:defRPr sz="1100"/>
+                      </a:pPr>
+                      <a:r>
+                        <a:t>3.28</a:t>
+                      </a:r>
+                    </a:p>
+                  </a:txBody>
+                  <a:tcPr/>
+                </a:tc>
+                <a:tc>
+                  <a:txBody>
+                    <a:bodyPr/>
+                    <a:lstStyle/>
+                    <a:p>
+                      <a:pPr>
+                        <a:defRPr sz="1100"/>
+                      </a:pPr>
+                      <a:r>
+                        <a:t>-0.39</a:t>
                       </a:r>
                     </a:p>
                   </a:txBody>
@@ -4557,37 +4557,37 @@
                         <a:defRPr sz="1100"/>
                       </a:pPr>
                       <a:r>
-                        <a:t>20.0</a:t>
-                      </a:r>
-                    </a:p>
-                  </a:txBody>
-                  <a:tcPr/>
-                </a:tc>
-                <a:tc>
-                  <a:txBody>
-                    <a:bodyPr/>
-                    <a:lstStyle/>
-                    <a:p>
-                      <a:pPr>
-                        <a:defRPr sz="1100"/>
-                      </a:pPr>
-                      <a:r>
-                        <a:t>1.0</a:t>
-                      </a:r>
-                    </a:p>
-                  </a:txBody>
-                  <a:tcPr/>
-                </a:tc>
-                <a:tc>
-                  <a:txBody>
-                    <a:bodyPr/>
-                    <a:lstStyle/>
-                    <a:p>
-                      <a:pPr>
-                        <a:defRPr sz="1100"/>
-                      </a:pPr>
-                      <a:r>
-                        <a:t>-0.04</a:t>
+                        <a:t>21.31</a:t>
+                      </a:r>
+                    </a:p>
+                  </a:txBody>
+                  <a:tcPr/>
+                </a:tc>
+                <a:tc>
+                  <a:txBody>
+                    <a:bodyPr/>
+                    <a:lstStyle/>
+                    <a:p>
+                      <a:pPr>
+                        <a:defRPr sz="1100"/>
+                      </a:pPr>
+                      <a:r>
+                        <a:t>1.07</a:t>
+                      </a:r>
+                    </a:p>
+                  </a:txBody>
+                  <a:tcPr/>
+                </a:tc>
+                <a:tc>
+                  <a:txBody>
+                    <a:bodyPr/>
+                    <a:lstStyle/>
+                    <a:p>
+                      <a:pPr>
+                        <a:defRPr sz="1100"/>
+                      </a:pPr>
+                      <a:r>
+                        <a:t>0.03</a:t>
                       </a:r>
                     </a:p>
                   </a:txBody>
@@ -4649,37 +4649,37 @@
                         <a:defRPr sz="1100"/>
                       </a:pPr>
                       <a:r>
-                        <a:t>162.31</a:t>
-                      </a:r>
-                    </a:p>
-                  </a:txBody>
-                  <a:tcPr/>
-                </a:tc>
-                <a:tc>
-                  <a:txBody>
-                    <a:bodyPr/>
-                    <a:lstStyle/>
-                    <a:p>
-                      <a:pPr>
-                        <a:defRPr sz="1100"/>
-                      </a:pPr>
-                      <a:r>
-                        <a:t>16.23</a:t>
-                      </a:r>
-                    </a:p>
-                  </a:txBody>
-                  <a:tcPr/>
-                </a:tc>
-                <a:tc>
-                  <a:txBody>
-                    <a:bodyPr/>
-                    <a:lstStyle/>
-                    <a:p>
-                      <a:pPr>
-                        <a:defRPr sz="1100"/>
-                      </a:pPr>
-                      <a:r>
-                        <a:t>-1.53</a:t>
+                        <a:t>167.29</a:t>
+                      </a:r>
+                    </a:p>
+                  </a:txBody>
+                  <a:tcPr/>
+                </a:tc>
+                <a:tc>
+                  <a:txBody>
+                    <a:bodyPr/>
+                    <a:lstStyle/>
+                    <a:p>
+                      <a:pPr>
+                        <a:defRPr sz="1100"/>
+                      </a:pPr>
+                      <a:r>
+                        <a:t>16.73</a:t>
+                      </a:r>
+                    </a:p>
+                  </a:txBody>
+                  <a:tcPr/>
+                </a:tc>
+                <a:tc>
+                  <a:txBody>
+                    <a:bodyPr/>
+                    <a:lstStyle/>
+                    <a:p>
+                      <a:pPr>
+                        <a:defRPr sz="1100"/>
+                      </a:pPr>
+                      <a:r>
+                        <a:t>-1.03</a:t>
                       </a:r>
                     </a:p>
                   </a:txBody>
@@ -4741,37 +4741,37 @@
                         <a:defRPr sz="1100"/>
                       </a:pPr>
                       <a:r>
-                        <a:t>157.85</a:t>
-                      </a:r>
-                    </a:p>
-                  </a:txBody>
-                  <a:tcPr/>
-                </a:tc>
-                <a:tc>
-                  <a:txBody>
-                    <a:bodyPr/>
-                    <a:lstStyle/>
-                    <a:p>
-                      <a:pPr>
-                        <a:defRPr sz="1100"/>
-                      </a:pPr>
-                      <a:r>
-                        <a:t>20.52</a:t>
-                      </a:r>
-                    </a:p>
-                  </a:txBody>
-                  <a:tcPr/>
-                </a:tc>
-                <a:tc>
-                  <a:txBody>
-                    <a:bodyPr/>
-                    <a:lstStyle/>
-                    <a:p>
-                      <a:pPr>
-                        <a:defRPr sz="1100"/>
-                      </a:pPr>
-                      <a:r>
-                        <a:t>-0.03</a:t>
+                        <a:t>157.35</a:t>
+                      </a:r>
+                    </a:p>
+                  </a:txBody>
+                  <a:tcPr/>
+                </a:tc>
+                <a:tc>
+                  <a:txBody>
+                    <a:bodyPr/>
+                    <a:lstStyle/>
+                    <a:p>
+                      <a:pPr>
+                        <a:defRPr sz="1100"/>
+                      </a:pPr>
+                      <a:r>
+                        <a:t>20.46</a:t>
+                      </a:r>
+                    </a:p>
+                  </a:txBody>
+                  <a:tcPr/>
+                </a:tc>
+                <a:tc>
+                  <a:txBody>
+                    <a:bodyPr/>
+                    <a:lstStyle/>
+                    <a:p>
+                      <a:pPr>
+                        <a:defRPr sz="1100"/>
+                      </a:pPr>
+                      <a:r>
+                        <a:t>-0.09</a:t>
                       </a:r>
                     </a:p>
                   </a:txBody>
@@ -4833,37 +4833,37 @@
                         <a:defRPr sz="1100"/>
                       </a:pPr>
                       <a:r>
-                        <a:t>41.8</a:t>
-                      </a:r>
-                    </a:p>
-                  </a:txBody>
-                  <a:tcPr/>
-                </a:tc>
-                <a:tc>
-                  <a:txBody>
-                    <a:bodyPr/>
-                    <a:lstStyle/>
-                    <a:p>
-                      <a:pPr>
-                        <a:defRPr sz="1100"/>
-                      </a:pPr>
-                      <a:r>
-                        <a:t>4.18</a:t>
-                      </a:r>
-                    </a:p>
-                  </a:txBody>
-                  <a:tcPr/>
-                </a:tc>
-                <a:tc>
-                  <a:txBody>
-                    <a:bodyPr/>
-                    <a:lstStyle/>
-                    <a:p>
-                      <a:pPr>
-                        <a:defRPr sz="1100"/>
-                      </a:pPr>
-                      <a:r>
-                        <a:t>-0.09</a:t>
+                        <a:t>40.6</a:t>
+                      </a:r>
+                    </a:p>
+                  </a:txBody>
+                  <a:tcPr/>
+                </a:tc>
+                <a:tc>
+                  <a:txBody>
+                    <a:bodyPr/>
+                    <a:lstStyle/>
+                    <a:p>
+                      <a:pPr>
+                        <a:defRPr sz="1100"/>
+                      </a:pPr>
+                      <a:r>
+                        <a:t>4.06</a:t>
+                      </a:r>
+                    </a:p>
+                  </a:txBody>
+                  <a:tcPr/>
+                </a:tc>
+                <a:tc>
+                  <a:txBody>
+                    <a:bodyPr/>
+                    <a:lstStyle/>
+                    <a:p>
+                      <a:pPr>
+                        <a:defRPr sz="1100"/>
+                      </a:pPr>
+                      <a:r>
+                        <a:t>-0.2</a:t>
                       </a:r>
                     </a:p>
                   </a:txBody>
@@ -4925,37 +4925,37 @@
                         <a:defRPr sz="1100"/>
                       </a:pPr>
                       <a:r>
-                        <a:t>39.2</a:t>
-                      </a:r>
-                    </a:p>
-                  </a:txBody>
-                  <a:tcPr/>
-                </a:tc>
-                <a:tc>
-                  <a:txBody>
-                    <a:bodyPr/>
-                    <a:lstStyle/>
-                    <a:p>
-                      <a:pPr>
-                        <a:defRPr sz="1100"/>
-                      </a:pPr>
-                      <a:r>
-                        <a:t>15.68</a:t>
-                      </a:r>
-                    </a:p>
-                  </a:txBody>
-                  <a:tcPr/>
-                </a:tc>
-                <a:tc>
-                  <a:txBody>
-                    <a:bodyPr/>
-                    <a:lstStyle/>
-                    <a:p>
-                      <a:pPr>
-                        <a:defRPr sz="1100"/>
-                      </a:pPr>
-                      <a:r>
-                        <a:t>-1.74</a:t>
+                        <a:t>40.01</a:t>
+                      </a:r>
+                    </a:p>
+                  </a:txBody>
+                  <a:tcPr/>
+                </a:tc>
+                <a:tc>
+                  <a:txBody>
+                    <a:bodyPr/>
+                    <a:lstStyle/>
+                    <a:p>
+                      <a:pPr>
+                        <a:defRPr sz="1100"/>
+                      </a:pPr>
+                      <a:r>
+                        <a:t>16.0</a:t>
+                      </a:r>
+                    </a:p>
+                  </a:txBody>
+                  <a:tcPr/>
+                </a:tc>
+                <a:tc>
+                  <a:txBody>
+                    <a:bodyPr/>
+                    <a:lstStyle/>
+                    <a:p>
+                      <a:pPr>
+                        <a:defRPr sz="1100"/>
+                      </a:pPr>
+                      <a:r>
+                        <a:t>-1.42</a:t>
                       </a:r>
                     </a:p>
                   </a:txBody>
@@ -5017,37 +5017,37 @@
                         <a:defRPr sz="1100"/>
                       </a:pPr>
                       <a:r>
-                        <a:t>298.38</a:t>
-                      </a:r>
-                    </a:p>
-                  </a:txBody>
-                  <a:tcPr/>
-                </a:tc>
-                <a:tc>
-                  <a:txBody>
-                    <a:bodyPr/>
-                    <a:lstStyle/>
-                    <a:p>
-                      <a:pPr>
-                        <a:defRPr sz="1100"/>
-                      </a:pPr>
-                      <a:r>
-                        <a:t>32.82</a:t>
-                      </a:r>
-                    </a:p>
-                  </a:txBody>
-                  <a:tcPr/>
-                </a:tc>
-                <a:tc>
-                  <a:txBody>
-                    <a:bodyPr/>
-                    <a:lstStyle/>
-                    <a:p>
-                      <a:pPr>
-                        <a:defRPr sz="1100"/>
-                      </a:pPr>
-                      <a:r>
-                        <a:t>1.27</a:t>
+                        <a:t>289.1</a:t>
+                      </a:r>
+                    </a:p>
+                  </a:txBody>
+                  <a:tcPr/>
+                </a:tc>
+                <a:tc>
+                  <a:txBody>
+                    <a:bodyPr/>
+                    <a:lstStyle/>
+                    <a:p>
+                      <a:pPr>
+                        <a:defRPr sz="1100"/>
+                      </a:pPr>
+                      <a:r>
+                        <a:t>31.8</a:t>
+                      </a:r>
+                    </a:p>
+                  </a:txBody>
+                  <a:tcPr/>
+                </a:tc>
+                <a:tc>
+                  <a:txBody>
+                    <a:bodyPr/>
+                    <a:lstStyle/>
+                    <a:p>
+                      <a:pPr>
+                        <a:defRPr sz="1100"/>
+                      </a:pPr>
+                      <a:r>
+                        <a:t>0.25</a:t>
                       </a:r>
                     </a:p>
                   </a:txBody>
@@ -5133,7 +5133,7 @@
               <a:defRPr sz="1500"/>
             </a:pPr>
             <a:r>
-              <a:t>招商银行（600036，银行）：综合74.0分；基本面优秀，具备中长期配置价值；中期趋势向上，可关注/持有。</a:t>
+              <a:t>紫金矿业（601899，有色金属）：综合73.0分；基本面优秀，具备中长期配置价值；趋势中性，观望。</a:t>
             </a:r>
           </a:p>
           <a:p>
@@ -5141,7 +5141,7 @@
               <a:defRPr sz="1500"/>
             </a:pPr>
             <a:r>
-              <a:t>紫金矿业（601899，有色金属）：综合73.0分；基本面优秀，具备中长期配置价值；趋势中性，观望。</a:t>
+              <a:t>长江电力（600900，电力）：综合72.0分；基本面优秀，具备中长期配置价值；中期趋势向上，可关注/持有。</a:t>
             </a:r>
           </a:p>
           <a:p>
@@ -5149,7 +5149,7 @@
               <a:defRPr sz="1500"/>
             </a:pPr>
             <a:r>
-              <a:t>长江电力（600900，电力）：综合72.0分；基本面优秀，具备中长期配置价值；中期趋势向上，可关注/持有。</a:t>
+              <a:t>宁德时代（300750，新能源电池）：综合70.5分；基本面优秀，具备中长期配置价值；趋势中性，观望。</a:t>
             </a:r>
           </a:p>
           <a:p>
@@ -5157,7 +5157,7 @@
               <a:defRPr sz="1500"/>
             </a:pPr>
             <a:r>
-              <a:t>中国平安（601318，保险）：综合71.0分；基本面优秀，具备中长期配置价值；中期趋势向上，可关注/持有。</a:t>
+              <a:t>招商银行（600036，银行）：综合69.0分；基本面优秀，具备中长期配置价值；中期趋势向上，可关注/持有。</a:t>
             </a:r>
           </a:p>
           <a:p>
@@ -5165,7 +5165,7 @@
               <a:defRPr sz="1500"/>
             </a:pPr>
             <a:r>
-              <a:t>宁德时代（300750，新能源电池）：综合70.5分；基本面优秀，具备中长期配置价值；趋势中性，观望。</a:t>
+              <a:t>立讯精密（002475，消费电子）：综合67.0分；基本面优秀，具备中长期配置价值；趋势中性，观望。</a:t>
             </a:r>
           </a:p>
         </p:txBody>

--- a/outputs/12_中期路演.pptx
+++ b/outputs/12_中期路演.pptx
@@ -3167,7 +3167,7 @@
               <a:defRPr sz="1500"/>
             </a:pPr>
             <a:r>
-              <a:t>数据截止：2026-10-13</a:t>
+              <a:t>数据截止：2026-10-14</a:t>
             </a:r>
           </a:p>
         </p:txBody>
@@ -3255,7 +3255,7 @@
               <a:defRPr sz="1500"/>
             </a:pPr>
             <a:r>
-              <a:t>当前总资产：470.42万元</a:t>
+              <a:t>当前总资产：465.89万元</a:t>
             </a:r>
           </a:p>
           <a:p>
@@ -3263,7 +3263,7 @@
               <a:defRPr sz="1500"/>
             </a:pPr>
             <a:r>
-              <a:t>累计收益率：-5.92%</a:t>
+              <a:t>累计收益率：-6.82%</a:t>
             </a:r>
           </a:p>
           <a:p>
@@ -3271,7 +3271,7 @@
               <a:defRPr sz="1500"/>
             </a:pPr>
             <a:r>
-              <a:t>同期沪深300：-5.99%</a:t>
+              <a:t>同期沪深300：-7.26%</a:t>
             </a:r>
           </a:p>
           <a:p>
@@ -3279,7 +3279,7 @@
               <a:defRPr sz="1500"/>
             </a:pPr>
             <a:r>
-              <a:t>现金：95.84万元（20.4%）</a:t>
+              <a:t>现金：189.08万元（40.6%）</a:t>
             </a:r>
           </a:p>
           <a:p>
@@ -3287,7 +3287,7 @@
               <a:defRPr sz="1500"/>
             </a:pPr>
             <a:r>
-              <a:t>持仓：14只，累计交易37笔</a:t>
+              <a:t>持仓：13只，累计交易38笔</a:t>
             </a:r>
           </a:p>
         </p:txBody>
@@ -3582,7 +3582,7 @@
                 <a:gridCol w="1849069"/>
                 <a:gridCol w="1849070"/>
               </a:tblGrid>
-              <a:tr h="240030">
+              <a:tr h="256032">
                 <a:tc>
                   <a:txBody>
                     <a:bodyPr/>
@@ -3674,7 +3674,7 @@
                   <a:tcPr/>
                 </a:tc>
               </a:tr>
-              <a:tr h="240030">
+              <a:tr h="256032">
                 <a:tc>
                   <a:txBody>
                     <a:bodyPr/>
@@ -3766,385 +3766,569 @@
                   <a:tcPr/>
                 </a:tc>
               </a:tr>
-              <a:tr h="240030">
-                <a:tc>
-                  <a:txBody>
-                    <a:bodyPr/>
-                    <a:lstStyle/>
-                    <a:p>
-                      <a:pPr>
-                        <a:defRPr sz="1100"/>
-                      </a:pPr>
-                      <a:r>
-                        <a:t>中国平安</a:t>
-                      </a:r>
-                    </a:p>
-                  </a:txBody>
-                  <a:tcPr/>
-                </a:tc>
-                <a:tc>
-                  <a:txBody>
-                    <a:bodyPr/>
-                    <a:lstStyle/>
-                    <a:p>
-                      <a:pPr>
-                        <a:defRPr sz="1100"/>
-                      </a:pPr>
-                      <a:r>
-                        <a:t>18200</a:t>
-                      </a:r>
-                    </a:p>
-                  </a:txBody>
-                  <a:tcPr/>
-                </a:tc>
-                <a:tc>
-                  <a:txBody>
-                    <a:bodyPr/>
-                    <a:lstStyle/>
-                    <a:p>
-                      <a:pPr>
-                        <a:defRPr sz="1100"/>
-                      </a:pPr>
-                      <a:r>
-                        <a:t>56.12</a:t>
-                      </a:r>
-                    </a:p>
-                  </a:txBody>
-                  <a:tcPr/>
-                </a:tc>
-                <a:tc>
-                  <a:txBody>
-                    <a:bodyPr/>
-                    <a:lstStyle/>
-                    <a:p>
-                      <a:pPr>
-                        <a:defRPr sz="1100"/>
-                      </a:pPr>
-                      <a:r>
-                        <a:t>51.69</a:t>
-                      </a:r>
-                    </a:p>
-                  </a:txBody>
-                  <a:tcPr/>
-                </a:tc>
-                <a:tc>
-                  <a:txBody>
-                    <a:bodyPr/>
-                    <a:lstStyle/>
-                    <a:p>
-                      <a:pPr>
-                        <a:defRPr sz="1100"/>
-                      </a:pPr>
-                      <a:r>
-                        <a:t>94.08</a:t>
-                      </a:r>
-                    </a:p>
-                  </a:txBody>
-                  <a:tcPr/>
-                </a:tc>
-                <a:tc>
-                  <a:txBody>
-                    <a:bodyPr/>
-                    <a:lstStyle/>
-                    <a:p>
-                      <a:pPr>
-                        <a:defRPr sz="1100"/>
-                      </a:pPr>
-                      <a:r>
-                        <a:t>-8.06</a:t>
+              <a:tr h="256032">
+                <a:tc>
+                  <a:txBody>
+                    <a:bodyPr/>
+                    <a:lstStyle/>
+                    <a:p>
+                      <a:pPr>
+                        <a:defRPr sz="1100"/>
+                      </a:pPr>
+                      <a:r>
+                        <a:t>紫金矿业</a:t>
+                      </a:r>
+                    </a:p>
+                  </a:txBody>
+                  <a:tcPr/>
+                </a:tc>
+                <a:tc>
+                  <a:txBody>
+                    <a:bodyPr/>
+                    <a:lstStyle/>
+                    <a:p>
+                      <a:pPr>
+                        <a:defRPr sz="1100"/>
+                      </a:pPr>
+                      <a:r>
+                        <a:t>38600</a:t>
+                      </a:r>
+                    </a:p>
+                  </a:txBody>
+                  <a:tcPr/>
+                </a:tc>
+                <a:tc>
+                  <a:txBody>
+                    <a:bodyPr/>
+                    <a:lstStyle/>
+                    <a:p>
+                      <a:pPr>
+                        <a:defRPr sz="1100"/>
+                      </a:pPr>
+                      <a:r>
+                        <a:t>30.05</a:t>
+                      </a:r>
+                    </a:p>
+                  </a:txBody>
+                  <a:tcPr/>
+                </a:tc>
+                <a:tc>
+                  <a:txBody>
+                    <a:bodyPr/>
+                    <a:lstStyle/>
+                    <a:p>
+                      <a:pPr>
+                        <a:defRPr sz="1100"/>
+                      </a:pPr>
+                      <a:r>
+                        <a:t>29.98</a:t>
+                      </a:r>
+                    </a:p>
+                  </a:txBody>
+                  <a:tcPr/>
+                </a:tc>
+                <a:tc>
+                  <a:txBody>
+                    <a:bodyPr/>
+                    <a:lstStyle/>
+                    <a:p>
+                      <a:pPr>
+                        <a:defRPr sz="1100"/>
+                      </a:pPr>
+                      <a:r>
+                        <a:t>115.72</a:t>
+                      </a:r>
+                    </a:p>
+                  </a:txBody>
+                  <a:tcPr/>
+                </a:tc>
+                <a:tc>
+                  <a:txBody>
+                    <a:bodyPr/>
+                    <a:lstStyle/>
+                    <a:p>
+                      <a:pPr>
+                        <a:defRPr sz="1100"/>
+                      </a:pPr>
+                      <a:r>
+                        <a:t>-0.26</a:t>
                       </a:r>
                     </a:p>
                   </a:txBody>
                   <a:tcPr/>
                 </a:tc>
               </a:tr>
-              <a:tr h="240030">
-                <a:tc>
-                  <a:txBody>
-                    <a:bodyPr/>
-                    <a:lstStyle/>
-                    <a:p>
-                      <a:pPr>
-                        <a:defRPr sz="1100"/>
-                      </a:pPr>
-                      <a:r>
-                        <a:t>紫金矿业</a:t>
-                      </a:r>
-                    </a:p>
-                  </a:txBody>
-                  <a:tcPr/>
-                </a:tc>
-                <a:tc>
-                  <a:txBody>
-                    <a:bodyPr/>
-                    <a:lstStyle/>
-                    <a:p>
-                      <a:pPr>
-                        <a:defRPr sz="1100"/>
-                      </a:pPr>
-                      <a:r>
-                        <a:t>38600</a:t>
-                      </a:r>
-                    </a:p>
-                  </a:txBody>
-                  <a:tcPr/>
-                </a:tc>
-                <a:tc>
-                  <a:txBody>
-                    <a:bodyPr/>
-                    <a:lstStyle/>
-                    <a:p>
-                      <a:pPr>
-                        <a:defRPr sz="1100"/>
-                      </a:pPr>
-                      <a:r>
-                        <a:t>30.05</a:t>
-                      </a:r>
-                    </a:p>
-                  </a:txBody>
-                  <a:tcPr/>
-                </a:tc>
-                <a:tc>
-                  <a:txBody>
-                    <a:bodyPr/>
-                    <a:lstStyle/>
-                    <a:p>
-                      <a:pPr>
-                        <a:defRPr sz="1100"/>
-                      </a:pPr>
-                      <a:r>
-                        <a:t>30.4</a:t>
-                      </a:r>
-                    </a:p>
-                  </a:txBody>
-                  <a:tcPr/>
-                </a:tc>
-                <a:tc>
-                  <a:txBody>
-                    <a:bodyPr/>
-                    <a:lstStyle/>
-                    <a:p>
-                      <a:pPr>
-                        <a:defRPr sz="1100"/>
-                      </a:pPr>
-                      <a:r>
-                        <a:t>117.34</a:t>
-                      </a:r>
-                    </a:p>
-                  </a:txBody>
-                  <a:tcPr/>
-                </a:tc>
-                <a:tc>
-                  <a:txBody>
-                    <a:bodyPr/>
-                    <a:lstStyle/>
-                    <a:p>
-                      <a:pPr>
-                        <a:defRPr sz="1100"/>
-                      </a:pPr>
-                      <a:r>
-                        <a:t>1.37</a:t>
+              <a:tr h="256032">
+                <a:tc>
+                  <a:txBody>
+                    <a:bodyPr/>
+                    <a:lstStyle/>
+                    <a:p>
+                      <a:pPr>
+                        <a:defRPr sz="1100"/>
+                      </a:pPr>
+                      <a:r>
+                        <a:t>长江电力</a:t>
+                      </a:r>
+                    </a:p>
+                  </a:txBody>
+                  <a:tcPr/>
+                </a:tc>
+                <a:tc>
+                  <a:txBody>
+                    <a:bodyPr/>
+                    <a:lstStyle/>
+                    <a:p>
+                      <a:pPr>
+                        <a:defRPr sz="1100"/>
+                      </a:pPr>
+                      <a:r>
+                        <a:t>9300</a:t>
+                      </a:r>
+                    </a:p>
+                  </a:txBody>
+                  <a:tcPr/>
+                </a:tc>
+                <a:tc>
+                  <a:txBody>
+                    <a:bodyPr/>
+                    <a:lstStyle/>
+                    <a:p>
+                      <a:pPr>
+                        <a:defRPr sz="1100"/>
+                      </a:pPr>
+                      <a:r>
+                        <a:t>27.89</a:t>
+                      </a:r>
+                    </a:p>
+                  </a:txBody>
+                  <a:tcPr/>
+                </a:tc>
+                <a:tc>
+                  <a:txBody>
+                    <a:bodyPr/>
+                    <a:lstStyle/>
+                    <a:p>
+                      <a:pPr>
+                        <a:defRPr sz="1100"/>
+                      </a:pPr>
+                      <a:r>
+                        <a:t>29.45</a:t>
+                      </a:r>
+                    </a:p>
+                  </a:txBody>
+                  <a:tcPr/>
+                </a:tc>
+                <a:tc>
+                  <a:txBody>
+                    <a:bodyPr/>
+                    <a:lstStyle/>
+                    <a:p>
+                      <a:pPr>
+                        <a:defRPr sz="1100"/>
+                      </a:pPr>
+                      <a:r>
+                        <a:t>27.39</a:t>
+                      </a:r>
+                    </a:p>
+                  </a:txBody>
+                  <a:tcPr/>
+                </a:tc>
+                <a:tc>
+                  <a:txBody>
+                    <a:bodyPr/>
+                    <a:lstStyle/>
+                    <a:p>
+                      <a:pPr>
+                        <a:defRPr sz="1100"/>
+                      </a:pPr>
+                      <a:r>
+                        <a:t>1.46</a:t>
                       </a:r>
                     </a:p>
                   </a:txBody>
                   <a:tcPr/>
                 </a:tc>
               </a:tr>
-              <a:tr h="240030">
-                <a:tc>
-                  <a:txBody>
-                    <a:bodyPr/>
-                    <a:lstStyle/>
-                    <a:p>
-                      <a:pPr>
-                        <a:defRPr sz="1100"/>
-                      </a:pPr>
-                      <a:r>
-                        <a:t>长江电力</a:t>
-                      </a:r>
-                    </a:p>
-                  </a:txBody>
-                  <a:tcPr/>
-                </a:tc>
-                <a:tc>
-                  <a:txBody>
-                    <a:bodyPr/>
-                    <a:lstStyle/>
-                    <a:p>
-                      <a:pPr>
-                        <a:defRPr sz="1100"/>
-                      </a:pPr>
-                      <a:r>
-                        <a:t>9300</a:t>
-                      </a:r>
-                    </a:p>
-                  </a:txBody>
-                  <a:tcPr/>
-                </a:tc>
-                <a:tc>
-                  <a:txBody>
-                    <a:bodyPr/>
-                    <a:lstStyle/>
-                    <a:p>
-                      <a:pPr>
-                        <a:defRPr sz="1100"/>
-                      </a:pPr>
-                      <a:r>
-                        <a:t>27.89</a:t>
-                      </a:r>
-                    </a:p>
-                  </a:txBody>
-                  <a:tcPr/>
-                </a:tc>
-                <a:tc>
-                  <a:txBody>
-                    <a:bodyPr/>
-                    <a:lstStyle/>
-                    <a:p>
-                      <a:pPr>
-                        <a:defRPr sz="1100"/>
-                      </a:pPr>
-                      <a:r>
-                        <a:t>29.15</a:t>
-                      </a:r>
-                    </a:p>
-                  </a:txBody>
-                  <a:tcPr/>
-                </a:tc>
-                <a:tc>
-                  <a:txBody>
-                    <a:bodyPr/>
-                    <a:lstStyle/>
-                    <a:p>
-                      <a:pPr>
-                        <a:defRPr sz="1100"/>
-                      </a:pPr>
-                      <a:r>
-                        <a:t>27.11</a:t>
-                      </a:r>
-                    </a:p>
-                  </a:txBody>
-                  <a:tcPr/>
-                </a:tc>
-                <a:tc>
-                  <a:txBody>
-                    <a:bodyPr/>
-                    <a:lstStyle/>
-                    <a:p>
-                      <a:pPr>
-                        <a:defRPr sz="1100"/>
-                      </a:pPr>
-                      <a:r>
-                        <a:t>1.18</a:t>
+              <a:tr h="256032">
+                <a:tc>
+                  <a:txBody>
+                    <a:bodyPr/>
+                    <a:lstStyle/>
+                    <a:p>
+                      <a:pPr>
+                        <a:defRPr sz="1100"/>
+                      </a:pPr>
+                      <a:r>
+                        <a:t>新集能源</a:t>
+                      </a:r>
+                    </a:p>
+                  </a:txBody>
+                  <a:tcPr/>
+                </a:tc>
+                <a:tc>
+                  <a:txBody>
+                    <a:bodyPr/>
+                    <a:lstStyle/>
+                    <a:p>
+                      <a:pPr>
+                        <a:defRPr sz="1100"/>
+                      </a:pPr>
+                      <a:r>
+                        <a:t>9500</a:t>
+                      </a:r>
+                    </a:p>
+                  </a:txBody>
+                  <a:tcPr/>
+                </a:tc>
+                <a:tc>
+                  <a:txBody>
+                    <a:bodyPr/>
+                    <a:lstStyle/>
+                    <a:p>
+                      <a:pPr>
+                        <a:defRPr sz="1100"/>
+                      </a:pPr>
+                      <a:r>
+                        <a:t>10.47</a:t>
+                      </a:r>
+                    </a:p>
+                  </a:txBody>
+                  <a:tcPr/>
+                </a:tc>
+                <a:tc>
+                  <a:txBody>
+                    <a:bodyPr/>
+                    <a:lstStyle/>
+                    <a:p>
+                      <a:pPr>
+                        <a:defRPr sz="1100"/>
+                      </a:pPr>
+                      <a:r>
+                        <a:t>10.51</a:t>
+                      </a:r>
+                    </a:p>
+                  </a:txBody>
+                  <a:tcPr/>
+                </a:tc>
+                <a:tc>
+                  <a:txBody>
+                    <a:bodyPr/>
+                    <a:lstStyle/>
+                    <a:p>
+                      <a:pPr>
+                        <a:defRPr sz="1100"/>
+                      </a:pPr>
+                      <a:r>
+                        <a:t>9.98</a:t>
+                      </a:r>
+                    </a:p>
+                  </a:txBody>
+                  <a:tcPr/>
+                </a:tc>
+                <a:tc>
+                  <a:txBody>
+                    <a:bodyPr/>
+                    <a:lstStyle/>
+                    <a:p>
+                      <a:pPr>
+                        <a:defRPr sz="1100"/>
+                      </a:pPr>
+                      <a:r>
+                        <a:t>0.04</a:t>
                       </a:r>
                     </a:p>
                   </a:txBody>
                   <a:tcPr/>
                 </a:tc>
               </a:tr>
-              <a:tr h="240030">
-                <a:tc>
-                  <a:txBody>
-                    <a:bodyPr/>
-                    <a:lstStyle/>
-                    <a:p>
-                      <a:pPr>
-                        <a:defRPr sz="1100"/>
-                      </a:pPr>
-                      <a:r>
-                        <a:t>新集能源</a:t>
-                      </a:r>
-                    </a:p>
-                  </a:txBody>
-                  <a:tcPr/>
-                </a:tc>
-                <a:tc>
-                  <a:txBody>
-                    <a:bodyPr/>
-                    <a:lstStyle/>
-                    <a:p>
-                      <a:pPr>
-                        <a:defRPr sz="1100"/>
-                      </a:pPr>
-                      <a:r>
-                        <a:t>9500</a:t>
-                      </a:r>
-                    </a:p>
-                  </a:txBody>
-                  <a:tcPr/>
-                </a:tc>
-                <a:tc>
-                  <a:txBody>
-                    <a:bodyPr/>
-                    <a:lstStyle/>
-                    <a:p>
-                      <a:pPr>
-                        <a:defRPr sz="1100"/>
-                      </a:pPr>
-                      <a:r>
-                        <a:t>10.47</a:t>
-                      </a:r>
-                    </a:p>
-                  </a:txBody>
-                  <a:tcPr/>
-                </a:tc>
-                <a:tc>
-                  <a:txBody>
-                    <a:bodyPr/>
-                    <a:lstStyle/>
-                    <a:p>
-                      <a:pPr>
-                        <a:defRPr sz="1100"/>
-                      </a:pPr>
-                      <a:r>
-                        <a:t>11.1</a:t>
-                      </a:r>
-                    </a:p>
-                  </a:txBody>
-                  <a:tcPr/>
-                </a:tc>
-                <a:tc>
-                  <a:txBody>
-                    <a:bodyPr/>
-                    <a:lstStyle/>
-                    <a:p>
-                      <a:pPr>
-                        <a:defRPr sz="1100"/>
-                      </a:pPr>
-                      <a:r>
-                        <a:t>10.54</a:t>
-                      </a:r>
-                    </a:p>
-                  </a:txBody>
-                  <a:tcPr/>
-                </a:tc>
-                <a:tc>
-                  <a:txBody>
-                    <a:bodyPr/>
-                    <a:lstStyle/>
-                    <a:p>
-                      <a:pPr>
-                        <a:defRPr sz="1100"/>
-                      </a:pPr>
-                      <a:r>
-                        <a:t>0.6</a:t>
+              <a:tr h="256032">
+                <a:tc>
+                  <a:txBody>
+                    <a:bodyPr/>
+                    <a:lstStyle/>
+                    <a:p>
+                      <a:pPr>
+                        <a:defRPr sz="1100"/>
+                      </a:pPr>
+                      <a:r>
+                        <a:t>恺英网络</a:t>
+                      </a:r>
+                    </a:p>
+                  </a:txBody>
+                  <a:tcPr/>
+                </a:tc>
+                <a:tc>
+                  <a:txBody>
+                    <a:bodyPr/>
+                    <a:lstStyle/>
+                    <a:p>
+                      <a:pPr>
+                        <a:defRPr sz="1100"/>
+                      </a:pPr>
+                      <a:r>
+                        <a:t>5000</a:t>
+                      </a:r>
+                    </a:p>
+                  </a:txBody>
+                  <a:tcPr/>
+                </a:tc>
+                <a:tc>
+                  <a:txBody>
+                    <a:bodyPr/>
+                    <a:lstStyle/>
+                    <a:p>
+                      <a:pPr>
+                        <a:defRPr sz="1100"/>
+                      </a:pPr>
+                      <a:r>
+                        <a:t>17.52</a:t>
+                      </a:r>
+                    </a:p>
+                  </a:txBody>
+                  <a:tcPr/>
+                </a:tc>
+                <a:tc>
+                  <a:txBody>
+                    <a:bodyPr/>
+                    <a:lstStyle/>
+                    <a:p>
+                      <a:pPr>
+                        <a:defRPr sz="1100"/>
+                      </a:pPr>
+                      <a:r>
+                        <a:t>15.85</a:t>
+                      </a:r>
+                    </a:p>
+                  </a:txBody>
+                  <a:tcPr/>
+                </a:tc>
+                <a:tc>
+                  <a:txBody>
+                    <a:bodyPr/>
+                    <a:lstStyle/>
+                    <a:p>
+                      <a:pPr>
+                        <a:defRPr sz="1100"/>
+                      </a:pPr>
+                      <a:r>
+                        <a:t>7.92</a:t>
+                      </a:r>
+                    </a:p>
+                  </a:txBody>
+                  <a:tcPr/>
+                </a:tc>
+                <a:tc>
+                  <a:txBody>
+                    <a:bodyPr/>
+                    <a:lstStyle/>
+                    <a:p>
+                      <a:pPr>
+                        <a:defRPr sz="1100"/>
+                      </a:pPr>
+                      <a:r>
+                        <a:t>-0.83</a:t>
                       </a:r>
                     </a:p>
                   </a:txBody>
                   <a:tcPr/>
                 </a:tc>
               </a:tr>
-              <a:tr h="240030">
-                <a:tc>
-                  <a:txBody>
-                    <a:bodyPr/>
-                    <a:lstStyle/>
-                    <a:p>
-                      <a:pPr>
-                        <a:defRPr sz="1100"/>
-                      </a:pPr>
-                      <a:r>
-                        <a:t>恺英网络</a:t>
+              <a:tr h="256032">
+                <a:tc>
+                  <a:txBody>
+                    <a:bodyPr/>
+                    <a:lstStyle/>
+                    <a:p>
+                      <a:pPr>
+                        <a:defRPr sz="1100"/>
+                      </a:pPr>
+                      <a:r>
+                        <a:t>星网锐捷</a:t>
+                      </a:r>
+                    </a:p>
+                  </a:txBody>
+                  <a:tcPr/>
+                </a:tc>
+                <a:tc>
+                  <a:txBody>
+                    <a:bodyPr/>
+                    <a:lstStyle/>
+                    <a:p>
+                      <a:pPr>
+                        <a:defRPr sz="1100"/>
+                      </a:pPr>
+                      <a:r>
+                        <a:t>6100</a:t>
+                      </a:r>
+                    </a:p>
+                  </a:txBody>
+                  <a:tcPr/>
+                </a:tc>
+                <a:tc>
+                  <a:txBody>
+                    <a:bodyPr/>
+                    <a:lstStyle/>
+                    <a:p>
+                      <a:pPr>
+                        <a:defRPr sz="1100"/>
+                      </a:pPr>
+                      <a:r>
+                        <a:t>35.87</a:t>
+                      </a:r>
+                    </a:p>
+                  </a:txBody>
+                  <a:tcPr/>
+                </a:tc>
+                <a:tc>
+                  <a:txBody>
+                    <a:bodyPr/>
+                    <a:lstStyle/>
+                    <a:p>
+                      <a:pPr>
+                        <a:defRPr sz="1100"/>
+                      </a:pPr>
+                      <a:r>
+                        <a:t>27.95</a:t>
+                      </a:r>
+                    </a:p>
+                  </a:txBody>
+                  <a:tcPr/>
+                </a:tc>
+                <a:tc>
+                  <a:txBody>
+                    <a:bodyPr/>
+                    <a:lstStyle/>
+                    <a:p>
+                      <a:pPr>
+                        <a:defRPr sz="1100"/>
+                      </a:pPr>
+                      <a:r>
+                        <a:t>17.05</a:t>
+                      </a:r>
+                    </a:p>
+                  </a:txBody>
+                  <a:tcPr/>
+                </a:tc>
+                <a:tc>
+                  <a:txBody>
+                    <a:bodyPr/>
+                    <a:lstStyle/>
+                    <a:p>
+                      <a:pPr>
+                        <a:defRPr sz="1100"/>
+                      </a:pPr>
+                      <a:r>
+                        <a:t>-4.83</a:t>
+                      </a:r>
+                    </a:p>
+                  </a:txBody>
+                  <a:tcPr/>
+                </a:tc>
+              </a:tr>
+              <a:tr h="256032">
+                <a:tc>
+                  <a:txBody>
+                    <a:bodyPr/>
+                    <a:lstStyle/>
+                    <a:p>
+                      <a:pPr>
+                        <a:defRPr sz="1100"/>
+                      </a:pPr>
+                      <a:r>
+                        <a:t>深信服</a:t>
+                      </a:r>
+                    </a:p>
+                  </a:txBody>
+                  <a:tcPr/>
+                </a:tc>
+                <a:tc>
+                  <a:txBody>
+                    <a:bodyPr/>
+                    <a:lstStyle/>
+                    <a:p>
+                      <a:pPr>
+                        <a:defRPr sz="1100"/>
+                      </a:pPr>
+                      <a:r>
+                        <a:t>500</a:t>
+                      </a:r>
+                    </a:p>
+                  </a:txBody>
+                  <a:tcPr/>
+                </a:tc>
+                <a:tc>
+                  <a:txBody>
+                    <a:bodyPr/>
+                    <a:lstStyle/>
+                    <a:p>
+                      <a:pPr>
+                        <a:defRPr sz="1100"/>
+                      </a:pPr>
+                      <a:r>
+                        <a:t>136.73</a:t>
+                      </a:r>
+                    </a:p>
+                  </a:txBody>
+                  <a:tcPr/>
+                </a:tc>
+                <a:tc>
+                  <a:txBody>
+                    <a:bodyPr/>
+                    <a:lstStyle/>
+                    <a:p>
+                      <a:pPr>
+                        <a:defRPr sz="1100"/>
+                      </a:pPr>
+                      <a:r>
+                        <a:t>135.5</a:t>
+                      </a:r>
+                    </a:p>
+                  </a:txBody>
+                  <a:tcPr/>
+                </a:tc>
+                <a:tc>
+                  <a:txBody>
+                    <a:bodyPr/>
+                    <a:lstStyle/>
+                    <a:p>
+                      <a:pPr>
+                        <a:defRPr sz="1100"/>
+                      </a:pPr>
+                      <a:r>
+                        <a:t>6.78</a:t>
+                      </a:r>
+                    </a:p>
+                  </a:txBody>
+                  <a:tcPr/>
+                </a:tc>
+                <a:tc>
+                  <a:txBody>
+                    <a:bodyPr/>
+                    <a:lstStyle/>
+                    <a:p>
+                      <a:pPr>
+                        <a:defRPr sz="1100"/>
+                      </a:pPr>
+                      <a:r>
+                        <a:t>-0.06</a:t>
+                      </a:r>
+                    </a:p>
+                  </a:txBody>
+                  <a:tcPr/>
+                </a:tc>
+              </a:tr>
+              <a:tr h="256032">
+                <a:tc>
+                  <a:txBody>
+                    <a:bodyPr/>
+                    <a:lstStyle/>
+                    <a:p>
+                      <a:pPr>
+                        <a:defRPr sz="1100"/>
+                      </a:pPr>
+                      <a:r>
+                        <a:t>哈药股份</a:t>
                       </a:r>
                     </a:p>
                   </a:txBody>
@@ -4174,37 +4358,589 @@
                         <a:defRPr sz="1100"/>
                       </a:pPr>
                       <a:r>
-                        <a:t>17.52</a:t>
-                      </a:r>
-                    </a:p>
-                  </a:txBody>
-                  <a:tcPr/>
-                </a:tc>
-                <a:tc>
-                  <a:txBody>
-                    <a:bodyPr/>
-                    <a:lstStyle/>
-                    <a:p>
-                      <a:pPr>
-                        <a:defRPr sz="1100"/>
-                      </a:pPr>
-                      <a:r>
-                        <a:t>16.05</a:t>
-                      </a:r>
-                    </a:p>
-                  </a:txBody>
-                  <a:tcPr/>
-                </a:tc>
-                <a:tc>
-                  <a:txBody>
-                    <a:bodyPr/>
-                    <a:lstStyle/>
-                    <a:p>
-                      <a:pPr>
-                        <a:defRPr sz="1100"/>
-                      </a:pPr>
-                      <a:r>
-                        <a:t>8.03</a:t>
+                        <a:t>7.33</a:t>
+                      </a:r>
+                    </a:p>
+                  </a:txBody>
+                  <a:tcPr/>
+                </a:tc>
+                <a:tc>
+                  <a:txBody>
+                    <a:bodyPr/>
+                    <a:lstStyle/>
+                    <a:p>
+                      <a:pPr>
+                        <a:defRPr sz="1100"/>
+                      </a:pPr>
+                      <a:r>
+                        <a:t>6.16</a:t>
+                      </a:r>
+                    </a:p>
+                  </a:txBody>
+                  <a:tcPr/>
+                </a:tc>
+                <a:tc>
+                  <a:txBody>
+                    <a:bodyPr/>
+                    <a:lstStyle/>
+                    <a:p>
+                      <a:pPr>
+                        <a:defRPr sz="1100"/>
+                      </a:pPr>
+                      <a:r>
+                        <a:t>3.08</a:t>
+                      </a:r>
+                    </a:p>
+                  </a:txBody>
+                  <a:tcPr/>
+                </a:tc>
+                <a:tc>
+                  <a:txBody>
+                    <a:bodyPr/>
+                    <a:lstStyle/>
+                    <a:p>
+                      <a:pPr>
+                        <a:defRPr sz="1100"/>
+                      </a:pPr>
+                      <a:r>
+                        <a:t>-0.58</a:t>
+                      </a:r>
+                    </a:p>
+                  </a:txBody>
+                  <a:tcPr/>
+                </a:tc>
+              </a:tr>
+              <a:tr h="256032">
+                <a:tc>
+                  <a:txBody>
+                    <a:bodyPr/>
+                    <a:lstStyle/>
+                    <a:p>
+                      <a:pPr>
+                        <a:defRPr sz="1100"/>
+                      </a:pPr>
+                      <a:r>
+                        <a:t>招商轮船</a:t>
+                      </a:r>
+                    </a:p>
+                  </a:txBody>
+                  <a:tcPr/>
+                </a:tc>
+                <a:tc>
+                  <a:txBody>
+                    <a:bodyPr/>
+                    <a:lstStyle/>
+                    <a:p>
+                      <a:pPr>
+                        <a:defRPr sz="1100"/>
+                      </a:pPr>
+                      <a:r>
+                        <a:t>500</a:t>
+                      </a:r>
+                    </a:p>
+                  </a:txBody>
+                  <a:tcPr/>
+                </a:tc>
+                <a:tc>
+                  <a:txBody>
+                    <a:bodyPr/>
+                    <a:lstStyle/>
+                    <a:p>
+                      <a:pPr>
+                        <a:defRPr sz="1100"/>
+                      </a:pPr>
+                      <a:r>
+                        <a:t>20.76</a:t>
+                      </a:r>
+                    </a:p>
+                  </a:txBody>
+                  <a:tcPr/>
+                </a:tc>
+                <a:tc>
+                  <a:txBody>
+                    <a:bodyPr/>
+                    <a:lstStyle/>
+                    <a:p>
+                      <a:pPr>
+                        <a:defRPr sz="1100"/>
+                      </a:pPr>
+                      <a:r>
+                        <a:t>21.48</a:t>
+                      </a:r>
+                    </a:p>
+                  </a:txBody>
+                  <a:tcPr/>
+                </a:tc>
+                <a:tc>
+                  <a:txBody>
+                    <a:bodyPr/>
+                    <a:lstStyle/>
+                    <a:p>
+                      <a:pPr>
+                        <a:defRPr sz="1100"/>
+                      </a:pPr>
+                      <a:r>
+                        <a:t>1.07</a:t>
+                      </a:r>
+                    </a:p>
+                  </a:txBody>
+                  <a:tcPr/>
+                </a:tc>
+                <a:tc>
+                  <a:txBody>
+                    <a:bodyPr/>
+                    <a:lstStyle/>
+                    <a:p>
+                      <a:pPr>
+                        <a:defRPr sz="1100"/>
+                      </a:pPr>
+                      <a:r>
+                        <a:t>0.04</a:t>
+                      </a:r>
+                    </a:p>
+                  </a:txBody>
+                  <a:tcPr/>
+                </a:tc>
+              </a:tr>
+              <a:tr h="256032">
+                <a:tc>
+                  <a:txBody>
+                    <a:bodyPr/>
+                    <a:lstStyle/>
+                    <a:p>
+                      <a:pPr>
+                        <a:defRPr sz="1100"/>
+                      </a:pPr>
+                      <a:r>
+                        <a:t>睿创微纳</a:t>
+                      </a:r>
+                    </a:p>
+                  </a:txBody>
+                  <a:tcPr/>
+                </a:tc>
+                <a:tc>
+                  <a:txBody>
+                    <a:bodyPr/>
+                    <a:lstStyle/>
+                    <a:p>
+                      <a:pPr>
+                        <a:defRPr sz="1100"/>
+                      </a:pPr>
+                      <a:r>
+                        <a:t>1000</a:t>
+                      </a:r>
+                    </a:p>
+                  </a:txBody>
+                  <a:tcPr/>
+                </a:tc>
+                <a:tc>
+                  <a:txBody>
+                    <a:bodyPr/>
+                    <a:lstStyle/>
+                    <a:p>
+                      <a:pPr>
+                        <a:defRPr sz="1100"/>
+                      </a:pPr>
+                      <a:r>
+                        <a:t>177.58</a:t>
+                      </a:r>
+                    </a:p>
+                  </a:txBody>
+                  <a:tcPr/>
+                </a:tc>
+                <a:tc>
+                  <a:txBody>
+                    <a:bodyPr/>
+                    <a:lstStyle/>
+                    <a:p>
+                      <a:pPr>
+                        <a:defRPr sz="1100"/>
+                      </a:pPr>
+                      <a:r>
+                        <a:t>173.5</a:t>
+                      </a:r>
+                    </a:p>
+                  </a:txBody>
+                  <a:tcPr/>
+                </a:tc>
+                <a:tc>
+                  <a:txBody>
+                    <a:bodyPr/>
+                    <a:lstStyle/>
+                    <a:p>
+                      <a:pPr>
+                        <a:defRPr sz="1100"/>
+                      </a:pPr>
+                      <a:r>
+                        <a:t>17.35</a:t>
+                      </a:r>
+                    </a:p>
+                  </a:txBody>
+                  <a:tcPr/>
+                </a:tc>
+                <a:tc>
+                  <a:txBody>
+                    <a:bodyPr/>
+                    <a:lstStyle/>
+                    <a:p>
+                      <a:pPr>
+                        <a:defRPr sz="1100"/>
+                      </a:pPr>
+                      <a:r>
+                        <a:t>-0.41</a:t>
+                      </a:r>
+                    </a:p>
+                  </a:txBody>
+                  <a:tcPr/>
+                </a:tc>
+              </a:tr>
+              <a:tr h="256032">
+                <a:tc>
+                  <a:txBody>
+                    <a:bodyPr/>
+                    <a:lstStyle/>
+                    <a:p>
+                      <a:pPr>
+                        <a:defRPr sz="1100"/>
+                      </a:pPr>
+                      <a:r>
+                        <a:t>药明康德</a:t>
+                      </a:r>
+                    </a:p>
+                  </a:txBody>
+                  <a:tcPr/>
+                </a:tc>
+                <a:tc>
+                  <a:txBody>
+                    <a:bodyPr/>
+                    <a:lstStyle/>
+                    <a:p>
+                      <a:pPr>
+                        <a:defRPr sz="1100"/>
+                      </a:pPr>
+                      <a:r>
+                        <a:t>1300</a:t>
+                      </a:r>
+                    </a:p>
+                  </a:txBody>
+                  <a:tcPr/>
+                </a:tc>
+                <a:tc>
+                  <a:txBody>
+                    <a:bodyPr/>
+                    <a:lstStyle/>
+                    <a:p>
+                      <a:pPr>
+                        <a:defRPr sz="1100"/>
+                      </a:pPr>
+                      <a:r>
+                        <a:t>158.08</a:t>
+                      </a:r>
+                    </a:p>
+                  </a:txBody>
+                  <a:tcPr/>
+                </a:tc>
+                <a:tc>
+                  <a:txBody>
+                    <a:bodyPr/>
+                    <a:lstStyle/>
+                    <a:p>
+                      <a:pPr>
+                        <a:defRPr sz="1100"/>
+                      </a:pPr>
+                      <a:r>
+                        <a:t>154.18</a:t>
+                      </a:r>
+                    </a:p>
+                  </a:txBody>
+                  <a:tcPr/>
+                </a:tc>
+                <a:tc>
+                  <a:txBody>
+                    <a:bodyPr/>
+                    <a:lstStyle/>
+                    <a:p>
+                      <a:pPr>
+                        <a:defRPr sz="1100"/>
+                      </a:pPr>
+                      <a:r>
+                        <a:t>20.04</a:t>
+                      </a:r>
+                    </a:p>
+                  </a:txBody>
+                  <a:tcPr/>
+                </a:tc>
+                <a:tc>
+                  <a:txBody>
+                    <a:bodyPr/>
+                    <a:lstStyle/>
+                    <a:p>
+                      <a:pPr>
+                        <a:defRPr sz="1100"/>
+                      </a:pPr>
+                      <a:r>
+                        <a:t>-0.51</a:t>
+                      </a:r>
+                    </a:p>
+                  </a:txBody>
+                  <a:tcPr/>
+                </a:tc>
+              </a:tr>
+              <a:tr h="256032">
+                <a:tc>
+                  <a:txBody>
+                    <a:bodyPr/>
+                    <a:lstStyle/>
+                    <a:p>
+                      <a:pPr>
+                        <a:defRPr sz="1100"/>
+                      </a:pPr>
+                      <a:r>
+                        <a:t>康龙化成</a:t>
+                      </a:r>
+                    </a:p>
+                  </a:txBody>
+                  <a:tcPr/>
+                </a:tc>
+                <a:tc>
+                  <a:txBody>
+                    <a:bodyPr/>
+                    <a:lstStyle/>
+                    <a:p>
+                      <a:pPr>
+                        <a:defRPr sz="1100"/>
+                      </a:pPr>
+                      <a:r>
+                        <a:t>1000</a:t>
+                      </a:r>
+                    </a:p>
+                  </a:txBody>
+                  <a:tcPr/>
+                </a:tc>
+                <a:tc>
+                  <a:txBody>
+                    <a:bodyPr/>
+                    <a:lstStyle/>
+                    <a:p>
+                      <a:pPr>
+                        <a:defRPr sz="1100"/>
+                      </a:pPr>
+                      <a:r>
+                        <a:t>42.65</a:t>
+                      </a:r>
+                    </a:p>
+                  </a:txBody>
+                  <a:tcPr/>
+                </a:tc>
+                <a:tc>
+                  <a:txBody>
+                    <a:bodyPr/>
+                    <a:lstStyle/>
+                    <a:p>
+                      <a:pPr>
+                        <a:defRPr sz="1100"/>
+                      </a:pPr>
+                      <a:r>
+                        <a:t>40.0</a:t>
+                      </a:r>
+                    </a:p>
+                  </a:txBody>
+                  <a:tcPr/>
+                </a:tc>
+                <a:tc>
+                  <a:txBody>
+                    <a:bodyPr/>
+                    <a:lstStyle/>
+                    <a:p>
+                      <a:pPr>
+                        <a:defRPr sz="1100"/>
+                      </a:pPr>
+                      <a:r>
+                        <a:t>4.0</a:t>
+                      </a:r>
+                    </a:p>
+                  </a:txBody>
+                  <a:tcPr/>
+                </a:tc>
+                <a:tc>
+                  <a:txBody>
+                    <a:bodyPr/>
+                    <a:lstStyle/>
+                    <a:p>
+                      <a:pPr>
+                        <a:defRPr sz="1100"/>
+                      </a:pPr>
+                      <a:r>
+                        <a:t>-0.26</a:t>
+                      </a:r>
+                    </a:p>
+                  </a:txBody>
+                  <a:tcPr/>
+                </a:tc>
+              </a:tr>
+              <a:tr h="256032">
+                <a:tc>
+                  <a:txBody>
+                    <a:bodyPr/>
+                    <a:lstStyle/>
+                    <a:p>
+                      <a:pPr>
+                        <a:defRPr sz="1100"/>
+                      </a:pPr>
+                      <a:r>
+                        <a:t>赤峰黄金</a:t>
+                      </a:r>
+                    </a:p>
+                  </a:txBody>
+                  <a:tcPr/>
+                </a:tc>
+                <a:tc>
+                  <a:txBody>
+                    <a:bodyPr/>
+                    <a:lstStyle/>
+                    <a:p>
+                      <a:pPr>
+                        <a:defRPr sz="1100"/>
+                      </a:pPr>
+                      <a:r>
+                        <a:t>4000</a:t>
+                      </a:r>
+                    </a:p>
+                  </a:txBody>
+                  <a:tcPr/>
+                </a:tc>
+                <a:tc>
+                  <a:txBody>
+                    <a:bodyPr/>
+                    <a:lstStyle/>
+                    <a:p>
+                      <a:pPr>
+                        <a:defRPr sz="1100"/>
+                      </a:pPr>
+                      <a:r>
+                        <a:t>43.56</a:t>
+                      </a:r>
+                    </a:p>
+                  </a:txBody>
+                  <a:tcPr/>
+                </a:tc>
+                <a:tc>
+                  <a:txBody>
+                    <a:bodyPr/>
+                    <a:lstStyle/>
+                    <a:p>
+                      <a:pPr>
+                        <a:defRPr sz="1100"/>
+                      </a:pPr>
+                      <a:r>
+                        <a:t>39.0</a:t>
+                      </a:r>
+                    </a:p>
+                  </a:txBody>
+                  <a:tcPr/>
+                </a:tc>
+                <a:tc>
+                  <a:txBody>
+                    <a:bodyPr/>
+                    <a:lstStyle/>
+                    <a:p>
+                      <a:pPr>
+                        <a:defRPr sz="1100"/>
+                      </a:pPr>
+                      <a:r>
+                        <a:t>15.6</a:t>
+                      </a:r>
+                    </a:p>
+                  </a:txBody>
+                  <a:tcPr/>
+                </a:tc>
+                <a:tc>
+                  <a:txBody>
+                    <a:bodyPr/>
+                    <a:lstStyle/>
+                    <a:p>
+                      <a:pPr>
+                        <a:defRPr sz="1100"/>
+                      </a:pPr>
+                      <a:r>
+                        <a:t>-1.82</a:t>
+                      </a:r>
+                    </a:p>
+                  </a:txBody>
+                  <a:tcPr/>
+                </a:tc>
+              </a:tr>
+              <a:tr h="256032">
+                <a:tc>
+                  <a:txBody>
+                    <a:bodyPr/>
+                    <a:lstStyle/>
+                    <a:p>
+                      <a:pPr>
+                        <a:defRPr sz="1100"/>
+                      </a:pPr>
+                      <a:r>
+                        <a:t>宁德时代</a:t>
+                      </a:r>
+                    </a:p>
+                  </a:txBody>
+                  <a:tcPr/>
+                </a:tc>
+                <a:tc>
+                  <a:txBody>
+                    <a:bodyPr/>
+                    <a:lstStyle/>
+                    <a:p>
+                      <a:pPr>
+                        <a:defRPr sz="1100"/>
+                      </a:pPr>
+                      <a:r>
+                        <a:t>1100</a:t>
+                      </a:r>
+                    </a:p>
+                  </a:txBody>
+                  <a:tcPr/>
+                </a:tc>
+                <a:tc>
+                  <a:txBody>
+                    <a:bodyPr/>
+                    <a:lstStyle/>
+                    <a:p>
+                      <a:pPr>
+                        <a:defRPr sz="1100"/>
+                      </a:pPr>
+                      <a:r>
+                        <a:t>286.8</a:t>
+                      </a:r>
+                    </a:p>
+                  </a:txBody>
+                  <a:tcPr/>
+                </a:tc>
+                <a:tc>
+                  <a:txBody>
+                    <a:bodyPr/>
+                    <a:lstStyle/>
+                    <a:p>
+                      <a:pPr>
+                        <a:defRPr sz="1100"/>
+                      </a:pPr>
+                      <a:r>
+                        <a:t>280.12</a:t>
+                      </a:r>
+                    </a:p>
+                  </a:txBody>
+                  <a:tcPr/>
+                </a:tc>
+                <a:tc>
+                  <a:txBody>
+                    <a:bodyPr/>
+                    <a:lstStyle/>
+                    <a:p>
+                      <a:pPr>
+                        <a:defRPr sz="1100"/>
+                      </a:pPr>
+                      <a:r>
+                        <a:t>30.81</a:t>
                       </a:r>
                     </a:p>
                   </a:txBody>
@@ -4220,834 +4956,6 @@
                       </a:pPr>
                       <a:r>
                         <a:t>-0.73</a:t>
-                      </a:r>
-                    </a:p>
-                  </a:txBody>
-                  <a:tcPr/>
-                </a:tc>
-              </a:tr>
-              <a:tr h="240030">
-                <a:tc>
-                  <a:txBody>
-                    <a:bodyPr/>
-                    <a:lstStyle/>
-                    <a:p>
-                      <a:pPr>
-                        <a:defRPr sz="1100"/>
-                      </a:pPr>
-                      <a:r>
-                        <a:t>星网锐捷</a:t>
-                      </a:r>
-                    </a:p>
-                  </a:txBody>
-                  <a:tcPr/>
-                </a:tc>
-                <a:tc>
-                  <a:txBody>
-                    <a:bodyPr/>
-                    <a:lstStyle/>
-                    <a:p>
-                      <a:pPr>
-                        <a:defRPr sz="1100"/>
-                      </a:pPr>
-                      <a:r>
-                        <a:t>6100</a:t>
-                      </a:r>
-                    </a:p>
-                  </a:txBody>
-                  <a:tcPr/>
-                </a:tc>
-                <a:tc>
-                  <a:txBody>
-                    <a:bodyPr/>
-                    <a:lstStyle/>
-                    <a:p>
-                      <a:pPr>
-                        <a:defRPr sz="1100"/>
-                      </a:pPr>
-                      <a:r>
-                        <a:t>35.87</a:t>
-                      </a:r>
-                    </a:p>
-                  </a:txBody>
-                  <a:tcPr/>
-                </a:tc>
-                <a:tc>
-                  <a:txBody>
-                    <a:bodyPr/>
-                    <a:lstStyle/>
-                    <a:p>
-                      <a:pPr>
-                        <a:defRPr sz="1100"/>
-                      </a:pPr>
-                      <a:r>
-                        <a:t>28.41</a:t>
-                      </a:r>
-                    </a:p>
-                  </a:txBody>
-                  <a:tcPr/>
-                </a:tc>
-                <a:tc>
-                  <a:txBody>
-                    <a:bodyPr/>
-                    <a:lstStyle/>
-                    <a:p>
-                      <a:pPr>
-                        <a:defRPr sz="1100"/>
-                      </a:pPr>
-                      <a:r>
-                        <a:t>17.33</a:t>
-                      </a:r>
-                    </a:p>
-                  </a:txBody>
-                  <a:tcPr/>
-                </a:tc>
-                <a:tc>
-                  <a:txBody>
-                    <a:bodyPr/>
-                    <a:lstStyle/>
-                    <a:p>
-                      <a:pPr>
-                        <a:defRPr sz="1100"/>
-                      </a:pPr>
-                      <a:r>
-                        <a:t>-4.55</a:t>
-                      </a:r>
-                    </a:p>
-                  </a:txBody>
-                  <a:tcPr/>
-                </a:tc>
-              </a:tr>
-              <a:tr h="240030">
-                <a:tc>
-                  <a:txBody>
-                    <a:bodyPr/>
-                    <a:lstStyle/>
-                    <a:p>
-                      <a:pPr>
-                        <a:defRPr sz="1100"/>
-                      </a:pPr>
-                      <a:r>
-                        <a:t>深信服</a:t>
-                      </a:r>
-                    </a:p>
-                  </a:txBody>
-                  <a:tcPr/>
-                </a:tc>
-                <a:tc>
-                  <a:txBody>
-                    <a:bodyPr/>
-                    <a:lstStyle/>
-                    <a:p>
-                      <a:pPr>
-                        <a:defRPr sz="1100"/>
-                      </a:pPr>
-                      <a:r>
-                        <a:t>500</a:t>
-                      </a:r>
-                    </a:p>
-                  </a:txBody>
-                  <a:tcPr/>
-                </a:tc>
-                <a:tc>
-                  <a:txBody>
-                    <a:bodyPr/>
-                    <a:lstStyle/>
-                    <a:p>
-                      <a:pPr>
-                        <a:defRPr sz="1100"/>
-                      </a:pPr>
-                      <a:r>
-                        <a:t>136.73</a:t>
-                      </a:r>
-                    </a:p>
-                  </a:txBody>
-                  <a:tcPr/>
-                </a:tc>
-                <a:tc>
-                  <a:txBody>
-                    <a:bodyPr/>
-                    <a:lstStyle/>
-                    <a:p>
-                      <a:pPr>
-                        <a:defRPr sz="1100"/>
-                      </a:pPr>
-                      <a:r>
-                        <a:t>134.98</a:t>
-                      </a:r>
-                    </a:p>
-                  </a:txBody>
-                  <a:tcPr/>
-                </a:tc>
-                <a:tc>
-                  <a:txBody>
-                    <a:bodyPr/>
-                    <a:lstStyle/>
-                    <a:p>
-                      <a:pPr>
-                        <a:defRPr sz="1100"/>
-                      </a:pPr>
-                      <a:r>
-                        <a:t>6.75</a:t>
-                      </a:r>
-                    </a:p>
-                  </a:txBody>
-                  <a:tcPr/>
-                </a:tc>
-                <a:tc>
-                  <a:txBody>
-                    <a:bodyPr/>
-                    <a:lstStyle/>
-                    <a:p>
-                      <a:pPr>
-                        <a:defRPr sz="1100"/>
-                      </a:pPr>
-                      <a:r>
-                        <a:t>-0.09</a:t>
-                      </a:r>
-                    </a:p>
-                  </a:txBody>
-                  <a:tcPr/>
-                </a:tc>
-              </a:tr>
-              <a:tr h="240030">
-                <a:tc>
-                  <a:txBody>
-                    <a:bodyPr/>
-                    <a:lstStyle/>
-                    <a:p>
-                      <a:pPr>
-                        <a:defRPr sz="1100"/>
-                      </a:pPr>
-                      <a:r>
-                        <a:t>哈药股份</a:t>
-                      </a:r>
-                    </a:p>
-                  </a:txBody>
-                  <a:tcPr/>
-                </a:tc>
-                <a:tc>
-                  <a:txBody>
-                    <a:bodyPr/>
-                    <a:lstStyle/>
-                    <a:p>
-                      <a:pPr>
-                        <a:defRPr sz="1100"/>
-                      </a:pPr>
-                      <a:r>
-                        <a:t>5000</a:t>
-                      </a:r>
-                    </a:p>
-                  </a:txBody>
-                  <a:tcPr/>
-                </a:tc>
-                <a:tc>
-                  <a:txBody>
-                    <a:bodyPr/>
-                    <a:lstStyle/>
-                    <a:p>
-                      <a:pPr>
-                        <a:defRPr sz="1100"/>
-                      </a:pPr>
-                      <a:r>
-                        <a:t>7.33</a:t>
-                      </a:r>
-                    </a:p>
-                  </a:txBody>
-                  <a:tcPr/>
-                </a:tc>
-                <a:tc>
-                  <a:txBody>
-                    <a:bodyPr/>
-                    <a:lstStyle/>
-                    <a:p>
-                      <a:pPr>
-                        <a:defRPr sz="1100"/>
-                      </a:pPr>
-                      <a:r>
-                        <a:t>6.56</a:t>
-                      </a:r>
-                    </a:p>
-                  </a:txBody>
-                  <a:tcPr/>
-                </a:tc>
-                <a:tc>
-                  <a:txBody>
-                    <a:bodyPr/>
-                    <a:lstStyle/>
-                    <a:p>
-                      <a:pPr>
-                        <a:defRPr sz="1100"/>
-                      </a:pPr>
-                      <a:r>
-                        <a:t>3.28</a:t>
-                      </a:r>
-                    </a:p>
-                  </a:txBody>
-                  <a:tcPr/>
-                </a:tc>
-                <a:tc>
-                  <a:txBody>
-                    <a:bodyPr/>
-                    <a:lstStyle/>
-                    <a:p>
-                      <a:pPr>
-                        <a:defRPr sz="1100"/>
-                      </a:pPr>
-                      <a:r>
-                        <a:t>-0.39</a:t>
-                      </a:r>
-                    </a:p>
-                  </a:txBody>
-                  <a:tcPr/>
-                </a:tc>
-              </a:tr>
-              <a:tr h="240030">
-                <a:tc>
-                  <a:txBody>
-                    <a:bodyPr/>
-                    <a:lstStyle/>
-                    <a:p>
-                      <a:pPr>
-                        <a:defRPr sz="1100"/>
-                      </a:pPr>
-                      <a:r>
-                        <a:t>招商轮船</a:t>
-                      </a:r>
-                    </a:p>
-                  </a:txBody>
-                  <a:tcPr/>
-                </a:tc>
-                <a:tc>
-                  <a:txBody>
-                    <a:bodyPr/>
-                    <a:lstStyle/>
-                    <a:p>
-                      <a:pPr>
-                        <a:defRPr sz="1100"/>
-                      </a:pPr>
-                      <a:r>
-                        <a:t>500</a:t>
-                      </a:r>
-                    </a:p>
-                  </a:txBody>
-                  <a:tcPr/>
-                </a:tc>
-                <a:tc>
-                  <a:txBody>
-                    <a:bodyPr/>
-                    <a:lstStyle/>
-                    <a:p>
-                      <a:pPr>
-                        <a:defRPr sz="1100"/>
-                      </a:pPr>
-                      <a:r>
-                        <a:t>20.76</a:t>
-                      </a:r>
-                    </a:p>
-                  </a:txBody>
-                  <a:tcPr/>
-                </a:tc>
-                <a:tc>
-                  <a:txBody>
-                    <a:bodyPr/>
-                    <a:lstStyle/>
-                    <a:p>
-                      <a:pPr>
-                        <a:defRPr sz="1100"/>
-                      </a:pPr>
-                      <a:r>
-                        <a:t>21.31</a:t>
-                      </a:r>
-                    </a:p>
-                  </a:txBody>
-                  <a:tcPr/>
-                </a:tc>
-                <a:tc>
-                  <a:txBody>
-                    <a:bodyPr/>
-                    <a:lstStyle/>
-                    <a:p>
-                      <a:pPr>
-                        <a:defRPr sz="1100"/>
-                      </a:pPr>
-                      <a:r>
-                        <a:t>1.07</a:t>
-                      </a:r>
-                    </a:p>
-                  </a:txBody>
-                  <a:tcPr/>
-                </a:tc>
-                <a:tc>
-                  <a:txBody>
-                    <a:bodyPr/>
-                    <a:lstStyle/>
-                    <a:p>
-                      <a:pPr>
-                        <a:defRPr sz="1100"/>
-                      </a:pPr>
-                      <a:r>
-                        <a:t>0.03</a:t>
-                      </a:r>
-                    </a:p>
-                  </a:txBody>
-                  <a:tcPr/>
-                </a:tc>
-              </a:tr>
-              <a:tr h="240030">
-                <a:tc>
-                  <a:txBody>
-                    <a:bodyPr/>
-                    <a:lstStyle/>
-                    <a:p>
-                      <a:pPr>
-                        <a:defRPr sz="1100"/>
-                      </a:pPr>
-                      <a:r>
-                        <a:t>睿创微纳</a:t>
-                      </a:r>
-                    </a:p>
-                  </a:txBody>
-                  <a:tcPr/>
-                </a:tc>
-                <a:tc>
-                  <a:txBody>
-                    <a:bodyPr/>
-                    <a:lstStyle/>
-                    <a:p>
-                      <a:pPr>
-                        <a:defRPr sz="1100"/>
-                      </a:pPr>
-                      <a:r>
-                        <a:t>1000</a:t>
-                      </a:r>
-                    </a:p>
-                  </a:txBody>
-                  <a:tcPr/>
-                </a:tc>
-                <a:tc>
-                  <a:txBody>
-                    <a:bodyPr/>
-                    <a:lstStyle/>
-                    <a:p>
-                      <a:pPr>
-                        <a:defRPr sz="1100"/>
-                      </a:pPr>
-                      <a:r>
-                        <a:t>177.58</a:t>
-                      </a:r>
-                    </a:p>
-                  </a:txBody>
-                  <a:tcPr/>
-                </a:tc>
-                <a:tc>
-                  <a:txBody>
-                    <a:bodyPr/>
-                    <a:lstStyle/>
-                    <a:p>
-                      <a:pPr>
-                        <a:defRPr sz="1100"/>
-                      </a:pPr>
-                      <a:r>
-                        <a:t>167.29</a:t>
-                      </a:r>
-                    </a:p>
-                  </a:txBody>
-                  <a:tcPr/>
-                </a:tc>
-                <a:tc>
-                  <a:txBody>
-                    <a:bodyPr/>
-                    <a:lstStyle/>
-                    <a:p>
-                      <a:pPr>
-                        <a:defRPr sz="1100"/>
-                      </a:pPr>
-                      <a:r>
-                        <a:t>16.73</a:t>
-                      </a:r>
-                    </a:p>
-                  </a:txBody>
-                  <a:tcPr/>
-                </a:tc>
-                <a:tc>
-                  <a:txBody>
-                    <a:bodyPr/>
-                    <a:lstStyle/>
-                    <a:p>
-                      <a:pPr>
-                        <a:defRPr sz="1100"/>
-                      </a:pPr>
-                      <a:r>
-                        <a:t>-1.03</a:t>
-                      </a:r>
-                    </a:p>
-                  </a:txBody>
-                  <a:tcPr/>
-                </a:tc>
-              </a:tr>
-              <a:tr h="240030">
-                <a:tc>
-                  <a:txBody>
-                    <a:bodyPr/>
-                    <a:lstStyle/>
-                    <a:p>
-                      <a:pPr>
-                        <a:defRPr sz="1100"/>
-                      </a:pPr>
-                      <a:r>
-                        <a:t>药明康德</a:t>
-                      </a:r>
-                    </a:p>
-                  </a:txBody>
-                  <a:tcPr/>
-                </a:tc>
-                <a:tc>
-                  <a:txBody>
-                    <a:bodyPr/>
-                    <a:lstStyle/>
-                    <a:p>
-                      <a:pPr>
-                        <a:defRPr sz="1100"/>
-                      </a:pPr>
-                      <a:r>
-                        <a:t>1300</a:t>
-                      </a:r>
-                    </a:p>
-                  </a:txBody>
-                  <a:tcPr/>
-                </a:tc>
-                <a:tc>
-                  <a:txBody>
-                    <a:bodyPr/>
-                    <a:lstStyle/>
-                    <a:p>
-                      <a:pPr>
-                        <a:defRPr sz="1100"/>
-                      </a:pPr>
-                      <a:r>
-                        <a:t>158.08</a:t>
-                      </a:r>
-                    </a:p>
-                  </a:txBody>
-                  <a:tcPr/>
-                </a:tc>
-                <a:tc>
-                  <a:txBody>
-                    <a:bodyPr/>
-                    <a:lstStyle/>
-                    <a:p>
-                      <a:pPr>
-                        <a:defRPr sz="1100"/>
-                      </a:pPr>
-                      <a:r>
-                        <a:t>157.35</a:t>
-                      </a:r>
-                    </a:p>
-                  </a:txBody>
-                  <a:tcPr/>
-                </a:tc>
-                <a:tc>
-                  <a:txBody>
-                    <a:bodyPr/>
-                    <a:lstStyle/>
-                    <a:p>
-                      <a:pPr>
-                        <a:defRPr sz="1100"/>
-                      </a:pPr>
-                      <a:r>
-                        <a:t>20.46</a:t>
-                      </a:r>
-                    </a:p>
-                  </a:txBody>
-                  <a:tcPr/>
-                </a:tc>
-                <a:tc>
-                  <a:txBody>
-                    <a:bodyPr/>
-                    <a:lstStyle/>
-                    <a:p>
-                      <a:pPr>
-                        <a:defRPr sz="1100"/>
-                      </a:pPr>
-                      <a:r>
-                        <a:t>-0.09</a:t>
-                      </a:r>
-                    </a:p>
-                  </a:txBody>
-                  <a:tcPr/>
-                </a:tc>
-              </a:tr>
-              <a:tr h="240030">
-                <a:tc>
-                  <a:txBody>
-                    <a:bodyPr/>
-                    <a:lstStyle/>
-                    <a:p>
-                      <a:pPr>
-                        <a:defRPr sz="1100"/>
-                      </a:pPr>
-                      <a:r>
-                        <a:t>康龙化成</a:t>
-                      </a:r>
-                    </a:p>
-                  </a:txBody>
-                  <a:tcPr/>
-                </a:tc>
-                <a:tc>
-                  <a:txBody>
-                    <a:bodyPr/>
-                    <a:lstStyle/>
-                    <a:p>
-                      <a:pPr>
-                        <a:defRPr sz="1100"/>
-                      </a:pPr>
-                      <a:r>
-                        <a:t>1000</a:t>
-                      </a:r>
-                    </a:p>
-                  </a:txBody>
-                  <a:tcPr/>
-                </a:tc>
-                <a:tc>
-                  <a:txBody>
-                    <a:bodyPr/>
-                    <a:lstStyle/>
-                    <a:p>
-                      <a:pPr>
-                        <a:defRPr sz="1100"/>
-                      </a:pPr>
-                      <a:r>
-                        <a:t>42.65</a:t>
-                      </a:r>
-                    </a:p>
-                  </a:txBody>
-                  <a:tcPr/>
-                </a:tc>
-                <a:tc>
-                  <a:txBody>
-                    <a:bodyPr/>
-                    <a:lstStyle/>
-                    <a:p>
-                      <a:pPr>
-                        <a:defRPr sz="1100"/>
-                      </a:pPr>
-                      <a:r>
-                        <a:t>40.6</a:t>
-                      </a:r>
-                    </a:p>
-                  </a:txBody>
-                  <a:tcPr/>
-                </a:tc>
-                <a:tc>
-                  <a:txBody>
-                    <a:bodyPr/>
-                    <a:lstStyle/>
-                    <a:p>
-                      <a:pPr>
-                        <a:defRPr sz="1100"/>
-                      </a:pPr>
-                      <a:r>
-                        <a:t>4.06</a:t>
-                      </a:r>
-                    </a:p>
-                  </a:txBody>
-                  <a:tcPr/>
-                </a:tc>
-                <a:tc>
-                  <a:txBody>
-                    <a:bodyPr/>
-                    <a:lstStyle/>
-                    <a:p>
-                      <a:pPr>
-                        <a:defRPr sz="1100"/>
-                      </a:pPr>
-                      <a:r>
-                        <a:t>-0.2</a:t>
-                      </a:r>
-                    </a:p>
-                  </a:txBody>
-                  <a:tcPr/>
-                </a:tc>
-              </a:tr>
-              <a:tr h="240030">
-                <a:tc>
-                  <a:txBody>
-                    <a:bodyPr/>
-                    <a:lstStyle/>
-                    <a:p>
-                      <a:pPr>
-                        <a:defRPr sz="1100"/>
-                      </a:pPr>
-                      <a:r>
-                        <a:t>赤峰黄金</a:t>
-                      </a:r>
-                    </a:p>
-                  </a:txBody>
-                  <a:tcPr/>
-                </a:tc>
-                <a:tc>
-                  <a:txBody>
-                    <a:bodyPr/>
-                    <a:lstStyle/>
-                    <a:p>
-                      <a:pPr>
-                        <a:defRPr sz="1100"/>
-                      </a:pPr>
-                      <a:r>
-                        <a:t>4000</a:t>
-                      </a:r>
-                    </a:p>
-                  </a:txBody>
-                  <a:tcPr/>
-                </a:tc>
-                <a:tc>
-                  <a:txBody>
-                    <a:bodyPr/>
-                    <a:lstStyle/>
-                    <a:p>
-                      <a:pPr>
-                        <a:defRPr sz="1100"/>
-                      </a:pPr>
-                      <a:r>
-                        <a:t>43.56</a:t>
-                      </a:r>
-                    </a:p>
-                  </a:txBody>
-                  <a:tcPr/>
-                </a:tc>
-                <a:tc>
-                  <a:txBody>
-                    <a:bodyPr/>
-                    <a:lstStyle/>
-                    <a:p>
-                      <a:pPr>
-                        <a:defRPr sz="1100"/>
-                      </a:pPr>
-                      <a:r>
-                        <a:t>40.01</a:t>
-                      </a:r>
-                    </a:p>
-                  </a:txBody>
-                  <a:tcPr/>
-                </a:tc>
-                <a:tc>
-                  <a:txBody>
-                    <a:bodyPr/>
-                    <a:lstStyle/>
-                    <a:p>
-                      <a:pPr>
-                        <a:defRPr sz="1100"/>
-                      </a:pPr>
-                      <a:r>
-                        <a:t>16.0</a:t>
-                      </a:r>
-                    </a:p>
-                  </a:txBody>
-                  <a:tcPr/>
-                </a:tc>
-                <a:tc>
-                  <a:txBody>
-                    <a:bodyPr/>
-                    <a:lstStyle/>
-                    <a:p>
-                      <a:pPr>
-                        <a:defRPr sz="1100"/>
-                      </a:pPr>
-                      <a:r>
-                        <a:t>-1.42</a:t>
-                      </a:r>
-                    </a:p>
-                  </a:txBody>
-                  <a:tcPr/>
-                </a:tc>
-              </a:tr>
-              <a:tr h="240030">
-                <a:tc>
-                  <a:txBody>
-                    <a:bodyPr/>
-                    <a:lstStyle/>
-                    <a:p>
-                      <a:pPr>
-                        <a:defRPr sz="1100"/>
-                      </a:pPr>
-                      <a:r>
-                        <a:t>宁德时代</a:t>
-                      </a:r>
-                    </a:p>
-                  </a:txBody>
-                  <a:tcPr/>
-                </a:tc>
-                <a:tc>
-                  <a:txBody>
-                    <a:bodyPr/>
-                    <a:lstStyle/>
-                    <a:p>
-                      <a:pPr>
-                        <a:defRPr sz="1100"/>
-                      </a:pPr>
-                      <a:r>
-                        <a:t>1100</a:t>
-                      </a:r>
-                    </a:p>
-                  </a:txBody>
-                  <a:tcPr/>
-                </a:tc>
-                <a:tc>
-                  <a:txBody>
-                    <a:bodyPr/>
-                    <a:lstStyle/>
-                    <a:p>
-                      <a:pPr>
-                        <a:defRPr sz="1100"/>
-                      </a:pPr>
-                      <a:r>
-                        <a:t>286.8</a:t>
-                      </a:r>
-                    </a:p>
-                  </a:txBody>
-                  <a:tcPr/>
-                </a:tc>
-                <a:tc>
-                  <a:txBody>
-                    <a:bodyPr/>
-                    <a:lstStyle/>
-                    <a:p>
-                      <a:pPr>
-                        <a:defRPr sz="1100"/>
-                      </a:pPr>
-                      <a:r>
-                        <a:t>289.1</a:t>
-                      </a:r>
-                    </a:p>
-                  </a:txBody>
-                  <a:tcPr/>
-                </a:tc>
-                <a:tc>
-                  <a:txBody>
-                    <a:bodyPr/>
-                    <a:lstStyle/>
-                    <a:p>
-                      <a:pPr>
-                        <a:defRPr sz="1100"/>
-                      </a:pPr>
-                      <a:r>
-                        <a:t>31.8</a:t>
-                      </a:r>
-                    </a:p>
-                  </a:txBody>
-                  <a:tcPr/>
-                </a:tc>
-                <a:tc>
-                  <a:txBody>
-                    <a:bodyPr/>
-                    <a:lstStyle/>
-                    <a:p>
-                      <a:pPr>
-                        <a:defRPr sz="1100"/>
-                      </a:pPr>
-                      <a:r>
-                        <a:t>0.25</a:t>
                       </a:r>
                     </a:p>
                   </a:txBody>
@@ -5149,7 +5057,7 @@
               <a:defRPr sz="1500"/>
             </a:pPr>
             <a:r>
-              <a:t>宁德时代（300750，新能源电池）：综合70.5分；基本面优秀，具备中长期配置价值；趋势中性，观望。</a:t>
+              <a:t>招商银行（600036，银行）：综合69.0分；基本面优秀，具备中长期配置价值；中期趋势向上，可关注/持有。</a:t>
             </a:r>
           </a:p>
           <a:p>
@@ -5157,7 +5065,7 @@
               <a:defRPr sz="1500"/>
             </a:pPr>
             <a:r>
-              <a:t>招商银行（600036，银行）：综合69.0分；基本面优秀，具备中长期配置价值；中期趋势向上，可关注/持有。</a:t>
+              <a:t>宁德时代（300750，新能源电池）：综合68.5分；基本面优秀，具备中长期配置价值；趋势中性，观望。</a:t>
             </a:r>
           </a:p>
           <a:p>

--- a/outputs/12_中期路演.pptx
+++ b/outputs/12_中期路演.pptx
@@ -3167,7 +3167,7 @@
               <a:defRPr sz="1500"/>
             </a:pPr>
             <a:r>
-              <a:t>数据截止：2026-10-14</a:t>
+              <a:t>数据截止：2026-10-15</a:t>
             </a:r>
           </a:p>
         </p:txBody>
@@ -3255,7 +3255,7 @@
               <a:defRPr sz="1500"/>
             </a:pPr>
             <a:r>
-              <a:t>当前总资产：465.89万元</a:t>
+              <a:t>当前总资产：460.73万元</a:t>
             </a:r>
           </a:p>
           <a:p>
@@ -3263,7 +3263,7 @@
               <a:defRPr sz="1500"/>
             </a:pPr>
             <a:r>
-              <a:t>累计收益率：-6.82%</a:t>
+              <a:t>累计收益率：-7.85%</a:t>
             </a:r>
           </a:p>
           <a:p>
@@ -3271,7 +3271,7 @@
               <a:defRPr sz="1500"/>
             </a:pPr>
             <a:r>
-              <a:t>同期沪深300：-7.26%</a:t>
+              <a:t>同期沪深300：-8.40%</a:t>
             </a:r>
           </a:p>
           <a:p>
@@ -3279,7 +3279,7 @@
               <a:defRPr sz="1500"/>
             </a:pPr>
             <a:r>
-              <a:t>现金：189.08万元（40.6%）</a:t>
+              <a:t>现金：103.24万元（22.4%）</a:t>
             </a:r>
           </a:p>
           <a:p>
@@ -3287,7 +3287,7 @@
               <a:defRPr sz="1500"/>
             </a:pPr>
             <a:r>
-              <a:t>持仓：13只，累计交易38笔</a:t>
+              <a:t>持仓：13只，累计交易39笔</a:t>
             </a:r>
           </a:p>
         </p:txBody>
@@ -3821,37 +3821,37 @@
                         <a:defRPr sz="1100"/>
                       </a:pPr>
                       <a:r>
-                        <a:t>29.98</a:t>
-                      </a:r>
-                    </a:p>
-                  </a:txBody>
-                  <a:tcPr/>
-                </a:tc>
-                <a:tc>
-                  <a:txBody>
-                    <a:bodyPr/>
-                    <a:lstStyle/>
-                    <a:p>
-                      <a:pPr>
-                        <a:defRPr sz="1100"/>
-                      </a:pPr>
-                      <a:r>
-                        <a:t>115.72</a:t>
-                      </a:r>
-                    </a:p>
-                  </a:txBody>
-                  <a:tcPr/>
-                </a:tc>
-                <a:tc>
-                  <a:txBody>
-                    <a:bodyPr/>
-                    <a:lstStyle/>
-                    <a:p>
-                      <a:pPr>
-                        <a:defRPr sz="1100"/>
-                      </a:pPr>
-                      <a:r>
-                        <a:t>-0.26</a:t>
+                        <a:t>29.38</a:t>
+                      </a:r>
+                    </a:p>
+                  </a:txBody>
+                  <a:tcPr/>
+                </a:tc>
+                <a:tc>
+                  <a:txBody>
+                    <a:bodyPr/>
+                    <a:lstStyle/>
+                    <a:p>
+                      <a:pPr>
+                        <a:defRPr sz="1100"/>
+                      </a:pPr>
+                      <a:r>
+                        <a:t>113.41</a:t>
+                      </a:r>
+                    </a:p>
+                  </a:txBody>
+                  <a:tcPr/>
+                </a:tc>
+                <a:tc>
+                  <a:txBody>
+                    <a:bodyPr/>
+                    <a:lstStyle/>
+                    <a:p>
+                      <a:pPr>
+                        <a:defRPr sz="1100"/>
+                      </a:pPr>
+                      <a:r>
+                        <a:t>-2.57</a:t>
                       </a:r>
                     </a:p>
                   </a:txBody>
@@ -3883,67 +3883,67 @@
                         <a:defRPr sz="1100"/>
                       </a:pPr>
                       <a:r>
-                        <a:t>9300</a:t>
-                      </a:r>
-                    </a:p>
-                  </a:txBody>
-                  <a:tcPr/>
-                </a:tc>
-                <a:tc>
-                  <a:txBody>
-                    <a:bodyPr/>
-                    <a:lstStyle/>
-                    <a:p>
-                      <a:pPr>
-                        <a:defRPr sz="1100"/>
-                      </a:pPr>
-                      <a:r>
-                        <a:t>27.89</a:t>
-                      </a:r>
-                    </a:p>
-                  </a:txBody>
-                  <a:tcPr/>
-                </a:tc>
-                <a:tc>
-                  <a:txBody>
-                    <a:bodyPr/>
-                    <a:lstStyle/>
-                    <a:p>
-                      <a:pPr>
-                        <a:defRPr sz="1100"/>
-                      </a:pPr>
-                      <a:r>
-                        <a:t>29.45</a:t>
-                      </a:r>
-                    </a:p>
-                  </a:txBody>
-                  <a:tcPr/>
-                </a:tc>
-                <a:tc>
-                  <a:txBody>
-                    <a:bodyPr/>
-                    <a:lstStyle/>
-                    <a:p>
-                      <a:pPr>
-                        <a:defRPr sz="1100"/>
-                      </a:pPr>
-                      <a:r>
-                        <a:t>27.39</a:t>
-                      </a:r>
-                    </a:p>
-                  </a:txBody>
-                  <a:tcPr/>
-                </a:tc>
-                <a:tc>
-                  <a:txBody>
-                    <a:bodyPr/>
-                    <a:lstStyle/>
-                    <a:p>
-                      <a:pPr>
-                        <a:defRPr sz="1100"/>
-                      </a:pPr>
-                      <a:r>
-                        <a:t>1.46</a:t>
+                        <a:t>38300</a:t>
+                      </a:r>
+                    </a:p>
+                  </a:txBody>
+                  <a:tcPr/>
+                </a:tc>
+                <a:tc>
+                  <a:txBody>
+                    <a:bodyPr/>
+                    <a:lstStyle/>
+                    <a:p>
+                      <a:pPr>
+                        <a:defRPr sz="1100"/>
+                      </a:pPr>
+                      <a:r>
+                        <a:t>29.18</a:t>
+                      </a:r>
+                    </a:p>
+                  </a:txBody>
+                  <a:tcPr/>
+                </a:tc>
+                <a:tc>
+                  <a:txBody>
+                    <a:bodyPr/>
+                    <a:lstStyle/>
+                    <a:p>
+                      <a:pPr>
+                        <a:defRPr sz="1100"/>
+                      </a:pPr>
+                      <a:r>
+                        <a:t>29.6</a:t>
+                      </a:r>
+                    </a:p>
+                  </a:txBody>
+                  <a:tcPr/>
+                </a:tc>
+                <a:tc>
+                  <a:txBody>
+                    <a:bodyPr/>
+                    <a:lstStyle/>
+                    <a:p>
+                      <a:pPr>
+                        <a:defRPr sz="1100"/>
+                      </a:pPr>
+                      <a:r>
+                        <a:t>113.37</a:t>
+                      </a:r>
+                    </a:p>
+                  </a:txBody>
+                  <a:tcPr/>
+                </a:tc>
+                <a:tc>
+                  <a:txBody>
+                    <a:bodyPr/>
+                    <a:lstStyle/>
+                    <a:p>
+                      <a:pPr>
+                        <a:defRPr sz="1100"/>
+                      </a:pPr>
+                      <a:r>
+                        <a:t>1.59</a:t>
                       </a:r>
                     </a:p>
                   </a:txBody>
@@ -4005,37 +4005,37 @@
                         <a:defRPr sz="1100"/>
                       </a:pPr>
                       <a:r>
-                        <a:t>10.51</a:t>
-                      </a:r>
-                    </a:p>
-                  </a:txBody>
-                  <a:tcPr/>
-                </a:tc>
-                <a:tc>
-                  <a:txBody>
-                    <a:bodyPr/>
-                    <a:lstStyle/>
-                    <a:p>
-                      <a:pPr>
-                        <a:defRPr sz="1100"/>
-                      </a:pPr>
-                      <a:r>
-                        <a:t>9.98</a:t>
-                      </a:r>
-                    </a:p>
-                  </a:txBody>
-                  <a:tcPr/>
-                </a:tc>
-                <a:tc>
-                  <a:txBody>
-                    <a:bodyPr/>
-                    <a:lstStyle/>
-                    <a:p>
-                      <a:pPr>
-                        <a:defRPr sz="1100"/>
-                      </a:pPr>
-                      <a:r>
-                        <a:t>0.04</a:t>
+                        <a:t>9.86</a:t>
+                      </a:r>
+                    </a:p>
+                  </a:txBody>
+                  <a:tcPr/>
+                </a:tc>
+                <a:tc>
+                  <a:txBody>
+                    <a:bodyPr/>
+                    <a:lstStyle/>
+                    <a:p>
+                      <a:pPr>
+                        <a:defRPr sz="1100"/>
+                      </a:pPr>
+                      <a:r>
+                        <a:t>9.37</a:t>
+                      </a:r>
+                    </a:p>
+                  </a:txBody>
+                  <a:tcPr/>
+                </a:tc>
+                <a:tc>
+                  <a:txBody>
+                    <a:bodyPr/>
+                    <a:lstStyle/>
+                    <a:p>
+                      <a:pPr>
+                        <a:defRPr sz="1100"/>
+                      </a:pPr>
+                      <a:r>
+                        <a:t>-0.58</a:t>
                       </a:r>
                     </a:p>
                   </a:txBody>
@@ -4097,37 +4097,37 @@
                         <a:defRPr sz="1100"/>
                       </a:pPr>
                       <a:r>
-                        <a:t>15.85</a:t>
-                      </a:r>
-                    </a:p>
-                  </a:txBody>
-                  <a:tcPr/>
-                </a:tc>
-                <a:tc>
-                  <a:txBody>
-                    <a:bodyPr/>
-                    <a:lstStyle/>
-                    <a:p>
-                      <a:pPr>
-                        <a:defRPr sz="1100"/>
-                      </a:pPr>
-                      <a:r>
-                        <a:t>7.92</a:t>
-                      </a:r>
-                    </a:p>
-                  </a:txBody>
-                  <a:tcPr/>
-                </a:tc>
-                <a:tc>
-                  <a:txBody>
-                    <a:bodyPr/>
-                    <a:lstStyle/>
-                    <a:p>
-                      <a:pPr>
-                        <a:defRPr sz="1100"/>
-                      </a:pPr>
-                      <a:r>
-                        <a:t>-0.83</a:t>
+                        <a:t>15.42</a:t>
+                      </a:r>
+                    </a:p>
+                  </a:txBody>
+                  <a:tcPr/>
+                </a:tc>
+                <a:tc>
+                  <a:txBody>
+                    <a:bodyPr/>
+                    <a:lstStyle/>
+                    <a:p>
+                      <a:pPr>
+                        <a:defRPr sz="1100"/>
+                      </a:pPr>
+                      <a:r>
+                        <a:t>7.71</a:t>
+                      </a:r>
+                    </a:p>
+                  </a:txBody>
+                  <a:tcPr/>
+                </a:tc>
+                <a:tc>
+                  <a:txBody>
+                    <a:bodyPr/>
+                    <a:lstStyle/>
+                    <a:p>
+                      <a:pPr>
+                        <a:defRPr sz="1100"/>
+                      </a:pPr>
+                      <a:r>
+                        <a:t>-1.05</a:t>
                       </a:r>
                     </a:p>
                   </a:txBody>
@@ -4189,37 +4189,37 @@
                         <a:defRPr sz="1100"/>
                       </a:pPr>
                       <a:r>
-                        <a:t>27.95</a:t>
-                      </a:r>
-                    </a:p>
-                  </a:txBody>
-                  <a:tcPr/>
-                </a:tc>
-                <a:tc>
-                  <a:txBody>
-                    <a:bodyPr/>
-                    <a:lstStyle/>
-                    <a:p>
-                      <a:pPr>
-                        <a:defRPr sz="1100"/>
-                      </a:pPr>
-                      <a:r>
-                        <a:t>17.05</a:t>
-                      </a:r>
-                    </a:p>
-                  </a:txBody>
-                  <a:tcPr/>
-                </a:tc>
-                <a:tc>
-                  <a:txBody>
-                    <a:bodyPr/>
-                    <a:lstStyle/>
-                    <a:p>
-                      <a:pPr>
-                        <a:defRPr sz="1100"/>
-                      </a:pPr>
-                      <a:r>
-                        <a:t>-4.83</a:t>
+                        <a:t>26.4</a:t>
+                      </a:r>
+                    </a:p>
+                  </a:txBody>
+                  <a:tcPr/>
+                </a:tc>
+                <a:tc>
+                  <a:txBody>
+                    <a:bodyPr/>
+                    <a:lstStyle/>
+                    <a:p>
+                      <a:pPr>
+                        <a:defRPr sz="1100"/>
+                      </a:pPr>
+                      <a:r>
+                        <a:t>16.1</a:t>
+                      </a:r>
+                    </a:p>
+                  </a:txBody>
+                  <a:tcPr/>
+                </a:tc>
+                <a:tc>
+                  <a:txBody>
+                    <a:bodyPr/>
+                    <a:lstStyle/>
+                    <a:p>
+                      <a:pPr>
+                        <a:defRPr sz="1100"/>
+                      </a:pPr>
+                      <a:r>
+                        <a:t>-5.78</a:t>
                       </a:r>
                     </a:p>
                   </a:txBody>
@@ -4281,37 +4281,37 @@
                         <a:defRPr sz="1100"/>
                       </a:pPr>
                       <a:r>
-                        <a:t>135.5</a:t>
-                      </a:r>
-                    </a:p>
-                  </a:txBody>
-                  <a:tcPr/>
-                </a:tc>
-                <a:tc>
-                  <a:txBody>
-                    <a:bodyPr/>
-                    <a:lstStyle/>
-                    <a:p>
-                      <a:pPr>
-                        <a:defRPr sz="1100"/>
-                      </a:pPr>
-                      <a:r>
-                        <a:t>6.78</a:t>
-                      </a:r>
-                    </a:p>
-                  </a:txBody>
-                  <a:tcPr/>
-                </a:tc>
-                <a:tc>
-                  <a:txBody>
-                    <a:bodyPr/>
-                    <a:lstStyle/>
-                    <a:p>
-                      <a:pPr>
-                        <a:defRPr sz="1100"/>
-                      </a:pPr>
-                      <a:r>
-                        <a:t>-0.06</a:t>
+                        <a:t>131.0</a:t>
+                      </a:r>
+                    </a:p>
+                  </a:txBody>
+                  <a:tcPr/>
+                </a:tc>
+                <a:tc>
+                  <a:txBody>
+                    <a:bodyPr/>
+                    <a:lstStyle/>
+                    <a:p>
+                      <a:pPr>
+                        <a:defRPr sz="1100"/>
+                      </a:pPr>
+                      <a:r>
+                        <a:t>6.55</a:t>
+                      </a:r>
+                    </a:p>
+                  </a:txBody>
+                  <a:tcPr/>
+                </a:tc>
+                <a:tc>
+                  <a:txBody>
+                    <a:bodyPr/>
+                    <a:lstStyle/>
+                    <a:p>
+                      <a:pPr>
+                        <a:defRPr sz="1100"/>
+                      </a:pPr>
+                      <a:r>
+                        <a:t>-0.29</a:t>
                       </a:r>
                     </a:p>
                   </a:txBody>
@@ -4373,37 +4373,37 @@
                         <a:defRPr sz="1100"/>
                       </a:pPr>
                       <a:r>
-                        <a:t>6.16</a:t>
-                      </a:r>
-                    </a:p>
-                  </a:txBody>
-                  <a:tcPr/>
-                </a:tc>
-                <a:tc>
-                  <a:txBody>
-                    <a:bodyPr/>
-                    <a:lstStyle/>
-                    <a:p>
-                      <a:pPr>
-                        <a:defRPr sz="1100"/>
-                      </a:pPr>
-                      <a:r>
-                        <a:t>3.08</a:t>
-                      </a:r>
-                    </a:p>
-                  </a:txBody>
-                  <a:tcPr/>
-                </a:tc>
-                <a:tc>
-                  <a:txBody>
-                    <a:bodyPr/>
-                    <a:lstStyle/>
-                    <a:p>
-                      <a:pPr>
-                        <a:defRPr sz="1100"/>
-                      </a:pPr>
-                      <a:r>
-                        <a:t>-0.58</a:t>
+                        <a:t>6.19</a:t>
+                      </a:r>
+                    </a:p>
+                  </a:txBody>
+                  <a:tcPr/>
+                </a:tc>
+                <a:tc>
+                  <a:txBody>
+                    <a:bodyPr/>
+                    <a:lstStyle/>
+                    <a:p>
+                      <a:pPr>
+                        <a:defRPr sz="1100"/>
+                      </a:pPr>
+                      <a:r>
+                        <a:t>3.1</a:t>
+                      </a:r>
+                    </a:p>
+                  </a:txBody>
+                  <a:tcPr/>
+                </a:tc>
+                <a:tc>
+                  <a:txBody>
+                    <a:bodyPr/>
+                    <a:lstStyle/>
+                    <a:p>
+                      <a:pPr>
+                        <a:defRPr sz="1100"/>
+                      </a:pPr>
+                      <a:r>
+                        <a:t>-0.57</a:t>
                       </a:r>
                     </a:p>
                   </a:txBody>
@@ -4465,37 +4465,37 @@
                         <a:defRPr sz="1100"/>
                       </a:pPr>
                       <a:r>
-                        <a:t>21.48</a:t>
-                      </a:r>
-                    </a:p>
-                  </a:txBody>
-                  <a:tcPr/>
-                </a:tc>
-                <a:tc>
-                  <a:txBody>
-                    <a:bodyPr/>
-                    <a:lstStyle/>
-                    <a:p>
-                      <a:pPr>
-                        <a:defRPr sz="1100"/>
-                      </a:pPr>
-                      <a:r>
-                        <a:t>1.07</a:t>
-                      </a:r>
-                    </a:p>
-                  </a:txBody>
-                  <a:tcPr/>
-                </a:tc>
-                <a:tc>
-                  <a:txBody>
-                    <a:bodyPr/>
-                    <a:lstStyle/>
-                    <a:p>
-                      <a:pPr>
-                        <a:defRPr sz="1100"/>
-                      </a:pPr>
-                      <a:r>
-                        <a:t>0.04</a:t>
+                        <a:t>19.33</a:t>
+                      </a:r>
+                    </a:p>
+                  </a:txBody>
+                  <a:tcPr/>
+                </a:tc>
+                <a:tc>
+                  <a:txBody>
+                    <a:bodyPr/>
+                    <a:lstStyle/>
+                    <a:p>
+                      <a:pPr>
+                        <a:defRPr sz="1100"/>
+                      </a:pPr>
+                      <a:r>
+                        <a:t>0.97</a:t>
+                      </a:r>
+                    </a:p>
+                  </a:txBody>
+                  <a:tcPr/>
+                </a:tc>
+                <a:tc>
+                  <a:txBody>
+                    <a:bodyPr/>
+                    <a:lstStyle/>
+                    <a:p>
+                      <a:pPr>
+                        <a:defRPr sz="1100"/>
+                      </a:pPr>
+                      <a:r>
+                        <a:t>-0.07</a:t>
                       </a:r>
                     </a:p>
                   </a:txBody>
@@ -4557,37 +4557,37 @@
                         <a:defRPr sz="1100"/>
                       </a:pPr>
                       <a:r>
-                        <a:t>173.5</a:t>
-                      </a:r>
-                    </a:p>
-                  </a:txBody>
-                  <a:tcPr/>
-                </a:tc>
-                <a:tc>
-                  <a:txBody>
-                    <a:bodyPr/>
-                    <a:lstStyle/>
-                    <a:p>
-                      <a:pPr>
-                        <a:defRPr sz="1100"/>
-                      </a:pPr>
-                      <a:r>
-                        <a:t>17.35</a:t>
-                      </a:r>
-                    </a:p>
-                  </a:txBody>
-                  <a:tcPr/>
-                </a:tc>
-                <a:tc>
-                  <a:txBody>
-                    <a:bodyPr/>
-                    <a:lstStyle/>
-                    <a:p>
-                      <a:pPr>
-                        <a:defRPr sz="1100"/>
-                      </a:pPr>
-                      <a:r>
-                        <a:t>-0.41</a:t>
+                        <a:t>167.52</a:t>
+                      </a:r>
+                    </a:p>
+                  </a:txBody>
+                  <a:tcPr/>
+                </a:tc>
+                <a:tc>
+                  <a:txBody>
+                    <a:bodyPr/>
+                    <a:lstStyle/>
+                    <a:p>
+                      <a:pPr>
+                        <a:defRPr sz="1100"/>
+                      </a:pPr>
+                      <a:r>
+                        <a:t>16.75</a:t>
+                      </a:r>
+                    </a:p>
+                  </a:txBody>
+                  <a:tcPr/>
+                </a:tc>
+                <a:tc>
+                  <a:txBody>
+                    <a:bodyPr/>
+                    <a:lstStyle/>
+                    <a:p>
+                      <a:pPr>
+                        <a:defRPr sz="1100"/>
+                      </a:pPr>
+                      <a:r>
+                        <a:t>-1.01</a:t>
                       </a:r>
                     </a:p>
                   </a:txBody>
@@ -4649,37 +4649,37 @@
                         <a:defRPr sz="1100"/>
                       </a:pPr>
                       <a:r>
-                        <a:t>154.18</a:t>
-                      </a:r>
-                    </a:p>
-                  </a:txBody>
-                  <a:tcPr/>
-                </a:tc>
-                <a:tc>
-                  <a:txBody>
-                    <a:bodyPr/>
-                    <a:lstStyle/>
-                    <a:p>
-                      <a:pPr>
-                        <a:defRPr sz="1100"/>
-                      </a:pPr>
-                      <a:r>
-                        <a:t>20.04</a:t>
-                      </a:r>
-                    </a:p>
-                  </a:txBody>
-                  <a:tcPr/>
-                </a:tc>
-                <a:tc>
-                  <a:txBody>
-                    <a:bodyPr/>
-                    <a:lstStyle/>
-                    <a:p>
-                      <a:pPr>
-                        <a:defRPr sz="1100"/>
-                      </a:pPr>
-                      <a:r>
-                        <a:t>-0.51</a:t>
+                        <a:t>154.5</a:t>
+                      </a:r>
+                    </a:p>
+                  </a:txBody>
+                  <a:tcPr/>
+                </a:tc>
+                <a:tc>
+                  <a:txBody>
+                    <a:bodyPr/>
+                    <a:lstStyle/>
+                    <a:p>
+                      <a:pPr>
+                        <a:defRPr sz="1100"/>
+                      </a:pPr>
+                      <a:r>
+                        <a:t>20.09</a:t>
+                      </a:r>
+                    </a:p>
+                  </a:txBody>
+                  <a:tcPr/>
+                </a:tc>
+                <a:tc>
+                  <a:txBody>
+                    <a:bodyPr/>
+                    <a:lstStyle/>
+                    <a:p>
+                      <a:pPr>
+                        <a:defRPr sz="1100"/>
+                      </a:pPr>
+                      <a:r>
+                        <a:t>-0.47</a:t>
                       </a:r>
                     </a:p>
                   </a:txBody>
@@ -4741,37 +4741,37 @@
                         <a:defRPr sz="1100"/>
                       </a:pPr>
                       <a:r>
-                        <a:t>40.0</a:t>
-                      </a:r>
-                    </a:p>
-                  </a:txBody>
-                  <a:tcPr/>
-                </a:tc>
-                <a:tc>
-                  <a:txBody>
-                    <a:bodyPr/>
-                    <a:lstStyle/>
-                    <a:p>
-                      <a:pPr>
-                        <a:defRPr sz="1100"/>
-                      </a:pPr>
-                      <a:r>
-                        <a:t>4.0</a:t>
-                      </a:r>
-                    </a:p>
-                  </a:txBody>
-                  <a:tcPr/>
-                </a:tc>
-                <a:tc>
-                  <a:txBody>
-                    <a:bodyPr/>
-                    <a:lstStyle/>
-                    <a:p>
-                      <a:pPr>
-                        <a:defRPr sz="1100"/>
-                      </a:pPr>
-                      <a:r>
-                        <a:t>-0.26</a:t>
+                        <a:t>39.05</a:t>
+                      </a:r>
+                    </a:p>
+                  </a:txBody>
+                  <a:tcPr/>
+                </a:tc>
+                <a:tc>
+                  <a:txBody>
+                    <a:bodyPr/>
+                    <a:lstStyle/>
+                    <a:p>
+                      <a:pPr>
+                        <a:defRPr sz="1100"/>
+                      </a:pPr>
+                      <a:r>
+                        <a:t>3.9</a:t>
+                      </a:r>
+                    </a:p>
+                  </a:txBody>
+                  <a:tcPr/>
+                </a:tc>
+                <a:tc>
+                  <a:txBody>
+                    <a:bodyPr/>
+                    <a:lstStyle/>
+                    <a:p>
+                      <a:pPr>
+                        <a:defRPr sz="1100"/>
+                      </a:pPr>
+                      <a:r>
+                        <a:t>-0.36</a:t>
                       </a:r>
                     </a:p>
                   </a:txBody>
@@ -4833,37 +4833,37 @@
                         <a:defRPr sz="1100"/>
                       </a:pPr>
                       <a:r>
-                        <a:t>39.0</a:t>
-                      </a:r>
-                    </a:p>
-                  </a:txBody>
-                  <a:tcPr/>
-                </a:tc>
-                <a:tc>
-                  <a:txBody>
-                    <a:bodyPr/>
-                    <a:lstStyle/>
-                    <a:p>
-                      <a:pPr>
-                        <a:defRPr sz="1100"/>
-                      </a:pPr>
-                      <a:r>
-                        <a:t>15.6</a:t>
-                      </a:r>
-                    </a:p>
-                  </a:txBody>
-                  <a:tcPr/>
-                </a:tc>
-                <a:tc>
-                  <a:txBody>
-                    <a:bodyPr/>
-                    <a:lstStyle/>
-                    <a:p>
-                      <a:pPr>
-                        <a:defRPr sz="1100"/>
-                      </a:pPr>
-                      <a:r>
-                        <a:t>-1.82</a:t>
+                        <a:t>38.85</a:t>
+                      </a:r>
+                    </a:p>
+                  </a:txBody>
+                  <a:tcPr/>
+                </a:tc>
+                <a:tc>
+                  <a:txBody>
+                    <a:bodyPr/>
+                    <a:lstStyle/>
+                    <a:p>
+                      <a:pPr>
+                        <a:defRPr sz="1100"/>
+                      </a:pPr>
+                      <a:r>
+                        <a:t>15.54</a:t>
+                      </a:r>
+                    </a:p>
+                  </a:txBody>
+                  <a:tcPr/>
+                </a:tc>
+                <a:tc>
+                  <a:txBody>
+                    <a:bodyPr/>
+                    <a:lstStyle/>
+                    <a:p>
+                      <a:pPr>
+                        <a:defRPr sz="1100"/>
+                      </a:pPr>
+                      <a:r>
+                        <a:t>-1.88</a:t>
                       </a:r>
                     </a:p>
                   </a:txBody>
@@ -4925,37 +4925,37 @@
                         <a:defRPr sz="1100"/>
                       </a:pPr>
                       <a:r>
-                        <a:t>280.12</a:t>
-                      </a:r>
-                    </a:p>
-                  </a:txBody>
-                  <a:tcPr/>
-                </a:tc>
-                <a:tc>
-                  <a:txBody>
-                    <a:bodyPr/>
-                    <a:lstStyle/>
-                    <a:p>
-                      <a:pPr>
-                        <a:defRPr sz="1100"/>
-                      </a:pPr>
-                      <a:r>
-                        <a:t>30.81</a:t>
-                      </a:r>
-                    </a:p>
-                  </a:txBody>
-                  <a:tcPr/>
-                </a:tc>
-                <a:tc>
-                  <a:txBody>
-                    <a:bodyPr/>
-                    <a:lstStyle/>
-                    <a:p>
-                      <a:pPr>
-                        <a:defRPr sz="1100"/>
-                      </a:pPr>
-                      <a:r>
-                        <a:t>-0.73</a:t>
+                        <a:t>278.5</a:t>
+                      </a:r>
+                    </a:p>
+                  </a:txBody>
+                  <a:tcPr/>
+                </a:tc>
+                <a:tc>
+                  <a:txBody>
+                    <a:bodyPr/>
+                    <a:lstStyle/>
+                    <a:p>
+                      <a:pPr>
+                        <a:defRPr sz="1100"/>
+                      </a:pPr>
+                      <a:r>
+                        <a:t>30.64</a:t>
+                      </a:r>
+                    </a:p>
+                  </a:txBody>
+                  <a:tcPr/>
+                </a:tc>
+                <a:tc>
+                  <a:txBody>
+                    <a:bodyPr/>
+                    <a:lstStyle/>
+                    <a:p>
+                      <a:pPr>
+                        <a:defRPr sz="1100"/>
+                      </a:pPr>
+                      <a:r>
+                        <a:t>-0.91</a:t>
                       </a:r>
                     </a:p>
                   </a:txBody>
@@ -5041,7 +5041,7 @@
               <a:defRPr sz="1500"/>
             </a:pPr>
             <a:r>
-              <a:t>紫金矿业（601899，有色金属）：综合73.0分；基本面优秀，具备中长期配置价值；趋势中性，观望。</a:t>
+              <a:t>紫金矿业（601899，有色金属）：综合72.5分；基本面优秀，具备中长期配置价值；趋势中性，观望。</a:t>
             </a:r>
           </a:p>
           <a:p>
@@ -5057,7 +5057,7 @@
               <a:defRPr sz="1500"/>
             </a:pPr>
             <a:r>
-              <a:t>招商银行（600036，银行）：综合69.0分；基本面优秀，具备中长期配置价值；中期趋势向上，可关注/持有。</a:t>
+              <a:t>宁德时代（300750，新能源电池）：综合71.0分；基本面优秀，具备中长期配置价值；趋势中性，观望。</a:t>
             </a:r>
           </a:p>
           <a:p>
@@ -5065,7 +5065,7 @@
               <a:defRPr sz="1500"/>
             </a:pPr>
             <a:r>
-              <a:t>宁德时代（300750，新能源电池）：综合68.5分；基本面优秀，具备中长期配置价值；趋势中性，观望。</a:t>
+              <a:t>立讯精密（002475，消费电子）：综合69.0分；基本面优秀，具备中长期配置价值；趋势中性，观望。</a:t>
             </a:r>
           </a:p>
           <a:p>
@@ -5073,7 +5073,7 @@
               <a:defRPr sz="1500"/>
             </a:pPr>
             <a:r>
-              <a:t>立讯精密（002475，消费电子）：综合67.0分；基本面优秀，具备中长期配置价值；趋势中性，观望。</a:t>
+              <a:t>招商银行（600036，银行）：综合67.0分；基本面优秀，具备中长期配置价值；中期趋势向上，可关注/持有。</a:t>
             </a:r>
           </a:p>
         </p:txBody>

--- a/outputs/12_中期路演.pptx
+++ b/outputs/12_中期路演.pptx
@@ -3167,7 +3167,7 @@
               <a:defRPr sz="1500"/>
             </a:pPr>
             <a:r>
-              <a:t>数据截止：2026-10-15</a:t>
+              <a:t>数据截止：2026-10-16</a:t>
             </a:r>
           </a:p>
         </p:txBody>
@@ -3255,7 +3255,7 @@
               <a:defRPr sz="1500"/>
             </a:pPr>
             <a:r>
-              <a:t>当前总资产：460.73万元</a:t>
+              <a:t>当前总资产：459.87万元</a:t>
             </a:r>
           </a:p>
           <a:p>
@@ -3263,7 +3263,7 @@
               <a:defRPr sz="1500"/>
             </a:pPr>
             <a:r>
-              <a:t>累计收益率：-7.85%</a:t>
+              <a:t>累计收益率：-8.03%</a:t>
             </a:r>
           </a:p>
           <a:p>
@@ -3271,7 +3271,7 @@
               <a:defRPr sz="1500"/>
             </a:pPr>
             <a:r>
-              <a:t>同期沪深300：-8.40%</a:t>
+              <a:t>同期沪深300：-8.30%</a:t>
             </a:r>
           </a:p>
           <a:p>
@@ -3279,7 +3279,7 @@
               <a:defRPr sz="1500"/>
             </a:pPr>
             <a:r>
-              <a:t>现金：103.24万元（22.4%）</a:t>
+              <a:t>现金：103.24万元（22.5%）</a:t>
             </a:r>
           </a:p>
           <a:p>
@@ -3821,37 +3821,37 @@
                         <a:defRPr sz="1100"/>
                       </a:pPr>
                       <a:r>
-                        <a:t>29.38</a:t>
-                      </a:r>
-                    </a:p>
-                  </a:txBody>
-                  <a:tcPr/>
-                </a:tc>
-                <a:tc>
-                  <a:txBody>
-                    <a:bodyPr/>
-                    <a:lstStyle/>
-                    <a:p>
-                      <a:pPr>
-                        <a:defRPr sz="1100"/>
-                      </a:pPr>
-                      <a:r>
-                        <a:t>113.41</a:t>
-                      </a:r>
-                    </a:p>
-                  </a:txBody>
-                  <a:tcPr/>
-                </a:tc>
-                <a:tc>
-                  <a:txBody>
-                    <a:bodyPr/>
-                    <a:lstStyle/>
-                    <a:p>
-                      <a:pPr>
-                        <a:defRPr sz="1100"/>
-                      </a:pPr>
-                      <a:r>
-                        <a:t>-2.57</a:t>
+                        <a:t>29.92</a:t>
+                      </a:r>
+                    </a:p>
+                  </a:txBody>
+                  <a:tcPr/>
+                </a:tc>
+                <a:tc>
+                  <a:txBody>
+                    <a:bodyPr/>
+                    <a:lstStyle/>
+                    <a:p>
+                      <a:pPr>
+                        <a:defRPr sz="1100"/>
+                      </a:pPr>
+                      <a:r>
+                        <a:t>115.49</a:t>
+                      </a:r>
+                    </a:p>
+                  </a:txBody>
+                  <a:tcPr/>
+                </a:tc>
+                <a:tc>
+                  <a:txBody>
+                    <a:bodyPr/>
+                    <a:lstStyle/>
+                    <a:p>
+                      <a:pPr>
+                        <a:defRPr sz="1100"/>
+                      </a:pPr>
+                      <a:r>
+                        <a:t>-0.49</a:t>
                       </a:r>
                     </a:p>
                   </a:txBody>
@@ -3913,37 +3913,37 @@
                         <a:defRPr sz="1100"/>
                       </a:pPr>
                       <a:r>
-                        <a:t>29.6</a:t>
-                      </a:r>
-                    </a:p>
-                  </a:txBody>
-                  <a:tcPr/>
-                </a:tc>
-                <a:tc>
-                  <a:txBody>
-                    <a:bodyPr/>
-                    <a:lstStyle/>
-                    <a:p>
-                      <a:pPr>
-                        <a:defRPr sz="1100"/>
-                      </a:pPr>
-                      <a:r>
-                        <a:t>113.37</a:t>
-                      </a:r>
-                    </a:p>
-                  </a:txBody>
-                  <a:tcPr/>
-                </a:tc>
-                <a:tc>
-                  <a:txBody>
-                    <a:bodyPr/>
-                    <a:lstStyle/>
-                    <a:p>
-                      <a:pPr>
-                        <a:defRPr sz="1100"/>
-                      </a:pPr>
-                      <a:r>
-                        <a:t>1.59</a:t>
+                        <a:t>29.38</a:t>
+                      </a:r>
+                    </a:p>
+                  </a:txBody>
+                  <a:tcPr/>
+                </a:tc>
+                <a:tc>
+                  <a:txBody>
+                    <a:bodyPr/>
+                    <a:lstStyle/>
+                    <a:p>
+                      <a:pPr>
+                        <a:defRPr sz="1100"/>
+                      </a:pPr>
+                      <a:r>
+                        <a:t>112.53</a:t>
+                      </a:r>
+                    </a:p>
+                  </a:txBody>
+                  <a:tcPr/>
+                </a:tc>
+                <a:tc>
+                  <a:txBody>
+                    <a:bodyPr/>
+                    <a:lstStyle/>
+                    <a:p>
+                      <a:pPr>
+                        <a:defRPr sz="1100"/>
+                      </a:pPr>
+                      <a:r>
+                        <a:t>0.75</a:t>
                       </a:r>
                     </a:p>
                   </a:txBody>
@@ -4005,37 +4005,37 @@
                         <a:defRPr sz="1100"/>
                       </a:pPr>
                       <a:r>
-                        <a:t>9.86</a:t>
-                      </a:r>
-                    </a:p>
-                  </a:txBody>
-                  <a:tcPr/>
-                </a:tc>
-                <a:tc>
-                  <a:txBody>
-                    <a:bodyPr/>
-                    <a:lstStyle/>
-                    <a:p>
-                      <a:pPr>
-                        <a:defRPr sz="1100"/>
-                      </a:pPr>
-                      <a:r>
-                        <a:t>9.37</a:t>
-                      </a:r>
-                    </a:p>
-                  </a:txBody>
-                  <a:tcPr/>
-                </a:tc>
-                <a:tc>
-                  <a:txBody>
-                    <a:bodyPr/>
-                    <a:lstStyle/>
-                    <a:p>
-                      <a:pPr>
-                        <a:defRPr sz="1100"/>
-                      </a:pPr>
-                      <a:r>
-                        <a:t>-0.58</a:t>
+                        <a:t>10.21</a:t>
+                      </a:r>
+                    </a:p>
+                  </a:txBody>
+                  <a:tcPr/>
+                </a:tc>
+                <a:tc>
+                  <a:txBody>
+                    <a:bodyPr/>
+                    <a:lstStyle/>
+                    <a:p>
+                      <a:pPr>
+                        <a:defRPr sz="1100"/>
+                      </a:pPr>
+                      <a:r>
+                        <a:t>9.7</a:t>
+                      </a:r>
+                    </a:p>
+                  </a:txBody>
+                  <a:tcPr/>
+                </a:tc>
+                <a:tc>
+                  <a:txBody>
+                    <a:bodyPr/>
+                    <a:lstStyle/>
+                    <a:p>
+                      <a:pPr>
+                        <a:defRPr sz="1100"/>
+                      </a:pPr>
+                      <a:r>
+                        <a:t>-0.25</a:t>
                       </a:r>
                     </a:p>
                   </a:txBody>
@@ -4097,37 +4097,37 @@
                         <a:defRPr sz="1100"/>
                       </a:pPr>
                       <a:r>
-                        <a:t>15.42</a:t>
-                      </a:r>
-                    </a:p>
-                  </a:txBody>
-                  <a:tcPr/>
-                </a:tc>
-                <a:tc>
-                  <a:txBody>
-                    <a:bodyPr/>
-                    <a:lstStyle/>
-                    <a:p>
-                      <a:pPr>
-                        <a:defRPr sz="1100"/>
-                      </a:pPr>
-                      <a:r>
-                        <a:t>7.71</a:t>
-                      </a:r>
-                    </a:p>
-                  </a:txBody>
-                  <a:tcPr/>
-                </a:tc>
-                <a:tc>
-                  <a:txBody>
-                    <a:bodyPr/>
-                    <a:lstStyle/>
-                    <a:p>
-                      <a:pPr>
-                        <a:defRPr sz="1100"/>
-                      </a:pPr>
-                      <a:r>
-                        <a:t>-1.05</a:t>
+                        <a:t>15.12</a:t>
+                      </a:r>
+                    </a:p>
+                  </a:txBody>
+                  <a:tcPr/>
+                </a:tc>
+                <a:tc>
+                  <a:txBody>
+                    <a:bodyPr/>
+                    <a:lstStyle/>
+                    <a:p>
+                      <a:pPr>
+                        <a:defRPr sz="1100"/>
+                      </a:pPr>
+                      <a:r>
+                        <a:t>7.56</a:t>
+                      </a:r>
+                    </a:p>
+                  </a:txBody>
+                  <a:tcPr/>
+                </a:tc>
+                <a:tc>
+                  <a:txBody>
+                    <a:bodyPr/>
+                    <a:lstStyle/>
+                    <a:p>
+                      <a:pPr>
+                        <a:defRPr sz="1100"/>
+                      </a:pPr>
+                      <a:r>
+                        <a:t>-1.2</a:t>
                       </a:r>
                     </a:p>
                   </a:txBody>
@@ -4189,37 +4189,37 @@
                         <a:defRPr sz="1100"/>
                       </a:pPr>
                       <a:r>
-                        <a:t>26.4</a:t>
-                      </a:r>
-                    </a:p>
-                  </a:txBody>
-                  <a:tcPr/>
-                </a:tc>
-                <a:tc>
-                  <a:txBody>
-                    <a:bodyPr/>
-                    <a:lstStyle/>
-                    <a:p>
-                      <a:pPr>
-                        <a:defRPr sz="1100"/>
-                      </a:pPr>
-                      <a:r>
-                        <a:t>16.1</a:t>
-                      </a:r>
-                    </a:p>
-                  </a:txBody>
-                  <a:tcPr/>
-                </a:tc>
-                <a:tc>
-                  <a:txBody>
-                    <a:bodyPr/>
-                    <a:lstStyle/>
-                    <a:p>
-                      <a:pPr>
-                        <a:defRPr sz="1100"/>
-                      </a:pPr>
-                      <a:r>
-                        <a:t>-5.78</a:t>
+                        <a:t>25.78</a:t>
+                      </a:r>
+                    </a:p>
+                  </a:txBody>
+                  <a:tcPr/>
+                </a:tc>
+                <a:tc>
+                  <a:txBody>
+                    <a:bodyPr/>
+                    <a:lstStyle/>
+                    <a:p>
+                      <a:pPr>
+                        <a:defRPr sz="1100"/>
+                      </a:pPr>
+                      <a:r>
+                        <a:t>15.73</a:t>
+                      </a:r>
+                    </a:p>
+                  </a:txBody>
+                  <a:tcPr/>
+                </a:tc>
+                <a:tc>
+                  <a:txBody>
+                    <a:bodyPr/>
+                    <a:lstStyle/>
+                    <a:p>
+                      <a:pPr>
+                        <a:defRPr sz="1100"/>
+                      </a:pPr>
+                      <a:r>
+                        <a:t>-6.15</a:t>
                       </a:r>
                     </a:p>
                   </a:txBody>
@@ -4281,37 +4281,37 @@
                         <a:defRPr sz="1100"/>
                       </a:pPr>
                       <a:r>
-                        <a:t>131.0</a:t>
-                      </a:r>
-                    </a:p>
-                  </a:txBody>
-                  <a:tcPr/>
-                </a:tc>
-                <a:tc>
-                  <a:txBody>
-                    <a:bodyPr/>
-                    <a:lstStyle/>
-                    <a:p>
-                      <a:pPr>
-                        <a:defRPr sz="1100"/>
-                      </a:pPr>
-                      <a:r>
-                        <a:t>6.55</a:t>
-                      </a:r>
-                    </a:p>
-                  </a:txBody>
-                  <a:tcPr/>
-                </a:tc>
-                <a:tc>
-                  <a:txBody>
-                    <a:bodyPr/>
-                    <a:lstStyle/>
-                    <a:p>
-                      <a:pPr>
-                        <a:defRPr sz="1100"/>
-                      </a:pPr>
-                      <a:r>
-                        <a:t>-0.29</a:t>
+                        <a:t>125.12</a:t>
+                      </a:r>
+                    </a:p>
+                  </a:txBody>
+                  <a:tcPr/>
+                </a:tc>
+                <a:tc>
+                  <a:txBody>
+                    <a:bodyPr/>
+                    <a:lstStyle/>
+                    <a:p>
+                      <a:pPr>
+                        <a:defRPr sz="1100"/>
+                      </a:pPr>
+                      <a:r>
+                        <a:t>6.26</a:t>
+                      </a:r>
+                    </a:p>
+                  </a:txBody>
+                  <a:tcPr/>
+                </a:tc>
+                <a:tc>
+                  <a:txBody>
+                    <a:bodyPr/>
+                    <a:lstStyle/>
+                    <a:p>
+                      <a:pPr>
+                        <a:defRPr sz="1100"/>
+                      </a:pPr>
+                      <a:r>
+                        <a:t>-0.58</a:t>
                       </a:r>
                     </a:p>
                   </a:txBody>
@@ -4373,37 +4373,37 @@
                         <a:defRPr sz="1100"/>
                       </a:pPr>
                       <a:r>
-                        <a:t>6.19</a:t>
-                      </a:r>
-                    </a:p>
-                  </a:txBody>
-                  <a:tcPr/>
-                </a:tc>
-                <a:tc>
-                  <a:txBody>
-                    <a:bodyPr/>
-                    <a:lstStyle/>
-                    <a:p>
-                      <a:pPr>
-                        <a:defRPr sz="1100"/>
-                      </a:pPr>
-                      <a:r>
-                        <a:t>3.1</a:t>
-                      </a:r>
-                    </a:p>
-                  </a:txBody>
-                  <a:tcPr/>
-                </a:tc>
-                <a:tc>
-                  <a:txBody>
-                    <a:bodyPr/>
-                    <a:lstStyle/>
-                    <a:p>
-                      <a:pPr>
-                        <a:defRPr sz="1100"/>
-                      </a:pPr>
-                      <a:r>
-                        <a:t>-0.57</a:t>
+                        <a:t>6.32</a:t>
+                      </a:r>
+                    </a:p>
+                  </a:txBody>
+                  <a:tcPr/>
+                </a:tc>
+                <a:tc>
+                  <a:txBody>
+                    <a:bodyPr/>
+                    <a:lstStyle/>
+                    <a:p>
+                      <a:pPr>
+                        <a:defRPr sz="1100"/>
+                      </a:pPr>
+                      <a:r>
+                        <a:t>3.16</a:t>
+                      </a:r>
+                    </a:p>
+                  </a:txBody>
+                  <a:tcPr/>
+                </a:tc>
+                <a:tc>
+                  <a:txBody>
+                    <a:bodyPr/>
+                    <a:lstStyle/>
+                    <a:p>
+                      <a:pPr>
+                        <a:defRPr sz="1100"/>
+                      </a:pPr>
+                      <a:r>
+                        <a:t>-0.5</a:t>
                       </a:r>
                     </a:p>
                   </a:txBody>
@@ -4465,37 +4465,37 @@
                         <a:defRPr sz="1100"/>
                       </a:pPr>
                       <a:r>
-                        <a:t>19.33</a:t>
-                      </a:r>
-                    </a:p>
-                  </a:txBody>
-                  <a:tcPr/>
-                </a:tc>
-                <a:tc>
-                  <a:txBody>
-                    <a:bodyPr/>
-                    <a:lstStyle/>
-                    <a:p>
-                      <a:pPr>
-                        <a:defRPr sz="1100"/>
-                      </a:pPr>
-                      <a:r>
-                        <a:t>0.97</a:t>
-                      </a:r>
-                    </a:p>
-                  </a:txBody>
-                  <a:tcPr/>
-                </a:tc>
-                <a:tc>
-                  <a:txBody>
-                    <a:bodyPr/>
-                    <a:lstStyle/>
-                    <a:p>
-                      <a:pPr>
-                        <a:defRPr sz="1100"/>
-                      </a:pPr>
-                      <a:r>
-                        <a:t>-0.07</a:t>
+                        <a:t>18.19</a:t>
+                      </a:r>
+                    </a:p>
+                  </a:txBody>
+                  <a:tcPr/>
+                </a:tc>
+                <a:tc>
+                  <a:txBody>
+                    <a:bodyPr/>
+                    <a:lstStyle/>
+                    <a:p>
+                      <a:pPr>
+                        <a:defRPr sz="1100"/>
+                      </a:pPr>
+                      <a:r>
+                        <a:t>0.91</a:t>
+                      </a:r>
+                    </a:p>
+                  </a:txBody>
+                  <a:tcPr/>
+                </a:tc>
+                <a:tc>
+                  <a:txBody>
+                    <a:bodyPr/>
+                    <a:lstStyle/>
+                    <a:p>
+                      <a:pPr>
+                        <a:defRPr sz="1100"/>
+                      </a:pPr>
+                      <a:r>
+                        <a:t>-0.13</a:t>
                       </a:r>
                     </a:p>
                   </a:txBody>
@@ -4557,37 +4557,37 @@
                         <a:defRPr sz="1100"/>
                       </a:pPr>
                       <a:r>
-                        <a:t>167.52</a:t>
-                      </a:r>
-                    </a:p>
-                  </a:txBody>
-                  <a:tcPr/>
-                </a:tc>
-                <a:tc>
-                  <a:txBody>
-                    <a:bodyPr/>
-                    <a:lstStyle/>
-                    <a:p>
-                      <a:pPr>
-                        <a:defRPr sz="1100"/>
-                      </a:pPr>
-                      <a:r>
-                        <a:t>16.75</a:t>
-                      </a:r>
-                    </a:p>
-                  </a:txBody>
-                  <a:tcPr/>
-                </a:tc>
-                <a:tc>
-                  <a:txBody>
-                    <a:bodyPr/>
-                    <a:lstStyle/>
-                    <a:p>
-                      <a:pPr>
-                        <a:defRPr sz="1100"/>
-                      </a:pPr>
-                      <a:r>
-                        <a:t>-1.01</a:t>
+                        <a:t>164.77</a:t>
+                      </a:r>
+                    </a:p>
+                  </a:txBody>
+                  <a:tcPr/>
+                </a:tc>
+                <a:tc>
+                  <a:txBody>
+                    <a:bodyPr/>
+                    <a:lstStyle/>
+                    <a:p>
+                      <a:pPr>
+                        <a:defRPr sz="1100"/>
+                      </a:pPr>
+                      <a:r>
+                        <a:t>16.48</a:t>
+                      </a:r>
+                    </a:p>
+                  </a:txBody>
+                  <a:tcPr/>
+                </a:tc>
+                <a:tc>
+                  <a:txBody>
+                    <a:bodyPr/>
+                    <a:lstStyle/>
+                    <a:p>
+                      <a:pPr>
+                        <a:defRPr sz="1100"/>
+                      </a:pPr>
+                      <a:r>
+                        <a:t>-1.28</a:t>
                       </a:r>
                     </a:p>
                   </a:txBody>
@@ -4649,37 +4649,37 @@
                         <a:defRPr sz="1100"/>
                       </a:pPr>
                       <a:r>
-                        <a:t>154.5</a:t>
-                      </a:r>
-                    </a:p>
-                  </a:txBody>
-                  <a:tcPr/>
-                </a:tc>
-                <a:tc>
-                  <a:txBody>
-                    <a:bodyPr/>
-                    <a:lstStyle/>
-                    <a:p>
-                      <a:pPr>
-                        <a:defRPr sz="1100"/>
-                      </a:pPr>
-                      <a:r>
-                        <a:t>20.09</a:t>
-                      </a:r>
-                    </a:p>
-                  </a:txBody>
-                  <a:tcPr/>
-                </a:tc>
-                <a:tc>
-                  <a:txBody>
-                    <a:bodyPr/>
-                    <a:lstStyle/>
-                    <a:p>
-                      <a:pPr>
-                        <a:defRPr sz="1100"/>
-                      </a:pPr>
-                      <a:r>
-                        <a:t>-0.47</a:t>
+                        <a:t>144.3</a:t>
+                      </a:r>
+                    </a:p>
+                  </a:txBody>
+                  <a:tcPr/>
+                </a:tc>
+                <a:tc>
+                  <a:txBody>
+                    <a:bodyPr/>
+                    <a:lstStyle/>
+                    <a:p>
+                      <a:pPr>
+                        <a:defRPr sz="1100"/>
+                      </a:pPr>
+                      <a:r>
+                        <a:t>18.76</a:t>
+                      </a:r>
+                    </a:p>
+                  </a:txBody>
+                  <a:tcPr/>
+                </a:tc>
+                <a:tc>
+                  <a:txBody>
+                    <a:bodyPr/>
+                    <a:lstStyle/>
+                    <a:p>
+                      <a:pPr>
+                        <a:defRPr sz="1100"/>
+                      </a:pPr>
+                      <a:r>
+                        <a:t>-1.79</a:t>
                       </a:r>
                     </a:p>
                   </a:txBody>
@@ -4741,37 +4741,37 @@
                         <a:defRPr sz="1100"/>
                       </a:pPr>
                       <a:r>
-                        <a:t>39.05</a:t>
-                      </a:r>
-                    </a:p>
-                  </a:txBody>
-                  <a:tcPr/>
-                </a:tc>
-                <a:tc>
-                  <a:txBody>
-                    <a:bodyPr/>
-                    <a:lstStyle/>
-                    <a:p>
-                      <a:pPr>
-                        <a:defRPr sz="1100"/>
-                      </a:pPr>
-                      <a:r>
-                        <a:t>3.9</a:t>
-                      </a:r>
-                    </a:p>
-                  </a:txBody>
-                  <a:tcPr/>
-                </a:tc>
-                <a:tc>
-                  <a:txBody>
-                    <a:bodyPr/>
-                    <a:lstStyle/>
-                    <a:p>
-                      <a:pPr>
-                        <a:defRPr sz="1100"/>
-                      </a:pPr>
-                      <a:r>
-                        <a:t>-0.36</a:t>
+                        <a:t>36.39</a:t>
+                      </a:r>
+                    </a:p>
+                  </a:txBody>
+                  <a:tcPr/>
+                </a:tc>
+                <a:tc>
+                  <a:txBody>
+                    <a:bodyPr/>
+                    <a:lstStyle/>
+                    <a:p>
+                      <a:pPr>
+                        <a:defRPr sz="1100"/>
+                      </a:pPr>
+                      <a:r>
+                        <a:t>3.64</a:t>
+                      </a:r>
+                    </a:p>
+                  </a:txBody>
+                  <a:tcPr/>
+                </a:tc>
+                <a:tc>
+                  <a:txBody>
+                    <a:bodyPr/>
+                    <a:lstStyle/>
+                    <a:p>
+                      <a:pPr>
+                        <a:defRPr sz="1100"/>
+                      </a:pPr>
+                      <a:r>
+                        <a:t>-0.63</a:t>
                       </a:r>
                     </a:p>
                   </a:txBody>
@@ -4833,37 +4833,37 @@
                         <a:defRPr sz="1100"/>
                       </a:pPr>
                       <a:r>
-                        <a:t>38.85</a:t>
-                      </a:r>
-                    </a:p>
-                  </a:txBody>
-                  <a:tcPr/>
-                </a:tc>
-                <a:tc>
-                  <a:txBody>
-                    <a:bodyPr/>
-                    <a:lstStyle/>
-                    <a:p>
-                      <a:pPr>
-                        <a:defRPr sz="1100"/>
-                      </a:pPr>
-                      <a:r>
-                        <a:t>15.54</a:t>
-                      </a:r>
-                    </a:p>
-                  </a:txBody>
-                  <a:tcPr/>
-                </a:tc>
-                <a:tc>
-                  <a:txBody>
-                    <a:bodyPr/>
-                    <a:lstStyle/>
-                    <a:p>
-                      <a:pPr>
-                        <a:defRPr sz="1100"/>
-                      </a:pPr>
-                      <a:r>
-                        <a:t>-1.88</a:t>
+                        <a:t>39.89</a:t>
+                      </a:r>
+                    </a:p>
+                  </a:txBody>
+                  <a:tcPr/>
+                </a:tc>
+                <a:tc>
+                  <a:txBody>
+                    <a:bodyPr/>
+                    <a:lstStyle/>
+                    <a:p>
+                      <a:pPr>
+                        <a:defRPr sz="1100"/>
+                      </a:pPr>
+                      <a:r>
+                        <a:t>15.96</a:t>
+                      </a:r>
+                    </a:p>
+                  </a:txBody>
+                  <a:tcPr/>
+                </a:tc>
+                <a:tc>
+                  <a:txBody>
+                    <a:bodyPr/>
+                    <a:lstStyle/>
+                    <a:p>
+                      <a:pPr>
+                        <a:defRPr sz="1100"/>
+                      </a:pPr>
+                      <a:r>
+                        <a:t>-1.47</a:t>
                       </a:r>
                     </a:p>
                   </a:txBody>
@@ -4925,37 +4925,37 @@
                         <a:defRPr sz="1100"/>
                       </a:pPr>
                       <a:r>
-                        <a:t>278.5</a:t>
-                      </a:r>
-                    </a:p>
-                  </a:txBody>
-                  <a:tcPr/>
-                </a:tc>
-                <a:tc>
-                  <a:txBody>
-                    <a:bodyPr/>
-                    <a:lstStyle/>
-                    <a:p>
-                      <a:pPr>
-                        <a:defRPr sz="1100"/>
-                      </a:pPr>
-                      <a:r>
-                        <a:t>30.64</a:t>
-                      </a:r>
-                    </a:p>
-                  </a:txBody>
-                  <a:tcPr/>
-                </a:tc>
-                <a:tc>
-                  <a:txBody>
-                    <a:bodyPr/>
-                    <a:lstStyle/>
-                    <a:p>
-                      <a:pPr>
-                        <a:defRPr sz="1100"/>
-                      </a:pPr>
-                      <a:r>
-                        <a:t>-0.91</a:t>
+                        <a:t>277.0</a:t>
+                      </a:r>
+                    </a:p>
+                  </a:txBody>
+                  <a:tcPr/>
+                </a:tc>
+                <a:tc>
+                  <a:txBody>
+                    <a:bodyPr/>
+                    <a:lstStyle/>
+                    <a:p>
+                      <a:pPr>
+                        <a:defRPr sz="1100"/>
+                      </a:pPr>
+                      <a:r>
+                        <a:t>30.47</a:t>
+                      </a:r>
+                    </a:p>
+                  </a:txBody>
+                  <a:tcPr/>
+                </a:tc>
+                <a:tc>
+                  <a:txBody>
+                    <a:bodyPr/>
+                    <a:lstStyle/>
+                    <a:p>
+                      <a:pPr>
+                        <a:defRPr sz="1100"/>
+                      </a:pPr>
+                      <a:r>
+                        <a:t>-1.08</a:t>
                       </a:r>
                     </a:p>
                   </a:txBody>
@@ -5041,7 +5041,7 @@
               <a:defRPr sz="1500"/>
             </a:pPr>
             <a:r>
-              <a:t>紫金矿业（601899，有色金属）：综合72.5分；基本面优秀，具备中长期配置价值；趋势中性，观望。</a:t>
+              <a:t>紫金矿业（601899，有色金属）：综合74.5分；基本面优秀，具备中长期配置价值；趋势中性，观望。</a:t>
             </a:r>
           </a:p>
           <a:p>
@@ -5049,7 +5049,7 @@
               <a:defRPr sz="1500"/>
             </a:pPr>
             <a:r>
-              <a:t>长江电力（600900，电力）：综合72.0分；基本面优秀，具备中长期配置价值；中期趋势向上，可关注/持有。</a:t>
+              <a:t>长江电力（600900，电力）：综合70.0分；基本面优秀，具备中长期配置价值；中期趋势向上，可关注/持有。</a:t>
             </a:r>
           </a:p>
           <a:p>
@@ -5057,7 +5057,7 @@
               <a:defRPr sz="1500"/>
             </a:pPr>
             <a:r>
-              <a:t>宁德时代（300750，新能源电池）：综合71.0分；基本面优秀，具备中长期配置价值；趋势中性，观望。</a:t>
+              <a:t>立讯精密（002475，消费电子）：综合69.0分；基本面优秀，具备中长期配置价值；趋势中性，观望。</a:t>
             </a:r>
           </a:p>
           <a:p>
@@ -5065,7 +5065,7 @@
               <a:defRPr sz="1500"/>
             </a:pPr>
             <a:r>
-              <a:t>立讯精密（002475，消费电子）：综合69.0分；基本面优秀，具备中长期配置价值；趋势中性，观望。</a:t>
+              <a:t>宁德时代（300750，新能源电池）：综合68.5分；基本面优秀，具备中长期配置价值；趋势中性，观望。</a:t>
             </a:r>
           </a:p>
           <a:p>

--- a/outputs/12_中期路演.pptx
+++ b/outputs/12_中期路演.pptx
@@ -3167,7 +3167,7 @@
               <a:defRPr sz="1500"/>
             </a:pPr>
             <a:r>
-              <a:t>数据截止：2026-10-16</a:t>
+              <a:t>数据截止：2026-10-19</a:t>
             </a:r>
           </a:p>
         </p:txBody>
@@ -3255,7 +3255,7 @@
               <a:defRPr sz="1500"/>
             </a:pPr>
             <a:r>
-              <a:t>当前总资产：459.87万元</a:t>
+              <a:t>当前总资产：459.40万元</a:t>
             </a:r>
           </a:p>
           <a:p>
@@ -3263,7 +3263,7 @@
               <a:defRPr sz="1500"/>
             </a:pPr>
             <a:r>
-              <a:t>累计收益率：-8.03%</a:t>
+              <a:t>累计收益率：-8.12%</a:t>
             </a:r>
           </a:p>
           <a:p>
@@ -3271,7 +3271,7 @@
               <a:defRPr sz="1500"/>
             </a:pPr>
             <a:r>
-              <a:t>同期沪深300：-8.30%</a:t>
+              <a:t>同期沪深300：-8.21%</a:t>
             </a:r>
           </a:p>
           <a:p>
@@ -3279,7 +3279,7 @@
               <a:defRPr sz="1500"/>
             </a:pPr>
             <a:r>
-              <a:t>现金：103.24万元（22.5%）</a:t>
+              <a:t>现金：132.61万元（28.9%）</a:t>
             </a:r>
           </a:p>
           <a:p>
@@ -3287,7 +3287,7 @@
               <a:defRPr sz="1500"/>
             </a:pPr>
             <a:r>
-              <a:t>持仓：13只，累计交易39笔</a:t>
+              <a:t>持仓：12只，累计交易40笔</a:t>
             </a:r>
           </a:p>
         </p:txBody>
@@ -3582,7 +3582,7 @@
                 <a:gridCol w="1849069"/>
                 <a:gridCol w="1849070"/>
               </a:tblGrid>
-              <a:tr h="256032">
+              <a:tr h="274320">
                 <a:tc>
                   <a:txBody>
                     <a:bodyPr/>
@@ -3674,7 +3674,7 @@
                   <a:tcPr/>
                 </a:tc>
               </a:tr>
-              <a:tr h="256032">
+              <a:tr h="274320">
                 <a:tc>
                   <a:txBody>
                     <a:bodyPr/>
@@ -3766,7 +3766,7 @@
                   <a:tcPr/>
                 </a:tc>
               </a:tr>
-              <a:tr h="256032">
+              <a:tr h="274320">
                 <a:tc>
                   <a:txBody>
                     <a:bodyPr/>
@@ -3821,44 +3821,44 @@
                         <a:defRPr sz="1100"/>
                       </a:pPr>
                       <a:r>
-                        <a:t>29.92</a:t>
-                      </a:r>
-                    </a:p>
-                  </a:txBody>
-                  <a:tcPr/>
-                </a:tc>
-                <a:tc>
-                  <a:txBody>
-                    <a:bodyPr/>
-                    <a:lstStyle/>
-                    <a:p>
-                      <a:pPr>
-                        <a:defRPr sz="1100"/>
-                      </a:pPr>
-                      <a:r>
-                        <a:t>115.49</a:t>
-                      </a:r>
-                    </a:p>
-                  </a:txBody>
-                  <a:tcPr/>
-                </a:tc>
-                <a:tc>
-                  <a:txBody>
-                    <a:bodyPr/>
-                    <a:lstStyle/>
-                    <a:p>
-                      <a:pPr>
-                        <a:defRPr sz="1100"/>
-                      </a:pPr>
-                      <a:r>
-                        <a:t>-0.49</a:t>
+                        <a:t>29.79</a:t>
+                      </a:r>
+                    </a:p>
+                  </a:txBody>
+                  <a:tcPr/>
+                </a:tc>
+                <a:tc>
+                  <a:txBody>
+                    <a:bodyPr/>
+                    <a:lstStyle/>
+                    <a:p>
+                      <a:pPr>
+                        <a:defRPr sz="1100"/>
+                      </a:pPr>
+                      <a:r>
+                        <a:t>114.99</a:t>
+                      </a:r>
+                    </a:p>
+                  </a:txBody>
+                  <a:tcPr/>
+                </a:tc>
+                <a:tc>
+                  <a:txBody>
+                    <a:bodyPr/>
+                    <a:lstStyle/>
+                    <a:p>
+                      <a:pPr>
+                        <a:defRPr sz="1100"/>
+                      </a:pPr>
+                      <a:r>
+                        <a:t>-0.99</a:t>
                       </a:r>
                     </a:p>
                   </a:txBody>
                   <a:tcPr/>
                 </a:tc>
               </a:tr>
-              <a:tr h="256032">
+              <a:tr h="274320">
                 <a:tc>
                   <a:txBody>
                     <a:bodyPr/>
@@ -3913,44 +3913,44 @@
                         <a:defRPr sz="1100"/>
                       </a:pPr>
                       <a:r>
-                        <a:t>29.38</a:t>
-                      </a:r>
-                    </a:p>
-                  </a:txBody>
-                  <a:tcPr/>
-                </a:tc>
-                <a:tc>
-                  <a:txBody>
-                    <a:bodyPr/>
-                    <a:lstStyle/>
-                    <a:p>
-                      <a:pPr>
-                        <a:defRPr sz="1100"/>
-                      </a:pPr>
-                      <a:r>
-                        <a:t>112.53</a:t>
-                      </a:r>
-                    </a:p>
-                  </a:txBody>
-                  <a:tcPr/>
-                </a:tc>
-                <a:tc>
-                  <a:txBody>
-                    <a:bodyPr/>
-                    <a:lstStyle/>
-                    <a:p>
-                      <a:pPr>
-                        <a:defRPr sz="1100"/>
-                      </a:pPr>
-                      <a:r>
-                        <a:t>0.75</a:t>
+                        <a:t>29.54</a:t>
+                      </a:r>
+                    </a:p>
+                  </a:txBody>
+                  <a:tcPr/>
+                </a:tc>
+                <a:tc>
+                  <a:txBody>
+                    <a:bodyPr/>
+                    <a:lstStyle/>
+                    <a:p>
+                      <a:pPr>
+                        <a:defRPr sz="1100"/>
+                      </a:pPr>
+                      <a:r>
+                        <a:t>113.14</a:t>
+                      </a:r>
+                    </a:p>
+                  </a:txBody>
+                  <a:tcPr/>
+                </a:tc>
+                <a:tc>
+                  <a:txBody>
+                    <a:bodyPr/>
+                    <a:lstStyle/>
+                    <a:p>
+                      <a:pPr>
+                        <a:defRPr sz="1100"/>
+                      </a:pPr>
+                      <a:r>
+                        <a:t>1.36</a:t>
                       </a:r>
                     </a:p>
                   </a:txBody>
                   <a:tcPr/>
                 </a:tc>
               </a:tr>
-              <a:tr h="256032">
+              <a:tr h="274320">
                 <a:tc>
                   <a:txBody>
                     <a:bodyPr/>
@@ -4005,44 +4005,44 @@
                         <a:defRPr sz="1100"/>
                       </a:pPr>
                       <a:r>
-                        <a:t>10.21</a:t>
-                      </a:r>
-                    </a:p>
-                  </a:txBody>
-                  <a:tcPr/>
-                </a:tc>
-                <a:tc>
-                  <a:txBody>
-                    <a:bodyPr/>
-                    <a:lstStyle/>
-                    <a:p>
-                      <a:pPr>
-                        <a:defRPr sz="1100"/>
-                      </a:pPr>
-                      <a:r>
-                        <a:t>9.7</a:t>
-                      </a:r>
-                    </a:p>
-                  </a:txBody>
-                  <a:tcPr/>
-                </a:tc>
-                <a:tc>
-                  <a:txBody>
-                    <a:bodyPr/>
-                    <a:lstStyle/>
-                    <a:p>
-                      <a:pPr>
-                        <a:defRPr sz="1100"/>
-                      </a:pPr>
-                      <a:r>
-                        <a:t>-0.25</a:t>
+                        <a:t>10.6</a:t>
+                      </a:r>
+                    </a:p>
+                  </a:txBody>
+                  <a:tcPr/>
+                </a:tc>
+                <a:tc>
+                  <a:txBody>
+                    <a:bodyPr/>
+                    <a:lstStyle/>
+                    <a:p>
+                      <a:pPr>
+                        <a:defRPr sz="1100"/>
+                      </a:pPr>
+                      <a:r>
+                        <a:t>10.07</a:t>
+                      </a:r>
+                    </a:p>
+                  </a:txBody>
+                  <a:tcPr/>
+                </a:tc>
+                <a:tc>
+                  <a:txBody>
+                    <a:bodyPr/>
+                    <a:lstStyle/>
+                    <a:p>
+                      <a:pPr>
+                        <a:defRPr sz="1100"/>
+                      </a:pPr>
+                      <a:r>
+                        <a:t>0.12</a:t>
                       </a:r>
                     </a:p>
                   </a:txBody>
                   <a:tcPr/>
                 </a:tc>
               </a:tr>
-              <a:tr h="256032">
+              <a:tr h="274320">
                 <a:tc>
                   <a:txBody>
                     <a:bodyPr/>
@@ -4097,44 +4097,44 @@
                         <a:defRPr sz="1100"/>
                       </a:pPr>
                       <a:r>
-                        <a:t>15.12</a:t>
-                      </a:r>
-                    </a:p>
-                  </a:txBody>
-                  <a:tcPr/>
-                </a:tc>
-                <a:tc>
-                  <a:txBody>
-                    <a:bodyPr/>
-                    <a:lstStyle/>
-                    <a:p>
-                      <a:pPr>
-                        <a:defRPr sz="1100"/>
-                      </a:pPr>
-                      <a:r>
-                        <a:t>7.56</a:t>
-                      </a:r>
-                    </a:p>
-                  </a:txBody>
-                  <a:tcPr/>
-                </a:tc>
-                <a:tc>
-                  <a:txBody>
-                    <a:bodyPr/>
-                    <a:lstStyle/>
-                    <a:p>
-                      <a:pPr>
-                        <a:defRPr sz="1100"/>
-                      </a:pPr>
-                      <a:r>
-                        <a:t>-1.2</a:t>
+                        <a:t>15.25</a:t>
+                      </a:r>
+                    </a:p>
+                  </a:txBody>
+                  <a:tcPr/>
+                </a:tc>
+                <a:tc>
+                  <a:txBody>
+                    <a:bodyPr/>
+                    <a:lstStyle/>
+                    <a:p>
+                      <a:pPr>
+                        <a:defRPr sz="1100"/>
+                      </a:pPr>
+                      <a:r>
+                        <a:t>7.62</a:t>
+                      </a:r>
+                    </a:p>
+                  </a:txBody>
+                  <a:tcPr/>
+                </a:tc>
+                <a:tc>
+                  <a:txBody>
+                    <a:bodyPr/>
+                    <a:lstStyle/>
+                    <a:p>
+                      <a:pPr>
+                        <a:defRPr sz="1100"/>
+                      </a:pPr>
+                      <a:r>
+                        <a:t>-1.13</a:t>
                       </a:r>
                     </a:p>
                   </a:txBody>
                   <a:tcPr/>
                 </a:tc>
               </a:tr>
-              <a:tr h="256032">
+              <a:tr h="274320">
                 <a:tc>
                   <a:txBody>
                     <a:bodyPr/>
@@ -4189,44 +4189,44 @@
                         <a:defRPr sz="1100"/>
                       </a:pPr>
                       <a:r>
-                        <a:t>25.78</a:t>
-                      </a:r>
-                    </a:p>
-                  </a:txBody>
-                  <a:tcPr/>
-                </a:tc>
-                <a:tc>
-                  <a:txBody>
-                    <a:bodyPr/>
-                    <a:lstStyle/>
-                    <a:p>
-                      <a:pPr>
-                        <a:defRPr sz="1100"/>
-                      </a:pPr>
-                      <a:r>
-                        <a:t>15.73</a:t>
-                      </a:r>
-                    </a:p>
-                  </a:txBody>
-                  <a:tcPr/>
-                </a:tc>
-                <a:tc>
-                  <a:txBody>
-                    <a:bodyPr/>
-                    <a:lstStyle/>
-                    <a:p>
-                      <a:pPr>
-                        <a:defRPr sz="1100"/>
-                      </a:pPr>
-                      <a:r>
-                        <a:t>-6.15</a:t>
+                        <a:t>25.61</a:t>
+                      </a:r>
+                    </a:p>
+                  </a:txBody>
+                  <a:tcPr/>
+                </a:tc>
+                <a:tc>
+                  <a:txBody>
+                    <a:bodyPr/>
+                    <a:lstStyle/>
+                    <a:p>
+                      <a:pPr>
+                        <a:defRPr sz="1100"/>
+                      </a:pPr>
+                      <a:r>
+                        <a:t>15.62</a:t>
+                      </a:r>
+                    </a:p>
+                  </a:txBody>
+                  <a:tcPr/>
+                </a:tc>
+                <a:tc>
+                  <a:txBody>
+                    <a:bodyPr/>
+                    <a:lstStyle/>
+                    <a:p>
+                      <a:pPr>
+                        <a:defRPr sz="1100"/>
+                      </a:pPr>
+                      <a:r>
+                        <a:t>-6.26</a:t>
                       </a:r>
                     </a:p>
                   </a:txBody>
                   <a:tcPr/>
                 </a:tc>
               </a:tr>
-              <a:tr h="256032">
+              <a:tr h="274320">
                 <a:tc>
                   <a:txBody>
                     <a:bodyPr/>
@@ -4281,44 +4281,44 @@
                         <a:defRPr sz="1100"/>
                       </a:pPr>
                       <a:r>
-                        <a:t>125.12</a:t>
-                      </a:r>
-                    </a:p>
-                  </a:txBody>
-                  <a:tcPr/>
-                </a:tc>
-                <a:tc>
-                  <a:txBody>
-                    <a:bodyPr/>
-                    <a:lstStyle/>
-                    <a:p>
-                      <a:pPr>
-                        <a:defRPr sz="1100"/>
-                      </a:pPr>
-                      <a:r>
-                        <a:t>6.26</a:t>
-                      </a:r>
-                    </a:p>
-                  </a:txBody>
-                  <a:tcPr/>
-                </a:tc>
-                <a:tc>
-                  <a:txBody>
-                    <a:bodyPr/>
-                    <a:lstStyle/>
-                    <a:p>
-                      <a:pPr>
-                        <a:defRPr sz="1100"/>
-                      </a:pPr>
-                      <a:r>
-                        <a:t>-0.58</a:t>
+                        <a:t>125.01</a:t>
+                      </a:r>
+                    </a:p>
+                  </a:txBody>
+                  <a:tcPr/>
+                </a:tc>
+                <a:tc>
+                  <a:txBody>
+                    <a:bodyPr/>
+                    <a:lstStyle/>
+                    <a:p>
+                      <a:pPr>
+                        <a:defRPr sz="1100"/>
+                      </a:pPr>
+                      <a:r>
+                        <a:t>6.25</a:t>
+                      </a:r>
+                    </a:p>
+                  </a:txBody>
+                  <a:tcPr/>
+                </a:tc>
+                <a:tc>
+                  <a:txBody>
+                    <a:bodyPr/>
+                    <a:lstStyle/>
+                    <a:p>
+                      <a:pPr>
+                        <a:defRPr sz="1100"/>
+                      </a:pPr>
+                      <a:r>
+                        <a:t>-0.59</a:t>
                       </a:r>
                     </a:p>
                   </a:txBody>
                   <a:tcPr/>
                 </a:tc>
               </a:tr>
-              <a:tr h="256032">
+              <a:tr h="274320">
                 <a:tc>
                   <a:txBody>
                     <a:bodyPr/>
@@ -4373,44 +4373,44 @@
                         <a:defRPr sz="1100"/>
                       </a:pPr>
                       <a:r>
-                        <a:t>6.32</a:t>
-                      </a:r>
-                    </a:p>
-                  </a:txBody>
-                  <a:tcPr/>
-                </a:tc>
-                <a:tc>
-                  <a:txBody>
-                    <a:bodyPr/>
-                    <a:lstStyle/>
-                    <a:p>
-                      <a:pPr>
-                        <a:defRPr sz="1100"/>
-                      </a:pPr>
-                      <a:r>
-                        <a:t>3.16</a:t>
-                      </a:r>
-                    </a:p>
-                  </a:txBody>
-                  <a:tcPr/>
-                </a:tc>
-                <a:tc>
-                  <a:txBody>
-                    <a:bodyPr/>
-                    <a:lstStyle/>
-                    <a:p>
-                      <a:pPr>
-                        <a:defRPr sz="1100"/>
-                      </a:pPr>
-                      <a:r>
-                        <a:t>-0.5</a:t>
+                        <a:t>5.95</a:t>
+                      </a:r>
+                    </a:p>
+                  </a:txBody>
+                  <a:tcPr/>
+                </a:tc>
+                <a:tc>
+                  <a:txBody>
+                    <a:bodyPr/>
+                    <a:lstStyle/>
+                    <a:p>
+                      <a:pPr>
+                        <a:defRPr sz="1100"/>
+                      </a:pPr>
+                      <a:r>
+                        <a:t>2.98</a:t>
+                      </a:r>
+                    </a:p>
+                  </a:txBody>
+                  <a:tcPr/>
+                </a:tc>
+                <a:tc>
+                  <a:txBody>
+                    <a:bodyPr/>
+                    <a:lstStyle/>
+                    <a:p>
+                      <a:pPr>
+                        <a:defRPr sz="1100"/>
+                      </a:pPr>
+                      <a:r>
+                        <a:t>-0.69</a:t>
                       </a:r>
                     </a:p>
                   </a:txBody>
                   <a:tcPr/>
                 </a:tc>
               </a:tr>
-              <a:tr h="256032">
+              <a:tr h="274320">
                 <a:tc>
                   <a:txBody>
                     <a:bodyPr/>
@@ -4465,44 +4465,44 @@
                         <a:defRPr sz="1100"/>
                       </a:pPr>
                       <a:r>
-                        <a:t>18.19</a:t>
-                      </a:r>
-                    </a:p>
-                  </a:txBody>
-                  <a:tcPr/>
-                </a:tc>
-                <a:tc>
-                  <a:txBody>
-                    <a:bodyPr/>
-                    <a:lstStyle/>
-                    <a:p>
-                      <a:pPr>
-                        <a:defRPr sz="1100"/>
-                      </a:pPr>
-                      <a:r>
-                        <a:t>0.91</a:t>
-                      </a:r>
-                    </a:p>
-                  </a:txBody>
-                  <a:tcPr/>
-                </a:tc>
-                <a:tc>
-                  <a:txBody>
-                    <a:bodyPr/>
-                    <a:lstStyle/>
-                    <a:p>
-                      <a:pPr>
-                        <a:defRPr sz="1100"/>
-                      </a:pPr>
-                      <a:r>
-                        <a:t>-0.13</a:t>
+                        <a:t>17.85</a:t>
+                      </a:r>
+                    </a:p>
+                  </a:txBody>
+                  <a:tcPr/>
+                </a:tc>
+                <a:tc>
+                  <a:txBody>
+                    <a:bodyPr/>
+                    <a:lstStyle/>
+                    <a:p>
+                      <a:pPr>
+                        <a:defRPr sz="1100"/>
+                      </a:pPr>
+                      <a:r>
+                        <a:t>0.89</a:t>
+                      </a:r>
+                    </a:p>
+                  </a:txBody>
+                  <a:tcPr/>
+                </a:tc>
+                <a:tc>
+                  <a:txBody>
+                    <a:bodyPr/>
+                    <a:lstStyle/>
+                    <a:p>
+                      <a:pPr>
+                        <a:defRPr sz="1100"/>
+                      </a:pPr>
+                      <a:r>
+                        <a:t>-0.15</a:t>
                       </a:r>
                     </a:p>
                   </a:txBody>
                   <a:tcPr/>
                 </a:tc>
               </a:tr>
-              <a:tr h="256032">
+              <a:tr h="274320">
                 <a:tc>
                   <a:txBody>
                     <a:bodyPr/>
@@ -4557,44 +4557,44 @@
                         <a:defRPr sz="1100"/>
                       </a:pPr>
                       <a:r>
-                        <a:t>164.77</a:t>
-                      </a:r>
-                    </a:p>
-                  </a:txBody>
-                  <a:tcPr/>
-                </a:tc>
-                <a:tc>
-                  <a:txBody>
-                    <a:bodyPr/>
-                    <a:lstStyle/>
-                    <a:p>
-                      <a:pPr>
-                        <a:defRPr sz="1100"/>
-                      </a:pPr>
-                      <a:r>
-                        <a:t>16.48</a:t>
-                      </a:r>
-                    </a:p>
-                  </a:txBody>
-                  <a:tcPr/>
-                </a:tc>
-                <a:tc>
-                  <a:txBody>
-                    <a:bodyPr/>
-                    <a:lstStyle/>
-                    <a:p>
-                      <a:pPr>
-                        <a:defRPr sz="1100"/>
-                      </a:pPr>
-                      <a:r>
-                        <a:t>-1.28</a:t>
+                        <a:t>157.79</a:t>
+                      </a:r>
+                    </a:p>
+                  </a:txBody>
+                  <a:tcPr/>
+                </a:tc>
+                <a:tc>
+                  <a:txBody>
+                    <a:bodyPr/>
+                    <a:lstStyle/>
+                    <a:p>
+                      <a:pPr>
+                        <a:defRPr sz="1100"/>
+                      </a:pPr>
+                      <a:r>
+                        <a:t>15.78</a:t>
+                      </a:r>
+                    </a:p>
+                  </a:txBody>
+                  <a:tcPr/>
+                </a:tc>
+                <a:tc>
+                  <a:txBody>
+                    <a:bodyPr/>
+                    <a:lstStyle/>
+                    <a:p>
+                      <a:pPr>
+                        <a:defRPr sz="1100"/>
+                      </a:pPr>
+                      <a:r>
+                        <a:t>-1.98</a:t>
                       </a:r>
                     </a:p>
                   </a:txBody>
                   <a:tcPr/>
                 </a:tc>
               </a:tr>
-              <a:tr h="256032">
+              <a:tr h="274320">
                 <a:tc>
                   <a:txBody>
                     <a:bodyPr/>
@@ -4649,44 +4649,44 @@
                         <a:defRPr sz="1100"/>
                       </a:pPr>
                       <a:r>
-                        <a:t>144.3</a:t>
-                      </a:r>
-                    </a:p>
-                  </a:txBody>
-                  <a:tcPr/>
-                </a:tc>
-                <a:tc>
-                  <a:txBody>
-                    <a:bodyPr/>
-                    <a:lstStyle/>
-                    <a:p>
-                      <a:pPr>
-                        <a:defRPr sz="1100"/>
-                      </a:pPr>
-                      <a:r>
-                        <a:t>18.76</a:t>
-                      </a:r>
-                    </a:p>
-                  </a:txBody>
-                  <a:tcPr/>
-                </a:tc>
-                <a:tc>
-                  <a:txBody>
-                    <a:bodyPr/>
-                    <a:lstStyle/>
-                    <a:p>
-                      <a:pPr>
-                        <a:defRPr sz="1100"/>
-                      </a:pPr>
-                      <a:r>
-                        <a:t>-1.79</a:t>
+                        <a:t>146.5</a:t>
+                      </a:r>
+                    </a:p>
+                  </a:txBody>
+                  <a:tcPr/>
+                </a:tc>
+                <a:tc>
+                  <a:txBody>
+                    <a:bodyPr/>
+                    <a:lstStyle/>
+                    <a:p>
+                      <a:pPr>
+                        <a:defRPr sz="1100"/>
+                      </a:pPr>
+                      <a:r>
+                        <a:t>19.05</a:t>
+                      </a:r>
+                    </a:p>
+                  </a:txBody>
+                  <a:tcPr/>
+                </a:tc>
+                <a:tc>
+                  <a:txBody>
+                    <a:bodyPr/>
+                    <a:lstStyle/>
+                    <a:p>
+                      <a:pPr>
+                        <a:defRPr sz="1100"/>
+                      </a:pPr>
+                      <a:r>
+                        <a:t>-1.51</a:t>
                       </a:r>
                     </a:p>
                   </a:txBody>
                   <a:tcPr/>
                 </a:tc>
               </a:tr>
-              <a:tr h="256032">
+              <a:tr h="274320">
                 <a:tc>
                   <a:txBody>
                     <a:bodyPr/>
@@ -4741,44 +4741,44 @@
                         <a:defRPr sz="1100"/>
                       </a:pPr>
                       <a:r>
-                        <a:t>36.39</a:t>
-                      </a:r>
-                    </a:p>
-                  </a:txBody>
-                  <a:tcPr/>
-                </a:tc>
-                <a:tc>
-                  <a:txBody>
-                    <a:bodyPr/>
-                    <a:lstStyle/>
-                    <a:p>
-                      <a:pPr>
-                        <a:defRPr sz="1100"/>
-                      </a:pPr>
-                      <a:r>
-                        <a:t>3.64</a:t>
-                      </a:r>
-                    </a:p>
-                  </a:txBody>
-                  <a:tcPr/>
-                </a:tc>
-                <a:tc>
-                  <a:txBody>
-                    <a:bodyPr/>
-                    <a:lstStyle/>
-                    <a:p>
-                      <a:pPr>
-                        <a:defRPr sz="1100"/>
-                      </a:pPr>
-                      <a:r>
-                        <a:t>-0.63</a:t>
+                        <a:t>38.5</a:t>
+                      </a:r>
+                    </a:p>
+                  </a:txBody>
+                  <a:tcPr/>
+                </a:tc>
+                <a:tc>
+                  <a:txBody>
+                    <a:bodyPr/>
+                    <a:lstStyle/>
+                    <a:p>
+                      <a:pPr>
+                        <a:defRPr sz="1100"/>
+                      </a:pPr>
+                      <a:r>
+                        <a:t>3.85</a:t>
+                      </a:r>
+                    </a:p>
+                  </a:txBody>
+                  <a:tcPr/>
+                </a:tc>
+                <a:tc>
+                  <a:txBody>
+                    <a:bodyPr/>
+                    <a:lstStyle/>
+                    <a:p>
+                      <a:pPr>
+                        <a:defRPr sz="1100"/>
+                      </a:pPr>
+                      <a:r>
+                        <a:t>-0.41</a:t>
                       </a:r>
                     </a:p>
                   </a:txBody>
                   <a:tcPr/>
                 </a:tc>
               </a:tr>
-              <a:tr h="256032">
+              <a:tr h="274320">
                 <a:tc>
                   <a:txBody>
                     <a:bodyPr/>
@@ -4833,129 +4833,37 @@
                         <a:defRPr sz="1100"/>
                       </a:pPr>
                       <a:r>
-                        <a:t>39.89</a:t>
-                      </a:r>
-                    </a:p>
-                  </a:txBody>
-                  <a:tcPr/>
-                </a:tc>
-                <a:tc>
-                  <a:txBody>
-                    <a:bodyPr/>
-                    <a:lstStyle/>
-                    <a:p>
-                      <a:pPr>
-                        <a:defRPr sz="1100"/>
-                      </a:pPr>
-                      <a:r>
-                        <a:t>15.96</a:t>
-                      </a:r>
-                    </a:p>
-                  </a:txBody>
-                  <a:tcPr/>
-                </a:tc>
-                <a:tc>
-                  <a:txBody>
-                    <a:bodyPr/>
-                    <a:lstStyle/>
-                    <a:p>
-                      <a:pPr>
-                        <a:defRPr sz="1100"/>
-                      </a:pPr>
-                      <a:r>
-                        <a:t>-1.47</a:t>
-                      </a:r>
-                    </a:p>
-                  </a:txBody>
-                  <a:tcPr/>
-                </a:tc>
-              </a:tr>
-              <a:tr h="256032">
-                <a:tc>
-                  <a:txBody>
-                    <a:bodyPr/>
-                    <a:lstStyle/>
-                    <a:p>
-                      <a:pPr>
-                        <a:defRPr sz="1100"/>
-                      </a:pPr>
-                      <a:r>
-                        <a:t>宁德时代</a:t>
-                      </a:r>
-                    </a:p>
-                  </a:txBody>
-                  <a:tcPr/>
-                </a:tc>
-                <a:tc>
-                  <a:txBody>
-                    <a:bodyPr/>
-                    <a:lstStyle/>
-                    <a:p>
-                      <a:pPr>
-                        <a:defRPr sz="1100"/>
-                      </a:pPr>
-                      <a:r>
-                        <a:t>1100</a:t>
-                      </a:r>
-                    </a:p>
-                  </a:txBody>
-                  <a:tcPr/>
-                </a:tc>
-                <a:tc>
-                  <a:txBody>
-                    <a:bodyPr/>
-                    <a:lstStyle/>
-                    <a:p>
-                      <a:pPr>
-                        <a:defRPr sz="1100"/>
-                      </a:pPr>
-                      <a:r>
-                        <a:t>286.8</a:t>
-                      </a:r>
-                    </a:p>
-                  </a:txBody>
-                  <a:tcPr/>
-                </a:tc>
-                <a:tc>
-                  <a:txBody>
-                    <a:bodyPr/>
-                    <a:lstStyle/>
-                    <a:p>
-                      <a:pPr>
-                        <a:defRPr sz="1100"/>
-                      </a:pPr>
-                      <a:r>
-                        <a:t>277.0</a:t>
-                      </a:r>
-                    </a:p>
-                  </a:txBody>
-                  <a:tcPr/>
-                </a:tc>
-                <a:tc>
-                  <a:txBody>
-                    <a:bodyPr/>
-                    <a:lstStyle/>
-                    <a:p>
-                      <a:pPr>
-                        <a:defRPr sz="1100"/>
-                      </a:pPr>
-                      <a:r>
-                        <a:t>30.47</a:t>
-                      </a:r>
-                    </a:p>
-                  </a:txBody>
-                  <a:tcPr/>
-                </a:tc>
-                <a:tc>
-                  <a:txBody>
-                    <a:bodyPr/>
-                    <a:lstStyle/>
-                    <a:p>
-                      <a:pPr>
-                        <a:defRPr sz="1100"/>
-                      </a:pPr>
-                      <a:r>
-                        <a:t>-1.08</a:t>
+                        <a:t>41.38</a:t>
+                      </a:r>
+                    </a:p>
+                  </a:txBody>
+                  <a:tcPr/>
+                </a:tc>
+                <a:tc>
+                  <a:txBody>
+                    <a:bodyPr/>
+                    <a:lstStyle/>
+                    <a:p>
+                      <a:pPr>
+                        <a:defRPr sz="1100"/>
+                      </a:pPr>
+                      <a:r>
+                        <a:t>16.55</a:t>
+                      </a:r>
+                    </a:p>
+                  </a:txBody>
+                  <a:tcPr/>
+                </a:tc>
+                <a:tc>
+                  <a:txBody>
+                    <a:bodyPr/>
+                    <a:lstStyle/>
+                    <a:p>
+                      <a:pPr>
+                        <a:defRPr sz="1100"/>
+                      </a:pPr>
+                      <a:r>
+                        <a:t>-0.87</a:t>
                       </a:r>
                     </a:p>
                   </a:txBody>
@@ -5041,7 +4949,7 @@
               <a:defRPr sz="1500"/>
             </a:pPr>
             <a:r>
-              <a:t>紫金矿业（601899，有色金属）：综合74.5分；基本面优秀，具备中长期配置价值；趋势中性，观望。</a:t>
+              <a:t>紫金矿业（601899，有色金属）：综合73.0分；基本面优秀，具备中长期配置价值；趋势中性，观望。</a:t>
             </a:r>
           </a:p>
           <a:p>
@@ -5049,7 +4957,7 @@
               <a:defRPr sz="1500"/>
             </a:pPr>
             <a:r>
-              <a:t>长江电力（600900，电力）：综合70.0分；基本面优秀，具备中长期配置价值；中期趋势向上，可关注/持有。</a:t>
+              <a:t>招商银行（600036，银行）：综合69.0分；基本面优秀，具备中长期配置价值；中期趋势向上，可关注/持有。</a:t>
             </a:r>
           </a:p>
           <a:p>
@@ -5073,7 +4981,7 @@
               <a:defRPr sz="1500"/>
             </a:pPr>
             <a:r>
-              <a:t>招商银行（600036，银行）：综合67.0分；基本面优秀，具备中长期配置价值；中期趋势向上，可关注/持有。</a:t>
+              <a:t>美的集团（000333，家电）：综合67.5分；基本面优秀，具备中长期配置价值；中期趋势向上，可关注/持有。</a:t>
             </a:r>
           </a:p>
         </p:txBody>

--- a/outputs/12_中期路演.pptx
+++ b/outputs/12_中期路演.pptx
@@ -3167,7 +3167,7 @@
               <a:defRPr sz="1500"/>
             </a:pPr>
             <a:r>
-              <a:t>数据截止：2026-10-19</a:t>
+              <a:t>数据截止：2026-10-20</a:t>
             </a:r>
           </a:p>
         </p:txBody>
@@ -3255,7 +3255,7 @@
               <a:defRPr sz="1500"/>
             </a:pPr>
             <a:r>
-              <a:t>当前总资产：459.40万元</a:t>
+              <a:t>当前总资产：458.64万元</a:t>
             </a:r>
           </a:p>
           <a:p>
@@ -3263,7 +3263,7 @@
               <a:defRPr sz="1500"/>
             </a:pPr>
             <a:r>
-              <a:t>累计收益率：-8.12%</a:t>
+              <a:t>累计收益率：-8.27%</a:t>
             </a:r>
           </a:p>
           <a:p>
@@ -3271,7 +3271,7 @@
               <a:defRPr sz="1500"/>
             </a:pPr>
             <a:r>
-              <a:t>同期沪深300：-8.21%</a:t>
+              <a:t>同期沪深300：-8.71%</a:t>
             </a:r>
           </a:p>
           <a:p>
@@ -3279,7 +3279,7 @@
               <a:defRPr sz="1500"/>
             </a:pPr>
             <a:r>
-              <a:t>现金：132.61万元（28.9%）</a:t>
+              <a:t>现金：94.24万元（20.5%）</a:t>
             </a:r>
           </a:p>
           <a:p>
@@ -3287,7 +3287,7 @@
               <a:defRPr sz="1500"/>
             </a:pPr>
             <a:r>
-              <a:t>持仓：12只，累计交易40笔</a:t>
+              <a:t>持仓：13只，累计交易41笔</a:t>
             </a:r>
           </a:p>
         </p:txBody>
@@ -3582,7 +3582,7 @@
                 <a:gridCol w="1849069"/>
                 <a:gridCol w="1849070"/>
               </a:tblGrid>
-              <a:tr h="274320">
+              <a:tr h="256032">
                 <a:tc>
                   <a:txBody>
                     <a:bodyPr/>
@@ -3674,7 +3674,7 @@
                   <a:tcPr/>
                 </a:tc>
               </a:tr>
-              <a:tr h="274320">
+              <a:tr h="256032">
                 <a:tc>
                   <a:txBody>
                     <a:bodyPr/>
@@ -3766,7 +3766,7 @@
                   <a:tcPr/>
                 </a:tc>
               </a:tr>
-              <a:tr h="274320">
+              <a:tr h="256032">
                 <a:tc>
                   <a:txBody>
                     <a:bodyPr/>
@@ -3821,44 +3821,44 @@
                         <a:defRPr sz="1100"/>
                       </a:pPr>
                       <a:r>
-                        <a:t>29.79</a:t>
-                      </a:r>
-                    </a:p>
-                  </a:txBody>
-                  <a:tcPr/>
-                </a:tc>
-                <a:tc>
-                  <a:txBody>
-                    <a:bodyPr/>
-                    <a:lstStyle/>
-                    <a:p>
-                      <a:pPr>
-                        <a:defRPr sz="1100"/>
-                      </a:pPr>
-                      <a:r>
-                        <a:t>114.99</a:t>
-                      </a:r>
-                    </a:p>
-                  </a:txBody>
-                  <a:tcPr/>
-                </a:tc>
-                <a:tc>
-                  <a:txBody>
-                    <a:bodyPr/>
-                    <a:lstStyle/>
-                    <a:p>
-                      <a:pPr>
-                        <a:defRPr sz="1100"/>
-                      </a:pPr>
-                      <a:r>
-                        <a:t>-0.99</a:t>
+                        <a:t>29.06</a:t>
+                      </a:r>
+                    </a:p>
+                  </a:txBody>
+                  <a:tcPr/>
+                </a:tc>
+                <a:tc>
+                  <a:txBody>
+                    <a:bodyPr/>
+                    <a:lstStyle/>
+                    <a:p>
+                      <a:pPr>
+                        <a:defRPr sz="1100"/>
+                      </a:pPr>
+                      <a:r>
+                        <a:t>112.17</a:t>
+                      </a:r>
+                    </a:p>
+                  </a:txBody>
+                  <a:tcPr/>
+                </a:tc>
+                <a:tc>
+                  <a:txBody>
+                    <a:bodyPr/>
+                    <a:lstStyle/>
+                    <a:p>
+                      <a:pPr>
+                        <a:defRPr sz="1100"/>
+                      </a:pPr>
+                      <a:r>
+                        <a:t>-3.81</a:t>
                       </a:r>
                     </a:p>
                   </a:txBody>
                   <a:tcPr/>
                 </a:tc>
               </a:tr>
-              <a:tr h="274320">
+              <a:tr h="256032">
                 <a:tc>
                   <a:txBody>
                     <a:bodyPr/>
@@ -3913,44 +3913,136 @@
                         <a:defRPr sz="1100"/>
                       </a:pPr>
                       <a:r>
-                        <a:t>29.54</a:t>
-                      </a:r>
-                    </a:p>
-                  </a:txBody>
-                  <a:tcPr/>
-                </a:tc>
-                <a:tc>
-                  <a:txBody>
-                    <a:bodyPr/>
-                    <a:lstStyle/>
-                    <a:p>
-                      <a:pPr>
-                        <a:defRPr sz="1100"/>
-                      </a:pPr>
-                      <a:r>
-                        <a:t>113.14</a:t>
-                      </a:r>
-                    </a:p>
-                  </a:txBody>
-                  <a:tcPr/>
-                </a:tc>
-                <a:tc>
-                  <a:txBody>
-                    <a:bodyPr/>
-                    <a:lstStyle/>
-                    <a:p>
-                      <a:pPr>
-                        <a:defRPr sz="1100"/>
-                      </a:pPr>
-                      <a:r>
-                        <a:t>1.36</a:t>
+                        <a:t>29.69</a:t>
+                      </a:r>
+                    </a:p>
+                  </a:txBody>
+                  <a:tcPr/>
+                </a:tc>
+                <a:tc>
+                  <a:txBody>
+                    <a:bodyPr/>
+                    <a:lstStyle/>
+                    <a:p>
+                      <a:pPr>
+                        <a:defRPr sz="1100"/>
+                      </a:pPr>
+                      <a:r>
+                        <a:t>113.71</a:t>
+                      </a:r>
+                    </a:p>
+                  </a:txBody>
+                  <a:tcPr/>
+                </a:tc>
+                <a:tc>
+                  <a:txBody>
+                    <a:bodyPr/>
+                    <a:lstStyle/>
+                    <a:p>
+                      <a:pPr>
+                        <a:defRPr sz="1100"/>
+                      </a:pPr>
+                      <a:r>
+                        <a:t>1.94</a:t>
                       </a:r>
                     </a:p>
                   </a:txBody>
                   <a:tcPr/>
                 </a:tc>
               </a:tr>
-              <a:tr h="274320">
+              <a:tr h="256032">
+                <a:tc>
+                  <a:txBody>
+                    <a:bodyPr/>
+                    <a:lstStyle/>
+                    <a:p>
+                      <a:pPr>
+                        <a:defRPr sz="1100"/>
+                      </a:pPr>
+                      <a:r>
+                        <a:t>美的集团</a:t>
+                      </a:r>
+                    </a:p>
+                  </a:txBody>
+                  <a:tcPr/>
+                </a:tc>
+                <a:tc>
+                  <a:txBody>
+                    <a:bodyPr/>
+                    <a:lstStyle/>
+                    <a:p>
+                      <a:pPr>
+                        <a:defRPr sz="1100"/>
+                      </a:pPr>
+                      <a:r>
+                        <a:t>4500</a:t>
+                      </a:r>
+                    </a:p>
+                  </a:txBody>
+                  <a:tcPr/>
+                </a:tc>
+                <a:tc>
+                  <a:txBody>
+                    <a:bodyPr/>
+                    <a:lstStyle/>
+                    <a:p>
+                      <a:pPr>
+                        <a:defRPr sz="1100"/>
+                      </a:pPr>
+                      <a:r>
+                        <a:t>85.28</a:t>
+                      </a:r>
+                    </a:p>
+                  </a:txBody>
+                  <a:tcPr/>
+                </a:tc>
+                <a:tc>
+                  <a:txBody>
+                    <a:bodyPr/>
+                    <a:lstStyle/>
+                    <a:p>
+                      <a:pPr>
+                        <a:defRPr sz="1100"/>
+                      </a:pPr>
+                      <a:r>
+                        <a:t>85.28</a:t>
+                      </a:r>
+                    </a:p>
+                  </a:txBody>
+                  <a:tcPr/>
+                </a:tc>
+                <a:tc>
+                  <a:txBody>
+                    <a:bodyPr/>
+                    <a:lstStyle/>
+                    <a:p>
+                      <a:pPr>
+                        <a:defRPr sz="1100"/>
+                      </a:pPr>
+                      <a:r>
+                        <a:t>38.38</a:t>
+                      </a:r>
+                    </a:p>
+                  </a:txBody>
+                  <a:tcPr/>
+                </a:tc>
+                <a:tc>
+                  <a:txBody>
+                    <a:bodyPr/>
+                    <a:lstStyle/>
+                    <a:p>
+                      <a:pPr>
+                        <a:defRPr sz="1100"/>
+                      </a:pPr>
+                      <a:r>
+                        <a:t>0.0</a:t>
+                      </a:r>
+                    </a:p>
+                  </a:txBody>
+                  <a:tcPr/>
+                </a:tc>
+              </a:tr>
+              <a:tr h="256032">
                 <a:tc>
                   <a:txBody>
                     <a:bodyPr/>
@@ -4005,44 +4097,44 @@
                         <a:defRPr sz="1100"/>
                       </a:pPr>
                       <a:r>
-                        <a:t>10.6</a:t>
-                      </a:r>
-                    </a:p>
-                  </a:txBody>
-                  <a:tcPr/>
-                </a:tc>
-                <a:tc>
-                  <a:txBody>
-                    <a:bodyPr/>
-                    <a:lstStyle/>
-                    <a:p>
-                      <a:pPr>
-                        <a:defRPr sz="1100"/>
-                      </a:pPr>
-                      <a:r>
-                        <a:t>10.07</a:t>
-                      </a:r>
-                    </a:p>
-                  </a:txBody>
-                  <a:tcPr/>
-                </a:tc>
-                <a:tc>
-                  <a:txBody>
-                    <a:bodyPr/>
-                    <a:lstStyle/>
-                    <a:p>
-                      <a:pPr>
-                        <a:defRPr sz="1100"/>
-                      </a:pPr>
-                      <a:r>
-                        <a:t>0.12</a:t>
+                        <a:t>10.65</a:t>
+                      </a:r>
+                    </a:p>
+                  </a:txBody>
+                  <a:tcPr/>
+                </a:tc>
+                <a:tc>
+                  <a:txBody>
+                    <a:bodyPr/>
+                    <a:lstStyle/>
+                    <a:p>
+                      <a:pPr>
+                        <a:defRPr sz="1100"/>
+                      </a:pPr>
+                      <a:r>
+                        <a:t>10.12</a:t>
+                      </a:r>
+                    </a:p>
+                  </a:txBody>
+                  <a:tcPr/>
+                </a:tc>
+                <a:tc>
+                  <a:txBody>
+                    <a:bodyPr/>
+                    <a:lstStyle/>
+                    <a:p>
+                      <a:pPr>
+                        <a:defRPr sz="1100"/>
+                      </a:pPr>
+                      <a:r>
+                        <a:t>0.17</a:t>
                       </a:r>
                     </a:p>
                   </a:txBody>
                   <a:tcPr/>
                 </a:tc>
               </a:tr>
-              <a:tr h="274320">
+              <a:tr h="256032">
                 <a:tc>
                   <a:txBody>
                     <a:bodyPr/>
@@ -4097,44 +4189,44 @@
                         <a:defRPr sz="1100"/>
                       </a:pPr>
                       <a:r>
-                        <a:t>15.25</a:t>
-                      </a:r>
-                    </a:p>
-                  </a:txBody>
-                  <a:tcPr/>
-                </a:tc>
-                <a:tc>
-                  <a:txBody>
-                    <a:bodyPr/>
-                    <a:lstStyle/>
-                    <a:p>
-                      <a:pPr>
-                        <a:defRPr sz="1100"/>
-                      </a:pPr>
-                      <a:r>
-                        <a:t>7.62</a:t>
-                      </a:r>
-                    </a:p>
-                  </a:txBody>
-                  <a:tcPr/>
-                </a:tc>
-                <a:tc>
-                  <a:txBody>
-                    <a:bodyPr/>
-                    <a:lstStyle/>
-                    <a:p>
-                      <a:pPr>
-                        <a:defRPr sz="1100"/>
-                      </a:pPr>
-                      <a:r>
-                        <a:t>-1.13</a:t>
+                        <a:t>15.33</a:t>
+                      </a:r>
+                    </a:p>
+                  </a:txBody>
+                  <a:tcPr/>
+                </a:tc>
+                <a:tc>
+                  <a:txBody>
+                    <a:bodyPr/>
+                    <a:lstStyle/>
+                    <a:p>
+                      <a:pPr>
+                        <a:defRPr sz="1100"/>
+                      </a:pPr>
+                      <a:r>
+                        <a:t>7.67</a:t>
+                      </a:r>
+                    </a:p>
+                  </a:txBody>
+                  <a:tcPr/>
+                </a:tc>
+                <a:tc>
+                  <a:txBody>
+                    <a:bodyPr/>
+                    <a:lstStyle/>
+                    <a:p>
+                      <a:pPr>
+                        <a:defRPr sz="1100"/>
+                      </a:pPr>
+                      <a:r>
+                        <a:t>-1.09</a:t>
                       </a:r>
                     </a:p>
                   </a:txBody>
                   <a:tcPr/>
                 </a:tc>
               </a:tr>
-              <a:tr h="274320">
+              <a:tr h="256032">
                 <a:tc>
                   <a:txBody>
                     <a:bodyPr/>
@@ -4189,44 +4281,44 @@
                         <a:defRPr sz="1100"/>
                       </a:pPr>
                       <a:r>
-                        <a:t>25.61</a:t>
-                      </a:r>
-                    </a:p>
-                  </a:txBody>
-                  <a:tcPr/>
-                </a:tc>
-                <a:tc>
-                  <a:txBody>
-                    <a:bodyPr/>
-                    <a:lstStyle/>
-                    <a:p>
-                      <a:pPr>
-                        <a:defRPr sz="1100"/>
-                      </a:pPr>
-                      <a:r>
-                        <a:t>15.62</a:t>
-                      </a:r>
-                    </a:p>
-                  </a:txBody>
-                  <a:tcPr/>
-                </a:tc>
-                <a:tc>
-                  <a:txBody>
-                    <a:bodyPr/>
-                    <a:lstStyle/>
-                    <a:p>
-                      <a:pPr>
-                        <a:defRPr sz="1100"/>
-                      </a:pPr>
-                      <a:r>
-                        <a:t>-6.26</a:t>
+                        <a:t>26.65</a:t>
+                      </a:r>
+                    </a:p>
+                  </a:txBody>
+                  <a:tcPr/>
+                </a:tc>
+                <a:tc>
+                  <a:txBody>
+                    <a:bodyPr/>
+                    <a:lstStyle/>
+                    <a:p>
+                      <a:pPr>
+                        <a:defRPr sz="1100"/>
+                      </a:pPr>
+                      <a:r>
+                        <a:t>16.26</a:t>
+                      </a:r>
+                    </a:p>
+                  </a:txBody>
+                  <a:tcPr/>
+                </a:tc>
+                <a:tc>
+                  <a:txBody>
+                    <a:bodyPr/>
+                    <a:lstStyle/>
+                    <a:p>
+                      <a:pPr>
+                        <a:defRPr sz="1100"/>
+                      </a:pPr>
+                      <a:r>
+                        <a:t>-5.62</a:t>
                       </a:r>
                     </a:p>
                   </a:txBody>
                   <a:tcPr/>
                 </a:tc>
               </a:tr>
-              <a:tr h="274320">
+              <a:tr h="256032">
                 <a:tc>
                   <a:txBody>
                     <a:bodyPr/>
@@ -4281,44 +4373,44 @@
                         <a:defRPr sz="1100"/>
                       </a:pPr>
                       <a:r>
-                        <a:t>125.01</a:t>
-                      </a:r>
-                    </a:p>
-                  </a:txBody>
-                  <a:tcPr/>
-                </a:tc>
-                <a:tc>
-                  <a:txBody>
-                    <a:bodyPr/>
-                    <a:lstStyle/>
-                    <a:p>
-                      <a:pPr>
-                        <a:defRPr sz="1100"/>
-                      </a:pPr>
-                      <a:r>
-                        <a:t>6.25</a:t>
-                      </a:r>
-                    </a:p>
-                  </a:txBody>
-                  <a:tcPr/>
-                </a:tc>
-                <a:tc>
-                  <a:txBody>
-                    <a:bodyPr/>
-                    <a:lstStyle/>
-                    <a:p>
-                      <a:pPr>
-                        <a:defRPr sz="1100"/>
-                      </a:pPr>
-                      <a:r>
-                        <a:t>-0.59</a:t>
+                        <a:t>134.2</a:t>
+                      </a:r>
+                    </a:p>
+                  </a:txBody>
+                  <a:tcPr/>
+                </a:tc>
+                <a:tc>
+                  <a:txBody>
+                    <a:bodyPr/>
+                    <a:lstStyle/>
+                    <a:p>
+                      <a:pPr>
+                        <a:defRPr sz="1100"/>
+                      </a:pPr>
+                      <a:r>
+                        <a:t>6.71</a:t>
+                      </a:r>
+                    </a:p>
+                  </a:txBody>
+                  <a:tcPr/>
+                </a:tc>
+                <a:tc>
+                  <a:txBody>
+                    <a:bodyPr/>
+                    <a:lstStyle/>
+                    <a:p>
+                      <a:pPr>
+                        <a:defRPr sz="1100"/>
+                      </a:pPr>
+                      <a:r>
+                        <a:t>-0.13</a:t>
                       </a:r>
                     </a:p>
                   </a:txBody>
                   <a:tcPr/>
                 </a:tc>
               </a:tr>
-              <a:tr h="274320">
+              <a:tr h="256032">
                 <a:tc>
                   <a:txBody>
                     <a:bodyPr/>
@@ -4373,44 +4465,44 @@
                         <a:defRPr sz="1100"/>
                       </a:pPr>
                       <a:r>
-                        <a:t>5.95</a:t>
-                      </a:r>
-                    </a:p>
-                  </a:txBody>
-                  <a:tcPr/>
-                </a:tc>
-                <a:tc>
-                  <a:txBody>
-                    <a:bodyPr/>
-                    <a:lstStyle/>
-                    <a:p>
-                      <a:pPr>
-                        <a:defRPr sz="1100"/>
-                      </a:pPr>
-                      <a:r>
-                        <a:t>2.98</a:t>
-                      </a:r>
-                    </a:p>
-                  </a:txBody>
-                  <a:tcPr/>
-                </a:tc>
-                <a:tc>
-                  <a:txBody>
-                    <a:bodyPr/>
-                    <a:lstStyle/>
-                    <a:p>
-                      <a:pPr>
-                        <a:defRPr sz="1100"/>
-                      </a:pPr>
-                      <a:r>
-                        <a:t>-0.69</a:t>
+                        <a:t>5.86</a:t>
+                      </a:r>
+                    </a:p>
+                  </a:txBody>
+                  <a:tcPr/>
+                </a:tc>
+                <a:tc>
+                  <a:txBody>
+                    <a:bodyPr/>
+                    <a:lstStyle/>
+                    <a:p>
+                      <a:pPr>
+                        <a:defRPr sz="1100"/>
+                      </a:pPr>
+                      <a:r>
+                        <a:t>2.93</a:t>
+                      </a:r>
+                    </a:p>
+                  </a:txBody>
+                  <a:tcPr/>
+                </a:tc>
+                <a:tc>
+                  <a:txBody>
+                    <a:bodyPr/>
+                    <a:lstStyle/>
+                    <a:p>
+                      <a:pPr>
+                        <a:defRPr sz="1100"/>
+                      </a:pPr>
+                      <a:r>
+                        <a:t>-0.73</a:t>
                       </a:r>
                     </a:p>
                   </a:txBody>
                   <a:tcPr/>
                 </a:tc>
               </a:tr>
-              <a:tr h="274320">
+              <a:tr h="256032">
                 <a:tc>
                   <a:txBody>
                     <a:bodyPr/>
@@ -4465,44 +4557,44 @@
                         <a:defRPr sz="1100"/>
                       </a:pPr>
                       <a:r>
-                        <a:t>17.85</a:t>
-                      </a:r>
-                    </a:p>
-                  </a:txBody>
-                  <a:tcPr/>
-                </a:tc>
-                <a:tc>
-                  <a:txBody>
-                    <a:bodyPr/>
-                    <a:lstStyle/>
-                    <a:p>
-                      <a:pPr>
-                        <a:defRPr sz="1100"/>
-                      </a:pPr>
-                      <a:r>
-                        <a:t>0.89</a:t>
-                      </a:r>
-                    </a:p>
-                  </a:txBody>
-                  <a:tcPr/>
-                </a:tc>
-                <a:tc>
-                  <a:txBody>
-                    <a:bodyPr/>
-                    <a:lstStyle/>
-                    <a:p>
-                      <a:pPr>
-                        <a:defRPr sz="1100"/>
-                      </a:pPr>
-                      <a:r>
-                        <a:t>-0.15</a:t>
+                        <a:t>17.58</a:t>
+                      </a:r>
+                    </a:p>
+                  </a:txBody>
+                  <a:tcPr/>
+                </a:tc>
+                <a:tc>
+                  <a:txBody>
+                    <a:bodyPr/>
+                    <a:lstStyle/>
+                    <a:p>
+                      <a:pPr>
+                        <a:defRPr sz="1100"/>
+                      </a:pPr>
+                      <a:r>
+                        <a:t>0.88</a:t>
+                      </a:r>
+                    </a:p>
+                  </a:txBody>
+                  <a:tcPr/>
+                </a:tc>
+                <a:tc>
+                  <a:txBody>
+                    <a:bodyPr/>
+                    <a:lstStyle/>
+                    <a:p>
+                      <a:pPr>
+                        <a:defRPr sz="1100"/>
+                      </a:pPr>
+                      <a:r>
+                        <a:t>-0.16</a:t>
                       </a:r>
                     </a:p>
                   </a:txBody>
                   <a:tcPr/>
                 </a:tc>
               </a:tr>
-              <a:tr h="274320">
+              <a:tr h="256032">
                 <a:tc>
                   <a:txBody>
                     <a:bodyPr/>
@@ -4557,44 +4649,44 @@
                         <a:defRPr sz="1100"/>
                       </a:pPr>
                       <a:r>
-                        <a:t>157.79</a:t>
-                      </a:r>
-                    </a:p>
-                  </a:txBody>
-                  <a:tcPr/>
-                </a:tc>
-                <a:tc>
-                  <a:txBody>
-                    <a:bodyPr/>
-                    <a:lstStyle/>
-                    <a:p>
-                      <a:pPr>
-                        <a:defRPr sz="1100"/>
-                      </a:pPr>
-                      <a:r>
-                        <a:t>15.78</a:t>
-                      </a:r>
-                    </a:p>
-                  </a:txBody>
-                  <a:tcPr/>
-                </a:tc>
-                <a:tc>
-                  <a:txBody>
-                    <a:bodyPr/>
-                    <a:lstStyle/>
-                    <a:p>
-                      <a:pPr>
-                        <a:defRPr sz="1100"/>
-                      </a:pPr>
-                      <a:r>
-                        <a:t>-1.98</a:t>
+                        <a:t>160.95</a:t>
+                      </a:r>
+                    </a:p>
+                  </a:txBody>
+                  <a:tcPr/>
+                </a:tc>
+                <a:tc>
+                  <a:txBody>
+                    <a:bodyPr/>
+                    <a:lstStyle/>
+                    <a:p>
+                      <a:pPr>
+                        <a:defRPr sz="1100"/>
+                      </a:pPr>
+                      <a:r>
+                        <a:t>16.09</a:t>
+                      </a:r>
+                    </a:p>
+                  </a:txBody>
+                  <a:tcPr/>
+                </a:tc>
+                <a:tc>
+                  <a:txBody>
+                    <a:bodyPr/>
+                    <a:lstStyle/>
+                    <a:p>
+                      <a:pPr>
+                        <a:defRPr sz="1100"/>
+                      </a:pPr>
+                      <a:r>
+                        <a:t>-1.66</a:t>
                       </a:r>
                     </a:p>
                   </a:txBody>
                   <a:tcPr/>
                 </a:tc>
               </a:tr>
-              <a:tr h="274320">
+              <a:tr h="256032">
                 <a:tc>
                   <a:txBody>
                     <a:bodyPr/>
@@ -4649,44 +4741,44 @@
                         <a:defRPr sz="1100"/>
                       </a:pPr>
                       <a:r>
-                        <a:t>146.5</a:t>
-                      </a:r>
-                    </a:p>
-                  </a:txBody>
-                  <a:tcPr/>
-                </a:tc>
-                <a:tc>
-                  <a:txBody>
-                    <a:bodyPr/>
-                    <a:lstStyle/>
-                    <a:p>
-                      <a:pPr>
-                        <a:defRPr sz="1100"/>
-                      </a:pPr>
-                      <a:r>
-                        <a:t>19.05</a:t>
-                      </a:r>
-                    </a:p>
-                  </a:txBody>
-                  <a:tcPr/>
-                </a:tc>
-                <a:tc>
-                  <a:txBody>
-                    <a:bodyPr/>
-                    <a:lstStyle/>
-                    <a:p>
-                      <a:pPr>
-                        <a:defRPr sz="1100"/>
-                      </a:pPr>
-                      <a:r>
-                        <a:t>-1.51</a:t>
+                        <a:t>147.66</a:t>
+                      </a:r>
+                    </a:p>
+                  </a:txBody>
+                  <a:tcPr/>
+                </a:tc>
+                <a:tc>
+                  <a:txBody>
+                    <a:bodyPr/>
+                    <a:lstStyle/>
+                    <a:p>
+                      <a:pPr>
+                        <a:defRPr sz="1100"/>
+                      </a:pPr>
+                      <a:r>
+                        <a:t>19.2</a:t>
+                      </a:r>
+                    </a:p>
+                  </a:txBody>
+                  <a:tcPr/>
+                </a:tc>
+                <a:tc>
+                  <a:txBody>
+                    <a:bodyPr/>
+                    <a:lstStyle/>
+                    <a:p>
+                      <a:pPr>
+                        <a:defRPr sz="1100"/>
+                      </a:pPr>
+                      <a:r>
+                        <a:t>-1.35</a:t>
                       </a:r>
                     </a:p>
                   </a:txBody>
                   <a:tcPr/>
                 </a:tc>
               </a:tr>
-              <a:tr h="274320">
+              <a:tr h="256032">
                 <a:tc>
                   <a:txBody>
                     <a:bodyPr/>
@@ -4741,44 +4833,44 @@
                         <a:defRPr sz="1100"/>
                       </a:pPr>
                       <a:r>
-                        <a:t>38.5</a:t>
-                      </a:r>
-                    </a:p>
-                  </a:txBody>
-                  <a:tcPr/>
-                </a:tc>
-                <a:tc>
-                  <a:txBody>
-                    <a:bodyPr/>
-                    <a:lstStyle/>
-                    <a:p>
-                      <a:pPr>
-                        <a:defRPr sz="1100"/>
-                      </a:pPr>
-                      <a:r>
-                        <a:t>3.85</a:t>
-                      </a:r>
-                    </a:p>
-                  </a:txBody>
-                  <a:tcPr/>
-                </a:tc>
-                <a:tc>
-                  <a:txBody>
-                    <a:bodyPr/>
-                    <a:lstStyle/>
-                    <a:p>
-                      <a:pPr>
-                        <a:defRPr sz="1100"/>
-                      </a:pPr>
-                      <a:r>
-                        <a:t>-0.41</a:t>
+                        <a:t>39.09</a:t>
+                      </a:r>
+                    </a:p>
+                  </a:txBody>
+                  <a:tcPr/>
+                </a:tc>
+                <a:tc>
+                  <a:txBody>
+                    <a:bodyPr/>
+                    <a:lstStyle/>
+                    <a:p>
+                      <a:pPr>
+                        <a:defRPr sz="1100"/>
+                      </a:pPr>
+                      <a:r>
+                        <a:t>3.91</a:t>
+                      </a:r>
+                    </a:p>
+                  </a:txBody>
+                  <a:tcPr/>
+                </a:tc>
+                <a:tc>
+                  <a:txBody>
+                    <a:bodyPr/>
+                    <a:lstStyle/>
+                    <a:p>
+                      <a:pPr>
+                        <a:defRPr sz="1100"/>
+                      </a:pPr>
+                      <a:r>
+                        <a:t>-0.36</a:t>
                       </a:r>
                     </a:p>
                   </a:txBody>
                   <a:tcPr/>
                 </a:tc>
               </a:tr>
-              <a:tr h="274320">
+              <a:tr h="256032">
                 <a:tc>
                   <a:txBody>
                     <a:bodyPr/>
@@ -4833,37 +4925,37 @@
                         <a:defRPr sz="1100"/>
                       </a:pPr>
                       <a:r>
-                        <a:t>41.38</a:t>
-                      </a:r>
-                    </a:p>
-                  </a:txBody>
-                  <a:tcPr/>
-                </a:tc>
-                <a:tc>
-                  <a:txBody>
-                    <a:bodyPr/>
-                    <a:lstStyle/>
-                    <a:p>
-                      <a:pPr>
-                        <a:defRPr sz="1100"/>
-                      </a:pPr>
-                      <a:r>
-                        <a:t>16.55</a:t>
-                      </a:r>
-                    </a:p>
-                  </a:txBody>
-                  <a:tcPr/>
-                </a:tc>
-                <a:tc>
-                  <a:txBody>
-                    <a:bodyPr/>
-                    <a:lstStyle/>
-                    <a:p>
-                      <a:pPr>
-                        <a:defRPr sz="1100"/>
-                      </a:pPr>
-                      <a:r>
-                        <a:t>-0.87</a:t>
+                        <a:t>40.97</a:t>
+                      </a:r>
+                    </a:p>
+                  </a:txBody>
+                  <a:tcPr/>
+                </a:tc>
+                <a:tc>
+                  <a:txBody>
+                    <a:bodyPr/>
+                    <a:lstStyle/>
+                    <a:p>
+                      <a:pPr>
+                        <a:defRPr sz="1100"/>
+                      </a:pPr>
+                      <a:r>
+                        <a:t>16.39</a:t>
+                      </a:r>
+                    </a:p>
+                  </a:txBody>
+                  <a:tcPr/>
+                </a:tc>
+                <a:tc>
+                  <a:txBody>
+                    <a:bodyPr/>
+                    <a:lstStyle/>
+                    <a:p>
+                      <a:pPr>
+                        <a:defRPr sz="1100"/>
+                      </a:pPr>
+                      <a:r>
+                        <a:t>-1.04</a:t>
                       </a:r>
                     </a:p>
                   </a:txBody>
@@ -4949,7 +5041,7 @@
               <a:defRPr sz="1500"/>
             </a:pPr>
             <a:r>
-              <a:t>紫金矿业（601899，有色金属）：综合73.0分；基本面优秀，具备中长期配置价值；趋势中性，观望。</a:t>
+              <a:t>紫金矿业（601899，有色金属）：综合73.5分；基本面优秀，具备中长期配置价值；趋势中性，观望。</a:t>
             </a:r>
           </a:p>
           <a:p>
@@ -4957,7 +5049,7 @@
               <a:defRPr sz="1500"/>
             </a:pPr>
             <a:r>
-              <a:t>招商银行（600036，银行）：综合69.0分；基本面优秀，具备中长期配置价值；中期趋势向上，可关注/持有。</a:t>
+              <a:t>美的集团（000333，家电）：综合67.5分；基本面优秀，具备中长期配置价值；中期趋势向上，可关注/持有。</a:t>
             </a:r>
           </a:p>
           <a:p>
@@ -4965,7 +5057,7 @@
               <a:defRPr sz="1500"/>
             </a:pPr>
             <a:r>
-              <a:t>立讯精密（002475，消费电子）：综合69.0分；基本面优秀，具备中长期配置价值；趋势中性，观望。</a:t>
+              <a:t>立讯精密（002475，消费电子）：综合67.5分；基本面优秀，具备中长期配置价值；趋势中性，观望。</a:t>
             </a:r>
           </a:p>
           <a:p>
@@ -4973,7 +5065,7 @@
               <a:defRPr sz="1500"/>
             </a:pPr>
             <a:r>
-              <a:t>宁德时代（300750，新能源电池）：综合68.5分；基本面优秀，具备中长期配置价值；趋势中性，观望。</a:t>
+              <a:t>招商银行（600036，银行）：综合67.0分；基本面优秀，具备中长期配置价值；中期趋势向上，可关注/持有。</a:t>
             </a:r>
           </a:p>
           <a:p>
@@ -4981,7 +5073,7 @@
               <a:defRPr sz="1500"/>
             </a:pPr>
             <a:r>
-              <a:t>美的集团（000333，家电）：综合67.5分；基本面优秀，具备中长期配置价值；中期趋势向上，可关注/持有。</a:t>
+              <a:t>长江电力（600900，电力）：综合67.0分；基本面优秀，具备中长期配置价值；趋势中性，观望。</a:t>
             </a:r>
           </a:p>
         </p:txBody>

--- a/outputs/12_中期路演.pptx
+++ b/outputs/12_中期路演.pptx
@@ -5065,7 +5065,7 @@
               <a:defRPr sz="1500"/>
             </a:pPr>
             <a:r>
-              <a:t>招商银行（600036，银行）：综合67.0分；基本面优秀，具备中长期配置价值；中期趋势向上，可关注/持有。</a:t>
+              <a:t>宁德时代（300750，新能源电池）：综合67.0分；基本面优秀，具备中长期配置价值；趋势偏弱，回避或减仓。</a:t>
             </a:r>
           </a:p>
           <a:p>
@@ -5073,7 +5073,7 @@
               <a:defRPr sz="1500"/>
             </a:pPr>
             <a:r>
-              <a:t>长江电力（600900，电力）：综合67.0分；基本面优秀，具备中长期配置价值；趋势中性，观望。</a:t>
+              <a:t>招商银行（600036，银行）：综合67.0分；基本面优秀，具备中长期配置价值；中期趋势向上，可关注/持有。</a:t>
             </a:r>
           </a:p>
         </p:txBody>

--- a/outputs/12_中期路演.pptx
+++ b/outputs/12_中期路演.pptx
@@ -3167,7 +3167,7 @@
               <a:defRPr sz="1500"/>
             </a:pPr>
             <a:r>
-              <a:t>数据截止：2026-10-20</a:t>
+              <a:t>数据截止：2026-10-21</a:t>
             </a:r>
           </a:p>
         </p:txBody>
@@ -3255,7 +3255,7 @@
               <a:defRPr sz="1500"/>
             </a:pPr>
             <a:r>
-              <a:t>当前总资产：458.64万元</a:t>
+              <a:t>当前总资产：456.01万元</a:t>
             </a:r>
           </a:p>
           <a:p>
@@ -3263,7 +3263,7 @@
               <a:defRPr sz="1500"/>
             </a:pPr>
             <a:r>
-              <a:t>累计收益率：-8.27%</a:t>
+              <a:t>累计收益率：-8.80%</a:t>
             </a:r>
           </a:p>
           <a:p>
@@ -3271,7 +3271,7 @@
               <a:defRPr sz="1500"/>
             </a:pPr>
             <a:r>
-              <a:t>同期沪深300：-8.71%</a:t>
+              <a:t>同期沪深300：-9.59%</a:t>
             </a:r>
           </a:p>
           <a:p>
@@ -3279,7 +3279,7 @@
               <a:defRPr sz="1500"/>
             </a:pPr>
             <a:r>
-              <a:t>现金：94.24万元（20.5%）</a:t>
+              <a:t>现金：94.24万元（20.7%）</a:t>
             </a:r>
           </a:p>
           <a:p>
@@ -3821,37 +3821,37 @@
                         <a:defRPr sz="1100"/>
                       </a:pPr>
                       <a:r>
-                        <a:t>29.06</a:t>
-                      </a:r>
-                    </a:p>
-                  </a:txBody>
-                  <a:tcPr/>
-                </a:tc>
-                <a:tc>
-                  <a:txBody>
-                    <a:bodyPr/>
-                    <a:lstStyle/>
-                    <a:p>
-                      <a:pPr>
-                        <a:defRPr sz="1100"/>
-                      </a:pPr>
-                      <a:r>
-                        <a:t>112.17</a:t>
-                      </a:r>
-                    </a:p>
-                  </a:txBody>
-                  <a:tcPr/>
-                </a:tc>
-                <a:tc>
-                  <a:txBody>
-                    <a:bodyPr/>
-                    <a:lstStyle/>
-                    <a:p>
-                      <a:pPr>
-                        <a:defRPr sz="1100"/>
-                      </a:pPr>
-                      <a:r>
-                        <a:t>-3.81</a:t>
+                        <a:t>28.87</a:t>
+                      </a:r>
+                    </a:p>
+                  </a:txBody>
+                  <a:tcPr/>
+                </a:tc>
+                <a:tc>
+                  <a:txBody>
+                    <a:bodyPr/>
+                    <a:lstStyle/>
+                    <a:p>
+                      <a:pPr>
+                        <a:defRPr sz="1100"/>
+                      </a:pPr>
+                      <a:r>
+                        <a:t>111.44</a:t>
+                      </a:r>
+                    </a:p>
+                  </a:txBody>
+                  <a:tcPr/>
+                </a:tc>
+                <a:tc>
+                  <a:txBody>
+                    <a:bodyPr/>
+                    <a:lstStyle/>
+                    <a:p>
+                      <a:pPr>
+                        <a:defRPr sz="1100"/>
+                      </a:pPr>
+                      <a:r>
+                        <a:t>-4.54</a:t>
                       </a:r>
                     </a:p>
                   </a:txBody>
@@ -3913,37 +3913,37 @@
                         <a:defRPr sz="1100"/>
                       </a:pPr>
                       <a:r>
-                        <a:t>29.69</a:t>
-                      </a:r>
-                    </a:p>
-                  </a:txBody>
-                  <a:tcPr/>
-                </a:tc>
-                <a:tc>
-                  <a:txBody>
-                    <a:bodyPr/>
-                    <a:lstStyle/>
-                    <a:p>
-                      <a:pPr>
-                        <a:defRPr sz="1100"/>
-                      </a:pPr>
-                      <a:r>
-                        <a:t>113.71</a:t>
-                      </a:r>
-                    </a:p>
-                  </a:txBody>
-                  <a:tcPr/>
-                </a:tc>
-                <a:tc>
-                  <a:txBody>
-                    <a:bodyPr/>
-                    <a:lstStyle/>
-                    <a:p>
-                      <a:pPr>
-                        <a:defRPr sz="1100"/>
-                      </a:pPr>
-                      <a:r>
-                        <a:t>1.94</a:t>
+                        <a:t>29.57</a:t>
+                      </a:r>
+                    </a:p>
+                  </a:txBody>
+                  <a:tcPr/>
+                </a:tc>
+                <a:tc>
+                  <a:txBody>
+                    <a:bodyPr/>
+                    <a:lstStyle/>
+                    <a:p>
+                      <a:pPr>
+                        <a:defRPr sz="1100"/>
+                      </a:pPr>
+                      <a:r>
+                        <a:t>113.25</a:t>
+                      </a:r>
+                    </a:p>
+                  </a:txBody>
+                  <a:tcPr/>
+                </a:tc>
+                <a:tc>
+                  <a:txBody>
+                    <a:bodyPr/>
+                    <a:lstStyle/>
+                    <a:p>
+                      <a:pPr>
+                        <a:defRPr sz="1100"/>
+                      </a:pPr>
+                      <a:r>
+                        <a:t>1.48</a:t>
                       </a:r>
                     </a:p>
                   </a:txBody>
@@ -4005,37 +4005,37 @@
                         <a:defRPr sz="1100"/>
                       </a:pPr>
                       <a:r>
-                        <a:t>85.28</a:t>
-                      </a:r>
-                    </a:p>
-                  </a:txBody>
-                  <a:tcPr/>
-                </a:tc>
-                <a:tc>
-                  <a:txBody>
-                    <a:bodyPr/>
-                    <a:lstStyle/>
-                    <a:p>
-                      <a:pPr>
-                        <a:defRPr sz="1100"/>
-                      </a:pPr>
-                      <a:r>
-                        <a:t>38.38</a:t>
-                      </a:r>
-                    </a:p>
-                  </a:txBody>
-                  <a:tcPr/>
-                </a:tc>
-                <a:tc>
-                  <a:txBody>
-                    <a:bodyPr/>
-                    <a:lstStyle/>
-                    <a:p>
-                      <a:pPr>
-                        <a:defRPr sz="1100"/>
-                      </a:pPr>
-                      <a:r>
-                        <a:t>0.0</a:t>
+                        <a:t>83.86</a:t>
+                      </a:r>
+                    </a:p>
+                  </a:txBody>
+                  <a:tcPr/>
+                </a:tc>
+                <a:tc>
+                  <a:txBody>
+                    <a:bodyPr/>
+                    <a:lstStyle/>
+                    <a:p>
+                      <a:pPr>
+                        <a:defRPr sz="1100"/>
+                      </a:pPr>
+                      <a:r>
+                        <a:t>37.74</a:t>
+                      </a:r>
+                    </a:p>
+                  </a:txBody>
+                  <a:tcPr/>
+                </a:tc>
+                <a:tc>
+                  <a:txBody>
+                    <a:bodyPr/>
+                    <a:lstStyle/>
+                    <a:p>
+                      <a:pPr>
+                        <a:defRPr sz="1100"/>
+                      </a:pPr>
+                      <a:r>
+                        <a:t>-0.64</a:t>
                       </a:r>
                     </a:p>
                   </a:txBody>
@@ -4097,37 +4097,37 @@
                         <a:defRPr sz="1100"/>
                       </a:pPr>
                       <a:r>
-                        <a:t>10.65</a:t>
-                      </a:r>
-                    </a:p>
-                  </a:txBody>
-                  <a:tcPr/>
-                </a:tc>
-                <a:tc>
-                  <a:txBody>
-                    <a:bodyPr/>
-                    <a:lstStyle/>
-                    <a:p>
-                      <a:pPr>
-                        <a:defRPr sz="1100"/>
-                      </a:pPr>
-                      <a:r>
-                        <a:t>10.12</a:t>
-                      </a:r>
-                    </a:p>
-                  </a:txBody>
-                  <a:tcPr/>
-                </a:tc>
-                <a:tc>
-                  <a:txBody>
-                    <a:bodyPr/>
-                    <a:lstStyle/>
-                    <a:p>
-                      <a:pPr>
-                        <a:defRPr sz="1100"/>
-                      </a:pPr>
-                      <a:r>
-                        <a:t>0.17</a:t>
+                        <a:t>10.05</a:t>
+                      </a:r>
+                    </a:p>
+                  </a:txBody>
+                  <a:tcPr/>
+                </a:tc>
+                <a:tc>
+                  <a:txBody>
+                    <a:bodyPr/>
+                    <a:lstStyle/>
+                    <a:p>
+                      <a:pPr>
+                        <a:defRPr sz="1100"/>
+                      </a:pPr>
+                      <a:r>
+                        <a:t>9.55</a:t>
+                      </a:r>
+                    </a:p>
+                  </a:txBody>
+                  <a:tcPr/>
+                </a:tc>
+                <a:tc>
+                  <a:txBody>
+                    <a:bodyPr/>
+                    <a:lstStyle/>
+                    <a:p>
+                      <a:pPr>
+                        <a:defRPr sz="1100"/>
+                      </a:pPr>
+                      <a:r>
+                        <a:t>-0.4</a:t>
                       </a:r>
                     </a:p>
                   </a:txBody>
@@ -4189,37 +4189,37 @@
                         <a:defRPr sz="1100"/>
                       </a:pPr>
                       <a:r>
-                        <a:t>15.33</a:t>
-                      </a:r>
-                    </a:p>
-                  </a:txBody>
-                  <a:tcPr/>
-                </a:tc>
-                <a:tc>
-                  <a:txBody>
-                    <a:bodyPr/>
-                    <a:lstStyle/>
-                    <a:p>
-                      <a:pPr>
-                        <a:defRPr sz="1100"/>
-                      </a:pPr>
-                      <a:r>
-                        <a:t>7.67</a:t>
-                      </a:r>
-                    </a:p>
-                  </a:txBody>
-                  <a:tcPr/>
-                </a:tc>
-                <a:tc>
-                  <a:txBody>
-                    <a:bodyPr/>
-                    <a:lstStyle/>
-                    <a:p>
-                      <a:pPr>
-                        <a:defRPr sz="1100"/>
-                      </a:pPr>
-                      <a:r>
-                        <a:t>-1.09</a:t>
+                        <a:t>15.01</a:t>
+                      </a:r>
+                    </a:p>
+                  </a:txBody>
+                  <a:tcPr/>
+                </a:tc>
+                <a:tc>
+                  <a:txBody>
+                    <a:bodyPr/>
+                    <a:lstStyle/>
+                    <a:p>
+                      <a:pPr>
+                        <a:defRPr sz="1100"/>
+                      </a:pPr>
+                      <a:r>
+                        <a:t>7.5</a:t>
+                      </a:r>
+                    </a:p>
+                  </a:txBody>
+                  <a:tcPr/>
+                </a:tc>
+                <a:tc>
+                  <a:txBody>
+                    <a:bodyPr/>
+                    <a:lstStyle/>
+                    <a:p>
+                      <a:pPr>
+                        <a:defRPr sz="1100"/>
+                      </a:pPr>
+                      <a:r>
+                        <a:t>-1.25</a:t>
                       </a:r>
                     </a:p>
                   </a:txBody>
@@ -4281,37 +4281,37 @@
                         <a:defRPr sz="1100"/>
                       </a:pPr>
                       <a:r>
-                        <a:t>26.65</a:t>
-                      </a:r>
-                    </a:p>
-                  </a:txBody>
-                  <a:tcPr/>
-                </a:tc>
-                <a:tc>
-                  <a:txBody>
-                    <a:bodyPr/>
-                    <a:lstStyle/>
-                    <a:p>
-                      <a:pPr>
-                        <a:defRPr sz="1100"/>
-                      </a:pPr>
-                      <a:r>
-                        <a:t>16.26</a:t>
-                      </a:r>
-                    </a:p>
-                  </a:txBody>
-                  <a:tcPr/>
-                </a:tc>
-                <a:tc>
-                  <a:txBody>
-                    <a:bodyPr/>
-                    <a:lstStyle/>
-                    <a:p>
-                      <a:pPr>
-                        <a:defRPr sz="1100"/>
-                      </a:pPr>
-                      <a:r>
-                        <a:t>-5.62</a:t>
+                        <a:t>26.78</a:t>
+                      </a:r>
+                    </a:p>
+                  </a:txBody>
+                  <a:tcPr/>
+                </a:tc>
+                <a:tc>
+                  <a:txBody>
+                    <a:bodyPr/>
+                    <a:lstStyle/>
+                    <a:p>
+                      <a:pPr>
+                        <a:defRPr sz="1100"/>
+                      </a:pPr>
+                      <a:r>
+                        <a:t>16.34</a:t>
+                      </a:r>
+                    </a:p>
+                  </a:txBody>
+                  <a:tcPr/>
+                </a:tc>
+                <a:tc>
+                  <a:txBody>
+                    <a:bodyPr/>
+                    <a:lstStyle/>
+                    <a:p>
+                      <a:pPr>
+                        <a:defRPr sz="1100"/>
+                      </a:pPr>
+                      <a:r>
+                        <a:t>-5.54</a:t>
                       </a:r>
                     </a:p>
                   </a:txBody>
@@ -4373,37 +4373,37 @@
                         <a:defRPr sz="1100"/>
                       </a:pPr>
                       <a:r>
-                        <a:t>134.2</a:t>
-                      </a:r>
-                    </a:p>
-                  </a:txBody>
-                  <a:tcPr/>
-                </a:tc>
-                <a:tc>
-                  <a:txBody>
-                    <a:bodyPr/>
-                    <a:lstStyle/>
-                    <a:p>
-                      <a:pPr>
-                        <a:defRPr sz="1100"/>
-                      </a:pPr>
-                      <a:r>
-                        <a:t>6.71</a:t>
-                      </a:r>
-                    </a:p>
-                  </a:txBody>
-                  <a:tcPr/>
-                </a:tc>
-                <a:tc>
-                  <a:txBody>
-                    <a:bodyPr/>
-                    <a:lstStyle/>
-                    <a:p>
-                      <a:pPr>
-                        <a:defRPr sz="1100"/>
-                      </a:pPr>
-                      <a:r>
-                        <a:t>-0.13</a:t>
+                        <a:t>134.9</a:t>
+                      </a:r>
+                    </a:p>
+                  </a:txBody>
+                  <a:tcPr/>
+                </a:tc>
+                <a:tc>
+                  <a:txBody>
+                    <a:bodyPr/>
+                    <a:lstStyle/>
+                    <a:p>
+                      <a:pPr>
+                        <a:defRPr sz="1100"/>
+                      </a:pPr>
+                      <a:r>
+                        <a:t>6.75</a:t>
+                      </a:r>
+                    </a:p>
+                  </a:txBody>
+                  <a:tcPr/>
+                </a:tc>
+                <a:tc>
+                  <a:txBody>
+                    <a:bodyPr/>
+                    <a:lstStyle/>
+                    <a:p>
+                      <a:pPr>
+                        <a:defRPr sz="1100"/>
+                      </a:pPr>
+                      <a:r>
+                        <a:t>-0.09</a:t>
                       </a:r>
                     </a:p>
                   </a:txBody>
@@ -4465,37 +4465,37 @@
                         <a:defRPr sz="1100"/>
                       </a:pPr>
                       <a:r>
-                        <a:t>5.86</a:t>
-                      </a:r>
-                    </a:p>
-                  </a:txBody>
-                  <a:tcPr/>
-                </a:tc>
-                <a:tc>
-                  <a:txBody>
-                    <a:bodyPr/>
-                    <a:lstStyle/>
-                    <a:p>
-                      <a:pPr>
-                        <a:defRPr sz="1100"/>
-                      </a:pPr>
-                      <a:r>
-                        <a:t>2.93</a:t>
-                      </a:r>
-                    </a:p>
-                  </a:txBody>
-                  <a:tcPr/>
-                </a:tc>
-                <a:tc>
-                  <a:txBody>
-                    <a:bodyPr/>
-                    <a:lstStyle/>
-                    <a:p>
-                      <a:pPr>
-                        <a:defRPr sz="1100"/>
-                      </a:pPr>
-                      <a:r>
-                        <a:t>-0.73</a:t>
+                        <a:t>5.97</a:t>
+                      </a:r>
+                    </a:p>
+                  </a:txBody>
+                  <a:tcPr/>
+                </a:tc>
+                <a:tc>
+                  <a:txBody>
+                    <a:bodyPr/>
+                    <a:lstStyle/>
+                    <a:p>
+                      <a:pPr>
+                        <a:defRPr sz="1100"/>
+                      </a:pPr>
+                      <a:r>
+                        <a:t>2.98</a:t>
+                      </a:r>
+                    </a:p>
+                  </a:txBody>
+                  <a:tcPr/>
+                </a:tc>
+                <a:tc>
+                  <a:txBody>
+                    <a:bodyPr/>
+                    <a:lstStyle/>
+                    <a:p>
+                      <a:pPr>
+                        <a:defRPr sz="1100"/>
+                      </a:pPr>
+                      <a:r>
+                        <a:t>-0.68</a:t>
                       </a:r>
                     </a:p>
                   </a:txBody>
@@ -4557,7 +4557,7 @@
                         <a:defRPr sz="1100"/>
                       </a:pPr>
                       <a:r>
-                        <a:t>17.58</a:t>
+                        <a:t>17.61</a:t>
                       </a:r>
                     </a:p>
                   </a:txBody>
@@ -4649,37 +4649,37 @@
                         <a:defRPr sz="1100"/>
                       </a:pPr>
                       <a:r>
-                        <a:t>160.95</a:t>
-                      </a:r>
-                    </a:p>
-                  </a:txBody>
-                  <a:tcPr/>
-                </a:tc>
-                <a:tc>
-                  <a:txBody>
-                    <a:bodyPr/>
-                    <a:lstStyle/>
-                    <a:p>
-                      <a:pPr>
-                        <a:defRPr sz="1100"/>
-                      </a:pPr>
-                      <a:r>
-                        <a:t>16.09</a:t>
-                      </a:r>
-                    </a:p>
-                  </a:txBody>
-                  <a:tcPr/>
-                </a:tc>
-                <a:tc>
-                  <a:txBody>
-                    <a:bodyPr/>
-                    <a:lstStyle/>
-                    <a:p>
-                      <a:pPr>
-                        <a:defRPr sz="1100"/>
-                      </a:pPr>
-                      <a:r>
-                        <a:t>-1.66</a:t>
+                        <a:t>162.16</a:t>
+                      </a:r>
+                    </a:p>
+                  </a:txBody>
+                  <a:tcPr/>
+                </a:tc>
+                <a:tc>
+                  <a:txBody>
+                    <a:bodyPr/>
+                    <a:lstStyle/>
+                    <a:p>
+                      <a:pPr>
+                        <a:defRPr sz="1100"/>
+                      </a:pPr>
+                      <a:r>
+                        <a:t>16.22</a:t>
+                      </a:r>
+                    </a:p>
+                  </a:txBody>
+                  <a:tcPr/>
+                </a:tc>
+                <a:tc>
+                  <a:txBody>
+                    <a:bodyPr/>
+                    <a:lstStyle/>
+                    <a:p>
+                      <a:pPr>
+                        <a:defRPr sz="1100"/>
+                      </a:pPr>
+                      <a:r>
+                        <a:t>-1.54</a:t>
                       </a:r>
                     </a:p>
                   </a:txBody>
@@ -4741,37 +4741,37 @@
                         <a:defRPr sz="1100"/>
                       </a:pPr>
                       <a:r>
-                        <a:t>147.66</a:t>
-                      </a:r>
-                    </a:p>
-                  </a:txBody>
-                  <a:tcPr/>
-                </a:tc>
-                <a:tc>
-                  <a:txBody>
-                    <a:bodyPr/>
-                    <a:lstStyle/>
-                    <a:p>
-                      <a:pPr>
-                        <a:defRPr sz="1100"/>
-                      </a:pPr>
-                      <a:r>
-                        <a:t>19.2</a:t>
-                      </a:r>
-                    </a:p>
-                  </a:txBody>
-                  <a:tcPr/>
-                </a:tc>
-                <a:tc>
-                  <a:txBody>
-                    <a:bodyPr/>
-                    <a:lstStyle/>
-                    <a:p>
-                      <a:pPr>
-                        <a:defRPr sz="1100"/>
-                      </a:pPr>
-                      <a:r>
-                        <a:t>-1.35</a:t>
+                        <a:t>147.35</a:t>
+                      </a:r>
+                    </a:p>
+                  </a:txBody>
+                  <a:tcPr/>
+                </a:tc>
+                <a:tc>
+                  <a:txBody>
+                    <a:bodyPr/>
+                    <a:lstStyle/>
+                    <a:p>
+                      <a:pPr>
+                        <a:defRPr sz="1100"/>
+                      </a:pPr>
+                      <a:r>
+                        <a:t>19.16</a:t>
+                      </a:r>
+                    </a:p>
+                  </a:txBody>
+                  <a:tcPr/>
+                </a:tc>
+                <a:tc>
+                  <a:txBody>
+                    <a:bodyPr/>
+                    <a:lstStyle/>
+                    <a:p>
+                      <a:pPr>
+                        <a:defRPr sz="1100"/>
+                      </a:pPr>
+                      <a:r>
+                        <a:t>-1.39</a:t>
                       </a:r>
                     </a:p>
                   </a:txBody>
@@ -4833,37 +4833,37 @@
                         <a:defRPr sz="1100"/>
                       </a:pPr>
                       <a:r>
-                        <a:t>39.09</a:t>
-                      </a:r>
-                    </a:p>
-                  </a:txBody>
-                  <a:tcPr/>
-                </a:tc>
-                <a:tc>
-                  <a:txBody>
-                    <a:bodyPr/>
-                    <a:lstStyle/>
-                    <a:p>
-                      <a:pPr>
-                        <a:defRPr sz="1100"/>
-                      </a:pPr>
-                      <a:r>
-                        <a:t>3.91</a:t>
-                      </a:r>
-                    </a:p>
-                  </a:txBody>
-                  <a:tcPr/>
-                </a:tc>
-                <a:tc>
-                  <a:txBody>
-                    <a:bodyPr/>
-                    <a:lstStyle/>
-                    <a:p>
-                      <a:pPr>
-                        <a:defRPr sz="1100"/>
-                      </a:pPr>
-                      <a:r>
-                        <a:t>-0.36</a:t>
+                        <a:t>38.7</a:t>
+                      </a:r>
+                    </a:p>
+                  </a:txBody>
+                  <a:tcPr/>
+                </a:tc>
+                <a:tc>
+                  <a:txBody>
+                    <a:bodyPr/>
+                    <a:lstStyle/>
+                    <a:p>
+                      <a:pPr>
+                        <a:defRPr sz="1100"/>
+                      </a:pPr>
+                      <a:r>
+                        <a:t>3.87</a:t>
+                      </a:r>
+                    </a:p>
+                  </a:txBody>
+                  <a:tcPr/>
+                </a:tc>
+                <a:tc>
+                  <a:txBody>
+                    <a:bodyPr/>
+                    <a:lstStyle/>
+                    <a:p>
+                      <a:pPr>
+                        <a:defRPr sz="1100"/>
+                      </a:pPr>
+                      <a:r>
+                        <a:t>-0.39</a:t>
                       </a:r>
                     </a:p>
                   </a:txBody>
@@ -4925,37 +4925,37 @@
                         <a:defRPr sz="1100"/>
                       </a:pPr>
                       <a:r>
-                        <a:t>40.97</a:t>
-                      </a:r>
-                    </a:p>
-                  </a:txBody>
-                  <a:tcPr/>
-                </a:tc>
-                <a:tc>
-                  <a:txBody>
-                    <a:bodyPr/>
-                    <a:lstStyle/>
-                    <a:p>
-                      <a:pPr>
-                        <a:defRPr sz="1100"/>
-                      </a:pPr>
-                      <a:r>
-                        <a:t>16.39</a:t>
-                      </a:r>
-                    </a:p>
-                  </a:txBody>
-                  <a:tcPr/>
-                </a:tc>
-                <a:tc>
-                  <a:txBody>
-                    <a:bodyPr/>
-                    <a:lstStyle/>
-                    <a:p>
-                      <a:pPr>
-                        <a:defRPr sz="1100"/>
-                      </a:pPr>
-                      <a:r>
-                        <a:t>-1.04</a:t>
+                        <a:t>40.25</a:t>
+                      </a:r>
+                    </a:p>
+                  </a:txBody>
+                  <a:tcPr/>
+                </a:tc>
+                <a:tc>
+                  <a:txBody>
+                    <a:bodyPr/>
+                    <a:lstStyle/>
+                    <a:p>
+                      <a:pPr>
+                        <a:defRPr sz="1100"/>
+                      </a:pPr>
+                      <a:r>
+                        <a:t>16.1</a:t>
+                      </a:r>
+                    </a:p>
+                  </a:txBody>
+                  <a:tcPr/>
+                </a:tc>
+                <a:tc>
+                  <a:txBody>
+                    <a:bodyPr/>
+                    <a:lstStyle/>
+                    <a:p>
+                      <a:pPr>
+                        <a:defRPr sz="1100"/>
+                      </a:pPr>
+                      <a:r>
+                        <a:t>-1.32</a:t>
                       </a:r>
                     </a:p>
                   </a:txBody>
@@ -5041,7 +5041,7 @@
               <a:defRPr sz="1500"/>
             </a:pPr>
             <a:r>
-              <a:t>紫金矿业（601899，有色金属）：综合73.5分；基本面优秀，具备中长期配置价值；趋势中性，观望。</a:t>
+              <a:t>宁德时代（300750，新能源电池）：综合74.5分；基本面优秀，具备中长期配置价值；趋势中性，观望。</a:t>
             </a:r>
           </a:p>
           <a:p>
@@ -5049,7 +5049,7 @@
               <a:defRPr sz="1500"/>
             </a:pPr>
             <a:r>
-              <a:t>美的集团（000333，家电）：综合67.5分；基本面优秀，具备中长期配置价值；中期趋势向上，可关注/持有。</a:t>
+              <a:t>紫金矿业（601899，有色金属）：综合73.5分；基本面优秀，具备中长期配置价值；趋势中性，观望。</a:t>
             </a:r>
           </a:p>
           <a:p>
@@ -5057,7 +5057,7 @@
               <a:defRPr sz="1500"/>
             </a:pPr>
             <a:r>
-              <a:t>立讯精密（002475，消费电子）：综合67.5分；基本面优秀，具备中长期配置价值；趋势中性，观望。</a:t>
+              <a:t>立讯精密（002475，消费电子）：综合72.5分；基本面优秀，具备中长期配置价值；中期趋势向上，可关注/持有。</a:t>
             </a:r>
           </a:p>
           <a:p>
@@ -5065,7 +5065,7 @@
               <a:defRPr sz="1500"/>
             </a:pPr>
             <a:r>
-              <a:t>宁德时代（300750，新能源电池）：综合67.0分；基本面优秀，具备中长期配置价值；趋势偏弱，回避或减仓。</a:t>
+              <a:t>招商银行（600036，银行）：综合67.0分；基本面优秀，具备中长期配置价值；中期趋势向上，可关注/持有。</a:t>
             </a:r>
           </a:p>
           <a:p>
@@ -5073,7 +5073,7 @@
               <a:defRPr sz="1500"/>
             </a:pPr>
             <a:r>
-              <a:t>招商银行（600036，银行）：综合67.0分；基本面优秀，具备中长期配置价值；中期趋势向上，可关注/持有。</a:t>
+              <a:t>长江电力（600900，电力）：综合67.0分；基本面优秀，具备中长期配置价值；趋势中性，观望。</a:t>
             </a:r>
           </a:p>
         </p:txBody>

--- a/outputs/12_中期路演.pptx
+++ b/outputs/12_中期路演.pptx
@@ -3167,7 +3167,7 @@
               <a:defRPr sz="1500"/>
             </a:pPr>
             <a:r>
-              <a:t>数据截止：2026-10-21</a:t>
+              <a:t>数据截止：2026-10-22</a:t>
             </a:r>
           </a:p>
         </p:txBody>
@@ -3255,7 +3255,7 @@
               <a:defRPr sz="1500"/>
             </a:pPr>
             <a:r>
-              <a:t>当前总资产：456.01万元</a:t>
+              <a:t>当前总资产：448.99万元</a:t>
             </a:r>
           </a:p>
           <a:p>
@@ -3263,7 +3263,7 @@
               <a:defRPr sz="1500"/>
             </a:pPr>
             <a:r>
-              <a:t>累计收益率：-8.80%</a:t>
+              <a:t>累计收益率：-10.20%</a:t>
             </a:r>
           </a:p>
           <a:p>
@@ -3271,7 +3271,7 @@
               <a:defRPr sz="1500"/>
             </a:pPr>
             <a:r>
-              <a:t>同期沪深300：-9.59%</a:t>
+              <a:t>同期沪深300：-11.25%</a:t>
             </a:r>
           </a:p>
           <a:p>
@@ -3279,7 +3279,7 @@
               <a:defRPr sz="1500"/>
             </a:pPr>
             <a:r>
-              <a:t>现金：94.24万元（20.7%）</a:t>
+              <a:t>现金：201.70万元（44.9%）</a:t>
             </a:r>
           </a:p>
           <a:p>
@@ -3287,7 +3287,7 @@
               <a:defRPr sz="1500"/>
             </a:pPr>
             <a:r>
-              <a:t>持仓：13只，累计交易41笔</a:t>
+              <a:t>持仓：12只，累计交易42笔</a:t>
             </a:r>
           </a:p>
         </p:txBody>
@@ -3582,7 +3582,7 @@
                 <a:gridCol w="1849069"/>
                 <a:gridCol w="1849070"/>
               </a:tblGrid>
-              <a:tr h="256032">
+              <a:tr h="274320">
                 <a:tc>
                   <a:txBody>
                     <a:bodyPr/>
@@ -3674,7 +3674,7 @@
                   <a:tcPr/>
                 </a:tc>
               </a:tr>
-              <a:tr h="256032">
+              <a:tr h="274320">
                 <a:tc>
                   <a:txBody>
                     <a:bodyPr/>
@@ -3766,385 +3766,569 @@
                   <a:tcPr/>
                 </a:tc>
               </a:tr>
-              <a:tr h="256032">
-                <a:tc>
-                  <a:txBody>
-                    <a:bodyPr/>
-                    <a:lstStyle/>
-                    <a:p>
-                      <a:pPr>
-                        <a:defRPr sz="1100"/>
-                      </a:pPr>
-                      <a:r>
-                        <a:t>紫金矿业</a:t>
-                      </a:r>
-                    </a:p>
-                  </a:txBody>
-                  <a:tcPr/>
-                </a:tc>
-                <a:tc>
-                  <a:txBody>
-                    <a:bodyPr/>
-                    <a:lstStyle/>
-                    <a:p>
-                      <a:pPr>
-                        <a:defRPr sz="1100"/>
-                      </a:pPr>
-                      <a:r>
-                        <a:t>38600</a:t>
-                      </a:r>
-                    </a:p>
-                  </a:txBody>
-                  <a:tcPr/>
-                </a:tc>
-                <a:tc>
-                  <a:txBody>
-                    <a:bodyPr/>
-                    <a:lstStyle/>
-                    <a:p>
-                      <a:pPr>
-                        <a:defRPr sz="1100"/>
-                      </a:pPr>
-                      <a:r>
-                        <a:t>30.05</a:t>
-                      </a:r>
-                    </a:p>
-                  </a:txBody>
-                  <a:tcPr/>
-                </a:tc>
-                <a:tc>
-                  <a:txBody>
-                    <a:bodyPr/>
-                    <a:lstStyle/>
-                    <a:p>
-                      <a:pPr>
-                        <a:defRPr sz="1100"/>
-                      </a:pPr>
-                      <a:r>
-                        <a:t>28.87</a:t>
-                      </a:r>
-                    </a:p>
-                  </a:txBody>
-                  <a:tcPr/>
-                </a:tc>
-                <a:tc>
-                  <a:txBody>
-                    <a:bodyPr/>
-                    <a:lstStyle/>
-                    <a:p>
-                      <a:pPr>
-                        <a:defRPr sz="1100"/>
-                      </a:pPr>
-                      <a:r>
-                        <a:t>111.44</a:t>
-                      </a:r>
-                    </a:p>
-                  </a:txBody>
-                  <a:tcPr/>
-                </a:tc>
-                <a:tc>
-                  <a:txBody>
-                    <a:bodyPr/>
-                    <a:lstStyle/>
-                    <a:p>
-                      <a:pPr>
-                        <a:defRPr sz="1100"/>
-                      </a:pPr>
-                      <a:r>
-                        <a:t>-4.54</a:t>
+              <a:tr h="274320">
+                <a:tc>
+                  <a:txBody>
+                    <a:bodyPr/>
+                    <a:lstStyle/>
+                    <a:p>
+                      <a:pPr>
+                        <a:defRPr sz="1100"/>
+                      </a:pPr>
+                      <a:r>
+                        <a:t>长江电力</a:t>
+                      </a:r>
+                    </a:p>
+                  </a:txBody>
+                  <a:tcPr/>
+                </a:tc>
+                <a:tc>
+                  <a:txBody>
+                    <a:bodyPr/>
+                    <a:lstStyle/>
+                    <a:p>
+                      <a:pPr>
+                        <a:defRPr sz="1100"/>
+                      </a:pPr>
+                      <a:r>
+                        <a:t>38300</a:t>
+                      </a:r>
+                    </a:p>
+                  </a:txBody>
+                  <a:tcPr/>
+                </a:tc>
+                <a:tc>
+                  <a:txBody>
+                    <a:bodyPr/>
+                    <a:lstStyle/>
+                    <a:p>
+                      <a:pPr>
+                        <a:defRPr sz="1100"/>
+                      </a:pPr>
+                      <a:r>
+                        <a:t>29.18</a:t>
+                      </a:r>
+                    </a:p>
+                  </a:txBody>
+                  <a:tcPr/>
+                </a:tc>
+                <a:tc>
+                  <a:txBody>
+                    <a:bodyPr/>
+                    <a:lstStyle/>
+                    <a:p>
+                      <a:pPr>
+                        <a:defRPr sz="1100"/>
+                      </a:pPr>
+                      <a:r>
+                        <a:t>29.82</a:t>
+                      </a:r>
+                    </a:p>
+                  </a:txBody>
+                  <a:tcPr/>
+                </a:tc>
+                <a:tc>
+                  <a:txBody>
+                    <a:bodyPr/>
+                    <a:lstStyle/>
+                    <a:p>
+                      <a:pPr>
+                        <a:defRPr sz="1100"/>
+                      </a:pPr>
+                      <a:r>
+                        <a:t>114.21</a:t>
+                      </a:r>
+                    </a:p>
+                  </a:txBody>
+                  <a:tcPr/>
+                </a:tc>
+                <a:tc>
+                  <a:txBody>
+                    <a:bodyPr/>
+                    <a:lstStyle/>
+                    <a:p>
+                      <a:pPr>
+                        <a:defRPr sz="1100"/>
+                      </a:pPr>
+                      <a:r>
+                        <a:t>2.44</a:t>
                       </a:r>
                     </a:p>
                   </a:txBody>
                   <a:tcPr/>
                 </a:tc>
               </a:tr>
-              <a:tr h="256032">
-                <a:tc>
-                  <a:txBody>
-                    <a:bodyPr/>
-                    <a:lstStyle/>
-                    <a:p>
-                      <a:pPr>
-                        <a:defRPr sz="1100"/>
-                      </a:pPr>
-                      <a:r>
-                        <a:t>长江电力</a:t>
-                      </a:r>
-                    </a:p>
-                  </a:txBody>
-                  <a:tcPr/>
-                </a:tc>
-                <a:tc>
-                  <a:txBody>
-                    <a:bodyPr/>
-                    <a:lstStyle/>
-                    <a:p>
-                      <a:pPr>
-                        <a:defRPr sz="1100"/>
-                      </a:pPr>
-                      <a:r>
-                        <a:t>38300</a:t>
-                      </a:r>
-                    </a:p>
-                  </a:txBody>
-                  <a:tcPr/>
-                </a:tc>
-                <a:tc>
-                  <a:txBody>
-                    <a:bodyPr/>
-                    <a:lstStyle/>
-                    <a:p>
-                      <a:pPr>
-                        <a:defRPr sz="1100"/>
-                      </a:pPr>
-                      <a:r>
-                        <a:t>29.18</a:t>
-                      </a:r>
-                    </a:p>
-                  </a:txBody>
-                  <a:tcPr/>
-                </a:tc>
-                <a:tc>
-                  <a:txBody>
-                    <a:bodyPr/>
-                    <a:lstStyle/>
-                    <a:p>
-                      <a:pPr>
-                        <a:defRPr sz="1100"/>
-                      </a:pPr>
-                      <a:r>
-                        <a:t>29.57</a:t>
-                      </a:r>
-                    </a:p>
-                  </a:txBody>
-                  <a:tcPr/>
-                </a:tc>
-                <a:tc>
-                  <a:txBody>
-                    <a:bodyPr/>
-                    <a:lstStyle/>
-                    <a:p>
-                      <a:pPr>
-                        <a:defRPr sz="1100"/>
-                      </a:pPr>
-                      <a:r>
-                        <a:t>113.25</a:t>
-                      </a:r>
-                    </a:p>
-                  </a:txBody>
-                  <a:tcPr/>
-                </a:tc>
-                <a:tc>
-                  <a:txBody>
-                    <a:bodyPr/>
-                    <a:lstStyle/>
-                    <a:p>
-                      <a:pPr>
-                        <a:defRPr sz="1100"/>
-                      </a:pPr>
-                      <a:r>
-                        <a:t>1.48</a:t>
+              <a:tr h="274320">
+                <a:tc>
+                  <a:txBody>
+                    <a:bodyPr/>
+                    <a:lstStyle/>
+                    <a:p>
+                      <a:pPr>
+                        <a:defRPr sz="1100"/>
+                      </a:pPr>
+                      <a:r>
+                        <a:t>美的集团</a:t>
+                      </a:r>
+                    </a:p>
+                  </a:txBody>
+                  <a:tcPr/>
+                </a:tc>
+                <a:tc>
+                  <a:txBody>
+                    <a:bodyPr/>
+                    <a:lstStyle/>
+                    <a:p>
+                      <a:pPr>
+                        <a:defRPr sz="1100"/>
+                      </a:pPr>
+                      <a:r>
+                        <a:t>4500</a:t>
+                      </a:r>
+                    </a:p>
+                  </a:txBody>
+                  <a:tcPr/>
+                </a:tc>
+                <a:tc>
+                  <a:txBody>
+                    <a:bodyPr/>
+                    <a:lstStyle/>
+                    <a:p>
+                      <a:pPr>
+                        <a:defRPr sz="1100"/>
+                      </a:pPr>
+                      <a:r>
+                        <a:t>85.28</a:t>
+                      </a:r>
+                    </a:p>
+                  </a:txBody>
+                  <a:tcPr/>
+                </a:tc>
+                <a:tc>
+                  <a:txBody>
+                    <a:bodyPr/>
+                    <a:lstStyle/>
+                    <a:p>
+                      <a:pPr>
+                        <a:defRPr sz="1100"/>
+                      </a:pPr>
+                      <a:r>
+                        <a:t>85.29</a:t>
+                      </a:r>
+                    </a:p>
+                  </a:txBody>
+                  <a:tcPr/>
+                </a:tc>
+                <a:tc>
+                  <a:txBody>
+                    <a:bodyPr/>
+                    <a:lstStyle/>
+                    <a:p>
+                      <a:pPr>
+                        <a:defRPr sz="1100"/>
+                      </a:pPr>
+                      <a:r>
+                        <a:t>38.38</a:t>
+                      </a:r>
+                    </a:p>
+                  </a:txBody>
+                  <a:tcPr/>
+                </a:tc>
+                <a:tc>
+                  <a:txBody>
+                    <a:bodyPr/>
+                    <a:lstStyle/>
+                    <a:p>
+                      <a:pPr>
+                        <a:defRPr sz="1100"/>
+                      </a:pPr>
+                      <a:r>
+                        <a:t>0.0</a:t>
                       </a:r>
                     </a:p>
                   </a:txBody>
                   <a:tcPr/>
                 </a:tc>
               </a:tr>
-              <a:tr h="256032">
-                <a:tc>
-                  <a:txBody>
-                    <a:bodyPr/>
-                    <a:lstStyle/>
-                    <a:p>
-                      <a:pPr>
-                        <a:defRPr sz="1100"/>
-                      </a:pPr>
-                      <a:r>
-                        <a:t>美的集团</a:t>
-                      </a:r>
-                    </a:p>
-                  </a:txBody>
-                  <a:tcPr/>
-                </a:tc>
-                <a:tc>
-                  <a:txBody>
-                    <a:bodyPr/>
-                    <a:lstStyle/>
-                    <a:p>
-                      <a:pPr>
-                        <a:defRPr sz="1100"/>
-                      </a:pPr>
-                      <a:r>
-                        <a:t>4500</a:t>
-                      </a:r>
-                    </a:p>
-                  </a:txBody>
-                  <a:tcPr/>
-                </a:tc>
-                <a:tc>
-                  <a:txBody>
-                    <a:bodyPr/>
-                    <a:lstStyle/>
-                    <a:p>
-                      <a:pPr>
-                        <a:defRPr sz="1100"/>
-                      </a:pPr>
-                      <a:r>
-                        <a:t>85.28</a:t>
-                      </a:r>
-                    </a:p>
-                  </a:txBody>
-                  <a:tcPr/>
-                </a:tc>
-                <a:tc>
-                  <a:txBody>
-                    <a:bodyPr/>
-                    <a:lstStyle/>
-                    <a:p>
-                      <a:pPr>
-                        <a:defRPr sz="1100"/>
-                      </a:pPr>
-                      <a:r>
-                        <a:t>83.86</a:t>
-                      </a:r>
-                    </a:p>
-                  </a:txBody>
-                  <a:tcPr/>
-                </a:tc>
-                <a:tc>
-                  <a:txBody>
-                    <a:bodyPr/>
-                    <a:lstStyle/>
-                    <a:p>
-                      <a:pPr>
-                        <a:defRPr sz="1100"/>
-                      </a:pPr>
-                      <a:r>
-                        <a:t>37.74</a:t>
-                      </a:r>
-                    </a:p>
-                  </a:txBody>
-                  <a:tcPr/>
-                </a:tc>
-                <a:tc>
-                  <a:txBody>
-                    <a:bodyPr/>
-                    <a:lstStyle/>
-                    <a:p>
-                      <a:pPr>
-                        <a:defRPr sz="1100"/>
-                      </a:pPr>
-                      <a:r>
-                        <a:t>-0.64</a:t>
+              <a:tr h="274320">
+                <a:tc>
+                  <a:txBody>
+                    <a:bodyPr/>
+                    <a:lstStyle/>
+                    <a:p>
+                      <a:pPr>
+                        <a:defRPr sz="1100"/>
+                      </a:pPr>
+                      <a:r>
+                        <a:t>新集能源</a:t>
+                      </a:r>
+                    </a:p>
+                  </a:txBody>
+                  <a:tcPr/>
+                </a:tc>
+                <a:tc>
+                  <a:txBody>
+                    <a:bodyPr/>
+                    <a:lstStyle/>
+                    <a:p>
+                      <a:pPr>
+                        <a:defRPr sz="1100"/>
+                      </a:pPr>
+                      <a:r>
+                        <a:t>9500</a:t>
+                      </a:r>
+                    </a:p>
+                  </a:txBody>
+                  <a:tcPr/>
+                </a:tc>
+                <a:tc>
+                  <a:txBody>
+                    <a:bodyPr/>
+                    <a:lstStyle/>
+                    <a:p>
+                      <a:pPr>
+                        <a:defRPr sz="1100"/>
+                      </a:pPr>
+                      <a:r>
+                        <a:t>10.47</a:t>
+                      </a:r>
+                    </a:p>
+                  </a:txBody>
+                  <a:tcPr/>
+                </a:tc>
+                <a:tc>
+                  <a:txBody>
+                    <a:bodyPr/>
+                    <a:lstStyle/>
+                    <a:p>
+                      <a:pPr>
+                        <a:defRPr sz="1100"/>
+                      </a:pPr>
+                      <a:r>
+                        <a:t>9.73</a:t>
+                      </a:r>
+                    </a:p>
+                  </a:txBody>
+                  <a:tcPr/>
+                </a:tc>
+                <a:tc>
+                  <a:txBody>
+                    <a:bodyPr/>
+                    <a:lstStyle/>
+                    <a:p>
+                      <a:pPr>
+                        <a:defRPr sz="1100"/>
+                      </a:pPr>
+                      <a:r>
+                        <a:t>9.24</a:t>
+                      </a:r>
+                    </a:p>
+                  </a:txBody>
+                  <a:tcPr/>
+                </a:tc>
+                <a:tc>
+                  <a:txBody>
+                    <a:bodyPr/>
+                    <a:lstStyle/>
+                    <a:p>
+                      <a:pPr>
+                        <a:defRPr sz="1100"/>
+                      </a:pPr>
+                      <a:r>
+                        <a:t>-0.71</a:t>
                       </a:r>
                     </a:p>
                   </a:txBody>
                   <a:tcPr/>
                 </a:tc>
               </a:tr>
-              <a:tr h="256032">
-                <a:tc>
-                  <a:txBody>
-                    <a:bodyPr/>
-                    <a:lstStyle/>
-                    <a:p>
-                      <a:pPr>
-                        <a:defRPr sz="1100"/>
-                      </a:pPr>
-                      <a:r>
-                        <a:t>新集能源</a:t>
-                      </a:r>
-                    </a:p>
-                  </a:txBody>
-                  <a:tcPr/>
-                </a:tc>
-                <a:tc>
-                  <a:txBody>
-                    <a:bodyPr/>
-                    <a:lstStyle/>
-                    <a:p>
-                      <a:pPr>
-                        <a:defRPr sz="1100"/>
-                      </a:pPr>
-                      <a:r>
-                        <a:t>9500</a:t>
-                      </a:r>
-                    </a:p>
-                  </a:txBody>
-                  <a:tcPr/>
-                </a:tc>
-                <a:tc>
-                  <a:txBody>
-                    <a:bodyPr/>
-                    <a:lstStyle/>
-                    <a:p>
-                      <a:pPr>
-                        <a:defRPr sz="1100"/>
-                      </a:pPr>
-                      <a:r>
-                        <a:t>10.47</a:t>
-                      </a:r>
-                    </a:p>
-                  </a:txBody>
-                  <a:tcPr/>
-                </a:tc>
-                <a:tc>
-                  <a:txBody>
-                    <a:bodyPr/>
-                    <a:lstStyle/>
-                    <a:p>
-                      <a:pPr>
-                        <a:defRPr sz="1100"/>
-                      </a:pPr>
-                      <a:r>
-                        <a:t>10.05</a:t>
-                      </a:r>
-                    </a:p>
-                  </a:txBody>
-                  <a:tcPr/>
-                </a:tc>
-                <a:tc>
-                  <a:txBody>
-                    <a:bodyPr/>
-                    <a:lstStyle/>
-                    <a:p>
-                      <a:pPr>
-                        <a:defRPr sz="1100"/>
-                      </a:pPr>
-                      <a:r>
-                        <a:t>9.55</a:t>
-                      </a:r>
-                    </a:p>
-                  </a:txBody>
-                  <a:tcPr/>
-                </a:tc>
-                <a:tc>
-                  <a:txBody>
-                    <a:bodyPr/>
-                    <a:lstStyle/>
-                    <a:p>
-                      <a:pPr>
-                        <a:defRPr sz="1100"/>
-                      </a:pPr>
-                      <a:r>
-                        <a:t>-0.4</a:t>
+              <a:tr h="274320">
+                <a:tc>
+                  <a:txBody>
+                    <a:bodyPr/>
+                    <a:lstStyle/>
+                    <a:p>
+                      <a:pPr>
+                        <a:defRPr sz="1100"/>
+                      </a:pPr>
+                      <a:r>
+                        <a:t>恺英网络</a:t>
+                      </a:r>
+                    </a:p>
+                  </a:txBody>
+                  <a:tcPr/>
+                </a:tc>
+                <a:tc>
+                  <a:txBody>
+                    <a:bodyPr/>
+                    <a:lstStyle/>
+                    <a:p>
+                      <a:pPr>
+                        <a:defRPr sz="1100"/>
+                      </a:pPr>
+                      <a:r>
+                        <a:t>5000</a:t>
+                      </a:r>
+                    </a:p>
+                  </a:txBody>
+                  <a:tcPr/>
+                </a:tc>
+                <a:tc>
+                  <a:txBody>
+                    <a:bodyPr/>
+                    <a:lstStyle/>
+                    <a:p>
+                      <a:pPr>
+                        <a:defRPr sz="1100"/>
+                      </a:pPr>
+                      <a:r>
+                        <a:t>17.52</a:t>
+                      </a:r>
+                    </a:p>
+                  </a:txBody>
+                  <a:tcPr/>
+                </a:tc>
+                <a:tc>
+                  <a:txBody>
+                    <a:bodyPr/>
+                    <a:lstStyle/>
+                    <a:p>
+                      <a:pPr>
+                        <a:defRPr sz="1100"/>
+                      </a:pPr>
+                      <a:r>
+                        <a:t>14.59</a:t>
+                      </a:r>
+                    </a:p>
+                  </a:txBody>
+                  <a:tcPr/>
+                </a:tc>
+                <a:tc>
+                  <a:txBody>
+                    <a:bodyPr/>
+                    <a:lstStyle/>
+                    <a:p>
+                      <a:pPr>
+                        <a:defRPr sz="1100"/>
+                      </a:pPr>
+                      <a:r>
+                        <a:t>7.29</a:t>
+                      </a:r>
+                    </a:p>
+                  </a:txBody>
+                  <a:tcPr/>
+                </a:tc>
+                <a:tc>
+                  <a:txBody>
+                    <a:bodyPr/>
+                    <a:lstStyle/>
+                    <a:p>
+                      <a:pPr>
+                        <a:defRPr sz="1100"/>
+                      </a:pPr>
+                      <a:r>
+                        <a:t>-1.46</a:t>
                       </a:r>
                     </a:p>
                   </a:txBody>
                   <a:tcPr/>
                 </a:tc>
               </a:tr>
-              <a:tr h="256032">
-                <a:tc>
-                  <a:txBody>
-                    <a:bodyPr/>
-                    <a:lstStyle/>
-                    <a:p>
-                      <a:pPr>
-                        <a:defRPr sz="1100"/>
-                      </a:pPr>
-                      <a:r>
-                        <a:t>恺英网络</a:t>
+              <a:tr h="274320">
+                <a:tc>
+                  <a:txBody>
+                    <a:bodyPr/>
+                    <a:lstStyle/>
+                    <a:p>
+                      <a:pPr>
+                        <a:defRPr sz="1100"/>
+                      </a:pPr>
+                      <a:r>
+                        <a:t>星网锐捷</a:t>
+                      </a:r>
+                    </a:p>
+                  </a:txBody>
+                  <a:tcPr/>
+                </a:tc>
+                <a:tc>
+                  <a:txBody>
+                    <a:bodyPr/>
+                    <a:lstStyle/>
+                    <a:p>
+                      <a:pPr>
+                        <a:defRPr sz="1100"/>
+                      </a:pPr>
+                      <a:r>
+                        <a:t>6100</a:t>
+                      </a:r>
+                    </a:p>
+                  </a:txBody>
+                  <a:tcPr/>
+                </a:tc>
+                <a:tc>
+                  <a:txBody>
+                    <a:bodyPr/>
+                    <a:lstStyle/>
+                    <a:p>
+                      <a:pPr>
+                        <a:defRPr sz="1100"/>
+                      </a:pPr>
+                      <a:r>
+                        <a:t>35.87</a:t>
+                      </a:r>
+                    </a:p>
+                  </a:txBody>
+                  <a:tcPr/>
+                </a:tc>
+                <a:tc>
+                  <a:txBody>
+                    <a:bodyPr/>
+                    <a:lstStyle/>
+                    <a:p>
+                      <a:pPr>
+                        <a:defRPr sz="1100"/>
+                      </a:pPr>
+                      <a:r>
+                        <a:t>25.7</a:t>
+                      </a:r>
+                    </a:p>
+                  </a:txBody>
+                  <a:tcPr/>
+                </a:tc>
+                <a:tc>
+                  <a:txBody>
+                    <a:bodyPr/>
+                    <a:lstStyle/>
+                    <a:p>
+                      <a:pPr>
+                        <a:defRPr sz="1100"/>
+                      </a:pPr>
+                      <a:r>
+                        <a:t>15.68</a:t>
+                      </a:r>
+                    </a:p>
+                  </a:txBody>
+                  <a:tcPr/>
+                </a:tc>
+                <a:tc>
+                  <a:txBody>
+                    <a:bodyPr/>
+                    <a:lstStyle/>
+                    <a:p>
+                      <a:pPr>
+                        <a:defRPr sz="1100"/>
+                      </a:pPr>
+                      <a:r>
+                        <a:t>-6.2</a:t>
+                      </a:r>
+                    </a:p>
+                  </a:txBody>
+                  <a:tcPr/>
+                </a:tc>
+              </a:tr>
+              <a:tr h="274320">
+                <a:tc>
+                  <a:txBody>
+                    <a:bodyPr/>
+                    <a:lstStyle/>
+                    <a:p>
+                      <a:pPr>
+                        <a:defRPr sz="1100"/>
+                      </a:pPr>
+                      <a:r>
+                        <a:t>深信服</a:t>
+                      </a:r>
+                    </a:p>
+                  </a:txBody>
+                  <a:tcPr/>
+                </a:tc>
+                <a:tc>
+                  <a:txBody>
+                    <a:bodyPr/>
+                    <a:lstStyle/>
+                    <a:p>
+                      <a:pPr>
+                        <a:defRPr sz="1100"/>
+                      </a:pPr>
+                      <a:r>
+                        <a:t>500</a:t>
+                      </a:r>
+                    </a:p>
+                  </a:txBody>
+                  <a:tcPr/>
+                </a:tc>
+                <a:tc>
+                  <a:txBody>
+                    <a:bodyPr/>
+                    <a:lstStyle/>
+                    <a:p>
+                      <a:pPr>
+                        <a:defRPr sz="1100"/>
+                      </a:pPr>
+                      <a:r>
+                        <a:t>136.73</a:t>
+                      </a:r>
+                    </a:p>
+                  </a:txBody>
+                  <a:tcPr/>
+                </a:tc>
+                <a:tc>
+                  <a:txBody>
+                    <a:bodyPr/>
+                    <a:lstStyle/>
+                    <a:p>
+                      <a:pPr>
+                        <a:defRPr sz="1100"/>
+                      </a:pPr>
+                      <a:r>
+                        <a:t>130.03</a:t>
+                      </a:r>
+                    </a:p>
+                  </a:txBody>
+                  <a:tcPr/>
+                </a:tc>
+                <a:tc>
+                  <a:txBody>
+                    <a:bodyPr/>
+                    <a:lstStyle/>
+                    <a:p>
+                      <a:pPr>
+                        <a:defRPr sz="1100"/>
+                      </a:pPr>
+                      <a:r>
+                        <a:t>6.5</a:t>
+                      </a:r>
+                    </a:p>
+                  </a:txBody>
+                  <a:tcPr/>
+                </a:tc>
+                <a:tc>
+                  <a:txBody>
+                    <a:bodyPr/>
+                    <a:lstStyle/>
+                    <a:p>
+                      <a:pPr>
+                        <a:defRPr sz="1100"/>
+                      </a:pPr>
+                      <a:r>
+                        <a:t>-0.33</a:t>
+                      </a:r>
+                    </a:p>
+                  </a:txBody>
+                  <a:tcPr/>
+                </a:tc>
+              </a:tr>
+              <a:tr h="274320">
+                <a:tc>
+                  <a:txBody>
+                    <a:bodyPr/>
+                    <a:lstStyle/>
+                    <a:p>
+                      <a:pPr>
+                        <a:defRPr sz="1100"/>
+                      </a:pPr>
+                      <a:r>
+                        <a:t>哈药股份</a:t>
                       </a:r>
                     </a:p>
                   </a:txBody>
@@ -4174,703 +4358,427 @@
                         <a:defRPr sz="1100"/>
                       </a:pPr>
                       <a:r>
-                        <a:t>17.52</a:t>
-                      </a:r>
-                    </a:p>
-                  </a:txBody>
-                  <a:tcPr/>
-                </a:tc>
-                <a:tc>
-                  <a:txBody>
-                    <a:bodyPr/>
-                    <a:lstStyle/>
-                    <a:p>
-                      <a:pPr>
-                        <a:defRPr sz="1100"/>
-                      </a:pPr>
-                      <a:r>
-                        <a:t>15.01</a:t>
-                      </a:r>
-                    </a:p>
-                  </a:txBody>
-                  <a:tcPr/>
-                </a:tc>
-                <a:tc>
-                  <a:txBody>
-                    <a:bodyPr/>
-                    <a:lstStyle/>
-                    <a:p>
-                      <a:pPr>
-                        <a:defRPr sz="1100"/>
-                      </a:pPr>
-                      <a:r>
-                        <a:t>7.5</a:t>
-                      </a:r>
-                    </a:p>
-                  </a:txBody>
-                  <a:tcPr/>
-                </a:tc>
-                <a:tc>
-                  <a:txBody>
-                    <a:bodyPr/>
-                    <a:lstStyle/>
-                    <a:p>
-                      <a:pPr>
-                        <a:defRPr sz="1100"/>
-                      </a:pPr>
-                      <a:r>
-                        <a:t>-1.25</a:t>
+                        <a:t>7.33</a:t>
+                      </a:r>
+                    </a:p>
+                  </a:txBody>
+                  <a:tcPr/>
+                </a:tc>
+                <a:tc>
+                  <a:txBody>
+                    <a:bodyPr/>
+                    <a:lstStyle/>
+                    <a:p>
+                      <a:pPr>
+                        <a:defRPr sz="1100"/>
+                      </a:pPr>
+                      <a:r>
+                        <a:t>5.56</a:t>
+                      </a:r>
+                    </a:p>
+                  </a:txBody>
+                  <a:tcPr/>
+                </a:tc>
+                <a:tc>
+                  <a:txBody>
+                    <a:bodyPr/>
+                    <a:lstStyle/>
+                    <a:p>
+                      <a:pPr>
+                        <a:defRPr sz="1100"/>
+                      </a:pPr>
+                      <a:r>
+                        <a:t>2.78</a:t>
+                      </a:r>
+                    </a:p>
+                  </a:txBody>
+                  <a:tcPr/>
+                </a:tc>
+                <a:tc>
+                  <a:txBody>
+                    <a:bodyPr/>
+                    <a:lstStyle/>
+                    <a:p>
+                      <a:pPr>
+                        <a:defRPr sz="1100"/>
+                      </a:pPr>
+                      <a:r>
+                        <a:t>-0.89</a:t>
                       </a:r>
                     </a:p>
                   </a:txBody>
                   <a:tcPr/>
                 </a:tc>
               </a:tr>
-              <a:tr h="256032">
-                <a:tc>
-                  <a:txBody>
-                    <a:bodyPr/>
-                    <a:lstStyle/>
-                    <a:p>
-                      <a:pPr>
-                        <a:defRPr sz="1100"/>
-                      </a:pPr>
-                      <a:r>
-                        <a:t>星网锐捷</a:t>
-                      </a:r>
-                    </a:p>
-                  </a:txBody>
-                  <a:tcPr/>
-                </a:tc>
-                <a:tc>
-                  <a:txBody>
-                    <a:bodyPr/>
-                    <a:lstStyle/>
-                    <a:p>
-                      <a:pPr>
-                        <a:defRPr sz="1100"/>
-                      </a:pPr>
-                      <a:r>
-                        <a:t>6100</a:t>
-                      </a:r>
-                    </a:p>
-                  </a:txBody>
-                  <a:tcPr/>
-                </a:tc>
-                <a:tc>
-                  <a:txBody>
-                    <a:bodyPr/>
-                    <a:lstStyle/>
-                    <a:p>
-                      <a:pPr>
-                        <a:defRPr sz="1100"/>
-                      </a:pPr>
-                      <a:r>
-                        <a:t>35.87</a:t>
-                      </a:r>
-                    </a:p>
-                  </a:txBody>
-                  <a:tcPr/>
-                </a:tc>
-                <a:tc>
-                  <a:txBody>
-                    <a:bodyPr/>
-                    <a:lstStyle/>
-                    <a:p>
-                      <a:pPr>
-                        <a:defRPr sz="1100"/>
-                      </a:pPr>
-                      <a:r>
-                        <a:t>26.78</a:t>
-                      </a:r>
-                    </a:p>
-                  </a:txBody>
-                  <a:tcPr/>
-                </a:tc>
-                <a:tc>
-                  <a:txBody>
-                    <a:bodyPr/>
-                    <a:lstStyle/>
-                    <a:p>
-                      <a:pPr>
-                        <a:defRPr sz="1100"/>
-                      </a:pPr>
-                      <a:r>
-                        <a:t>16.34</a:t>
-                      </a:r>
-                    </a:p>
-                  </a:txBody>
-                  <a:tcPr/>
-                </a:tc>
-                <a:tc>
-                  <a:txBody>
-                    <a:bodyPr/>
-                    <a:lstStyle/>
-                    <a:p>
-                      <a:pPr>
-                        <a:defRPr sz="1100"/>
-                      </a:pPr>
-                      <a:r>
-                        <a:t>-5.54</a:t>
+              <a:tr h="274320">
+                <a:tc>
+                  <a:txBody>
+                    <a:bodyPr/>
+                    <a:lstStyle/>
+                    <a:p>
+                      <a:pPr>
+                        <a:defRPr sz="1100"/>
+                      </a:pPr>
+                      <a:r>
+                        <a:t>招商轮船</a:t>
+                      </a:r>
+                    </a:p>
+                  </a:txBody>
+                  <a:tcPr/>
+                </a:tc>
+                <a:tc>
+                  <a:txBody>
+                    <a:bodyPr/>
+                    <a:lstStyle/>
+                    <a:p>
+                      <a:pPr>
+                        <a:defRPr sz="1100"/>
+                      </a:pPr>
+                      <a:r>
+                        <a:t>500</a:t>
+                      </a:r>
+                    </a:p>
+                  </a:txBody>
+                  <a:tcPr/>
+                </a:tc>
+                <a:tc>
+                  <a:txBody>
+                    <a:bodyPr/>
+                    <a:lstStyle/>
+                    <a:p>
+                      <a:pPr>
+                        <a:defRPr sz="1100"/>
+                      </a:pPr>
+                      <a:r>
+                        <a:t>20.76</a:t>
+                      </a:r>
+                    </a:p>
+                  </a:txBody>
+                  <a:tcPr/>
+                </a:tc>
+                <a:tc>
+                  <a:txBody>
+                    <a:bodyPr/>
+                    <a:lstStyle/>
+                    <a:p>
+                      <a:pPr>
+                        <a:defRPr sz="1100"/>
+                      </a:pPr>
+                      <a:r>
+                        <a:t>16.27</a:t>
+                      </a:r>
+                    </a:p>
+                  </a:txBody>
+                  <a:tcPr/>
+                </a:tc>
+                <a:tc>
+                  <a:txBody>
+                    <a:bodyPr/>
+                    <a:lstStyle/>
+                    <a:p>
+                      <a:pPr>
+                        <a:defRPr sz="1100"/>
+                      </a:pPr>
+                      <a:r>
+                        <a:t>0.81</a:t>
+                      </a:r>
+                    </a:p>
+                  </a:txBody>
+                  <a:tcPr/>
+                </a:tc>
+                <a:tc>
+                  <a:txBody>
+                    <a:bodyPr/>
+                    <a:lstStyle/>
+                    <a:p>
+                      <a:pPr>
+                        <a:defRPr sz="1100"/>
+                      </a:pPr>
+                      <a:r>
+                        <a:t>-0.22</a:t>
                       </a:r>
                     </a:p>
                   </a:txBody>
                   <a:tcPr/>
                 </a:tc>
               </a:tr>
-              <a:tr h="256032">
-                <a:tc>
-                  <a:txBody>
-                    <a:bodyPr/>
-                    <a:lstStyle/>
-                    <a:p>
-                      <a:pPr>
-                        <a:defRPr sz="1100"/>
-                      </a:pPr>
-                      <a:r>
-                        <a:t>深信服</a:t>
-                      </a:r>
-                    </a:p>
-                  </a:txBody>
-                  <a:tcPr/>
-                </a:tc>
-                <a:tc>
-                  <a:txBody>
-                    <a:bodyPr/>
-                    <a:lstStyle/>
-                    <a:p>
-                      <a:pPr>
-                        <a:defRPr sz="1100"/>
-                      </a:pPr>
-                      <a:r>
-                        <a:t>500</a:t>
-                      </a:r>
-                    </a:p>
-                  </a:txBody>
-                  <a:tcPr/>
-                </a:tc>
-                <a:tc>
-                  <a:txBody>
-                    <a:bodyPr/>
-                    <a:lstStyle/>
-                    <a:p>
-                      <a:pPr>
-                        <a:defRPr sz="1100"/>
-                      </a:pPr>
-                      <a:r>
-                        <a:t>136.73</a:t>
-                      </a:r>
-                    </a:p>
-                  </a:txBody>
-                  <a:tcPr/>
-                </a:tc>
-                <a:tc>
-                  <a:txBody>
-                    <a:bodyPr/>
-                    <a:lstStyle/>
-                    <a:p>
-                      <a:pPr>
-                        <a:defRPr sz="1100"/>
-                      </a:pPr>
-                      <a:r>
-                        <a:t>134.9</a:t>
-                      </a:r>
-                    </a:p>
-                  </a:txBody>
-                  <a:tcPr/>
-                </a:tc>
-                <a:tc>
-                  <a:txBody>
-                    <a:bodyPr/>
-                    <a:lstStyle/>
-                    <a:p>
-                      <a:pPr>
-                        <a:defRPr sz="1100"/>
-                      </a:pPr>
-                      <a:r>
-                        <a:t>6.75</a:t>
-                      </a:r>
-                    </a:p>
-                  </a:txBody>
-                  <a:tcPr/>
-                </a:tc>
-                <a:tc>
-                  <a:txBody>
-                    <a:bodyPr/>
-                    <a:lstStyle/>
-                    <a:p>
-                      <a:pPr>
-                        <a:defRPr sz="1100"/>
-                      </a:pPr>
-                      <a:r>
-                        <a:t>-0.09</a:t>
+              <a:tr h="274320">
+                <a:tc>
+                  <a:txBody>
+                    <a:bodyPr/>
+                    <a:lstStyle/>
+                    <a:p>
+                      <a:pPr>
+                        <a:defRPr sz="1100"/>
+                      </a:pPr>
+                      <a:r>
+                        <a:t>睿创微纳</a:t>
+                      </a:r>
+                    </a:p>
+                  </a:txBody>
+                  <a:tcPr/>
+                </a:tc>
+                <a:tc>
+                  <a:txBody>
+                    <a:bodyPr/>
+                    <a:lstStyle/>
+                    <a:p>
+                      <a:pPr>
+                        <a:defRPr sz="1100"/>
+                      </a:pPr>
+                      <a:r>
+                        <a:t>1000</a:t>
+                      </a:r>
+                    </a:p>
+                  </a:txBody>
+                  <a:tcPr/>
+                </a:tc>
+                <a:tc>
+                  <a:txBody>
+                    <a:bodyPr/>
+                    <a:lstStyle/>
+                    <a:p>
+                      <a:pPr>
+                        <a:defRPr sz="1100"/>
+                      </a:pPr>
+                      <a:r>
+                        <a:t>177.58</a:t>
+                      </a:r>
+                    </a:p>
+                  </a:txBody>
+                  <a:tcPr/>
+                </a:tc>
+                <a:tc>
+                  <a:txBody>
+                    <a:bodyPr/>
+                    <a:lstStyle/>
+                    <a:p>
+                      <a:pPr>
+                        <a:defRPr sz="1100"/>
+                      </a:pPr>
+                      <a:r>
+                        <a:t>148.88</a:t>
+                      </a:r>
+                    </a:p>
+                  </a:txBody>
+                  <a:tcPr/>
+                </a:tc>
+                <a:tc>
+                  <a:txBody>
+                    <a:bodyPr/>
+                    <a:lstStyle/>
+                    <a:p>
+                      <a:pPr>
+                        <a:defRPr sz="1100"/>
+                      </a:pPr>
+                      <a:r>
+                        <a:t>14.89</a:t>
+                      </a:r>
+                    </a:p>
+                  </a:txBody>
+                  <a:tcPr/>
+                </a:tc>
+                <a:tc>
+                  <a:txBody>
+                    <a:bodyPr/>
+                    <a:lstStyle/>
+                    <a:p>
+                      <a:pPr>
+                        <a:defRPr sz="1100"/>
+                      </a:pPr>
+                      <a:r>
+                        <a:t>-2.87</a:t>
                       </a:r>
                     </a:p>
                   </a:txBody>
                   <a:tcPr/>
                 </a:tc>
               </a:tr>
-              <a:tr h="256032">
-                <a:tc>
-                  <a:txBody>
-                    <a:bodyPr/>
-                    <a:lstStyle/>
-                    <a:p>
-                      <a:pPr>
-                        <a:defRPr sz="1100"/>
-                      </a:pPr>
-                      <a:r>
-                        <a:t>哈药股份</a:t>
-                      </a:r>
-                    </a:p>
-                  </a:txBody>
-                  <a:tcPr/>
-                </a:tc>
-                <a:tc>
-                  <a:txBody>
-                    <a:bodyPr/>
-                    <a:lstStyle/>
-                    <a:p>
-                      <a:pPr>
-                        <a:defRPr sz="1100"/>
-                      </a:pPr>
-                      <a:r>
-                        <a:t>5000</a:t>
-                      </a:r>
-                    </a:p>
-                  </a:txBody>
-                  <a:tcPr/>
-                </a:tc>
-                <a:tc>
-                  <a:txBody>
-                    <a:bodyPr/>
-                    <a:lstStyle/>
-                    <a:p>
-                      <a:pPr>
-                        <a:defRPr sz="1100"/>
-                      </a:pPr>
-                      <a:r>
-                        <a:t>7.33</a:t>
-                      </a:r>
-                    </a:p>
-                  </a:txBody>
-                  <a:tcPr/>
-                </a:tc>
-                <a:tc>
-                  <a:txBody>
-                    <a:bodyPr/>
-                    <a:lstStyle/>
-                    <a:p>
-                      <a:pPr>
-                        <a:defRPr sz="1100"/>
-                      </a:pPr>
-                      <a:r>
-                        <a:t>5.97</a:t>
-                      </a:r>
-                    </a:p>
-                  </a:txBody>
-                  <a:tcPr/>
-                </a:tc>
-                <a:tc>
-                  <a:txBody>
-                    <a:bodyPr/>
-                    <a:lstStyle/>
-                    <a:p>
-                      <a:pPr>
-                        <a:defRPr sz="1100"/>
-                      </a:pPr>
-                      <a:r>
-                        <a:t>2.98</a:t>
-                      </a:r>
-                    </a:p>
-                  </a:txBody>
-                  <a:tcPr/>
-                </a:tc>
-                <a:tc>
-                  <a:txBody>
-                    <a:bodyPr/>
-                    <a:lstStyle/>
-                    <a:p>
-                      <a:pPr>
-                        <a:defRPr sz="1100"/>
-                      </a:pPr>
-                      <a:r>
-                        <a:t>-0.68</a:t>
+              <a:tr h="274320">
+                <a:tc>
+                  <a:txBody>
+                    <a:bodyPr/>
+                    <a:lstStyle/>
+                    <a:p>
+                      <a:pPr>
+                        <a:defRPr sz="1100"/>
+                      </a:pPr>
+                      <a:r>
+                        <a:t>药明康德</a:t>
+                      </a:r>
+                    </a:p>
+                  </a:txBody>
+                  <a:tcPr/>
+                </a:tc>
+                <a:tc>
+                  <a:txBody>
+                    <a:bodyPr/>
+                    <a:lstStyle/>
+                    <a:p>
+                      <a:pPr>
+                        <a:defRPr sz="1100"/>
+                      </a:pPr>
+                      <a:r>
+                        <a:t>1300</a:t>
+                      </a:r>
+                    </a:p>
+                  </a:txBody>
+                  <a:tcPr/>
+                </a:tc>
+                <a:tc>
+                  <a:txBody>
+                    <a:bodyPr/>
+                    <a:lstStyle/>
+                    <a:p>
+                      <a:pPr>
+                        <a:defRPr sz="1100"/>
+                      </a:pPr>
+                      <a:r>
+                        <a:t>158.08</a:t>
+                      </a:r>
+                    </a:p>
+                  </a:txBody>
+                  <a:tcPr/>
+                </a:tc>
+                <a:tc>
+                  <a:txBody>
+                    <a:bodyPr/>
+                    <a:lstStyle/>
+                    <a:p>
+                      <a:pPr>
+                        <a:defRPr sz="1100"/>
+                      </a:pPr>
+                      <a:r>
+                        <a:t>141.31</a:t>
+                      </a:r>
+                    </a:p>
+                  </a:txBody>
+                  <a:tcPr/>
+                </a:tc>
+                <a:tc>
+                  <a:txBody>
+                    <a:bodyPr/>
+                    <a:lstStyle/>
+                    <a:p>
+                      <a:pPr>
+                        <a:defRPr sz="1100"/>
+                      </a:pPr>
+                      <a:r>
+                        <a:t>18.37</a:t>
+                      </a:r>
+                    </a:p>
+                  </a:txBody>
+                  <a:tcPr/>
+                </a:tc>
+                <a:tc>
+                  <a:txBody>
+                    <a:bodyPr/>
+                    <a:lstStyle/>
+                    <a:p>
+                      <a:pPr>
+                        <a:defRPr sz="1100"/>
+                      </a:pPr>
+                      <a:r>
+                        <a:t>-2.18</a:t>
                       </a:r>
                     </a:p>
                   </a:txBody>
                   <a:tcPr/>
                 </a:tc>
               </a:tr>
-              <a:tr h="256032">
-                <a:tc>
-                  <a:txBody>
-                    <a:bodyPr/>
-                    <a:lstStyle/>
-                    <a:p>
-                      <a:pPr>
-                        <a:defRPr sz="1100"/>
-                      </a:pPr>
-                      <a:r>
-                        <a:t>招商轮船</a:t>
-                      </a:r>
-                    </a:p>
-                  </a:txBody>
-                  <a:tcPr/>
-                </a:tc>
-                <a:tc>
-                  <a:txBody>
-                    <a:bodyPr/>
-                    <a:lstStyle/>
-                    <a:p>
-                      <a:pPr>
-                        <a:defRPr sz="1100"/>
-                      </a:pPr>
-                      <a:r>
-                        <a:t>500</a:t>
-                      </a:r>
-                    </a:p>
-                  </a:txBody>
-                  <a:tcPr/>
-                </a:tc>
-                <a:tc>
-                  <a:txBody>
-                    <a:bodyPr/>
-                    <a:lstStyle/>
-                    <a:p>
-                      <a:pPr>
-                        <a:defRPr sz="1100"/>
-                      </a:pPr>
-                      <a:r>
-                        <a:t>20.76</a:t>
-                      </a:r>
-                    </a:p>
-                  </a:txBody>
-                  <a:tcPr/>
-                </a:tc>
-                <a:tc>
-                  <a:txBody>
-                    <a:bodyPr/>
-                    <a:lstStyle/>
-                    <a:p>
-                      <a:pPr>
-                        <a:defRPr sz="1100"/>
-                      </a:pPr>
-                      <a:r>
-                        <a:t>17.61</a:t>
-                      </a:r>
-                    </a:p>
-                  </a:txBody>
-                  <a:tcPr/>
-                </a:tc>
-                <a:tc>
-                  <a:txBody>
-                    <a:bodyPr/>
-                    <a:lstStyle/>
-                    <a:p>
-                      <a:pPr>
-                        <a:defRPr sz="1100"/>
-                      </a:pPr>
-                      <a:r>
-                        <a:t>0.88</a:t>
-                      </a:r>
-                    </a:p>
-                  </a:txBody>
-                  <a:tcPr/>
-                </a:tc>
-                <a:tc>
-                  <a:txBody>
-                    <a:bodyPr/>
-                    <a:lstStyle/>
-                    <a:p>
-                      <a:pPr>
-                        <a:defRPr sz="1100"/>
-                      </a:pPr>
-                      <a:r>
-                        <a:t>-0.16</a:t>
+              <a:tr h="274320">
+                <a:tc>
+                  <a:txBody>
+                    <a:bodyPr/>
+                    <a:lstStyle/>
+                    <a:p>
+                      <a:pPr>
+                        <a:defRPr sz="1100"/>
+                      </a:pPr>
+                      <a:r>
+                        <a:t>康龙化成</a:t>
+                      </a:r>
+                    </a:p>
+                  </a:txBody>
+                  <a:tcPr/>
+                </a:tc>
+                <a:tc>
+                  <a:txBody>
+                    <a:bodyPr/>
+                    <a:lstStyle/>
+                    <a:p>
+                      <a:pPr>
+                        <a:defRPr sz="1100"/>
+                      </a:pPr>
+                      <a:r>
+                        <a:t>1000</a:t>
+                      </a:r>
+                    </a:p>
+                  </a:txBody>
+                  <a:tcPr/>
+                </a:tc>
+                <a:tc>
+                  <a:txBody>
+                    <a:bodyPr/>
+                    <a:lstStyle/>
+                    <a:p>
+                      <a:pPr>
+                        <a:defRPr sz="1100"/>
+                      </a:pPr>
+                      <a:r>
+                        <a:t>42.65</a:t>
+                      </a:r>
+                    </a:p>
+                  </a:txBody>
+                  <a:tcPr/>
+                </a:tc>
+                <a:tc>
+                  <a:txBody>
+                    <a:bodyPr/>
+                    <a:lstStyle/>
+                    <a:p>
+                      <a:pPr>
+                        <a:defRPr sz="1100"/>
+                      </a:pPr>
+                      <a:r>
+                        <a:t>37.24</a:t>
+                      </a:r>
+                    </a:p>
+                  </a:txBody>
+                  <a:tcPr/>
+                </a:tc>
+                <a:tc>
+                  <a:txBody>
+                    <a:bodyPr/>
+                    <a:lstStyle/>
+                    <a:p>
+                      <a:pPr>
+                        <a:defRPr sz="1100"/>
+                      </a:pPr>
+                      <a:r>
+                        <a:t>3.72</a:t>
+                      </a:r>
+                    </a:p>
+                  </a:txBody>
+                  <a:tcPr/>
+                </a:tc>
+                <a:tc>
+                  <a:txBody>
+                    <a:bodyPr/>
+                    <a:lstStyle/>
+                    <a:p>
+                      <a:pPr>
+                        <a:defRPr sz="1100"/>
+                      </a:pPr>
+                      <a:r>
+                        <a:t>-0.54</a:t>
                       </a:r>
                     </a:p>
                   </a:txBody>
                   <a:tcPr/>
                 </a:tc>
               </a:tr>
-              <a:tr h="256032">
-                <a:tc>
-                  <a:txBody>
-                    <a:bodyPr/>
-                    <a:lstStyle/>
-                    <a:p>
-                      <a:pPr>
-                        <a:defRPr sz="1100"/>
-                      </a:pPr>
-                      <a:r>
-                        <a:t>睿创微纳</a:t>
-                      </a:r>
-                    </a:p>
-                  </a:txBody>
-                  <a:tcPr/>
-                </a:tc>
-                <a:tc>
-                  <a:txBody>
-                    <a:bodyPr/>
-                    <a:lstStyle/>
-                    <a:p>
-                      <a:pPr>
-                        <a:defRPr sz="1100"/>
-                      </a:pPr>
-                      <a:r>
-                        <a:t>1000</a:t>
-                      </a:r>
-                    </a:p>
-                  </a:txBody>
-                  <a:tcPr/>
-                </a:tc>
-                <a:tc>
-                  <a:txBody>
-                    <a:bodyPr/>
-                    <a:lstStyle/>
-                    <a:p>
-                      <a:pPr>
-                        <a:defRPr sz="1100"/>
-                      </a:pPr>
-                      <a:r>
-                        <a:t>177.58</a:t>
-                      </a:r>
-                    </a:p>
-                  </a:txBody>
-                  <a:tcPr/>
-                </a:tc>
-                <a:tc>
-                  <a:txBody>
-                    <a:bodyPr/>
-                    <a:lstStyle/>
-                    <a:p>
-                      <a:pPr>
-                        <a:defRPr sz="1100"/>
-                      </a:pPr>
-                      <a:r>
-                        <a:t>162.16</a:t>
-                      </a:r>
-                    </a:p>
-                  </a:txBody>
-                  <a:tcPr/>
-                </a:tc>
-                <a:tc>
-                  <a:txBody>
-                    <a:bodyPr/>
-                    <a:lstStyle/>
-                    <a:p>
-                      <a:pPr>
-                        <a:defRPr sz="1100"/>
-                      </a:pPr>
-                      <a:r>
-                        <a:t>16.22</a:t>
-                      </a:r>
-                    </a:p>
-                  </a:txBody>
-                  <a:tcPr/>
-                </a:tc>
-                <a:tc>
-                  <a:txBody>
-                    <a:bodyPr/>
-                    <a:lstStyle/>
-                    <a:p>
-                      <a:pPr>
-                        <a:defRPr sz="1100"/>
-                      </a:pPr>
-                      <a:r>
-                        <a:t>-1.54</a:t>
-                      </a:r>
-                    </a:p>
-                  </a:txBody>
-                  <a:tcPr/>
-                </a:tc>
-              </a:tr>
-              <a:tr h="256032">
-                <a:tc>
-                  <a:txBody>
-                    <a:bodyPr/>
-                    <a:lstStyle/>
-                    <a:p>
-                      <a:pPr>
-                        <a:defRPr sz="1100"/>
-                      </a:pPr>
-                      <a:r>
-                        <a:t>药明康德</a:t>
-                      </a:r>
-                    </a:p>
-                  </a:txBody>
-                  <a:tcPr/>
-                </a:tc>
-                <a:tc>
-                  <a:txBody>
-                    <a:bodyPr/>
-                    <a:lstStyle/>
-                    <a:p>
-                      <a:pPr>
-                        <a:defRPr sz="1100"/>
-                      </a:pPr>
-                      <a:r>
-                        <a:t>1300</a:t>
-                      </a:r>
-                    </a:p>
-                  </a:txBody>
-                  <a:tcPr/>
-                </a:tc>
-                <a:tc>
-                  <a:txBody>
-                    <a:bodyPr/>
-                    <a:lstStyle/>
-                    <a:p>
-                      <a:pPr>
-                        <a:defRPr sz="1100"/>
-                      </a:pPr>
-                      <a:r>
-                        <a:t>158.08</a:t>
-                      </a:r>
-                    </a:p>
-                  </a:txBody>
-                  <a:tcPr/>
-                </a:tc>
-                <a:tc>
-                  <a:txBody>
-                    <a:bodyPr/>
-                    <a:lstStyle/>
-                    <a:p>
-                      <a:pPr>
-                        <a:defRPr sz="1100"/>
-                      </a:pPr>
-                      <a:r>
-                        <a:t>147.35</a:t>
-                      </a:r>
-                    </a:p>
-                  </a:txBody>
-                  <a:tcPr/>
-                </a:tc>
-                <a:tc>
-                  <a:txBody>
-                    <a:bodyPr/>
-                    <a:lstStyle/>
-                    <a:p>
-                      <a:pPr>
-                        <a:defRPr sz="1100"/>
-                      </a:pPr>
-                      <a:r>
-                        <a:t>19.16</a:t>
-                      </a:r>
-                    </a:p>
-                  </a:txBody>
-                  <a:tcPr/>
-                </a:tc>
-                <a:tc>
-                  <a:txBody>
-                    <a:bodyPr/>
-                    <a:lstStyle/>
-                    <a:p>
-                      <a:pPr>
-                        <a:defRPr sz="1100"/>
-                      </a:pPr>
-                      <a:r>
-                        <a:t>-1.39</a:t>
-                      </a:r>
-                    </a:p>
-                  </a:txBody>
-                  <a:tcPr/>
-                </a:tc>
-              </a:tr>
-              <a:tr h="256032">
-                <a:tc>
-                  <a:txBody>
-                    <a:bodyPr/>
-                    <a:lstStyle/>
-                    <a:p>
-                      <a:pPr>
-                        <a:defRPr sz="1100"/>
-                      </a:pPr>
-                      <a:r>
-                        <a:t>康龙化成</a:t>
-                      </a:r>
-                    </a:p>
-                  </a:txBody>
-                  <a:tcPr/>
-                </a:tc>
-                <a:tc>
-                  <a:txBody>
-                    <a:bodyPr/>
-                    <a:lstStyle/>
-                    <a:p>
-                      <a:pPr>
-                        <a:defRPr sz="1100"/>
-                      </a:pPr>
-                      <a:r>
-                        <a:t>1000</a:t>
-                      </a:r>
-                    </a:p>
-                  </a:txBody>
-                  <a:tcPr/>
-                </a:tc>
-                <a:tc>
-                  <a:txBody>
-                    <a:bodyPr/>
-                    <a:lstStyle/>
-                    <a:p>
-                      <a:pPr>
-                        <a:defRPr sz="1100"/>
-                      </a:pPr>
-                      <a:r>
-                        <a:t>42.65</a:t>
-                      </a:r>
-                    </a:p>
-                  </a:txBody>
-                  <a:tcPr/>
-                </a:tc>
-                <a:tc>
-                  <a:txBody>
-                    <a:bodyPr/>
-                    <a:lstStyle/>
-                    <a:p>
-                      <a:pPr>
-                        <a:defRPr sz="1100"/>
-                      </a:pPr>
-                      <a:r>
-                        <a:t>38.7</a:t>
-                      </a:r>
-                    </a:p>
-                  </a:txBody>
-                  <a:tcPr/>
-                </a:tc>
-                <a:tc>
-                  <a:txBody>
-                    <a:bodyPr/>
-                    <a:lstStyle/>
-                    <a:p>
-                      <a:pPr>
-                        <a:defRPr sz="1100"/>
-                      </a:pPr>
-                      <a:r>
-                        <a:t>3.87</a:t>
-                      </a:r>
-                    </a:p>
-                  </a:txBody>
-                  <a:tcPr/>
-                </a:tc>
-                <a:tc>
-                  <a:txBody>
-                    <a:bodyPr/>
-                    <a:lstStyle/>
-                    <a:p>
-                      <a:pPr>
-                        <a:defRPr sz="1100"/>
-                      </a:pPr>
-                      <a:r>
-                        <a:t>-0.39</a:t>
-                      </a:r>
-                    </a:p>
-                  </a:txBody>
-                  <a:tcPr/>
-                </a:tc>
-              </a:tr>
-              <a:tr h="256032">
+              <a:tr h="274320">
                 <a:tc>
                   <a:txBody>
                     <a:bodyPr/>
@@ -4925,37 +4833,37 @@
                         <a:defRPr sz="1100"/>
                       </a:pPr>
                       <a:r>
-                        <a:t>40.25</a:t>
-                      </a:r>
-                    </a:p>
-                  </a:txBody>
-                  <a:tcPr/>
-                </a:tc>
-                <a:tc>
-                  <a:txBody>
-                    <a:bodyPr/>
-                    <a:lstStyle/>
-                    <a:p>
-                      <a:pPr>
-                        <a:defRPr sz="1100"/>
-                      </a:pPr>
-                      <a:r>
-                        <a:t>16.1</a:t>
-                      </a:r>
-                    </a:p>
-                  </a:txBody>
-                  <a:tcPr/>
-                </a:tc>
-                <a:tc>
-                  <a:txBody>
-                    <a:bodyPr/>
-                    <a:lstStyle/>
-                    <a:p>
-                      <a:pPr>
-                        <a:defRPr sz="1100"/>
-                      </a:pPr>
-                      <a:r>
-                        <a:t>-1.32</a:t>
+                        <a:t>38.51</a:t>
+                      </a:r>
+                    </a:p>
+                  </a:txBody>
+                  <a:tcPr/>
+                </a:tc>
+                <a:tc>
+                  <a:txBody>
+                    <a:bodyPr/>
+                    <a:lstStyle/>
+                    <a:p>
+                      <a:pPr>
+                        <a:defRPr sz="1100"/>
+                      </a:pPr>
+                      <a:r>
+                        <a:t>15.4</a:t>
+                      </a:r>
+                    </a:p>
+                  </a:txBody>
+                  <a:tcPr/>
+                </a:tc>
+                <a:tc>
+                  <a:txBody>
+                    <a:bodyPr/>
+                    <a:lstStyle/>
+                    <a:p>
+                      <a:pPr>
+                        <a:defRPr sz="1100"/>
+                      </a:pPr>
+                      <a:r>
+                        <a:t>-2.02</a:t>
                       </a:r>
                     </a:p>
                   </a:txBody>
@@ -5041,7 +4949,7 @@
               <a:defRPr sz="1500"/>
             </a:pPr>
             <a:r>
-              <a:t>宁德时代（300750，新能源电池）：综合74.5分；基本面优秀，具备中长期配置价值；趋势中性，观望。</a:t>
+              <a:t>紫金矿业（601899，有色金属）：综合75.0分；基本面优秀，具备中长期配置价值；趋势中性，观望。</a:t>
             </a:r>
           </a:p>
           <a:p>
@@ -5049,7 +4957,7 @@
               <a:defRPr sz="1500"/>
             </a:pPr>
             <a:r>
-              <a:t>紫金矿业（601899，有色金属）：综合73.5分；基本面优秀，具备中长期配置价值；趋势中性，观望。</a:t>
+              <a:t>宁德时代（300750，新能源电池）：综合74.5分；基本面优秀，具备中长期配置价值；趋势中性，观望。</a:t>
             </a:r>
           </a:p>
           <a:p>
@@ -5057,7 +4965,7 @@
               <a:defRPr sz="1500"/>
             </a:pPr>
             <a:r>
-              <a:t>立讯精密（002475，消费电子）：综合72.5分；基本面优秀，具备中长期配置价值；中期趋势向上，可关注/持有。</a:t>
+              <a:t>长江电力（600900，电力）：综合70.0分；基本面优秀，具备中长期配置价值；中期趋势向上，可关注/持有。</a:t>
             </a:r>
           </a:p>
           <a:p>
@@ -5065,7 +4973,7 @@
               <a:defRPr sz="1500"/>
             </a:pPr>
             <a:r>
-              <a:t>招商银行（600036，银行）：综合67.0分；基本面优秀，具备中长期配置价值；中期趋势向上，可关注/持有。</a:t>
+              <a:t>美的集团（000333，家电）：综合67.5分；基本面优秀，具备中长期配置价值；中期趋势向上，可关注/持有。</a:t>
             </a:r>
           </a:p>
           <a:p>
@@ -5073,7 +4981,7 @@
               <a:defRPr sz="1500"/>
             </a:pPr>
             <a:r>
-              <a:t>长江电力（600900，电力）：综合67.0分；基本面优秀，具备中长期配置价值；趋势中性，观望。</a:t>
+              <a:t>立讯精密（002475，消费电子）：综合67.5分；基本面优秀，具备中长期配置价值；趋势中性，观望。</a:t>
             </a:r>
           </a:p>
         </p:txBody>

--- a/outputs/12_中期路演.pptx
+++ b/outputs/12_中期路演.pptx
@@ -3167,7 +3167,7 @@
               <a:defRPr sz="1500"/>
             </a:pPr>
             <a:r>
-              <a:t>数据截止：2026-10-22</a:t>
+              <a:t>数据截止：2026-10-23</a:t>
             </a:r>
           </a:p>
         </p:txBody>
@@ -3255,7 +3255,7 @@
               <a:defRPr sz="1500"/>
             </a:pPr>
             <a:r>
-              <a:t>当前总资产：448.99万元</a:t>
+              <a:t>当前总资产：450.61万元</a:t>
             </a:r>
           </a:p>
           <a:p>
@@ -3263,7 +3263,7 @@
               <a:defRPr sz="1500"/>
             </a:pPr>
             <a:r>
-              <a:t>累计收益率：-10.20%</a:t>
+              <a:t>累计收益率：-9.88%</a:t>
             </a:r>
           </a:p>
           <a:p>
@@ -3271,7 +3271,7 @@
               <a:defRPr sz="1500"/>
             </a:pPr>
             <a:r>
-              <a:t>同期沪深300：-11.25%</a:t>
+              <a:t>同期沪深300：-9.73%</a:t>
             </a:r>
           </a:p>
           <a:p>
@@ -3279,7 +3279,7 @@
               <a:defRPr sz="1500"/>
             </a:pPr>
             <a:r>
-              <a:t>现金：201.70万元（44.9%）</a:t>
+              <a:t>现金：94.78万元（21.0%）</a:t>
             </a:r>
           </a:p>
           <a:p>
@@ -3287,7 +3287,7 @@
               <a:defRPr sz="1500"/>
             </a:pPr>
             <a:r>
-              <a:t>持仓：12只，累计交易42笔</a:t>
+              <a:t>持仓：13只，累计交易43笔</a:t>
             </a:r>
           </a:p>
         </p:txBody>
@@ -3582,7 +3582,7 @@
                 <a:gridCol w="1849069"/>
                 <a:gridCol w="1849070"/>
               </a:tblGrid>
-              <a:tr h="274320">
+              <a:tr h="256032">
                 <a:tc>
                   <a:txBody>
                     <a:bodyPr/>
@@ -3674,7 +3674,7 @@
                   <a:tcPr/>
                 </a:tc>
               </a:tr>
-              <a:tr h="274320">
+              <a:tr h="256032">
                 <a:tc>
                   <a:txBody>
                     <a:bodyPr/>
@@ -3766,7 +3766,7 @@
                   <a:tcPr/>
                 </a:tc>
               </a:tr>
-              <a:tr h="274320">
+              <a:tr h="256032">
                 <a:tc>
                   <a:txBody>
                     <a:bodyPr/>
@@ -3821,44 +3821,44 @@
                         <a:defRPr sz="1100"/>
                       </a:pPr>
                       <a:r>
-                        <a:t>29.82</a:t>
-                      </a:r>
-                    </a:p>
-                  </a:txBody>
-                  <a:tcPr/>
-                </a:tc>
-                <a:tc>
-                  <a:txBody>
-                    <a:bodyPr/>
-                    <a:lstStyle/>
-                    <a:p>
-                      <a:pPr>
-                        <a:defRPr sz="1100"/>
-                      </a:pPr>
-                      <a:r>
-                        <a:t>114.21</a:t>
-                      </a:r>
-                    </a:p>
-                  </a:txBody>
-                  <a:tcPr/>
-                </a:tc>
-                <a:tc>
-                  <a:txBody>
-                    <a:bodyPr/>
-                    <a:lstStyle/>
-                    <a:p>
-                      <a:pPr>
-                        <a:defRPr sz="1100"/>
-                      </a:pPr>
-                      <a:r>
-                        <a:t>2.44</a:t>
+                        <a:t>29.45</a:t>
+                      </a:r>
+                    </a:p>
+                  </a:txBody>
+                  <a:tcPr/>
+                </a:tc>
+                <a:tc>
+                  <a:txBody>
+                    <a:bodyPr/>
+                    <a:lstStyle/>
+                    <a:p>
+                      <a:pPr>
+                        <a:defRPr sz="1100"/>
+                      </a:pPr>
+                      <a:r>
+                        <a:t>112.79</a:t>
+                      </a:r>
+                    </a:p>
+                  </a:txBody>
+                  <a:tcPr/>
+                </a:tc>
+                <a:tc>
+                  <a:txBody>
+                    <a:bodyPr/>
+                    <a:lstStyle/>
+                    <a:p>
+                      <a:pPr>
+                        <a:defRPr sz="1100"/>
+                      </a:pPr>
+                      <a:r>
+                        <a:t>1.02</a:t>
                       </a:r>
                     </a:p>
                   </a:txBody>
                   <a:tcPr/>
                 </a:tc>
               </a:tr>
-              <a:tr h="274320">
+              <a:tr h="256032">
                 <a:tc>
                   <a:txBody>
                     <a:bodyPr/>
@@ -3913,22 +3913,1034 @@
                         <a:defRPr sz="1100"/>
                       </a:pPr>
                       <a:r>
-                        <a:t>85.29</a:t>
-                      </a:r>
-                    </a:p>
-                  </a:txBody>
-                  <a:tcPr/>
-                </a:tc>
-                <a:tc>
-                  <a:txBody>
-                    <a:bodyPr/>
-                    <a:lstStyle/>
-                    <a:p>
-                      <a:pPr>
-                        <a:defRPr sz="1100"/>
-                      </a:pPr>
-                      <a:r>
-                        <a:t>38.38</a:t>
+                        <a:t>85.59</a:t>
+                      </a:r>
+                    </a:p>
+                  </a:txBody>
+                  <a:tcPr/>
+                </a:tc>
+                <a:tc>
+                  <a:txBody>
+                    <a:bodyPr/>
+                    <a:lstStyle/>
+                    <a:p>
+                      <a:pPr>
+                        <a:defRPr sz="1100"/>
+                      </a:pPr>
+                      <a:r>
+                        <a:t>38.52</a:t>
+                      </a:r>
+                    </a:p>
+                  </a:txBody>
+                  <a:tcPr/>
+                </a:tc>
+                <a:tc>
+                  <a:txBody>
+                    <a:bodyPr/>
+                    <a:lstStyle/>
+                    <a:p>
+                      <a:pPr>
+                        <a:defRPr sz="1100"/>
+                      </a:pPr>
+                      <a:r>
+                        <a:t>0.14</a:t>
+                      </a:r>
+                    </a:p>
+                  </a:txBody>
+                  <a:tcPr/>
+                </a:tc>
+              </a:tr>
+              <a:tr h="256032">
+                <a:tc>
+                  <a:txBody>
+                    <a:bodyPr/>
+                    <a:lstStyle/>
+                    <a:p>
+                      <a:pPr>
+                        <a:defRPr sz="1100"/>
+                      </a:pPr>
+                      <a:r>
+                        <a:t>新集能源</a:t>
+                      </a:r>
+                    </a:p>
+                  </a:txBody>
+                  <a:tcPr/>
+                </a:tc>
+                <a:tc>
+                  <a:txBody>
+                    <a:bodyPr/>
+                    <a:lstStyle/>
+                    <a:p>
+                      <a:pPr>
+                        <a:defRPr sz="1100"/>
+                      </a:pPr>
+                      <a:r>
+                        <a:t>9500</a:t>
+                      </a:r>
+                    </a:p>
+                  </a:txBody>
+                  <a:tcPr/>
+                </a:tc>
+                <a:tc>
+                  <a:txBody>
+                    <a:bodyPr/>
+                    <a:lstStyle/>
+                    <a:p>
+                      <a:pPr>
+                        <a:defRPr sz="1100"/>
+                      </a:pPr>
+                      <a:r>
+                        <a:t>10.47</a:t>
+                      </a:r>
+                    </a:p>
+                  </a:txBody>
+                  <a:tcPr/>
+                </a:tc>
+                <a:tc>
+                  <a:txBody>
+                    <a:bodyPr/>
+                    <a:lstStyle/>
+                    <a:p>
+                      <a:pPr>
+                        <a:defRPr sz="1100"/>
+                      </a:pPr>
+                      <a:r>
+                        <a:t>9.64</a:t>
+                      </a:r>
+                    </a:p>
+                  </a:txBody>
+                  <a:tcPr/>
+                </a:tc>
+                <a:tc>
+                  <a:txBody>
+                    <a:bodyPr/>
+                    <a:lstStyle/>
+                    <a:p>
+                      <a:pPr>
+                        <a:defRPr sz="1100"/>
+                      </a:pPr>
+                      <a:r>
+                        <a:t>9.16</a:t>
+                      </a:r>
+                    </a:p>
+                  </a:txBody>
+                  <a:tcPr/>
+                </a:tc>
+                <a:tc>
+                  <a:txBody>
+                    <a:bodyPr/>
+                    <a:lstStyle/>
+                    <a:p>
+                      <a:pPr>
+                        <a:defRPr sz="1100"/>
+                      </a:pPr>
+                      <a:r>
+                        <a:t>-0.79</a:t>
+                      </a:r>
+                    </a:p>
+                  </a:txBody>
+                  <a:tcPr/>
+                </a:tc>
+              </a:tr>
+              <a:tr h="256032">
+                <a:tc>
+                  <a:txBody>
+                    <a:bodyPr/>
+                    <a:lstStyle/>
+                    <a:p>
+                      <a:pPr>
+                        <a:defRPr sz="1100"/>
+                      </a:pPr>
+                      <a:r>
+                        <a:t>恺英网络</a:t>
+                      </a:r>
+                    </a:p>
+                  </a:txBody>
+                  <a:tcPr/>
+                </a:tc>
+                <a:tc>
+                  <a:txBody>
+                    <a:bodyPr/>
+                    <a:lstStyle/>
+                    <a:p>
+                      <a:pPr>
+                        <a:defRPr sz="1100"/>
+                      </a:pPr>
+                      <a:r>
+                        <a:t>5000</a:t>
+                      </a:r>
+                    </a:p>
+                  </a:txBody>
+                  <a:tcPr/>
+                </a:tc>
+                <a:tc>
+                  <a:txBody>
+                    <a:bodyPr/>
+                    <a:lstStyle/>
+                    <a:p>
+                      <a:pPr>
+                        <a:defRPr sz="1100"/>
+                      </a:pPr>
+                      <a:r>
+                        <a:t>17.52</a:t>
+                      </a:r>
+                    </a:p>
+                  </a:txBody>
+                  <a:tcPr/>
+                </a:tc>
+                <a:tc>
+                  <a:txBody>
+                    <a:bodyPr/>
+                    <a:lstStyle/>
+                    <a:p>
+                      <a:pPr>
+                        <a:defRPr sz="1100"/>
+                      </a:pPr>
+                      <a:r>
+                        <a:t>15.05</a:t>
+                      </a:r>
+                    </a:p>
+                  </a:txBody>
+                  <a:tcPr/>
+                </a:tc>
+                <a:tc>
+                  <a:txBody>
+                    <a:bodyPr/>
+                    <a:lstStyle/>
+                    <a:p>
+                      <a:pPr>
+                        <a:defRPr sz="1100"/>
+                      </a:pPr>
+                      <a:r>
+                        <a:t>7.53</a:t>
+                      </a:r>
+                    </a:p>
+                  </a:txBody>
+                  <a:tcPr/>
+                </a:tc>
+                <a:tc>
+                  <a:txBody>
+                    <a:bodyPr/>
+                    <a:lstStyle/>
+                    <a:p>
+                      <a:pPr>
+                        <a:defRPr sz="1100"/>
+                      </a:pPr>
+                      <a:r>
+                        <a:t>-1.23</a:t>
+                      </a:r>
+                    </a:p>
+                  </a:txBody>
+                  <a:tcPr/>
+                </a:tc>
+              </a:tr>
+              <a:tr h="256032">
+                <a:tc>
+                  <a:txBody>
+                    <a:bodyPr/>
+                    <a:lstStyle/>
+                    <a:p>
+                      <a:pPr>
+                        <a:defRPr sz="1100"/>
+                      </a:pPr>
+                      <a:r>
+                        <a:t>星网锐捷</a:t>
+                      </a:r>
+                    </a:p>
+                  </a:txBody>
+                  <a:tcPr/>
+                </a:tc>
+                <a:tc>
+                  <a:txBody>
+                    <a:bodyPr/>
+                    <a:lstStyle/>
+                    <a:p>
+                      <a:pPr>
+                        <a:defRPr sz="1100"/>
+                      </a:pPr>
+                      <a:r>
+                        <a:t>6100</a:t>
+                      </a:r>
+                    </a:p>
+                  </a:txBody>
+                  <a:tcPr/>
+                </a:tc>
+                <a:tc>
+                  <a:txBody>
+                    <a:bodyPr/>
+                    <a:lstStyle/>
+                    <a:p>
+                      <a:pPr>
+                        <a:defRPr sz="1100"/>
+                      </a:pPr>
+                      <a:r>
+                        <a:t>35.87</a:t>
+                      </a:r>
+                    </a:p>
+                  </a:txBody>
+                  <a:tcPr/>
+                </a:tc>
+                <a:tc>
+                  <a:txBody>
+                    <a:bodyPr/>
+                    <a:lstStyle/>
+                    <a:p>
+                      <a:pPr>
+                        <a:defRPr sz="1100"/>
+                      </a:pPr>
+                      <a:r>
+                        <a:t>26.23</a:t>
+                      </a:r>
+                    </a:p>
+                  </a:txBody>
+                  <a:tcPr/>
+                </a:tc>
+                <a:tc>
+                  <a:txBody>
+                    <a:bodyPr/>
+                    <a:lstStyle/>
+                    <a:p>
+                      <a:pPr>
+                        <a:defRPr sz="1100"/>
+                      </a:pPr>
+                      <a:r>
+                        <a:t>16.0</a:t>
+                      </a:r>
+                    </a:p>
+                  </a:txBody>
+                  <a:tcPr/>
+                </a:tc>
+                <a:tc>
+                  <a:txBody>
+                    <a:bodyPr/>
+                    <a:lstStyle/>
+                    <a:p>
+                      <a:pPr>
+                        <a:defRPr sz="1100"/>
+                      </a:pPr>
+                      <a:r>
+                        <a:t>-5.88</a:t>
+                      </a:r>
+                    </a:p>
+                  </a:txBody>
+                  <a:tcPr/>
+                </a:tc>
+              </a:tr>
+              <a:tr h="256032">
+                <a:tc>
+                  <a:txBody>
+                    <a:bodyPr/>
+                    <a:lstStyle/>
+                    <a:p>
+                      <a:pPr>
+                        <a:defRPr sz="1100"/>
+                      </a:pPr>
+                      <a:r>
+                        <a:t>深信服</a:t>
+                      </a:r>
+                    </a:p>
+                  </a:txBody>
+                  <a:tcPr/>
+                </a:tc>
+                <a:tc>
+                  <a:txBody>
+                    <a:bodyPr/>
+                    <a:lstStyle/>
+                    <a:p>
+                      <a:pPr>
+                        <a:defRPr sz="1100"/>
+                      </a:pPr>
+                      <a:r>
+                        <a:t>500</a:t>
+                      </a:r>
+                    </a:p>
+                  </a:txBody>
+                  <a:tcPr/>
+                </a:tc>
+                <a:tc>
+                  <a:txBody>
+                    <a:bodyPr/>
+                    <a:lstStyle/>
+                    <a:p>
+                      <a:pPr>
+                        <a:defRPr sz="1100"/>
+                      </a:pPr>
+                      <a:r>
+                        <a:t>136.73</a:t>
+                      </a:r>
+                    </a:p>
+                  </a:txBody>
+                  <a:tcPr/>
+                </a:tc>
+                <a:tc>
+                  <a:txBody>
+                    <a:bodyPr/>
+                    <a:lstStyle/>
+                    <a:p>
+                      <a:pPr>
+                        <a:defRPr sz="1100"/>
+                      </a:pPr>
+                      <a:r>
+                        <a:t>146.74</a:t>
+                      </a:r>
+                    </a:p>
+                  </a:txBody>
+                  <a:tcPr/>
+                </a:tc>
+                <a:tc>
+                  <a:txBody>
+                    <a:bodyPr/>
+                    <a:lstStyle/>
+                    <a:p>
+                      <a:pPr>
+                        <a:defRPr sz="1100"/>
+                      </a:pPr>
+                      <a:r>
+                        <a:t>7.34</a:t>
+                      </a:r>
+                    </a:p>
+                  </a:txBody>
+                  <a:tcPr/>
+                </a:tc>
+                <a:tc>
+                  <a:txBody>
+                    <a:bodyPr/>
+                    <a:lstStyle/>
+                    <a:p>
+                      <a:pPr>
+                        <a:defRPr sz="1100"/>
+                      </a:pPr>
+                      <a:r>
+                        <a:t>0.5</a:t>
+                      </a:r>
+                    </a:p>
+                  </a:txBody>
+                  <a:tcPr/>
+                </a:tc>
+              </a:tr>
+              <a:tr h="256032">
+                <a:tc>
+                  <a:txBody>
+                    <a:bodyPr/>
+                    <a:lstStyle/>
+                    <a:p>
+                      <a:pPr>
+                        <a:defRPr sz="1100"/>
+                      </a:pPr>
+                      <a:r>
+                        <a:t>哈药股份</a:t>
+                      </a:r>
+                    </a:p>
+                  </a:txBody>
+                  <a:tcPr/>
+                </a:tc>
+                <a:tc>
+                  <a:txBody>
+                    <a:bodyPr/>
+                    <a:lstStyle/>
+                    <a:p>
+                      <a:pPr>
+                        <a:defRPr sz="1100"/>
+                      </a:pPr>
+                      <a:r>
+                        <a:t>5000</a:t>
+                      </a:r>
+                    </a:p>
+                  </a:txBody>
+                  <a:tcPr/>
+                </a:tc>
+                <a:tc>
+                  <a:txBody>
+                    <a:bodyPr/>
+                    <a:lstStyle/>
+                    <a:p>
+                      <a:pPr>
+                        <a:defRPr sz="1100"/>
+                      </a:pPr>
+                      <a:r>
+                        <a:t>7.33</a:t>
+                      </a:r>
+                    </a:p>
+                  </a:txBody>
+                  <a:tcPr/>
+                </a:tc>
+                <a:tc>
+                  <a:txBody>
+                    <a:bodyPr/>
+                    <a:lstStyle/>
+                    <a:p>
+                      <a:pPr>
+                        <a:defRPr sz="1100"/>
+                      </a:pPr>
+                      <a:r>
+                        <a:t>5.56</a:t>
+                      </a:r>
+                    </a:p>
+                  </a:txBody>
+                  <a:tcPr/>
+                </a:tc>
+                <a:tc>
+                  <a:txBody>
+                    <a:bodyPr/>
+                    <a:lstStyle/>
+                    <a:p>
+                      <a:pPr>
+                        <a:defRPr sz="1100"/>
+                      </a:pPr>
+                      <a:r>
+                        <a:t>2.78</a:t>
+                      </a:r>
+                    </a:p>
+                  </a:txBody>
+                  <a:tcPr/>
+                </a:tc>
+                <a:tc>
+                  <a:txBody>
+                    <a:bodyPr/>
+                    <a:lstStyle/>
+                    <a:p>
+                      <a:pPr>
+                        <a:defRPr sz="1100"/>
+                      </a:pPr>
+                      <a:r>
+                        <a:t>-0.89</a:t>
+                      </a:r>
+                    </a:p>
+                  </a:txBody>
+                  <a:tcPr/>
+                </a:tc>
+              </a:tr>
+              <a:tr h="256032">
+                <a:tc>
+                  <a:txBody>
+                    <a:bodyPr/>
+                    <a:lstStyle/>
+                    <a:p>
+                      <a:pPr>
+                        <a:defRPr sz="1100"/>
+                      </a:pPr>
+                      <a:r>
+                        <a:t>招商轮船</a:t>
+                      </a:r>
+                    </a:p>
+                  </a:txBody>
+                  <a:tcPr/>
+                </a:tc>
+                <a:tc>
+                  <a:txBody>
+                    <a:bodyPr/>
+                    <a:lstStyle/>
+                    <a:p>
+                      <a:pPr>
+                        <a:defRPr sz="1100"/>
+                      </a:pPr>
+                      <a:r>
+                        <a:t>500</a:t>
+                      </a:r>
+                    </a:p>
+                  </a:txBody>
+                  <a:tcPr/>
+                </a:tc>
+                <a:tc>
+                  <a:txBody>
+                    <a:bodyPr/>
+                    <a:lstStyle/>
+                    <a:p>
+                      <a:pPr>
+                        <a:defRPr sz="1100"/>
+                      </a:pPr>
+                      <a:r>
+                        <a:t>20.76</a:t>
+                      </a:r>
+                    </a:p>
+                  </a:txBody>
+                  <a:tcPr/>
+                </a:tc>
+                <a:tc>
+                  <a:txBody>
+                    <a:bodyPr/>
+                    <a:lstStyle/>
+                    <a:p>
+                      <a:pPr>
+                        <a:defRPr sz="1100"/>
+                      </a:pPr>
+                      <a:r>
+                        <a:t>16.58</a:t>
+                      </a:r>
+                    </a:p>
+                  </a:txBody>
+                  <a:tcPr/>
+                </a:tc>
+                <a:tc>
+                  <a:txBody>
+                    <a:bodyPr/>
+                    <a:lstStyle/>
+                    <a:p>
+                      <a:pPr>
+                        <a:defRPr sz="1100"/>
+                      </a:pPr>
+                      <a:r>
+                        <a:t>0.83</a:t>
+                      </a:r>
+                    </a:p>
+                  </a:txBody>
+                  <a:tcPr/>
+                </a:tc>
+                <a:tc>
+                  <a:txBody>
+                    <a:bodyPr/>
+                    <a:lstStyle/>
+                    <a:p>
+                      <a:pPr>
+                        <a:defRPr sz="1100"/>
+                      </a:pPr>
+                      <a:r>
+                        <a:t>-0.21</a:t>
+                      </a:r>
+                    </a:p>
+                  </a:txBody>
+                  <a:tcPr/>
+                </a:tc>
+              </a:tr>
+              <a:tr h="256032">
+                <a:tc>
+                  <a:txBody>
+                    <a:bodyPr/>
+                    <a:lstStyle/>
+                    <a:p>
+                      <a:pPr>
+                        <a:defRPr sz="1100"/>
+                      </a:pPr>
+                      <a:r>
+                        <a:t>睿创微纳</a:t>
+                      </a:r>
+                    </a:p>
+                  </a:txBody>
+                  <a:tcPr/>
+                </a:tc>
+                <a:tc>
+                  <a:txBody>
+                    <a:bodyPr/>
+                    <a:lstStyle/>
+                    <a:p>
+                      <a:pPr>
+                        <a:defRPr sz="1100"/>
+                      </a:pPr>
+                      <a:r>
+                        <a:t>1000</a:t>
+                      </a:r>
+                    </a:p>
+                  </a:txBody>
+                  <a:tcPr/>
+                </a:tc>
+                <a:tc>
+                  <a:txBody>
+                    <a:bodyPr/>
+                    <a:lstStyle/>
+                    <a:p>
+                      <a:pPr>
+                        <a:defRPr sz="1100"/>
+                      </a:pPr>
+                      <a:r>
+                        <a:t>177.58</a:t>
+                      </a:r>
+                    </a:p>
+                  </a:txBody>
+                  <a:tcPr/>
+                </a:tc>
+                <a:tc>
+                  <a:txBody>
+                    <a:bodyPr/>
+                    <a:lstStyle/>
+                    <a:p>
+                      <a:pPr>
+                        <a:defRPr sz="1100"/>
+                      </a:pPr>
+                      <a:r>
+                        <a:t>153.15</a:t>
+                      </a:r>
+                    </a:p>
+                  </a:txBody>
+                  <a:tcPr/>
+                </a:tc>
+                <a:tc>
+                  <a:txBody>
+                    <a:bodyPr/>
+                    <a:lstStyle/>
+                    <a:p>
+                      <a:pPr>
+                        <a:defRPr sz="1100"/>
+                      </a:pPr>
+                      <a:r>
+                        <a:t>15.31</a:t>
+                      </a:r>
+                    </a:p>
+                  </a:txBody>
+                  <a:tcPr/>
+                </a:tc>
+                <a:tc>
+                  <a:txBody>
+                    <a:bodyPr/>
+                    <a:lstStyle/>
+                    <a:p>
+                      <a:pPr>
+                        <a:defRPr sz="1100"/>
+                      </a:pPr>
+                      <a:r>
+                        <a:t>-2.44</a:t>
+                      </a:r>
+                    </a:p>
+                  </a:txBody>
+                  <a:tcPr/>
+                </a:tc>
+              </a:tr>
+              <a:tr h="256032">
+                <a:tc>
+                  <a:txBody>
+                    <a:bodyPr/>
+                    <a:lstStyle/>
+                    <a:p>
+                      <a:pPr>
+                        <a:defRPr sz="1100"/>
+                      </a:pPr>
+                      <a:r>
+                        <a:t>药明康德</a:t>
+                      </a:r>
+                    </a:p>
+                  </a:txBody>
+                  <a:tcPr/>
+                </a:tc>
+                <a:tc>
+                  <a:txBody>
+                    <a:bodyPr/>
+                    <a:lstStyle/>
+                    <a:p>
+                      <a:pPr>
+                        <a:defRPr sz="1100"/>
+                      </a:pPr>
+                      <a:r>
+                        <a:t>1300</a:t>
+                      </a:r>
+                    </a:p>
+                  </a:txBody>
+                  <a:tcPr/>
+                </a:tc>
+                <a:tc>
+                  <a:txBody>
+                    <a:bodyPr/>
+                    <a:lstStyle/>
+                    <a:p>
+                      <a:pPr>
+                        <a:defRPr sz="1100"/>
+                      </a:pPr>
+                      <a:r>
+                        <a:t>158.08</a:t>
+                      </a:r>
+                    </a:p>
+                  </a:txBody>
+                  <a:tcPr/>
+                </a:tc>
+                <a:tc>
+                  <a:txBody>
+                    <a:bodyPr/>
+                    <a:lstStyle/>
+                    <a:p>
+                      <a:pPr>
+                        <a:defRPr sz="1100"/>
+                      </a:pPr>
+                      <a:r>
+                        <a:t>144.72</a:t>
+                      </a:r>
+                    </a:p>
+                  </a:txBody>
+                  <a:tcPr/>
+                </a:tc>
+                <a:tc>
+                  <a:txBody>
+                    <a:bodyPr/>
+                    <a:lstStyle/>
+                    <a:p>
+                      <a:pPr>
+                        <a:defRPr sz="1100"/>
+                      </a:pPr>
+                      <a:r>
+                        <a:t>18.81</a:t>
+                      </a:r>
+                    </a:p>
+                  </a:txBody>
+                  <a:tcPr/>
+                </a:tc>
+                <a:tc>
+                  <a:txBody>
+                    <a:bodyPr/>
+                    <a:lstStyle/>
+                    <a:p>
+                      <a:pPr>
+                        <a:defRPr sz="1100"/>
+                      </a:pPr>
+                      <a:r>
+                        <a:t>-1.74</a:t>
+                      </a:r>
+                    </a:p>
+                  </a:txBody>
+                  <a:tcPr/>
+                </a:tc>
+              </a:tr>
+              <a:tr h="256032">
+                <a:tc>
+                  <a:txBody>
+                    <a:bodyPr/>
+                    <a:lstStyle/>
+                    <a:p>
+                      <a:pPr>
+                        <a:defRPr sz="1100"/>
+                      </a:pPr>
+                      <a:r>
+                        <a:t>康龙化成</a:t>
+                      </a:r>
+                    </a:p>
+                  </a:txBody>
+                  <a:tcPr/>
+                </a:tc>
+                <a:tc>
+                  <a:txBody>
+                    <a:bodyPr/>
+                    <a:lstStyle/>
+                    <a:p>
+                      <a:pPr>
+                        <a:defRPr sz="1100"/>
+                      </a:pPr>
+                      <a:r>
+                        <a:t>1000</a:t>
+                      </a:r>
+                    </a:p>
+                  </a:txBody>
+                  <a:tcPr/>
+                </a:tc>
+                <a:tc>
+                  <a:txBody>
+                    <a:bodyPr/>
+                    <a:lstStyle/>
+                    <a:p>
+                      <a:pPr>
+                        <a:defRPr sz="1100"/>
+                      </a:pPr>
+                      <a:r>
+                        <a:t>42.65</a:t>
+                      </a:r>
+                    </a:p>
+                  </a:txBody>
+                  <a:tcPr/>
+                </a:tc>
+                <a:tc>
+                  <a:txBody>
+                    <a:bodyPr/>
+                    <a:lstStyle/>
+                    <a:p>
+                      <a:pPr>
+                        <a:defRPr sz="1100"/>
+                      </a:pPr>
+                      <a:r>
+                        <a:t>38.02</a:t>
+                      </a:r>
+                    </a:p>
+                  </a:txBody>
+                  <a:tcPr/>
+                </a:tc>
+                <a:tc>
+                  <a:txBody>
+                    <a:bodyPr/>
+                    <a:lstStyle/>
+                    <a:p>
+                      <a:pPr>
+                        <a:defRPr sz="1100"/>
+                      </a:pPr>
+                      <a:r>
+                        <a:t>3.8</a:t>
+                      </a:r>
+                    </a:p>
+                  </a:txBody>
+                  <a:tcPr/>
+                </a:tc>
+                <a:tc>
+                  <a:txBody>
+                    <a:bodyPr/>
+                    <a:lstStyle/>
+                    <a:p>
+                      <a:pPr>
+                        <a:defRPr sz="1100"/>
+                      </a:pPr>
+                      <a:r>
+                        <a:t>-0.46</a:t>
+                      </a:r>
+                    </a:p>
+                  </a:txBody>
+                  <a:tcPr/>
+                </a:tc>
+              </a:tr>
+              <a:tr h="256032">
+                <a:tc>
+                  <a:txBody>
+                    <a:bodyPr/>
+                    <a:lstStyle/>
+                    <a:p>
+                      <a:pPr>
+                        <a:defRPr sz="1100"/>
+                      </a:pPr>
+                      <a:r>
+                        <a:t>赤峰黄金</a:t>
+                      </a:r>
+                    </a:p>
+                  </a:txBody>
+                  <a:tcPr/>
+                </a:tc>
+                <a:tc>
+                  <a:txBody>
+                    <a:bodyPr/>
+                    <a:lstStyle/>
+                    <a:p>
+                      <a:pPr>
+                        <a:defRPr sz="1100"/>
+                      </a:pPr>
+                      <a:r>
+                        <a:t>4000</a:t>
+                      </a:r>
+                    </a:p>
+                  </a:txBody>
+                  <a:tcPr/>
+                </a:tc>
+                <a:tc>
+                  <a:txBody>
+                    <a:bodyPr/>
+                    <a:lstStyle/>
+                    <a:p>
+                      <a:pPr>
+                        <a:defRPr sz="1100"/>
+                      </a:pPr>
+                      <a:r>
+                        <a:t>43.56</a:t>
+                      </a:r>
+                    </a:p>
+                  </a:txBody>
+                  <a:tcPr/>
+                </a:tc>
+                <a:tc>
+                  <a:txBody>
+                    <a:bodyPr/>
+                    <a:lstStyle/>
+                    <a:p>
+                      <a:pPr>
+                        <a:defRPr sz="1100"/>
+                      </a:pPr>
+                      <a:r>
+                        <a:t>40.09</a:t>
+                      </a:r>
+                    </a:p>
+                  </a:txBody>
+                  <a:tcPr/>
+                </a:tc>
+                <a:tc>
+                  <a:txBody>
+                    <a:bodyPr/>
+                    <a:lstStyle/>
+                    <a:p>
+                      <a:pPr>
+                        <a:defRPr sz="1100"/>
+                      </a:pPr>
+                      <a:r>
+                        <a:t>16.04</a:t>
+                      </a:r>
+                    </a:p>
+                  </a:txBody>
+                  <a:tcPr/>
+                </a:tc>
+                <a:tc>
+                  <a:txBody>
+                    <a:bodyPr/>
+                    <a:lstStyle/>
+                    <a:p>
+                      <a:pPr>
+                        <a:defRPr sz="1100"/>
+                      </a:pPr>
+                      <a:r>
+                        <a:t>-1.39</a:t>
+                      </a:r>
+                    </a:p>
+                  </a:txBody>
+                  <a:tcPr/>
+                </a:tc>
+              </a:tr>
+              <a:tr h="256032">
+                <a:tc>
+                  <a:txBody>
+                    <a:bodyPr/>
+                    <a:lstStyle/>
+                    <a:p>
+                      <a:pPr>
+                        <a:defRPr sz="1100"/>
+                      </a:pPr>
+                      <a:r>
+                        <a:t>宁德时代</a:t>
+                      </a:r>
+                    </a:p>
+                  </a:txBody>
+                  <a:tcPr/>
+                </a:tc>
+                <a:tc>
+                  <a:txBody>
+                    <a:bodyPr/>
+                    <a:lstStyle/>
+                    <a:p>
+                      <a:pPr>
+                        <a:defRPr sz="1100"/>
+                      </a:pPr>
+                      <a:r>
+                        <a:t>4500</a:t>
+                      </a:r>
+                    </a:p>
+                  </a:txBody>
+                  <a:tcPr/>
+                </a:tc>
+                <a:tc>
+                  <a:txBody>
+                    <a:bodyPr/>
+                    <a:lstStyle/>
+                    <a:p>
+                      <a:pPr>
+                        <a:defRPr sz="1100"/>
+                      </a:pPr>
+                      <a:r>
+                        <a:t>237.6</a:t>
+                      </a:r>
+                    </a:p>
+                  </a:txBody>
+                  <a:tcPr/>
+                </a:tc>
+                <a:tc>
+                  <a:txBody>
+                    <a:bodyPr/>
+                    <a:lstStyle/>
+                    <a:p>
+                      <a:pPr>
+                        <a:defRPr sz="1100"/>
+                      </a:pPr>
+                      <a:r>
+                        <a:t>237.6</a:t>
+                      </a:r>
+                    </a:p>
+                  </a:txBody>
+                  <a:tcPr/>
+                </a:tc>
+                <a:tc>
+                  <a:txBody>
+                    <a:bodyPr/>
+                    <a:lstStyle/>
+                    <a:p>
+                      <a:pPr>
+                        <a:defRPr sz="1100"/>
+                      </a:pPr>
+                      <a:r>
+                        <a:t>106.92</a:t>
                       </a:r>
                     </a:p>
                   </a:txBody>
@@ -3944,926 +4956,6 @@
                       </a:pPr>
                       <a:r>
                         <a:t>0.0</a:t>
-                      </a:r>
-                    </a:p>
-                  </a:txBody>
-                  <a:tcPr/>
-                </a:tc>
-              </a:tr>
-              <a:tr h="274320">
-                <a:tc>
-                  <a:txBody>
-                    <a:bodyPr/>
-                    <a:lstStyle/>
-                    <a:p>
-                      <a:pPr>
-                        <a:defRPr sz="1100"/>
-                      </a:pPr>
-                      <a:r>
-                        <a:t>新集能源</a:t>
-                      </a:r>
-                    </a:p>
-                  </a:txBody>
-                  <a:tcPr/>
-                </a:tc>
-                <a:tc>
-                  <a:txBody>
-                    <a:bodyPr/>
-                    <a:lstStyle/>
-                    <a:p>
-                      <a:pPr>
-                        <a:defRPr sz="1100"/>
-                      </a:pPr>
-                      <a:r>
-                        <a:t>9500</a:t>
-                      </a:r>
-                    </a:p>
-                  </a:txBody>
-                  <a:tcPr/>
-                </a:tc>
-                <a:tc>
-                  <a:txBody>
-                    <a:bodyPr/>
-                    <a:lstStyle/>
-                    <a:p>
-                      <a:pPr>
-                        <a:defRPr sz="1100"/>
-                      </a:pPr>
-                      <a:r>
-                        <a:t>10.47</a:t>
-                      </a:r>
-                    </a:p>
-                  </a:txBody>
-                  <a:tcPr/>
-                </a:tc>
-                <a:tc>
-                  <a:txBody>
-                    <a:bodyPr/>
-                    <a:lstStyle/>
-                    <a:p>
-                      <a:pPr>
-                        <a:defRPr sz="1100"/>
-                      </a:pPr>
-                      <a:r>
-                        <a:t>9.73</a:t>
-                      </a:r>
-                    </a:p>
-                  </a:txBody>
-                  <a:tcPr/>
-                </a:tc>
-                <a:tc>
-                  <a:txBody>
-                    <a:bodyPr/>
-                    <a:lstStyle/>
-                    <a:p>
-                      <a:pPr>
-                        <a:defRPr sz="1100"/>
-                      </a:pPr>
-                      <a:r>
-                        <a:t>9.24</a:t>
-                      </a:r>
-                    </a:p>
-                  </a:txBody>
-                  <a:tcPr/>
-                </a:tc>
-                <a:tc>
-                  <a:txBody>
-                    <a:bodyPr/>
-                    <a:lstStyle/>
-                    <a:p>
-                      <a:pPr>
-                        <a:defRPr sz="1100"/>
-                      </a:pPr>
-                      <a:r>
-                        <a:t>-0.71</a:t>
-                      </a:r>
-                    </a:p>
-                  </a:txBody>
-                  <a:tcPr/>
-                </a:tc>
-              </a:tr>
-              <a:tr h="274320">
-                <a:tc>
-                  <a:txBody>
-                    <a:bodyPr/>
-                    <a:lstStyle/>
-                    <a:p>
-                      <a:pPr>
-                        <a:defRPr sz="1100"/>
-                      </a:pPr>
-                      <a:r>
-                        <a:t>恺英网络</a:t>
-                      </a:r>
-                    </a:p>
-                  </a:txBody>
-                  <a:tcPr/>
-                </a:tc>
-                <a:tc>
-                  <a:txBody>
-                    <a:bodyPr/>
-                    <a:lstStyle/>
-                    <a:p>
-                      <a:pPr>
-                        <a:defRPr sz="1100"/>
-                      </a:pPr>
-                      <a:r>
-                        <a:t>5000</a:t>
-                      </a:r>
-                    </a:p>
-                  </a:txBody>
-                  <a:tcPr/>
-                </a:tc>
-                <a:tc>
-                  <a:txBody>
-                    <a:bodyPr/>
-                    <a:lstStyle/>
-                    <a:p>
-                      <a:pPr>
-                        <a:defRPr sz="1100"/>
-                      </a:pPr>
-                      <a:r>
-                        <a:t>17.52</a:t>
-                      </a:r>
-                    </a:p>
-                  </a:txBody>
-                  <a:tcPr/>
-                </a:tc>
-                <a:tc>
-                  <a:txBody>
-                    <a:bodyPr/>
-                    <a:lstStyle/>
-                    <a:p>
-                      <a:pPr>
-                        <a:defRPr sz="1100"/>
-                      </a:pPr>
-                      <a:r>
-                        <a:t>14.59</a:t>
-                      </a:r>
-                    </a:p>
-                  </a:txBody>
-                  <a:tcPr/>
-                </a:tc>
-                <a:tc>
-                  <a:txBody>
-                    <a:bodyPr/>
-                    <a:lstStyle/>
-                    <a:p>
-                      <a:pPr>
-                        <a:defRPr sz="1100"/>
-                      </a:pPr>
-                      <a:r>
-                        <a:t>7.29</a:t>
-                      </a:r>
-                    </a:p>
-                  </a:txBody>
-                  <a:tcPr/>
-                </a:tc>
-                <a:tc>
-                  <a:txBody>
-                    <a:bodyPr/>
-                    <a:lstStyle/>
-                    <a:p>
-                      <a:pPr>
-                        <a:defRPr sz="1100"/>
-                      </a:pPr>
-                      <a:r>
-                        <a:t>-1.46</a:t>
-                      </a:r>
-                    </a:p>
-                  </a:txBody>
-                  <a:tcPr/>
-                </a:tc>
-              </a:tr>
-              <a:tr h="274320">
-                <a:tc>
-                  <a:txBody>
-                    <a:bodyPr/>
-                    <a:lstStyle/>
-                    <a:p>
-                      <a:pPr>
-                        <a:defRPr sz="1100"/>
-                      </a:pPr>
-                      <a:r>
-                        <a:t>星网锐捷</a:t>
-                      </a:r>
-                    </a:p>
-                  </a:txBody>
-                  <a:tcPr/>
-                </a:tc>
-                <a:tc>
-                  <a:txBody>
-                    <a:bodyPr/>
-                    <a:lstStyle/>
-                    <a:p>
-                      <a:pPr>
-                        <a:defRPr sz="1100"/>
-                      </a:pPr>
-                      <a:r>
-                        <a:t>6100</a:t>
-                      </a:r>
-                    </a:p>
-                  </a:txBody>
-                  <a:tcPr/>
-                </a:tc>
-                <a:tc>
-                  <a:txBody>
-                    <a:bodyPr/>
-                    <a:lstStyle/>
-                    <a:p>
-                      <a:pPr>
-                        <a:defRPr sz="1100"/>
-                      </a:pPr>
-                      <a:r>
-                        <a:t>35.87</a:t>
-                      </a:r>
-                    </a:p>
-                  </a:txBody>
-                  <a:tcPr/>
-                </a:tc>
-                <a:tc>
-                  <a:txBody>
-                    <a:bodyPr/>
-                    <a:lstStyle/>
-                    <a:p>
-                      <a:pPr>
-                        <a:defRPr sz="1100"/>
-                      </a:pPr>
-                      <a:r>
-                        <a:t>25.7</a:t>
-                      </a:r>
-                    </a:p>
-                  </a:txBody>
-                  <a:tcPr/>
-                </a:tc>
-                <a:tc>
-                  <a:txBody>
-                    <a:bodyPr/>
-                    <a:lstStyle/>
-                    <a:p>
-                      <a:pPr>
-                        <a:defRPr sz="1100"/>
-                      </a:pPr>
-                      <a:r>
-                        <a:t>15.68</a:t>
-                      </a:r>
-                    </a:p>
-                  </a:txBody>
-                  <a:tcPr/>
-                </a:tc>
-                <a:tc>
-                  <a:txBody>
-                    <a:bodyPr/>
-                    <a:lstStyle/>
-                    <a:p>
-                      <a:pPr>
-                        <a:defRPr sz="1100"/>
-                      </a:pPr>
-                      <a:r>
-                        <a:t>-6.2</a:t>
-                      </a:r>
-                    </a:p>
-                  </a:txBody>
-                  <a:tcPr/>
-                </a:tc>
-              </a:tr>
-              <a:tr h="274320">
-                <a:tc>
-                  <a:txBody>
-                    <a:bodyPr/>
-                    <a:lstStyle/>
-                    <a:p>
-                      <a:pPr>
-                        <a:defRPr sz="1100"/>
-                      </a:pPr>
-                      <a:r>
-                        <a:t>深信服</a:t>
-                      </a:r>
-                    </a:p>
-                  </a:txBody>
-                  <a:tcPr/>
-                </a:tc>
-                <a:tc>
-                  <a:txBody>
-                    <a:bodyPr/>
-                    <a:lstStyle/>
-                    <a:p>
-                      <a:pPr>
-                        <a:defRPr sz="1100"/>
-                      </a:pPr>
-                      <a:r>
-                        <a:t>500</a:t>
-                      </a:r>
-                    </a:p>
-                  </a:txBody>
-                  <a:tcPr/>
-                </a:tc>
-                <a:tc>
-                  <a:txBody>
-                    <a:bodyPr/>
-                    <a:lstStyle/>
-                    <a:p>
-                      <a:pPr>
-                        <a:defRPr sz="1100"/>
-                      </a:pPr>
-                      <a:r>
-                        <a:t>136.73</a:t>
-                      </a:r>
-                    </a:p>
-                  </a:txBody>
-                  <a:tcPr/>
-                </a:tc>
-                <a:tc>
-                  <a:txBody>
-                    <a:bodyPr/>
-                    <a:lstStyle/>
-                    <a:p>
-                      <a:pPr>
-                        <a:defRPr sz="1100"/>
-                      </a:pPr>
-                      <a:r>
-                        <a:t>130.03</a:t>
-                      </a:r>
-                    </a:p>
-                  </a:txBody>
-                  <a:tcPr/>
-                </a:tc>
-                <a:tc>
-                  <a:txBody>
-                    <a:bodyPr/>
-                    <a:lstStyle/>
-                    <a:p>
-                      <a:pPr>
-                        <a:defRPr sz="1100"/>
-                      </a:pPr>
-                      <a:r>
-                        <a:t>6.5</a:t>
-                      </a:r>
-                    </a:p>
-                  </a:txBody>
-                  <a:tcPr/>
-                </a:tc>
-                <a:tc>
-                  <a:txBody>
-                    <a:bodyPr/>
-                    <a:lstStyle/>
-                    <a:p>
-                      <a:pPr>
-                        <a:defRPr sz="1100"/>
-                      </a:pPr>
-                      <a:r>
-                        <a:t>-0.33</a:t>
-                      </a:r>
-                    </a:p>
-                  </a:txBody>
-                  <a:tcPr/>
-                </a:tc>
-              </a:tr>
-              <a:tr h="274320">
-                <a:tc>
-                  <a:txBody>
-                    <a:bodyPr/>
-                    <a:lstStyle/>
-                    <a:p>
-                      <a:pPr>
-                        <a:defRPr sz="1100"/>
-                      </a:pPr>
-                      <a:r>
-                        <a:t>哈药股份</a:t>
-                      </a:r>
-                    </a:p>
-                  </a:txBody>
-                  <a:tcPr/>
-                </a:tc>
-                <a:tc>
-                  <a:txBody>
-                    <a:bodyPr/>
-                    <a:lstStyle/>
-                    <a:p>
-                      <a:pPr>
-                        <a:defRPr sz="1100"/>
-                      </a:pPr>
-                      <a:r>
-                        <a:t>5000</a:t>
-                      </a:r>
-                    </a:p>
-                  </a:txBody>
-                  <a:tcPr/>
-                </a:tc>
-                <a:tc>
-                  <a:txBody>
-                    <a:bodyPr/>
-                    <a:lstStyle/>
-                    <a:p>
-                      <a:pPr>
-                        <a:defRPr sz="1100"/>
-                      </a:pPr>
-                      <a:r>
-                        <a:t>7.33</a:t>
-                      </a:r>
-                    </a:p>
-                  </a:txBody>
-                  <a:tcPr/>
-                </a:tc>
-                <a:tc>
-                  <a:txBody>
-                    <a:bodyPr/>
-                    <a:lstStyle/>
-                    <a:p>
-                      <a:pPr>
-                        <a:defRPr sz="1100"/>
-                      </a:pPr>
-                      <a:r>
-                        <a:t>5.56</a:t>
-                      </a:r>
-                    </a:p>
-                  </a:txBody>
-                  <a:tcPr/>
-                </a:tc>
-                <a:tc>
-                  <a:txBody>
-                    <a:bodyPr/>
-                    <a:lstStyle/>
-                    <a:p>
-                      <a:pPr>
-                        <a:defRPr sz="1100"/>
-                      </a:pPr>
-                      <a:r>
-                        <a:t>2.78</a:t>
-                      </a:r>
-                    </a:p>
-                  </a:txBody>
-                  <a:tcPr/>
-                </a:tc>
-                <a:tc>
-                  <a:txBody>
-                    <a:bodyPr/>
-                    <a:lstStyle/>
-                    <a:p>
-                      <a:pPr>
-                        <a:defRPr sz="1100"/>
-                      </a:pPr>
-                      <a:r>
-                        <a:t>-0.89</a:t>
-                      </a:r>
-                    </a:p>
-                  </a:txBody>
-                  <a:tcPr/>
-                </a:tc>
-              </a:tr>
-              <a:tr h="274320">
-                <a:tc>
-                  <a:txBody>
-                    <a:bodyPr/>
-                    <a:lstStyle/>
-                    <a:p>
-                      <a:pPr>
-                        <a:defRPr sz="1100"/>
-                      </a:pPr>
-                      <a:r>
-                        <a:t>招商轮船</a:t>
-                      </a:r>
-                    </a:p>
-                  </a:txBody>
-                  <a:tcPr/>
-                </a:tc>
-                <a:tc>
-                  <a:txBody>
-                    <a:bodyPr/>
-                    <a:lstStyle/>
-                    <a:p>
-                      <a:pPr>
-                        <a:defRPr sz="1100"/>
-                      </a:pPr>
-                      <a:r>
-                        <a:t>500</a:t>
-                      </a:r>
-                    </a:p>
-                  </a:txBody>
-                  <a:tcPr/>
-                </a:tc>
-                <a:tc>
-                  <a:txBody>
-                    <a:bodyPr/>
-                    <a:lstStyle/>
-                    <a:p>
-                      <a:pPr>
-                        <a:defRPr sz="1100"/>
-                      </a:pPr>
-                      <a:r>
-                        <a:t>20.76</a:t>
-                      </a:r>
-                    </a:p>
-                  </a:txBody>
-                  <a:tcPr/>
-                </a:tc>
-                <a:tc>
-                  <a:txBody>
-                    <a:bodyPr/>
-                    <a:lstStyle/>
-                    <a:p>
-                      <a:pPr>
-                        <a:defRPr sz="1100"/>
-                      </a:pPr>
-                      <a:r>
-                        <a:t>16.27</a:t>
-                      </a:r>
-                    </a:p>
-                  </a:txBody>
-                  <a:tcPr/>
-                </a:tc>
-                <a:tc>
-                  <a:txBody>
-                    <a:bodyPr/>
-                    <a:lstStyle/>
-                    <a:p>
-                      <a:pPr>
-                        <a:defRPr sz="1100"/>
-                      </a:pPr>
-                      <a:r>
-                        <a:t>0.81</a:t>
-                      </a:r>
-                    </a:p>
-                  </a:txBody>
-                  <a:tcPr/>
-                </a:tc>
-                <a:tc>
-                  <a:txBody>
-                    <a:bodyPr/>
-                    <a:lstStyle/>
-                    <a:p>
-                      <a:pPr>
-                        <a:defRPr sz="1100"/>
-                      </a:pPr>
-                      <a:r>
-                        <a:t>-0.22</a:t>
-                      </a:r>
-                    </a:p>
-                  </a:txBody>
-                  <a:tcPr/>
-                </a:tc>
-              </a:tr>
-              <a:tr h="274320">
-                <a:tc>
-                  <a:txBody>
-                    <a:bodyPr/>
-                    <a:lstStyle/>
-                    <a:p>
-                      <a:pPr>
-                        <a:defRPr sz="1100"/>
-                      </a:pPr>
-                      <a:r>
-                        <a:t>睿创微纳</a:t>
-                      </a:r>
-                    </a:p>
-                  </a:txBody>
-                  <a:tcPr/>
-                </a:tc>
-                <a:tc>
-                  <a:txBody>
-                    <a:bodyPr/>
-                    <a:lstStyle/>
-                    <a:p>
-                      <a:pPr>
-                        <a:defRPr sz="1100"/>
-                      </a:pPr>
-                      <a:r>
-                        <a:t>1000</a:t>
-                      </a:r>
-                    </a:p>
-                  </a:txBody>
-                  <a:tcPr/>
-                </a:tc>
-                <a:tc>
-                  <a:txBody>
-                    <a:bodyPr/>
-                    <a:lstStyle/>
-                    <a:p>
-                      <a:pPr>
-                        <a:defRPr sz="1100"/>
-                      </a:pPr>
-                      <a:r>
-                        <a:t>177.58</a:t>
-                      </a:r>
-                    </a:p>
-                  </a:txBody>
-                  <a:tcPr/>
-                </a:tc>
-                <a:tc>
-                  <a:txBody>
-                    <a:bodyPr/>
-                    <a:lstStyle/>
-                    <a:p>
-                      <a:pPr>
-                        <a:defRPr sz="1100"/>
-                      </a:pPr>
-                      <a:r>
-                        <a:t>148.88</a:t>
-                      </a:r>
-                    </a:p>
-                  </a:txBody>
-                  <a:tcPr/>
-                </a:tc>
-                <a:tc>
-                  <a:txBody>
-                    <a:bodyPr/>
-                    <a:lstStyle/>
-                    <a:p>
-                      <a:pPr>
-                        <a:defRPr sz="1100"/>
-                      </a:pPr>
-                      <a:r>
-                        <a:t>14.89</a:t>
-                      </a:r>
-                    </a:p>
-                  </a:txBody>
-                  <a:tcPr/>
-                </a:tc>
-                <a:tc>
-                  <a:txBody>
-                    <a:bodyPr/>
-                    <a:lstStyle/>
-                    <a:p>
-                      <a:pPr>
-                        <a:defRPr sz="1100"/>
-                      </a:pPr>
-                      <a:r>
-                        <a:t>-2.87</a:t>
-                      </a:r>
-                    </a:p>
-                  </a:txBody>
-                  <a:tcPr/>
-                </a:tc>
-              </a:tr>
-              <a:tr h="274320">
-                <a:tc>
-                  <a:txBody>
-                    <a:bodyPr/>
-                    <a:lstStyle/>
-                    <a:p>
-                      <a:pPr>
-                        <a:defRPr sz="1100"/>
-                      </a:pPr>
-                      <a:r>
-                        <a:t>药明康德</a:t>
-                      </a:r>
-                    </a:p>
-                  </a:txBody>
-                  <a:tcPr/>
-                </a:tc>
-                <a:tc>
-                  <a:txBody>
-                    <a:bodyPr/>
-                    <a:lstStyle/>
-                    <a:p>
-                      <a:pPr>
-                        <a:defRPr sz="1100"/>
-                      </a:pPr>
-                      <a:r>
-                        <a:t>1300</a:t>
-                      </a:r>
-                    </a:p>
-                  </a:txBody>
-                  <a:tcPr/>
-                </a:tc>
-                <a:tc>
-                  <a:txBody>
-                    <a:bodyPr/>
-                    <a:lstStyle/>
-                    <a:p>
-                      <a:pPr>
-                        <a:defRPr sz="1100"/>
-                      </a:pPr>
-                      <a:r>
-                        <a:t>158.08</a:t>
-                      </a:r>
-                    </a:p>
-                  </a:txBody>
-                  <a:tcPr/>
-                </a:tc>
-                <a:tc>
-                  <a:txBody>
-                    <a:bodyPr/>
-                    <a:lstStyle/>
-                    <a:p>
-                      <a:pPr>
-                        <a:defRPr sz="1100"/>
-                      </a:pPr>
-                      <a:r>
-                        <a:t>141.31</a:t>
-                      </a:r>
-                    </a:p>
-                  </a:txBody>
-                  <a:tcPr/>
-                </a:tc>
-                <a:tc>
-                  <a:txBody>
-                    <a:bodyPr/>
-                    <a:lstStyle/>
-                    <a:p>
-                      <a:pPr>
-                        <a:defRPr sz="1100"/>
-                      </a:pPr>
-                      <a:r>
-                        <a:t>18.37</a:t>
-                      </a:r>
-                    </a:p>
-                  </a:txBody>
-                  <a:tcPr/>
-                </a:tc>
-                <a:tc>
-                  <a:txBody>
-                    <a:bodyPr/>
-                    <a:lstStyle/>
-                    <a:p>
-                      <a:pPr>
-                        <a:defRPr sz="1100"/>
-                      </a:pPr>
-                      <a:r>
-                        <a:t>-2.18</a:t>
-                      </a:r>
-                    </a:p>
-                  </a:txBody>
-                  <a:tcPr/>
-                </a:tc>
-              </a:tr>
-              <a:tr h="274320">
-                <a:tc>
-                  <a:txBody>
-                    <a:bodyPr/>
-                    <a:lstStyle/>
-                    <a:p>
-                      <a:pPr>
-                        <a:defRPr sz="1100"/>
-                      </a:pPr>
-                      <a:r>
-                        <a:t>康龙化成</a:t>
-                      </a:r>
-                    </a:p>
-                  </a:txBody>
-                  <a:tcPr/>
-                </a:tc>
-                <a:tc>
-                  <a:txBody>
-                    <a:bodyPr/>
-                    <a:lstStyle/>
-                    <a:p>
-                      <a:pPr>
-                        <a:defRPr sz="1100"/>
-                      </a:pPr>
-                      <a:r>
-                        <a:t>1000</a:t>
-                      </a:r>
-                    </a:p>
-                  </a:txBody>
-                  <a:tcPr/>
-                </a:tc>
-                <a:tc>
-                  <a:txBody>
-                    <a:bodyPr/>
-                    <a:lstStyle/>
-                    <a:p>
-                      <a:pPr>
-                        <a:defRPr sz="1100"/>
-                      </a:pPr>
-                      <a:r>
-                        <a:t>42.65</a:t>
-                      </a:r>
-                    </a:p>
-                  </a:txBody>
-                  <a:tcPr/>
-                </a:tc>
-                <a:tc>
-                  <a:txBody>
-                    <a:bodyPr/>
-                    <a:lstStyle/>
-                    <a:p>
-                      <a:pPr>
-                        <a:defRPr sz="1100"/>
-                      </a:pPr>
-                      <a:r>
-                        <a:t>37.24</a:t>
-                      </a:r>
-                    </a:p>
-                  </a:txBody>
-                  <a:tcPr/>
-                </a:tc>
-                <a:tc>
-                  <a:txBody>
-                    <a:bodyPr/>
-                    <a:lstStyle/>
-                    <a:p>
-                      <a:pPr>
-                        <a:defRPr sz="1100"/>
-                      </a:pPr>
-                      <a:r>
-                        <a:t>3.72</a:t>
-                      </a:r>
-                    </a:p>
-                  </a:txBody>
-                  <a:tcPr/>
-                </a:tc>
-                <a:tc>
-                  <a:txBody>
-                    <a:bodyPr/>
-                    <a:lstStyle/>
-                    <a:p>
-                      <a:pPr>
-                        <a:defRPr sz="1100"/>
-                      </a:pPr>
-                      <a:r>
-                        <a:t>-0.54</a:t>
-                      </a:r>
-                    </a:p>
-                  </a:txBody>
-                  <a:tcPr/>
-                </a:tc>
-              </a:tr>
-              <a:tr h="274320">
-                <a:tc>
-                  <a:txBody>
-                    <a:bodyPr/>
-                    <a:lstStyle/>
-                    <a:p>
-                      <a:pPr>
-                        <a:defRPr sz="1100"/>
-                      </a:pPr>
-                      <a:r>
-                        <a:t>赤峰黄金</a:t>
-                      </a:r>
-                    </a:p>
-                  </a:txBody>
-                  <a:tcPr/>
-                </a:tc>
-                <a:tc>
-                  <a:txBody>
-                    <a:bodyPr/>
-                    <a:lstStyle/>
-                    <a:p>
-                      <a:pPr>
-                        <a:defRPr sz="1100"/>
-                      </a:pPr>
-                      <a:r>
-                        <a:t>4000</a:t>
-                      </a:r>
-                    </a:p>
-                  </a:txBody>
-                  <a:tcPr/>
-                </a:tc>
-                <a:tc>
-                  <a:txBody>
-                    <a:bodyPr/>
-                    <a:lstStyle/>
-                    <a:p>
-                      <a:pPr>
-                        <a:defRPr sz="1100"/>
-                      </a:pPr>
-                      <a:r>
-                        <a:t>43.56</a:t>
-                      </a:r>
-                    </a:p>
-                  </a:txBody>
-                  <a:tcPr/>
-                </a:tc>
-                <a:tc>
-                  <a:txBody>
-                    <a:bodyPr/>
-                    <a:lstStyle/>
-                    <a:p>
-                      <a:pPr>
-                        <a:defRPr sz="1100"/>
-                      </a:pPr>
-                      <a:r>
-                        <a:t>38.51</a:t>
-                      </a:r>
-                    </a:p>
-                  </a:txBody>
-                  <a:tcPr/>
-                </a:tc>
-                <a:tc>
-                  <a:txBody>
-                    <a:bodyPr/>
-                    <a:lstStyle/>
-                    <a:p>
-                      <a:pPr>
-                        <a:defRPr sz="1100"/>
-                      </a:pPr>
-                      <a:r>
-                        <a:t>15.4</a:t>
-                      </a:r>
-                    </a:p>
-                  </a:txBody>
-                  <a:tcPr/>
-                </a:tc>
-                <a:tc>
-                  <a:txBody>
-                    <a:bodyPr/>
-                    <a:lstStyle/>
-                    <a:p>
-                      <a:pPr>
-                        <a:defRPr sz="1100"/>
-                      </a:pPr>
-                      <a:r>
-                        <a:t>-2.02</a:t>
                       </a:r>
                     </a:p>
                   </a:txBody>
@@ -4949,7 +5041,7 @@
               <a:defRPr sz="1500"/>
             </a:pPr>
             <a:r>
-              <a:t>紫金矿业（601899，有色金属）：综合75.0分；基本面优秀，具备中长期配置价值；趋势中性，观望。</a:t>
+              <a:t>宁德时代（300750，新能源电池）：综合76.5分；基本面优秀，具备中长期配置价值；趋势中性，观望。</a:t>
             </a:r>
           </a:p>
           <a:p>
@@ -4957,7 +5049,7 @@
               <a:defRPr sz="1500"/>
             </a:pPr>
             <a:r>
-              <a:t>宁德时代（300750，新能源电池）：综合74.5分；基本面优秀，具备中长期配置价值；趋势中性，观望。</a:t>
+              <a:t>紫金矿业（601899，有色金属）：综合73.0分；基本面优秀，具备中长期配置价值；趋势中性，观望。</a:t>
             </a:r>
           </a:p>
           <a:p>
@@ -4981,7 +5073,7 @@
               <a:defRPr sz="1500"/>
             </a:pPr>
             <a:r>
-              <a:t>立讯精密（002475，消费电子）：综合67.5分；基本面优秀，具备中长期配置价值；趋势中性，观望。</a:t>
+              <a:t>贵州茅台（600519，白酒）：综合66.5分；基本面优秀，具备中长期配置价值；中期趋势向上，可关注/持有。</a:t>
             </a:r>
           </a:p>
         </p:txBody>

--- a/outputs/12_中期路演.pptx
+++ b/outputs/12_中期路演.pptx
@@ -3167,7 +3167,7 @@
               <a:defRPr sz="1500"/>
             </a:pPr>
             <a:r>
-              <a:t>数据截止：2026-10-23</a:t>
+              <a:t>数据截止：2026-10-26</a:t>
             </a:r>
           </a:p>
         </p:txBody>
@@ -3255,7 +3255,7 @@
               <a:defRPr sz="1500"/>
             </a:pPr>
             <a:r>
-              <a:t>当前总资产：450.61万元</a:t>
+              <a:t>当前总资产：449.66万元</a:t>
             </a:r>
           </a:p>
           <a:p>
@@ -3263,7 +3263,7 @@
               <a:defRPr sz="1500"/>
             </a:pPr>
             <a:r>
-              <a:t>累计收益率：-9.88%</a:t>
+              <a:t>累计收益率：-10.07%</a:t>
             </a:r>
           </a:p>
           <a:p>
@@ -3271,7 +3271,7 @@
               <a:defRPr sz="1500"/>
             </a:pPr>
             <a:r>
-              <a:t>同期沪深300：-9.73%</a:t>
+              <a:t>同期沪深300：-9.77%</a:t>
             </a:r>
           </a:p>
           <a:p>
@@ -3279,7 +3279,7 @@
               <a:defRPr sz="1500"/>
             </a:pPr>
             <a:r>
-              <a:t>现金：94.78万元（21.0%）</a:t>
+              <a:t>现金：94.78万元（21.1%）</a:t>
             </a:r>
           </a:p>
           <a:p>
@@ -3821,37 +3821,37 @@
                         <a:defRPr sz="1100"/>
                       </a:pPr>
                       <a:r>
-                        <a:t>29.45</a:t>
-                      </a:r>
-                    </a:p>
-                  </a:txBody>
-                  <a:tcPr/>
-                </a:tc>
-                <a:tc>
-                  <a:txBody>
-                    <a:bodyPr/>
-                    <a:lstStyle/>
-                    <a:p>
-                      <a:pPr>
-                        <a:defRPr sz="1100"/>
-                      </a:pPr>
-                      <a:r>
-                        <a:t>112.79</a:t>
-                      </a:r>
-                    </a:p>
-                  </a:txBody>
-                  <a:tcPr/>
-                </a:tc>
-                <a:tc>
-                  <a:txBody>
-                    <a:bodyPr/>
-                    <a:lstStyle/>
-                    <a:p>
-                      <a:pPr>
-                        <a:defRPr sz="1100"/>
-                      </a:pPr>
-                      <a:r>
-                        <a:t>1.02</a:t>
+                        <a:t>29.86</a:t>
+                      </a:r>
+                    </a:p>
+                  </a:txBody>
+                  <a:tcPr/>
+                </a:tc>
+                <a:tc>
+                  <a:txBody>
+                    <a:bodyPr/>
+                    <a:lstStyle/>
+                    <a:p>
+                      <a:pPr>
+                        <a:defRPr sz="1100"/>
+                      </a:pPr>
+                      <a:r>
+                        <a:t>114.36</a:t>
+                      </a:r>
+                    </a:p>
+                  </a:txBody>
+                  <a:tcPr/>
+                </a:tc>
+                <a:tc>
+                  <a:txBody>
+                    <a:bodyPr/>
+                    <a:lstStyle/>
+                    <a:p>
+                      <a:pPr>
+                        <a:defRPr sz="1100"/>
+                      </a:pPr>
+                      <a:r>
+                        <a:t>2.59</a:t>
                       </a:r>
                     </a:p>
                   </a:txBody>
@@ -3913,37 +3913,37 @@
                         <a:defRPr sz="1100"/>
                       </a:pPr>
                       <a:r>
-                        <a:t>85.59</a:t>
-                      </a:r>
-                    </a:p>
-                  </a:txBody>
-                  <a:tcPr/>
-                </a:tc>
-                <a:tc>
-                  <a:txBody>
-                    <a:bodyPr/>
-                    <a:lstStyle/>
-                    <a:p>
-                      <a:pPr>
-                        <a:defRPr sz="1100"/>
-                      </a:pPr>
-                      <a:r>
-                        <a:t>38.52</a:t>
-                      </a:r>
-                    </a:p>
-                  </a:txBody>
-                  <a:tcPr/>
-                </a:tc>
-                <a:tc>
-                  <a:txBody>
-                    <a:bodyPr/>
-                    <a:lstStyle/>
-                    <a:p>
-                      <a:pPr>
-                        <a:defRPr sz="1100"/>
-                      </a:pPr>
-                      <a:r>
-                        <a:t>0.14</a:t>
+                        <a:t>85.5</a:t>
+                      </a:r>
+                    </a:p>
+                  </a:txBody>
+                  <a:tcPr/>
+                </a:tc>
+                <a:tc>
+                  <a:txBody>
+                    <a:bodyPr/>
+                    <a:lstStyle/>
+                    <a:p>
+                      <a:pPr>
+                        <a:defRPr sz="1100"/>
+                      </a:pPr>
+                      <a:r>
+                        <a:t>38.48</a:t>
+                      </a:r>
+                    </a:p>
+                  </a:txBody>
+                  <a:tcPr/>
+                </a:tc>
+                <a:tc>
+                  <a:txBody>
+                    <a:bodyPr/>
+                    <a:lstStyle/>
+                    <a:p>
+                      <a:pPr>
+                        <a:defRPr sz="1100"/>
+                      </a:pPr>
+                      <a:r>
+                        <a:t>0.1</a:t>
                       </a:r>
                     </a:p>
                   </a:txBody>
@@ -4005,37 +4005,37 @@
                         <a:defRPr sz="1100"/>
                       </a:pPr>
                       <a:r>
-                        <a:t>9.64</a:t>
-                      </a:r>
-                    </a:p>
-                  </a:txBody>
-                  <a:tcPr/>
-                </a:tc>
-                <a:tc>
-                  <a:txBody>
-                    <a:bodyPr/>
-                    <a:lstStyle/>
-                    <a:p>
-                      <a:pPr>
-                        <a:defRPr sz="1100"/>
-                      </a:pPr>
-                      <a:r>
-                        <a:t>9.16</a:t>
-                      </a:r>
-                    </a:p>
-                  </a:txBody>
-                  <a:tcPr/>
-                </a:tc>
-                <a:tc>
-                  <a:txBody>
-                    <a:bodyPr/>
-                    <a:lstStyle/>
-                    <a:p>
-                      <a:pPr>
-                        <a:defRPr sz="1100"/>
-                      </a:pPr>
-                      <a:r>
-                        <a:t>-0.79</a:t>
+                        <a:t>9.47</a:t>
+                      </a:r>
+                    </a:p>
+                  </a:txBody>
+                  <a:tcPr/>
+                </a:tc>
+                <a:tc>
+                  <a:txBody>
+                    <a:bodyPr/>
+                    <a:lstStyle/>
+                    <a:p>
+                      <a:pPr>
+                        <a:defRPr sz="1100"/>
+                      </a:pPr>
+                      <a:r>
+                        <a:t>9.0</a:t>
+                      </a:r>
+                    </a:p>
+                  </a:txBody>
+                  <a:tcPr/>
+                </a:tc>
+                <a:tc>
+                  <a:txBody>
+                    <a:bodyPr/>
+                    <a:lstStyle/>
+                    <a:p>
+                      <a:pPr>
+                        <a:defRPr sz="1100"/>
+                      </a:pPr>
+                      <a:r>
+                        <a:t>-0.95</a:t>
                       </a:r>
                     </a:p>
                   </a:txBody>
@@ -4097,37 +4097,37 @@
                         <a:defRPr sz="1100"/>
                       </a:pPr>
                       <a:r>
-                        <a:t>15.05</a:t>
-                      </a:r>
-                    </a:p>
-                  </a:txBody>
-                  <a:tcPr/>
-                </a:tc>
-                <a:tc>
-                  <a:txBody>
-                    <a:bodyPr/>
-                    <a:lstStyle/>
-                    <a:p>
-                      <a:pPr>
-                        <a:defRPr sz="1100"/>
-                      </a:pPr>
-                      <a:r>
-                        <a:t>7.53</a:t>
-                      </a:r>
-                    </a:p>
-                  </a:txBody>
-                  <a:tcPr/>
-                </a:tc>
-                <a:tc>
-                  <a:txBody>
-                    <a:bodyPr/>
-                    <a:lstStyle/>
-                    <a:p>
-                      <a:pPr>
-                        <a:defRPr sz="1100"/>
-                      </a:pPr>
-                      <a:r>
-                        <a:t>-1.23</a:t>
+                        <a:t>15.57</a:t>
+                      </a:r>
+                    </a:p>
+                  </a:txBody>
+                  <a:tcPr/>
+                </a:tc>
+                <a:tc>
+                  <a:txBody>
+                    <a:bodyPr/>
+                    <a:lstStyle/>
+                    <a:p>
+                      <a:pPr>
+                        <a:defRPr sz="1100"/>
+                      </a:pPr>
+                      <a:r>
+                        <a:t>7.79</a:t>
+                      </a:r>
+                    </a:p>
+                  </a:txBody>
+                  <a:tcPr/>
+                </a:tc>
+                <a:tc>
+                  <a:txBody>
+                    <a:bodyPr/>
+                    <a:lstStyle/>
+                    <a:p>
+                      <a:pPr>
+                        <a:defRPr sz="1100"/>
+                      </a:pPr>
+                      <a:r>
+                        <a:t>-0.97</a:t>
                       </a:r>
                     </a:p>
                   </a:txBody>
@@ -4189,37 +4189,37 @@
                         <a:defRPr sz="1100"/>
                       </a:pPr>
                       <a:r>
-                        <a:t>26.23</a:t>
-                      </a:r>
-                    </a:p>
-                  </a:txBody>
-                  <a:tcPr/>
-                </a:tc>
-                <a:tc>
-                  <a:txBody>
-                    <a:bodyPr/>
-                    <a:lstStyle/>
-                    <a:p>
-                      <a:pPr>
-                        <a:defRPr sz="1100"/>
-                      </a:pPr>
-                      <a:r>
-                        <a:t>16.0</a:t>
-                      </a:r>
-                    </a:p>
-                  </a:txBody>
-                  <a:tcPr/>
-                </a:tc>
-                <a:tc>
-                  <a:txBody>
-                    <a:bodyPr/>
-                    <a:lstStyle/>
-                    <a:p>
-                      <a:pPr>
-                        <a:defRPr sz="1100"/>
-                      </a:pPr>
-                      <a:r>
-                        <a:t>-5.88</a:t>
+                        <a:t>24.79</a:t>
+                      </a:r>
+                    </a:p>
+                  </a:txBody>
+                  <a:tcPr/>
+                </a:tc>
+                <a:tc>
+                  <a:txBody>
+                    <a:bodyPr/>
+                    <a:lstStyle/>
+                    <a:p>
+                      <a:pPr>
+                        <a:defRPr sz="1100"/>
+                      </a:pPr>
+                      <a:r>
+                        <a:t>15.12</a:t>
+                      </a:r>
+                    </a:p>
+                  </a:txBody>
+                  <a:tcPr/>
+                </a:tc>
+                <a:tc>
+                  <a:txBody>
+                    <a:bodyPr/>
+                    <a:lstStyle/>
+                    <a:p>
+                      <a:pPr>
+                        <a:defRPr sz="1100"/>
+                      </a:pPr>
+                      <a:r>
+                        <a:t>-6.76</a:t>
                       </a:r>
                     </a:p>
                   </a:txBody>
@@ -4281,37 +4281,37 @@
                         <a:defRPr sz="1100"/>
                       </a:pPr>
                       <a:r>
-                        <a:t>146.74</a:t>
-                      </a:r>
-                    </a:p>
-                  </a:txBody>
-                  <a:tcPr/>
-                </a:tc>
-                <a:tc>
-                  <a:txBody>
-                    <a:bodyPr/>
-                    <a:lstStyle/>
-                    <a:p>
-                      <a:pPr>
-                        <a:defRPr sz="1100"/>
-                      </a:pPr>
-                      <a:r>
-                        <a:t>7.34</a:t>
-                      </a:r>
-                    </a:p>
-                  </a:txBody>
-                  <a:tcPr/>
-                </a:tc>
-                <a:tc>
-                  <a:txBody>
-                    <a:bodyPr/>
-                    <a:lstStyle/>
-                    <a:p>
-                      <a:pPr>
-                        <a:defRPr sz="1100"/>
-                      </a:pPr>
-                      <a:r>
-                        <a:t>0.5</a:t>
+                        <a:t>145.2</a:t>
+                      </a:r>
+                    </a:p>
+                  </a:txBody>
+                  <a:tcPr/>
+                </a:tc>
+                <a:tc>
+                  <a:txBody>
+                    <a:bodyPr/>
+                    <a:lstStyle/>
+                    <a:p>
+                      <a:pPr>
+                        <a:defRPr sz="1100"/>
+                      </a:pPr>
+                      <a:r>
+                        <a:t>7.26</a:t>
+                      </a:r>
+                    </a:p>
+                  </a:txBody>
+                  <a:tcPr/>
+                </a:tc>
+                <a:tc>
+                  <a:txBody>
+                    <a:bodyPr/>
+                    <a:lstStyle/>
+                    <a:p>
+                      <a:pPr>
+                        <a:defRPr sz="1100"/>
+                      </a:pPr>
+                      <a:r>
+                        <a:t>0.42</a:t>
                       </a:r>
                     </a:p>
                   </a:txBody>
@@ -4373,37 +4373,37 @@
                         <a:defRPr sz="1100"/>
                       </a:pPr>
                       <a:r>
-                        <a:t>5.56</a:t>
-                      </a:r>
-                    </a:p>
-                  </a:txBody>
-                  <a:tcPr/>
-                </a:tc>
-                <a:tc>
-                  <a:txBody>
-                    <a:bodyPr/>
-                    <a:lstStyle/>
-                    <a:p>
-                      <a:pPr>
-                        <a:defRPr sz="1100"/>
-                      </a:pPr>
-                      <a:r>
-                        <a:t>2.78</a:t>
-                      </a:r>
-                    </a:p>
-                  </a:txBody>
-                  <a:tcPr/>
-                </a:tc>
-                <a:tc>
-                  <a:txBody>
-                    <a:bodyPr/>
-                    <a:lstStyle/>
-                    <a:p>
-                      <a:pPr>
-                        <a:defRPr sz="1100"/>
-                      </a:pPr>
-                      <a:r>
-                        <a:t>-0.89</a:t>
+                        <a:t>5.5</a:t>
+                      </a:r>
+                    </a:p>
+                  </a:txBody>
+                  <a:tcPr/>
+                </a:tc>
+                <a:tc>
+                  <a:txBody>
+                    <a:bodyPr/>
+                    <a:lstStyle/>
+                    <a:p>
+                      <a:pPr>
+                        <a:defRPr sz="1100"/>
+                      </a:pPr>
+                      <a:r>
+                        <a:t>2.75</a:t>
+                      </a:r>
+                    </a:p>
+                  </a:txBody>
+                  <a:tcPr/>
+                </a:tc>
+                <a:tc>
+                  <a:txBody>
+                    <a:bodyPr/>
+                    <a:lstStyle/>
+                    <a:p>
+                      <a:pPr>
+                        <a:defRPr sz="1100"/>
+                      </a:pPr>
+                      <a:r>
+                        <a:t>-0.92</a:t>
                       </a:r>
                     </a:p>
                   </a:txBody>
@@ -4465,37 +4465,37 @@
                         <a:defRPr sz="1100"/>
                       </a:pPr>
                       <a:r>
-                        <a:t>16.58</a:t>
-                      </a:r>
-                    </a:p>
-                  </a:txBody>
-                  <a:tcPr/>
-                </a:tc>
-                <a:tc>
-                  <a:txBody>
-                    <a:bodyPr/>
-                    <a:lstStyle/>
-                    <a:p>
-                      <a:pPr>
-                        <a:defRPr sz="1100"/>
-                      </a:pPr>
-                      <a:r>
-                        <a:t>0.83</a:t>
-                      </a:r>
-                    </a:p>
-                  </a:txBody>
-                  <a:tcPr/>
-                </a:tc>
-                <a:tc>
-                  <a:txBody>
-                    <a:bodyPr/>
-                    <a:lstStyle/>
-                    <a:p>
-                      <a:pPr>
-                        <a:defRPr sz="1100"/>
-                      </a:pPr>
-                      <a:r>
-                        <a:t>-0.21</a:t>
+                        <a:t>16.99</a:t>
+                      </a:r>
+                    </a:p>
+                  </a:txBody>
+                  <a:tcPr/>
+                </a:tc>
+                <a:tc>
+                  <a:txBody>
+                    <a:bodyPr/>
+                    <a:lstStyle/>
+                    <a:p>
+                      <a:pPr>
+                        <a:defRPr sz="1100"/>
+                      </a:pPr>
+                      <a:r>
+                        <a:t>0.85</a:t>
+                      </a:r>
+                    </a:p>
+                  </a:txBody>
+                  <a:tcPr/>
+                </a:tc>
+                <a:tc>
+                  <a:txBody>
+                    <a:bodyPr/>
+                    <a:lstStyle/>
+                    <a:p>
+                      <a:pPr>
+                        <a:defRPr sz="1100"/>
+                      </a:pPr>
+                      <a:r>
+                        <a:t>-0.19</a:t>
                       </a:r>
                     </a:p>
                   </a:txBody>
@@ -4557,37 +4557,37 @@
                         <a:defRPr sz="1100"/>
                       </a:pPr>
                       <a:r>
-                        <a:t>153.15</a:t>
-                      </a:r>
-                    </a:p>
-                  </a:txBody>
-                  <a:tcPr/>
-                </a:tc>
-                <a:tc>
-                  <a:txBody>
-                    <a:bodyPr/>
-                    <a:lstStyle/>
-                    <a:p>
-                      <a:pPr>
-                        <a:defRPr sz="1100"/>
-                      </a:pPr>
-                      <a:r>
-                        <a:t>15.31</a:t>
-                      </a:r>
-                    </a:p>
-                  </a:txBody>
-                  <a:tcPr/>
-                </a:tc>
-                <a:tc>
-                  <a:txBody>
-                    <a:bodyPr/>
-                    <a:lstStyle/>
-                    <a:p>
-                      <a:pPr>
-                        <a:defRPr sz="1100"/>
-                      </a:pPr>
-                      <a:r>
-                        <a:t>-2.44</a:t>
+                        <a:t>147.76</a:t>
+                      </a:r>
+                    </a:p>
+                  </a:txBody>
+                  <a:tcPr/>
+                </a:tc>
+                <a:tc>
+                  <a:txBody>
+                    <a:bodyPr/>
+                    <a:lstStyle/>
+                    <a:p>
+                      <a:pPr>
+                        <a:defRPr sz="1100"/>
+                      </a:pPr>
+                      <a:r>
+                        <a:t>14.78</a:t>
+                      </a:r>
+                    </a:p>
+                  </a:txBody>
+                  <a:tcPr/>
+                </a:tc>
+                <a:tc>
+                  <a:txBody>
+                    <a:bodyPr/>
+                    <a:lstStyle/>
+                    <a:p>
+                      <a:pPr>
+                        <a:defRPr sz="1100"/>
+                      </a:pPr>
+                      <a:r>
+                        <a:t>-2.98</a:t>
                       </a:r>
                     </a:p>
                   </a:txBody>
@@ -4649,37 +4649,37 @@
                         <a:defRPr sz="1100"/>
                       </a:pPr>
                       <a:r>
-                        <a:t>144.72</a:t>
-                      </a:r>
-                    </a:p>
-                  </a:txBody>
-                  <a:tcPr/>
-                </a:tc>
-                <a:tc>
-                  <a:txBody>
-                    <a:bodyPr/>
-                    <a:lstStyle/>
-                    <a:p>
-                      <a:pPr>
-                        <a:defRPr sz="1100"/>
-                      </a:pPr>
-                      <a:r>
-                        <a:t>18.81</a:t>
-                      </a:r>
-                    </a:p>
-                  </a:txBody>
-                  <a:tcPr/>
-                </a:tc>
-                <a:tc>
-                  <a:txBody>
-                    <a:bodyPr/>
-                    <a:lstStyle/>
-                    <a:p>
-                      <a:pPr>
-                        <a:defRPr sz="1100"/>
-                      </a:pPr>
-                      <a:r>
-                        <a:t>-1.74</a:t>
+                        <a:t>146.0</a:t>
+                      </a:r>
+                    </a:p>
+                  </a:txBody>
+                  <a:tcPr/>
+                </a:tc>
+                <a:tc>
+                  <a:txBody>
+                    <a:bodyPr/>
+                    <a:lstStyle/>
+                    <a:p>
+                      <a:pPr>
+                        <a:defRPr sz="1100"/>
+                      </a:pPr>
+                      <a:r>
+                        <a:t>18.98</a:t>
+                      </a:r>
+                    </a:p>
+                  </a:txBody>
+                  <a:tcPr/>
+                </a:tc>
+                <a:tc>
+                  <a:txBody>
+                    <a:bodyPr/>
+                    <a:lstStyle/>
+                    <a:p>
+                      <a:pPr>
+                        <a:defRPr sz="1100"/>
+                      </a:pPr>
+                      <a:r>
+                        <a:t>-1.57</a:t>
                       </a:r>
                     </a:p>
                   </a:txBody>
@@ -4741,37 +4741,37 @@
                         <a:defRPr sz="1100"/>
                       </a:pPr>
                       <a:r>
-                        <a:t>38.02</a:t>
-                      </a:r>
-                    </a:p>
-                  </a:txBody>
-                  <a:tcPr/>
-                </a:tc>
-                <a:tc>
-                  <a:txBody>
-                    <a:bodyPr/>
-                    <a:lstStyle/>
-                    <a:p>
-                      <a:pPr>
-                        <a:defRPr sz="1100"/>
-                      </a:pPr>
-                      <a:r>
-                        <a:t>3.8</a:t>
-                      </a:r>
-                    </a:p>
-                  </a:txBody>
-                  <a:tcPr/>
-                </a:tc>
-                <a:tc>
-                  <a:txBody>
-                    <a:bodyPr/>
-                    <a:lstStyle/>
-                    <a:p>
-                      <a:pPr>
-                        <a:defRPr sz="1100"/>
-                      </a:pPr>
-                      <a:r>
-                        <a:t>-0.46</a:t>
+                        <a:t>38.1</a:t>
+                      </a:r>
+                    </a:p>
+                  </a:txBody>
+                  <a:tcPr/>
+                </a:tc>
+                <a:tc>
+                  <a:txBody>
+                    <a:bodyPr/>
+                    <a:lstStyle/>
+                    <a:p>
+                      <a:pPr>
+                        <a:defRPr sz="1100"/>
+                      </a:pPr>
+                      <a:r>
+                        <a:t>3.81</a:t>
+                      </a:r>
+                    </a:p>
+                  </a:txBody>
+                  <a:tcPr/>
+                </a:tc>
+                <a:tc>
+                  <a:txBody>
+                    <a:bodyPr/>
+                    <a:lstStyle/>
+                    <a:p>
+                      <a:pPr>
+                        <a:defRPr sz="1100"/>
+                      </a:pPr>
+                      <a:r>
+                        <a:t>-0.45</a:t>
                       </a:r>
                     </a:p>
                   </a:txBody>
@@ -4833,37 +4833,37 @@
                         <a:defRPr sz="1100"/>
                       </a:pPr>
                       <a:r>
-                        <a:t>40.09</a:t>
-                      </a:r>
-                    </a:p>
-                  </a:txBody>
-                  <a:tcPr/>
-                </a:tc>
-                <a:tc>
-                  <a:txBody>
-                    <a:bodyPr/>
-                    <a:lstStyle/>
-                    <a:p>
-                      <a:pPr>
-                        <a:defRPr sz="1100"/>
-                      </a:pPr>
-                      <a:r>
-                        <a:t>16.04</a:t>
-                      </a:r>
-                    </a:p>
-                  </a:txBody>
-                  <a:tcPr/>
-                </a:tc>
-                <a:tc>
-                  <a:txBody>
-                    <a:bodyPr/>
-                    <a:lstStyle/>
-                    <a:p>
-                      <a:pPr>
-                        <a:defRPr sz="1100"/>
-                      </a:pPr>
-                      <a:r>
-                        <a:t>-1.39</a:t>
+                        <a:t>36.52</a:t>
+                      </a:r>
+                    </a:p>
+                  </a:txBody>
+                  <a:tcPr/>
+                </a:tc>
+                <a:tc>
+                  <a:txBody>
+                    <a:bodyPr/>
+                    <a:lstStyle/>
+                    <a:p>
+                      <a:pPr>
+                        <a:defRPr sz="1100"/>
+                      </a:pPr>
+                      <a:r>
+                        <a:t>14.61</a:t>
+                      </a:r>
+                    </a:p>
+                  </a:txBody>
+                  <a:tcPr/>
+                </a:tc>
+                <a:tc>
+                  <a:txBody>
+                    <a:bodyPr/>
+                    <a:lstStyle/>
+                    <a:p>
+                      <a:pPr>
+                        <a:defRPr sz="1100"/>
+                      </a:pPr>
+                      <a:r>
+                        <a:t>-2.82</a:t>
                       </a:r>
                     </a:p>
                   </a:txBody>
@@ -4925,37 +4925,37 @@
                         <a:defRPr sz="1100"/>
                       </a:pPr>
                       <a:r>
-                        <a:t>237.6</a:t>
-                      </a:r>
-                    </a:p>
-                  </a:txBody>
-                  <a:tcPr/>
-                </a:tc>
-                <a:tc>
-                  <a:txBody>
-                    <a:bodyPr/>
-                    <a:lstStyle/>
-                    <a:p>
-                      <a:pPr>
-                        <a:defRPr sz="1100"/>
-                      </a:pPr>
-                      <a:r>
-                        <a:t>106.92</a:t>
-                      </a:r>
-                    </a:p>
-                  </a:txBody>
-                  <a:tcPr/>
-                </a:tc>
-                <a:tc>
-                  <a:txBody>
-                    <a:bodyPr/>
-                    <a:lstStyle/>
-                    <a:p>
-                      <a:pPr>
-                        <a:defRPr sz="1100"/>
-                      </a:pPr>
-                      <a:r>
-                        <a:t>0.0</a:t>
+                        <a:t>238.0</a:t>
+                      </a:r>
+                    </a:p>
+                  </a:txBody>
+                  <a:tcPr/>
+                </a:tc>
+                <a:tc>
+                  <a:txBody>
+                    <a:bodyPr/>
+                    <a:lstStyle/>
+                    <a:p>
+                      <a:pPr>
+                        <a:defRPr sz="1100"/>
+                      </a:pPr>
+                      <a:r>
+                        <a:t>107.1</a:t>
+                      </a:r>
+                    </a:p>
+                  </a:txBody>
+                  <a:tcPr/>
+                </a:tc>
+                <a:tc>
+                  <a:txBody>
+                    <a:bodyPr/>
+                    <a:lstStyle/>
+                    <a:p>
+                      <a:pPr>
+                        <a:defRPr sz="1100"/>
+                      </a:pPr>
+                      <a:r>
+                        <a:t>0.18</a:t>
                       </a:r>
                     </a:p>
                   </a:txBody>
@@ -5049,7 +5049,7 @@
               <a:defRPr sz="1500"/>
             </a:pPr>
             <a:r>
-              <a:t>紫金矿业（601899，有色金属）：综合73.0分；基本面优秀，具备中长期配置价值；趋势中性，观望。</a:t>
+              <a:t>紫金矿业（601899，有色金属）：综合72.5分；基本面优秀，具备中长期配置价值；趋势中性，观望。</a:t>
             </a:r>
           </a:p>
           <a:p>
@@ -5057,7 +5057,7 @@
               <a:defRPr sz="1500"/>
             </a:pPr>
             <a:r>
-              <a:t>长江电力（600900，电力）：综合70.0分；基本面优秀，具备中长期配置价值；中期趋势向上，可关注/持有。</a:t>
+              <a:t>长江电力（600900，电力）：综合72.0分；基本面优秀，具备中长期配置价值；中期趋势向上，可关注/持有。</a:t>
             </a:r>
           </a:p>
           <a:p>
@@ -5065,7 +5065,7 @@
               <a:defRPr sz="1500"/>
             </a:pPr>
             <a:r>
-              <a:t>美的集团（000333，家电）：综合67.5分；基本面优秀，具备中长期配置价值；中期趋势向上，可关注/持有。</a:t>
+              <a:t>招商银行（600036，银行）：综合66.0分；基本面优秀，具备中长期配置价值；中期趋势向上，可关注/持有。</a:t>
             </a:r>
           </a:p>
           <a:p>
@@ -5073,7 +5073,7 @@
               <a:defRPr sz="1500"/>
             </a:pPr>
             <a:r>
-              <a:t>贵州茅台（600519，白酒）：综合66.5分；基本面优秀，具备中长期配置价值；中期趋势向上，可关注/持有。</a:t>
+              <a:t>美的集团（000333，家电）：综合65.5分；基本面优秀，具备中长期配置价值；趋势中性，观望。</a:t>
             </a:r>
           </a:p>
         </p:txBody>

--- a/outputs/12_中期路演.pptx
+++ b/outputs/12_中期路演.pptx
@@ -3167,7 +3167,7 @@
               <a:defRPr sz="1500"/>
             </a:pPr>
             <a:r>
-              <a:t>数据截止：2026-10-26</a:t>
+              <a:t>数据截止：2026-10-27</a:t>
             </a:r>
           </a:p>
         </p:txBody>
@@ -3255,7 +3255,7 @@
               <a:defRPr sz="1500"/>
             </a:pPr>
             <a:r>
-              <a:t>当前总资产：449.66万元</a:t>
+              <a:t>当前总资产：444.49万元</a:t>
             </a:r>
           </a:p>
           <a:p>
@@ -3263,7 +3263,7 @@
               <a:defRPr sz="1500"/>
             </a:pPr>
             <a:r>
-              <a:t>累计收益率：-10.07%</a:t>
+              <a:t>累计收益率：-11.10%</a:t>
             </a:r>
           </a:p>
           <a:p>
@@ -3271,7 +3271,7 @@
               <a:defRPr sz="1500"/>
             </a:pPr>
             <a:r>
-              <a:t>同期沪深300：-9.77%</a:t>
+              <a:t>同期沪深300：-10.96%</a:t>
             </a:r>
           </a:p>
           <a:p>
@@ -3279,7 +3279,7 @@
               <a:defRPr sz="1500"/>
             </a:pPr>
             <a:r>
-              <a:t>现金：94.78万元（21.1%）</a:t>
+              <a:t>现金：94.78万元（21.3%）</a:t>
             </a:r>
           </a:p>
           <a:p>
@@ -3821,37 +3821,37 @@
                         <a:defRPr sz="1100"/>
                       </a:pPr>
                       <a:r>
-                        <a:t>29.86</a:t>
-                      </a:r>
-                    </a:p>
-                  </a:txBody>
-                  <a:tcPr/>
-                </a:tc>
-                <a:tc>
-                  <a:txBody>
-                    <a:bodyPr/>
-                    <a:lstStyle/>
-                    <a:p>
-                      <a:pPr>
-                        <a:defRPr sz="1100"/>
-                      </a:pPr>
-                      <a:r>
-                        <a:t>114.36</a:t>
-                      </a:r>
-                    </a:p>
-                  </a:txBody>
-                  <a:tcPr/>
-                </a:tc>
-                <a:tc>
-                  <a:txBody>
-                    <a:bodyPr/>
-                    <a:lstStyle/>
-                    <a:p>
-                      <a:pPr>
-                        <a:defRPr sz="1100"/>
-                      </a:pPr>
-                      <a:r>
-                        <a:t>2.59</a:t>
+                        <a:t>29.83</a:t>
+                      </a:r>
+                    </a:p>
+                  </a:txBody>
+                  <a:tcPr/>
+                </a:tc>
+                <a:tc>
+                  <a:txBody>
+                    <a:bodyPr/>
+                    <a:lstStyle/>
+                    <a:p>
+                      <a:pPr>
+                        <a:defRPr sz="1100"/>
+                      </a:pPr>
+                      <a:r>
+                        <a:t>114.25</a:t>
+                      </a:r>
+                    </a:p>
+                  </a:txBody>
+                  <a:tcPr/>
+                </a:tc>
+                <a:tc>
+                  <a:txBody>
+                    <a:bodyPr/>
+                    <a:lstStyle/>
+                    <a:p>
+                      <a:pPr>
+                        <a:defRPr sz="1100"/>
+                      </a:pPr>
+                      <a:r>
+                        <a:t>2.48</a:t>
                       </a:r>
                     </a:p>
                   </a:txBody>
@@ -3913,37 +3913,37 @@
                         <a:defRPr sz="1100"/>
                       </a:pPr>
                       <a:r>
-                        <a:t>85.5</a:t>
-                      </a:r>
-                    </a:p>
-                  </a:txBody>
-                  <a:tcPr/>
-                </a:tc>
-                <a:tc>
-                  <a:txBody>
-                    <a:bodyPr/>
-                    <a:lstStyle/>
-                    <a:p>
-                      <a:pPr>
-                        <a:defRPr sz="1100"/>
-                      </a:pPr>
-                      <a:r>
-                        <a:t>38.48</a:t>
-                      </a:r>
-                    </a:p>
-                  </a:txBody>
-                  <a:tcPr/>
-                </a:tc>
-                <a:tc>
-                  <a:txBody>
-                    <a:bodyPr/>
-                    <a:lstStyle/>
-                    <a:p>
-                      <a:pPr>
-                        <a:defRPr sz="1100"/>
-                      </a:pPr>
-                      <a:r>
-                        <a:t>0.1</a:t>
+                        <a:t>85.04</a:t>
+                      </a:r>
+                    </a:p>
+                  </a:txBody>
+                  <a:tcPr/>
+                </a:tc>
+                <a:tc>
+                  <a:txBody>
+                    <a:bodyPr/>
+                    <a:lstStyle/>
+                    <a:p>
+                      <a:pPr>
+                        <a:defRPr sz="1100"/>
+                      </a:pPr>
+                      <a:r>
+                        <a:t>38.27</a:t>
+                      </a:r>
+                    </a:p>
+                  </a:txBody>
+                  <a:tcPr/>
+                </a:tc>
+                <a:tc>
+                  <a:txBody>
+                    <a:bodyPr/>
+                    <a:lstStyle/>
+                    <a:p>
+                      <a:pPr>
+                        <a:defRPr sz="1100"/>
+                      </a:pPr>
+                      <a:r>
+                        <a:t>-0.11</a:t>
                       </a:r>
                     </a:p>
                   </a:txBody>
@@ -4005,37 +4005,37 @@
                         <a:defRPr sz="1100"/>
                       </a:pPr>
                       <a:r>
-                        <a:t>9.47</a:t>
-                      </a:r>
-                    </a:p>
-                  </a:txBody>
-                  <a:tcPr/>
-                </a:tc>
-                <a:tc>
-                  <a:txBody>
-                    <a:bodyPr/>
-                    <a:lstStyle/>
-                    <a:p>
-                      <a:pPr>
-                        <a:defRPr sz="1100"/>
-                      </a:pPr>
-                      <a:r>
-                        <a:t>9.0</a:t>
-                      </a:r>
-                    </a:p>
-                  </a:txBody>
-                  <a:tcPr/>
-                </a:tc>
-                <a:tc>
-                  <a:txBody>
-                    <a:bodyPr/>
-                    <a:lstStyle/>
-                    <a:p>
-                      <a:pPr>
-                        <a:defRPr sz="1100"/>
-                      </a:pPr>
-                      <a:r>
-                        <a:t>-0.95</a:t>
+                        <a:t>9.48</a:t>
+                      </a:r>
+                    </a:p>
+                  </a:txBody>
+                  <a:tcPr/>
+                </a:tc>
+                <a:tc>
+                  <a:txBody>
+                    <a:bodyPr/>
+                    <a:lstStyle/>
+                    <a:p>
+                      <a:pPr>
+                        <a:defRPr sz="1100"/>
+                      </a:pPr>
+                      <a:r>
+                        <a:t>9.01</a:t>
+                      </a:r>
+                    </a:p>
+                  </a:txBody>
+                  <a:tcPr/>
+                </a:tc>
+                <a:tc>
+                  <a:txBody>
+                    <a:bodyPr/>
+                    <a:lstStyle/>
+                    <a:p>
+                      <a:pPr>
+                        <a:defRPr sz="1100"/>
+                      </a:pPr>
+                      <a:r>
+                        <a:t>-0.94</a:t>
                       </a:r>
                     </a:p>
                   </a:txBody>
@@ -4097,37 +4097,37 @@
                         <a:defRPr sz="1100"/>
                       </a:pPr>
                       <a:r>
-                        <a:t>15.57</a:t>
-                      </a:r>
-                    </a:p>
-                  </a:txBody>
-                  <a:tcPr/>
-                </a:tc>
-                <a:tc>
-                  <a:txBody>
-                    <a:bodyPr/>
-                    <a:lstStyle/>
-                    <a:p>
-                      <a:pPr>
-                        <a:defRPr sz="1100"/>
-                      </a:pPr>
-                      <a:r>
-                        <a:t>7.79</a:t>
-                      </a:r>
-                    </a:p>
-                  </a:txBody>
-                  <a:tcPr/>
-                </a:tc>
-                <a:tc>
-                  <a:txBody>
-                    <a:bodyPr/>
-                    <a:lstStyle/>
-                    <a:p>
-                      <a:pPr>
-                        <a:defRPr sz="1100"/>
-                      </a:pPr>
-                      <a:r>
-                        <a:t>-0.97</a:t>
+                        <a:t>15.18</a:t>
+                      </a:r>
+                    </a:p>
+                  </a:txBody>
+                  <a:tcPr/>
+                </a:tc>
+                <a:tc>
+                  <a:txBody>
+                    <a:bodyPr/>
+                    <a:lstStyle/>
+                    <a:p>
+                      <a:pPr>
+                        <a:defRPr sz="1100"/>
+                      </a:pPr>
+                      <a:r>
+                        <a:t>7.59</a:t>
+                      </a:r>
+                    </a:p>
+                  </a:txBody>
+                  <a:tcPr/>
+                </a:tc>
+                <a:tc>
+                  <a:txBody>
+                    <a:bodyPr/>
+                    <a:lstStyle/>
+                    <a:p>
+                      <a:pPr>
+                        <a:defRPr sz="1100"/>
+                      </a:pPr>
+                      <a:r>
+                        <a:t>-1.17</a:t>
                       </a:r>
                     </a:p>
                   </a:txBody>
@@ -4189,37 +4189,37 @@
                         <a:defRPr sz="1100"/>
                       </a:pPr>
                       <a:r>
-                        <a:t>24.79</a:t>
-                      </a:r>
-                    </a:p>
-                  </a:txBody>
-                  <a:tcPr/>
-                </a:tc>
-                <a:tc>
-                  <a:txBody>
-                    <a:bodyPr/>
-                    <a:lstStyle/>
-                    <a:p>
-                      <a:pPr>
-                        <a:defRPr sz="1100"/>
-                      </a:pPr>
-                      <a:r>
-                        <a:t>15.12</a:t>
-                      </a:r>
-                    </a:p>
-                  </a:txBody>
-                  <a:tcPr/>
-                </a:tc>
-                <a:tc>
-                  <a:txBody>
-                    <a:bodyPr/>
-                    <a:lstStyle/>
-                    <a:p>
-                      <a:pPr>
-                        <a:defRPr sz="1100"/>
-                      </a:pPr>
-                      <a:r>
-                        <a:t>-6.76</a:t>
+                        <a:t>23.79</a:t>
+                      </a:r>
+                    </a:p>
+                  </a:txBody>
+                  <a:tcPr/>
+                </a:tc>
+                <a:tc>
+                  <a:txBody>
+                    <a:bodyPr/>
+                    <a:lstStyle/>
+                    <a:p>
+                      <a:pPr>
+                        <a:defRPr sz="1100"/>
+                      </a:pPr>
+                      <a:r>
+                        <a:t>14.51</a:t>
+                      </a:r>
+                    </a:p>
+                  </a:txBody>
+                  <a:tcPr/>
+                </a:tc>
+                <a:tc>
+                  <a:txBody>
+                    <a:bodyPr/>
+                    <a:lstStyle/>
+                    <a:p>
+                      <a:pPr>
+                        <a:defRPr sz="1100"/>
+                      </a:pPr>
+                      <a:r>
+                        <a:t>-7.37</a:t>
                       </a:r>
                     </a:p>
                   </a:txBody>
@@ -4281,37 +4281,37 @@
                         <a:defRPr sz="1100"/>
                       </a:pPr>
                       <a:r>
-                        <a:t>145.2</a:t>
-                      </a:r>
-                    </a:p>
-                  </a:txBody>
-                  <a:tcPr/>
-                </a:tc>
-                <a:tc>
-                  <a:txBody>
-                    <a:bodyPr/>
-                    <a:lstStyle/>
-                    <a:p>
-                      <a:pPr>
-                        <a:defRPr sz="1100"/>
-                      </a:pPr>
-                      <a:r>
-                        <a:t>7.26</a:t>
-                      </a:r>
-                    </a:p>
-                  </a:txBody>
-                  <a:tcPr/>
-                </a:tc>
-                <a:tc>
-                  <a:txBody>
-                    <a:bodyPr/>
-                    <a:lstStyle/>
-                    <a:p>
-                      <a:pPr>
-                        <a:defRPr sz="1100"/>
-                      </a:pPr>
-                      <a:r>
-                        <a:t>0.42</a:t>
+                        <a:t>139.6</a:t>
+                      </a:r>
+                    </a:p>
+                  </a:txBody>
+                  <a:tcPr/>
+                </a:tc>
+                <a:tc>
+                  <a:txBody>
+                    <a:bodyPr/>
+                    <a:lstStyle/>
+                    <a:p>
+                      <a:pPr>
+                        <a:defRPr sz="1100"/>
+                      </a:pPr>
+                      <a:r>
+                        <a:t>6.98</a:t>
+                      </a:r>
+                    </a:p>
+                  </a:txBody>
+                  <a:tcPr/>
+                </a:tc>
+                <a:tc>
+                  <a:txBody>
+                    <a:bodyPr/>
+                    <a:lstStyle/>
+                    <a:p>
+                      <a:pPr>
+                        <a:defRPr sz="1100"/>
+                      </a:pPr>
+                      <a:r>
+                        <a:t>0.14</a:t>
                       </a:r>
                     </a:p>
                   </a:txBody>
@@ -4373,37 +4373,37 @@
                         <a:defRPr sz="1100"/>
                       </a:pPr>
                       <a:r>
-                        <a:t>5.5</a:t>
-                      </a:r>
-                    </a:p>
-                  </a:txBody>
-                  <a:tcPr/>
-                </a:tc>
-                <a:tc>
-                  <a:txBody>
-                    <a:bodyPr/>
-                    <a:lstStyle/>
-                    <a:p>
-                      <a:pPr>
-                        <a:defRPr sz="1100"/>
-                      </a:pPr>
-                      <a:r>
-                        <a:t>2.75</a:t>
-                      </a:r>
-                    </a:p>
-                  </a:txBody>
-                  <a:tcPr/>
-                </a:tc>
-                <a:tc>
-                  <a:txBody>
-                    <a:bodyPr/>
-                    <a:lstStyle/>
-                    <a:p>
-                      <a:pPr>
-                        <a:defRPr sz="1100"/>
-                      </a:pPr>
-                      <a:r>
-                        <a:t>-0.92</a:t>
+                        <a:t>5.3</a:t>
+                      </a:r>
+                    </a:p>
+                  </a:txBody>
+                  <a:tcPr/>
+                </a:tc>
+                <a:tc>
+                  <a:txBody>
+                    <a:bodyPr/>
+                    <a:lstStyle/>
+                    <a:p>
+                      <a:pPr>
+                        <a:defRPr sz="1100"/>
+                      </a:pPr>
+                      <a:r>
+                        <a:t>2.65</a:t>
+                      </a:r>
+                    </a:p>
+                  </a:txBody>
+                  <a:tcPr/>
+                </a:tc>
+                <a:tc>
+                  <a:txBody>
+                    <a:bodyPr/>
+                    <a:lstStyle/>
+                    <a:p>
+                      <a:pPr>
+                        <a:defRPr sz="1100"/>
+                      </a:pPr>
+                      <a:r>
+                        <a:t>-1.02</a:t>
                       </a:r>
                     </a:p>
                   </a:txBody>
@@ -4465,37 +4465,37 @@
                         <a:defRPr sz="1100"/>
                       </a:pPr>
                       <a:r>
-                        <a:t>16.99</a:t>
-                      </a:r>
-                    </a:p>
-                  </a:txBody>
-                  <a:tcPr/>
-                </a:tc>
-                <a:tc>
-                  <a:txBody>
-                    <a:bodyPr/>
-                    <a:lstStyle/>
-                    <a:p>
-                      <a:pPr>
-                        <a:defRPr sz="1100"/>
-                      </a:pPr>
-                      <a:r>
-                        <a:t>0.85</a:t>
-                      </a:r>
-                    </a:p>
-                  </a:txBody>
-                  <a:tcPr/>
-                </a:tc>
-                <a:tc>
-                  <a:txBody>
-                    <a:bodyPr/>
-                    <a:lstStyle/>
-                    <a:p>
-                      <a:pPr>
-                        <a:defRPr sz="1100"/>
-                      </a:pPr>
-                      <a:r>
-                        <a:t>-0.19</a:t>
+                        <a:t>17.4</a:t>
+                      </a:r>
+                    </a:p>
+                  </a:txBody>
+                  <a:tcPr/>
+                </a:tc>
+                <a:tc>
+                  <a:txBody>
+                    <a:bodyPr/>
+                    <a:lstStyle/>
+                    <a:p>
+                      <a:pPr>
+                        <a:defRPr sz="1100"/>
+                      </a:pPr>
+                      <a:r>
+                        <a:t>0.87</a:t>
+                      </a:r>
+                    </a:p>
+                  </a:txBody>
+                  <a:tcPr/>
+                </a:tc>
+                <a:tc>
+                  <a:txBody>
+                    <a:bodyPr/>
+                    <a:lstStyle/>
+                    <a:p>
+                      <a:pPr>
+                        <a:defRPr sz="1100"/>
+                      </a:pPr>
+                      <a:r>
+                        <a:t>-0.17</a:t>
                       </a:r>
                     </a:p>
                   </a:txBody>
@@ -4557,37 +4557,37 @@
                         <a:defRPr sz="1100"/>
                       </a:pPr>
                       <a:r>
-                        <a:t>147.76</a:t>
-                      </a:r>
-                    </a:p>
-                  </a:txBody>
-                  <a:tcPr/>
-                </a:tc>
-                <a:tc>
-                  <a:txBody>
-                    <a:bodyPr/>
-                    <a:lstStyle/>
-                    <a:p>
-                      <a:pPr>
-                        <a:defRPr sz="1100"/>
-                      </a:pPr>
-                      <a:r>
-                        <a:t>14.78</a:t>
-                      </a:r>
-                    </a:p>
-                  </a:txBody>
-                  <a:tcPr/>
-                </a:tc>
-                <a:tc>
-                  <a:txBody>
-                    <a:bodyPr/>
-                    <a:lstStyle/>
-                    <a:p>
-                      <a:pPr>
-                        <a:defRPr sz="1100"/>
-                      </a:pPr>
-                      <a:r>
-                        <a:t>-2.98</a:t>
+                        <a:t>142.12</a:t>
+                      </a:r>
+                    </a:p>
+                  </a:txBody>
+                  <a:tcPr/>
+                </a:tc>
+                <a:tc>
+                  <a:txBody>
+                    <a:bodyPr/>
+                    <a:lstStyle/>
+                    <a:p>
+                      <a:pPr>
+                        <a:defRPr sz="1100"/>
+                      </a:pPr>
+                      <a:r>
+                        <a:t>14.21</a:t>
+                      </a:r>
+                    </a:p>
+                  </a:txBody>
+                  <a:tcPr/>
+                </a:tc>
+                <a:tc>
+                  <a:txBody>
+                    <a:bodyPr/>
+                    <a:lstStyle/>
+                    <a:p>
+                      <a:pPr>
+                        <a:defRPr sz="1100"/>
+                      </a:pPr>
+                      <a:r>
+                        <a:t>-3.55</a:t>
                       </a:r>
                     </a:p>
                   </a:txBody>
@@ -4649,37 +4649,37 @@
                         <a:defRPr sz="1100"/>
                       </a:pPr>
                       <a:r>
-                        <a:t>146.0</a:t>
-                      </a:r>
-                    </a:p>
-                  </a:txBody>
-                  <a:tcPr/>
-                </a:tc>
-                <a:tc>
-                  <a:txBody>
-                    <a:bodyPr/>
-                    <a:lstStyle/>
-                    <a:p>
-                      <a:pPr>
-                        <a:defRPr sz="1100"/>
-                      </a:pPr>
-                      <a:r>
-                        <a:t>18.98</a:t>
-                      </a:r>
-                    </a:p>
-                  </a:txBody>
-                  <a:tcPr/>
-                </a:tc>
-                <a:tc>
-                  <a:txBody>
-                    <a:bodyPr/>
-                    <a:lstStyle/>
-                    <a:p>
-                      <a:pPr>
-                        <a:defRPr sz="1100"/>
-                      </a:pPr>
-                      <a:r>
-                        <a:t>-1.57</a:t>
+                        <a:t>141.48</a:t>
+                      </a:r>
+                    </a:p>
+                  </a:txBody>
+                  <a:tcPr/>
+                </a:tc>
+                <a:tc>
+                  <a:txBody>
+                    <a:bodyPr/>
+                    <a:lstStyle/>
+                    <a:p>
+                      <a:pPr>
+                        <a:defRPr sz="1100"/>
+                      </a:pPr>
+                      <a:r>
+                        <a:t>18.39</a:t>
+                      </a:r>
+                    </a:p>
+                  </a:txBody>
+                  <a:tcPr/>
+                </a:tc>
+                <a:tc>
+                  <a:txBody>
+                    <a:bodyPr/>
+                    <a:lstStyle/>
+                    <a:p>
+                      <a:pPr>
+                        <a:defRPr sz="1100"/>
+                      </a:pPr>
+                      <a:r>
+                        <a:t>-2.16</a:t>
                       </a:r>
                     </a:p>
                   </a:txBody>
@@ -4741,37 +4741,37 @@
                         <a:defRPr sz="1100"/>
                       </a:pPr>
                       <a:r>
-                        <a:t>38.1</a:t>
-                      </a:r>
-                    </a:p>
-                  </a:txBody>
-                  <a:tcPr/>
-                </a:tc>
-                <a:tc>
-                  <a:txBody>
-                    <a:bodyPr/>
-                    <a:lstStyle/>
-                    <a:p>
-                      <a:pPr>
-                        <a:defRPr sz="1100"/>
-                      </a:pPr>
-                      <a:r>
-                        <a:t>3.81</a:t>
-                      </a:r>
-                    </a:p>
-                  </a:txBody>
-                  <a:tcPr/>
-                </a:tc>
-                <a:tc>
-                  <a:txBody>
-                    <a:bodyPr/>
-                    <a:lstStyle/>
-                    <a:p>
-                      <a:pPr>
-                        <a:defRPr sz="1100"/>
-                      </a:pPr>
-                      <a:r>
-                        <a:t>-0.45</a:t>
+                        <a:t>37.25</a:t>
+                      </a:r>
+                    </a:p>
+                  </a:txBody>
+                  <a:tcPr/>
+                </a:tc>
+                <a:tc>
+                  <a:txBody>
+                    <a:bodyPr/>
+                    <a:lstStyle/>
+                    <a:p>
+                      <a:pPr>
+                        <a:defRPr sz="1100"/>
+                      </a:pPr>
+                      <a:r>
+                        <a:t>3.73</a:t>
+                      </a:r>
+                    </a:p>
+                  </a:txBody>
+                  <a:tcPr/>
+                </a:tc>
+                <a:tc>
+                  <a:txBody>
+                    <a:bodyPr/>
+                    <a:lstStyle/>
+                    <a:p>
+                      <a:pPr>
+                        <a:defRPr sz="1100"/>
+                      </a:pPr>
+                      <a:r>
+                        <a:t>-0.54</a:t>
                       </a:r>
                     </a:p>
                   </a:txBody>
@@ -4833,37 +4833,37 @@
                         <a:defRPr sz="1100"/>
                       </a:pPr>
                       <a:r>
-                        <a:t>36.52</a:t>
-                      </a:r>
-                    </a:p>
-                  </a:txBody>
-                  <a:tcPr/>
-                </a:tc>
-                <a:tc>
-                  <a:txBody>
-                    <a:bodyPr/>
-                    <a:lstStyle/>
-                    <a:p>
-                      <a:pPr>
-                        <a:defRPr sz="1100"/>
-                      </a:pPr>
-                      <a:r>
-                        <a:t>14.61</a:t>
-                      </a:r>
-                    </a:p>
-                  </a:txBody>
-                  <a:tcPr/>
-                </a:tc>
-                <a:tc>
-                  <a:txBody>
-                    <a:bodyPr/>
-                    <a:lstStyle/>
-                    <a:p>
-                      <a:pPr>
-                        <a:defRPr sz="1100"/>
-                      </a:pPr>
-                      <a:r>
-                        <a:t>-2.82</a:t>
+                        <a:t>36.0</a:t>
+                      </a:r>
+                    </a:p>
+                  </a:txBody>
+                  <a:tcPr/>
+                </a:tc>
+                <a:tc>
+                  <a:txBody>
+                    <a:bodyPr/>
+                    <a:lstStyle/>
+                    <a:p>
+                      <a:pPr>
+                        <a:defRPr sz="1100"/>
+                      </a:pPr>
+                      <a:r>
+                        <a:t>14.4</a:t>
+                      </a:r>
+                    </a:p>
+                  </a:txBody>
+                  <a:tcPr/>
+                </a:tc>
+                <a:tc>
+                  <a:txBody>
+                    <a:bodyPr/>
+                    <a:lstStyle/>
+                    <a:p>
+                      <a:pPr>
+                        <a:defRPr sz="1100"/>
+                      </a:pPr>
+                      <a:r>
+                        <a:t>-3.02</a:t>
                       </a:r>
                     </a:p>
                   </a:txBody>
@@ -4925,37 +4925,37 @@
                         <a:defRPr sz="1100"/>
                       </a:pPr>
                       <a:r>
-                        <a:t>238.0</a:t>
-                      </a:r>
-                    </a:p>
-                  </a:txBody>
-                  <a:tcPr/>
-                </a:tc>
-                <a:tc>
-                  <a:txBody>
-                    <a:bodyPr/>
-                    <a:lstStyle/>
-                    <a:p>
-                      <a:pPr>
-                        <a:defRPr sz="1100"/>
-                      </a:pPr>
-                      <a:r>
-                        <a:t>107.1</a:t>
-                      </a:r>
-                    </a:p>
-                  </a:txBody>
-                  <a:tcPr/>
-                </a:tc>
-                <a:tc>
-                  <a:txBody>
-                    <a:bodyPr/>
-                    <a:lstStyle/>
-                    <a:p>
-                      <a:pPr>
-                        <a:defRPr sz="1100"/>
-                      </a:pPr>
-                      <a:r>
-                        <a:t>0.18</a:t>
+                        <a:t>233.0</a:t>
+                      </a:r>
+                    </a:p>
+                  </a:txBody>
+                  <a:tcPr/>
+                </a:tc>
+                <a:tc>
+                  <a:txBody>
+                    <a:bodyPr/>
+                    <a:lstStyle/>
+                    <a:p>
+                      <a:pPr>
+                        <a:defRPr sz="1100"/>
+                      </a:pPr>
+                      <a:r>
+                        <a:t>104.85</a:t>
+                      </a:r>
+                    </a:p>
+                  </a:txBody>
+                  <a:tcPr/>
+                </a:tc>
+                <a:tc>
+                  <a:txBody>
+                    <a:bodyPr/>
+                    <a:lstStyle/>
+                    <a:p>
+                      <a:pPr>
+                        <a:defRPr sz="1100"/>
+                      </a:pPr>
+                      <a:r>
+                        <a:t>-2.07</a:t>
                       </a:r>
                     </a:p>
                   </a:txBody>
@@ -5049,7 +5049,7 @@
               <a:defRPr sz="1500"/>
             </a:pPr>
             <a:r>
-              <a:t>紫金矿业（601899，有色金属）：综合72.5分；基本面优秀，具备中长期配置价值；趋势中性，观望。</a:t>
+              <a:t>紫金矿业（601899，有色金属）：综合73.0分；基本面优秀，具备中长期配置价值；趋势中性，观望。</a:t>
             </a:r>
           </a:p>
           <a:p>
@@ -5057,7 +5057,7 @@
               <a:defRPr sz="1500"/>
             </a:pPr>
             <a:r>
-              <a:t>长江电力（600900，电力）：综合72.0分；基本面优秀，具备中长期配置价值；中期趋势向上，可关注/持有。</a:t>
+              <a:t>长江电力（600900，电力）：综合70.0分；基本面优秀，具备中长期配置价值；中期趋势向上，可关注/持有。</a:t>
             </a:r>
           </a:p>
           <a:p>
@@ -5065,7 +5065,7 @@
               <a:defRPr sz="1500"/>
             </a:pPr>
             <a:r>
-              <a:t>招商银行（600036，银行）：综合66.0分；基本面优秀，具备中长期配置价值；中期趋势向上，可关注/持有。</a:t>
+              <a:t>中国平安（601318，保险）：综合69.0分；基本面优秀，具备中长期配置价值；趋势中性，观望。</a:t>
             </a:r>
           </a:p>
           <a:p>
@@ -5073,7 +5073,7 @@
               <a:defRPr sz="1500"/>
             </a:pPr>
             <a:r>
-              <a:t>美的集团（000333，家电）：综合65.5分；基本面优秀，具备中长期配置价值；趋势中性，观望。</a:t>
+              <a:t>招商银行（600036，银行）：综合66.0分；基本面优秀，具备中长期配置价值；中期趋势向上，可关注/持有。</a:t>
             </a:r>
           </a:p>
         </p:txBody>

--- a/outputs/12_中期路演.pptx
+++ b/outputs/12_中期路演.pptx
@@ -3167,7 +3167,7 @@
               <a:defRPr sz="1500"/>
             </a:pPr>
             <a:r>
-              <a:t>数据截止：2026-10-27</a:t>
+              <a:t>数据截止：2026-10-28</a:t>
             </a:r>
           </a:p>
         </p:txBody>
@@ -3255,7 +3255,7 @@
               <a:defRPr sz="1500"/>
             </a:pPr>
             <a:r>
-              <a:t>当前总资产：444.49万元</a:t>
+              <a:t>当前总资产：442.83万元</a:t>
             </a:r>
           </a:p>
           <a:p>
@@ -3263,7 +3263,7 @@
               <a:defRPr sz="1500"/>
             </a:pPr>
             <a:r>
-              <a:t>累计收益率：-11.10%</a:t>
+              <a:t>累计收益率：-11.43%</a:t>
             </a:r>
           </a:p>
           <a:p>
@@ -3271,7 +3271,7 @@
               <a:defRPr sz="1500"/>
             </a:pPr>
             <a:r>
-              <a:t>同期沪深300：-10.96%</a:t>
+              <a:t>同期沪深300：-10.21%</a:t>
             </a:r>
           </a:p>
           <a:p>
@@ -3279,7 +3279,7 @@
               <a:defRPr sz="1500"/>
             </a:pPr>
             <a:r>
-              <a:t>现金：94.78万元（21.3%）</a:t>
+              <a:t>现金：94.78万元（21.4%）</a:t>
             </a:r>
           </a:p>
           <a:p>
@@ -3821,37 +3821,37 @@
                         <a:defRPr sz="1100"/>
                       </a:pPr>
                       <a:r>
-                        <a:t>29.83</a:t>
-                      </a:r>
-                    </a:p>
-                  </a:txBody>
-                  <a:tcPr/>
-                </a:tc>
-                <a:tc>
-                  <a:txBody>
-                    <a:bodyPr/>
-                    <a:lstStyle/>
-                    <a:p>
-                      <a:pPr>
-                        <a:defRPr sz="1100"/>
-                      </a:pPr>
-                      <a:r>
-                        <a:t>114.25</a:t>
-                      </a:r>
-                    </a:p>
-                  </a:txBody>
-                  <a:tcPr/>
-                </a:tc>
-                <a:tc>
-                  <a:txBody>
-                    <a:bodyPr/>
-                    <a:lstStyle/>
-                    <a:p>
-                      <a:pPr>
-                        <a:defRPr sz="1100"/>
-                      </a:pPr>
-                      <a:r>
-                        <a:t>2.48</a:t>
+                        <a:t>29.4</a:t>
+                      </a:r>
+                    </a:p>
+                  </a:txBody>
+                  <a:tcPr/>
+                </a:tc>
+                <a:tc>
+                  <a:txBody>
+                    <a:bodyPr/>
+                    <a:lstStyle/>
+                    <a:p>
+                      <a:pPr>
+                        <a:defRPr sz="1100"/>
+                      </a:pPr>
+                      <a:r>
+                        <a:t>112.6</a:t>
+                      </a:r>
+                    </a:p>
+                  </a:txBody>
+                  <a:tcPr/>
+                </a:tc>
+                <a:tc>
+                  <a:txBody>
+                    <a:bodyPr/>
+                    <a:lstStyle/>
+                    <a:p>
+                      <a:pPr>
+                        <a:defRPr sz="1100"/>
+                      </a:pPr>
+                      <a:r>
+                        <a:t>0.83</a:t>
                       </a:r>
                     </a:p>
                   </a:txBody>
@@ -3913,37 +3913,37 @@
                         <a:defRPr sz="1100"/>
                       </a:pPr>
                       <a:r>
-                        <a:t>85.04</a:t>
-                      </a:r>
-                    </a:p>
-                  </a:txBody>
-                  <a:tcPr/>
-                </a:tc>
-                <a:tc>
-                  <a:txBody>
-                    <a:bodyPr/>
-                    <a:lstStyle/>
-                    <a:p>
-                      <a:pPr>
-                        <a:defRPr sz="1100"/>
-                      </a:pPr>
-                      <a:r>
-                        <a:t>38.27</a:t>
-                      </a:r>
-                    </a:p>
-                  </a:txBody>
-                  <a:tcPr/>
-                </a:tc>
-                <a:tc>
-                  <a:txBody>
-                    <a:bodyPr/>
-                    <a:lstStyle/>
-                    <a:p>
-                      <a:pPr>
-                        <a:defRPr sz="1100"/>
-                      </a:pPr>
-                      <a:r>
-                        <a:t>-0.11</a:t>
+                        <a:t>85.91</a:t>
+                      </a:r>
+                    </a:p>
+                  </a:txBody>
+                  <a:tcPr/>
+                </a:tc>
+                <a:tc>
+                  <a:txBody>
+                    <a:bodyPr/>
+                    <a:lstStyle/>
+                    <a:p>
+                      <a:pPr>
+                        <a:defRPr sz="1100"/>
+                      </a:pPr>
+                      <a:r>
+                        <a:t>38.66</a:t>
+                      </a:r>
+                    </a:p>
+                  </a:txBody>
+                  <a:tcPr/>
+                </a:tc>
+                <a:tc>
+                  <a:txBody>
+                    <a:bodyPr/>
+                    <a:lstStyle/>
+                    <a:p>
+                      <a:pPr>
+                        <a:defRPr sz="1100"/>
+                      </a:pPr>
+                      <a:r>
+                        <a:t>0.28</a:t>
                       </a:r>
                     </a:p>
                   </a:txBody>
@@ -4005,37 +4005,37 @@
                         <a:defRPr sz="1100"/>
                       </a:pPr>
                       <a:r>
-                        <a:t>9.48</a:t>
-                      </a:r>
-                    </a:p>
-                  </a:txBody>
-                  <a:tcPr/>
-                </a:tc>
-                <a:tc>
-                  <a:txBody>
-                    <a:bodyPr/>
-                    <a:lstStyle/>
-                    <a:p>
-                      <a:pPr>
-                        <a:defRPr sz="1100"/>
-                      </a:pPr>
-                      <a:r>
-                        <a:t>9.01</a:t>
-                      </a:r>
-                    </a:p>
-                  </a:txBody>
-                  <a:tcPr/>
-                </a:tc>
-                <a:tc>
-                  <a:txBody>
-                    <a:bodyPr/>
-                    <a:lstStyle/>
-                    <a:p>
-                      <a:pPr>
-                        <a:defRPr sz="1100"/>
-                      </a:pPr>
-                      <a:r>
-                        <a:t>-0.94</a:t>
+                        <a:t>9.61</a:t>
+                      </a:r>
+                    </a:p>
+                  </a:txBody>
+                  <a:tcPr/>
+                </a:tc>
+                <a:tc>
+                  <a:txBody>
+                    <a:bodyPr/>
+                    <a:lstStyle/>
+                    <a:p>
+                      <a:pPr>
+                        <a:defRPr sz="1100"/>
+                      </a:pPr>
+                      <a:r>
+                        <a:t>9.13</a:t>
+                      </a:r>
+                    </a:p>
+                  </a:txBody>
+                  <a:tcPr/>
+                </a:tc>
+                <a:tc>
+                  <a:txBody>
+                    <a:bodyPr/>
+                    <a:lstStyle/>
+                    <a:p>
+                      <a:pPr>
+                        <a:defRPr sz="1100"/>
+                      </a:pPr>
+                      <a:r>
+                        <a:t>-0.82</a:t>
                       </a:r>
                     </a:p>
                   </a:txBody>
@@ -4097,37 +4097,37 @@
                         <a:defRPr sz="1100"/>
                       </a:pPr>
                       <a:r>
-                        <a:t>15.18</a:t>
-                      </a:r>
-                    </a:p>
-                  </a:txBody>
-                  <a:tcPr/>
-                </a:tc>
-                <a:tc>
-                  <a:txBody>
-                    <a:bodyPr/>
-                    <a:lstStyle/>
-                    <a:p>
-                      <a:pPr>
-                        <a:defRPr sz="1100"/>
-                      </a:pPr>
-                      <a:r>
-                        <a:t>7.59</a:t>
-                      </a:r>
-                    </a:p>
-                  </a:txBody>
-                  <a:tcPr/>
-                </a:tc>
-                <a:tc>
-                  <a:txBody>
-                    <a:bodyPr/>
-                    <a:lstStyle/>
-                    <a:p>
-                      <a:pPr>
-                        <a:defRPr sz="1100"/>
-                      </a:pPr>
-                      <a:r>
-                        <a:t>-1.17</a:t>
+                        <a:t>15.14</a:t>
+                      </a:r>
+                    </a:p>
+                  </a:txBody>
+                  <a:tcPr/>
+                </a:tc>
+                <a:tc>
+                  <a:txBody>
+                    <a:bodyPr/>
+                    <a:lstStyle/>
+                    <a:p>
+                      <a:pPr>
+                        <a:defRPr sz="1100"/>
+                      </a:pPr>
+                      <a:r>
+                        <a:t>7.57</a:t>
+                      </a:r>
+                    </a:p>
+                  </a:txBody>
+                  <a:tcPr/>
+                </a:tc>
+                <a:tc>
+                  <a:txBody>
+                    <a:bodyPr/>
+                    <a:lstStyle/>
+                    <a:p>
+                      <a:pPr>
+                        <a:defRPr sz="1100"/>
+                      </a:pPr>
+                      <a:r>
+                        <a:t>-1.19</a:t>
                       </a:r>
                     </a:p>
                   </a:txBody>
@@ -4189,37 +4189,37 @@
                         <a:defRPr sz="1100"/>
                       </a:pPr>
                       <a:r>
-                        <a:t>23.79</a:t>
-                      </a:r>
-                    </a:p>
-                  </a:txBody>
-                  <a:tcPr/>
-                </a:tc>
-                <a:tc>
-                  <a:txBody>
-                    <a:bodyPr/>
-                    <a:lstStyle/>
-                    <a:p>
-                      <a:pPr>
-                        <a:defRPr sz="1100"/>
-                      </a:pPr>
-                      <a:r>
-                        <a:t>14.51</a:t>
-                      </a:r>
-                    </a:p>
-                  </a:txBody>
-                  <a:tcPr/>
-                </a:tc>
-                <a:tc>
-                  <a:txBody>
-                    <a:bodyPr/>
-                    <a:lstStyle/>
-                    <a:p>
-                      <a:pPr>
-                        <a:defRPr sz="1100"/>
-                      </a:pPr>
-                      <a:r>
-                        <a:t>-7.37</a:t>
+                        <a:t>24.92</a:t>
+                      </a:r>
+                    </a:p>
+                  </a:txBody>
+                  <a:tcPr/>
+                </a:tc>
+                <a:tc>
+                  <a:txBody>
+                    <a:bodyPr/>
+                    <a:lstStyle/>
+                    <a:p>
+                      <a:pPr>
+                        <a:defRPr sz="1100"/>
+                      </a:pPr>
+                      <a:r>
+                        <a:t>15.2</a:t>
+                      </a:r>
+                    </a:p>
+                  </a:txBody>
+                  <a:tcPr/>
+                </a:tc>
+                <a:tc>
+                  <a:txBody>
+                    <a:bodyPr/>
+                    <a:lstStyle/>
+                    <a:p>
+                      <a:pPr>
+                        <a:defRPr sz="1100"/>
+                      </a:pPr>
+                      <a:r>
+                        <a:t>-6.68</a:t>
                       </a:r>
                     </a:p>
                   </a:txBody>
@@ -4281,37 +4281,37 @@
                         <a:defRPr sz="1100"/>
                       </a:pPr>
                       <a:r>
-                        <a:t>139.6</a:t>
-                      </a:r>
-                    </a:p>
-                  </a:txBody>
-                  <a:tcPr/>
-                </a:tc>
-                <a:tc>
-                  <a:txBody>
-                    <a:bodyPr/>
-                    <a:lstStyle/>
-                    <a:p>
-                      <a:pPr>
-                        <a:defRPr sz="1100"/>
-                      </a:pPr>
-                      <a:r>
-                        <a:t>6.98</a:t>
-                      </a:r>
-                    </a:p>
-                  </a:txBody>
-                  <a:tcPr/>
-                </a:tc>
-                <a:tc>
-                  <a:txBody>
-                    <a:bodyPr/>
-                    <a:lstStyle/>
-                    <a:p>
-                      <a:pPr>
-                        <a:defRPr sz="1100"/>
-                      </a:pPr>
-                      <a:r>
-                        <a:t>0.14</a:t>
+                        <a:t>143.0</a:t>
+                      </a:r>
+                    </a:p>
+                  </a:txBody>
+                  <a:tcPr/>
+                </a:tc>
+                <a:tc>
+                  <a:txBody>
+                    <a:bodyPr/>
+                    <a:lstStyle/>
+                    <a:p>
+                      <a:pPr>
+                        <a:defRPr sz="1100"/>
+                      </a:pPr>
+                      <a:r>
+                        <a:t>7.15</a:t>
+                      </a:r>
+                    </a:p>
+                  </a:txBody>
+                  <a:tcPr/>
+                </a:tc>
+                <a:tc>
+                  <a:txBody>
+                    <a:bodyPr/>
+                    <a:lstStyle/>
+                    <a:p>
+                      <a:pPr>
+                        <a:defRPr sz="1100"/>
+                      </a:pPr>
+                      <a:r>
+                        <a:t>0.31</a:t>
                       </a:r>
                     </a:p>
                   </a:txBody>
@@ -4373,37 +4373,37 @@
                         <a:defRPr sz="1100"/>
                       </a:pPr>
                       <a:r>
-                        <a:t>5.3</a:t>
-                      </a:r>
-                    </a:p>
-                  </a:txBody>
-                  <a:tcPr/>
-                </a:tc>
-                <a:tc>
-                  <a:txBody>
-                    <a:bodyPr/>
-                    <a:lstStyle/>
-                    <a:p>
-                      <a:pPr>
-                        <a:defRPr sz="1100"/>
-                      </a:pPr>
-                      <a:r>
-                        <a:t>2.65</a:t>
-                      </a:r>
-                    </a:p>
-                  </a:txBody>
-                  <a:tcPr/>
-                </a:tc>
-                <a:tc>
-                  <a:txBody>
-                    <a:bodyPr/>
-                    <a:lstStyle/>
-                    <a:p>
-                      <a:pPr>
-                        <a:defRPr sz="1100"/>
-                      </a:pPr>
-                      <a:r>
-                        <a:t>-1.02</a:t>
+                        <a:t>5.45</a:t>
+                      </a:r>
+                    </a:p>
+                  </a:txBody>
+                  <a:tcPr/>
+                </a:tc>
+                <a:tc>
+                  <a:txBody>
+                    <a:bodyPr/>
+                    <a:lstStyle/>
+                    <a:p>
+                      <a:pPr>
+                        <a:defRPr sz="1100"/>
+                      </a:pPr>
+                      <a:r>
+                        <a:t>2.73</a:t>
+                      </a:r>
+                    </a:p>
+                  </a:txBody>
+                  <a:tcPr/>
+                </a:tc>
+                <a:tc>
+                  <a:txBody>
+                    <a:bodyPr/>
+                    <a:lstStyle/>
+                    <a:p>
+                      <a:pPr>
+                        <a:defRPr sz="1100"/>
+                      </a:pPr>
+                      <a:r>
+                        <a:t>-0.94</a:t>
                       </a:r>
                     </a:p>
                   </a:txBody>
@@ -4465,37 +4465,37 @@
                         <a:defRPr sz="1100"/>
                       </a:pPr>
                       <a:r>
-                        <a:t>17.4</a:t>
-                      </a:r>
-                    </a:p>
-                  </a:txBody>
-                  <a:tcPr/>
-                </a:tc>
-                <a:tc>
-                  <a:txBody>
-                    <a:bodyPr/>
-                    <a:lstStyle/>
-                    <a:p>
-                      <a:pPr>
-                        <a:defRPr sz="1100"/>
-                      </a:pPr>
-                      <a:r>
-                        <a:t>0.87</a:t>
-                      </a:r>
-                    </a:p>
-                  </a:txBody>
-                  <a:tcPr/>
-                </a:tc>
-                <a:tc>
-                  <a:txBody>
-                    <a:bodyPr/>
-                    <a:lstStyle/>
-                    <a:p>
-                      <a:pPr>
-                        <a:defRPr sz="1100"/>
-                      </a:pPr>
-                      <a:r>
-                        <a:t>-0.17</a:t>
+                        <a:t>17.09</a:t>
+                      </a:r>
+                    </a:p>
+                  </a:txBody>
+                  <a:tcPr/>
+                </a:tc>
+                <a:tc>
+                  <a:txBody>
+                    <a:bodyPr/>
+                    <a:lstStyle/>
+                    <a:p>
+                      <a:pPr>
+                        <a:defRPr sz="1100"/>
+                      </a:pPr>
+                      <a:r>
+                        <a:t>0.85</a:t>
+                      </a:r>
+                    </a:p>
+                  </a:txBody>
+                  <a:tcPr/>
+                </a:tc>
+                <a:tc>
+                  <a:txBody>
+                    <a:bodyPr/>
+                    <a:lstStyle/>
+                    <a:p>
+                      <a:pPr>
+                        <a:defRPr sz="1100"/>
+                      </a:pPr>
+                      <a:r>
+                        <a:t>-0.18</a:t>
                       </a:r>
                     </a:p>
                   </a:txBody>
@@ -4557,37 +4557,37 @@
                         <a:defRPr sz="1100"/>
                       </a:pPr>
                       <a:r>
-                        <a:t>142.12</a:t>
-                      </a:r>
-                    </a:p>
-                  </a:txBody>
-                  <a:tcPr/>
-                </a:tc>
-                <a:tc>
-                  <a:txBody>
-                    <a:bodyPr/>
-                    <a:lstStyle/>
-                    <a:p>
-                      <a:pPr>
-                        <a:defRPr sz="1100"/>
-                      </a:pPr>
-                      <a:r>
-                        <a:t>14.21</a:t>
-                      </a:r>
-                    </a:p>
-                  </a:txBody>
-                  <a:tcPr/>
-                </a:tc>
-                <a:tc>
-                  <a:txBody>
-                    <a:bodyPr/>
-                    <a:lstStyle/>
-                    <a:p>
-                      <a:pPr>
-                        <a:defRPr sz="1100"/>
-                      </a:pPr>
-                      <a:r>
-                        <a:t>-3.55</a:t>
+                        <a:t>142.5</a:t>
+                      </a:r>
+                    </a:p>
+                  </a:txBody>
+                  <a:tcPr/>
+                </a:tc>
+                <a:tc>
+                  <a:txBody>
+                    <a:bodyPr/>
+                    <a:lstStyle/>
+                    <a:p>
+                      <a:pPr>
+                        <a:defRPr sz="1100"/>
+                      </a:pPr>
+                      <a:r>
+                        <a:t>14.25</a:t>
+                      </a:r>
+                    </a:p>
+                  </a:txBody>
+                  <a:tcPr/>
+                </a:tc>
+                <a:tc>
+                  <a:txBody>
+                    <a:bodyPr/>
+                    <a:lstStyle/>
+                    <a:p>
+                      <a:pPr>
+                        <a:defRPr sz="1100"/>
+                      </a:pPr>
+                      <a:r>
+                        <a:t>-3.51</a:t>
                       </a:r>
                     </a:p>
                   </a:txBody>
@@ -4649,37 +4649,37 @@
                         <a:defRPr sz="1100"/>
                       </a:pPr>
                       <a:r>
-                        <a:t>141.48</a:t>
-                      </a:r>
-                    </a:p>
-                  </a:txBody>
-                  <a:tcPr/>
-                </a:tc>
-                <a:tc>
-                  <a:txBody>
-                    <a:bodyPr/>
-                    <a:lstStyle/>
-                    <a:p>
-                      <a:pPr>
-                        <a:defRPr sz="1100"/>
-                      </a:pPr>
-                      <a:r>
-                        <a:t>18.39</a:t>
-                      </a:r>
-                    </a:p>
-                  </a:txBody>
-                  <a:tcPr/>
-                </a:tc>
-                <a:tc>
-                  <a:txBody>
-                    <a:bodyPr/>
-                    <a:lstStyle/>
-                    <a:p>
-                      <a:pPr>
-                        <a:defRPr sz="1100"/>
-                      </a:pPr>
-                      <a:r>
-                        <a:t>-2.16</a:t>
+                        <a:t>142.4</a:t>
+                      </a:r>
+                    </a:p>
+                  </a:txBody>
+                  <a:tcPr/>
+                </a:tc>
+                <a:tc>
+                  <a:txBody>
+                    <a:bodyPr/>
+                    <a:lstStyle/>
+                    <a:p>
+                      <a:pPr>
+                        <a:defRPr sz="1100"/>
+                      </a:pPr>
+                      <a:r>
+                        <a:t>18.51</a:t>
+                      </a:r>
+                    </a:p>
+                  </a:txBody>
+                  <a:tcPr/>
+                </a:tc>
+                <a:tc>
+                  <a:txBody>
+                    <a:bodyPr/>
+                    <a:lstStyle/>
+                    <a:p>
+                      <a:pPr>
+                        <a:defRPr sz="1100"/>
+                      </a:pPr>
+                      <a:r>
+                        <a:t>-2.04</a:t>
                       </a:r>
                     </a:p>
                   </a:txBody>
@@ -4741,37 +4741,37 @@
                         <a:defRPr sz="1100"/>
                       </a:pPr>
                       <a:r>
-                        <a:t>37.25</a:t>
-                      </a:r>
-                    </a:p>
-                  </a:txBody>
-                  <a:tcPr/>
-                </a:tc>
-                <a:tc>
-                  <a:txBody>
-                    <a:bodyPr/>
-                    <a:lstStyle/>
-                    <a:p>
-                      <a:pPr>
-                        <a:defRPr sz="1100"/>
-                      </a:pPr>
-                      <a:r>
-                        <a:t>3.73</a:t>
-                      </a:r>
-                    </a:p>
-                  </a:txBody>
-                  <a:tcPr/>
-                </a:tc>
-                <a:tc>
-                  <a:txBody>
-                    <a:bodyPr/>
-                    <a:lstStyle/>
-                    <a:p>
-                      <a:pPr>
-                        <a:defRPr sz="1100"/>
-                      </a:pPr>
-                      <a:r>
-                        <a:t>-0.54</a:t>
+                        <a:t>39.6</a:t>
+                      </a:r>
+                    </a:p>
+                  </a:txBody>
+                  <a:tcPr/>
+                </a:tc>
+                <a:tc>
+                  <a:txBody>
+                    <a:bodyPr/>
+                    <a:lstStyle/>
+                    <a:p>
+                      <a:pPr>
+                        <a:defRPr sz="1100"/>
+                      </a:pPr>
+                      <a:r>
+                        <a:t>3.96</a:t>
+                      </a:r>
+                    </a:p>
+                  </a:txBody>
+                  <a:tcPr/>
+                </a:tc>
+                <a:tc>
+                  <a:txBody>
+                    <a:bodyPr/>
+                    <a:lstStyle/>
+                    <a:p>
+                      <a:pPr>
+                        <a:defRPr sz="1100"/>
+                      </a:pPr>
+                      <a:r>
+                        <a:t>-0.3</a:t>
                       </a:r>
                     </a:p>
                   </a:txBody>
@@ -4833,37 +4833,37 @@
                         <a:defRPr sz="1100"/>
                       </a:pPr>
                       <a:r>
-                        <a:t>36.0</a:t>
-                      </a:r>
-                    </a:p>
-                  </a:txBody>
-                  <a:tcPr/>
-                </a:tc>
-                <a:tc>
-                  <a:txBody>
-                    <a:bodyPr/>
-                    <a:lstStyle/>
-                    <a:p>
-                      <a:pPr>
-                        <a:defRPr sz="1100"/>
-                      </a:pPr>
-                      <a:r>
-                        <a:t>14.4</a:t>
-                      </a:r>
-                    </a:p>
-                  </a:txBody>
-                  <a:tcPr/>
-                </a:tc>
-                <a:tc>
-                  <a:txBody>
-                    <a:bodyPr/>
-                    <a:lstStyle/>
-                    <a:p>
-                      <a:pPr>
-                        <a:defRPr sz="1100"/>
-                      </a:pPr>
-                      <a:r>
-                        <a:t>-3.02</a:t>
+                        <a:t>35.81</a:t>
+                      </a:r>
+                    </a:p>
+                  </a:txBody>
+                  <a:tcPr/>
+                </a:tc>
+                <a:tc>
+                  <a:txBody>
+                    <a:bodyPr/>
+                    <a:lstStyle/>
+                    <a:p>
+                      <a:pPr>
+                        <a:defRPr sz="1100"/>
+                      </a:pPr>
+                      <a:r>
+                        <a:t>14.32</a:t>
+                      </a:r>
+                    </a:p>
+                  </a:txBody>
+                  <a:tcPr/>
+                </a:tc>
+                <a:tc>
+                  <a:txBody>
+                    <a:bodyPr/>
+                    <a:lstStyle/>
+                    <a:p>
+                      <a:pPr>
+                        <a:defRPr sz="1100"/>
+                      </a:pPr>
+                      <a:r>
+                        <a:t>-3.1</a:t>
                       </a:r>
                     </a:p>
                   </a:txBody>
@@ -4925,37 +4925,37 @@
                         <a:defRPr sz="1100"/>
                       </a:pPr>
                       <a:r>
-                        <a:t>233.0</a:t>
-                      </a:r>
-                    </a:p>
-                  </a:txBody>
-                  <a:tcPr/>
-                </a:tc>
-                <a:tc>
-                  <a:txBody>
-                    <a:bodyPr/>
-                    <a:lstStyle/>
-                    <a:p>
-                      <a:pPr>
-                        <a:defRPr sz="1100"/>
-                      </a:pPr>
-                      <a:r>
-                        <a:t>104.85</a:t>
-                      </a:r>
-                    </a:p>
-                  </a:txBody>
-                  <a:tcPr/>
-                </a:tc>
-                <a:tc>
-                  <a:txBody>
-                    <a:bodyPr/>
-                    <a:lstStyle/>
-                    <a:p>
-                      <a:pPr>
-                        <a:defRPr sz="1100"/>
-                      </a:pPr>
-                      <a:r>
-                        <a:t>-2.07</a:t>
+                        <a:t>229.14</a:t>
+                      </a:r>
+                    </a:p>
+                  </a:txBody>
+                  <a:tcPr/>
+                </a:tc>
+                <a:tc>
+                  <a:txBody>
+                    <a:bodyPr/>
+                    <a:lstStyle/>
+                    <a:p>
+                      <a:pPr>
+                        <a:defRPr sz="1100"/>
+                      </a:pPr>
+                      <a:r>
+                        <a:t>103.11</a:t>
+                      </a:r>
+                    </a:p>
+                  </a:txBody>
+                  <a:tcPr/>
+                </a:tc>
+                <a:tc>
+                  <a:txBody>
+                    <a:bodyPr/>
+                    <a:lstStyle/>
+                    <a:p>
+                      <a:pPr>
+                        <a:defRPr sz="1100"/>
+                      </a:pPr>
+                      <a:r>
+                        <a:t>-3.81</a:t>
                       </a:r>
                     </a:p>
                   </a:txBody>
@@ -5057,7 +5057,7 @@
               <a:defRPr sz="1500"/>
             </a:pPr>
             <a:r>
-              <a:t>长江电力（600900，电力）：综合70.0分；基本面优秀，具备中长期配置价值；中期趋势向上，可关注/持有。</a:t>
+              <a:t>长江电力（600900，电力）：综合72.5分；基本面优秀，具备中长期配置价值；中期趋势向上，可关注/持有。</a:t>
             </a:r>
           </a:p>
           <a:p>
@@ -5065,7 +5065,7 @@
               <a:defRPr sz="1500"/>
             </a:pPr>
             <a:r>
-              <a:t>中国平安（601318，保险）：综合69.0分；基本面优秀，具备中长期配置价值；趋势中性，观望。</a:t>
+              <a:t>恒瑞医药（600276，医药）：综合72.0分；基本面优秀，具备中长期配置价值；中期趋势向上，可关注/持有。</a:t>
             </a:r>
           </a:p>
           <a:p>
@@ -5073,7 +5073,7 @@
               <a:defRPr sz="1500"/>
             </a:pPr>
             <a:r>
-              <a:t>招商银行（600036，银行）：综合66.0分；基本面优秀，具备中长期配置价值；中期趋势向上，可关注/持有。</a:t>
+              <a:t>美的集团（000333，家电）：综合67.5分；基本面优秀，具备中长期配置价值；中期趋势向上，可关注/持有。</a:t>
             </a:r>
           </a:p>
         </p:txBody>

--- a/outputs/12_中期路演.pptx
+++ b/outputs/12_中期路演.pptx
@@ -3167,7 +3167,7 @@
               <a:defRPr sz="1500"/>
             </a:pPr>
             <a:r>
-              <a:t>数据截止：2026-10-28</a:t>
+              <a:t>数据截止：2026-10-29</a:t>
             </a:r>
           </a:p>
         </p:txBody>
@@ -3255,7 +3255,7 @@
               <a:defRPr sz="1500"/>
             </a:pPr>
             <a:r>
-              <a:t>当前总资产：442.83万元</a:t>
+              <a:t>当前总资产：443.46万元</a:t>
             </a:r>
           </a:p>
           <a:p>
@@ -3263,7 +3263,7 @@
               <a:defRPr sz="1500"/>
             </a:pPr>
             <a:r>
-              <a:t>累计收益率：-11.43%</a:t>
+              <a:t>累计收益率：-11.31%</a:t>
             </a:r>
           </a:p>
           <a:p>
@@ -3271,7 +3271,7 @@
               <a:defRPr sz="1500"/>
             </a:pPr>
             <a:r>
-              <a:t>同期沪深300：-10.21%</a:t>
+              <a:t>同期沪深300：-11.13%</a:t>
             </a:r>
           </a:p>
           <a:p>
@@ -3821,37 +3821,37 @@
                         <a:defRPr sz="1100"/>
                       </a:pPr>
                       <a:r>
-                        <a:t>29.4</a:t>
-                      </a:r>
-                    </a:p>
-                  </a:txBody>
-                  <a:tcPr/>
-                </a:tc>
-                <a:tc>
-                  <a:txBody>
-                    <a:bodyPr/>
-                    <a:lstStyle/>
-                    <a:p>
-                      <a:pPr>
-                        <a:defRPr sz="1100"/>
-                      </a:pPr>
-                      <a:r>
-                        <a:t>112.6</a:t>
-                      </a:r>
-                    </a:p>
-                  </a:txBody>
-                  <a:tcPr/>
-                </a:tc>
-                <a:tc>
-                  <a:txBody>
-                    <a:bodyPr/>
-                    <a:lstStyle/>
-                    <a:p>
-                      <a:pPr>
-                        <a:defRPr sz="1100"/>
-                      </a:pPr>
-                      <a:r>
-                        <a:t>0.83</a:t>
+                        <a:t>29.99</a:t>
+                      </a:r>
+                    </a:p>
+                  </a:txBody>
+                  <a:tcPr/>
+                </a:tc>
+                <a:tc>
+                  <a:txBody>
+                    <a:bodyPr/>
+                    <a:lstStyle/>
+                    <a:p>
+                      <a:pPr>
+                        <a:defRPr sz="1100"/>
+                      </a:pPr>
+                      <a:r>
+                        <a:t>114.86</a:t>
+                      </a:r>
+                    </a:p>
+                  </a:txBody>
+                  <a:tcPr/>
+                </a:tc>
+                <a:tc>
+                  <a:txBody>
+                    <a:bodyPr/>
+                    <a:lstStyle/>
+                    <a:p>
+                      <a:pPr>
+                        <a:defRPr sz="1100"/>
+                      </a:pPr>
+                      <a:r>
+                        <a:t>3.09</a:t>
                       </a:r>
                     </a:p>
                   </a:txBody>
@@ -3913,37 +3913,37 @@
                         <a:defRPr sz="1100"/>
                       </a:pPr>
                       <a:r>
-                        <a:t>85.91</a:t>
-                      </a:r>
-                    </a:p>
-                  </a:txBody>
-                  <a:tcPr/>
-                </a:tc>
-                <a:tc>
-                  <a:txBody>
-                    <a:bodyPr/>
-                    <a:lstStyle/>
-                    <a:p>
-                      <a:pPr>
-                        <a:defRPr sz="1100"/>
-                      </a:pPr>
-                      <a:r>
-                        <a:t>38.66</a:t>
-                      </a:r>
-                    </a:p>
-                  </a:txBody>
-                  <a:tcPr/>
-                </a:tc>
-                <a:tc>
-                  <a:txBody>
-                    <a:bodyPr/>
-                    <a:lstStyle/>
-                    <a:p>
-                      <a:pPr>
-                        <a:defRPr sz="1100"/>
-                      </a:pPr>
-                      <a:r>
-                        <a:t>0.28</a:t>
+                        <a:t>87.48</a:t>
+                      </a:r>
+                    </a:p>
+                  </a:txBody>
+                  <a:tcPr/>
+                </a:tc>
+                <a:tc>
+                  <a:txBody>
+                    <a:bodyPr/>
+                    <a:lstStyle/>
+                    <a:p>
+                      <a:pPr>
+                        <a:defRPr sz="1100"/>
+                      </a:pPr>
+                      <a:r>
+                        <a:t>39.37</a:t>
+                      </a:r>
+                    </a:p>
+                  </a:txBody>
+                  <a:tcPr/>
+                </a:tc>
+                <a:tc>
+                  <a:txBody>
+                    <a:bodyPr/>
+                    <a:lstStyle/>
+                    <a:p>
+                      <a:pPr>
+                        <a:defRPr sz="1100"/>
+                      </a:pPr>
+                      <a:r>
+                        <a:t>0.99</a:t>
                       </a:r>
                     </a:p>
                   </a:txBody>
@@ -4005,37 +4005,37 @@
                         <a:defRPr sz="1100"/>
                       </a:pPr>
                       <a:r>
-                        <a:t>9.61</a:t>
-                      </a:r>
-                    </a:p>
-                  </a:txBody>
-                  <a:tcPr/>
-                </a:tc>
-                <a:tc>
-                  <a:txBody>
-                    <a:bodyPr/>
-                    <a:lstStyle/>
-                    <a:p>
-                      <a:pPr>
-                        <a:defRPr sz="1100"/>
-                      </a:pPr>
-                      <a:r>
-                        <a:t>9.13</a:t>
-                      </a:r>
-                    </a:p>
-                  </a:txBody>
-                  <a:tcPr/>
-                </a:tc>
-                <a:tc>
-                  <a:txBody>
-                    <a:bodyPr/>
-                    <a:lstStyle/>
-                    <a:p>
-                      <a:pPr>
-                        <a:defRPr sz="1100"/>
-                      </a:pPr>
-                      <a:r>
-                        <a:t>-0.82</a:t>
+                        <a:t>9.85</a:t>
+                      </a:r>
+                    </a:p>
+                  </a:txBody>
+                  <a:tcPr/>
+                </a:tc>
+                <a:tc>
+                  <a:txBody>
+                    <a:bodyPr/>
+                    <a:lstStyle/>
+                    <a:p>
+                      <a:pPr>
+                        <a:defRPr sz="1100"/>
+                      </a:pPr>
+                      <a:r>
+                        <a:t>9.36</a:t>
+                      </a:r>
+                    </a:p>
+                  </a:txBody>
+                  <a:tcPr/>
+                </a:tc>
+                <a:tc>
+                  <a:txBody>
+                    <a:bodyPr/>
+                    <a:lstStyle/>
+                    <a:p>
+                      <a:pPr>
+                        <a:defRPr sz="1100"/>
+                      </a:pPr>
+                      <a:r>
+                        <a:t>-0.59</a:t>
                       </a:r>
                     </a:p>
                   </a:txBody>
@@ -4097,37 +4097,37 @@
                         <a:defRPr sz="1100"/>
                       </a:pPr>
                       <a:r>
-                        <a:t>15.14</a:t>
-                      </a:r>
-                    </a:p>
-                  </a:txBody>
-                  <a:tcPr/>
-                </a:tc>
-                <a:tc>
-                  <a:txBody>
-                    <a:bodyPr/>
-                    <a:lstStyle/>
-                    <a:p>
-                      <a:pPr>
-                        <a:defRPr sz="1100"/>
-                      </a:pPr>
-                      <a:r>
-                        <a:t>7.57</a:t>
-                      </a:r>
-                    </a:p>
-                  </a:txBody>
-                  <a:tcPr/>
-                </a:tc>
-                <a:tc>
-                  <a:txBody>
-                    <a:bodyPr/>
-                    <a:lstStyle/>
-                    <a:p>
-                      <a:pPr>
-                        <a:defRPr sz="1100"/>
-                      </a:pPr>
-                      <a:r>
-                        <a:t>-1.19</a:t>
+                        <a:t>15.42</a:t>
+                      </a:r>
+                    </a:p>
+                  </a:txBody>
+                  <a:tcPr/>
+                </a:tc>
+                <a:tc>
+                  <a:txBody>
+                    <a:bodyPr/>
+                    <a:lstStyle/>
+                    <a:p>
+                      <a:pPr>
+                        <a:defRPr sz="1100"/>
+                      </a:pPr>
+                      <a:r>
+                        <a:t>7.71</a:t>
+                      </a:r>
+                    </a:p>
+                  </a:txBody>
+                  <a:tcPr/>
+                </a:tc>
+                <a:tc>
+                  <a:txBody>
+                    <a:bodyPr/>
+                    <a:lstStyle/>
+                    <a:p>
+                      <a:pPr>
+                        <a:defRPr sz="1100"/>
+                      </a:pPr>
+                      <a:r>
+                        <a:t>-1.05</a:t>
                       </a:r>
                     </a:p>
                   </a:txBody>
@@ -4189,37 +4189,37 @@
                         <a:defRPr sz="1100"/>
                       </a:pPr>
                       <a:r>
-                        <a:t>24.92</a:t>
-                      </a:r>
-                    </a:p>
-                  </a:txBody>
-                  <a:tcPr/>
-                </a:tc>
-                <a:tc>
-                  <a:txBody>
-                    <a:bodyPr/>
-                    <a:lstStyle/>
-                    <a:p>
-                      <a:pPr>
-                        <a:defRPr sz="1100"/>
-                      </a:pPr>
-                      <a:r>
-                        <a:t>15.2</a:t>
-                      </a:r>
-                    </a:p>
-                  </a:txBody>
-                  <a:tcPr/>
-                </a:tc>
-                <a:tc>
-                  <a:txBody>
-                    <a:bodyPr/>
-                    <a:lstStyle/>
-                    <a:p>
-                      <a:pPr>
-                        <a:defRPr sz="1100"/>
-                      </a:pPr>
-                      <a:r>
-                        <a:t>-6.68</a:t>
+                        <a:t>23.15</a:t>
+                      </a:r>
+                    </a:p>
+                  </a:txBody>
+                  <a:tcPr/>
+                </a:tc>
+                <a:tc>
+                  <a:txBody>
+                    <a:bodyPr/>
+                    <a:lstStyle/>
+                    <a:p>
+                      <a:pPr>
+                        <a:defRPr sz="1100"/>
+                      </a:pPr>
+                      <a:r>
+                        <a:t>14.12</a:t>
+                      </a:r>
+                    </a:p>
+                  </a:txBody>
+                  <a:tcPr/>
+                </a:tc>
+                <a:tc>
+                  <a:txBody>
+                    <a:bodyPr/>
+                    <a:lstStyle/>
+                    <a:p>
+                      <a:pPr>
+                        <a:defRPr sz="1100"/>
+                      </a:pPr>
+                      <a:r>
+                        <a:t>-7.76</a:t>
                       </a:r>
                     </a:p>
                   </a:txBody>
@@ -4281,37 +4281,37 @@
                         <a:defRPr sz="1100"/>
                       </a:pPr>
                       <a:r>
-                        <a:t>143.0</a:t>
-                      </a:r>
-                    </a:p>
-                  </a:txBody>
-                  <a:tcPr/>
-                </a:tc>
-                <a:tc>
-                  <a:txBody>
-                    <a:bodyPr/>
-                    <a:lstStyle/>
-                    <a:p>
-                      <a:pPr>
-                        <a:defRPr sz="1100"/>
-                      </a:pPr>
-                      <a:r>
-                        <a:t>7.15</a:t>
-                      </a:r>
-                    </a:p>
-                  </a:txBody>
-                  <a:tcPr/>
-                </a:tc>
-                <a:tc>
-                  <a:txBody>
-                    <a:bodyPr/>
-                    <a:lstStyle/>
-                    <a:p>
-                      <a:pPr>
-                        <a:defRPr sz="1100"/>
-                      </a:pPr>
-                      <a:r>
-                        <a:t>0.31</a:t>
+                        <a:t>123.93</a:t>
+                      </a:r>
+                    </a:p>
+                  </a:txBody>
+                  <a:tcPr/>
+                </a:tc>
+                <a:tc>
+                  <a:txBody>
+                    <a:bodyPr/>
+                    <a:lstStyle/>
+                    <a:p>
+                      <a:pPr>
+                        <a:defRPr sz="1100"/>
+                      </a:pPr>
+                      <a:r>
+                        <a:t>6.2</a:t>
+                      </a:r>
+                    </a:p>
+                  </a:txBody>
+                  <a:tcPr/>
+                </a:tc>
+                <a:tc>
+                  <a:txBody>
+                    <a:bodyPr/>
+                    <a:lstStyle/>
+                    <a:p>
+                      <a:pPr>
+                        <a:defRPr sz="1100"/>
+                      </a:pPr>
+                      <a:r>
+                        <a:t>-0.64</a:t>
                       </a:r>
                     </a:p>
                   </a:txBody>
@@ -4373,37 +4373,37 @@
                         <a:defRPr sz="1100"/>
                       </a:pPr>
                       <a:r>
-                        <a:t>5.45</a:t>
-                      </a:r>
-                    </a:p>
-                  </a:txBody>
-                  <a:tcPr/>
-                </a:tc>
-                <a:tc>
-                  <a:txBody>
-                    <a:bodyPr/>
-                    <a:lstStyle/>
-                    <a:p>
-                      <a:pPr>
-                        <a:defRPr sz="1100"/>
-                      </a:pPr>
-                      <a:r>
-                        <a:t>2.73</a:t>
-                      </a:r>
-                    </a:p>
-                  </a:txBody>
-                  <a:tcPr/>
-                </a:tc>
-                <a:tc>
-                  <a:txBody>
-                    <a:bodyPr/>
-                    <a:lstStyle/>
-                    <a:p>
-                      <a:pPr>
-                        <a:defRPr sz="1100"/>
-                      </a:pPr>
-                      <a:r>
-                        <a:t>-0.94</a:t>
+                        <a:t>5.29</a:t>
+                      </a:r>
+                    </a:p>
+                  </a:txBody>
+                  <a:tcPr/>
+                </a:tc>
+                <a:tc>
+                  <a:txBody>
+                    <a:bodyPr/>
+                    <a:lstStyle/>
+                    <a:p>
+                      <a:pPr>
+                        <a:defRPr sz="1100"/>
+                      </a:pPr>
+                      <a:r>
+                        <a:t>2.65</a:t>
+                      </a:r>
+                    </a:p>
+                  </a:txBody>
+                  <a:tcPr/>
+                </a:tc>
+                <a:tc>
+                  <a:txBody>
+                    <a:bodyPr/>
+                    <a:lstStyle/>
+                    <a:p>
+                      <a:pPr>
+                        <a:defRPr sz="1100"/>
+                      </a:pPr>
+                      <a:r>
+                        <a:t>-1.02</a:t>
                       </a:r>
                     </a:p>
                   </a:txBody>
@@ -4465,22 +4465,22 @@
                         <a:defRPr sz="1100"/>
                       </a:pPr>
                       <a:r>
-                        <a:t>17.09</a:t>
-                      </a:r>
-                    </a:p>
-                  </a:txBody>
-                  <a:tcPr/>
-                </a:tc>
-                <a:tc>
-                  <a:txBody>
-                    <a:bodyPr/>
-                    <a:lstStyle/>
-                    <a:p>
-                      <a:pPr>
-                        <a:defRPr sz="1100"/>
-                      </a:pPr>
-                      <a:r>
-                        <a:t>0.85</a:t>
+                        <a:t>17.19</a:t>
+                      </a:r>
+                    </a:p>
+                  </a:txBody>
+                  <a:tcPr/>
+                </a:tc>
+                <a:tc>
+                  <a:txBody>
+                    <a:bodyPr/>
+                    <a:lstStyle/>
+                    <a:p>
+                      <a:pPr>
+                        <a:defRPr sz="1100"/>
+                      </a:pPr>
+                      <a:r>
+                        <a:t>0.86</a:t>
                       </a:r>
                     </a:p>
                   </a:txBody>
@@ -4557,37 +4557,37 @@
                         <a:defRPr sz="1100"/>
                       </a:pPr>
                       <a:r>
-                        <a:t>142.5</a:t>
-                      </a:r>
-                    </a:p>
-                  </a:txBody>
-                  <a:tcPr/>
-                </a:tc>
-                <a:tc>
-                  <a:txBody>
-                    <a:bodyPr/>
-                    <a:lstStyle/>
-                    <a:p>
-                      <a:pPr>
-                        <a:defRPr sz="1100"/>
-                      </a:pPr>
-                      <a:r>
-                        <a:t>14.25</a:t>
-                      </a:r>
-                    </a:p>
-                  </a:txBody>
-                  <a:tcPr/>
-                </a:tc>
-                <a:tc>
-                  <a:txBody>
-                    <a:bodyPr/>
-                    <a:lstStyle/>
-                    <a:p>
-                      <a:pPr>
-                        <a:defRPr sz="1100"/>
-                      </a:pPr>
-                      <a:r>
-                        <a:t>-3.51</a:t>
+                        <a:t>139.03</a:t>
+                      </a:r>
+                    </a:p>
+                  </a:txBody>
+                  <a:tcPr/>
+                </a:tc>
+                <a:tc>
+                  <a:txBody>
+                    <a:bodyPr/>
+                    <a:lstStyle/>
+                    <a:p>
+                      <a:pPr>
+                        <a:defRPr sz="1100"/>
+                      </a:pPr>
+                      <a:r>
+                        <a:t>13.9</a:t>
+                      </a:r>
+                    </a:p>
+                  </a:txBody>
+                  <a:tcPr/>
+                </a:tc>
+                <a:tc>
+                  <a:txBody>
+                    <a:bodyPr/>
+                    <a:lstStyle/>
+                    <a:p>
+                      <a:pPr>
+                        <a:defRPr sz="1100"/>
+                      </a:pPr>
+                      <a:r>
+                        <a:t>-3.86</a:t>
                       </a:r>
                     </a:p>
                   </a:txBody>
@@ -4649,37 +4649,37 @@
                         <a:defRPr sz="1100"/>
                       </a:pPr>
                       <a:r>
-                        <a:t>142.4</a:t>
-                      </a:r>
-                    </a:p>
-                  </a:txBody>
-                  <a:tcPr/>
-                </a:tc>
-                <a:tc>
-                  <a:txBody>
-                    <a:bodyPr/>
-                    <a:lstStyle/>
-                    <a:p>
-                      <a:pPr>
-                        <a:defRPr sz="1100"/>
-                      </a:pPr>
-                      <a:r>
-                        <a:t>18.51</a:t>
-                      </a:r>
-                    </a:p>
-                  </a:txBody>
-                  <a:tcPr/>
-                </a:tc>
-                <a:tc>
-                  <a:txBody>
-                    <a:bodyPr/>
-                    <a:lstStyle/>
-                    <a:p>
-                      <a:pPr>
-                        <a:defRPr sz="1100"/>
-                      </a:pPr>
-                      <a:r>
-                        <a:t>-2.04</a:t>
+                        <a:t>142.89</a:t>
+                      </a:r>
+                    </a:p>
+                  </a:txBody>
+                  <a:tcPr/>
+                </a:tc>
+                <a:tc>
+                  <a:txBody>
+                    <a:bodyPr/>
+                    <a:lstStyle/>
+                    <a:p>
+                      <a:pPr>
+                        <a:defRPr sz="1100"/>
+                      </a:pPr>
+                      <a:r>
+                        <a:t>18.58</a:t>
+                      </a:r>
+                    </a:p>
+                  </a:txBody>
+                  <a:tcPr/>
+                </a:tc>
+                <a:tc>
+                  <a:txBody>
+                    <a:bodyPr/>
+                    <a:lstStyle/>
+                    <a:p>
+                      <a:pPr>
+                        <a:defRPr sz="1100"/>
+                      </a:pPr>
+                      <a:r>
+                        <a:t>-1.97</a:t>
                       </a:r>
                     </a:p>
                   </a:txBody>
@@ -4741,37 +4741,37 @@
                         <a:defRPr sz="1100"/>
                       </a:pPr>
                       <a:r>
-                        <a:t>39.6</a:t>
-                      </a:r>
-                    </a:p>
-                  </a:txBody>
-                  <a:tcPr/>
-                </a:tc>
-                <a:tc>
-                  <a:txBody>
-                    <a:bodyPr/>
-                    <a:lstStyle/>
-                    <a:p>
-                      <a:pPr>
-                        <a:defRPr sz="1100"/>
-                      </a:pPr>
-                      <a:r>
-                        <a:t>3.96</a:t>
-                      </a:r>
-                    </a:p>
-                  </a:txBody>
-                  <a:tcPr/>
-                </a:tc>
-                <a:tc>
-                  <a:txBody>
-                    <a:bodyPr/>
-                    <a:lstStyle/>
-                    <a:p>
-                      <a:pPr>
-                        <a:defRPr sz="1100"/>
-                      </a:pPr>
-                      <a:r>
-                        <a:t>-0.3</a:t>
+                        <a:t>40.0</a:t>
+                      </a:r>
+                    </a:p>
+                  </a:txBody>
+                  <a:tcPr/>
+                </a:tc>
+                <a:tc>
+                  <a:txBody>
+                    <a:bodyPr/>
+                    <a:lstStyle/>
+                    <a:p>
+                      <a:pPr>
+                        <a:defRPr sz="1100"/>
+                      </a:pPr>
+                      <a:r>
+                        <a:t>4.0</a:t>
+                      </a:r>
+                    </a:p>
+                  </a:txBody>
+                  <a:tcPr/>
+                </a:tc>
+                <a:tc>
+                  <a:txBody>
+                    <a:bodyPr/>
+                    <a:lstStyle/>
+                    <a:p>
+                      <a:pPr>
+                        <a:defRPr sz="1100"/>
+                      </a:pPr>
+                      <a:r>
+                        <a:t>-0.26</a:t>
                       </a:r>
                     </a:p>
                   </a:txBody>
@@ -4833,37 +4833,37 @@
                         <a:defRPr sz="1100"/>
                       </a:pPr>
                       <a:r>
-                        <a:t>35.81</a:t>
-                      </a:r>
-                    </a:p>
-                  </a:txBody>
-                  <a:tcPr/>
-                </a:tc>
-                <a:tc>
-                  <a:txBody>
-                    <a:bodyPr/>
-                    <a:lstStyle/>
-                    <a:p>
-                      <a:pPr>
-                        <a:defRPr sz="1100"/>
-                      </a:pPr>
-                      <a:r>
-                        <a:t>14.32</a:t>
-                      </a:r>
-                    </a:p>
-                  </a:txBody>
-                  <a:tcPr/>
-                </a:tc>
-                <a:tc>
-                  <a:txBody>
-                    <a:bodyPr/>
-                    <a:lstStyle/>
-                    <a:p>
-                      <a:pPr>
-                        <a:defRPr sz="1100"/>
-                      </a:pPr>
-                      <a:r>
-                        <a:t>-3.1</a:t>
+                        <a:t>35.0</a:t>
+                      </a:r>
+                    </a:p>
+                  </a:txBody>
+                  <a:tcPr/>
+                </a:tc>
+                <a:tc>
+                  <a:txBody>
+                    <a:bodyPr/>
+                    <a:lstStyle/>
+                    <a:p>
+                      <a:pPr>
+                        <a:defRPr sz="1100"/>
+                      </a:pPr>
+                      <a:r>
+                        <a:t>14.0</a:t>
+                      </a:r>
+                    </a:p>
+                  </a:txBody>
+                  <a:tcPr/>
+                </a:tc>
+                <a:tc>
+                  <a:txBody>
+                    <a:bodyPr/>
+                    <a:lstStyle/>
+                    <a:p>
+                      <a:pPr>
+                        <a:defRPr sz="1100"/>
+                      </a:pPr>
+                      <a:r>
+                        <a:t>-3.42</a:t>
                       </a:r>
                     </a:p>
                   </a:txBody>
@@ -4925,37 +4925,37 @@
                         <a:defRPr sz="1100"/>
                       </a:pPr>
                       <a:r>
-                        <a:t>229.14</a:t>
-                      </a:r>
-                    </a:p>
-                  </a:txBody>
-                  <a:tcPr/>
-                </a:tc>
-                <a:tc>
-                  <a:txBody>
-                    <a:bodyPr/>
-                    <a:lstStyle/>
-                    <a:p>
-                      <a:pPr>
-                        <a:defRPr sz="1100"/>
-                      </a:pPr>
-                      <a:r>
-                        <a:t>103.11</a:t>
-                      </a:r>
-                    </a:p>
-                  </a:txBody>
-                  <a:tcPr/>
-                </a:tc>
-                <a:tc>
-                  <a:txBody>
-                    <a:bodyPr/>
-                    <a:lstStyle/>
-                    <a:p>
-                      <a:pPr>
-                        <a:defRPr sz="1100"/>
-                      </a:pPr>
-                      <a:r>
-                        <a:t>-3.81</a:t>
+                        <a:t>229.07</a:t>
+                      </a:r>
+                    </a:p>
+                  </a:txBody>
+                  <a:tcPr/>
+                </a:tc>
+                <a:tc>
+                  <a:txBody>
+                    <a:bodyPr/>
+                    <a:lstStyle/>
+                    <a:p>
+                      <a:pPr>
+                        <a:defRPr sz="1100"/>
+                      </a:pPr>
+                      <a:r>
+                        <a:t>103.08</a:t>
+                      </a:r>
+                    </a:p>
+                  </a:txBody>
+                  <a:tcPr/>
+                </a:tc>
+                <a:tc>
+                  <a:txBody>
+                    <a:bodyPr/>
+                    <a:lstStyle/>
+                    <a:p>
+                      <a:pPr>
+                        <a:defRPr sz="1100"/>
+                      </a:pPr>
+                      <a:r>
+                        <a:t>-3.84</a:t>
                       </a:r>
                     </a:p>
                   </a:txBody>
@@ -5049,7 +5049,7 @@
               <a:defRPr sz="1500"/>
             </a:pPr>
             <a:r>
-              <a:t>紫金矿业（601899，有色金属）：综合73.0分；基本面优秀，具备中长期配置价值；趋势中性，观望。</a:t>
+              <a:t>紫金矿业（601899，有色金属）：综合75.5分；基本面优秀，具备中长期配置价值；趋势中性，观望。</a:t>
             </a:r>
           </a:p>
           <a:p>
@@ -5057,7 +5057,7 @@
               <a:defRPr sz="1500"/>
             </a:pPr>
             <a:r>
-              <a:t>长江电力（600900，电力）：综合72.5分；基本面优秀，具备中长期配置价值；中期趋势向上，可关注/持有。</a:t>
+              <a:t>长江电力（600900，电力）：综合74.5分；基本面优秀，具备中长期配置价值；中期趋势向上，可关注/持有。</a:t>
             </a:r>
           </a:p>
           <a:p>
@@ -5073,7 +5073,7 @@
               <a:defRPr sz="1500"/>
             </a:pPr>
             <a:r>
-              <a:t>美的集团（000333，家电）：综合67.5分；基本面优秀，具备中长期配置价值；中期趋势向上，可关注/持有。</a:t>
+              <a:t>招商银行（600036，银行）：综合71.5分；基本面优秀，具备中长期配置价值；中期趋势向上，可关注/持有。</a:t>
             </a:r>
           </a:p>
         </p:txBody>

--- a/outputs/12_中期路演.pptx
+++ b/outputs/12_中期路演.pptx
@@ -3167,7 +3167,7 @@
               <a:defRPr sz="1500"/>
             </a:pPr>
             <a:r>
-              <a:t>数据截止：2026-10-29</a:t>
+              <a:t>数据截止：2026-10-30</a:t>
             </a:r>
           </a:p>
         </p:txBody>
@@ -3255,7 +3255,7 @@
               <a:defRPr sz="1500"/>
             </a:pPr>
             <a:r>
-              <a:t>当前总资产：443.46万元</a:t>
+              <a:t>当前总资产：443.04万元</a:t>
             </a:r>
           </a:p>
           <a:p>
@@ -3263,7 +3263,7 @@
               <a:defRPr sz="1500"/>
             </a:pPr>
             <a:r>
-              <a:t>累计收益率：-11.31%</a:t>
+              <a:t>累计收益率：-11.39%</a:t>
             </a:r>
           </a:p>
           <a:p>
@@ -3271,7 +3271,7 @@
               <a:defRPr sz="1500"/>
             </a:pPr>
             <a:r>
-              <a:t>同期沪深300：-11.13%</a:t>
+              <a:t>同期沪深300：-12.28%</a:t>
             </a:r>
           </a:p>
           <a:p>
@@ -3821,37 +3821,37 @@
                         <a:defRPr sz="1100"/>
                       </a:pPr>
                       <a:r>
-                        <a:t>29.99</a:t>
-                      </a:r>
-                    </a:p>
-                  </a:txBody>
-                  <a:tcPr/>
-                </a:tc>
-                <a:tc>
-                  <a:txBody>
-                    <a:bodyPr/>
-                    <a:lstStyle/>
-                    <a:p>
-                      <a:pPr>
-                        <a:defRPr sz="1100"/>
-                      </a:pPr>
-                      <a:r>
-                        <a:t>114.86</a:t>
-                      </a:r>
-                    </a:p>
-                  </a:txBody>
-                  <a:tcPr/>
-                </a:tc>
-                <a:tc>
-                  <a:txBody>
-                    <a:bodyPr/>
-                    <a:lstStyle/>
-                    <a:p>
-                      <a:pPr>
-                        <a:defRPr sz="1100"/>
-                      </a:pPr>
-                      <a:r>
-                        <a:t>3.09</a:t>
+                        <a:t>29.74</a:t>
+                      </a:r>
+                    </a:p>
+                  </a:txBody>
+                  <a:tcPr/>
+                </a:tc>
+                <a:tc>
+                  <a:txBody>
+                    <a:bodyPr/>
+                    <a:lstStyle/>
+                    <a:p>
+                      <a:pPr>
+                        <a:defRPr sz="1100"/>
+                      </a:pPr>
+                      <a:r>
+                        <a:t>113.9</a:t>
+                      </a:r>
+                    </a:p>
+                  </a:txBody>
+                  <a:tcPr/>
+                </a:tc>
+                <a:tc>
+                  <a:txBody>
+                    <a:bodyPr/>
+                    <a:lstStyle/>
+                    <a:p>
+                      <a:pPr>
+                        <a:defRPr sz="1100"/>
+                      </a:pPr>
+                      <a:r>
+                        <a:t>2.13</a:t>
                       </a:r>
                     </a:p>
                   </a:txBody>
@@ -3913,37 +3913,37 @@
                         <a:defRPr sz="1100"/>
                       </a:pPr>
                       <a:r>
-                        <a:t>87.48</a:t>
-                      </a:r>
-                    </a:p>
-                  </a:txBody>
-                  <a:tcPr/>
-                </a:tc>
-                <a:tc>
-                  <a:txBody>
-                    <a:bodyPr/>
-                    <a:lstStyle/>
-                    <a:p>
-                      <a:pPr>
-                        <a:defRPr sz="1100"/>
-                      </a:pPr>
-                      <a:r>
-                        <a:t>39.37</a:t>
-                      </a:r>
-                    </a:p>
-                  </a:txBody>
-                  <a:tcPr/>
-                </a:tc>
-                <a:tc>
-                  <a:txBody>
-                    <a:bodyPr/>
-                    <a:lstStyle/>
-                    <a:p>
-                      <a:pPr>
-                        <a:defRPr sz="1100"/>
-                      </a:pPr>
-                      <a:r>
-                        <a:t>0.99</a:t>
+                        <a:t>89.18</a:t>
+                      </a:r>
+                    </a:p>
+                  </a:txBody>
+                  <a:tcPr/>
+                </a:tc>
+                <a:tc>
+                  <a:txBody>
+                    <a:bodyPr/>
+                    <a:lstStyle/>
+                    <a:p>
+                      <a:pPr>
+                        <a:defRPr sz="1100"/>
+                      </a:pPr>
+                      <a:r>
+                        <a:t>40.13</a:t>
+                      </a:r>
+                    </a:p>
+                  </a:txBody>
+                  <a:tcPr/>
+                </a:tc>
+                <a:tc>
+                  <a:txBody>
+                    <a:bodyPr/>
+                    <a:lstStyle/>
+                    <a:p>
+                      <a:pPr>
+                        <a:defRPr sz="1100"/>
+                      </a:pPr>
+                      <a:r>
+                        <a:t>1.76</a:t>
                       </a:r>
                     </a:p>
                   </a:txBody>
@@ -4005,37 +4005,37 @@
                         <a:defRPr sz="1100"/>
                       </a:pPr>
                       <a:r>
-                        <a:t>9.85</a:t>
-                      </a:r>
-                    </a:p>
-                  </a:txBody>
-                  <a:tcPr/>
-                </a:tc>
-                <a:tc>
-                  <a:txBody>
-                    <a:bodyPr/>
-                    <a:lstStyle/>
-                    <a:p>
-                      <a:pPr>
-                        <a:defRPr sz="1100"/>
-                      </a:pPr>
-                      <a:r>
-                        <a:t>9.36</a:t>
-                      </a:r>
-                    </a:p>
-                  </a:txBody>
-                  <a:tcPr/>
-                </a:tc>
-                <a:tc>
-                  <a:txBody>
-                    <a:bodyPr/>
-                    <a:lstStyle/>
-                    <a:p>
-                      <a:pPr>
-                        <a:defRPr sz="1100"/>
-                      </a:pPr>
-                      <a:r>
-                        <a:t>-0.59</a:t>
+                        <a:t>9.77</a:t>
+                      </a:r>
+                    </a:p>
+                  </a:txBody>
+                  <a:tcPr/>
+                </a:tc>
+                <a:tc>
+                  <a:txBody>
+                    <a:bodyPr/>
+                    <a:lstStyle/>
+                    <a:p>
+                      <a:pPr>
+                        <a:defRPr sz="1100"/>
+                      </a:pPr>
+                      <a:r>
+                        <a:t>9.28</a:t>
+                      </a:r>
+                    </a:p>
+                  </a:txBody>
+                  <a:tcPr/>
+                </a:tc>
+                <a:tc>
+                  <a:txBody>
+                    <a:bodyPr/>
+                    <a:lstStyle/>
+                    <a:p>
+                      <a:pPr>
+                        <a:defRPr sz="1100"/>
+                      </a:pPr>
+                      <a:r>
+                        <a:t>-0.67</a:t>
                       </a:r>
                     </a:p>
                   </a:txBody>
@@ -4097,37 +4097,37 @@
                         <a:defRPr sz="1100"/>
                       </a:pPr>
                       <a:r>
-                        <a:t>15.42</a:t>
-                      </a:r>
-                    </a:p>
-                  </a:txBody>
-                  <a:tcPr/>
-                </a:tc>
-                <a:tc>
-                  <a:txBody>
-                    <a:bodyPr/>
-                    <a:lstStyle/>
-                    <a:p>
-                      <a:pPr>
-                        <a:defRPr sz="1100"/>
-                      </a:pPr>
-                      <a:r>
-                        <a:t>7.71</a:t>
-                      </a:r>
-                    </a:p>
-                  </a:txBody>
-                  <a:tcPr/>
-                </a:tc>
-                <a:tc>
-                  <a:txBody>
-                    <a:bodyPr/>
-                    <a:lstStyle/>
-                    <a:p>
-                      <a:pPr>
-                        <a:defRPr sz="1100"/>
-                      </a:pPr>
-                      <a:r>
-                        <a:t>-1.05</a:t>
+                        <a:t>15.02</a:t>
+                      </a:r>
+                    </a:p>
+                  </a:txBody>
+                  <a:tcPr/>
+                </a:tc>
+                <a:tc>
+                  <a:txBody>
+                    <a:bodyPr/>
+                    <a:lstStyle/>
+                    <a:p>
+                      <a:pPr>
+                        <a:defRPr sz="1100"/>
+                      </a:pPr>
+                      <a:r>
+                        <a:t>7.51</a:t>
+                      </a:r>
+                    </a:p>
+                  </a:txBody>
+                  <a:tcPr/>
+                </a:tc>
+                <a:tc>
+                  <a:txBody>
+                    <a:bodyPr/>
+                    <a:lstStyle/>
+                    <a:p>
+                      <a:pPr>
+                        <a:defRPr sz="1100"/>
+                      </a:pPr>
+                      <a:r>
+                        <a:t>-1.25</a:t>
                       </a:r>
                     </a:p>
                   </a:txBody>
@@ -4189,37 +4189,37 @@
                         <a:defRPr sz="1100"/>
                       </a:pPr>
                       <a:r>
-                        <a:t>23.15</a:t>
-                      </a:r>
-                    </a:p>
-                  </a:txBody>
-                  <a:tcPr/>
-                </a:tc>
-                <a:tc>
-                  <a:txBody>
-                    <a:bodyPr/>
-                    <a:lstStyle/>
-                    <a:p>
-                      <a:pPr>
-                        <a:defRPr sz="1100"/>
-                      </a:pPr>
-                      <a:r>
-                        <a:t>14.12</a:t>
-                      </a:r>
-                    </a:p>
-                  </a:txBody>
-                  <a:tcPr/>
-                </a:tc>
-                <a:tc>
-                  <a:txBody>
-                    <a:bodyPr/>
-                    <a:lstStyle/>
-                    <a:p>
-                      <a:pPr>
-                        <a:defRPr sz="1100"/>
-                      </a:pPr>
-                      <a:r>
-                        <a:t>-7.76</a:t>
+                        <a:t>21.62</a:t>
+                      </a:r>
+                    </a:p>
+                  </a:txBody>
+                  <a:tcPr/>
+                </a:tc>
+                <a:tc>
+                  <a:txBody>
+                    <a:bodyPr/>
+                    <a:lstStyle/>
+                    <a:p>
+                      <a:pPr>
+                        <a:defRPr sz="1100"/>
+                      </a:pPr>
+                      <a:r>
+                        <a:t>13.19</a:t>
+                      </a:r>
+                    </a:p>
+                  </a:txBody>
+                  <a:tcPr/>
+                </a:tc>
+                <a:tc>
+                  <a:txBody>
+                    <a:bodyPr/>
+                    <a:lstStyle/>
+                    <a:p>
+                      <a:pPr>
+                        <a:defRPr sz="1100"/>
+                      </a:pPr>
+                      <a:r>
+                        <a:t>-8.69</a:t>
                       </a:r>
                     </a:p>
                   </a:txBody>
@@ -4281,37 +4281,37 @@
                         <a:defRPr sz="1100"/>
                       </a:pPr>
                       <a:r>
-                        <a:t>123.93</a:t>
-                      </a:r>
-                    </a:p>
-                  </a:txBody>
-                  <a:tcPr/>
-                </a:tc>
-                <a:tc>
-                  <a:txBody>
-                    <a:bodyPr/>
-                    <a:lstStyle/>
-                    <a:p>
-                      <a:pPr>
-                        <a:defRPr sz="1100"/>
-                      </a:pPr>
-                      <a:r>
-                        <a:t>6.2</a:t>
-                      </a:r>
-                    </a:p>
-                  </a:txBody>
-                  <a:tcPr/>
-                </a:tc>
-                <a:tc>
-                  <a:txBody>
-                    <a:bodyPr/>
-                    <a:lstStyle/>
-                    <a:p>
-                      <a:pPr>
-                        <a:defRPr sz="1100"/>
-                      </a:pPr>
-                      <a:r>
-                        <a:t>-0.64</a:t>
+                        <a:t>122.75</a:t>
+                      </a:r>
+                    </a:p>
+                  </a:txBody>
+                  <a:tcPr/>
+                </a:tc>
+                <a:tc>
+                  <a:txBody>
+                    <a:bodyPr/>
+                    <a:lstStyle/>
+                    <a:p>
+                      <a:pPr>
+                        <a:defRPr sz="1100"/>
+                      </a:pPr>
+                      <a:r>
+                        <a:t>6.14</a:t>
+                      </a:r>
+                    </a:p>
+                  </a:txBody>
+                  <a:tcPr/>
+                </a:tc>
+                <a:tc>
+                  <a:txBody>
+                    <a:bodyPr/>
+                    <a:lstStyle/>
+                    <a:p>
+                      <a:pPr>
+                        <a:defRPr sz="1100"/>
+                      </a:pPr>
+                      <a:r>
+                        <a:t>-0.7</a:t>
                       </a:r>
                     </a:p>
                   </a:txBody>
@@ -4373,37 +4373,37 @@
                         <a:defRPr sz="1100"/>
                       </a:pPr>
                       <a:r>
-                        <a:t>5.29</a:t>
-                      </a:r>
-                    </a:p>
-                  </a:txBody>
-                  <a:tcPr/>
-                </a:tc>
-                <a:tc>
-                  <a:txBody>
-                    <a:bodyPr/>
-                    <a:lstStyle/>
-                    <a:p>
-                      <a:pPr>
-                        <a:defRPr sz="1100"/>
-                      </a:pPr>
-                      <a:r>
-                        <a:t>2.65</a:t>
-                      </a:r>
-                    </a:p>
-                  </a:txBody>
-                  <a:tcPr/>
-                </a:tc>
-                <a:tc>
-                  <a:txBody>
-                    <a:bodyPr/>
-                    <a:lstStyle/>
-                    <a:p>
-                      <a:pPr>
-                        <a:defRPr sz="1100"/>
-                      </a:pPr>
-                      <a:r>
-                        <a:t>-1.02</a:t>
+                        <a:t>5.55</a:t>
+                      </a:r>
+                    </a:p>
+                  </a:txBody>
+                  <a:tcPr/>
+                </a:tc>
+                <a:tc>
+                  <a:txBody>
+                    <a:bodyPr/>
+                    <a:lstStyle/>
+                    <a:p>
+                      <a:pPr>
+                        <a:defRPr sz="1100"/>
+                      </a:pPr>
+                      <a:r>
+                        <a:t>2.77</a:t>
+                      </a:r>
+                    </a:p>
+                  </a:txBody>
+                  <a:tcPr/>
+                </a:tc>
+                <a:tc>
+                  <a:txBody>
+                    <a:bodyPr/>
+                    <a:lstStyle/>
+                    <a:p>
+                      <a:pPr>
+                        <a:defRPr sz="1100"/>
+                      </a:pPr>
+                      <a:r>
+                        <a:t>-0.89</a:t>
                       </a:r>
                     </a:p>
                   </a:txBody>
@@ -4465,37 +4465,37 @@
                         <a:defRPr sz="1100"/>
                       </a:pPr>
                       <a:r>
-                        <a:t>17.19</a:t>
-                      </a:r>
-                    </a:p>
-                  </a:txBody>
-                  <a:tcPr/>
-                </a:tc>
-                <a:tc>
-                  <a:txBody>
-                    <a:bodyPr/>
-                    <a:lstStyle/>
-                    <a:p>
-                      <a:pPr>
-                        <a:defRPr sz="1100"/>
-                      </a:pPr>
-                      <a:r>
-                        <a:t>0.86</a:t>
-                      </a:r>
-                    </a:p>
-                  </a:txBody>
-                  <a:tcPr/>
-                </a:tc>
-                <a:tc>
-                  <a:txBody>
-                    <a:bodyPr/>
-                    <a:lstStyle/>
-                    <a:p>
-                      <a:pPr>
-                        <a:defRPr sz="1100"/>
-                      </a:pPr>
-                      <a:r>
-                        <a:t>-0.18</a:t>
+                        <a:t>17.71</a:t>
+                      </a:r>
+                    </a:p>
+                  </a:txBody>
+                  <a:tcPr/>
+                </a:tc>
+                <a:tc>
+                  <a:txBody>
+                    <a:bodyPr/>
+                    <a:lstStyle/>
+                    <a:p>
+                      <a:pPr>
+                        <a:defRPr sz="1100"/>
+                      </a:pPr>
+                      <a:r>
+                        <a:t>0.89</a:t>
+                      </a:r>
+                    </a:p>
+                  </a:txBody>
+                  <a:tcPr/>
+                </a:tc>
+                <a:tc>
+                  <a:txBody>
+                    <a:bodyPr/>
+                    <a:lstStyle/>
+                    <a:p>
+                      <a:pPr>
+                        <a:defRPr sz="1100"/>
+                      </a:pPr>
+                      <a:r>
+                        <a:t>-0.15</a:t>
                       </a:r>
                     </a:p>
                   </a:txBody>
@@ -4557,37 +4557,37 @@
                         <a:defRPr sz="1100"/>
                       </a:pPr>
                       <a:r>
-                        <a:t>139.03</a:t>
-                      </a:r>
-                    </a:p>
-                  </a:txBody>
-                  <a:tcPr/>
-                </a:tc>
-                <a:tc>
-                  <a:txBody>
-                    <a:bodyPr/>
-                    <a:lstStyle/>
-                    <a:p>
-                      <a:pPr>
-                        <a:defRPr sz="1100"/>
-                      </a:pPr>
-                      <a:r>
-                        <a:t>13.9</a:t>
-                      </a:r>
-                    </a:p>
-                  </a:txBody>
-                  <a:tcPr/>
-                </a:tc>
-                <a:tc>
-                  <a:txBody>
-                    <a:bodyPr/>
-                    <a:lstStyle/>
-                    <a:p>
-                      <a:pPr>
-                        <a:defRPr sz="1100"/>
-                      </a:pPr>
-                      <a:r>
-                        <a:t>-3.86</a:t>
+                        <a:t>138.5</a:t>
+                      </a:r>
+                    </a:p>
+                  </a:txBody>
+                  <a:tcPr/>
+                </a:tc>
+                <a:tc>
+                  <a:txBody>
+                    <a:bodyPr/>
+                    <a:lstStyle/>
+                    <a:p>
+                      <a:pPr>
+                        <a:defRPr sz="1100"/>
+                      </a:pPr>
+                      <a:r>
+                        <a:t>13.85</a:t>
+                      </a:r>
+                    </a:p>
+                  </a:txBody>
+                  <a:tcPr/>
+                </a:tc>
+                <a:tc>
+                  <a:txBody>
+                    <a:bodyPr/>
+                    <a:lstStyle/>
+                    <a:p>
+                      <a:pPr>
+                        <a:defRPr sz="1100"/>
+                      </a:pPr>
+                      <a:r>
+                        <a:t>-3.91</a:t>
                       </a:r>
                     </a:p>
                   </a:txBody>
@@ -4649,37 +4649,37 @@
                         <a:defRPr sz="1100"/>
                       </a:pPr>
                       <a:r>
-                        <a:t>142.89</a:t>
-                      </a:r>
-                    </a:p>
-                  </a:txBody>
-                  <a:tcPr/>
-                </a:tc>
-                <a:tc>
-                  <a:txBody>
-                    <a:bodyPr/>
-                    <a:lstStyle/>
-                    <a:p>
-                      <a:pPr>
-                        <a:defRPr sz="1100"/>
-                      </a:pPr>
-                      <a:r>
-                        <a:t>18.58</a:t>
-                      </a:r>
-                    </a:p>
-                  </a:txBody>
-                  <a:tcPr/>
-                </a:tc>
-                <a:tc>
-                  <a:txBody>
-                    <a:bodyPr/>
-                    <a:lstStyle/>
-                    <a:p>
-                      <a:pPr>
-                        <a:defRPr sz="1100"/>
-                      </a:pPr>
-                      <a:r>
-                        <a:t>-1.97</a:t>
+                        <a:t>142.01</a:t>
+                      </a:r>
+                    </a:p>
+                  </a:txBody>
+                  <a:tcPr/>
+                </a:tc>
+                <a:tc>
+                  <a:txBody>
+                    <a:bodyPr/>
+                    <a:lstStyle/>
+                    <a:p>
+                      <a:pPr>
+                        <a:defRPr sz="1100"/>
+                      </a:pPr>
+                      <a:r>
+                        <a:t>18.46</a:t>
+                      </a:r>
+                    </a:p>
+                  </a:txBody>
+                  <a:tcPr/>
+                </a:tc>
+                <a:tc>
+                  <a:txBody>
+                    <a:bodyPr/>
+                    <a:lstStyle/>
+                    <a:p>
+                      <a:pPr>
+                        <a:defRPr sz="1100"/>
+                      </a:pPr>
+                      <a:r>
+                        <a:t>-2.09</a:t>
                       </a:r>
                     </a:p>
                   </a:txBody>
@@ -4741,37 +4741,37 @@
                         <a:defRPr sz="1100"/>
                       </a:pPr>
                       <a:r>
-                        <a:t>40.0</a:t>
-                      </a:r>
-                    </a:p>
-                  </a:txBody>
-                  <a:tcPr/>
-                </a:tc>
-                <a:tc>
-                  <a:txBody>
-                    <a:bodyPr/>
-                    <a:lstStyle/>
-                    <a:p>
-                      <a:pPr>
-                        <a:defRPr sz="1100"/>
-                      </a:pPr>
-                      <a:r>
-                        <a:t>4.0</a:t>
-                      </a:r>
-                    </a:p>
-                  </a:txBody>
-                  <a:tcPr/>
-                </a:tc>
-                <a:tc>
-                  <a:txBody>
-                    <a:bodyPr/>
-                    <a:lstStyle/>
-                    <a:p>
-                      <a:pPr>
-                        <a:defRPr sz="1100"/>
-                      </a:pPr>
-                      <a:r>
-                        <a:t>-0.26</a:t>
+                        <a:t>41.37</a:t>
+                      </a:r>
+                    </a:p>
+                  </a:txBody>
+                  <a:tcPr/>
+                </a:tc>
+                <a:tc>
+                  <a:txBody>
+                    <a:bodyPr/>
+                    <a:lstStyle/>
+                    <a:p>
+                      <a:pPr>
+                        <a:defRPr sz="1100"/>
+                      </a:pPr>
+                      <a:r>
+                        <a:t>4.14</a:t>
+                      </a:r>
+                    </a:p>
+                  </a:txBody>
+                  <a:tcPr/>
+                </a:tc>
+                <a:tc>
+                  <a:txBody>
+                    <a:bodyPr/>
+                    <a:lstStyle/>
+                    <a:p>
+                      <a:pPr>
+                        <a:defRPr sz="1100"/>
+                      </a:pPr>
+                      <a:r>
+                        <a:t>-0.13</a:t>
                       </a:r>
                     </a:p>
                   </a:txBody>
@@ -4833,37 +4833,37 @@
                         <a:defRPr sz="1100"/>
                       </a:pPr>
                       <a:r>
-                        <a:t>35.0</a:t>
-                      </a:r>
-                    </a:p>
-                  </a:txBody>
-                  <a:tcPr/>
-                </a:tc>
-                <a:tc>
-                  <a:txBody>
-                    <a:bodyPr/>
-                    <a:lstStyle/>
-                    <a:p>
-                      <a:pPr>
-                        <a:defRPr sz="1100"/>
-                      </a:pPr>
-                      <a:r>
-                        <a:t>14.0</a:t>
-                      </a:r>
-                    </a:p>
-                  </a:txBody>
-                  <a:tcPr/>
-                </a:tc>
-                <a:tc>
-                  <a:txBody>
-                    <a:bodyPr/>
-                    <a:lstStyle/>
-                    <a:p>
-                      <a:pPr>
-                        <a:defRPr sz="1100"/>
-                      </a:pPr>
-                      <a:r>
-                        <a:t>-3.42</a:t>
+                        <a:t>32.97</a:t>
+                      </a:r>
+                    </a:p>
+                  </a:txBody>
+                  <a:tcPr/>
+                </a:tc>
+                <a:tc>
+                  <a:txBody>
+                    <a:bodyPr/>
+                    <a:lstStyle/>
+                    <a:p>
+                      <a:pPr>
+                        <a:defRPr sz="1100"/>
+                      </a:pPr>
+                      <a:r>
+                        <a:t>13.19</a:t>
+                      </a:r>
+                    </a:p>
+                  </a:txBody>
+                  <a:tcPr/>
+                </a:tc>
+                <a:tc>
+                  <a:txBody>
+                    <a:bodyPr/>
+                    <a:lstStyle/>
+                    <a:p>
+                      <a:pPr>
+                        <a:defRPr sz="1100"/>
+                      </a:pPr>
+                      <a:r>
+                        <a:t>-4.24</a:t>
                       </a:r>
                     </a:p>
                   </a:txBody>
@@ -4925,37 +4925,37 @@
                         <a:defRPr sz="1100"/>
                       </a:pPr>
                       <a:r>
-                        <a:t>229.07</a:t>
-                      </a:r>
-                    </a:p>
-                  </a:txBody>
-                  <a:tcPr/>
-                </a:tc>
-                <a:tc>
-                  <a:txBody>
-                    <a:bodyPr/>
-                    <a:lstStyle/>
-                    <a:p>
-                      <a:pPr>
-                        <a:defRPr sz="1100"/>
-                      </a:pPr>
-                      <a:r>
-                        <a:t>103.08</a:t>
-                      </a:r>
-                    </a:p>
-                  </a:txBody>
-                  <a:tcPr/>
-                </a:tc>
-                <a:tc>
-                  <a:txBody>
-                    <a:bodyPr/>
-                    <a:lstStyle/>
-                    <a:p>
-                      <a:pPr>
-                        <a:defRPr sz="1100"/>
-                      </a:pPr>
-                      <a:r>
-                        <a:t>-3.84</a:t>
+                        <a:t>232.92</a:t>
+                      </a:r>
+                    </a:p>
+                  </a:txBody>
+                  <a:tcPr/>
+                </a:tc>
+                <a:tc>
+                  <a:txBody>
+                    <a:bodyPr/>
+                    <a:lstStyle/>
+                    <a:p>
+                      <a:pPr>
+                        <a:defRPr sz="1100"/>
+                      </a:pPr>
+                      <a:r>
+                        <a:t>104.81</a:t>
+                      </a:r>
+                    </a:p>
+                  </a:txBody>
+                  <a:tcPr/>
+                </a:tc>
+                <a:tc>
+                  <a:txBody>
+                    <a:bodyPr/>
+                    <a:lstStyle/>
+                    <a:p>
+                      <a:pPr>
+                        <a:defRPr sz="1100"/>
+                      </a:pPr>
+                      <a:r>
+                        <a:t>-2.11</a:t>
                       </a:r>
                     </a:p>
                   </a:txBody>
@@ -5041,7 +5041,7 @@
               <a:defRPr sz="1500"/>
             </a:pPr>
             <a:r>
-              <a:t>宁德时代（300750，新能源电池）：综合76.5分；基本面优秀，具备中长期配置价值；趋势中性，观望。</a:t>
+              <a:t>招商银行（600036，银行）：综合82.0分；基本面优秀，具备中长期配置价值；中期趋势向上，可关注/持有。</a:t>
             </a:r>
           </a:p>
           <a:p>
@@ -5057,7 +5057,7 @@
               <a:defRPr sz="1500"/>
             </a:pPr>
             <a:r>
-              <a:t>长江电力（600900，电力）：综合74.5分；基本面优秀，具备中长期配置价值；中期趋势向上，可关注/持有。</a:t>
+              <a:t>宁德时代（300750，新能源电池）：综合74.0分；基本面优秀，具备中长期配置价值；趋势中性，观望。</a:t>
             </a:r>
           </a:p>
           <a:p>
@@ -5073,7 +5073,7 @@
               <a:defRPr sz="1500"/>
             </a:pPr>
             <a:r>
-              <a:t>招商银行（600036，银行）：综合71.5分；基本面优秀，具备中长期配置价值；中期趋势向上，可关注/持有。</a:t>
+              <a:t>美的集团（000333，家电）：综合71.0分；基本面优秀，具备中长期配置价值；中期趋势向上，可关注/持有。</a:t>
             </a:r>
           </a:p>
         </p:txBody>

--- a/outputs/12_中期路演.pptx
+++ b/outputs/12_中期路演.pptx
@@ -3271,7 +3271,7 @@
               <a:defRPr sz="1500"/>
             </a:pPr>
             <a:r>
-              <a:t>同期沪深300：-12.28%</a:t>
+              <a:t>同期沪深300：-12.37%</a:t>
             </a:r>
           </a:p>
           <a:p>
